--- a/figures/figures.pptx
+++ b/figures/figures.pptx
@@ -5,23 +5,28 @@
     <p:sldMasterId id="2147483648" r:id="rId1"/>
   </p:sldMasterIdLst>
   <p:notesMasterIdLst>
-    <p:notesMasterId r:id="rId16"/>
+    <p:notesMasterId r:id="rId21"/>
   </p:notesMasterIdLst>
   <p:sldIdLst>
     <p:sldId id="256" r:id="rId2"/>
     <p:sldId id="257" r:id="rId3"/>
     <p:sldId id="258" r:id="rId4"/>
-    <p:sldId id="259" r:id="rId5"/>
-    <p:sldId id="264" r:id="rId6"/>
-    <p:sldId id="268" r:id="rId7"/>
-    <p:sldId id="269" r:id="rId8"/>
-    <p:sldId id="260" r:id="rId9"/>
-    <p:sldId id="263" r:id="rId10"/>
-    <p:sldId id="261" r:id="rId11"/>
-    <p:sldId id="262" r:id="rId12"/>
-    <p:sldId id="265" r:id="rId13"/>
-    <p:sldId id="266" r:id="rId14"/>
-    <p:sldId id="267" r:id="rId15"/>
+    <p:sldId id="272" r:id="rId5"/>
+    <p:sldId id="273" r:id="rId6"/>
+    <p:sldId id="275" r:id="rId7"/>
+    <p:sldId id="274" r:id="rId8"/>
+    <p:sldId id="268" r:id="rId9"/>
+    <p:sldId id="269" r:id="rId10"/>
+    <p:sldId id="260" r:id="rId11"/>
+    <p:sldId id="263" r:id="rId12"/>
+    <p:sldId id="261" r:id="rId13"/>
+    <p:sldId id="270" r:id="rId14"/>
+    <p:sldId id="262" r:id="rId15"/>
+    <p:sldId id="265" r:id="rId16"/>
+    <p:sldId id="266" r:id="rId17"/>
+    <p:sldId id="267" r:id="rId18"/>
+    <p:sldId id="271" r:id="rId19"/>
+    <p:sldId id="276" r:id="rId20"/>
   </p:sldIdLst>
   <p:sldSz cx="12192000" cy="6858000"/>
   <p:notesSz cx="6858000" cy="9144000"/>
@@ -2907,7 +2912,7 @@
           <a:p>
             <a:fld id="{8CF8B62D-F47B-43DC-854F-884833B98021}" type="datetimeFigureOut">
               <a:rPr lang="de-DE" smtClean="0"/>
-              <a:t>14.08.2025</a:t>
+              <a:t>25.08.2025</a:t>
             </a:fld>
             <a:endParaRPr lang="de-DE"/>
           </a:p>
@@ -3240,7 +3245,7 @@
           <a:p>
             <a:fld id="{AB2C2533-D42D-4AF8-9C02-1BDA65857909}" type="slidenum">
               <a:rPr lang="de-DE" smtClean="0"/>
-              <a:t>4</a:t>
+              <a:t>10</a:t>
             </a:fld>
             <a:endParaRPr lang="de-DE"/>
           </a:p>
@@ -3249,7 +3254,7 @@
     </p:spTree>
     <p:extLst>
       <p:ext uri="{BB962C8B-B14F-4D97-AF65-F5344CB8AC3E}">
-        <p14:creationId xmlns:p14="http://schemas.microsoft.com/office/powerpoint/2010/main" val="3854859648"/>
+        <p14:creationId xmlns:p14="http://schemas.microsoft.com/office/powerpoint/2010/main" val="598521160"/>
       </p:ext>
     </p:extLst>
   </p:cSld>
@@ -3324,91 +3329,7 @@
           <a:p>
             <a:fld id="{AB2C2533-D42D-4AF8-9C02-1BDA65857909}" type="slidenum">
               <a:rPr lang="de-DE" smtClean="0"/>
-              <a:t>8</a:t>
-            </a:fld>
-            <a:endParaRPr lang="de-DE"/>
-          </a:p>
-        </p:txBody>
-      </p:sp>
-    </p:spTree>
-    <p:extLst>
-      <p:ext uri="{BB962C8B-B14F-4D97-AF65-F5344CB8AC3E}">
-        <p14:creationId xmlns:p14="http://schemas.microsoft.com/office/powerpoint/2010/main" val="598521160"/>
-      </p:ext>
-    </p:extLst>
-  </p:cSld>
-  <p:clrMapOvr>
-    <a:masterClrMapping/>
-  </p:clrMapOvr>
-</p:notes>
-</file>
-
-<file path=ppt/notesSlides/notesSlide3.xml><?xml version="1.0" encoding="utf-8"?>
-<p:notes xmlns:a="http://schemas.openxmlformats.org/drawingml/2006/main" xmlns:r="http://schemas.openxmlformats.org/officeDocument/2006/relationships" xmlns:p="http://schemas.openxmlformats.org/presentationml/2006/main">
-  <p:cSld>
-    <p:spTree>
-      <p:nvGrpSpPr>
-        <p:cNvPr id="1" name=""/>
-        <p:cNvGrpSpPr/>
-        <p:nvPr/>
-      </p:nvGrpSpPr>
-      <p:grpSpPr>
-        <a:xfrm>
-          <a:off x="0" y="0"/>
-          <a:ext cx="0" cy="0"/>
-          <a:chOff x="0" y="0"/>
-          <a:chExt cx="0" cy="0"/>
-        </a:xfrm>
-      </p:grpSpPr>
-      <p:sp>
-        <p:nvSpPr>
-          <p:cNvPr id="2" name="Slide Image Placeholder 1"/>
-          <p:cNvSpPr>
-            <a:spLocks noGrp="1" noRot="1" noChangeAspect="1"/>
-          </p:cNvSpPr>
-          <p:nvPr>
-            <p:ph type="sldImg"/>
-          </p:nvPr>
-        </p:nvSpPr>
-        <p:spPr/>
-      </p:sp>
-      <p:sp>
-        <p:nvSpPr>
-          <p:cNvPr id="3" name="Notes Placeholder 2"/>
-          <p:cNvSpPr>
-            <a:spLocks noGrp="1"/>
-          </p:cNvSpPr>
-          <p:nvPr>
-            <p:ph type="body" idx="1"/>
-          </p:nvPr>
-        </p:nvSpPr>
-        <p:spPr/>
-        <p:txBody>
-          <a:bodyPr/>
-          <a:lstStyle/>
-          <a:p>
-            <a:endParaRPr lang="de-DE" dirty="0"/>
-          </a:p>
-        </p:txBody>
-      </p:sp>
-      <p:sp>
-        <p:nvSpPr>
-          <p:cNvPr id="4" name="Slide Number Placeholder 3"/>
-          <p:cNvSpPr>
-            <a:spLocks noGrp="1"/>
-          </p:cNvSpPr>
-          <p:nvPr>
-            <p:ph type="sldNum" sz="quarter" idx="5"/>
-          </p:nvPr>
-        </p:nvSpPr>
-        <p:spPr/>
-        <p:txBody>
-          <a:bodyPr/>
-          <a:lstStyle/>
-          <a:p>
-            <a:fld id="{AB2C2533-D42D-4AF8-9C02-1BDA65857909}" type="slidenum">
-              <a:rPr lang="de-DE" smtClean="0"/>
-              <a:t>12</a:t>
+              <a:t>15</a:t>
             </a:fld>
             <a:endParaRPr lang="de-DE"/>
           </a:p>
@@ -3576,7 +3497,7 @@
           <a:p>
             <a:fld id="{3146589B-F63A-42CD-B487-02649808258F}" type="datetimeFigureOut">
               <a:rPr lang="de-DE" smtClean="0"/>
-              <a:t>14.08.2025</a:t>
+              <a:t>25.08.2025</a:t>
             </a:fld>
             <a:endParaRPr lang="de-DE"/>
           </a:p>
@@ -3776,7 +3697,7 @@
           <a:p>
             <a:fld id="{3146589B-F63A-42CD-B487-02649808258F}" type="datetimeFigureOut">
               <a:rPr lang="de-DE" smtClean="0"/>
-              <a:t>14.08.2025</a:t>
+              <a:t>25.08.2025</a:t>
             </a:fld>
             <a:endParaRPr lang="de-DE"/>
           </a:p>
@@ -3986,7 +3907,7 @@
           <a:p>
             <a:fld id="{3146589B-F63A-42CD-B487-02649808258F}" type="datetimeFigureOut">
               <a:rPr lang="de-DE" smtClean="0"/>
-              <a:t>14.08.2025</a:t>
+              <a:t>25.08.2025</a:t>
             </a:fld>
             <a:endParaRPr lang="de-DE"/>
           </a:p>
@@ -4186,7 +4107,7 @@
           <a:p>
             <a:fld id="{3146589B-F63A-42CD-B487-02649808258F}" type="datetimeFigureOut">
               <a:rPr lang="de-DE" smtClean="0"/>
-              <a:t>14.08.2025</a:t>
+              <a:t>25.08.2025</a:t>
             </a:fld>
             <a:endParaRPr lang="de-DE"/>
           </a:p>
@@ -4462,7 +4383,7 @@
           <a:p>
             <a:fld id="{3146589B-F63A-42CD-B487-02649808258F}" type="datetimeFigureOut">
               <a:rPr lang="de-DE" smtClean="0"/>
-              <a:t>14.08.2025</a:t>
+              <a:t>25.08.2025</a:t>
             </a:fld>
             <a:endParaRPr lang="de-DE"/>
           </a:p>
@@ -4730,7 +4651,7 @@
           <a:p>
             <a:fld id="{3146589B-F63A-42CD-B487-02649808258F}" type="datetimeFigureOut">
               <a:rPr lang="de-DE" smtClean="0"/>
-              <a:t>14.08.2025</a:t>
+              <a:t>25.08.2025</a:t>
             </a:fld>
             <a:endParaRPr lang="de-DE"/>
           </a:p>
@@ -5145,7 +5066,7 @@
           <a:p>
             <a:fld id="{3146589B-F63A-42CD-B487-02649808258F}" type="datetimeFigureOut">
               <a:rPr lang="de-DE" smtClean="0"/>
-              <a:t>14.08.2025</a:t>
+              <a:t>25.08.2025</a:t>
             </a:fld>
             <a:endParaRPr lang="de-DE"/>
           </a:p>
@@ -5287,7 +5208,7 @@
           <a:p>
             <a:fld id="{3146589B-F63A-42CD-B487-02649808258F}" type="datetimeFigureOut">
               <a:rPr lang="de-DE" smtClean="0"/>
-              <a:t>14.08.2025</a:t>
+              <a:t>25.08.2025</a:t>
             </a:fld>
             <a:endParaRPr lang="de-DE"/>
           </a:p>
@@ -5400,7 +5321,7 @@
           <a:p>
             <a:fld id="{3146589B-F63A-42CD-B487-02649808258F}" type="datetimeFigureOut">
               <a:rPr lang="de-DE" smtClean="0"/>
-              <a:t>14.08.2025</a:t>
+              <a:t>25.08.2025</a:t>
             </a:fld>
             <a:endParaRPr lang="de-DE"/>
           </a:p>
@@ -5713,7 +5634,7 @@
           <a:p>
             <a:fld id="{3146589B-F63A-42CD-B487-02649808258F}" type="datetimeFigureOut">
               <a:rPr lang="de-DE" smtClean="0"/>
-              <a:t>14.08.2025</a:t>
+              <a:t>25.08.2025</a:t>
             </a:fld>
             <a:endParaRPr lang="de-DE"/>
           </a:p>
@@ -6002,7 +5923,7 @@
           <a:p>
             <a:fld id="{3146589B-F63A-42CD-B487-02649808258F}" type="datetimeFigureOut">
               <a:rPr lang="de-DE" smtClean="0"/>
-              <a:t>14.08.2025</a:t>
+              <a:t>25.08.2025</a:t>
             </a:fld>
             <a:endParaRPr lang="de-DE"/>
           </a:p>
@@ -6245,7 +6166,7 @@
           <a:p>
             <a:fld id="{3146589B-F63A-42CD-B487-02649808258F}" type="datetimeFigureOut">
               <a:rPr lang="de-DE" smtClean="0"/>
-              <a:t>14.08.2025</a:t>
+              <a:t>25.08.2025</a:t>
             </a:fld>
             <a:endParaRPr lang="de-DE"/>
           </a:p>
@@ -8562,12 +8483,664 @@
           <a:chExt cx="0" cy="0"/>
         </a:xfrm>
       </p:grpSpPr>
+      <p:pic>
+        <p:nvPicPr>
+          <p:cNvPr id="29" name="Picture 28" descr="A black and white square with white squares&#10;&#10;AI-generated content may be incorrect.">
+            <a:extLst>
+              <a:ext uri="{FF2B5EF4-FFF2-40B4-BE49-F238E27FC236}">
+                <a16:creationId xmlns:a16="http://schemas.microsoft.com/office/drawing/2014/main" id="{D6DB9F16-F82D-E321-77BA-3E3099DAB6AF}"/>
+              </a:ext>
+            </a:extLst>
+          </p:cNvPr>
+          <p:cNvPicPr>
+            <a:picLocks noChangeAspect="1"/>
+          </p:cNvPicPr>
+          <p:nvPr/>
+        </p:nvPicPr>
+        <p:blipFill>
+          <a:blip r:embed="rId3">
+            <a:extLst>
+              <a:ext uri="{28A0092B-C50C-407E-A947-70E740481C1C}">
+                <a14:useLocalDpi xmlns:a14="http://schemas.microsoft.com/office/drawing/2010/main" val="0"/>
+              </a:ext>
+            </a:extLst>
+          </a:blip>
+          <a:stretch>
+            <a:fillRect/>
+          </a:stretch>
+        </p:blipFill>
+        <p:spPr>
+          <a:xfrm>
+            <a:off x="-3135994" y="-2398728"/>
+            <a:ext cx="11037119" cy="11037119"/>
+          </a:xfrm>
+          <a:prstGeom prst="rect">
+            <a:avLst/>
+          </a:prstGeom>
+        </p:spPr>
+      </p:pic>
+      <p:pic>
+        <p:nvPicPr>
+          <p:cNvPr id="15" name="Picture 14" descr="A group of colorful lines&#10;&#10;AI-generated content may be incorrect.">
+            <a:extLst>
+              <a:ext uri="{FF2B5EF4-FFF2-40B4-BE49-F238E27FC236}">
+                <a16:creationId xmlns:a16="http://schemas.microsoft.com/office/drawing/2014/main" id="{E7F222F1-AC64-AC0B-640E-AD1C7D376C37}"/>
+              </a:ext>
+            </a:extLst>
+          </p:cNvPr>
+          <p:cNvPicPr>
+            <a:picLocks noChangeAspect="1"/>
+          </p:cNvPicPr>
+          <p:nvPr/>
+        </p:nvPicPr>
+        <p:blipFill>
+          <a:blip r:embed="rId4">
+            <a:clrChange>
+              <a:clrFrom>
+                <a:srgbClr val="FFFFFF"/>
+              </a:clrFrom>
+              <a:clrTo>
+                <a:srgbClr val="FFFFFF">
+                  <a:alpha val="0"/>
+                </a:srgbClr>
+              </a:clrTo>
+            </a:clrChange>
+            <a:extLst>
+              <a:ext uri="{28A0092B-C50C-407E-A947-70E740481C1C}">
+                <a14:useLocalDpi xmlns:a14="http://schemas.microsoft.com/office/drawing/2010/main" val="0"/>
+              </a:ext>
+            </a:extLst>
+          </a:blip>
+          <a:stretch>
+            <a:fillRect/>
+          </a:stretch>
+        </p:blipFill>
+        <p:spPr>
+          <a:xfrm>
+            <a:off x="-912000" y="-178539"/>
+            <a:ext cx="6561686" cy="6561686"/>
+          </a:xfrm>
+          <a:prstGeom prst="rect">
+            <a:avLst/>
+          </a:prstGeom>
+        </p:spPr>
+      </p:pic>
+      <p:sp>
+        <p:nvSpPr>
+          <p:cNvPr id="24" name="TextBox 23">
+            <a:extLst>
+              <a:ext uri="{FF2B5EF4-FFF2-40B4-BE49-F238E27FC236}">
+                <a16:creationId xmlns:a16="http://schemas.microsoft.com/office/drawing/2014/main" id="{B99C5A29-5E23-CFF6-4ABD-84327E94AEAC}"/>
+              </a:ext>
+            </a:extLst>
+          </p:cNvPr>
+          <p:cNvSpPr txBox="1"/>
+          <p:nvPr/>
+        </p:nvSpPr>
+        <p:spPr>
+          <a:xfrm>
+            <a:off x="-6923878" y="9668107"/>
+            <a:ext cx="4050482" cy="1754326"/>
+          </a:xfrm>
+          <a:prstGeom prst="rect">
+            <a:avLst/>
+          </a:prstGeom>
+          <a:noFill/>
+        </p:spPr>
+        <p:txBody>
+          <a:bodyPr wrap="square" rtlCol="0">
+            <a:spAutoFit/>
+          </a:bodyPr>
+          <a:lstStyle/>
+          <a:p>
+            <a:r>
+              <a:rPr lang="de-DE" sz="5400" b="1" dirty="0"/>
+              <a:t>Signal per column</a:t>
+            </a:r>
+          </a:p>
+        </p:txBody>
+      </p:sp>
+      <p:sp>
+        <p:nvSpPr>
+          <p:cNvPr id="27" name="TextBox 26">
+            <a:extLst>
+              <a:ext uri="{FF2B5EF4-FFF2-40B4-BE49-F238E27FC236}">
+                <a16:creationId xmlns:a16="http://schemas.microsoft.com/office/drawing/2014/main" id="{77D4BFFD-974A-C9CC-3FBC-28142916974D}"/>
+              </a:ext>
+            </a:extLst>
+          </p:cNvPr>
+          <p:cNvSpPr txBox="1"/>
+          <p:nvPr/>
+        </p:nvSpPr>
+        <p:spPr>
+          <a:xfrm>
+            <a:off x="-6923878" y="12519093"/>
+            <a:ext cx="3493970" cy="923330"/>
+          </a:xfrm>
+          <a:prstGeom prst="rect">
+            <a:avLst/>
+          </a:prstGeom>
+          <a:noFill/>
+        </p:spPr>
+        <p:txBody>
+          <a:bodyPr wrap="none" rtlCol="0">
+            <a:spAutoFit/>
+          </a:bodyPr>
+          <a:lstStyle/>
+          <a:p>
+            <a:r>
+              <a:rPr lang="de-DE" sz="5400" b="1" dirty="0"/>
+              <a:t>Frequency</a:t>
+            </a:r>
+          </a:p>
+        </p:txBody>
+      </p:sp>
+      <p:pic>
+        <p:nvPicPr>
+          <p:cNvPr id="33" name="Picture 32" descr="A black and white rectangles&#10;&#10;AI-generated content may be incorrect.">
+            <a:extLst>
+              <a:ext uri="{FF2B5EF4-FFF2-40B4-BE49-F238E27FC236}">
+                <a16:creationId xmlns:a16="http://schemas.microsoft.com/office/drawing/2014/main" id="{21F38570-F616-5133-49AB-E3D3C0493664}"/>
+              </a:ext>
+            </a:extLst>
+          </p:cNvPr>
+          <p:cNvPicPr>
+            <a:picLocks noChangeAspect="1"/>
+          </p:cNvPicPr>
+          <p:nvPr/>
+        </p:nvPicPr>
+        <p:blipFill>
+          <a:blip r:embed="rId5">
+            <a:extLst>
+              <a:ext uri="{28A0092B-C50C-407E-A947-70E740481C1C}">
+                <a14:useLocalDpi xmlns:a14="http://schemas.microsoft.com/office/drawing/2010/main" val="0"/>
+              </a:ext>
+            </a:extLst>
+          </a:blip>
+          <a:srcRect t="42064" b="42212"/>
+          <a:stretch>
+            <a:fillRect/>
+          </a:stretch>
+        </p:blipFill>
+        <p:spPr>
+          <a:xfrm>
+            <a:off x="-3135994" y="9381539"/>
+            <a:ext cx="11037119" cy="2134229"/>
+          </a:xfrm>
+          <a:prstGeom prst="rect">
+            <a:avLst/>
+          </a:prstGeom>
+        </p:spPr>
+      </p:pic>
+      <p:pic>
+        <p:nvPicPr>
+          <p:cNvPr id="7" name="Picture 6" descr="A yellow line on a white background&#10;&#10;AI-generated content may be incorrect.">
+            <a:extLst>
+              <a:ext uri="{FF2B5EF4-FFF2-40B4-BE49-F238E27FC236}">
+                <a16:creationId xmlns:a16="http://schemas.microsoft.com/office/drawing/2014/main" id="{73D484D0-2A93-5F4F-E8FA-5B291C231987}"/>
+              </a:ext>
+            </a:extLst>
+          </p:cNvPr>
+          <p:cNvPicPr>
+            <a:picLocks noChangeAspect="1"/>
+          </p:cNvPicPr>
+          <p:nvPr/>
+        </p:nvPicPr>
+        <p:blipFill>
+          <a:blip r:embed="rId6">
+            <a:clrChange>
+              <a:clrFrom>
+                <a:srgbClr val="FFFFFF"/>
+              </a:clrFrom>
+              <a:clrTo>
+                <a:srgbClr val="FFFFFF">
+                  <a:alpha val="0"/>
+                </a:srgbClr>
+              </a:clrTo>
+            </a:clrChange>
+            <a:extLst>
+              <a:ext uri="{28A0092B-C50C-407E-A947-70E740481C1C}">
+                <a14:useLocalDpi xmlns:a14="http://schemas.microsoft.com/office/drawing/2010/main" val="0"/>
+              </a:ext>
+            </a:extLst>
+          </a:blip>
+          <a:stretch>
+            <a:fillRect/>
+          </a:stretch>
+        </p:blipFill>
+        <p:spPr>
+          <a:xfrm>
+            <a:off x="-1042628" y="9272948"/>
+            <a:ext cx="6692314" cy="2414016"/>
+          </a:xfrm>
+          <a:prstGeom prst="rect">
+            <a:avLst/>
+          </a:prstGeom>
+        </p:spPr>
+      </p:pic>
+      <p:sp>
+        <p:nvSpPr>
+          <p:cNvPr id="25" name="Isosceles Triangle 24">
+            <a:extLst>
+              <a:ext uri="{FF2B5EF4-FFF2-40B4-BE49-F238E27FC236}">
+                <a16:creationId xmlns:a16="http://schemas.microsoft.com/office/drawing/2014/main" id="{57BC236B-785C-49BE-E09D-BCEEB109FB15}"/>
+              </a:ext>
+            </a:extLst>
+          </p:cNvPr>
+          <p:cNvSpPr/>
+          <p:nvPr/>
+        </p:nvSpPr>
+        <p:spPr>
+          <a:xfrm>
+            <a:off x="-3149716" y="12229644"/>
+            <a:ext cx="11037118" cy="1502228"/>
+          </a:xfrm>
+          <a:prstGeom prst="triangle">
+            <a:avLst>
+              <a:gd name="adj" fmla="val 100000"/>
+            </a:avLst>
+          </a:prstGeom>
+          <a:solidFill>
+            <a:schemeClr val="accent1">
+              <a:lumMod val="75000"/>
+            </a:schemeClr>
+          </a:solidFill>
+          <a:ln>
+            <a:noFill/>
+          </a:ln>
+        </p:spPr>
+        <p:style>
+          <a:lnRef idx="2">
+            <a:schemeClr val="accent1">
+              <a:shade val="15000"/>
+            </a:schemeClr>
+          </a:lnRef>
+          <a:fillRef idx="1">
+            <a:schemeClr val="accent1"/>
+          </a:fillRef>
+          <a:effectRef idx="0">
+            <a:schemeClr val="accent1"/>
+          </a:effectRef>
+          <a:fontRef idx="minor">
+            <a:schemeClr val="lt1"/>
+          </a:fontRef>
+        </p:style>
+        <p:txBody>
+          <a:bodyPr rtlCol="0" anchor="ctr"/>
+          <a:lstStyle/>
+          <a:p>
+            <a:pPr algn="ctr"/>
+            <a:endParaRPr lang="de-DE">
+              <a:solidFill>
+                <a:schemeClr val="accent1"/>
+              </a:solidFill>
+            </a:endParaRPr>
+          </a:p>
+        </p:txBody>
+      </p:sp>
+      <p:pic>
+        <p:nvPicPr>
+          <p:cNvPr id="5" name="Picture 4" descr="A grid of white lines on a black background&#10;&#10;AI-generated content may be incorrect.">
+            <a:extLst>
+              <a:ext uri="{FF2B5EF4-FFF2-40B4-BE49-F238E27FC236}">
+                <a16:creationId xmlns:a16="http://schemas.microsoft.com/office/drawing/2014/main" id="{170ED5F2-F912-BBE0-A0D2-3D38A42E4B51}"/>
+              </a:ext>
+            </a:extLst>
+          </p:cNvPr>
+          <p:cNvPicPr>
+            <a:picLocks noChangeAspect="1"/>
+          </p:cNvPicPr>
+          <p:nvPr/>
+        </p:nvPicPr>
+        <p:blipFill>
+          <a:blip r:embed="rId7">
+            <a:extLst>
+              <a:ext uri="{28A0092B-C50C-407E-A947-70E740481C1C}">
+                <a14:useLocalDpi xmlns:a14="http://schemas.microsoft.com/office/drawing/2010/main" val="0"/>
+              </a:ext>
+            </a:extLst>
+          </a:blip>
+          <a:stretch>
+            <a:fillRect/>
+          </a:stretch>
+        </p:blipFill>
+        <p:spPr>
+          <a:xfrm>
+            <a:off x="9731893" y="-227616"/>
+            <a:ext cx="15856584" cy="10563596"/>
+          </a:xfrm>
+          <a:prstGeom prst="rect">
+            <a:avLst/>
+          </a:prstGeom>
+        </p:spPr>
+      </p:pic>
+    </p:spTree>
+    <p:extLst>
+      <p:ext uri="{BB962C8B-B14F-4D97-AF65-F5344CB8AC3E}">
+        <p14:creationId xmlns:p14="http://schemas.microsoft.com/office/powerpoint/2010/main" val="1490451566"/>
+      </p:ext>
+    </p:extLst>
+  </p:cSld>
+  <p:clrMapOvr>
+    <a:masterClrMapping/>
+  </p:clrMapOvr>
+</p:sld>
+</file>
+
+<file path=ppt/slides/slide11.xml><?xml version="1.0" encoding="utf-8"?>
+<p:sld xmlns:a="http://schemas.openxmlformats.org/drawingml/2006/main" xmlns:r="http://schemas.openxmlformats.org/officeDocument/2006/relationships" xmlns:p="http://schemas.openxmlformats.org/presentationml/2006/main">
+  <p:cSld>
+    <p:spTree>
+      <p:nvGrpSpPr>
+        <p:cNvPr id="1" name=""/>
+        <p:cNvGrpSpPr/>
+        <p:nvPr/>
+      </p:nvGrpSpPr>
+      <p:grpSpPr>
+        <a:xfrm>
+          <a:off x="0" y="0"/>
+          <a:ext cx="0" cy="0"/>
+          <a:chOff x="0" y="0"/>
+          <a:chExt cx="0" cy="0"/>
+        </a:xfrm>
+      </p:grpSpPr>
+      <p:sp>
+        <p:nvSpPr>
+          <p:cNvPr id="4" name="Isosceles Triangle 3">
+            <a:extLst>
+              <a:ext uri="{FF2B5EF4-FFF2-40B4-BE49-F238E27FC236}">
+                <a16:creationId xmlns:a16="http://schemas.microsoft.com/office/drawing/2014/main" id="{8864BC73-4045-0194-9454-E70145171C3F}"/>
+              </a:ext>
+            </a:extLst>
+          </p:cNvPr>
+          <p:cNvSpPr/>
+          <p:nvPr/>
+        </p:nvSpPr>
+        <p:spPr>
+          <a:xfrm>
+            <a:off x="187583" y="625642"/>
+            <a:ext cx="11037118" cy="4956142"/>
+          </a:xfrm>
+          <a:prstGeom prst="triangle">
+            <a:avLst>
+              <a:gd name="adj" fmla="val 100000"/>
+            </a:avLst>
+          </a:prstGeom>
+          <a:solidFill>
+            <a:schemeClr val="accent1">
+              <a:lumMod val="20000"/>
+              <a:lumOff val="80000"/>
+            </a:schemeClr>
+          </a:solidFill>
+          <a:ln>
+            <a:noFill/>
+          </a:ln>
+        </p:spPr>
+        <p:style>
+          <a:lnRef idx="2">
+            <a:schemeClr val="accent1">
+              <a:shade val="15000"/>
+            </a:schemeClr>
+          </a:lnRef>
+          <a:fillRef idx="1">
+            <a:schemeClr val="accent1"/>
+          </a:fillRef>
+          <a:effectRef idx="0">
+            <a:schemeClr val="accent1"/>
+          </a:effectRef>
+          <a:fontRef idx="minor">
+            <a:schemeClr val="lt1"/>
+          </a:fontRef>
+        </p:style>
+        <p:txBody>
+          <a:bodyPr rtlCol="0" anchor="ctr"/>
+          <a:lstStyle/>
+          <a:p>
+            <a:pPr algn="ctr"/>
+            <a:endParaRPr lang="de-DE">
+              <a:solidFill>
+                <a:schemeClr val="accent1"/>
+              </a:solidFill>
+            </a:endParaRPr>
+          </a:p>
+        </p:txBody>
+      </p:sp>
+      <mc:AlternateContent xmlns:mc="http://schemas.openxmlformats.org/markup-compatibility/2006" xmlns:a14="http://schemas.microsoft.com/office/drawing/2010/main">
+        <mc:Choice Requires="a14">
+          <p:sp>
+            <p:nvSpPr>
+              <p:cNvPr id="5" name="TextBox 4">
+                <a:extLst>
+                  <a:ext uri="{FF2B5EF4-FFF2-40B4-BE49-F238E27FC236}">
+                    <a16:creationId xmlns:a16="http://schemas.microsoft.com/office/drawing/2014/main" id="{FC21FF2A-CDFA-400E-E6ED-7A86E1A3A9EE}"/>
+                  </a:ext>
+                </a:extLst>
+              </p:cNvPr>
+              <p:cNvSpPr txBox="1"/>
+              <p:nvPr/>
+            </p:nvSpPr>
+            <p:spPr>
+              <a:xfrm>
+                <a:off x="675166" y="5581784"/>
+                <a:ext cx="1056892" cy="861774"/>
+              </a:xfrm>
+              <a:prstGeom prst="rect">
+                <a:avLst/>
+              </a:prstGeom>
+              <a:noFill/>
+            </p:spPr>
+            <p:txBody>
+              <a:bodyPr wrap="none" rtlCol="0">
+                <a:spAutoFit/>
+              </a:bodyPr>
+              <a:lstStyle/>
+              <a:p>
+                <a:pPr/>
+                <a14:m>
+                  <m:oMathPara xmlns:m="http://schemas.openxmlformats.org/officeDocument/2006/math">
+                    <m:oMathParaPr>
+                      <m:jc m:val="centerGroup"/>
+                    </m:oMathParaPr>
+                    <m:oMath xmlns:m="http://schemas.openxmlformats.org/officeDocument/2006/math">
+                      <m:r>
+                        <m:rPr>
+                          <m:sty m:val="p"/>
+                        </m:rPr>
+                        <a:rPr lang="de-DE" sz="5000" i="1" smtClean="0">
+                          <a:solidFill>
+                            <a:schemeClr val="accent3"/>
+                          </a:solidFill>
+                          <a:latin typeface="Cambria Math" panose="02040503050406030204" pitchFamily="18" charset="0"/>
+                        </a:rPr>
+                        <m:t>Δ</m:t>
+                      </m:r>
+                      <m:r>
+                        <a:rPr lang="de-DE" sz="5000" i="1" smtClean="0">
+                          <a:solidFill>
+                            <a:schemeClr val="accent3"/>
+                          </a:solidFill>
+                          <a:latin typeface="Cambria Math" panose="02040503050406030204" pitchFamily="18" charset="0"/>
+                        </a:rPr>
+                        <m:t>𝑥</m:t>
+                      </m:r>
+                    </m:oMath>
+                  </m:oMathPara>
+                </a14:m>
+                <a:endParaRPr lang="de-DE" sz="5000" dirty="0">
+                  <a:solidFill>
+                    <a:schemeClr val="accent3"/>
+                  </a:solidFill>
+                </a:endParaRPr>
+              </a:p>
+            </p:txBody>
+          </p:sp>
+        </mc:Choice>
+        <mc:Fallback xmlns="">
+          <p:sp>
+            <p:nvSpPr>
+              <p:cNvPr id="5" name="TextBox 4">
+                <a:extLst>
+                  <a:ext uri="{FF2B5EF4-FFF2-40B4-BE49-F238E27FC236}">
+                    <a16:creationId xmlns:a16="http://schemas.microsoft.com/office/drawing/2014/main" id="{FC21FF2A-CDFA-400E-E6ED-7A86E1A3A9EE}"/>
+                  </a:ext>
+                </a:extLst>
+              </p:cNvPr>
+              <p:cNvSpPr txBox="1">
+                <a:spLocks noRot="1" noChangeAspect="1" noMove="1" noResize="1" noEditPoints="1" noAdjustHandles="1" noChangeArrowheads="1" noChangeShapeType="1" noTextEdit="1"/>
+              </p:cNvSpPr>
+              <p:nvPr/>
+            </p:nvSpPr>
+            <p:spPr>
+              <a:xfrm>
+                <a:off x="675166" y="5581784"/>
+                <a:ext cx="1056892" cy="861774"/>
+              </a:xfrm>
+              <a:prstGeom prst="rect">
+                <a:avLst/>
+              </a:prstGeom>
+              <a:blipFill>
+                <a:blip r:embed="rId2"/>
+                <a:stretch>
+                  <a:fillRect/>
+                </a:stretch>
+              </a:blipFill>
+            </p:spPr>
+            <p:txBody>
+              <a:bodyPr/>
+              <a:lstStyle/>
+              <a:p>
+                <a:r>
+                  <a:rPr lang="de-DE">
+                    <a:noFill/>
+                  </a:rPr>
+                  <a:t> </a:t>
+                </a:r>
+              </a:p>
+            </p:txBody>
+          </p:sp>
+        </mc:Fallback>
+      </mc:AlternateContent>
+      <mc:AlternateContent xmlns:mc="http://schemas.openxmlformats.org/markup-compatibility/2006" xmlns:a14="http://schemas.microsoft.com/office/drawing/2010/main">
+        <mc:Choice Requires="a14">
+          <p:sp>
+            <p:nvSpPr>
+              <p:cNvPr id="7" name="TextBox 6">
+                <a:extLst>
+                  <a:ext uri="{FF2B5EF4-FFF2-40B4-BE49-F238E27FC236}">
+                    <a16:creationId xmlns:a16="http://schemas.microsoft.com/office/drawing/2014/main" id="{103AFB47-2B91-98A3-37D3-1C37D1AE6CA6}"/>
+                  </a:ext>
+                </a:extLst>
+              </p:cNvPr>
+              <p:cNvSpPr txBox="1"/>
+              <p:nvPr/>
+            </p:nvSpPr>
+            <p:spPr>
+              <a:xfrm>
+                <a:off x="2450128" y="4643028"/>
+                <a:ext cx="1067472" cy="861774"/>
+              </a:xfrm>
+              <a:prstGeom prst="rect">
+                <a:avLst/>
+              </a:prstGeom>
+              <a:noFill/>
+            </p:spPr>
+            <p:txBody>
+              <a:bodyPr wrap="none" rtlCol="0">
+                <a:spAutoFit/>
+              </a:bodyPr>
+              <a:lstStyle/>
+              <a:p>
+                <a:pPr/>
+                <a14:m>
+                  <m:oMathPara xmlns:m="http://schemas.openxmlformats.org/officeDocument/2006/math">
+                    <m:oMathParaPr>
+                      <m:jc m:val="centerGroup"/>
+                    </m:oMathParaPr>
+                    <m:oMath xmlns:m="http://schemas.openxmlformats.org/officeDocument/2006/math">
+                      <m:r>
+                        <m:rPr>
+                          <m:sty m:val="p"/>
+                        </m:rPr>
+                        <a:rPr lang="de-DE" sz="5000" i="1" smtClean="0">
+                          <a:solidFill>
+                            <a:srgbClr val="FF0000"/>
+                          </a:solidFill>
+                          <a:latin typeface="Cambria Math" panose="02040503050406030204" pitchFamily="18" charset="0"/>
+                        </a:rPr>
+                        <m:t>Δ</m:t>
+                      </m:r>
+                      <m:r>
+                        <a:rPr lang="de-DE" sz="5000" b="0" i="1" smtClean="0">
+                          <a:solidFill>
+                            <a:srgbClr val="FF0000"/>
+                          </a:solidFill>
+                          <a:latin typeface="Cambria Math" panose="02040503050406030204" pitchFamily="18" charset="0"/>
+                        </a:rPr>
+                        <m:t>𝑓</m:t>
+                      </m:r>
+                    </m:oMath>
+                  </m:oMathPara>
+                </a14:m>
+                <a:endParaRPr lang="de-DE" sz="5000" dirty="0">
+                  <a:solidFill>
+                    <a:srgbClr val="FF0000"/>
+                  </a:solidFill>
+                </a:endParaRPr>
+              </a:p>
+            </p:txBody>
+          </p:sp>
+        </mc:Choice>
+        <mc:Fallback xmlns="">
+          <p:sp>
+            <p:nvSpPr>
+              <p:cNvPr id="7" name="TextBox 6">
+                <a:extLst>
+                  <a:ext uri="{FF2B5EF4-FFF2-40B4-BE49-F238E27FC236}">
+                    <a16:creationId xmlns:a16="http://schemas.microsoft.com/office/drawing/2014/main" id="{103AFB47-2B91-98A3-37D3-1C37D1AE6CA6}"/>
+                  </a:ext>
+                </a:extLst>
+              </p:cNvPr>
+              <p:cNvSpPr txBox="1">
+                <a:spLocks noRot="1" noChangeAspect="1" noMove="1" noResize="1" noEditPoints="1" noAdjustHandles="1" noChangeArrowheads="1" noChangeShapeType="1" noTextEdit="1"/>
+              </p:cNvSpPr>
+              <p:nvPr/>
+            </p:nvSpPr>
+            <p:spPr>
+              <a:xfrm>
+                <a:off x="2450128" y="4643028"/>
+                <a:ext cx="1067472" cy="861774"/>
+              </a:xfrm>
+              <a:prstGeom prst="rect">
+                <a:avLst/>
+              </a:prstGeom>
+              <a:blipFill>
+                <a:blip r:embed="rId3"/>
+                <a:stretch>
+                  <a:fillRect/>
+                </a:stretch>
+              </a:blipFill>
+            </p:spPr>
+            <p:txBody>
+              <a:bodyPr/>
+              <a:lstStyle/>
+              <a:p>
+                <a:r>
+                  <a:rPr lang="de-DE">
+                    <a:noFill/>
+                  </a:rPr>
+                  <a:t> </a:t>
+                </a:r>
+              </a:p>
+            </p:txBody>
+          </p:sp>
+        </mc:Fallback>
+      </mc:AlternateContent>
       <p:cxnSp>
         <p:nvCxnSpPr>
-          <p:cNvPr id="9" name="Straight Connector 8">
-            <a:extLst>
-              <a:ext uri="{FF2B5EF4-FFF2-40B4-BE49-F238E27FC236}">
-                <a16:creationId xmlns:a16="http://schemas.microsoft.com/office/drawing/2014/main" id="{388E9C69-89DF-B437-0400-C3DA0630562A}"/>
+          <p:cNvPr id="9" name="Straight Arrow Connector 8">
+            <a:extLst>
+              <a:ext uri="{FF2B5EF4-FFF2-40B4-BE49-F238E27FC236}">
+                <a16:creationId xmlns:a16="http://schemas.microsoft.com/office/drawing/2014/main" id="{935B09BC-7FCD-A8FF-3772-5C9673A40C59}"/>
               </a:ext>
             </a:extLst>
           </p:cNvPr>
@@ -8577,17 +9150,18 @@
           <p:nvPr/>
         </p:nvCxnSpPr>
         <p:spPr>
-          <a:xfrm>
-            <a:off x="4445464" y="3045878"/>
-            <a:ext cx="3817692" cy="0"/>
+          <a:xfrm flipV="1">
+            <a:off x="195340" y="5581784"/>
+            <a:ext cx="2254788" cy="32994"/>
           </a:xfrm>
-          <a:prstGeom prst="line">
+          <a:prstGeom prst="straightConnector1">
             <a:avLst/>
           </a:prstGeom>
-          <a:ln w="9525">
+          <a:ln w="57150">
             <a:solidFill>
-              <a:schemeClr val="tx1"/>
+              <a:srgbClr val="00B050"/>
             </a:solidFill>
+            <a:tailEnd type="triangle"/>
           </a:ln>
         </p:spPr>
         <p:style>
@@ -8605,12 +9179,256 @@
           </a:fontRef>
         </p:style>
       </p:cxnSp>
+      <p:sp>
+        <p:nvSpPr>
+          <p:cNvPr id="10" name="TextBox 9">
+            <a:extLst>
+              <a:ext uri="{FF2B5EF4-FFF2-40B4-BE49-F238E27FC236}">
+                <a16:creationId xmlns:a16="http://schemas.microsoft.com/office/drawing/2014/main" id="{3D7D3161-B718-332D-9E43-B029E2C89A46}"/>
+              </a:ext>
+            </a:extLst>
+          </p:cNvPr>
+          <p:cNvSpPr txBox="1"/>
+          <p:nvPr/>
+        </p:nvSpPr>
+        <p:spPr>
+          <a:xfrm>
+            <a:off x="10547143" y="5533085"/>
+            <a:ext cx="1355115" cy="861774"/>
+          </a:xfrm>
+          <a:prstGeom prst="rect">
+            <a:avLst/>
+          </a:prstGeom>
+          <a:noFill/>
+        </p:spPr>
+        <p:txBody>
+          <a:bodyPr wrap="none" rtlCol="0">
+            <a:spAutoFit/>
+          </a:bodyPr>
+          <a:lstStyle/>
+          <a:p>
+            <a:r>
+              <a:rPr lang="de-DE" sz="5000" dirty="0">
+                <a:solidFill>
+                  <a:schemeClr val="accent3"/>
+                </a:solidFill>
+              </a:rPr>
+              <a:t>FOV</a:t>
+            </a:r>
+          </a:p>
+        </p:txBody>
+      </p:sp>
+      <p:cxnSp>
+        <p:nvCxnSpPr>
+          <p:cNvPr id="16" name="Straight Arrow Connector 15">
+            <a:extLst>
+              <a:ext uri="{FF2B5EF4-FFF2-40B4-BE49-F238E27FC236}">
+                <a16:creationId xmlns:a16="http://schemas.microsoft.com/office/drawing/2014/main" id="{E8D9F1A2-0FC2-DCB5-479E-A73BAD2A4700}"/>
+              </a:ext>
+            </a:extLst>
+          </p:cNvPr>
+          <p:cNvCxnSpPr>
+            <a:cxnSpLocks/>
+          </p:cNvCxnSpPr>
+          <p:nvPr/>
+        </p:nvCxnSpPr>
+        <p:spPr>
+          <a:xfrm flipV="1">
+            <a:off x="2450128" y="4566046"/>
+            <a:ext cx="0" cy="1015738"/>
+          </a:xfrm>
+          <a:prstGeom prst="straightConnector1">
+            <a:avLst/>
+          </a:prstGeom>
+          <a:ln w="57150">
+            <a:solidFill>
+              <a:srgbClr val="FF0000"/>
+            </a:solidFill>
+            <a:tailEnd type="triangle"/>
+          </a:ln>
+        </p:spPr>
+        <p:style>
+          <a:lnRef idx="2">
+            <a:schemeClr val="accent1"/>
+          </a:lnRef>
+          <a:fillRef idx="0">
+            <a:schemeClr val="accent1"/>
+          </a:fillRef>
+          <a:effectRef idx="1">
+            <a:schemeClr val="accent1"/>
+          </a:effectRef>
+          <a:fontRef idx="minor">
+            <a:schemeClr val="tx1"/>
+          </a:fontRef>
+        </p:style>
+      </p:cxnSp>
+      <mc:AlternateContent xmlns:mc="http://schemas.openxmlformats.org/markup-compatibility/2006" xmlns:a14="http://schemas.microsoft.com/office/drawing/2010/main">
+        <mc:Choice Requires="a14">
+          <p:sp>
+            <p:nvSpPr>
+              <p:cNvPr id="22" name="TextBox 21">
+                <a:extLst>
+                  <a:ext uri="{FF2B5EF4-FFF2-40B4-BE49-F238E27FC236}">
+                    <a16:creationId xmlns:a16="http://schemas.microsoft.com/office/drawing/2014/main" id="{3A574E5A-385A-2256-0D90-42A7AC385D7B}"/>
+                  </a:ext>
+                </a:extLst>
+              </p:cNvPr>
+              <p:cNvSpPr txBox="1"/>
+              <p:nvPr/>
+            </p:nvSpPr>
+            <p:spPr>
+              <a:xfrm>
+                <a:off x="11195590" y="32254"/>
+                <a:ext cx="1413336" cy="861774"/>
+              </a:xfrm>
+              <a:prstGeom prst="rect">
+                <a:avLst/>
+              </a:prstGeom>
+              <a:noFill/>
+            </p:spPr>
+            <p:txBody>
+              <a:bodyPr wrap="none" rtlCol="0">
+                <a:spAutoFit/>
+              </a:bodyPr>
+              <a:lstStyle/>
+              <a:p>
+                <a:pPr/>
+                <a14:m>
+                  <m:oMathPara xmlns:m="http://schemas.openxmlformats.org/officeDocument/2006/math">
+                    <m:oMathParaPr>
+                      <m:jc m:val="centerGroup"/>
+                    </m:oMathParaPr>
+                    <m:oMath xmlns:m="http://schemas.openxmlformats.org/officeDocument/2006/math">
+                      <m:sSub>
+                        <m:sSubPr>
+                          <m:ctrlPr>
+                            <a:rPr lang="de-DE" sz="5000" i="1" dirty="0" smtClean="0">
+                              <a:solidFill>
+                                <a:srgbClr val="FF0000"/>
+                              </a:solidFill>
+                              <a:latin typeface="Cambria Math" panose="02040503050406030204" pitchFamily="18" charset="0"/>
+                            </a:rPr>
+                          </m:ctrlPr>
+                        </m:sSubPr>
+                        <m:e>
+                          <m:r>
+                            <a:rPr lang="de-DE" sz="5000" b="0" i="1" dirty="0" smtClean="0">
+                              <a:solidFill>
+                                <a:srgbClr val="FF0000"/>
+                              </a:solidFill>
+                              <a:latin typeface="Cambria Math" panose="02040503050406030204" pitchFamily="18" charset="0"/>
+                            </a:rPr>
+                            <m:t>𝑓</m:t>
+                          </m:r>
+                        </m:e>
+                        <m:sub>
+                          <m:r>
+                            <m:rPr>
+                              <m:sty m:val="p"/>
+                            </m:rPr>
+                            <a:rPr lang="de-DE" sz="5000" b="0" i="0" dirty="0" smtClean="0">
+                              <a:solidFill>
+                                <a:srgbClr val="FF0000"/>
+                              </a:solidFill>
+                              <a:latin typeface="Cambria Math" panose="02040503050406030204" pitchFamily="18" charset="0"/>
+                            </a:rPr>
+                            <m:t>max</m:t>
+                          </m:r>
+                        </m:sub>
+                      </m:sSub>
+                    </m:oMath>
+                  </m:oMathPara>
+                </a14:m>
+                <a:endParaRPr lang="de-DE" sz="5000" dirty="0">
+                  <a:solidFill>
+                    <a:srgbClr val="FF0000"/>
+                  </a:solidFill>
+                </a:endParaRPr>
+              </a:p>
+            </p:txBody>
+          </p:sp>
+        </mc:Choice>
+        <mc:Fallback xmlns="">
+          <p:sp>
+            <p:nvSpPr>
+              <p:cNvPr id="22" name="TextBox 21">
+                <a:extLst>
+                  <a:ext uri="{FF2B5EF4-FFF2-40B4-BE49-F238E27FC236}">
+                    <a16:creationId xmlns:a16="http://schemas.microsoft.com/office/drawing/2014/main" id="{3A574E5A-385A-2256-0D90-42A7AC385D7B}"/>
+                  </a:ext>
+                </a:extLst>
+              </p:cNvPr>
+              <p:cNvSpPr txBox="1">
+                <a:spLocks noRot="1" noChangeAspect="1" noMove="1" noResize="1" noEditPoints="1" noAdjustHandles="1" noChangeArrowheads="1" noChangeShapeType="1" noTextEdit="1"/>
+              </p:cNvSpPr>
+              <p:nvPr/>
+            </p:nvSpPr>
+            <p:spPr>
+              <a:xfrm>
+                <a:off x="11195590" y="32254"/>
+                <a:ext cx="1413336" cy="861774"/>
+              </a:xfrm>
+              <a:prstGeom prst="rect">
+                <a:avLst/>
+              </a:prstGeom>
+              <a:blipFill>
+                <a:blip r:embed="rId4"/>
+                <a:stretch>
+                  <a:fillRect/>
+                </a:stretch>
+              </a:blipFill>
+            </p:spPr>
+            <p:txBody>
+              <a:bodyPr/>
+              <a:lstStyle/>
+              <a:p>
+                <a:r>
+                  <a:rPr lang="de-DE">
+                    <a:noFill/>
+                  </a:rPr>
+                  <a:t> </a:t>
+                </a:r>
+              </a:p>
+            </p:txBody>
+          </p:sp>
+        </mc:Fallback>
+      </mc:AlternateContent>
+    </p:spTree>
+    <p:extLst>
+      <p:ext uri="{BB962C8B-B14F-4D97-AF65-F5344CB8AC3E}">
+        <p14:creationId xmlns:p14="http://schemas.microsoft.com/office/powerpoint/2010/main" val="3165273129"/>
+      </p:ext>
+    </p:extLst>
+  </p:cSld>
+  <p:clrMapOvr>
+    <a:masterClrMapping/>
+  </p:clrMapOvr>
+</p:sld>
+</file>
+
+<file path=ppt/slides/slide12.xml><?xml version="1.0" encoding="utf-8"?>
+<p:sld xmlns:a="http://schemas.openxmlformats.org/drawingml/2006/main" xmlns:r="http://schemas.openxmlformats.org/officeDocument/2006/relationships" xmlns:p="http://schemas.openxmlformats.org/presentationml/2006/main">
+  <p:cSld>
+    <p:spTree>
+      <p:nvGrpSpPr>
+        <p:cNvPr id="1" name=""/>
+        <p:cNvGrpSpPr/>
+        <p:nvPr/>
+      </p:nvGrpSpPr>
+      <p:grpSpPr>
+        <a:xfrm>
+          <a:off x="0" y="0"/>
+          <a:ext cx="0" cy="0"/>
+          <a:chOff x="0" y="0"/>
+          <a:chExt cx="0" cy="0"/>
+        </a:xfrm>
+      </p:grpSpPr>
       <p:pic>
         <p:nvPicPr>
-          <p:cNvPr id="15" name="Picture 14" descr="A graph with lines and numbers&#10;&#10;AI-generated content may be incorrect.">
-            <a:extLst>
-              <a:ext uri="{FF2B5EF4-FFF2-40B4-BE49-F238E27FC236}">
-                <a16:creationId xmlns:a16="http://schemas.microsoft.com/office/drawing/2014/main" id="{9DA96549-5C7F-B723-D597-BD670A699BBF}"/>
+          <p:cNvPr id="10" name="Picture 9" descr="A graph with lines and curves&#10;&#10;AI-generated content may be incorrect.">
+            <a:extLst>
+              <a:ext uri="{FF2B5EF4-FFF2-40B4-BE49-F238E27FC236}">
+                <a16:creationId xmlns:a16="http://schemas.microsoft.com/office/drawing/2014/main" id="{A43FE48F-95C0-781A-4DFE-F36C42A6F231}"/>
               </a:ext>
             </a:extLst>
           </p:cNvPr>
@@ -8627,15 +9445,264 @@
               </a:ext>
             </a:extLst>
           </a:blip>
-          <a:srcRect b="2633"/>
           <a:stretch>
             <a:fillRect/>
           </a:stretch>
         </p:blipFill>
         <p:spPr>
           <a:xfrm>
-            <a:off x="4079099" y="885126"/>
-            <a:ext cx="4319025" cy="2101172"/>
+            <a:off x="3396990" y="1990341"/>
+            <a:ext cx="5398019" cy="2877318"/>
+          </a:xfrm>
+          <a:prstGeom prst="rect">
+            <a:avLst/>
+          </a:prstGeom>
+        </p:spPr>
+      </p:pic>
+      <p:pic>
+        <p:nvPicPr>
+          <p:cNvPr id="17" name="Picture 16" descr="A screenshot of a computer&#10;&#10;AI-generated content may be incorrect.">
+            <a:extLst>
+              <a:ext uri="{FF2B5EF4-FFF2-40B4-BE49-F238E27FC236}">
+                <a16:creationId xmlns:a16="http://schemas.microsoft.com/office/drawing/2014/main" id="{AD2DBE5A-A9D6-9FB2-6FC2-FB3B26D1F101}"/>
+              </a:ext>
+            </a:extLst>
+          </p:cNvPr>
+          <p:cNvPicPr>
+            <a:picLocks noChangeAspect="1"/>
+          </p:cNvPicPr>
+          <p:nvPr/>
+        </p:nvPicPr>
+        <p:blipFill>
+          <a:blip r:embed="rId3">
+            <a:extLst>
+              <a:ext uri="{28A0092B-C50C-407E-A947-70E740481C1C}">
+                <a14:useLocalDpi xmlns:a14="http://schemas.microsoft.com/office/drawing/2010/main" val="0"/>
+              </a:ext>
+            </a:extLst>
+          </a:blip>
+          <a:srcRect t="78911"/>
+          <a:stretch>
+            <a:fillRect/>
+          </a:stretch>
+        </p:blipFill>
+        <p:spPr>
+          <a:xfrm>
+            <a:off x="3396990" y="4813299"/>
+            <a:ext cx="5398019" cy="606809"/>
+          </a:xfrm>
+          <a:prstGeom prst="rect">
+            <a:avLst/>
+          </a:prstGeom>
+        </p:spPr>
+      </p:pic>
+      <p:pic>
+        <p:nvPicPr>
+          <p:cNvPr id="25" name="Picture 24" descr="A graph of a function&#10;&#10;AI-generated content may be incorrect.">
+            <a:extLst>
+              <a:ext uri="{FF2B5EF4-FFF2-40B4-BE49-F238E27FC236}">
+                <a16:creationId xmlns:a16="http://schemas.microsoft.com/office/drawing/2014/main" id="{4E9567CF-6EEC-5382-2327-D8FEC67F43B8}"/>
+              </a:ext>
+            </a:extLst>
+          </p:cNvPr>
+          <p:cNvPicPr>
+            <a:picLocks noChangeAspect="1"/>
+          </p:cNvPicPr>
+          <p:nvPr/>
+        </p:nvPicPr>
+        <p:blipFill>
+          <a:blip r:embed="rId4">
+            <a:extLst>
+              <a:ext uri="{28A0092B-C50C-407E-A947-70E740481C1C}">
+                <a14:useLocalDpi xmlns:a14="http://schemas.microsoft.com/office/drawing/2010/main" val="0"/>
+              </a:ext>
+            </a:extLst>
+          </a:blip>
+          <a:stretch>
+            <a:fillRect/>
+          </a:stretch>
+        </p:blipFill>
+        <p:spPr>
+          <a:xfrm>
+            <a:off x="4334256" y="324612"/>
+            <a:ext cx="7620000" cy="5715000"/>
+          </a:xfrm>
+          <a:prstGeom prst="rect">
+            <a:avLst/>
+          </a:prstGeom>
+        </p:spPr>
+      </p:pic>
+    </p:spTree>
+    <p:extLst>
+      <p:ext uri="{BB962C8B-B14F-4D97-AF65-F5344CB8AC3E}">
+        <p14:creationId xmlns:p14="http://schemas.microsoft.com/office/powerpoint/2010/main" val="622767804"/>
+      </p:ext>
+    </p:extLst>
+  </p:cSld>
+  <p:clrMapOvr>
+    <a:masterClrMapping/>
+  </p:clrMapOvr>
+</p:sld>
+</file>
+
+<file path=ppt/slides/slide13.xml><?xml version="1.0" encoding="utf-8"?>
+<p:sld xmlns:a="http://schemas.openxmlformats.org/drawingml/2006/main" xmlns:r="http://schemas.openxmlformats.org/officeDocument/2006/relationships" xmlns:p="http://schemas.openxmlformats.org/presentationml/2006/main">
+  <p:cSld>
+    <p:spTree>
+      <p:nvGrpSpPr>
+        <p:cNvPr id="1" name=""/>
+        <p:cNvGrpSpPr/>
+        <p:nvPr/>
+      </p:nvGrpSpPr>
+      <p:grpSpPr>
+        <a:xfrm>
+          <a:off x="0" y="0"/>
+          <a:ext cx="0" cy="0"/>
+          <a:chOff x="0" y="0"/>
+          <a:chExt cx="0" cy="0"/>
+        </a:xfrm>
+      </p:grpSpPr>
+      <p:pic>
+        <p:nvPicPr>
+          <p:cNvPr id="7" name="Picture 6" descr="A graph with lines and a purple line&#10;&#10;AI-generated content may be incorrect.">
+            <a:extLst>
+              <a:ext uri="{FF2B5EF4-FFF2-40B4-BE49-F238E27FC236}">
+                <a16:creationId xmlns:a16="http://schemas.microsoft.com/office/drawing/2014/main" id="{8D64FC06-C5AD-D05A-9AD7-A3C16F61DB19}"/>
+              </a:ext>
+            </a:extLst>
+          </p:cNvPr>
+          <p:cNvPicPr>
+            <a:picLocks noChangeAspect="1"/>
+          </p:cNvPicPr>
+          <p:nvPr/>
+        </p:nvPicPr>
+        <p:blipFill>
+          <a:blip r:embed="rId2">
+            <a:extLst>
+              <a:ext uri="{28A0092B-C50C-407E-A947-70E740481C1C}">
+                <a14:useLocalDpi xmlns:a14="http://schemas.microsoft.com/office/drawing/2010/main" val="0"/>
+              </a:ext>
+            </a:extLst>
+          </a:blip>
+          <a:srcRect r="24533"/>
+          <a:stretch>
+            <a:fillRect/>
+          </a:stretch>
+        </p:blipFill>
+        <p:spPr>
+          <a:xfrm>
+            <a:off x="613791" y="1106263"/>
+            <a:ext cx="4801724" cy="2157988"/>
+          </a:xfrm>
+          <a:prstGeom prst="rect">
+            <a:avLst/>
+          </a:prstGeom>
+        </p:spPr>
+      </p:pic>
+      <p:pic>
+        <p:nvPicPr>
+          <p:cNvPr id="9" name="Picture 8" descr="A graph of a function&#10;&#10;AI-generated content may be incorrect.">
+            <a:extLst>
+              <a:ext uri="{FF2B5EF4-FFF2-40B4-BE49-F238E27FC236}">
+                <a16:creationId xmlns:a16="http://schemas.microsoft.com/office/drawing/2014/main" id="{94478546-A2BE-15CC-8D12-A4601590D3EA}"/>
+              </a:ext>
+            </a:extLst>
+          </p:cNvPr>
+          <p:cNvPicPr>
+            <a:picLocks noChangeAspect="1"/>
+          </p:cNvPicPr>
+          <p:nvPr/>
+        </p:nvPicPr>
+        <p:blipFill>
+          <a:blip r:embed="rId3">
+            <a:extLst>
+              <a:ext uri="{28A0092B-C50C-407E-A947-70E740481C1C}">
+                <a14:useLocalDpi xmlns:a14="http://schemas.microsoft.com/office/drawing/2010/main" val="0"/>
+              </a:ext>
+            </a:extLst>
+          </a:blip>
+          <a:srcRect r="24054"/>
+          <a:stretch>
+            <a:fillRect/>
+          </a:stretch>
+        </p:blipFill>
+        <p:spPr>
+          <a:xfrm>
+            <a:off x="486791" y="3246399"/>
+            <a:ext cx="4928724" cy="2157988"/>
+          </a:xfrm>
+          <a:prstGeom prst="rect">
+            <a:avLst/>
+          </a:prstGeom>
+        </p:spPr>
+      </p:pic>
+      <p:pic>
+        <p:nvPicPr>
+          <p:cNvPr id="11" name="Picture 10" descr="A graph on a black background&#10;&#10;AI-generated content may be incorrect.">
+            <a:extLst>
+              <a:ext uri="{FF2B5EF4-FFF2-40B4-BE49-F238E27FC236}">
+                <a16:creationId xmlns:a16="http://schemas.microsoft.com/office/drawing/2014/main" id="{75D07C54-45C5-E68B-9B06-6FEF52C1D09E}"/>
+              </a:ext>
+            </a:extLst>
+          </p:cNvPr>
+          <p:cNvPicPr>
+            <a:picLocks noChangeAspect="1"/>
+          </p:cNvPicPr>
+          <p:nvPr/>
+        </p:nvPicPr>
+        <p:blipFill>
+          <a:blip r:embed="rId4">
+            <a:extLst>
+              <a:ext uri="{28A0092B-C50C-407E-A947-70E740481C1C}">
+                <a14:useLocalDpi xmlns:a14="http://schemas.microsoft.com/office/drawing/2010/main" val="0"/>
+              </a:ext>
+            </a:extLst>
+          </a:blip>
+          <a:stretch>
+            <a:fillRect/>
+          </a:stretch>
+        </p:blipFill>
+        <p:spPr>
+          <a:xfrm>
+            <a:off x="5377302" y="900213"/>
+            <a:ext cx="4801724" cy="4655108"/>
+          </a:xfrm>
+          <a:prstGeom prst="rect">
+            <a:avLst/>
+          </a:prstGeom>
+        </p:spPr>
+      </p:pic>
+      <p:pic>
+        <p:nvPicPr>
+          <p:cNvPr id="13" name="Picture 12" descr="A graph with lines and a purple line&#10;&#10;AI-generated content may be incorrect.">
+            <a:extLst>
+              <a:ext uri="{FF2B5EF4-FFF2-40B4-BE49-F238E27FC236}">
+                <a16:creationId xmlns:a16="http://schemas.microsoft.com/office/drawing/2014/main" id="{3724FAD0-6B15-D90E-11F3-114349C8761F}"/>
+              </a:ext>
+            </a:extLst>
+          </p:cNvPr>
+          <p:cNvPicPr>
+            <a:picLocks noChangeAspect="1"/>
+          </p:cNvPicPr>
+          <p:nvPr/>
+        </p:nvPicPr>
+        <p:blipFill>
+          <a:blip r:embed="rId2">
+            <a:extLst>
+              <a:ext uri="{28A0092B-C50C-407E-A947-70E740481C1C}">
+                <a14:useLocalDpi xmlns:a14="http://schemas.microsoft.com/office/drawing/2010/main" val="0"/>
+              </a:ext>
+            </a:extLst>
+          </a:blip>
+          <a:srcRect l="74701" t="16893" r="-1" b="25322"/>
+          <a:stretch>
+            <a:fillRect/>
+          </a:stretch>
+        </p:blipFill>
+        <p:spPr>
+          <a:xfrm>
+            <a:off x="6500042" y="1101324"/>
+            <a:ext cx="1609688" cy="1246988"/>
           </a:xfrm>
           <a:prstGeom prst="rect">
             <a:avLst/>
@@ -8644,10 +9711,10 @@
       </p:pic>
       <p:cxnSp>
         <p:nvCxnSpPr>
-          <p:cNvPr id="18" name="Straight Connector 17">
-            <a:extLst>
-              <a:ext uri="{FF2B5EF4-FFF2-40B4-BE49-F238E27FC236}">
-                <a16:creationId xmlns:a16="http://schemas.microsoft.com/office/drawing/2014/main" id="{BE754E9E-E7FB-3E00-B4D7-56CC44B956E8}"/>
+          <p:cNvPr id="14" name="Straight Arrow Connector 13">
+            <a:extLst>
+              <a:ext uri="{FF2B5EF4-FFF2-40B4-BE49-F238E27FC236}">
+                <a16:creationId xmlns:a16="http://schemas.microsoft.com/office/drawing/2014/main" id="{4D1FDB70-9A69-5733-86FE-C224E414A4E1}"/>
               </a:ext>
             </a:extLst>
           </p:cNvPr>
@@ -8658,15 +9725,15 @@
         </p:nvCxnSpPr>
         <p:spPr>
           <a:xfrm>
-            <a:off x="4445464" y="2648125"/>
-            <a:ext cx="3817692" cy="0"/>
+            <a:off x="3327080" y="4697675"/>
+            <a:ext cx="720000" cy="0"/>
           </a:xfrm>
-          <a:prstGeom prst="line">
+          <a:prstGeom prst="straightConnector1">
             <a:avLst/>
           </a:prstGeom>
-          <a:ln w="9525">
+          <a:ln w="28575">
             <a:solidFill>
-              <a:schemeClr val="tx1"/>
+              <a:srgbClr val="92D050"/>
             </a:solidFill>
             <a:headEnd type="none" w="med" len="med"/>
             <a:tailEnd type="triangle" w="med" len="med"/>
@@ -8687,47 +9754,235 @@
           </a:fontRef>
         </p:style>
       </p:cxnSp>
-      <p:pic>
-        <p:nvPicPr>
-          <p:cNvPr id="23" name="Picture 22" descr="A graph with lines and numbers&#10;&#10;AI-generated content may be incorrect.">
-            <a:extLst>
-              <a:ext uri="{FF2B5EF4-FFF2-40B4-BE49-F238E27FC236}">
-                <a16:creationId xmlns:a16="http://schemas.microsoft.com/office/drawing/2014/main" id="{6A6A7DDB-2FA4-ADB5-8B9B-B239FD39C0D0}"/>
-              </a:ext>
-            </a:extLst>
-          </p:cNvPr>
-          <p:cNvPicPr>
-            <a:picLocks noChangeAspect="1"/>
-          </p:cNvPicPr>
+      <p:cxnSp>
+        <p:nvCxnSpPr>
+          <p:cNvPr id="16" name="Straight Arrow Connector 15">
+            <a:extLst>
+              <a:ext uri="{FF2B5EF4-FFF2-40B4-BE49-F238E27FC236}">
+                <a16:creationId xmlns:a16="http://schemas.microsoft.com/office/drawing/2014/main" id="{9FA02C8E-EF50-F252-4127-499621ED548A}"/>
+              </a:ext>
+            </a:extLst>
+          </p:cNvPr>
+          <p:cNvCxnSpPr>
+            <a:cxnSpLocks/>
+          </p:cNvCxnSpPr>
           <p:nvPr/>
-        </p:nvPicPr>
-        <p:blipFill>
-          <a:blip r:embed="rId3">
-            <a:extLst>
-              <a:ext uri="{28A0092B-C50C-407E-A947-70E740481C1C}">
-                <a14:useLocalDpi xmlns:a14="http://schemas.microsoft.com/office/drawing/2010/main" val="0"/>
-              </a:ext>
-            </a:extLst>
-          </a:blip>
-          <a:srcRect t="78608"/>
-          <a:stretch>
-            <a:fillRect/>
-          </a:stretch>
-        </p:blipFill>
+        </p:nvCxnSpPr>
         <p:spPr>
-          <a:xfrm>
-            <a:off x="4079099" y="3045877"/>
-            <a:ext cx="4319025" cy="461639"/>
+          <a:xfrm flipH="1" flipV="1">
+            <a:off x="4047080" y="4697675"/>
+            <a:ext cx="720000" cy="0"/>
           </a:xfrm>
-          <a:prstGeom prst="rect">
+          <a:prstGeom prst="straightConnector1">
             <a:avLst/>
           </a:prstGeom>
+          <a:ln w="28575">
+            <a:solidFill>
+              <a:srgbClr val="92D050"/>
+            </a:solidFill>
+            <a:headEnd type="none" w="med" len="med"/>
+            <a:tailEnd type="triangle" w="med" len="med"/>
+          </a:ln>
         </p:spPr>
-      </p:pic>
+        <p:style>
+          <a:lnRef idx="2">
+            <a:schemeClr val="accent1"/>
+          </a:lnRef>
+          <a:fillRef idx="0">
+            <a:schemeClr val="accent1"/>
+          </a:fillRef>
+          <a:effectRef idx="1">
+            <a:schemeClr val="accent1"/>
+          </a:effectRef>
+          <a:fontRef idx="minor">
+            <a:schemeClr val="tx1"/>
+          </a:fontRef>
+        </p:style>
+      </p:cxnSp>
+      <p:cxnSp>
+        <p:nvCxnSpPr>
+          <p:cNvPr id="19" name="Straight Arrow Connector 18">
+            <a:extLst>
+              <a:ext uri="{FF2B5EF4-FFF2-40B4-BE49-F238E27FC236}">
+                <a16:creationId xmlns:a16="http://schemas.microsoft.com/office/drawing/2014/main" id="{1F8A762F-FC71-8C59-92E1-C1057E2C75DD}"/>
+              </a:ext>
+            </a:extLst>
+          </p:cNvPr>
+          <p:cNvCxnSpPr>
+            <a:cxnSpLocks/>
+          </p:cNvCxnSpPr>
+          <p:nvPr/>
+        </p:nvCxnSpPr>
+        <p:spPr>
+          <a:xfrm flipH="1" flipV="1">
+            <a:off x="8952534" y="4438796"/>
+            <a:ext cx="720000" cy="0"/>
+          </a:xfrm>
+          <a:prstGeom prst="straightConnector1">
+            <a:avLst/>
+          </a:prstGeom>
+          <a:ln w="28575">
+            <a:solidFill>
+              <a:srgbClr val="92D050"/>
+            </a:solidFill>
+            <a:headEnd type="none" w="med" len="med"/>
+            <a:tailEnd type="triangle" w="med" len="med"/>
+          </a:ln>
+        </p:spPr>
+        <p:style>
+          <a:lnRef idx="2">
+            <a:schemeClr val="accent1"/>
+          </a:lnRef>
+          <a:fillRef idx="0">
+            <a:schemeClr val="accent1"/>
+          </a:fillRef>
+          <a:effectRef idx="1">
+            <a:schemeClr val="accent1"/>
+          </a:effectRef>
+          <a:fontRef idx="minor">
+            <a:schemeClr val="tx1"/>
+          </a:fontRef>
+        </p:style>
+      </p:cxnSp>
+      <p:cxnSp>
+        <p:nvCxnSpPr>
+          <p:cNvPr id="20" name="Straight Arrow Connector 19">
+            <a:extLst>
+              <a:ext uri="{FF2B5EF4-FFF2-40B4-BE49-F238E27FC236}">
+                <a16:creationId xmlns:a16="http://schemas.microsoft.com/office/drawing/2014/main" id="{4FD11035-547F-0EFE-CF4F-CD66577C11C2}"/>
+              </a:ext>
+            </a:extLst>
+          </p:cNvPr>
+          <p:cNvCxnSpPr>
+            <a:cxnSpLocks/>
+          </p:cNvCxnSpPr>
+          <p:nvPr/>
+        </p:nvCxnSpPr>
+        <p:spPr>
+          <a:xfrm rot="5400000" flipH="1" flipV="1">
+            <a:off x="8592534" y="2432192"/>
+            <a:ext cx="720000" cy="0"/>
+          </a:xfrm>
+          <a:prstGeom prst="straightConnector1">
+            <a:avLst/>
+          </a:prstGeom>
+          <a:ln w="30480">
+            <a:solidFill>
+              <a:srgbClr val="92D050"/>
+            </a:solidFill>
+            <a:headEnd type="none" w="med" len="med"/>
+            <a:tailEnd type="triangle" w="med" len="med"/>
+          </a:ln>
+        </p:spPr>
+        <p:style>
+          <a:lnRef idx="2">
+            <a:schemeClr val="accent1"/>
+          </a:lnRef>
+          <a:fillRef idx="0">
+            <a:schemeClr val="accent1"/>
+          </a:fillRef>
+          <a:effectRef idx="1">
+            <a:schemeClr val="accent1"/>
+          </a:effectRef>
+          <a:fontRef idx="minor">
+            <a:schemeClr val="tx1"/>
+          </a:fontRef>
+        </p:style>
+      </p:cxnSp>
+      <p:cxnSp>
+        <p:nvCxnSpPr>
+          <p:cNvPr id="22" name="Straight Arrow Connector 21">
+            <a:extLst>
+              <a:ext uri="{FF2B5EF4-FFF2-40B4-BE49-F238E27FC236}">
+                <a16:creationId xmlns:a16="http://schemas.microsoft.com/office/drawing/2014/main" id="{FFFCF4A9-3AD3-965D-DB68-F189FCA74A2C}"/>
+              </a:ext>
+            </a:extLst>
+          </p:cNvPr>
+          <p:cNvCxnSpPr>
+            <a:cxnSpLocks/>
+          </p:cNvCxnSpPr>
+          <p:nvPr/>
+        </p:nvCxnSpPr>
+        <p:spPr>
+          <a:xfrm flipV="1">
+            <a:off x="8239622" y="4438796"/>
+            <a:ext cx="720000" cy="0"/>
+          </a:xfrm>
+          <a:prstGeom prst="straightConnector1">
+            <a:avLst/>
+          </a:prstGeom>
+          <a:ln w="28575">
+            <a:solidFill>
+              <a:srgbClr val="92D050"/>
+            </a:solidFill>
+            <a:headEnd type="none" w="med" len="med"/>
+            <a:tailEnd type="triangle" w="med" len="med"/>
+          </a:ln>
+        </p:spPr>
+        <p:style>
+          <a:lnRef idx="2">
+            <a:schemeClr val="accent1"/>
+          </a:lnRef>
+          <a:fillRef idx="0">
+            <a:schemeClr val="accent1"/>
+          </a:fillRef>
+          <a:effectRef idx="1">
+            <a:schemeClr val="accent1"/>
+          </a:effectRef>
+          <a:fontRef idx="minor">
+            <a:schemeClr val="tx1"/>
+          </a:fontRef>
+        </p:style>
+      </p:cxnSp>
+      <p:cxnSp>
+        <p:nvCxnSpPr>
+          <p:cNvPr id="23" name="Straight Arrow Connector 22">
+            <a:extLst>
+              <a:ext uri="{FF2B5EF4-FFF2-40B4-BE49-F238E27FC236}">
+                <a16:creationId xmlns:a16="http://schemas.microsoft.com/office/drawing/2014/main" id="{72FBEB78-FE7F-FDF0-BE4B-8C40E232EAE4}"/>
+              </a:ext>
+            </a:extLst>
+          </p:cNvPr>
+          <p:cNvCxnSpPr>
+            <a:cxnSpLocks/>
+          </p:cNvCxnSpPr>
+          <p:nvPr/>
+        </p:nvCxnSpPr>
+        <p:spPr>
+          <a:xfrm rot="16200000" flipH="1">
+            <a:off x="8588989" y="1724818"/>
+            <a:ext cx="720000" cy="0"/>
+          </a:xfrm>
+          <a:prstGeom prst="straightConnector1">
+            <a:avLst/>
+          </a:prstGeom>
+          <a:ln w="30480">
+            <a:solidFill>
+              <a:srgbClr val="92D050"/>
+            </a:solidFill>
+            <a:headEnd type="none" w="med" len="med"/>
+            <a:tailEnd type="triangle" w="med" len="med"/>
+          </a:ln>
+        </p:spPr>
+        <p:style>
+          <a:lnRef idx="2">
+            <a:schemeClr val="accent1"/>
+          </a:lnRef>
+          <a:fillRef idx="0">
+            <a:schemeClr val="accent1"/>
+          </a:fillRef>
+          <a:effectRef idx="1">
+            <a:schemeClr val="accent1"/>
+          </a:effectRef>
+          <a:fontRef idx="minor">
+            <a:schemeClr val="tx1"/>
+          </a:fontRef>
+        </p:style>
+      </p:cxnSp>
     </p:spTree>
     <p:extLst>
       <p:ext uri="{BB962C8B-B14F-4D97-AF65-F5344CB8AC3E}">
-        <p14:creationId xmlns:p14="http://schemas.microsoft.com/office/powerpoint/2010/main" val="622767804"/>
+        <p14:creationId xmlns:p14="http://schemas.microsoft.com/office/powerpoint/2010/main" val="2037230906"/>
       </p:ext>
     </p:extLst>
   </p:cSld>
@@ -8737,7 +9992,7 @@
 </p:sld>
 </file>
 
-<file path=ppt/slides/slide11.xml><?xml version="1.0" encoding="utf-8"?>
+<file path=ppt/slides/slide14.xml><?xml version="1.0" encoding="utf-8"?>
 <p:sld xmlns:a="http://schemas.openxmlformats.org/drawingml/2006/main" xmlns:r="http://schemas.openxmlformats.org/officeDocument/2006/relationships" xmlns:p="http://schemas.openxmlformats.org/presentationml/2006/main">
   <p:cSld>
     <p:spTree>
@@ -8841,7 +10096,7 @@
 </p:sld>
 </file>
 
-<file path=ppt/slides/slide12.xml><?xml version="1.0" encoding="utf-8"?>
+<file path=ppt/slides/slide15.xml><?xml version="1.0" encoding="utf-8"?>
 <p:sld xmlns:a="http://schemas.openxmlformats.org/drawingml/2006/main" xmlns:r="http://schemas.openxmlformats.org/officeDocument/2006/relationships" xmlns:p="http://schemas.openxmlformats.org/presentationml/2006/main">
   <p:cSld>
     <p:spTree>
@@ -9021,7 +10276,7 @@
         </p:nvCxnSpPr>
         <p:spPr>
           <a:xfrm>
-            <a:off x="4381500" y="3587962"/>
+            <a:off x="4673600" y="5238962"/>
             <a:ext cx="1092200" cy="0"/>
           </a:xfrm>
           <a:prstGeom prst="straightConnector1">
@@ -9111,7 +10366,7 @@
         </p:nvCxnSpPr>
         <p:spPr>
           <a:xfrm>
-            <a:off x="9944100" y="3918162"/>
+            <a:off x="9063716" y="5061162"/>
             <a:ext cx="622300" cy="0"/>
           </a:xfrm>
           <a:prstGeom prst="straightConnector1">
@@ -9153,7 +10408,7 @@
 </p:sld>
 </file>
 
-<file path=ppt/slides/slide13.xml><?xml version="1.0" encoding="utf-8"?>
+<file path=ppt/slides/slide16.xml><?xml version="1.0" encoding="utf-8"?>
 <p:sld xmlns:a="http://schemas.openxmlformats.org/drawingml/2006/main" xmlns:r="http://schemas.openxmlformats.org/officeDocument/2006/relationships" xmlns:p="http://schemas.openxmlformats.org/presentationml/2006/main">
   <p:cSld>
     <p:spTree>
@@ -9675,7 +10930,7 @@
 </p:sld>
 </file>
 
-<file path=ppt/slides/slide14.xml><?xml version="1.0" encoding="utf-8"?>
+<file path=ppt/slides/slide17.xml><?xml version="1.0" encoding="utf-8"?>
 <p:sld xmlns:a="http://schemas.openxmlformats.org/drawingml/2006/main" xmlns:r="http://schemas.openxmlformats.org/officeDocument/2006/relationships" xmlns:p="http://schemas.openxmlformats.org/presentationml/2006/main">
   <p:cSld>
     <p:spTree>
@@ -9694,10 +10949,10 @@
       </p:grpSpPr>
       <p:pic>
         <p:nvPicPr>
-          <p:cNvPr id="7" name="Picture 6" descr="A graph with lines and curves&#10;&#10;AI-generated content may be incorrect.">
-            <a:extLst>
-              <a:ext uri="{FF2B5EF4-FFF2-40B4-BE49-F238E27FC236}">
-                <a16:creationId xmlns:a16="http://schemas.microsoft.com/office/drawing/2014/main" id="{C024BA5C-118A-EE94-8A6E-8289661CC7E2}"/>
+          <p:cNvPr id="5" name="Picture 4" descr="A graph with lines and curves&#10;&#10;AI-generated content may be incorrect.">
+            <a:extLst>
+              <a:ext uri="{FF2B5EF4-FFF2-40B4-BE49-F238E27FC236}">
+                <a16:creationId xmlns:a16="http://schemas.microsoft.com/office/drawing/2014/main" id="{E044BD06-A0AC-955F-A360-04416C22187C}"/>
               </a:ext>
             </a:extLst>
           </p:cNvPr>
@@ -9720,7 +10975,7 @@
         </p:blipFill>
         <p:spPr>
           <a:xfrm>
-            <a:off x="3713203" y="118313"/>
+            <a:off x="3713202" y="107680"/>
             <a:ext cx="6477013" cy="2157988"/>
           </a:xfrm>
           <a:prstGeom prst="rect">
@@ -9940,10 +11195,1247 @@
           </a:fontRef>
         </p:style>
       </p:cxnSp>
+      <p:pic>
+        <p:nvPicPr>
+          <p:cNvPr id="12" name="Picture 11" descr="A graph of a function&#10;&#10;AI-generated content may be incorrect.">
+            <a:extLst>
+              <a:ext uri="{FF2B5EF4-FFF2-40B4-BE49-F238E27FC236}">
+                <a16:creationId xmlns:a16="http://schemas.microsoft.com/office/drawing/2014/main" id="{EB11595E-82EA-FA9F-19E9-F508FB47CE04}"/>
+              </a:ext>
+            </a:extLst>
+          </p:cNvPr>
+          <p:cNvPicPr>
+            <a:picLocks noChangeAspect="1"/>
+          </p:cNvPicPr>
+          <p:nvPr/>
+        </p:nvPicPr>
+        <p:blipFill>
+          <a:blip r:embed="rId4">
+            <a:extLst>
+              <a:ext uri="{28A0092B-C50C-407E-A947-70E740481C1C}">
+                <a14:useLocalDpi xmlns:a14="http://schemas.microsoft.com/office/drawing/2010/main" val="0"/>
+              </a:ext>
+            </a:extLst>
+          </a:blip>
+          <a:stretch>
+            <a:fillRect/>
+          </a:stretch>
+        </p:blipFill>
+        <p:spPr>
+          <a:xfrm>
+            <a:off x="-655682" y="814534"/>
+            <a:ext cx="9144000" cy="6858000"/>
+          </a:xfrm>
+          <a:prstGeom prst="rect">
+            <a:avLst/>
+          </a:prstGeom>
+        </p:spPr>
+      </p:pic>
     </p:spTree>
     <p:extLst>
       <p:ext uri="{BB962C8B-B14F-4D97-AF65-F5344CB8AC3E}">
         <p14:creationId xmlns:p14="http://schemas.microsoft.com/office/powerpoint/2010/main" val="1075247424"/>
+      </p:ext>
+    </p:extLst>
+  </p:cSld>
+  <p:clrMapOvr>
+    <a:masterClrMapping/>
+  </p:clrMapOvr>
+</p:sld>
+</file>
+
+<file path=ppt/slides/slide18.xml><?xml version="1.0" encoding="utf-8"?>
+<p:sld xmlns:a="http://schemas.openxmlformats.org/drawingml/2006/main" xmlns:r="http://schemas.openxmlformats.org/officeDocument/2006/relationships" xmlns:p="http://schemas.openxmlformats.org/presentationml/2006/main">
+  <p:cSld>
+    <p:spTree>
+      <p:nvGrpSpPr>
+        <p:cNvPr id="1" name=""/>
+        <p:cNvGrpSpPr/>
+        <p:nvPr/>
+      </p:nvGrpSpPr>
+      <p:grpSpPr>
+        <a:xfrm>
+          <a:off x="0" y="0"/>
+          <a:ext cx="0" cy="0"/>
+          <a:chOff x="0" y="0"/>
+          <a:chExt cx="0" cy="0"/>
+        </a:xfrm>
+      </p:grpSpPr>
+      <p:sp>
+        <p:nvSpPr>
+          <p:cNvPr id="16" name="Arrow: Right 15">
+            <a:extLst>
+              <a:ext uri="{FF2B5EF4-FFF2-40B4-BE49-F238E27FC236}">
+                <a16:creationId xmlns:a16="http://schemas.microsoft.com/office/drawing/2014/main" id="{C579D9EF-653C-83E1-7DAB-D2495EBEFA3A}"/>
+              </a:ext>
+            </a:extLst>
+          </p:cNvPr>
+          <p:cNvSpPr/>
+          <p:nvPr/>
+        </p:nvSpPr>
+        <p:spPr>
+          <a:xfrm>
+            <a:off x="6607425" y="3256764"/>
+            <a:ext cx="978408" cy="484632"/>
+          </a:xfrm>
+          <a:prstGeom prst="rightArrow">
+            <a:avLst/>
+          </a:prstGeom>
+        </p:spPr>
+        <p:style>
+          <a:lnRef idx="2">
+            <a:schemeClr val="accent1">
+              <a:shade val="15000"/>
+            </a:schemeClr>
+          </a:lnRef>
+          <a:fillRef idx="1">
+            <a:schemeClr val="accent1"/>
+          </a:fillRef>
+          <a:effectRef idx="0">
+            <a:schemeClr val="accent1"/>
+          </a:effectRef>
+          <a:fontRef idx="minor">
+            <a:schemeClr val="lt1"/>
+          </a:fontRef>
+        </p:style>
+        <p:txBody>
+          <a:bodyPr rtlCol="0" anchor="ctr"/>
+          <a:lstStyle/>
+          <a:p>
+            <a:pPr algn="ctr"/>
+            <a:endParaRPr lang="de-DE"/>
+          </a:p>
+        </p:txBody>
+      </p:sp>
+      <p:sp>
+        <p:nvSpPr>
+          <p:cNvPr id="20" name="TextBox 19">
+            <a:extLst>
+              <a:ext uri="{FF2B5EF4-FFF2-40B4-BE49-F238E27FC236}">
+                <a16:creationId xmlns:a16="http://schemas.microsoft.com/office/drawing/2014/main" id="{526443CF-95C1-C731-FAFE-D8041279C723}"/>
+              </a:ext>
+            </a:extLst>
+          </p:cNvPr>
+          <p:cNvSpPr txBox="1"/>
+          <p:nvPr/>
+        </p:nvSpPr>
+        <p:spPr>
+          <a:xfrm>
+            <a:off x="2061450" y="5146236"/>
+            <a:ext cx="830677" cy="461665"/>
+          </a:xfrm>
+          <a:prstGeom prst="rect">
+            <a:avLst/>
+          </a:prstGeom>
+          <a:noFill/>
+        </p:spPr>
+        <p:txBody>
+          <a:bodyPr wrap="none" rtlCol="0">
+            <a:spAutoFit/>
+          </a:bodyPr>
+          <a:lstStyle/>
+          <a:p>
+            <a:r>
+              <a:rPr lang="de-DE" sz="2400" dirty="0"/>
+              <a:t>Time</a:t>
+            </a:r>
+          </a:p>
+        </p:txBody>
+      </p:sp>
+      <p:cxnSp>
+        <p:nvCxnSpPr>
+          <p:cNvPr id="21" name="Straight Arrow Connector 20">
+            <a:extLst>
+              <a:ext uri="{FF2B5EF4-FFF2-40B4-BE49-F238E27FC236}">
+                <a16:creationId xmlns:a16="http://schemas.microsoft.com/office/drawing/2014/main" id="{591D1781-47F4-B402-FF44-430F64F2921C}"/>
+              </a:ext>
+            </a:extLst>
+          </p:cNvPr>
+          <p:cNvCxnSpPr>
+            <a:cxnSpLocks/>
+          </p:cNvCxnSpPr>
+          <p:nvPr/>
+        </p:nvCxnSpPr>
+        <p:spPr>
+          <a:xfrm flipV="1">
+            <a:off x="821860" y="1999482"/>
+            <a:ext cx="0" cy="2877318"/>
+          </a:xfrm>
+          <a:prstGeom prst="straightConnector1">
+            <a:avLst/>
+          </a:prstGeom>
+          <a:ln w="57150">
+            <a:tailEnd type="triangle"/>
+          </a:ln>
+        </p:spPr>
+        <p:style>
+          <a:lnRef idx="2">
+            <a:schemeClr val="accent1"/>
+          </a:lnRef>
+          <a:fillRef idx="0">
+            <a:schemeClr val="accent1"/>
+          </a:fillRef>
+          <a:effectRef idx="1">
+            <a:schemeClr val="accent1"/>
+          </a:effectRef>
+          <a:fontRef idx="minor">
+            <a:schemeClr val="tx1"/>
+          </a:fontRef>
+        </p:style>
+      </p:cxnSp>
+      <mc:AlternateContent xmlns:mc="http://schemas.openxmlformats.org/markup-compatibility/2006" xmlns:a14="http://schemas.microsoft.com/office/drawing/2010/main">
+        <mc:Choice Requires="a14">
+          <p:sp>
+            <p:nvSpPr>
+              <p:cNvPr id="23" name="TextBox 22">
+                <a:extLst>
+                  <a:ext uri="{FF2B5EF4-FFF2-40B4-BE49-F238E27FC236}">
+                    <a16:creationId xmlns:a16="http://schemas.microsoft.com/office/drawing/2014/main" id="{0253A647-BA26-440D-5BF4-D815CEED785B}"/>
+                  </a:ext>
+                </a:extLst>
+              </p:cNvPr>
+              <p:cNvSpPr txBox="1"/>
+              <p:nvPr/>
+            </p:nvSpPr>
+            <p:spPr>
+              <a:xfrm>
+                <a:off x="271786" y="3207308"/>
+                <a:ext cx="608885" cy="461665"/>
+              </a:xfrm>
+              <a:prstGeom prst="rect">
+                <a:avLst/>
+              </a:prstGeom>
+              <a:noFill/>
+            </p:spPr>
+            <p:txBody>
+              <a:bodyPr wrap="none" rtlCol="0">
+                <a:spAutoFit/>
+              </a:bodyPr>
+              <a:lstStyle/>
+              <a:p>
+                <a:pPr/>
+                <a14:m>
+                  <m:oMathPara xmlns:m="http://schemas.openxmlformats.org/officeDocument/2006/math">
+                    <m:oMathParaPr>
+                      <m:jc m:val="centerGroup"/>
+                    </m:oMathParaPr>
+                    <m:oMath xmlns:m="http://schemas.openxmlformats.org/officeDocument/2006/math">
+                      <m:r>
+                        <m:rPr>
+                          <m:sty m:val="p"/>
+                        </m:rPr>
+                        <a:rPr lang="de-DE" sz="2400" dirty="0" smtClean="0">
+                          <a:latin typeface="Cambria Math" panose="02040503050406030204" pitchFamily="18" charset="0"/>
+                        </a:rPr>
+                        <m:t>Δ</m:t>
+                      </m:r>
+                      <m:r>
+                        <a:rPr lang="de-DE" sz="2400" i="1" dirty="0">
+                          <a:latin typeface="Cambria Math" panose="02040503050406030204" pitchFamily="18" charset="0"/>
+                        </a:rPr>
+                        <m:t>𝑓</m:t>
+                      </m:r>
+                    </m:oMath>
+                  </m:oMathPara>
+                </a14:m>
+                <a:endParaRPr lang="de-DE" sz="2400" dirty="0"/>
+              </a:p>
+            </p:txBody>
+          </p:sp>
+        </mc:Choice>
+        <mc:Fallback xmlns="">
+          <p:sp>
+            <p:nvSpPr>
+              <p:cNvPr id="23" name="TextBox 22">
+                <a:extLst>
+                  <a:ext uri="{FF2B5EF4-FFF2-40B4-BE49-F238E27FC236}">
+                    <a16:creationId xmlns:a16="http://schemas.microsoft.com/office/drawing/2014/main" id="{0253A647-BA26-440D-5BF4-D815CEED785B}"/>
+                  </a:ext>
+                </a:extLst>
+              </p:cNvPr>
+              <p:cNvSpPr txBox="1">
+                <a:spLocks noRot="1" noChangeAspect="1" noMove="1" noResize="1" noEditPoints="1" noAdjustHandles="1" noChangeArrowheads="1" noChangeShapeType="1" noTextEdit="1"/>
+              </p:cNvSpPr>
+              <p:nvPr/>
+            </p:nvSpPr>
+            <p:spPr>
+              <a:xfrm>
+                <a:off x="271786" y="3207308"/>
+                <a:ext cx="608885" cy="461665"/>
+              </a:xfrm>
+              <a:prstGeom prst="rect">
+                <a:avLst/>
+              </a:prstGeom>
+              <a:blipFill>
+                <a:blip r:embed="rId6"/>
+                <a:stretch>
+                  <a:fillRect r="-2020" b="-15789"/>
+                </a:stretch>
+              </a:blipFill>
+            </p:spPr>
+            <p:txBody>
+              <a:bodyPr/>
+              <a:lstStyle/>
+              <a:p>
+                <a:r>
+                  <a:rPr lang="de-DE">
+                    <a:noFill/>
+                  </a:rPr>
+                  <a:t> </a:t>
+                </a:r>
+              </a:p>
+            </p:txBody>
+          </p:sp>
+        </mc:Fallback>
+      </mc:AlternateContent>
+      <p:sp>
+        <p:nvSpPr>
+          <p:cNvPr id="24" name="TextBox 23">
+            <a:extLst>
+              <a:ext uri="{FF2B5EF4-FFF2-40B4-BE49-F238E27FC236}">
+                <a16:creationId xmlns:a16="http://schemas.microsoft.com/office/drawing/2014/main" id="{4AFC3488-BB18-D932-BEF2-09CA48A6DBD0}"/>
+              </a:ext>
+            </a:extLst>
+          </p:cNvPr>
+          <p:cNvSpPr txBox="1"/>
+          <p:nvPr/>
+        </p:nvSpPr>
+        <p:spPr>
+          <a:xfrm>
+            <a:off x="4844143" y="740229"/>
+            <a:ext cx="184731" cy="369332"/>
+          </a:xfrm>
+          <a:prstGeom prst="rect">
+            <a:avLst/>
+          </a:prstGeom>
+          <a:noFill/>
+        </p:spPr>
+        <p:txBody>
+          <a:bodyPr wrap="none" rtlCol="0">
+            <a:spAutoFit/>
+          </a:bodyPr>
+          <a:lstStyle/>
+          <a:p>
+            <a:endParaRPr lang="de-DE" dirty="0"/>
+          </a:p>
+        </p:txBody>
+      </p:sp>
+      <p:sp>
+        <p:nvSpPr>
+          <p:cNvPr id="26" name="TextBox 25">
+            <a:extLst>
+              <a:ext uri="{FF2B5EF4-FFF2-40B4-BE49-F238E27FC236}">
+                <a16:creationId xmlns:a16="http://schemas.microsoft.com/office/drawing/2014/main" id="{CACCDAFC-23F7-CC62-C19A-A0E2B475E3D6}"/>
+              </a:ext>
+            </a:extLst>
+          </p:cNvPr>
+          <p:cNvSpPr txBox="1"/>
+          <p:nvPr/>
+        </p:nvSpPr>
+        <p:spPr>
+          <a:xfrm>
+            <a:off x="1584533" y="1480931"/>
+            <a:ext cx="1772601" cy="461665"/>
+          </a:xfrm>
+          <a:prstGeom prst="rect">
+            <a:avLst/>
+          </a:prstGeom>
+          <a:solidFill>
+            <a:schemeClr val="bg2"/>
+          </a:solidFill>
+          <a:effectLst>
+            <a:softEdge rad="50800"/>
+          </a:effectLst>
+        </p:spPr>
+        <p:txBody>
+          <a:bodyPr wrap="none" rtlCol="0">
+            <a:spAutoFit/>
+          </a:bodyPr>
+          <a:lstStyle/>
+          <a:p>
+            <a:r>
+              <a:rPr lang="de-DE" sz="2400" dirty="0">
+                <a:latin typeface="Cambria" panose="02040503050406030204" pitchFamily="18" charset="0"/>
+                <a:ea typeface="Cambria" panose="02040503050406030204" pitchFamily="18" charset="0"/>
+              </a:rPr>
+              <a:t>abs</a:t>
+            </a:r>
+            <a:r>
+              <a:rPr lang="de-DE" sz="2400" dirty="0">
+                <a:latin typeface="+mj-lt"/>
+                <a:ea typeface="Cambria" panose="02040503050406030204" pitchFamily="18" charset="0"/>
+              </a:rPr>
+              <a:t>(</a:t>
+            </a:r>
+            <a:r>
+              <a:rPr lang="de-DE" sz="2400" dirty="0">
+                <a:latin typeface="Cambria" panose="02040503050406030204" pitchFamily="18" charset="0"/>
+                <a:ea typeface="Cambria" panose="02040503050406030204" pitchFamily="18" charset="0"/>
+              </a:rPr>
+              <a:t>kspace</a:t>
+            </a:r>
+            <a:r>
+              <a:rPr lang="de-DE" sz="2400" dirty="0">
+                <a:latin typeface="+mj-lt"/>
+                <a:ea typeface="Cambria" panose="02040503050406030204" pitchFamily="18" charset="0"/>
+              </a:rPr>
+              <a:t>)</a:t>
+            </a:r>
+          </a:p>
+        </p:txBody>
+      </p:sp>
+      <p:sp>
+        <p:nvSpPr>
+          <p:cNvPr id="27" name="TextBox 26">
+            <a:extLst>
+              <a:ext uri="{FF2B5EF4-FFF2-40B4-BE49-F238E27FC236}">
+                <a16:creationId xmlns:a16="http://schemas.microsoft.com/office/drawing/2014/main" id="{583735AA-BE72-ECDB-96E0-89E0872FB2AE}"/>
+              </a:ext>
+            </a:extLst>
+          </p:cNvPr>
+          <p:cNvSpPr txBox="1"/>
+          <p:nvPr/>
+        </p:nvSpPr>
+        <p:spPr>
+          <a:xfrm>
+            <a:off x="4326812" y="815406"/>
+            <a:ext cx="1605119" cy="461665"/>
+          </a:xfrm>
+          <a:prstGeom prst="rect">
+            <a:avLst/>
+          </a:prstGeom>
+          <a:solidFill>
+            <a:schemeClr val="bg2"/>
+          </a:solidFill>
+          <a:effectLst>
+            <a:softEdge rad="50800"/>
+          </a:effectLst>
+        </p:spPr>
+        <p:txBody>
+          <a:bodyPr wrap="none" rtlCol="0">
+            <a:spAutoFit/>
+          </a:bodyPr>
+          <a:lstStyle/>
+          <a:p>
+            <a:r>
+              <a:rPr lang="de-DE" sz="2400" dirty="0">
+                <a:latin typeface="Cambria" panose="02040503050406030204" pitchFamily="18" charset="0"/>
+                <a:ea typeface="Cambria" panose="02040503050406030204" pitchFamily="18" charset="0"/>
+              </a:rPr>
+              <a:t>Re</a:t>
+            </a:r>
+            <a:r>
+              <a:rPr lang="de-DE" sz="2400" dirty="0">
+                <a:latin typeface="+mj-lt"/>
+                <a:ea typeface="Cambria" panose="02040503050406030204" pitchFamily="18" charset="0"/>
+              </a:rPr>
+              <a:t>(</a:t>
+            </a:r>
+            <a:r>
+              <a:rPr lang="de-DE" sz="2400" dirty="0">
+                <a:latin typeface="Cambria" panose="02040503050406030204" pitchFamily="18" charset="0"/>
+                <a:ea typeface="Cambria" panose="02040503050406030204" pitchFamily="18" charset="0"/>
+              </a:rPr>
+              <a:t>kspace</a:t>
+            </a:r>
+            <a:r>
+              <a:rPr lang="de-DE" sz="2400" dirty="0">
+                <a:latin typeface="+mj-lt"/>
+                <a:ea typeface="Cambria" panose="02040503050406030204" pitchFamily="18" charset="0"/>
+              </a:rPr>
+              <a:t>)</a:t>
+            </a:r>
+          </a:p>
+        </p:txBody>
+      </p:sp>
+      <p:sp>
+        <p:nvSpPr>
+          <p:cNvPr id="28" name="TextBox 27">
+            <a:extLst>
+              <a:ext uri="{FF2B5EF4-FFF2-40B4-BE49-F238E27FC236}">
+                <a16:creationId xmlns:a16="http://schemas.microsoft.com/office/drawing/2014/main" id="{3BC38583-9D20-FFB1-D7E1-6A5466DBFCAD}"/>
+              </a:ext>
+            </a:extLst>
+          </p:cNvPr>
+          <p:cNvSpPr txBox="1"/>
+          <p:nvPr/>
+        </p:nvSpPr>
+        <p:spPr>
+          <a:xfrm>
+            <a:off x="4343669" y="3576640"/>
+            <a:ext cx="1625125" cy="461665"/>
+          </a:xfrm>
+          <a:prstGeom prst="rect">
+            <a:avLst/>
+          </a:prstGeom>
+          <a:solidFill>
+            <a:schemeClr val="bg2"/>
+          </a:solidFill>
+          <a:effectLst>
+            <a:softEdge rad="50800"/>
+          </a:effectLst>
+        </p:spPr>
+        <p:txBody>
+          <a:bodyPr wrap="none" rtlCol="0">
+            <a:spAutoFit/>
+          </a:bodyPr>
+          <a:lstStyle/>
+          <a:p>
+            <a:r>
+              <a:rPr lang="de-DE" sz="2400" dirty="0">
+                <a:latin typeface="Cambria" panose="02040503050406030204" pitchFamily="18" charset="0"/>
+                <a:ea typeface="Cambria" panose="02040503050406030204" pitchFamily="18" charset="0"/>
+              </a:rPr>
+              <a:t>Im</a:t>
+            </a:r>
+            <a:r>
+              <a:rPr lang="de-DE" sz="2400" dirty="0">
+                <a:latin typeface="+mj-lt"/>
+                <a:ea typeface="Cambria" panose="02040503050406030204" pitchFamily="18" charset="0"/>
+              </a:rPr>
+              <a:t>(</a:t>
+            </a:r>
+            <a:r>
+              <a:rPr lang="de-DE" sz="2400" dirty="0">
+                <a:latin typeface="Cambria" panose="02040503050406030204" pitchFamily="18" charset="0"/>
+                <a:ea typeface="Cambria" panose="02040503050406030204" pitchFamily="18" charset="0"/>
+              </a:rPr>
+              <a:t>kspace</a:t>
+            </a:r>
+            <a:r>
+              <a:rPr lang="de-DE" sz="2400" dirty="0">
+                <a:latin typeface="+mj-lt"/>
+                <a:ea typeface="Cambria" panose="02040503050406030204" pitchFamily="18" charset="0"/>
+              </a:rPr>
+              <a:t>)</a:t>
+            </a:r>
+          </a:p>
+        </p:txBody>
+      </p:sp>
+      <p:sp>
+        <p:nvSpPr>
+          <p:cNvPr id="30" name="TextBox 29">
+            <a:extLst>
+              <a:ext uri="{FF2B5EF4-FFF2-40B4-BE49-F238E27FC236}">
+                <a16:creationId xmlns:a16="http://schemas.microsoft.com/office/drawing/2014/main" id="{E2B7AF52-AF55-D5A3-D3E7-64C384011A7D}"/>
+              </a:ext>
+            </a:extLst>
+          </p:cNvPr>
+          <p:cNvSpPr txBox="1"/>
+          <p:nvPr/>
+        </p:nvSpPr>
+        <p:spPr>
+          <a:xfrm>
+            <a:off x="6620327" y="2919714"/>
+            <a:ext cx="716863" cy="461665"/>
+          </a:xfrm>
+          <a:prstGeom prst="rect">
+            <a:avLst/>
+          </a:prstGeom>
+          <a:solidFill>
+            <a:schemeClr val="bg2"/>
+          </a:solidFill>
+          <a:effectLst>
+            <a:softEdge rad="50800"/>
+          </a:effectLst>
+        </p:spPr>
+        <p:txBody>
+          <a:bodyPr wrap="none" rtlCol="0">
+            <a:spAutoFit/>
+          </a:bodyPr>
+          <a:lstStyle/>
+          <a:p>
+            <a:r>
+              <a:rPr lang="de-DE" sz="2400" dirty="0">
+                <a:latin typeface="Cambria" panose="02040503050406030204" pitchFamily="18" charset="0"/>
+                <a:ea typeface="Cambria" panose="02040503050406030204" pitchFamily="18" charset="0"/>
+              </a:rPr>
+              <a:t>fft</a:t>
+            </a:r>
+            <a:r>
+              <a:rPr lang="de-DE" sz="2400" dirty="0">
+                <a:latin typeface="+mj-lt"/>
+                <a:ea typeface="Cambria" panose="02040503050406030204" pitchFamily="18" charset="0"/>
+              </a:rPr>
+              <a:t>( )</a:t>
+            </a:r>
+          </a:p>
+        </p:txBody>
+      </p:sp>
+      <p:cxnSp>
+        <p:nvCxnSpPr>
+          <p:cNvPr id="32" name="Straight Arrow Connector 31">
+            <a:extLst>
+              <a:ext uri="{FF2B5EF4-FFF2-40B4-BE49-F238E27FC236}">
+                <a16:creationId xmlns:a16="http://schemas.microsoft.com/office/drawing/2014/main" id="{0C465B3F-711C-F0AB-690A-D8D51D938FBA}"/>
+              </a:ext>
+            </a:extLst>
+          </p:cNvPr>
+          <p:cNvCxnSpPr>
+            <a:cxnSpLocks/>
+          </p:cNvCxnSpPr>
+          <p:nvPr/>
+        </p:nvCxnSpPr>
+        <p:spPr>
+          <a:xfrm rot="5400000" flipV="1">
+            <a:off x="2470833" y="3641370"/>
+            <a:ext cx="0" cy="2877318"/>
+          </a:xfrm>
+          <a:prstGeom prst="straightConnector1">
+            <a:avLst/>
+          </a:prstGeom>
+          <a:ln w="57150">
+            <a:tailEnd type="triangle"/>
+          </a:ln>
+        </p:spPr>
+        <p:style>
+          <a:lnRef idx="2">
+            <a:schemeClr val="accent1"/>
+          </a:lnRef>
+          <a:fillRef idx="0">
+            <a:schemeClr val="accent1"/>
+          </a:fillRef>
+          <a:effectRef idx="1">
+            <a:schemeClr val="accent1"/>
+          </a:effectRef>
+          <a:fontRef idx="minor">
+            <a:schemeClr val="tx1"/>
+          </a:fontRef>
+        </p:style>
+      </p:cxnSp>
+      <p:pic>
+        <p:nvPicPr>
+          <p:cNvPr id="4" name="Picture 3" descr="A black and white pixelated background&#10;&#10;AI-generated content may be incorrect.">
+            <a:extLst>
+              <a:ext uri="{FF2B5EF4-FFF2-40B4-BE49-F238E27FC236}">
+                <a16:creationId xmlns:a16="http://schemas.microsoft.com/office/drawing/2014/main" id="{9F47E577-542F-E1B6-47A0-C130932DC7F9}"/>
+              </a:ext>
+            </a:extLst>
+          </p:cNvPr>
+          <p:cNvPicPr>
+            <a:picLocks noChangeAspect="1"/>
+          </p:cNvPicPr>
+          <p:nvPr/>
+        </p:nvPicPr>
+        <p:blipFill>
+          <a:blip r:embed="rId7">
+            <a:extLst>
+              <a:ext uri="{28A0092B-C50C-407E-A947-70E740481C1C}">
+                <a14:useLocalDpi xmlns:a14="http://schemas.microsoft.com/office/drawing/2010/main" val="0"/>
+              </a:ext>
+            </a:extLst>
+          </a:blip>
+          <a:stretch>
+            <a:fillRect/>
+          </a:stretch>
+        </p:blipFill>
+        <p:spPr>
+          <a:xfrm>
+            <a:off x="972809" y="2071428"/>
+            <a:ext cx="2877318" cy="2877318"/>
+          </a:xfrm>
+          <a:prstGeom prst="rect">
+            <a:avLst/>
+          </a:prstGeom>
+        </p:spPr>
+      </p:pic>
+      <p:pic>
+        <p:nvPicPr>
+          <p:cNvPr id="8" name="Picture 7" descr="A grey and black squares&#10;&#10;AI-generated content may be incorrect.">
+            <a:extLst>
+              <a:ext uri="{FF2B5EF4-FFF2-40B4-BE49-F238E27FC236}">
+                <a16:creationId xmlns:a16="http://schemas.microsoft.com/office/drawing/2014/main" id="{D2DB9A23-5B83-4227-0484-3AA86D8F85EE}"/>
+              </a:ext>
+            </a:extLst>
+          </p:cNvPr>
+          <p:cNvPicPr>
+            <a:picLocks noChangeAspect="1"/>
+          </p:cNvPicPr>
+          <p:nvPr/>
+        </p:nvPicPr>
+        <p:blipFill>
+          <a:blip r:embed="rId8">
+            <a:extLst>
+              <a:ext uri="{28A0092B-C50C-407E-A947-70E740481C1C}">
+                <a14:useLocalDpi xmlns:a14="http://schemas.microsoft.com/office/drawing/2010/main" val="0"/>
+              </a:ext>
+            </a:extLst>
+          </a:blip>
+          <a:stretch>
+            <a:fillRect/>
+          </a:stretch>
+        </p:blipFill>
+        <p:spPr>
+          <a:xfrm>
+            <a:off x="4141824" y="4062720"/>
+            <a:ext cx="2034617" cy="2034617"/>
+          </a:xfrm>
+          <a:prstGeom prst="rect">
+            <a:avLst/>
+          </a:prstGeom>
+        </p:spPr>
+      </p:pic>
+      <p:pic>
+        <p:nvPicPr>
+          <p:cNvPr id="17" name="Picture 16" descr="A black and white pixelated background&#10;&#10;AI-generated content may be incorrect.">
+            <a:extLst>
+              <a:ext uri="{FF2B5EF4-FFF2-40B4-BE49-F238E27FC236}">
+                <a16:creationId xmlns:a16="http://schemas.microsoft.com/office/drawing/2014/main" id="{D56F12CD-8A7A-CB52-1791-3AD99E5B4F0A}"/>
+              </a:ext>
+            </a:extLst>
+          </p:cNvPr>
+          <p:cNvPicPr>
+            <a:picLocks noChangeAspect="1"/>
+          </p:cNvPicPr>
+          <p:nvPr/>
+        </p:nvPicPr>
+        <p:blipFill>
+          <a:blip r:embed="rId9">
+            <a:extLst>
+              <a:ext uri="{28A0092B-C50C-407E-A947-70E740481C1C}">
+                <a14:useLocalDpi xmlns:a14="http://schemas.microsoft.com/office/drawing/2010/main" val="0"/>
+              </a:ext>
+            </a:extLst>
+          </a:blip>
+          <a:stretch>
+            <a:fillRect/>
+          </a:stretch>
+        </p:blipFill>
+        <p:spPr>
+          <a:xfrm>
+            <a:off x="4112063" y="1277071"/>
+            <a:ext cx="2034616" cy="2034616"/>
+          </a:xfrm>
+          <a:prstGeom prst="rect">
+            <a:avLst/>
+          </a:prstGeom>
+        </p:spPr>
+      </p:pic>
+      <p:pic>
+        <p:nvPicPr>
+          <p:cNvPr id="34" name="Picture 33" descr="A screenshot of a video game&#10;&#10;AI-generated content may be incorrect.">
+            <a:extLst>
+              <a:ext uri="{FF2B5EF4-FFF2-40B4-BE49-F238E27FC236}">
+                <a16:creationId xmlns:a16="http://schemas.microsoft.com/office/drawing/2014/main" id="{6DC6D991-A9F6-64B5-770A-CA9871CFB63B}"/>
+              </a:ext>
+            </a:extLst>
+          </p:cNvPr>
+          <p:cNvPicPr>
+            <a:picLocks noChangeAspect="1"/>
+          </p:cNvPicPr>
+          <p:nvPr/>
+        </p:nvPicPr>
+        <p:blipFill>
+          <a:blip r:embed="rId10">
+            <a:extLst>
+              <a:ext uri="{28A0092B-C50C-407E-A947-70E740481C1C}">
+                <a14:useLocalDpi xmlns:a14="http://schemas.microsoft.com/office/drawing/2010/main" val="0"/>
+              </a:ext>
+            </a:extLst>
+          </a:blip>
+          <a:stretch>
+            <a:fillRect/>
+          </a:stretch>
+        </p:blipFill>
+        <p:spPr>
+          <a:xfrm>
+            <a:off x="7890397" y="1999482"/>
+            <a:ext cx="3092967" cy="3434473"/>
+          </a:xfrm>
+          <a:prstGeom prst="rect">
+            <a:avLst/>
+          </a:prstGeom>
+        </p:spPr>
+      </p:pic>
+    </p:spTree>
+    <p:extLst>
+      <p:ext uri="{BB962C8B-B14F-4D97-AF65-F5344CB8AC3E}">
+        <p14:creationId xmlns:p14="http://schemas.microsoft.com/office/powerpoint/2010/main" val="259855978"/>
+      </p:ext>
+    </p:extLst>
+  </p:cSld>
+  <p:clrMapOvr>
+    <a:masterClrMapping/>
+  </p:clrMapOvr>
+</p:sld>
+</file>
+
+<file path=ppt/slides/slide19.xml><?xml version="1.0" encoding="utf-8"?>
+<p:sld xmlns:a="http://schemas.openxmlformats.org/drawingml/2006/main" xmlns:r="http://schemas.openxmlformats.org/officeDocument/2006/relationships" xmlns:p="http://schemas.openxmlformats.org/presentationml/2006/main">
+  <p:cSld>
+    <p:spTree>
+      <p:nvGrpSpPr>
+        <p:cNvPr id="1" name=""/>
+        <p:cNvGrpSpPr/>
+        <p:nvPr/>
+      </p:nvGrpSpPr>
+      <p:grpSpPr>
+        <a:xfrm>
+          <a:off x="0" y="0"/>
+          <a:ext cx="0" cy="0"/>
+          <a:chOff x="0" y="0"/>
+          <a:chExt cx="0" cy="0"/>
+        </a:xfrm>
+      </p:grpSpPr>
+      <p:pic>
+        <p:nvPicPr>
+          <p:cNvPr id="9" name="Picture 8" descr="A screenshot of a video game&#10;&#10;AI-generated content may be incorrect.">
+            <a:extLst>
+              <a:ext uri="{FF2B5EF4-FFF2-40B4-BE49-F238E27FC236}">
+                <a16:creationId xmlns:a16="http://schemas.microsoft.com/office/drawing/2014/main" id="{2EBCC2D2-F613-D665-403F-2B40B439025A}"/>
+              </a:ext>
+            </a:extLst>
+          </p:cNvPr>
+          <p:cNvPicPr>
+            <a:picLocks noChangeAspect="1"/>
+          </p:cNvPicPr>
+          <p:nvPr/>
+        </p:nvPicPr>
+        <p:blipFill>
+          <a:blip r:embed="rId2">
+            <a:extLst>
+              <a:ext uri="{28A0092B-C50C-407E-A947-70E740481C1C}">
+                <a14:useLocalDpi xmlns:a14="http://schemas.microsoft.com/office/drawing/2010/main" val="0"/>
+              </a:ext>
+            </a:extLst>
+          </a:blip>
+          <a:stretch>
+            <a:fillRect/>
+          </a:stretch>
+        </p:blipFill>
+        <p:spPr>
+          <a:xfrm>
+            <a:off x="5448639" y="1961107"/>
+            <a:ext cx="3076088" cy="3415731"/>
+          </a:xfrm>
+          <a:prstGeom prst="rect">
+            <a:avLst/>
+          </a:prstGeom>
+        </p:spPr>
+      </p:pic>
+      <p:sp>
+        <p:nvSpPr>
+          <p:cNvPr id="10" name="Arrow: Right 9">
+            <a:extLst>
+              <a:ext uri="{FF2B5EF4-FFF2-40B4-BE49-F238E27FC236}">
+                <a16:creationId xmlns:a16="http://schemas.microsoft.com/office/drawing/2014/main" id="{7CB38E5E-1D27-E2CC-8893-A4BEB0ACF974}"/>
+              </a:ext>
+            </a:extLst>
+          </p:cNvPr>
+          <p:cNvSpPr/>
+          <p:nvPr/>
+        </p:nvSpPr>
+        <p:spPr>
+          <a:xfrm>
+            <a:off x="4245226" y="3256764"/>
+            <a:ext cx="978408" cy="484632"/>
+          </a:xfrm>
+          <a:prstGeom prst="rightArrow">
+            <a:avLst/>
+          </a:prstGeom>
+        </p:spPr>
+        <p:style>
+          <a:lnRef idx="2">
+            <a:schemeClr val="accent1">
+              <a:shade val="15000"/>
+            </a:schemeClr>
+          </a:lnRef>
+          <a:fillRef idx="1">
+            <a:schemeClr val="accent1"/>
+          </a:fillRef>
+          <a:effectRef idx="0">
+            <a:schemeClr val="accent1"/>
+          </a:effectRef>
+          <a:fontRef idx="minor">
+            <a:schemeClr val="lt1"/>
+          </a:fontRef>
+        </p:style>
+        <p:txBody>
+          <a:bodyPr rtlCol="0" anchor="ctr"/>
+          <a:lstStyle/>
+          <a:p>
+            <a:pPr algn="ctr"/>
+            <a:endParaRPr lang="de-DE"/>
+          </a:p>
+        </p:txBody>
+      </p:sp>
+      <p:sp>
+        <p:nvSpPr>
+          <p:cNvPr id="11" name="TextBox 10">
+            <a:extLst>
+              <a:ext uri="{FF2B5EF4-FFF2-40B4-BE49-F238E27FC236}">
+                <a16:creationId xmlns:a16="http://schemas.microsoft.com/office/drawing/2014/main" id="{7176EDA6-BB3C-7306-4DB4-082812C2B491}"/>
+              </a:ext>
+            </a:extLst>
+          </p:cNvPr>
+          <p:cNvSpPr txBox="1"/>
+          <p:nvPr/>
+        </p:nvSpPr>
+        <p:spPr>
+          <a:xfrm>
+            <a:off x="2061450" y="5146236"/>
+            <a:ext cx="830677" cy="461665"/>
+          </a:xfrm>
+          <a:prstGeom prst="rect">
+            <a:avLst/>
+          </a:prstGeom>
+          <a:noFill/>
+        </p:spPr>
+        <p:txBody>
+          <a:bodyPr wrap="none" rtlCol="0">
+            <a:spAutoFit/>
+          </a:bodyPr>
+          <a:lstStyle/>
+          <a:p>
+            <a:r>
+              <a:rPr lang="de-DE" sz="2400" dirty="0"/>
+              <a:t>Time</a:t>
+            </a:r>
+          </a:p>
+        </p:txBody>
+      </p:sp>
+      <p:cxnSp>
+        <p:nvCxnSpPr>
+          <p:cNvPr id="12" name="Straight Arrow Connector 11">
+            <a:extLst>
+              <a:ext uri="{FF2B5EF4-FFF2-40B4-BE49-F238E27FC236}">
+                <a16:creationId xmlns:a16="http://schemas.microsoft.com/office/drawing/2014/main" id="{75C425EE-96F7-D7CF-FF1A-468C65EC0474}"/>
+              </a:ext>
+            </a:extLst>
+          </p:cNvPr>
+          <p:cNvCxnSpPr>
+            <a:cxnSpLocks/>
+          </p:cNvCxnSpPr>
+          <p:nvPr/>
+        </p:nvCxnSpPr>
+        <p:spPr>
+          <a:xfrm flipV="1">
+            <a:off x="821860" y="1999482"/>
+            <a:ext cx="0" cy="2877318"/>
+          </a:xfrm>
+          <a:prstGeom prst="straightConnector1">
+            <a:avLst/>
+          </a:prstGeom>
+          <a:ln w="57150">
+            <a:tailEnd type="triangle"/>
+          </a:ln>
+        </p:spPr>
+        <p:style>
+          <a:lnRef idx="2">
+            <a:schemeClr val="accent1"/>
+          </a:lnRef>
+          <a:fillRef idx="0">
+            <a:schemeClr val="accent1"/>
+          </a:fillRef>
+          <a:effectRef idx="1">
+            <a:schemeClr val="accent1"/>
+          </a:effectRef>
+          <a:fontRef idx="minor">
+            <a:schemeClr val="tx1"/>
+          </a:fontRef>
+        </p:style>
+      </p:cxnSp>
+      <mc:AlternateContent xmlns:mc="http://schemas.openxmlformats.org/markup-compatibility/2006">
+        <mc:Choice xmlns:a14="http://schemas.microsoft.com/office/drawing/2010/main" Requires="a14">
+          <p:sp>
+            <p:nvSpPr>
+              <p:cNvPr id="13" name="TextBox 12">
+                <a:extLst>
+                  <a:ext uri="{FF2B5EF4-FFF2-40B4-BE49-F238E27FC236}">
+                    <a16:creationId xmlns:a16="http://schemas.microsoft.com/office/drawing/2014/main" id="{6B52F6CE-956E-B9B7-285A-6C0742BE3FAC}"/>
+                  </a:ext>
+                </a:extLst>
+              </p:cNvPr>
+              <p:cNvSpPr txBox="1"/>
+              <p:nvPr/>
+            </p:nvSpPr>
+            <p:spPr>
+              <a:xfrm>
+                <a:off x="271786" y="3207308"/>
+                <a:ext cx="608885" cy="461665"/>
+              </a:xfrm>
+              <a:prstGeom prst="rect">
+                <a:avLst/>
+              </a:prstGeom>
+              <a:noFill/>
+            </p:spPr>
+            <p:txBody>
+              <a:bodyPr wrap="none" rtlCol="0">
+                <a:spAutoFit/>
+              </a:bodyPr>
+              <a:lstStyle/>
+              <a:p>
+                <a:pPr/>
+                <a14:m>
+                  <m:oMathPara xmlns:m="http://schemas.openxmlformats.org/officeDocument/2006/math">
+                    <m:oMathParaPr>
+                      <m:jc m:val="centerGroup"/>
+                    </m:oMathParaPr>
+                    <m:oMath xmlns:m="http://schemas.openxmlformats.org/officeDocument/2006/math">
+                      <m:r>
+                        <m:rPr>
+                          <m:sty m:val="p"/>
+                        </m:rPr>
+                        <a:rPr lang="de-DE" sz="2400" dirty="0" smtClean="0">
+                          <a:latin typeface="Cambria Math" panose="02040503050406030204" pitchFamily="18" charset="0"/>
+                        </a:rPr>
+                        <m:t>Δ</m:t>
+                      </m:r>
+                      <m:r>
+                        <a:rPr lang="de-DE" sz="2400" i="1" dirty="0">
+                          <a:latin typeface="Cambria Math" panose="02040503050406030204" pitchFamily="18" charset="0"/>
+                        </a:rPr>
+                        <m:t>𝑓</m:t>
+                      </m:r>
+                    </m:oMath>
+                  </m:oMathPara>
+                </a14:m>
+                <a:endParaRPr lang="de-DE" sz="2400" dirty="0"/>
+              </a:p>
+            </p:txBody>
+          </p:sp>
+        </mc:Choice>
+        <mc:Fallback>
+          <p:sp>
+            <p:nvSpPr>
+              <p:cNvPr id="13" name="TextBox 12">
+                <a:extLst>
+                  <a:ext uri="{FF2B5EF4-FFF2-40B4-BE49-F238E27FC236}">
+                    <a16:creationId xmlns:a16="http://schemas.microsoft.com/office/drawing/2014/main" id="{6B52F6CE-956E-B9B7-285A-6C0742BE3FAC}"/>
+                  </a:ext>
+                </a:extLst>
+              </p:cNvPr>
+              <p:cNvSpPr txBox="1">
+                <a:spLocks noRot="1" noChangeAspect="1" noMove="1" noResize="1" noEditPoints="1" noAdjustHandles="1" noChangeArrowheads="1" noChangeShapeType="1" noTextEdit="1"/>
+              </p:cNvSpPr>
+              <p:nvPr/>
+            </p:nvSpPr>
+            <p:spPr>
+              <a:xfrm>
+                <a:off x="271786" y="3207308"/>
+                <a:ext cx="608885" cy="461665"/>
+              </a:xfrm>
+              <a:prstGeom prst="rect">
+                <a:avLst/>
+              </a:prstGeom>
+              <a:blipFill>
+                <a:blip r:embed="rId3"/>
+                <a:stretch>
+                  <a:fillRect r="-2020" b="-15789"/>
+                </a:stretch>
+              </a:blipFill>
+            </p:spPr>
+            <p:txBody>
+              <a:bodyPr/>
+              <a:lstStyle/>
+              <a:p>
+                <a:r>
+                  <a:rPr lang="de-DE">
+                    <a:noFill/>
+                  </a:rPr>
+                  <a:t> </a:t>
+                </a:r>
+              </a:p>
+            </p:txBody>
+          </p:sp>
+        </mc:Fallback>
+      </mc:AlternateContent>
+      <p:sp>
+        <p:nvSpPr>
+          <p:cNvPr id="15" name="TextBox 14">
+            <a:extLst>
+              <a:ext uri="{FF2B5EF4-FFF2-40B4-BE49-F238E27FC236}">
+                <a16:creationId xmlns:a16="http://schemas.microsoft.com/office/drawing/2014/main" id="{898BD7CD-F3D1-046B-9F2A-9F150D497AA7}"/>
+              </a:ext>
+            </a:extLst>
+          </p:cNvPr>
+          <p:cNvSpPr txBox="1"/>
+          <p:nvPr/>
+        </p:nvSpPr>
+        <p:spPr>
+          <a:xfrm>
+            <a:off x="1584533" y="1480931"/>
+            <a:ext cx="1605119" cy="461665"/>
+          </a:xfrm>
+          <a:prstGeom prst="rect">
+            <a:avLst/>
+          </a:prstGeom>
+          <a:solidFill>
+            <a:schemeClr val="bg2"/>
+          </a:solidFill>
+          <a:effectLst>
+            <a:softEdge rad="50800"/>
+          </a:effectLst>
+        </p:spPr>
+        <p:txBody>
+          <a:bodyPr wrap="none" rtlCol="0">
+            <a:spAutoFit/>
+          </a:bodyPr>
+          <a:lstStyle/>
+          <a:p>
+            <a:r>
+              <a:rPr lang="de-DE" sz="2400" dirty="0">
+                <a:latin typeface="Cambria" panose="02040503050406030204" pitchFamily="18" charset="0"/>
+                <a:ea typeface="Cambria" panose="02040503050406030204" pitchFamily="18" charset="0"/>
+              </a:rPr>
+              <a:t>Re</a:t>
+            </a:r>
+            <a:r>
+              <a:rPr lang="de-DE" sz="2400" dirty="0">
+                <a:latin typeface="+mj-lt"/>
+                <a:ea typeface="Cambria" panose="02040503050406030204" pitchFamily="18" charset="0"/>
+              </a:rPr>
+              <a:t>(</a:t>
+            </a:r>
+            <a:r>
+              <a:rPr lang="de-DE" sz="2400" dirty="0">
+                <a:latin typeface="Cambria" panose="02040503050406030204" pitchFamily="18" charset="0"/>
+                <a:ea typeface="Cambria" panose="02040503050406030204" pitchFamily="18" charset="0"/>
+              </a:rPr>
+              <a:t>kspace</a:t>
+            </a:r>
+            <a:r>
+              <a:rPr lang="de-DE" sz="2400" dirty="0">
+                <a:latin typeface="+mj-lt"/>
+                <a:ea typeface="Cambria" panose="02040503050406030204" pitchFamily="18" charset="0"/>
+              </a:rPr>
+              <a:t>)</a:t>
+            </a:r>
+          </a:p>
+        </p:txBody>
+      </p:sp>
+      <p:sp>
+        <p:nvSpPr>
+          <p:cNvPr id="18" name="TextBox 17">
+            <a:extLst>
+              <a:ext uri="{FF2B5EF4-FFF2-40B4-BE49-F238E27FC236}">
+                <a16:creationId xmlns:a16="http://schemas.microsoft.com/office/drawing/2014/main" id="{AD54A680-64A3-634B-1907-89F6EE183B50}"/>
+              </a:ext>
+            </a:extLst>
+          </p:cNvPr>
+          <p:cNvSpPr txBox="1"/>
+          <p:nvPr/>
+        </p:nvSpPr>
+        <p:spPr>
+          <a:xfrm>
+            <a:off x="4258128" y="2919714"/>
+            <a:ext cx="716863" cy="461665"/>
+          </a:xfrm>
+          <a:prstGeom prst="rect">
+            <a:avLst/>
+          </a:prstGeom>
+          <a:solidFill>
+            <a:schemeClr val="bg2"/>
+          </a:solidFill>
+          <a:effectLst>
+            <a:softEdge rad="50800"/>
+          </a:effectLst>
+        </p:spPr>
+        <p:txBody>
+          <a:bodyPr wrap="none" rtlCol="0">
+            <a:spAutoFit/>
+          </a:bodyPr>
+          <a:lstStyle/>
+          <a:p>
+            <a:r>
+              <a:rPr lang="de-DE" sz="2400" dirty="0">
+                <a:latin typeface="Cambria" panose="02040503050406030204" pitchFamily="18" charset="0"/>
+                <a:ea typeface="Cambria" panose="02040503050406030204" pitchFamily="18" charset="0"/>
+              </a:rPr>
+              <a:t>fft</a:t>
+            </a:r>
+            <a:r>
+              <a:rPr lang="de-DE" sz="2400" dirty="0">
+                <a:latin typeface="+mj-lt"/>
+                <a:ea typeface="Cambria" panose="02040503050406030204" pitchFamily="18" charset="0"/>
+              </a:rPr>
+              <a:t>( )</a:t>
+            </a:r>
+          </a:p>
+        </p:txBody>
+      </p:sp>
+      <p:cxnSp>
+        <p:nvCxnSpPr>
+          <p:cNvPr id="19" name="Straight Arrow Connector 18">
+            <a:extLst>
+              <a:ext uri="{FF2B5EF4-FFF2-40B4-BE49-F238E27FC236}">
+                <a16:creationId xmlns:a16="http://schemas.microsoft.com/office/drawing/2014/main" id="{4680B6C4-8920-D2DA-8318-A3EB20F1CFB6}"/>
+              </a:ext>
+            </a:extLst>
+          </p:cNvPr>
+          <p:cNvCxnSpPr>
+            <a:cxnSpLocks/>
+          </p:cNvCxnSpPr>
+          <p:nvPr/>
+        </p:nvCxnSpPr>
+        <p:spPr>
+          <a:xfrm rot="5400000" flipV="1">
+            <a:off x="2470833" y="3641370"/>
+            <a:ext cx="0" cy="2877318"/>
+          </a:xfrm>
+          <a:prstGeom prst="straightConnector1">
+            <a:avLst/>
+          </a:prstGeom>
+          <a:ln w="57150">
+            <a:tailEnd type="triangle"/>
+          </a:ln>
+        </p:spPr>
+        <p:style>
+          <a:lnRef idx="2">
+            <a:schemeClr val="accent1"/>
+          </a:lnRef>
+          <a:fillRef idx="0">
+            <a:schemeClr val="accent1"/>
+          </a:fillRef>
+          <a:effectRef idx="1">
+            <a:schemeClr val="accent1"/>
+          </a:effectRef>
+          <a:fontRef idx="minor">
+            <a:schemeClr val="tx1"/>
+          </a:fontRef>
+        </p:style>
+      </p:cxnSp>
+      <p:pic>
+        <p:nvPicPr>
+          <p:cNvPr id="25" name="Picture 24" descr="A pixelated image of a black and white square&#10;&#10;AI-generated content may be incorrect.">
+            <a:extLst>
+              <a:ext uri="{FF2B5EF4-FFF2-40B4-BE49-F238E27FC236}">
+                <a16:creationId xmlns:a16="http://schemas.microsoft.com/office/drawing/2014/main" id="{FD90212C-984A-7B7E-A6B1-63CDC0840558}"/>
+              </a:ext>
+            </a:extLst>
+          </p:cNvPr>
+          <p:cNvPicPr>
+            <a:picLocks noChangeAspect="1"/>
+          </p:cNvPicPr>
+          <p:nvPr/>
+        </p:nvPicPr>
+        <p:blipFill>
+          <a:blip r:embed="rId4">
+            <a:extLst>
+              <a:ext uri="{28A0092B-C50C-407E-A947-70E740481C1C}">
+                <a14:useLocalDpi xmlns:a14="http://schemas.microsoft.com/office/drawing/2010/main" val="0"/>
+              </a:ext>
+            </a:extLst>
+          </a:blip>
+          <a:srcRect l="8882" t="-10182" r="-8882" b="10182"/>
+          <a:stretch>
+            <a:fillRect/>
+          </a:stretch>
+        </p:blipFill>
+        <p:spPr>
+          <a:xfrm>
+            <a:off x="896576" y="1726299"/>
+            <a:ext cx="3236983" cy="3236983"/>
+          </a:xfrm>
+          <a:prstGeom prst="rect">
+            <a:avLst/>
+          </a:prstGeom>
+        </p:spPr>
+      </p:pic>
+    </p:spTree>
+    <p:extLst>
+      <p:ext uri="{BB962C8B-B14F-4D97-AF65-F5344CB8AC3E}">
+        <p14:creationId xmlns:p14="http://schemas.microsoft.com/office/powerpoint/2010/main" val="4241833589"/>
       </p:ext>
     </p:extLst>
   </p:cSld>
@@ -15170,10 +17662,10 @@
       </p:grpSpPr>
       <p:pic>
         <p:nvPicPr>
-          <p:cNvPr id="27" name="Picture 26" descr="A black and white square with white squares&#10;&#10;AI-generated content may be incorrect.">
-            <a:extLst>
-              <a:ext uri="{FF2B5EF4-FFF2-40B4-BE49-F238E27FC236}">
-                <a16:creationId xmlns:a16="http://schemas.microsoft.com/office/drawing/2014/main" id="{F89FC958-7365-4D1F-FBAE-0F0BA929254A}"/>
+          <p:cNvPr id="26" name="Picture 25" descr="A black and white square with white squares&#10;&#10;AI-generated content may be incorrect.">
+            <a:extLst>
+              <a:ext uri="{FF2B5EF4-FFF2-40B4-BE49-F238E27FC236}">
+                <a16:creationId xmlns:a16="http://schemas.microsoft.com/office/drawing/2014/main" id="{842A157A-BA58-4DD5-A82B-001B08F7F2A0}"/>
               </a:ext>
             </a:extLst>
           </p:cNvPr>
@@ -15183,7 +17675,7 @@
           <p:nvPr/>
         </p:nvPicPr>
         <p:blipFill>
-          <a:blip r:embed="rId3">
+          <a:blip r:embed="rId2">
             <a:extLst>
               <a:ext uri="{28A0092B-C50C-407E-A947-70E740481C1C}">
                 <a14:useLocalDpi xmlns:a14="http://schemas.microsoft.com/office/drawing/2010/main" val="0"/>
@@ -15196,8 +17688,8 @@
         </p:blipFill>
         <p:spPr>
           <a:xfrm>
-            <a:off x="-1711981" y="-646903"/>
-            <a:ext cx="8451960" cy="8451960"/>
+            <a:off x="877997" y="880731"/>
+            <a:ext cx="4073831" cy="4073831"/>
           </a:xfrm>
           <a:prstGeom prst="rect">
             <a:avLst/>
@@ -15206,10 +17698,10 @@
       </p:pic>
       <p:pic>
         <p:nvPicPr>
-          <p:cNvPr id="18" name="Picture 17" descr="A group of colorful lines&#10;&#10;AI-generated content may be incorrect.">
-            <a:extLst>
-              <a:ext uri="{FF2B5EF4-FFF2-40B4-BE49-F238E27FC236}">
-                <a16:creationId xmlns:a16="http://schemas.microsoft.com/office/drawing/2014/main" id="{DBCFE30E-CC0C-D697-D8A4-48553B74C3B2}"/>
+          <p:cNvPr id="23" name="Picture 22" descr="A group of colorful lines&#10;&#10;AI-generated content may be incorrect.">
+            <a:extLst>
+              <a:ext uri="{FF2B5EF4-FFF2-40B4-BE49-F238E27FC236}">
+                <a16:creationId xmlns:a16="http://schemas.microsoft.com/office/drawing/2014/main" id="{C293442C-66B0-3A06-6D50-E1E06AD33F90}"/>
               </a:ext>
             </a:extLst>
           </p:cNvPr>
@@ -15219,17 +17711,7 @@
           <p:nvPr/>
         </p:nvPicPr>
         <p:blipFill>
-          <a:blip r:embed="rId4">
-            <a:clrChange>
-              <a:clrFrom>
-                <a:srgbClr val="FFFFFF"/>
-              </a:clrFrom>
-              <a:clrTo>
-                <a:srgbClr val="FFFFFF">
-                  <a:alpha val="0"/>
-                </a:srgbClr>
-              </a:clrTo>
-            </a:clrChange>
+          <a:blip r:embed="rId3">
             <a:extLst>
               <a:ext uri="{28A0092B-C50C-407E-A947-70E740481C1C}">
                 <a14:useLocalDpi xmlns:a14="http://schemas.microsoft.com/office/drawing/2010/main" val="0"/>
@@ -15242,8 +17724,8 @@
         </p:blipFill>
         <p:spPr>
           <a:xfrm>
-            <a:off x="0" y="1060704"/>
-            <a:ext cx="5047488" cy="5047488"/>
+            <a:off x="1981757" y="1488560"/>
+            <a:ext cx="2462652" cy="2340000"/>
           </a:xfrm>
           <a:prstGeom prst="rect">
             <a:avLst/>
@@ -15252,10 +17734,10 @@
       </p:pic>
       <p:pic>
         <p:nvPicPr>
-          <p:cNvPr id="26" name="Picture 25" descr="A grid of white lines on a black background&#10;&#10;AI-generated content may be incorrect.">
-            <a:extLst>
-              <a:ext uri="{FF2B5EF4-FFF2-40B4-BE49-F238E27FC236}">
-                <a16:creationId xmlns:a16="http://schemas.microsoft.com/office/drawing/2014/main" id="{AB045698-22D9-587A-A459-4F3DA57079A9}"/>
+          <p:cNvPr id="25" name="Picture 24" descr="A grid of white lines on a black background&#10;&#10;AI-generated content may be incorrect.">
+            <a:extLst>
+              <a:ext uri="{FF2B5EF4-FFF2-40B4-BE49-F238E27FC236}">
+                <a16:creationId xmlns:a16="http://schemas.microsoft.com/office/drawing/2014/main" id="{EFDDF97E-F3F0-784F-7C4E-683677434AA0}"/>
               </a:ext>
             </a:extLst>
           </p:cNvPr>
@@ -15265,7 +17747,7 @@
           <p:nvPr/>
         </p:nvPicPr>
         <p:blipFill>
-          <a:blip r:embed="rId5">
+          <a:blip r:embed="rId4">
             <a:extLst>
               <a:ext uri="{28A0092B-C50C-407E-A947-70E740481C1C}">
                 <a14:useLocalDpi xmlns:a14="http://schemas.microsoft.com/office/drawing/2010/main" val="0"/>
@@ -15278,168 +17760,18 @@
         </p:blipFill>
         <p:spPr>
           <a:xfrm>
-            <a:off x="7543241" y="259515"/>
-            <a:ext cx="8451960" cy="6338969"/>
+            <a:off x="5545226" y="880731"/>
+            <a:ext cx="6128502" cy="3499883"/>
           </a:xfrm>
           <a:prstGeom prst="rect">
             <a:avLst/>
           </a:prstGeom>
         </p:spPr>
       </p:pic>
-      <p:cxnSp>
-        <p:nvCxnSpPr>
-          <p:cNvPr id="9" name="Straight Arrow Connector 8">
-            <a:extLst>
-              <a:ext uri="{FF2B5EF4-FFF2-40B4-BE49-F238E27FC236}">
-                <a16:creationId xmlns:a16="http://schemas.microsoft.com/office/drawing/2014/main" id="{6A79639E-7E3E-21E8-0A94-686CF1A34257}"/>
-              </a:ext>
-            </a:extLst>
-          </p:cNvPr>
-          <p:cNvCxnSpPr/>
-          <p:nvPr/>
-        </p:nvCxnSpPr>
-        <p:spPr>
-          <a:xfrm>
-            <a:off x="-1711981" y="8523514"/>
-            <a:ext cx="8451960" cy="0"/>
-          </a:xfrm>
-          <a:prstGeom prst="straightConnector1">
-            <a:avLst/>
-          </a:prstGeom>
-          <a:ln w="152400">
-            <a:tailEnd type="triangle"/>
-          </a:ln>
-        </p:spPr>
-        <p:style>
-          <a:lnRef idx="2">
-            <a:schemeClr val="accent1"/>
-          </a:lnRef>
-          <a:fillRef idx="0">
-            <a:schemeClr val="accent1"/>
-          </a:fillRef>
-          <a:effectRef idx="1">
-            <a:schemeClr val="accent1"/>
-          </a:effectRef>
-          <a:fontRef idx="minor">
-            <a:schemeClr val="tx1"/>
-          </a:fontRef>
-        </p:style>
-      </p:cxnSp>
-      <p:cxnSp>
-        <p:nvCxnSpPr>
-          <p:cNvPr id="10" name="Straight Arrow Connector 9">
-            <a:extLst>
-              <a:ext uri="{FF2B5EF4-FFF2-40B4-BE49-F238E27FC236}">
-                <a16:creationId xmlns:a16="http://schemas.microsoft.com/office/drawing/2014/main" id="{7EE14B73-84BF-4A6E-6CA8-1F9B6EFABB52}"/>
-              </a:ext>
-            </a:extLst>
-          </p:cNvPr>
-          <p:cNvCxnSpPr>
-            <a:cxnSpLocks/>
-          </p:cNvCxnSpPr>
-          <p:nvPr/>
-        </p:nvCxnSpPr>
-        <p:spPr>
-          <a:xfrm flipV="1">
-            <a:off x="-2322223" y="-717007"/>
-            <a:ext cx="0" cy="8522064"/>
-          </a:xfrm>
-          <a:prstGeom prst="straightConnector1">
-            <a:avLst/>
-          </a:prstGeom>
-          <a:ln w="152400">
-            <a:tailEnd type="triangle"/>
-          </a:ln>
-        </p:spPr>
-        <p:style>
-          <a:lnRef idx="2">
-            <a:schemeClr val="accent1"/>
-          </a:lnRef>
-          <a:fillRef idx="0">
-            <a:schemeClr val="accent1"/>
-          </a:fillRef>
-          <a:effectRef idx="1">
-            <a:schemeClr val="accent1"/>
-          </a:effectRef>
-          <a:fontRef idx="minor">
-            <a:schemeClr val="tx1"/>
-          </a:fontRef>
-        </p:style>
-      </p:cxnSp>
-      <p:sp>
-        <p:nvSpPr>
-          <p:cNvPr id="11" name="TextBox 10">
-            <a:extLst>
-              <a:ext uri="{FF2B5EF4-FFF2-40B4-BE49-F238E27FC236}">
-                <a16:creationId xmlns:a16="http://schemas.microsoft.com/office/drawing/2014/main" id="{8531D8C8-4A97-EE8A-3685-41C533BB7BF1}"/>
-              </a:ext>
-            </a:extLst>
-          </p:cNvPr>
-          <p:cNvSpPr txBox="1"/>
-          <p:nvPr/>
-        </p:nvSpPr>
-        <p:spPr>
-          <a:xfrm>
-            <a:off x="6491353" y="8523514"/>
-            <a:ext cx="497252" cy="938719"/>
-          </a:xfrm>
-          <a:prstGeom prst="rect">
-            <a:avLst/>
-          </a:prstGeom>
-          <a:noFill/>
-        </p:spPr>
-        <p:txBody>
-          <a:bodyPr wrap="none" rtlCol="0">
-            <a:spAutoFit/>
-          </a:bodyPr>
-          <a:lstStyle/>
-          <a:p>
-            <a:r>
-              <a:rPr lang="de-DE" sz="5500" dirty="0"/>
-              <a:t>x</a:t>
-            </a:r>
-          </a:p>
-        </p:txBody>
-      </p:sp>
-      <p:sp>
-        <p:nvSpPr>
-          <p:cNvPr id="12" name="TextBox 11">
-            <a:extLst>
-              <a:ext uri="{FF2B5EF4-FFF2-40B4-BE49-F238E27FC236}">
-                <a16:creationId xmlns:a16="http://schemas.microsoft.com/office/drawing/2014/main" id="{6ACF9088-80EE-1F8F-3CB1-9B438D2F688C}"/>
-              </a:ext>
-            </a:extLst>
-          </p:cNvPr>
-          <p:cNvSpPr txBox="1"/>
-          <p:nvPr/>
-        </p:nvSpPr>
-        <p:spPr>
-          <a:xfrm>
-            <a:off x="-3018907" y="-1186367"/>
-            <a:ext cx="503664" cy="938719"/>
-          </a:xfrm>
-          <a:prstGeom prst="rect">
-            <a:avLst/>
-          </a:prstGeom>
-          <a:noFill/>
-        </p:spPr>
-        <p:txBody>
-          <a:bodyPr wrap="none" rtlCol="0">
-            <a:spAutoFit/>
-          </a:bodyPr>
-          <a:lstStyle/>
-          <a:p>
-            <a:r>
-              <a:rPr lang="de-DE" sz="5500" dirty="0"/>
-              <a:t>y</a:t>
-            </a:r>
-          </a:p>
-        </p:txBody>
-      </p:sp>
     </p:spTree>
     <p:extLst>
       <p:ext uri="{BB962C8B-B14F-4D97-AF65-F5344CB8AC3E}">
-        <p14:creationId xmlns:p14="http://schemas.microsoft.com/office/powerpoint/2010/main" val="3605349293"/>
+        <p14:creationId xmlns:p14="http://schemas.microsoft.com/office/powerpoint/2010/main" val="59079012"/>
       </p:ext>
     </p:extLst>
   </p:cSld>
@@ -15468,10 +17800,10 @@
       </p:grpSpPr>
       <p:pic>
         <p:nvPicPr>
-          <p:cNvPr id="4" name="Picture 3" descr="A black and white square with white squares&#10;&#10;AI-generated content may be incorrect.">
-            <a:extLst>
-              <a:ext uri="{FF2B5EF4-FFF2-40B4-BE49-F238E27FC236}">
-                <a16:creationId xmlns:a16="http://schemas.microsoft.com/office/drawing/2014/main" id="{4234F0BD-95DC-A793-F275-A14276E21243}"/>
+          <p:cNvPr id="19" name="Picture 18" descr="A black and white square with white squares&#10;&#10;AI-generated content may be incorrect.">
+            <a:extLst>
+              <a:ext uri="{FF2B5EF4-FFF2-40B4-BE49-F238E27FC236}">
+                <a16:creationId xmlns:a16="http://schemas.microsoft.com/office/drawing/2014/main" id="{698D11A0-BEF4-F1B0-BD49-9F2A63EEA419}"/>
               </a:ext>
             </a:extLst>
           </p:cNvPr>
@@ -15494,102 +17826,128 @@
         </p:blipFill>
         <p:spPr>
           <a:xfrm>
-            <a:off x="-1711981" y="-646903"/>
-            <a:ext cx="8451960" cy="8451960"/>
+            <a:off x="877997" y="880731"/>
+            <a:ext cx="4073831" cy="4073831"/>
           </a:xfrm>
           <a:prstGeom prst="rect">
             <a:avLst/>
           </a:prstGeom>
         </p:spPr>
       </p:pic>
-      <p:cxnSp>
-        <p:nvCxnSpPr>
-          <p:cNvPr id="6" name="Straight Arrow Connector 5">
-            <a:extLst>
-              <a:ext uri="{FF2B5EF4-FFF2-40B4-BE49-F238E27FC236}">
-                <a16:creationId xmlns:a16="http://schemas.microsoft.com/office/drawing/2014/main" id="{7B7CE1A7-C8EE-71A2-1CE3-E2A5098D9849}"/>
-              </a:ext>
-            </a:extLst>
-          </p:cNvPr>
-          <p:cNvCxnSpPr>
-            <a:cxnSpLocks/>
-          </p:cNvCxnSpPr>
+      <p:pic>
+        <p:nvPicPr>
+          <p:cNvPr id="10" name="Picture 9" descr="A set of colorful lines&#10;&#10;AI-generated content may be incorrect.">
+            <a:extLst>
+              <a:ext uri="{FF2B5EF4-FFF2-40B4-BE49-F238E27FC236}">
+                <a16:creationId xmlns:a16="http://schemas.microsoft.com/office/drawing/2014/main" id="{0BD161C5-F288-862C-2D87-4C0D157F7523}"/>
+              </a:ext>
+            </a:extLst>
+          </p:cNvPr>
+          <p:cNvPicPr>
+            <a:picLocks/>
+          </p:cNvPicPr>
           <p:nvPr/>
-        </p:nvCxnSpPr>
+        </p:nvPicPr>
+        <p:blipFill>
+          <a:blip r:embed="rId3">
+            <a:extLst>
+              <a:ext uri="{28A0092B-C50C-407E-A947-70E740481C1C}">
+                <a14:useLocalDpi xmlns:a14="http://schemas.microsoft.com/office/drawing/2010/main" val="0"/>
+              </a:ext>
+            </a:extLst>
+          </a:blip>
+          <a:stretch>
+            <a:fillRect/>
+          </a:stretch>
+        </p:blipFill>
         <p:spPr>
           <a:xfrm>
-            <a:off x="-1711981" y="8523514"/>
-            <a:ext cx="9419067" cy="0"/>
+            <a:off x="1981757" y="1488560"/>
+            <a:ext cx="2462400" cy="2340000"/>
           </a:xfrm>
-          <a:prstGeom prst="straightConnector1">
+          <a:prstGeom prst="rect">
             <a:avLst/>
           </a:prstGeom>
-          <a:ln w="152400">
-            <a:tailEnd type="triangle"/>
-          </a:ln>
         </p:spPr>
-        <p:style>
-          <a:lnRef idx="2">
-            <a:schemeClr val="accent1"/>
-          </a:lnRef>
-          <a:fillRef idx="0">
-            <a:schemeClr val="accent1"/>
-          </a:fillRef>
-          <a:effectRef idx="1">
-            <a:schemeClr val="accent1"/>
-          </a:effectRef>
-          <a:fontRef idx="minor">
-            <a:schemeClr val="tx1"/>
-          </a:fontRef>
-        </p:style>
-      </p:cxnSp>
-      <p:cxnSp>
-        <p:nvCxnSpPr>
-          <p:cNvPr id="7" name="Straight Arrow Connector 6">
-            <a:extLst>
-              <a:ext uri="{FF2B5EF4-FFF2-40B4-BE49-F238E27FC236}">
-                <a16:creationId xmlns:a16="http://schemas.microsoft.com/office/drawing/2014/main" id="{A541F7DF-1EA2-F560-46B8-4772E6E10775}"/>
-              </a:ext>
-            </a:extLst>
-          </p:cNvPr>
-          <p:cNvCxnSpPr>
-            <a:cxnSpLocks/>
-          </p:cNvCxnSpPr>
+      </p:pic>
+      <p:pic>
+        <p:nvPicPr>
+          <p:cNvPr id="14" name="Picture 13" descr="A grid of white lines&#10;&#10;AI-generated content may be incorrect.">
+            <a:extLst>
+              <a:ext uri="{FF2B5EF4-FFF2-40B4-BE49-F238E27FC236}">
+                <a16:creationId xmlns:a16="http://schemas.microsoft.com/office/drawing/2014/main" id="{53A35D99-B09E-9829-CD36-BE58E59BDA5F}"/>
+              </a:ext>
+            </a:extLst>
+          </p:cNvPr>
+          <p:cNvPicPr>
+            <a:picLocks noChangeAspect="1"/>
+          </p:cNvPicPr>
           <p:nvPr/>
-        </p:nvCxnSpPr>
+        </p:nvPicPr>
+        <p:blipFill>
+          <a:blip r:embed="rId4">
+            <a:extLst>
+              <a:ext uri="{28A0092B-C50C-407E-A947-70E740481C1C}">
+                <a14:useLocalDpi xmlns:a14="http://schemas.microsoft.com/office/drawing/2010/main" val="0"/>
+              </a:ext>
+            </a:extLst>
+          </a:blip>
+          <a:stretch>
+            <a:fillRect/>
+          </a:stretch>
+        </p:blipFill>
         <p:spPr>
-          <a:xfrm flipV="1">
-            <a:off x="-2322223" y="-1763486"/>
-            <a:ext cx="0" cy="9568543"/>
+          <a:xfrm>
+            <a:off x="5546422" y="880731"/>
+            <a:ext cx="6127306" cy="3499200"/>
           </a:xfrm>
-          <a:prstGeom prst="straightConnector1">
+          <a:prstGeom prst="rect">
             <a:avLst/>
           </a:prstGeom>
-          <a:ln w="152400">
-            <a:tailEnd type="triangle"/>
-          </a:ln>
         </p:spPr>
-        <p:style>
-          <a:lnRef idx="2">
-            <a:schemeClr val="accent1"/>
-          </a:lnRef>
-          <a:fillRef idx="0">
-            <a:schemeClr val="accent1"/>
-          </a:fillRef>
-          <a:effectRef idx="1">
-            <a:schemeClr val="accent1"/>
-          </a:effectRef>
-          <a:fontRef idx="minor">
-            <a:schemeClr val="tx1"/>
-          </a:fontRef>
-        </p:style>
-      </p:cxnSp>
+      </p:pic>
+      <p:pic>
+        <p:nvPicPr>
+          <p:cNvPr id="8" name="Picture 7" descr="A white and grey rectangle&#10;&#10;AI-generated content may be incorrect.">
+            <a:extLst>
+              <a:ext uri="{FF2B5EF4-FFF2-40B4-BE49-F238E27FC236}">
+                <a16:creationId xmlns:a16="http://schemas.microsoft.com/office/drawing/2014/main" id="{1C0E7EA2-4B39-A566-469C-13203606BFE7}"/>
+              </a:ext>
+            </a:extLst>
+          </p:cNvPr>
+          <p:cNvPicPr>
+            <a:picLocks noChangeAspect="1"/>
+          </p:cNvPicPr>
+          <p:nvPr/>
+        </p:nvPicPr>
+        <p:blipFill>
+          <a:blip r:embed="rId5">
+            <a:extLst>
+              <a:ext uri="{28A0092B-C50C-407E-A947-70E740481C1C}">
+                <a14:useLocalDpi xmlns:a14="http://schemas.microsoft.com/office/drawing/2010/main" val="0"/>
+              </a:ext>
+            </a:extLst>
+          </a:blip>
+          <a:stretch>
+            <a:fillRect/>
+          </a:stretch>
+        </p:blipFill>
+        <p:spPr>
+          <a:xfrm>
+            <a:off x="1474083" y="5075315"/>
+            <a:ext cx="3477747" cy="579625"/>
+          </a:xfrm>
+          <a:prstGeom prst="rect">
+            <a:avLst/>
+          </a:prstGeom>
+        </p:spPr>
+      </p:pic>
       <p:sp>
         <p:nvSpPr>
-          <p:cNvPr id="8" name="TextBox 7">
-            <a:extLst>
-              <a:ext uri="{FF2B5EF4-FFF2-40B4-BE49-F238E27FC236}">
-                <a16:creationId xmlns:a16="http://schemas.microsoft.com/office/drawing/2014/main" id="{E44A2792-5E72-7FCF-7C3E-F8023103510F}"/>
+          <p:cNvPr id="15" name="TextBox 14">
+            <a:extLst>
+              <a:ext uri="{FF2B5EF4-FFF2-40B4-BE49-F238E27FC236}">
+                <a16:creationId xmlns:a16="http://schemas.microsoft.com/office/drawing/2014/main" id="{DE3D11BA-2D5E-AC05-2974-E2FEA2B5A44E}"/>
               </a:ext>
             </a:extLst>
           </p:cNvPr>
@@ -15598,8 +17956,43 @@
         </p:nvSpPr>
         <p:spPr>
           <a:xfrm>
-            <a:off x="6491353" y="8523514"/>
-            <a:ext cx="497252" cy="938719"/>
+            <a:off x="64655" y="5088266"/>
+            <a:ext cx="1409427" cy="584775"/>
+          </a:xfrm>
+          <a:prstGeom prst="rect">
+            <a:avLst/>
+          </a:prstGeom>
+          <a:noFill/>
+        </p:spPr>
+        <p:txBody>
+          <a:bodyPr wrap="square" rtlCol="0">
+            <a:spAutoFit/>
+          </a:bodyPr>
+          <a:lstStyle/>
+          <a:p>
+            <a:r>
+              <a:rPr lang="de-DE" sz="1600" b="1" dirty="0"/>
+              <a:t>Signal per column</a:t>
+            </a:r>
+          </a:p>
+        </p:txBody>
+      </p:sp>
+      <p:sp>
+        <p:nvSpPr>
+          <p:cNvPr id="16" name="TextBox 15">
+            <a:extLst>
+              <a:ext uri="{FF2B5EF4-FFF2-40B4-BE49-F238E27FC236}">
+                <a16:creationId xmlns:a16="http://schemas.microsoft.com/office/drawing/2014/main" id="{376B8E71-9092-522F-C031-DF731F6D890B}"/>
+              </a:ext>
+            </a:extLst>
+          </p:cNvPr>
+          <p:cNvSpPr txBox="1"/>
+          <p:nvPr/>
+        </p:nvSpPr>
+        <p:spPr>
+          <a:xfrm>
+            <a:off x="64655" y="6078494"/>
+            <a:ext cx="1163908" cy="338554"/>
           </a:xfrm>
           <a:prstGeom prst="rect">
             <a:avLst/>
@@ -15613,51 +18006,112 @@
           <a:lstStyle/>
           <a:p>
             <a:r>
-              <a:rPr lang="de-DE" sz="5500" dirty="0"/>
-              <a:t>x</a:t>
+              <a:rPr lang="de-DE" sz="1600" b="1" dirty="0"/>
+              <a:t>Frequency</a:t>
             </a:r>
           </a:p>
         </p:txBody>
       </p:sp>
       <p:sp>
         <p:nvSpPr>
-          <p:cNvPr id="9" name="TextBox 8">
-            <a:extLst>
-              <a:ext uri="{FF2B5EF4-FFF2-40B4-BE49-F238E27FC236}">
-                <a16:creationId xmlns:a16="http://schemas.microsoft.com/office/drawing/2014/main" id="{B8DB45EC-765D-685E-54E0-8EE320110C7A}"/>
-              </a:ext>
-            </a:extLst>
-          </p:cNvPr>
-          <p:cNvSpPr txBox="1"/>
+          <p:cNvPr id="17" name="Isosceles Triangle 16">
+            <a:extLst>
+              <a:ext uri="{FF2B5EF4-FFF2-40B4-BE49-F238E27FC236}">
+                <a16:creationId xmlns:a16="http://schemas.microsoft.com/office/drawing/2014/main" id="{D782DB54-93F4-8FE9-BFDF-A7387B98CE0A}"/>
+              </a:ext>
+            </a:extLst>
+          </p:cNvPr>
+          <p:cNvSpPr/>
           <p:nvPr/>
         </p:nvSpPr>
         <p:spPr>
           <a:xfrm>
-            <a:off x="-3018907" y="-1186367"/>
-            <a:ext cx="503664" cy="938719"/>
+            <a:off x="1474082" y="5837423"/>
+            <a:ext cx="3477747" cy="579625"/>
+          </a:xfrm>
+          <a:prstGeom prst="triangle">
+            <a:avLst>
+              <a:gd name="adj" fmla="val 100000"/>
+            </a:avLst>
+          </a:prstGeom>
+          <a:solidFill>
+            <a:schemeClr val="accent1">
+              <a:lumMod val="75000"/>
+            </a:schemeClr>
+          </a:solidFill>
+          <a:ln>
+            <a:noFill/>
+          </a:ln>
+        </p:spPr>
+        <p:style>
+          <a:lnRef idx="2">
+            <a:schemeClr val="accent1">
+              <a:shade val="15000"/>
+            </a:schemeClr>
+          </a:lnRef>
+          <a:fillRef idx="1">
+            <a:schemeClr val="accent1"/>
+          </a:fillRef>
+          <a:effectRef idx="0">
+            <a:schemeClr val="accent1"/>
+          </a:effectRef>
+          <a:fontRef idx="minor">
+            <a:schemeClr val="lt1"/>
+          </a:fontRef>
+        </p:style>
+        <p:txBody>
+          <a:bodyPr rtlCol="0" anchor="ctr"/>
+          <a:lstStyle/>
+          <a:p>
+            <a:pPr algn="ctr"/>
+            <a:endParaRPr lang="de-DE">
+              <a:solidFill>
+                <a:schemeClr val="accent1"/>
+              </a:solidFill>
+            </a:endParaRPr>
+          </a:p>
+        </p:txBody>
+      </p:sp>
+      <p:pic>
+        <p:nvPicPr>
+          <p:cNvPr id="21" name="Picture 20" descr="A green and blue waves&#10;&#10;AI-generated content may be incorrect.">
+            <a:extLst>
+              <a:ext uri="{FF2B5EF4-FFF2-40B4-BE49-F238E27FC236}">
+                <a16:creationId xmlns:a16="http://schemas.microsoft.com/office/drawing/2014/main" id="{FDBB9D4A-5FA9-1BCA-76E1-F18E7C599391}"/>
+              </a:ext>
+            </a:extLst>
+          </p:cNvPr>
+          <p:cNvPicPr>
+            <a:picLocks noChangeAspect="1"/>
+          </p:cNvPicPr>
+          <p:nvPr/>
+        </p:nvPicPr>
+        <p:blipFill>
+          <a:blip r:embed="rId6">
+            <a:extLst>
+              <a:ext uri="{28A0092B-C50C-407E-A947-70E740481C1C}">
+                <a14:useLocalDpi xmlns:a14="http://schemas.microsoft.com/office/drawing/2010/main" val="0"/>
+              </a:ext>
+            </a:extLst>
+          </a:blip>
+          <a:stretch>
+            <a:fillRect/>
+          </a:stretch>
+        </p:blipFill>
+        <p:spPr>
+          <a:xfrm>
+            <a:off x="1981757" y="5071254"/>
+            <a:ext cx="2464356" cy="615600"/>
           </a:xfrm>
           <a:prstGeom prst="rect">
             <a:avLst/>
           </a:prstGeom>
-          <a:noFill/>
         </p:spPr>
-        <p:txBody>
-          <a:bodyPr wrap="none" rtlCol="0">
-            <a:spAutoFit/>
-          </a:bodyPr>
-          <a:lstStyle/>
-          <a:p>
-            <a:r>
-              <a:rPr lang="de-DE" sz="5500" dirty="0"/>
-              <a:t>y</a:t>
-            </a:r>
-          </a:p>
-        </p:txBody>
-      </p:sp>
+      </p:pic>
     </p:spTree>
     <p:extLst>
       <p:ext uri="{BB962C8B-B14F-4D97-AF65-F5344CB8AC3E}">
-        <p14:creationId xmlns:p14="http://schemas.microsoft.com/office/powerpoint/2010/main" val="1708658079"/>
+        <p14:creationId xmlns:p14="http://schemas.microsoft.com/office/powerpoint/2010/main" val="202062624"/>
       </p:ext>
     </p:extLst>
   </p:cSld>
@@ -15686,10 +18140,10 @@
       </p:grpSpPr>
       <p:pic>
         <p:nvPicPr>
-          <p:cNvPr id="4" name="Picture 3" descr="A black and white square with white squares&#10;&#10;AI-generated content may be incorrect.">
-            <a:extLst>
-              <a:ext uri="{FF2B5EF4-FFF2-40B4-BE49-F238E27FC236}">
-                <a16:creationId xmlns:a16="http://schemas.microsoft.com/office/drawing/2014/main" id="{B4182946-B6E7-BC6F-AFBA-1BC49CB178DA}"/>
+          <p:cNvPr id="5" name="Picture 4">
+            <a:extLst>
+              <a:ext uri="{FF2B5EF4-FFF2-40B4-BE49-F238E27FC236}">
+                <a16:creationId xmlns:a16="http://schemas.microsoft.com/office/drawing/2014/main" id="{A3E4A659-5D1B-706A-DC62-8F2D2C29851A}"/>
               </a:ext>
             </a:extLst>
           </p:cNvPr>
@@ -15712,8 +18166,221 @@
         </p:blipFill>
         <p:spPr>
           <a:xfrm>
-            <a:off x="4321739" y="2177143"/>
-            <a:ext cx="2345542" cy="2345542"/>
+            <a:off x="1921921" y="2406317"/>
+            <a:ext cx="7218626" cy="721252"/>
+          </a:xfrm>
+          <a:prstGeom prst="rect">
+            <a:avLst/>
+          </a:prstGeom>
+        </p:spPr>
+      </p:pic>
+      <p:sp>
+        <p:nvSpPr>
+          <p:cNvPr id="6" name="TextBox 5">
+            <a:extLst>
+              <a:ext uri="{FF2B5EF4-FFF2-40B4-BE49-F238E27FC236}">
+                <a16:creationId xmlns:a16="http://schemas.microsoft.com/office/drawing/2014/main" id="{28227EFF-7FFF-E8AE-D227-4A52BCB87FAE}"/>
+              </a:ext>
+            </a:extLst>
+          </p:cNvPr>
+          <p:cNvSpPr txBox="1"/>
+          <p:nvPr/>
+        </p:nvSpPr>
+        <p:spPr>
+          <a:xfrm>
+            <a:off x="2502568" y="3429000"/>
+            <a:ext cx="5422231" cy="1569660"/>
+          </a:xfrm>
+          <a:prstGeom prst="rect">
+            <a:avLst/>
+          </a:prstGeom>
+          <a:noFill/>
+        </p:spPr>
+        <p:txBody>
+          <a:bodyPr wrap="square" rtlCol="0">
+            <a:spAutoFit/>
+          </a:bodyPr>
+          <a:lstStyle/>
+          <a:p>
+            <a:r>
+              <a:rPr lang="de-DE" sz="3200" dirty="0"/>
+              <a:t>Bin: 1 2 3 4 5 6 7 8 9 10</a:t>
+            </a:r>
+          </a:p>
+          <a:p>
+            <a:r>
+              <a:rPr lang="de-DE" sz="3200" dirty="0"/>
+              <a:t>Freq: 0 1 2 3 4 5 -4 -3 -2 -1</a:t>
+            </a:r>
+          </a:p>
+          <a:p>
+            <a:endParaRPr lang="de-DE" sz="3200" dirty="0"/>
+          </a:p>
+        </p:txBody>
+      </p:sp>
+    </p:spTree>
+    <p:extLst>
+      <p:ext uri="{BB962C8B-B14F-4D97-AF65-F5344CB8AC3E}">
+        <p14:creationId xmlns:p14="http://schemas.microsoft.com/office/powerpoint/2010/main" val="612585257"/>
+      </p:ext>
+    </p:extLst>
+  </p:cSld>
+  <p:clrMapOvr>
+    <a:masterClrMapping/>
+  </p:clrMapOvr>
+</p:sld>
+</file>
+
+<file path=ppt/slides/slide7.xml><?xml version="1.0" encoding="utf-8"?>
+<p:sld xmlns:a="http://schemas.openxmlformats.org/drawingml/2006/main" xmlns:r="http://schemas.openxmlformats.org/officeDocument/2006/relationships" xmlns:p="http://schemas.openxmlformats.org/presentationml/2006/main">
+  <p:cSld>
+    <p:spTree>
+      <p:nvGrpSpPr>
+        <p:cNvPr id="1" name=""/>
+        <p:cNvGrpSpPr/>
+        <p:nvPr/>
+      </p:nvGrpSpPr>
+      <p:grpSpPr>
+        <a:xfrm>
+          <a:off x="0" y="0"/>
+          <a:ext cx="0" cy="0"/>
+          <a:chOff x="0" y="0"/>
+          <a:chExt cx="0" cy="0"/>
+        </a:xfrm>
+      </p:grpSpPr>
+      <p:pic>
+        <p:nvPicPr>
+          <p:cNvPr id="5" name="Picture 4" descr="A graph with colorful lines&#10;&#10;AI-generated content may be incorrect.">
+            <a:extLst>
+              <a:ext uri="{FF2B5EF4-FFF2-40B4-BE49-F238E27FC236}">
+                <a16:creationId xmlns:a16="http://schemas.microsoft.com/office/drawing/2014/main" id="{2099137D-7D0A-AE03-CE53-23B89005B017}"/>
+              </a:ext>
+            </a:extLst>
+          </p:cNvPr>
+          <p:cNvPicPr>
+            <a:picLocks noChangeAspect="1"/>
+          </p:cNvPicPr>
+          <p:nvPr/>
+        </p:nvPicPr>
+        <p:blipFill>
+          <a:blip r:embed="rId2">
+            <a:extLst>
+              <a:ext uri="{28A0092B-C50C-407E-A947-70E740481C1C}">
+                <a14:useLocalDpi xmlns:a14="http://schemas.microsoft.com/office/drawing/2010/main" val="0"/>
+              </a:ext>
+            </a:extLst>
+          </a:blip>
+          <a:stretch>
+            <a:fillRect/>
+          </a:stretch>
+        </p:blipFill>
+        <p:spPr>
+          <a:xfrm>
+            <a:off x="3217158" y="1990341"/>
+            <a:ext cx="5757684" cy="2877318"/>
+          </a:xfrm>
+          <a:prstGeom prst="rect">
+            <a:avLst/>
+          </a:prstGeom>
+        </p:spPr>
+      </p:pic>
+      <p:pic>
+        <p:nvPicPr>
+          <p:cNvPr id="7" name="Picture 6" descr="A screen shot of a computer&#10;&#10;AI-generated content may be incorrect.">
+            <a:extLst>
+              <a:ext uri="{FF2B5EF4-FFF2-40B4-BE49-F238E27FC236}">
+                <a16:creationId xmlns:a16="http://schemas.microsoft.com/office/drawing/2014/main" id="{FC0CFF11-BD53-696F-4BB9-762CB1FEB5F1}"/>
+              </a:ext>
+            </a:extLst>
+          </p:cNvPr>
+          <p:cNvPicPr>
+            <a:picLocks noChangeAspect="1"/>
+          </p:cNvPicPr>
+          <p:nvPr/>
+        </p:nvPicPr>
+        <p:blipFill>
+          <a:blip r:embed="rId3">
+            <a:extLst>
+              <a:ext uri="{28A0092B-C50C-407E-A947-70E740481C1C}">
+                <a14:useLocalDpi xmlns:a14="http://schemas.microsoft.com/office/drawing/2010/main" val="0"/>
+              </a:ext>
+            </a:extLst>
+          </a:blip>
+          <a:srcRect t="77449"/>
+          <a:stretch>
+            <a:fillRect/>
+          </a:stretch>
+        </p:blipFill>
+        <p:spPr>
+          <a:xfrm>
+            <a:off x="3217158" y="4737099"/>
+            <a:ext cx="5757684" cy="648859"/>
+          </a:xfrm>
+          <a:prstGeom prst="rect">
+            <a:avLst/>
+          </a:prstGeom>
+        </p:spPr>
+      </p:pic>
+    </p:spTree>
+    <p:extLst>
+      <p:ext uri="{BB962C8B-B14F-4D97-AF65-F5344CB8AC3E}">
+        <p14:creationId xmlns:p14="http://schemas.microsoft.com/office/powerpoint/2010/main" val="1119923278"/>
+      </p:ext>
+    </p:extLst>
+  </p:cSld>
+  <p:clrMapOvr>
+    <a:masterClrMapping/>
+  </p:clrMapOvr>
+</p:sld>
+</file>
+
+<file path=ppt/slides/slide8.xml><?xml version="1.0" encoding="utf-8"?>
+<p:sld xmlns:a="http://schemas.openxmlformats.org/drawingml/2006/main" xmlns:r="http://schemas.openxmlformats.org/officeDocument/2006/relationships" xmlns:p="http://schemas.openxmlformats.org/presentationml/2006/main">
+  <p:cSld>
+    <p:spTree>
+      <p:nvGrpSpPr>
+        <p:cNvPr id="1" name=""/>
+        <p:cNvGrpSpPr/>
+        <p:nvPr/>
+      </p:nvGrpSpPr>
+      <p:grpSpPr>
+        <a:xfrm>
+          <a:off x="0" y="0"/>
+          <a:ext cx="0" cy="0"/>
+          <a:chOff x="0" y="0"/>
+          <a:chExt cx="0" cy="0"/>
+        </a:xfrm>
+      </p:grpSpPr>
+      <p:pic>
+        <p:nvPicPr>
+          <p:cNvPr id="4" name="Picture 3" descr="A pixelated image of a black and white square&#10;&#10;AI-generated content may be incorrect.">
+            <a:extLst>
+              <a:ext uri="{FF2B5EF4-FFF2-40B4-BE49-F238E27FC236}">
+                <a16:creationId xmlns:a16="http://schemas.microsoft.com/office/drawing/2014/main" id="{3D7E1B0D-E008-D96D-4169-52D66104F76F}"/>
+              </a:ext>
+            </a:extLst>
+          </p:cNvPr>
+          <p:cNvPicPr>
+            <a:picLocks noChangeAspect="1"/>
+          </p:cNvPicPr>
+          <p:nvPr/>
+        </p:nvPicPr>
+        <p:blipFill>
+          <a:blip r:embed="rId2">
+            <a:extLst>
+              <a:ext uri="{28A0092B-C50C-407E-A947-70E740481C1C}">
+                <a14:useLocalDpi xmlns:a14="http://schemas.microsoft.com/office/drawing/2010/main" val="0"/>
+              </a:ext>
+            </a:extLst>
+          </a:blip>
+          <a:stretch>
+            <a:fillRect/>
+          </a:stretch>
+        </p:blipFill>
+        <p:spPr>
+          <a:xfrm>
+            <a:off x="7906507" y="1821391"/>
+            <a:ext cx="3236983" cy="3236983"/>
           </a:xfrm>
           <a:prstGeom prst="rect">
             <a:avLst/>
@@ -15734,8 +18401,8 @@
         </p:nvSpPr>
         <p:spPr>
           <a:xfrm>
-            <a:off x="4321739" y="4734692"/>
-            <a:ext cx="2345542" cy="469815"/>
+            <a:off x="4626429" y="5047491"/>
+            <a:ext cx="2730427" cy="469815"/>
           </a:xfrm>
           <a:prstGeom prst="triangle">
             <a:avLst>
@@ -15792,7 +18459,7 @@
         </p:nvSpPr>
         <p:spPr>
           <a:xfrm>
-            <a:off x="4245428" y="5216459"/>
+            <a:off x="4789714" y="5517306"/>
             <a:ext cx="2612571" cy="400110"/>
           </a:xfrm>
           <a:prstGeom prst="rect">
@@ -15809,14 +18476,13 @@
           </a:bodyPr>
           <a:lstStyle/>
           <a:p>
-            <a:pPr/>
             <a:r>
               <a:rPr lang="de-DE" sz="2000" dirty="0">
                 <a:solidFill>
                   <a:schemeClr val="tx1"/>
                 </a:solidFill>
               </a:rPr>
-              <a:t>Frequency encoding</a:t>
+              <a:t>Frequency encoding </a:t>
             </a:r>
           </a:p>
         </p:txBody>
@@ -15835,8 +18501,8 @@
         </p:nvSpPr>
         <p:spPr>
           <a:xfrm rot="16200000">
-            <a:off x="2579738" y="3115006"/>
-            <a:ext cx="2345542" cy="469815"/>
+            <a:off x="2301164" y="2999888"/>
+            <a:ext cx="2826807" cy="469815"/>
           </a:xfrm>
           <a:prstGeom prst="triangle">
             <a:avLst>
@@ -15893,7 +18559,7 @@
         </p:nvSpPr>
         <p:spPr>
           <a:xfrm rot="16200000">
-            <a:off x="2265328" y="3061571"/>
+            <a:off x="2227387" y="3061571"/>
             <a:ext cx="1944763" cy="400110"/>
           </a:xfrm>
           <a:prstGeom prst="rect">
@@ -15910,7 +18576,6 @@
           </a:bodyPr>
           <a:lstStyle/>
           <a:p>
-            <a:pPr/>
             <a:r>
               <a:rPr lang="de-DE" sz="2000" dirty="0">
                 <a:solidFill>
@@ -15924,10 +18589,10 @@
       </p:sp>
       <p:pic>
         <p:nvPicPr>
-          <p:cNvPr id="15" name="Picture 14" descr="A black and white pixelated square&#10;&#10;AI-generated content may be incorrect.">
-            <a:extLst>
-              <a:ext uri="{FF2B5EF4-FFF2-40B4-BE49-F238E27FC236}">
-                <a16:creationId xmlns:a16="http://schemas.microsoft.com/office/drawing/2014/main" id="{161C4F50-A3EC-8FCB-0213-69E3EDD27CC9}"/>
+          <p:cNvPr id="6" name="Picture 5" descr="A black and white square with white squares&#10;&#10;AI-generated content may be incorrect.">
+            <a:extLst>
+              <a:ext uri="{FF2B5EF4-FFF2-40B4-BE49-F238E27FC236}">
+                <a16:creationId xmlns:a16="http://schemas.microsoft.com/office/drawing/2014/main" id="{85C5245A-3614-EF5E-C4FC-E5C76321BAAA}"/>
               </a:ext>
             </a:extLst>
           </p:cNvPr>
@@ -15950,8 +18615,8 @@
         </p:blipFill>
         <p:spPr>
           <a:xfrm>
-            <a:off x="7944827" y="2092281"/>
-            <a:ext cx="2877318" cy="2877318"/>
+            <a:off x="4029309" y="1821393"/>
+            <a:ext cx="3327547" cy="3327547"/>
           </a:xfrm>
           <a:prstGeom prst="rect">
             <a:avLst/>
@@ -15971,7 +18636,7 @@
 </p:sld>
 </file>
 
-<file path=ppt/slides/slide7.xml><?xml version="1.0" encoding="utf-8"?>
+<file path=ppt/slides/slide9.xml><?xml version="1.0" encoding="utf-8"?>
 <p:sld xmlns:a="http://schemas.openxmlformats.org/drawingml/2006/main" xmlns:r="http://schemas.openxmlformats.org/officeDocument/2006/relationships" xmlns:p="http://schemas.openxmlformats.org/presentationml/2006/main">
   <p:cSld>
     <p:spTree>
@@ -15990,10 +18655,10 @@
       </p:grpSpPr>
       <p:pic>
         <p:nvPicPr>
-          <p:cNvPr id="3" name="Picture 2" descr="A black and white pixelated square&#10;&#10;AI-generated content may be incorrect.">
-            <a:extLst>
-              <a:ext uri="{FF2B5EF4-FFF2-40B4-BE49-F238E27FC236}">
-                <a16:creationId xmlns:a16="http://schemas.microsoft.com/office/drawing/2014/main" id="{951207BA-DE99-FB52-5084-CF79A24650E6}"/>
+          <p:cNvPr id="10" name="Picture 9" descr="A pixelated image of a black and white square&#10;&#10;AI-generated content may be incorrect.">
+            <a:extLst>
+              <a:ext uri="{FF2B5EF4-FFF2-40B4-BE49-F238E27FC236}">
+                <a16:creationId xmlns:a16="http://schemas.microsoft.com/office/drawing/2014/main" id="{B00E4B1B-AE6F-5FDD-28BE-D8CB9C4A2F2D}"/>
               </a:ext>
             </a:extLst>
           </p:cNvPr>
@@ -16016,8 +18681,8 @@
         </p:blipFill>
         <p:spPr>
           <a:xfrm>
-            <a:off x="4189353" y="3810743"/>
-            <a:ext cx="2877318" cy="2877318"/>
+            <a:off x="708053" y="218154"/>
+            <a:ext cx="3236983" cy="3236983"/>
           </a:xfrm>
           <a:prstGeom prst="rect">
             <a:avLst/>
@@ -16026,10 +18691,10 @@
       </p:pic>
       <p:pic>
         <p:nvPicPr>
-          <p:cNvPr id="8" name="Picture 7" descr="A black and white pixelated square&#10;&#10;AI-generated content may be incorrect.">
-            <a:extLst>
-              <a:ext uri="{FF2B5EF4-FFF2-40B4-BE49-F238E27FC236}">
-                <a16:creationId xmlns:a16="http://schemas.microsoft.com/office/drawing/2014/main" id="{0AD76CED-0C10-4D75-A226-43FC5F950C2A}"/>
+          <p:cNvPr id="13" name="Picture 12" descr="A black and white pixelated square&#10;&#10;AI-generated content may be incorrect.">
+            <a:extLst>
+              <a:ext uri="{FF2B5EF4-FFF2-40B4-BE49-F238E27FC236}">
+                <a16:creationId xmlns:a16="http://schemas.microsoft.com/office/drawing/2014/main" id="{0D9ADA81-E905-3774-D2CB-634192A29A61}"/>
               </a:ext>
             </a:extLst>
           </p:cNvPr>
@@ -16052,8 +18717,8 @@
         </p:blipFill>
         <p:spPr>
           <a:xfrm>
-            <a:off x="931134" y="551682"/>
-            <a:ext cx="2877318" cy="2877318"/>
+            <a:off x="4164522" y="218154"/>
+            <a:ext cx="3236983" cy="3236983"/>
           </a:xfrm>
           <a:prstGeom prst="rect">
             <a:avLst/>
@@ -16062,10 +18727,10 @@
       </p:pic>
       <p:pic>
         <p:nvPicPr>
-          <p:cNvPr id="12" name="Picture 11" descr="A black and white pixelated square&#10;&#10;AI-generated content may be incorrect.">
-            <a:extLst>
-              <a:ext uri="{FF2B5EF4-FFF2-40B4-BE49-F238E27FC236}">
-                <a16:creationId xmlns:a16="http://schemas.microsoft.com/office/drawing/2014/main" id="{2E61BD55-7A6D-B52E-EB93-C6A147CA7203}"/>
+          <p:cNvPr id="16" name="Picture 15" descr="A pixelated image of a black and white square&#10;&#10;AI-generated content may be incorrect.">
+            <a:extLst>
+              <a:ext uri="{FF2B5EF4-FFF2-40B4-BE49-F238E27FC236}">
+                <a16:creationId xmlns:a16="http://schemas.microsoft.com/office/drawing/2014/main" id="{3B6F989A-506C-5077-5884-4F94D607A125}"/>
               </a:ext>
             </a:extLst>
           </p:cNvPr>
@@ -16088,8 +18753,8 @@
         </p:blipFill>
         <p:spPr>
           <a:xfrm>
-            <a:off x="4189353" y="551682"/>
-            <a:ext cx="2877318" cy="2877318"/>
+            <a:off x="7620991" y="218154"/>
+            <a:ext cx="3236983" cy="3236983"/>
           </a:xfrm>
           <a:prstGeom prst="rect">
             <a:avLst/>
@@ -16098,10 +18763,10 @@
       </p:pic>
       <p:pic>
         <p:nvPicPr>
-          <p:cNvPr id="14" name="Picture 13" descr="A black and white pixelated square&#10;&#10;AI-generated content may be incorrect.">
-            <a:extLst>
-              <a:ext uri="{FF2B5EF4-FFF2-40B4-BE49-F238E27FC236}">
-                <a16:creationId xmlns:a16="http://schemas.microsoft.com/office/drawing/2014/main" id="{FC59AED1-95B8-EC4A-F17F-6A723004EA89}"/>
+          <p:cNvPr id="19" name="Picture 18" descr="A pixelated image of a black and white square&#10;&#10;AI-generated content may be incorrect.">
+            <a:extLst>
+              <a:ext uri="{FF2B5EF4-FFF2-40B4-BE49-F238E27FC236}">
+                <a16:creationId xmlns:a16="http://schemas.microsoft.com/office/drawing/2014/main" id="{1EBEE43C-540D-D316-5FA5-A944A41C619B}"/>
               </a:ext>
             </a:extLst>
           </p:cNvPr>
@@ -16124,8 +18789,8 @@
         </p:blipFill>
         <p:spPr>
           <a:xfrm>
-            <a:off x="931134" y="3799857"/>
-            <a:ext cx="2877318" cy="2877318"/>
+            <a:off x="708053" y="3557884"/>
+            <a:ext cx="3236983" cy="3236983"/>
           </a:xfrm>
           <a:prstGeom prst="rect">
             <a:avLst/>
@@ -16134,10 +18799,10 @@
       </p:pic>
       <p:pic>
         <p:nvPicPr>
-          <p:cNvPr id="16" name="Picture 15" descr="A black and white pixelated square&#10;&#10;AI-generated content may be incorrect.">
-            <a:extLst>
-              <a:ext uri="{FF2B5EF4-FFF2-40B4-BE49-F238E27FC236}">
-                <a16:creationId xmlns:a16="http://schemas.microsoft.com/office/drawing/2014/main" id="{3C017610-7187-5AB6-90F5-0BDFE564F722}"/>
+          <p:cNvPr id="21" name="Picture 20" descr="A black and white pixelated square&#10;&#10;AI-generated content may be incorrect.">
+            <a:extLst>
+              <a:ext uri="{FF2B5EF4-FFF2-40B4-BE49-F238E27FC236}">
+                <a16:creationId xmlns:a16="http://schemas.microsoft.com/office/drawing/2014/main" id="{D4D3CA93-3979-3975-8734-1FC1A4FF1BEA}"/>
               </a:ext>
             </a:extLst>
           </p:cNvPr>
@@ -16160,8 +18825,8 @@
         </p:blipFill>
         <p:spPr>
           <a:xfrm>
-            <a:off x="7447572" y="3802563"/>
-            <a:ext cx="2877318" cy="2877318"/>
+            <a:off x="4164522" y="3557884"/>
+            <a:ext cx="3236983" cy="3236983"/>
           </a:xfrm>
           <a:prstGeom prst="rect">
             <a:avLst/>
@@ -16170,10 +18835,10 @@
       </p:pic>
       <p:pic>
         <p:nvPicPr>
-          <p:cNvPr id="20" name="Picture 19" descr="A black and white pixelated square&#10;&#10;AI-generated content may be incorrect.">
-            <a:extLst>
-              <a:ext uri="{FF2B5EF4-FFF2-40B4-BE49-F238E27FC236}">
-                <a16:creationId xmlns:a16="http://schemas.microsoft.com/office/drawing/2014/main" id="{E5F9FCD1-FF6C-3AA0-D173-5A771F93AEF3}"/>
+          <p:cNvPr id="27" name="Picture 26" descr="A pixelated image of a black and white square&#10;&#10;AI-generated content may be incorrect.">
+            <a:extLst>
+              <a:ext uri="{FF2B5EF4-FFF2-40B4-BE49-F238E27FC236}">
+                <a16:creationId xmlns:a16="http://schemas.microsoft.com/office/drawing/2014/main" id="{3B148123-512C-4CE9-AB62-6D6BE6ECD6F0}"/>
               </a:ext>
             </a:extLst>
           </p:cNvPr>
@@ -16196,8 +18861,8 @@
         </p:blipFill>
         <p:spPr>
           <a:xfrm>
-            <a:off x="7447572" y="551682"/>
-            <a:ext cx="2877318" cy="2877318"/>
+            <a:off x="7620991" y="3557884"/>
+            <a:ext cx="3236983" cy="3236983"/>
           </a:xfrm>
           <a:prstGeom prst="rect">
             <a:avLst/>
@@ -16218,7 +18883,7 @@
         </p:nvCxnSpPr>
         <p:spPr>
           <a:xfrm>
-            <a:off x="7507564" y="3542429"/>
+            <a:off x="7867853" y="3484520"/>
             <a:ext cx="3198657" cy="2971800"/>
           </a:xfrm>
           <a:prstGeom prst="line">
@@ -16261,7 +18926,7 @@
         </p:nvCxnSpPr>
         <p:spPr>
           <a:xfrm rot="16200000">
-            <a:off x="7507564" y="3542429"/>
+            <a:off x="7867853" y="3484520"/>
             <a:ext cx="3198657" cy="2971800"/>
           </a:xfrm>
           <a:prstGeom prst="line">
@@ -16302,7 +18967,7 @@
         </p:nvCxnSpPr>
         <p:spPr>
           <a:xfrm>
-            <a:off x="4235234" y="3542429"/>
+            <a:off x="4485605" y="3542429"/>
             <a:ext cx="3198657" cy="2971800"/>
           </a:xfrm>
           <a:prstGeom prst="line">
@@ -16345,7 +19010,7 @@
         </p:nvCxnSpPr>
         <p:spPr>
           <a:xfrm rot="16200000">
-            <a:off x="4235234" y="3542429"/>
+            <a:off x="4485605" y="3542429"/>
             <a:ext cx="3198657" cy="2971800"/>
           </a:xfrm>
           <a:prstGeom prst="line">
@@ -16376,981 +19041,6 @@
     <p:extLst>
       <p:ext uri="{BB962C8B-B14F-4D97-AF65-F5344CB8AC3E}">
         <p14:creationId xmlns:p14="http://schemas.microsoft.com/office/powerpoint/2010/main" val="3134903272"/>
-      </p:ext>
-    </p:extLst>
-  </p:cSld>
-  <p:clrMapOvr>
-    <a:masterClrMapping/>
-  </p:clrMapOvr>
-</p:sld>
-</file>
-
-<file path=ppt/slides/slide8.xml><?xml version="1.0" encoding="utf-8"?>
-<p:sld xmlns:a="http://schemas.openxmlformats.org/drawingml/2006/main" xmlns:r="http://schemas.openxmlformats.org/officeDocument/2006/relationships" xmlns:p="http://schemas.openxmlformats.org/presentationml/2006/main">
-  <p:cSld>
-    <p:spTree>
-      <p:nvGrpSpPr>
-        <p:cNvPr id="1" name=""/>
-        <p:cNvGrpSpPr/>
-        <p:nvPr/>
-      </p:nvGrpSpPr>
-      <p:grpSpPr>
-        <a:xfrm>
-          <a:off x="0" y="0"/>
-          <a:ext cx="0" cy="0"/>
-          <a:chOff x="0" y="0"/>
-          <a:chExt cx="0" cy="0"/>
-        </a:xfrm>
-      </p:grpSpPr>
-      <p:pic>
-        <p:nvPicPr>
-          <p:cNvPr id="29" name="Picture 28" descr="A black and white square with white squares&#10;&#10;AI-generated content may be incorrect.">
-            <a:extLst>
-              <a:ext uri="{FF2B5EF4-FFF2-40B4-BE49-F238E27FC236}">
-                <a16:creationId xmlns:a16="http://schemas.microsoft.com/office/drawing/2014/main" id="{D6DB9F16-F82D-E321-77BA-3E3099DAB6AF}"/>
-              </a:ext>
-            </a:extLst>
-          </p:cNvPr>
-          <p:cNvPicPr>
-            <a:picLocks noChangeAspect="1"/>
-          </p:cNvPicPr>
-          <p:nvPr/>
-        </p:nvPicPr>
-        <p:blipFill>
-          <a:blip r:embed="rId3">
-            <a:extLst>
-              <a:ext uri="{28A0092B-C50C-407E-A947-70E740481C1C}">
-                <a14:useLocalDpi xmlns:a14="http://schemas.microsoft.com/office/drawing/2010/main" val="0"/>
-              </a:ext>
-            </a:extLst>
-          </a:blip>
-          <a:stretch>
-            <a:fillRect/>
-          </a:stretch>
-        </p:blipFill>
-        <p:spPr>
-          <a:xfrm>
-            <a:off x="-3135994" y="-2398728"/>
-            <a:ext cx="11037119" cy="11037119"/>
-          </a:xfrm>
-          <a:prstGeom prst="rect">
-            <a:avLst/>
-          </a:prstGeom>
-        </p:spPr>
-      </p:pic>
-      <p:pic>
-        <p:nvPicPr>
-          <p:cNvPr id="15" name="Picture 14" descr="A group of colorful lines&#10;&#10;AI-generated content may be incorrect.">
-            <a:extLst>
-              <a:ext uri="{FF2B5EF4-FFF2-40B4-BE49-F238E27FC236}">
-                <a16:creationId xmlns:a16="http://schemas.microsoft.com/office/drawing/2014/main" id="{E7F222F1-AC64-AC0B-640E-AD1C7D376C37}"/>
-              </a:ext>
-            </a:extLst>
-          </p:cNvPr>
-          <p:cNvPicPr>
-            <a:picLocks noChangeAspect="1"/>
-          </p:cNvPicPr>
-          <p:nvPr/>
-        </p:nvPicPr>
-        <p:blipFill>
-          <a:blip r:embed="rId4">
-            <a:clrChange>
-              <a:clrFrom>
-                <a:srgbClr val="FFFFFF"/>
-              </a:clrFrom>
-              <a:clrTo>
-                <a:srgbClr val="FFFFFF">
-                  <a:alpha val="0"/>
-                </a:srgbClr>
-              </a:clrTo>
-            </a:clrChange>
-            <a:extLst>
-              <a:ext uri="{28A0092B-C50C-407E-A947-70E740481C1C}">
-                <a14:useLocalDpi xmlns:a14="http://schemas.microsoft.com/office/drawing/2010/main" val="0"/>
-              </a:ext>
-            </a:extLst>
-          </a:blip>
-          <a:stretch>
-            <a:fillRect/>
-          </a:stretch>
-        </p:blipFill>
-        <p:spPr>
-          <a:xfrm>
-            <a:off x="-912000" y="-178539"/>
-            <a:ext cx="6561686" cy="6561686"/>
-          </a:xfrm>
-          <a:prstGeom prst="rect">
-            <a:avLst/>
-          </a:prstGeom>
-        </p:spPr>
-      </p:pic>
-      <p:pic>
-        <p:nvPicPr>
-          <p:cNvPr id="23" name="Picture 22" descr="A grid with a black background&#10;&#10;AI-generated content may be incorrect.">
-            <a:extLst>
-              <a:ext uri="{FF2B5EF4-FFF2-40B4-BE49-F238E27FC236}">
-                <a16:creationId xmlns:a16="http://schemas.microsoft.com/office/drawing/2014/main" id="{E9C41F2B-177B-04AF-EC48-9535A80C4C96}"/>
-              </a:ext>
-            </a:extLst>
-          </p:cNvPr>
-          <p:cNvPicPr>
-            <a:picLocks noChangeAspect="1"/>
-          </p:cNvPicPr>
-          <p:nvPr/>
-        </p:nvPicPr>
-        <p:blipFill>
-          <a:blip r:embed="rId5">
-            <a:extLst>
-              <a:ext uri="{28A0092B-C50C-407E-A947-70E740481C1C}">
-                <a14:useLocalDpi xmlns:a14="http://schemas.microsoft.com/office/drawing/2010/main" val="0"/>
-              </a:ext>
-            </a:extLst>
-          </a:blip>
-          <a:stretch>
-            <a:fillRect/>
-          </a:stretch>
-        </p:blipFill>
-        <p:spPr>
-          <a:xfrm>
-            <a:off x="8525913" y="1279556"/>
-            <a:ext cx="13648285" cy="10236212"/>
-          </a:xfrm>
-          <a:prstGeom prst="rect">
-            <a:avLst/>
-          </a:prstGeom>
-        </p:spPr>
-      </p:pic>
-      <p:sp>
-        <p:nvSpPr>
-          <p:cNvPr id="24" name="TextBox 23">
-            <a:extLst>
-              <a:ext uri="{FF2B5EF4-FFF2-40B4-BE49-F238E27FC236}">
-                <a16:creationId xmlns:a16="http://schemas.microsoft.com/office/drawing/2014/main" id="{B99C5A29-5E23-CFF6-4ABD-84327E94AEAC}"/>
-              </a:ext>
-            </a:extLst>
-          </p:cNvPr>
-          <p:cNvSpPr txBox="1"/>
-          <p:nvPr/>
-        </p:nvSpPr>
-        <p:spPr>
-          <a:xfrm>
-            <a:off x="-6923878" y="9668107"/>
-            <a:ext cx="4050482" cy="1754326"/>
-          </a:xfrm>
-          <a:prstGeom prst="rect">
-            <a:avLst/>
-          </a:prstGeom>
-          <a:noFill/>
-        </p:spPr>
-        <p:txBody>
-          <a:bodyPr wrap="square" rtlCol="0">
-            <a:spAutoFit/>
-          </a:bodyPr>
-          <a:lstStyle/>
-          <a:p>
-            <a:r>
-              <a:rPr lang="de-DE" sz="5400" b="1" dirty="0"/>
-              <a:t>Signal per column</a:t>
-            </a:r>
-          </a:p>
-        </p:txBody>
-      </p:sp>
-      <p:sp>
-        <p:nvSpPr>
-          <p:cNvPr id="26" name="TextBox 25">
-            <a:extLst>
-              <a:ext uri="{FF2B5EF4-FFF2-40B4-BE49-F238E27FC236}">
-                <a16:creationId xmlns:a16="http://schemas.microsoft.com/office/drawing/2014/main" id="{4BB1DB91-9FCE-C57B-5D16-A1D33DCB72ED}"/>
-              </a:ext>
-            </a:extLst>
-          </p:cNvPr>
-          <p:cNvSpPr txBox="1"/>
-          <p:nvPr/>
-        </p:nvSpPr>
-        <p:spPr>
-          <a:xfrm>
-            <a:off x="12678362" y="356226"/>
-            <a:ext cx="5343386" cy="923330"/>
-          </a:xfrm>
-          <a:prstGeom prst="rect">
-            <a:avLst/>
-          </a:prstGeom>
-          <a:noFill/>
-        </p:spPr>
-        <p:txBody>
-          <a:bodyPr wrap="none" rtlCol="0">
-            <a:spAutoFit/>
-          </a:bodyPr>
-          <a:lstStyle/>
-          <a:p>
-            <a:r>
-              <a:rPr lang="de-DE" sz="5400" b="1" dirty="0"/>
-              <a:t>Measured signal</a:t>
-            </a:r>
-          </a:p>
-        </p:txBody>
-      </p:sp>
-      <p:sp>
-        <p:nvSpPr>
-          <p:cNvPr id="27" name="TextBox 26">
-            <a:extLst>
-              <a:ext uri="{FF2B5EF4-FFF2-40B4-BE49-F238E27FC236}">
-                <a16:creationId xmlns:a16="http://schemas.microsoft.com/office/drawing/2014/main" id="{77D4BFFD-974A-C9CC-3FBC-28142916974D}"/>
-              </a:ext>
-            </a:extLst>
-          </p:cNvPr>
-          <p:cNvSpPr txBox="1"/>
-          <p:nvPr/>
-        </p:nvSpPr>
-        <p:spPr>
-          <a:xfrm>
-            <a:off x="-6923878" y="12519093"/>
-            <a:ext cx="3493970" cy="923330"/>
-          </a:xfrm>
-          <a:prstGeom prst="rect">
-            <a:avLst/>
-          </a:prstGeom>
-          <a:noFill/>
-        </p:spPr>
-        <p:txBody>
-          <a:bodyPr wrap="none" rtlCol="0">
-            <a:spAutoFit/>
-          </a:bodyPr>
-          <a:lstStyle/>
-          <a:p>
-            <a:r>
-              <a:rPr lang="de-DE" sz="5400" b="1" dirty="0"/>
-              <a:t>Frequency</a:t>
-            </a:r>
-          </a:p>
-        </p:txBody>
-      </p:sp>
-      <p:pic>
-        <p:nvPicPr>
-          <p:cNvPr id="33" name="Picture 32" descr="A black and white rectangles&#10;&#10;AI-generated content may be incorrect.">
-            <a:extLst>
-              <a:ext uri="{FF2B5EF4-FFF2-40B4-BE49-F238E27FC236}">
-                <a16:creationId xmlns:a16="http://schemas.microsoft.com/office/drawing/2014/main" id="{21F38570-F616-5133-49AB-E3D3C0493664}"/>
-              </a:ext>
-            </a:extLst>
-          </p:cNvPr>
-          <p:cNvPicPr>
-            <a:picLocks noChangeAspect="1"/>
-          </p:cNvPicPr>
-          <p:nvPr/>
-        </p:nvPicPr>
-        <p:blipFill>
-          <a:blip r:embed="rId6">
-            <a:extLst>
-              <a:ext uri="{28A0092B-C50C-407E-A947-70E740481C1C}">
-                <a14:useLocalDpi xmlns:a14="http://schemas.microsoft.com/office/drawing/2010/main" val="0"/>
-              </a:ext>
-            </a:extLst>
-          </a:blip>
-          <a:srcRect t="42064" b="42212"/>
-          <a:stretch>
-            <a:fillRect/>
-          </a:stretch>
-        </p:blipFill>
-        <p:spPr>
-          <a:xfrm>
-            <a:off x="-3135994" y="9381539"/>
-            <a:ext cx="11037119" cy="2134229"/>
-          </a:xfrm>
-          <a:prstGeom prst="rect">
-            <a:avLst/>
-          </a:prstGeom>
-        </p:spPr>
-      </p:pic>
-      <p:pic>
-        <p:nvPicPr>
-          <p:cNvPr id="7" name="Picture 6" descr="A yellow line on a white background&#10;&#10;AI-generated content may be incorrect.">
-            <a:extLst>
-              <a:ext uri="{FF2B5EF4-FFF2-40B4-BE49-F238E27FC236}">
-                <a16:creationId xmlns:a16="http://schemas.microsoft.com/office/drawing/2014/main" id="{73D484D0-2A93-5F4F-E8FA-5B291C231987}"/>
-              </a:ext>
-            </a:extLst>
-          </p:cNvPr>
-          <p:cNvPicPr>
-            <a:picLocks noChangeAspect="1"/>
-          </p:cNvPicPr>
-          <p:nvPr/>
-        </p:nvPicPr>
-        <p:blipFill>
-          <a:blip r:embed="rId7">
-            <a:clrChange>
-              <a:clrFrom>
-                <a:srgbClr val="FFFFFF"/>
-              </a:clrFrom>
-              <a:clrTo>
-                <a:srgbClr val="FFFFFF">
-                  <a:alpha val="0"/>
-                </a:srgbClr>
-              </a:clrTo>
-            </a:clrChange>
-            <a:extLst>
-              <a:ext uri="{28A0092B-C50C-407E-A947-70E740481C1C}">
-                <a14:useLocalDpi xmlns:a14="http://schemas.microsoft.com/office/drawing/2010/main" val="0"/>
-              </a:ext>
-            </a:extLst>
-          </a:blip>
-          <a:stretch>
-            <a:fillRect/>
-          </a:stretch>
-        </p:blipFill>
-        <p:spPr>
-          <a:xfrm>
-            <a:off x="-1042628" y="9272948"/>
-            <a:ext cx="6692314" cy="2414016"/>
-          </a:xfrm>
-          <a:prstGeom prst="rect">
-            <a:avLst/>
-          </a:prstGeom>
-        </p:spPr>
-      </p:pic>
-      <p:sp>
-        <p:nvSpPr>
-          <p:cNvPr id="25" name="Isosceles Triangle 24">
-            <a:extLst>
-              <a:ext uri="{FF2B5EF4-FFF2-40B4-BE49-F238E27FC236}">
-                <a16:creationId xmlns:a16="http://schemas.microsoft.com/office/drawing/2014/main" id="{57BC236B-785C-49BE-E09D-BCEEB109FB15}"/>
-              </a:ext>
-            </a:extLst>
-          </p:cNvPr>
-          <p:cNvSpPr/>
-          <p:nvPr/>
-        </p:nvSpPr>
-        <p:spPr>
-          <a:xfrm>
-            <a:off x="-3149716" y="12229644"/>
-            <a:ext cx="11037118" cy="1502228"/>
-          </a:xfrm>
-          <a:prstGeom prst="triangle">
-            <a:avLst>
-              <a:gd name="adj" fmla="val 100000"/>
-            </a:avLst>
-          </a:prstGeom>
-          <a:solidFill>
-            <a:schemeClr val="accent1">
-              <a:lumMod val="75000"/>
-            </a:schemeClr>
-          </a:solidFill>
-          <a:ln>
-            <a:noFill/>
-          </a:ln>
-        </p:spPr>
-        <p:style>
-          <a:lnRef idx="2">
-            <a:schemeClr val="accent1">
-              <a:shade val="15000"/>
-            </a:schemeClr>
-          </a:lnRef>
-          <a:fillRef idx="1">
-            <a:schemeClr val="accent1"/>
-          </a:fillRef>
-          <a:effectRef idx="0">
-            <a:schemeClr val="accent1"/>
-          </a:effectRef>
-          <a:fontRef idx="minor">
-            <a:schemeClr val="lt1"/>
-          </a:fontRef>
-        </p:style>
-        <p:txBody>
-          <a:bodyPr rtlCol="0" anchor="ctr"/>
-          <a:lstStyle/>
-          <a:p>
-            <a:pPr algn="ctr"/>
-            <a:endParaRPr lang="de-DE">
-              <a:solidFill>
-                <a:schemeClr val="accent1"/>
-              </a:solidFill>
-            </a:endParaRPr>
-          </a:p>
-        </p:txBody>
-      </p:sp>
-    </p:spTree>
-    <p:extLst>
-      <p:ext uri="{BB962C8B-B14F-4D97-AF65-F5344CB8AC3E}">
-        <p14:creationId xmlns:p14="http://schemas.microsoft.com/office/powerpoint/2010/main" val="1490451566"/>
-      </p:ext>
-    </p:extLst>
-  </p:cSld>
-  <p:clrMapOvr>
-    <a:masterClrMapping/>
-  </p:clrMapOvr>
-</p:sld>
-</file>
-
-<file path=ppt/slides/slide9.xml><?xml version="1.0" encoding="utf-8"?>
-<p:sld xmlns:a="http://schemas.openxmlformats.org/drawingml/2006/main" xmlns:r="http://schemas.openxmlformats.org/officeDocument/2006/relationships" xmlns:p="http://schemas.openxmlformats.org/presentationml/2006/main">
-  <p:cSld>
-    <p:spTree>
-      <p:nvGrpSpPr>
-        <p:cNvPr id="1" name=""/>
-        <p:cNvGrpSpPr/>
-        <p:nvPr/>
-      </p:nvGrpSpPr>
-      <p:grpSpPr>
-        <a:xfrm>
-          <a:off x="0" y="0"/>
-          <a:ext cx="0" cy="0"/>
-          <a:chOff x="0" y="0"/>
-          <a:chExt cx="0" cy="0"/>
-        </a:xfrm>
-      </p:grpSpPr>
-      <p:sp>
-        <p:nvSpPr>
-          <p:cNvPr id="4" name="Isosceles Triangle 3">
-            <a:extLst>
-              <a:ext uri="{FF2B5EF4-FFF2-40B4-BE49-F238E27FC236}">
-                <a16:creationId xmlns:a16="http://schemas.microsoft.com/office/drawing/2014/main" id="{8864BC73-4045-0194-9454-E70145171C3F}"/>
-              </a:ext>
-            </a:extLst>
-          </p:cNvPr>
-          <p:cNvSpPr/>
-          <p:nvPr/>
-        </p:nvSpPr>
-        <p:spPr>
-          <a:xfrm>
-            <a:off x="187583" y="625642"/>
-            <a:ext cx="11037118" cy="4956142"/>
-          </a:xfrm>
-          <a:prstGeom prst="triangle">
-            <a:avLst>
-              <a:gd name="adj" fmla="val 100000"/>
-            </a:avLst>
-          </a:prstGeom>
-          <a:solidFill>
-            <a:schemeClr val="accent1">
-              <a:lumMod val="20000"/>
-              <a:lumOff val="80000"/>
-            </a:schemeClr>
-          </a:solidFill>
-          <a:ln>
-            <a:noFill/>
-          </a:ln>
-        </p:spPr>
-        <p:style>
-          <a:lnRef idx="2">
-            <a:schemeClr val="accent1">
-              <a:shade val="15000"/>
-            </a:schemeClr>
-          </a:lnRef>
-          <a:fillRef idx="1">
-            <a:schemeClr val="accent1"/>
-          </a:fillRef>
-          <a:effectRef idx="0">
-            <a:schemeClr val="accent1"/>
-          </a:effectRef>
-          <a:fontRef idx="minor">
-            <a:schemeClr val="lt1"/>
-          </a:fontRef>
-        </p:style>
-        <p:txBody>
-          <a:bodyPr rtlCol="0" anchor="ctr"/>
-          <a:lstStyle/>
-          <a:p>
-            <a:pPr algn="ctr"/>
-            <a:endParaRPr lang="de-DE">
-              <a:solidFill>
-                <a:schemeClr val="accent1"/>
-              </a:solidFill>
-            </a:endParaRPr>
-          </a:p>
-        </p:txBody>
-      </p:sp>
-      <mc:AlternateContent xmlns:mc="http://schemas.openxmlformats.org/markup-compatibility/2006" xmlns:a14="http://schemas.microsoft.com/office/drawing/2010/main">
-        <mc:Choice Requires="a14">
-          <p:sp>
-            <p:nvSpPr>
-              <p:cNvPr id="5" name="TextBox 4">
-                <a:extLst>
-                  <a:ext uri="{FF2B5EF4-FFF2-40B4-BE49-F238E27FC236}">
-                    <a16:creationId xmlns:a16="http://schemas.microsoft.com/office/drawing/2014/main" id="{FC21FF2A-CDFA-400E-E6ED-7A86E1A3A9EE}"/>
-                  </a:ext>
-                </a:extLst>
-              </p:cNvPr>
-              <p:cNvSpPr txBox="1"/>
-              <p:nvPr/>
-            </p:nvSpPr>
-            <p:spPr>
-              <a:xfrm>
-                <a:off x="675166" y="5581784"/>
-                <a:ext cx="1056892" cy="861774"/>
-              </a:xfrm>
-              <a:prstGeom prst="rect">
-                <a:avLst/>
-              </a:prstGeom>
-              <a:noFill/>
-            </p:spPr>
-            <p:txBody>
-              <a:bodyPr wrap="none" rtlCol="0">
-                <a:spAutoFit/>
-              </a:bodyPr>
-              <a:lstStyle/>
-              <a:p>
-                <a:pPr/>
-                <a14:m>
-                  <m:oMathPara xmlns:m="http://schemas.openxmlformats.org/officeDocument/2006/math">
-                    <m:oMathParaPr>
-                      <m:jc m:val="centerGroup"/>
-                    </m:oMathParaPr>
-                    <m:oMath xmlns:m="http://schemas.openxmlformats.org/officeDocument/2006/math">
-                      <m:r>
-                        <m:rPr>
-                          <m:sty m:val="p"/>
-                        </m:rPr>
-                        <a:rPr lang="de-DE" sz="5000" i="1" smtClean="0">
-                          <a:solidFill>
-                            <a:schemeClr val="accent3"/>
-                          </a:solidFill>
-                          <a:latin typeface="Cambria Math" panose="02040503050406030204" pitchFamily="18" charset="0"/>
-                        </a:rPr>
-                        <m:t>Δ</m:t>
-                      </m:r>
-                      <m:r>
-                        <a:rPr lang="de-DE" sz="5000" i="1" smtClean="0">
-                          <a:solidFill>
-                            <a:schemeClr val="accent3"/>
-                          </a:solidFill>
-                          <a:latin typeface="Cambria Math" panose="02040503050406030204" pitchFamily="18" charset="0"/>
-                        </a:rPr>
-                        <m:t>𝑥</m:t>
-                      </m:r>
-                    </m:oMath>
-                  </m:oMathPara>
-                </a14:m>
-                <a:endParaRPr lang="de-DE" sz="5000" dirty="0">
-                  <a:solidFill>
-                    <a:schemeClr val="accent3"/>
-                  </a:solidFill>
-                </a:endParaRPr>
-              </a:p>
-            </p:txBody>
-          </p:sp>
-        </mc:Choice>
-        <mc:Fallback xmlns="">
-          <p:sp>
-            <p:nvSpPr>
-              <p:cNvPr id="5" name="TextBox 4">
-                <a:extLst>
-                  <a:ext uri="{FF2B5EF4-FFF2-40B4-BE49-F238E27FC236}">
-                    <a16:creationId xmlns:a16="http://schemas.microsoft.com/office/drawing/2014/main" id="{FC21FF2A-CDFA-400E-E6ED-7A86E1A3A9EE}"/>
-                  </a:ext>
-                </a:extLst>
-              </p:cNvPr>
-              <p:cNvSpPr txBox="1">
-                <a:spLocks noRot="1" noChangeAspect="1" noMove="1" noResize="1" noEditPoints="1" noAdjustHandles="1" noChangeArrowheads="1" noChangeShapeType="1" noTextEdit="1"/>
-              </p:cNvSpPr>
-              <p:nvPr/>
-            </p:nvSpPr>
-            <p:spPr>
-              <a:xfrm>
-                <a:off x="675166" y="5581784"/>
-                <a:ext cx="1056892" cy="861774"/>
-              </a:xfrm>
-              <a:prstGeom prst="rect">
-                <a:avLst/>
-              </a:prstGeom>
-              <a:blipFill>
-                <a:blip r:embed="rId2"/>
-                <a:stretch>
-                  <a:fillRect/>
-                </a:stretch>
-              </a:blipFill>
-            </p:spPr>
-            <p:txBody>
-              <a:bodyPr/>
-              <a:lstStyle/>
-              <a:p>
-                <a:r>
-                  <a:rPr lang="de-DE">
-                    <a:noFill/>
-                  </a:rPr>
-                  <a:t> </a:t>
-                </a:r>
-              </a:p>
-            </p:txBody>
-          </p:sp>
-        </mc:Fallback>
-      </mc:AlternateContent>
-      <mc:AlternateContent xmlns:mc="http://schemas.openxmlformats.org/markup-compatibility/2006" xmlns:a14="http://schemas.microsoft.com/office/drawing/2010/main">
-        <mc:Choice Requires="a14">
-          <p:sp>
-            <p:nvSpPr>
-              <p:cNvPr id="7" name="TextBox 6">
-                <a:extLst>
-                  <a:ext uri="{FF2B5EF4-FFF2-40B4-BE49-F238E27FC236}">
-                    <a16:creationId xmlns:a16="http://schemas.microsoft.com/office/drawing/2014/main" id="{103AFB47-2B91-98A3-37D3-1C37D1AE6CA6}"/>
-                  </a:ext>
-                </a:extLst>
-              </p:cNvPr>
-              <p:cNvSpPr txBox="1"/>
-              <p:nvPr/>
-            </p:nvSpPr>
-            <p:spPr>
-              <a:xfrm>
-                <a:off x="2450128" y="4643028"/>
-                <a:ext cx="1067472" cy="861774"/>
-              </a:xfrm>
-              <a:prstGeom prst="rect">
-                <a:avLst/>
-              </a:prstGeom>
-              <a:noFill/>
-            </p:spPr>
-            <p:txBody>
-              <a:bodyPr wrap="none" rtlCol="0">
-                <a:spAutoFit/>
-              </a:bodyPr>
-              <a:lstStyle/>
-              <a:p>
-                <a:pPr/>
-                <a14:m>
-                  <m:oMathPara xmlns:m="http://schemas.openxmlformats.org/officeDocument/2006/math">
-                    <m:oMathParaPr>
-                      <m:jc m:val="centerGroup"/>
-                    </m:oMathParaPr>
-                    <m:oMath xmlns:m="http://schemas.openxmlformats.org/officeDocument/2006/math">
-                      <m:r>
-                        <m:rPr>
-                          <m:sty m:val="p"/>
-                        </m:rPr>
-                        <a:rPr lang="de-DE" sz="5000" i="1" smtClean="0">
-                          <a:solidFill>
-                            <a:srgbClr val="FF0000"/>
-                          </a:solidFill>
-                          <a:latin typeface="Cambria Math" panose="02040503050406030204" pitchFamily="18" charset="0"/>
-                        </a:rPr>
-                        <m:t>Δ</m:t>
-                      </m:r>
-                      <m:r>
-                        <a:rPr lang="de-DE" sz="5000" b="0" i="1" smtClean="0">
-                          <a:solidFill>
-                            <a:srgbClr val="FF0000"/>
-                          </a:solidFill>
-                          <a:latin typeface="Cambria Math" panose="02040503050406030204" pitchFamily="18" charset="0"/>
-                        </a:rPr>
-                        <m:t>𝑓</m:t>
-                      </m:r>
-                    </m:oMath>
-                  </m:oMathPara>
-                </a14:m>
-                <a:endParaRPr lang="de-DE" sz="5000" dirty="0">
-                  <a:solidFill>
-                    <a:srgbClr val="FF0000"/>
-                  </a:solidFill>
-                </a:endParaRPr>
-              </a:p>
-            </p:txBody>
-          </p:sp>
-        </mc:Choice>
-        <mc:Fallback xmlns="">
-          <p:sp>
-            <p:nvSpPr>
-              <p:cNvPr id="7" name="TextBox 6">
-                <a:extLst>
-                  <a:ext uri="{FF2B5EF4-FFF2-40B4-BE49-F238E27FC236}">
-                    <a16:creationId xmlns:a16="http://schemas.microsoft.com/office/drawing/2014/main" id="{103AFB47-2B91-98A3-37D3-1C37D1AE6CA6}"/>
-                  </a:ext>
-                </a:extLst>
-              </p:cNvPr>
-              <p:cNvSpPr txBox="1">
-                <a:spLocks noRot="1" noChangeAspect="1" noMove="1" noResize="1" noEditPoints="1" noAdjustHandles="1" noChangeArrowheads="1" noChangeShapeType="1" noTextEdit="1"/>
-              </p:cNvSpPr>
-              <p:nvPr/>
-            </p:nvSpPr>
-            <p:spPr>
-              <a:xfrm>
-                <a:off x="2450128" y="4643028"/>
-                <a:ext cx="1067472" cy="861774"/>
-              </a:xfrm>
-              <a:prstGeom prst="rect">
-                <a:avLst/>
-              </a:prstGeom>
-              <a:blipFill>
-                <a:blip r:embed="rId3"/>
-                <a:stretch>
-                  <a:fillRect/>
-                </a:stretch>
-              </a:blipFill>
-            </p:spPr>
-            <p:txBody>
-              <a:bodyPr/>
-              <a:lstStyle/>
-              <a:p>
-                <a:r>
-                  <a:rPr lang="de-DE">
-                    <a:noFill/>
-                  </a:rPr>
-                  <a:t> </a:t>
-                </a:r>
-              </a:p>
-            </p:txBody>
-          </p:sp>
-        </mc:Fallback>
-      </mc:AlternateContent>
-      <p:cxnSp>
-        <p:nvCxnSpPr>
-          <p:cNvPr id="9" name="Straight Arrow Connector 8">
-            <a:extLst>
-              <a:ext uri="{FF2B5EF4-FFF2-40B4-BE49-F238E27FC236}">
-                <a16:creationId xmlns:a16="http://schemas.microsoft.com/office/drawing/2014/main" id="{935B09BC-7FCD-A8FF-3772-5C9673A40C59}"/>
-              </a:ext>
-            </a:extLst>
-          </p:cNvPr>
-          <p:cNvCxnSpPr>
-            <a:cxnSpLocks/>
-          </p:cNvCxnSpPr>
-          <p:nvPr/>
-        </p:nvCxnSpPr>
-        <p:spPr>
-          <a:xfrm flipV="1">
-            <a:off x="195340" y="5581784"/>
-            <a:ext cx="2254788" cy="32994"/>
-          </a:xfrm>
-          <a:prstGeom prst="straightConnector1">
-            <a:avLst/>
-          </a:prstGeom>
-          <a:ln w="57150">
-            <a:solidFill>
-              <a:srgbClr val="00B050"/>
-            </a:solidFill>
-            <a:tailEnd type="triangle"/>
-          </a:ln>
-        </p:spPr>
-        <p:style>
-          <a:lnRef idx="2">
-            <a:schemeClr val="accent1"/>
-          </a:lnRef>
-          <a:fillRef idx="0">
-            <a:schemeClr val="accent1"/>
-          </a:fillRef>
-          <a:effectRef idx="1">
-            <a:schemeClr val="accent1"/>
-          </a:effectRef>
-          <a:fontRef idx="minor">
-            <a:schemeClr val="tx1"/>
-          </a:fontRef>
-        </p:style>
-      </p:cxnSp>
-      <p:sp>
-        <p:nvSpPr>
-          <p:cNvPr id="10" name="TextBox 9">
-            <a:extLst>
-              <a:ext uri="{FF2B5EF4-FFF2-40B4-BE49-F238E27FC236}">
-                <a16:creationId xmlns:a16="http://schemas.microsoft.com/office/drawing/2014/main" id="{3D7D3161-B718-332D-9E43-B029E2C89A46}"/>
-              </a:ext>
-            </a:extLst>
-          </p:cNvPr>
-          <p:cNvSpPr txBox="1"/>
-          <p:nvPr/>
-        </p:nvSpPr>
-        <p:spPr>
-          <a:xfrm>
-            <a:off x="10547143" y="5533085"/>
-            <a:ext cx="1355115" cy="861774"/>
-          </a:xfrm>
-          <a:prstGeom prst="rect">
-            <a:avLst/>
-          </a:prstGeom>
-          <a:noFill/>
-        </p:spPr>
-        <p:txBody>
-          <a:bodyPr wrap="none" rtlCol="0">
-            <a:spAutoFit/>
-          </a:bodyPr>
-          <a:lstStyle/>
-          <a:p>
-            <a:r>
-              <a:rPr lang="de-DE" sz="5000" dirty="0">
-                <a:solidFill>
-                  <a:schemeClr val="accent3"/>
-                </a:solidFill>
-              </a:rPr>
-              <a:t>FOV</a:t>
-            </a:r>
-          </a:p>
-        </p:txBody>
-      </p:sp>
-      <p:cxnSp>
-        <p:nvCxnSpPr>
-          <p:cNvPr id="16" name="Straight Arrow Connector 15">
-            <a:extLst>
-              <a:ext uri="{FF2B5EF4-FFF2-40B4-BE49-F238E27FC236}">
-                <a16:creationId xmlns:a16="http://schemas.microsoft.com/office/drawing/2014/main" id="{E8D9F1A2-0FC2-DCB5-479E-A73BAD2A4700}"/>
-              </a:ext>
-            </a:extLst>
-          </p:cNvPr>
-          <p:cNvCxnSpPr>
-            <a:cxnSpLocks/>
-          </p:cNvCxnSpPr>
-          <p:nvPr/>
-        </p:nvCxnSpPr>
-        <p:spPr>
-          <a:xfrm flipV="1">
-            <a:off x="2450128" y="4566046"/>
-            <a:ext cx="0" cy="1015738"/>
-          </a:xfrm>
-          <a:prstGeom prst="straightConnector1">
-            <a:avLst/>
-          </a:prstGeom>
-          <a:ln w="57150">
-            <a:solidFill>
-              <a:srgbClr val="FF0000"/>
-            </a:solidFill>
-            <a:tailEnd type="triangle"/>
-          </a:ln>
-        </p:spPr>
-        <p:style>
-          <a:lnRef idx="2">
-            <a:schemeClr val="accent1"/>
-          </a:lnRef>
-          <a:fillRef idx="0">
-            <a:schemeClr val="accent1"/>
-          </a:fillRef>
-          <a:effectRef idx="1">
-            <a:schemeClr val="accent1"/>
-          </a:effectRef>
-          <a:fontRef idx="minor">
-            <a:schemeClr val="tx1"/>
-          </a:fontRef>
-        </p:style>
-      </p:cxnSp>
-      <mc:AlternateContent xmlns:mc="http://schemas.openxmlformats.org/markup-compatibility/2006" xmlns:a14="http://schemas.microsoft.com/office/drawing/2010/main">
-        <mc:Choice Requires="a14">
-          <p:sp>
-            <p:nvSpPr>
-              <p:cNvPr id="22" name="TextBox 21">
-                <a:extLst>
-                  <a:ext uri="{FF2B5EF4-FFF2-40B4-BE49-F238E27FC236}">
-                    <a16:creationId xmlns:a16="http://schemas.microsoft.com/office/drawing/2014/main" id="{3A574E5A-385A-2256-0D90-42A7AC385D7B}"/>
-                  </a:ext>
-                </a:extLst>
-              </p:cNvPr>
-              <p:cNvSpPr txBox="1"/>
-              <p:nvPr/>
-            </p:nvSpPr>
-            <p:spPr>
-              <a:xfrm>
-                <a:off x="11195590" y="32254"/>
-                <a:ext cx="1413336" cy="861774"/>
-              </a:xfrm>
-              <a:prstGeom prst="rect">
-                <a:avLst/>
-              </a:prstGeom>
-              <a:noFill/>
-            </p:spPr>
-            <p:txBody>
-              <a:bodyPr wrap="none" rtlCol="0">
-                <a:spAutoFit/>
-              </a:bodyPr>
-              <a:lstStyle/>
-              <a:p>
-                <a:pPr/>
-                <a14:m>
-                  <m:oMathPara xmlns:m="http://schemas.openxmlformats.org/officeDocument/2006/math">
-                    <m:oMathParaPr>
-                      <m:jc m:val="centerGroup"/>
-                    </m:oMathParaPr>
-                    <m:oMath xmlns:m="http://schemas.openxmlformats.org/officeDocument/2006/math">
-                      <m:sSub>
-                        <m:sSubPr>
-                          <m:ctrlPr>
-                            <a:rPr lang="de-DE" sz="5000" i="1" dirty="0" smtClean="0">
-                              <a:solidFill>
-                                <a:srgbClr val="FF0000"/>
-                              </a:solidFill>
-                              <a:latin typeface="Cambria Math" panose="02040503050406030204" pitchFamily="18" charset="0"/>
-                            </a:rPr>
-                          </m:ctrlPr>
-                        </m:sSubPr>
-                        <m:e>
-                          <m:r>
-                            <a:rPr lang="de-DE" sz="5000" b="0" i="1" dirty="0" smtClean="0">
-                              <a:solidFill>
-                                <a:srgbClr val="FF0000"/>
-                              </a:solidFill>
-                              <a:latin typeface="Cambria Math" panose="02040503050406030204" pitchFamily="18" charset="0"/>
-                            </a:rPr>
-                            <m:t>𝑓</m:t>
-                          </m:r>
-                        </m:e>
-                        <m:sub>
-                          <m:r>
-                            <m:rPr>
-                              <m:sty m:val="p"/>
-                            </m:rPr>
-                            <a:rPr lang="de-DE" sz="5000" b="0" i="0" dirty="0" smtClean="0">
-                              <a:solidFill>
-                                <a:srgbClr val="FF0000"/>
-                              </a:solidFill>
-                              <a:latin typeface="Cambria Math" panose="02040503050406030204" pitchFamily="18" charset="0"/>
-                            </a:rPr>
-                            <m:t>max</m:t>
-                          </m:r>
-                        </m:sub>
-                      </m:sSub>
-                    </m:oMath>
-                  </m:oMathPara>
-                </a14:m>
-                <a:endParaRPr lang="de-DE" sz="5000" dirty="0">
-                  <a:solidFill>
-                    <a:srgbClr val="FF0000"/>
-                  </a:solidFill>
-                </a:endParaRPr>
-              </a:p>
-            </p:txBody>
-          </p:sp>
-        </mc:Choice>
-        <mc:Fallback xmlns="">
-          <p:sp>
-            <p:nvSpPr>
-              <p:cNvPr id="22" name="TextBox 21">
-                <a:extLst>
-                  <a:ext uri="{FF2B5EF4-FFF2-40B4-BE49-F238E27FC236}">
-                    <a16:creationId xmlns:a16="http://schemas.microsoft.com/office/drawing/2014/main" id="{3A574E5A-385A-2256-0D90-42A7AC385D7B}"/>
-                  </a:ext>
-                </a:extLst>
-              </p:cNvPr>
-              <p:cNvSpPr txBox="1">
-                <a:spLocks noRot="1" noChangeAspect="1" noMove="1" noResize="1" noEditPoints="1" noAdjustHandles="1" noChangeArrowheads="1" noChangeShapeType="1" noTextEdit="1"/>
-              </p:cNvSpPr>
-              <p:nvPr/>
-            </p:nvSpPr>
-            <p:spPr>
-              <a:xfrm>
-                <a:off x="11195590" y="32254"/>
-                <a:ext cx="1413336" cy="861774"/>
-              </a:xfrm>
-              <a:prstGeom prst="rect">
-                <a:avLst/>
-              </a:prstGeom>
-              <a:blipFill>
-                <a:blip r:embed="rId4"/>
-                <a:stretch>
-                  <a:fillRect/>
-                </a:stretch>
-              </a:blipFill>
-            </p:spPr>
-            <p:txBody>
-              <a:bodyPr/>
-              <a:lstStyle/>
-              <a:p>
-                <a:r>
-                  <a:rPr lang="de-DE">
-                    <a:noFill/>
-                  </a:rPr>
-                  <a:t> </a:t>
-                </a:r>
-              </a:p>
-            </p:txBody>
-          </p:sp>
-        </mc:Fallback>
-      </mc:AlternateContent>
-    </p:spTree>
-    <p:extLst>
-      <p:ext uri="{BB962C8B-B14F-4D97-AF65-F5344CB8AC3E}">
-        <p14:creationId xmlns:p14="http://schemas.microsoft.com/office/powerpoint/2010/main" val="3165273129"/>
       </p:ext>
     </p:extLst>
   </p:cSld>

--- a/figures/figures.pptx
+++ b/figures/figures.pptx
@@ -5,28 +5,29 @@
     <p:sldMasterId id="2147483648" r:id="rId1"/>
   </p:sldMasterIdLst>
   <p:notesMasterIdLst>
-    <p:notesMasterId r:id="rId21"/>
+    <p:notesMasterId r:id="rId22"/>
   </p:notesMasterIdLst>
   <p:sldIdLst>
     <p:sldId id="256" r:id="rId2"/>
-    <p:sldId id="257" r:id="rId3"/>
-    <p:sldId id="258" r:id="rId4"/>
-    <p:sldId id="272" r:id="rId5"/>
-    <p:sldId id="273" r:id="rId6"/>
-    <p:sldId id="275" r:id="rId7"/>
-    <p:sldId id="274" r:id="rId8"/>
-    <p:sldId id="268" r:id="rId9"/>
-    <p:sldId id="269" r:id="rId10"/>
-    <p:sldId id="260" r:id="rId11"/>
-    <p:sldId id="263" r:id="rId12"/>
-    <p:sldId id="261" r:id="rId13"/>
-    <p:sldId id="270" r:id="rId14"/>
-    <p:sldId id="262" r:id="rId15"/>
-    <p:sldId id="265" r:id="rId16"/>
-    <p:sldId id="266" r:id="rId17"/>
-    <p:sldId id="267" r:id="rId18"/>
-    <p:sldId id="271" r:id="rId19"/>
-    <p:sldId id="276" r:id="rId20"/>
+    <p:sldId id="277" r:id="rId3"/>
+    <p:sldId id="257" r:id="rId4"/>
+    <p:sldId id="258" r:id="rId5"/>
+    <p:sldId id="272" r:id="rId6"/>
+    <p:sldId id="273" r:id="rId7"/>
+    <p:sldId id="275" r:id="rId8"/>
+    <p:sldId id="274" r:id="rId9"/>
+    <p:sldId id="268" r:id="rId10"/>
+    <p:sldId id="269" r:id="rId11"/>
+    <p:sldId id="260" r:id="rId12"/>
+    <p:sldId id="263" r:id="rId13"/>
+    <p:sldId id="261" r:id="rId14"/>
+    <p:sldId id="270" r:id="rId15"/>
+    <p:sldId id="262" r:id="rId16"/>
+    <p:sldId id="265" r:id="rId17"/>
+    <p:sldId id="266" r:id="rId18"/>
+    <p:sldId id="267" r:id="rId19"/>
+    <p:sldId id="271" r:id="rId20"/>
+    <p:sldId id="276" r:id="rId21"/>
   </p:sldIdLst>
   <p:sldSz cx="12192000" cy="6858000"/>
   <p:notesSz cx="6858000" cy="9144000"/>
@@ -2912,7 +2913,7 @@
           <a:p>
             <a:fld id="{8CF8B62D-F47B-43DC-854F-884833B98021}" type="datetimeFigureOut">
               <a:rPr lang="de-DE" smtClean="0"/>
-              <a:t>25.08.2025</a:t>
+              <a:t>28.08.2025</a:t>
             </a:fld>
             <a:endParaRPr lang="de-DE"/>
           </a:p>
@@ -3245,7 +3246,7 @@
           <a:p>
             <a:fld id="{AB2C2533-D42D-4AF8-9C02-1BDA65857909}" type="slidenum">
               <a:rPr lang="de-DE" smtClean="0"/>
-              <a:t>10</a:t>
+              <a:t>11</a:t>
             </a:fld>
             <a:endParaRPr lang="de-DE"/>
           </a:p>
@@ -3329,7 +3330,7 @@
           <a:p>
             <a:fld id="{AB2C2533-D42D-4AF8-9C02-1BDA65857909}" type="slidenum">
               <a:rPr lang="de-DE" smtClean="0"/>
-              <a:t>15</a:t>
+              <a:t>16</a:t>
             </a:fld>
             <a:endParaRPr lang="de-DE"/>
           </a:p>
@@ -3339,6 +3340,90 @@
     <p:extLst>
       <p:ext uri="{BB962C8B-B14F-4D97-AF65-F5344CB8AC3E}">
         <p14:creationId xmlns:p14="http://schemas.microsoft.com/office/powerpoint/2010/main" val="2965620531"/>
+      </p:ext>
+    </p:extLst>
+  </p:cSld>
+  <p:clrMapOvr>
+    <a:masterClrMapping/>
+  </p:clrMapOvr>
+</p:notes>
+</file>
+
+<file path=ppt/notesSlides/notesSlide3.xml><?xml version="1.0" encoding="utf-8"?>
+<p:notes xmlns:a="http://schemas.openxmlformats.org/drawingml/2006/main" xmlns:r="http://schemas.openxmlformats.org/officeDocument/2006/relationships" xmlns:p="http://schemas.openxmlformats.org/presentationml/2006/main">
+  <p:cSld>
+    <p:spTree>
+      <p:nvGrpSpPr>
+        <p:cNvPr id="1" name=""/>
+        <p:cNvGrpSpPr/>
+        <p:nvPr/>
+      </p:nvGrpSpPr>
+      <p:grpSpPr>
+        <a:xfrm>
+          <a:off x="0" y="0"/>
+          <a:ext cx="0" cy="0"/>
+          <a:chOff x="0" y="0"/>
+          <a:chExt cx="0" cy="0"/>
+        </a:xfrm>
+      </p:grpSpPr>
+      <p:sp>
+        <p:nvSpPr>
+          <p:cNvPr id="2" name="Slide Image Placeholder 1"/>
+          <p:cNvSpPr>
+            <a:spLocks noGrp="1" noRot="1" noChangeAspect="1"/>
+          </p:cNvSpPr>
+          <p:nvPr>
+            <p:ph type="sldImg"/>
+          </p:nvPr>
+        </p:nvSpPr>
+        <p:spPr/>
+      </p:sp>
+      <p:sp>
+        <p:nvSpPr>
+          <p:cNvPr id="3" name="Notes Placeholder 2"/>
+          <p:cNvSpPr>
+            <a:spLocks noGrp="1"/>
+          </p:cNvSpPr>
+          <p:nvPr>
+            <p:ph type="body" idx="1"/>
+          </p:nvPr>
+        </p:nvSpPr>
+        <p:spPr/>
+        <p:txBody>
+          <a:bodyPr/>
+          <a:lstStyle/>
+          <a:p>
+            <a:endParaRPr lang="de-DE" dirty="0"/>
+          </a:p>
+        </p:txBody>
+      </p:sp>
+      <p:sp>
+        <p:nvSpPr>
+          <p:cNvPr id="4" name="Slide Number Placeholder 3"/>
+          <p:cNvSpPr>
+            <a:spLocks noGrp="1"/>
+          </p:cNvSpPr>
+          <p:nvPr>
+            <p:ph type="sldNum" sz="quarter" idx="5"/>
+          </p:nvPr>
+        </p:nvSpPr>
+        <p:spPr/>
+        <p:txBody>
+          <a:bodyPr/>
+          <a:lstStyle/>
+          <a:p>
+            <a:fld id="{AB2C2533-D42D-4AF8-9C02-1BDA65857909}" type="slidenum">
+              <a:rPr lang="de-DE" smtClean="0"/>
+              <a:t>20</a:t>
+            </a:fld>
+            <a:endParaRPr lang="de-DE"/>
+          </a:p>
+        </p:txBody>
+      </p:sp>
+    </p:spTree>
+    <p:extLst>
+      <p:ext uri="{BB962C8B-B14F-4D97-AF65-F5344CB8AC3E}">
+        <p14:creationId xmlns:p14="http://schemas.microsoft.com/office/powerpoint/2010/main" val="3640143401"/>
       </p:ext>
     </p:extLst>
   </p:cSld>
@@ -3497,7 +3582,7 @@
           <a:p>
             <a:fld id="{3146589B-F63A-42CD-B487-02649808258F}" type="datetimeFigureOut">
               <a:rPr lang="de-DE" smtClean="0"/>
-              <a:t>25.08.2025</a:t>
+              <a:t>28.08.2025</a:t>
             </a:fld>
             <a:endParaRPr lang="de-DE"/>
           </a:p>
@@ -3697,7 +3782,7 @@
           <a:p>
             <a:fld id="{3146589B-F63A-42CD-B487-02649808258F}" type="datetimeFigureOut">
               <a:rPr lang="de-DE" smtClean="0"/>
-              <a:t>25.08.2025</a:t>
+              <a:t>28.08.2025</a:t>
             </a:fld>
             <a:endParaRPr lang="de-DE"/>
           </a:p>
@@ -3907,7 +3992,7 @@
           <a:p>
             <a:fld id="{3146589B-F63A-42CD-B487-02649808258F}" type="datetimeFigureOut">
               <a:rPr lang="de-DE" smtClean="0"/>
-              <a:t>25.08.2025</a:t>
+              <a:t>28.08.2025</a:t>
             </a:fld>
             <a:endParaRPr lang="de-DE"/>
           </a:p>
@@ -4107,7 +4192,7 @@
           <a:p>
             <a:fld id="{3146589B-F63A-42CD-B487-02649808258F}" type="datetimeFigureOut">
               <a:rPr lang="de-DE" smtClean="0"/>
-              <a:t>25.08.2025</a:t>
+              <a:t>28.08.2025</a:t>
             </a:fld>
             <a:endParaRPr lang="de-DE"/>
           </a:p>
@@ -4383,7 +4468,7 @@
           <a:p>
             <a:fld id="{3146589B-F63A-42CD-B487-02649808258F}" type="datetimeFigureOut">
               <a:rPr lang="de-DE" smtClean="0"/>
-              <a:t>25.08.2025</a:t>
+              <a:t>28.08.2025</a:t>
             </a:fld>
             <a:endParaRPr lang="de-DE"/>
           </a:p>
@@ -4651,7 +4736,7 @@
           <a:p>
             <a:fld id="{3146589B-F63A-42CD-B487-02649808258F}" type="datetimeFigureOut">
               <a:rPr lang="de-DE" smtClean="0"/>
-              <a:t>25.08.2025</a:t>
+              <a:t>28.08.2025</a:t>
             </a:fld>
             <a:endParaRPr lang="de-DE"/>
           </a:p>
@@ -5066,7 +5151,7 @@
           <a:p>
             <a:fld id="{3146589B-F63A-42CD-B487-02649808258F}" type="datetimeFigureOut">
               <a:rPr lang="de-DE" smtClean="0"/>
-              <a:t>25.08.2025</a:t>
+              <a:t>28.08.2025</a:t>
             </a:fld>
             <a:endParaRPr lang="de-DE"/>
           </a:p>
@@ -5208,7 +5293,7 @@
           <a:p>
             <a:fld id="{3146589B-F63A-42CD-B487-02649808258F}" type="datetimeFigureOut">
               <a:rPr lang="de-DE" smtClean="0"/>
-              <a:t>25.08.2025</a:t>
+              <a:t>28.08.2025</a:t>
             </a:fld>
             <a:endParaRPr lang="de-DE"/>
           </a:p>
@@ -5321,7 +5406,7 @@
           <a:p>
             <a:fld id="{3146589B-F63A-42CD-B487-02649808258F}" type="datetimeFigureOut">
               <a:rPr lang="de-DE" smtClean="0"/>
-              <a:t>25.08.2025</a:t>
+              <a:t>28.08.2025</a:t>
             </a:fld>
             <a:endParaRPr lang="de-DE"/>
           </a:p>
@@ -5634,7 +5719,7 @@
           <a:p>
             <a:fld id="{3146589B-F63A-42CD-B487-02649808258F}" type="datetimeFigureOut">
               <a:rPr lang="de-DE" smtClean="0"/>
-              <a:t>25.08.2025</a:t>
+              <a:t>28.08.2025</a:t>
             </a:fld>
             <a:endParaRPr lang="de-DE"/>
           </a:p>
@@ -5923,7 +6008,7 @@
           <a:p>
             <a:fld id="{3146589B-F63A-42CD-B487-02649808258F}" type="datetimeFigureOut">
               <a:rPr lang="de-DE" smtClean="0"/>
-              <a:t>25.08.2025</a:t>
+              <a:t>28.08.2025</a:t>
             </a:fld>
             <a:endParaRPr lang="de-DE"/>
           </a:p>
@@ -6166,7 +6251,7 @@
           <a:p>
             <a:fld id="{3146589B-F63A-42CD-B487-02649808258F}" type="datetimeFigureOut">
               <a:rPr lang="de-DE" smtClean="0"/>
-              <a:t>25.08.2025</a:t>
+              <a:t>28.08.2025</a:t>
             </a:fld>
             <a:endParaRPr lang="de-DE"/>
           </a:p>
@@ -8485,6 +8570,420 @@
       </p:grpSpPr>
       <p:pic>
         <p:nvPicPr>
+          <p:cNvPr id="10" name="Picture 9" descr="A pixelated image of a black and white square&#10;&#10;AI-generated content may be incorrect.">
+            <a:extLst>
+              <a:ext uri="{FF2B5EF4-FFF2-40B4-BE49-F238E27FC236}">
+                <a16:creationId xmlns:a16="http://schemas.microsoft.com/office/drawing/2014/main" id="{B00E4B1B-AE6F-5FDD-28BE-D8CB9C4A2F2D}"/>
+              </a:ext>
+            </a:extLst>
+          </p:cNvPr>
+          <p:cNvPicPr>
+            <a:picLocks noChangeAspect="1"/>
+          </p:cNvPicPr>
+          <p:nvPr/>
+        </p:nvPicPr>
+        <p:blipFill>
+          <a:blip r:embed="rId2">
+            <a:extLst>
+              <a:ext uri="{28A0092B-C50C-407E-A947-70E740481C1C}">
+                <a14:useLocalDpi xmlns:a14="http://schemas.microsoft.com/office/drawing/2010/main" val="0"/>
+              </a:ext>
+            </a:extLst>
+          </a:blip>
+          <a:stretch>
+            <a:fillRect/>
+          </a:stretch>
+        </p:blipFill>
+        <p:spPr>
+          <a:xfrm>
+            <a:off x="708053" y="218154"/>
+            <a:ext cx="3236983" cy="3236983"/>
+          </a:xfrm>
+          <a:prstGeom prst="rect">
+            <a:avLst/>
+          </a:prstGeom>
+        </p:spPr>
+      </p:pic>
+      <p:pic>
+        <p:nvPicPr>
+          <p:cNvPr id="13" name="Picture 12" descr="A black and white pixelated square&#10;&#10;AI-generated content may be incorrect.">
+            <a:extLst>
+              <a:ext uri="{FF2B5EF4-FFF2-40B4-BE49-F238E27FC236}">
+                <a16:creationId xmlns:a16="http://schemas.microsoft.com/office/drawing/2014/main" id="{0D9ADA81-E905-3774-D2CB-634192A29A61}"/>
+              </a:ext>
+            </a:extLst>
+          </p:cNvPr>
+          <p:cNvPicPr>
+            <a:picLocks noChangeAspect="1"/>
+          </p:cNvPicPr>
+          <p:nvPr/>
+        </p:nvPicPr>
+        <p:blipFill>
+          <a:blip r:embed="rId3">
+            <a:extLst>
+              <a:ext uri="{28A0092B-C50C-407E-A947-70E740481C1C}">
+                <a14:useLocalDpi xmlns:a14="http://schemas.microsoft.com/office/drawing/2010/main" val="0"/>
+              </a:ext>
+            </a:extLst>
+          </a:blip>
+          <a:stretch>
+            <a:fillRect/>
+          </a:stretch>
+        </p:blipFill>
+        <p:spPr>
+          <a:xfrm>
+            <a:off x="4164522" y="218154"/>
+            <a:ext cx="3236983" cy="3236983"/>
+          </a:xfrm>
+          <a:prstGeom prst="rect">
+            <a:avLst/>
+          </a:prstGeom>
+        </p:spPr>
+      </p:pic>
+      <p:pic>
+        <p:nvPicPr>
+          <p:cNvPr id="16" name="Picture 15" descr="A pixelated image of a black and white square&#10;&#10;AI-generated content may be incorrect.">
+            <a:extLst>
+              <a:ext uri="{FF2B5EF4-FFF2-40B4-BE49-F238E27FC236}">
+                <a16:creationId xmlns:a16="http://schemas.microsoft.com/office/drawing/2014/main" id="{3B6F989A-506C-5077-5884-4F94D607A125}"/>
+              </a:ext>
+            </a:extLst>
+          </p:cNvPr>
+          <p:cNvPicPr>
+            <a:picLocks noChangeAspect="1"/>
+          </p:cNvPicPr>
+          <p:nvPr/>
+        </p:nvPicPr>
+        <p:blipFill>
+          <a:blip r:embed="rId4">
+            <a:extLst>
+              <a:ext uri="{28A0092B-C50C-407E-A947-70E740481C1C}">
+                <a14:useLocalDpi xmlns:a14="http://schemas.microsoft.com/office/drawing/2010/main" val="0"/>
+              </a:ext>
+            </a:extLst>
+          </a:blip>
+          <a:stretch>
+            <a:fillRect/>
+          </a:stretch>
+        </p:blipFill>
+        <p:spPr>
+          <a:xfrm>
+            <a:off x="7620991" y="218154"/>
+            <a:ext cx="3236983" cy="3236983"/>
+          </a:xfrm>
+          <a:prstGeom prst="rect">
+            <a:avLst/>
+          </a:prstGeom>
+        </p:spPr>
+      </p:pic>
+      <p:pic>
+        <p:nvPicPr>
+          <p:cNvPr id="19" name="Picture 18" descr="A pixelated image of a black and white square&#10;&#10;AI-generated content may be incorrect.">
+            <a:extLst>
+              <a:ext uri="{FF2B5EF4-FFF2-40B4-BE49-F238E27FC236}">
+                <a16:creationId xmlns:a16="http://schemas.microsoft.com/office/drawing/2014/main" id="{1EBEE43C-540D-D316-5FA5-A944A41C619B}"/>
+              </a:ext>
+            </a:extLst>
+          </p:cNvPr>
+          <p:cNvPicPr>
+            <a:picLocks noChangeAspect="1"/>
+          </p:cNvPicPr>
+          <p:nvPr/>
+        </p:nvPicPr>
+        <p:blipFill>
+          <a:blip r:embed="rId5">
+            <a:extLst>
+              <a:ext uri="{28A0092B-C50C-407E-A947-70E740481C1C}">
+                <a14:useLocalDpi xmlns:a14="http://schemas.microsoft.com/office/drawing/2010/main" val="0"/>
+              </a:ext>
+            </a:extLst>
+          </a:blip>
+          <a:stretch>
+            <a:fillRect/>
+          </a:stretch>
+        </p:blipFill>
+        <p:spPr>
+          <a:xfrm>
+            <a:off x="708053" y="3557884"/>
+            <a:ext cx="3236983" cy="3236983"/>
+          </a:xfrm>
+          <a:prstGeom prst="rect">
+            <a:avLst/>
+          </a:prstGeom>
+        </p:spPr>
+      </p:pic>
+      <p:pic>
+        <p:nvPicPr>
+          <p:cNvPr id="21" name="Picture 20" descr="A black and white pixelated square&#10;&#10;AI-generated content may be incorrect.">
+            <a:extLst>
+              <a:ext uri="{FF2B5EF4-FFF2-40B4-BE49-F238E27FC236}">
+                <a16:creationId xmlns:a16="http://schemas.microsoft.com/office/drawing/2014/main" id="{D4D3CA93-3979-3975-8734-1FC1A4FF1BEA}"/>
+              </a:ext>
+            </a:extLst>
+          </p:cNvPr>
+          <p:cNvPicPr>
+            <a:picLocks noChangeAspect="1"/>
+          </p:cNvPicPr>
+          <p:nvPr/>
+        </p:nvPicPr>
+        <p:blipFill>
+          <a:blip r:embed="rId6">
+            <a:extLst>
+              <a:ext uri="{28A0092B-C50C-407E-A947-70E740481C1C}">
+                <a14:useLocalDpi xmlns:a14="http://schemas.microsoft.com/office/drawing/2010/main" val="0"/>
+              </a:ext>
+            </a:extLst>
+          </a:blip>
+          <a:stretch>
+            <a:fillRect/>
+          </a:stretch>
+        </p:blipFill>
+        <p:spPr>
+          <a:xfrm>
+            <a:off x="4164522" y="3557884"/>
+            <a:ext cx="3236983" cy="3236983"/>
+          </a:xfrm>
+          <a:prstGeom prst="rect">
+            <a:avLst/>
+          </a:prstGeom>
+        </p:spPr>
+      </p:pic>
+      <p:pic>
+        <p:nvPicPr>
+          <p:cNvPr id="27" name="Picture 26" descr="A pixelated image of a black and white square&#10;&#10;AI-generated content may be incorrect.">
+            <a:extLst>
+              <a:ext uri="{FF2B5EF4-FFF2-40B4-BE49-F238E27FC236}">
+                <a16:creationId xmlns:a16="http://schemas.microsoft.com/office/drawing/2014/main" id="{3B148123-512C-4CE9-AB62-6D6BE6ECD6F0}"/>
+              </a:ext>
+            </a:extLst>
+          </p:cNvPr>
+          <p:cNvPicPr>
+            <a:picLocks noChangeAspect="1"/>
+          </p:cNvPicPr>
+          <p:nvPr/>
+        </p:nvPicPr>
+        <p:blipFill>
+          <a:blip r:embed="rId7">
+            <a:extLst>
+              <a:ext uri="{28A0092B-C50C-407E-A947-70E740481C1C}">
+                <a14:useLocalDpi xmlns:a14="http://schemas.microsoft.com/office/drawing/2010/main" val="0"/>
+              </a:ext>
+            </a:extLst>
+          </a:blip>
+          <a:stretch>
+            <a:fillRect/>
+          </a:stretch>
+        </p:blipFill>
+        <p:spPr>
+          <a:xfrm>
+            <a:off x="7620991" y="3557884"/>
+            <a:ext cx="3236983" cy="3236983"/>
+          </a:xfrm>
+          <a:prstGeom prst="rect">
+            <a:avLst/>
+          </a:prstGeom>
+        </p:spPr>
+      </p:pic>
+      <p:cxnSp>
+        <p:nvCxnSpPr>
+          <p:cNvPr id="22" name="Straight Connector 21">
+            <a:extLst>
+              <a:ext uri="{FF2B5EF4-FFF2-40B4-BE49-F238E27FC236}">
+                <a16:creationId xmlns:a16="http://schemas.microsoft.com/office/drawing/2014/main" id="{A6298A49-1BB8-B363-5568-E3DD75F7D688}"/>
+              </a:ext>
+            </a:extLst>
+          </p:cNvPr>
+          <p:cNvCxnSpPr/>
+          <p:nvPr/>
+        </p:nvCxnSpPr>
+        <p:spPr>
+          <a:xfrm>
+            <a:off x="7867853" y="3484520"/>
+            <a:ext cx="3198657" cy="2971800"/>
+          </a:xfrm>
+          <a:prstGeom prst="line">
+            <a:avLst/>
+          </a:prstGeom>
+          <a:ln w="76200">
+            <a:solidFill>
+              <a:srgbClr val="FF0000"/>
+            </a:solidFill>
+          </a:ln>
+        </p:spPr>
+        <p:style>
+          <a:lnRef idx="2">
+            <a:schemeClr val="accent1"/>
+          </a:lnRef>
+          <a:fillRef idx="0">
+            <a:schemeClr val="accent1"/>
+          </a:fillRef>
+          <a:effectRef idx="1">
+            <a:schemeClr val="accent1"/>
+          </a:effectRef>
+          <a:fontRef idx="minor">
+            <a:schemeClr val="tx1"/>
+          </a:fontRef>
+        </p:style>
+      </p:cxnSp>
+      <p:cxnSp>
+        <p:nvCxnSpPr>
+          <p:cNvPr id="23" name="Straight Connector 22">
+            <a:extLst>
+              <a:ext uri="{FF2B5EF4-FFF2-40B4-BE49-F238E27FC236}">
+                <a16:creationId xmlns:a16="http://schemas.microsoft.com/office/drawing/2014/main" id="{6423B773-293E-5CF2-720C-FBB70CF0E5F1}"/>
+              </a:ext>
+            </a:extLst>
+          </p:cNvPr>
+          <p:cNvCxnSpPr>
+            <a:cxnSpLocks/>
+          </p:cNvCxnSpPr>
+          <p:nvPr/>
+        </p:nvCxnSpPr>
+        <p:spPr>
+          <a:xfrm rot="16200000">
+            <a:off x="7867853" y="3484520"/>
+            <a:ext cx="3198657" cy="2971800"/>
+          </a:xfrm>
+          <a:prstGeom prst="line">
+            <a:avLst/>
+          </a:prstGeom>
+          <a:ln w="76200">
+            <a:solidFill>
+              <a:srgbClr val="FF0000"/>
+            </a:solidFill>
+          </a:ln>
+        </p:spPr>
+        <p:style>
+          <a:lnRef idx="2">
+            <a:schemeClr val="accent1"/>
+          </a:lnRef>
+          <a:fillRef idx="0">
+            <a:schemeClr val="accent1"/>
+          </a:fillRef>
+          <a:effectRef idx="1">
+            <a:schemeClr val="accent1"/>
+          </a:effectRef>
+          <a:fontRef idx="minor">
+            <a:schemeClr val="tx1"/>
+          </a:fontRef>
+        </p:style>
+      </p:cxnSp>
+      <p:cxnSp>
+        <p:nvCxnSpPr>
+          <p:cNvPr id="25" name="Straight Connector 24">
+            <a:extLst>
+              <a:ext uri="{FF2B5EF4-FFF2-40B4-BE49-F238E27FC236}">
+                <a16:creationId xmlns:a16="http://schemas.microsoft.com/office/drawing/2014/main" id="{51EA2EBE-D20B-513E-1CAA-42EBA9E82B01}"/>
+              </a:ext>
+            </a:extLst>
+          </p:cNvPr>
+          <p:cNvCxnSpPr/>
+          <p:nvPr/>
+        </p:nvCxnSpPr>
+        <p:spPr>
+          <a:xfrm>
+            <a:off x="4485605" y="3542429"/>
+            <a:ext cx="3198657" cy="2971800"/>
+          </a:xfrm>
+          <a:prstGeom prst="line">
+            <a:avLst/>
+          </a:prstGeom>
+          <a:ln w="76200">
+            <a:solidFill>
+              <a:srgbClr val="FF0000"/>
+            </a:solidFill>
+          </a:ln>
+        </p:spPr>
+        <p:style>
+          <a:lnRef idx="2">
+            <a:schemeClr val="accent1"/>
+          </a:lnRef>
+          <a:fillRef idx="0">
+            <a:schemeClr val="accent1"/>
+          </a:fillRef>
+          <a:effectRef idx="1">
+            <a:schemeClr val="accent1"/>
+          </a:effectRef>
+          <a:fontRef idx="minor">
+            <a:schemeClr val="tx1"/>
+          </a:fontRef>
+        </p:style>
+      </p:cxnSp>
+      <p:cxnSp>
+        <p:nvCxnSpPr>
+          <p:cNvPr id="26" name="Straight Connector 25">
+            <a:extLst>
+              <a:ext uri="{FF2B5EF4-FFF2-40B4-BE49-F238E27FC236}">
+                <a16:creationId xmlns:a16="http://schemas.microsoft.com/office/drawing/2014/main" id="{199B7127-BAFE-9900-00F5-A3FFC7259493}"/>
+              </a:ext>
+            </a:extLst>
+          </p:cNvPr>
+          <p:cNvCxnSpPr>
+            <a:cxnSpLocks/>
+          </p:cNvCxnSpPr>
+          <p:nvPr/>
+        </p:nvCxnSpPr>
+        <p:spPr>
+          <a:xfrm rot="16200000">
+            <a:off x="4485605" y="3542429"/>
+            <a:ext cx="3198657" cy="2971800"/>
+          </a:xfrm>
+          <a:prstGeom prst="line">
+            <a:avLst/>
+          </a:prstGeom>
+          <a:ln w="76200">
+            <a:solidFill>
+              <a:srgbClr val="FF0000"/>
+            </a:solidFill>
+          </a:ln>
+        </p:spPr>
+        <p:style>
+          <a:lnRef idx="2">
+            <a:schemeClr val="accent1"/>
+          </a:lnRef>
+          <a:fillRef idx="0">
+            <a:schemeClr val="accent1"/>
+          </a:fillRef>
+          <a:effectRef idx="1">
+            <a:schemeClr val="accent1"/>
+          </a:effectRef>
+          <a:fontRef idx="minor">
+            <a:schemeClr val="tx1"/>
+          </a:fontRef>
+        </p:style>
+      </p:cxnSp>
+    </p:spTree>
+    <p:extLst>
+      <p:ext uri="{BB962C8B-B14F-4D97-AF65-F5344CB8AC3E}">
+        <p14:creationId xmlns:p14="http://schemas.microsoft.com/office/powerpoint/2010/main" val="3134903272"/>
+      </p:ext>
+    </p:extLst>
+  </p:cSld>
+  <p:clrMapOvr>
+    <a:masterClrMapping/>
+  </p:clrMapOvr>
+</p:sld>
+</file>
+
+<file path=ppt/slides/slide11.xml><?xml version="1.0" encoding="utf-8"?>
+<p:sld xmlns:a="http://schemas.openxmlformats.org/drawingml/2006/main" xmlns:r="http://schemas.openxmlformats.org/officeDocument/2006/relationships" xmlns:p="http://schemas.openxmlformats.org/presentationml/2006/main">
+  <p:cSld>
+    <p:spTree>
+      <p:nvGrpSpPr>
+        <p:cNvPr id="1" name=""/>
+        <p:cNvGrpSpPr/>
+        <p:nvPr/>
+      </p:nvGrpSpPr>
+      <p:grpSpPr>
+        <a:xfrm>
+          <a:off x="0" y="0"/>
+          <a:ext cx="0" cy="0"/>
+          <a:chOff x="0" y="0"/>
+          <a:chExt cx="0" cy="0"/>
+        </a:xfrm>
+      </p:grpSpPr>
+      <p:pic>
+        <p:nvPicPr>
           <p:cNvPr id="29" name="Picture 28" descr="A black and white square with white squares&#10;&#10;AI-generated content may be incorrect.">
             <a:extLst>
               <a:ext uri="{FF2B5EF4-FFF2-40B4-BE49-F238E27FC236}">
@@ -8827,7 +9326,7 @@
 </p:sld>
 </file>
 
-<file path=ppt/slides/slide11.xml><?xml version="1.0" encoding="utf-8"?>
+<file path=ppt/slides/slide12.xml><?xml version="1.0" encoding="utf-8"?>
 <p:sld xmlns:a="http://schemas.openxmlformats.org/drawingml/2006/main" xmlns:r="http://schemas.openxmlformats.org/officeDocument/2006/relationships" xmlns:p="http://schemas.openxmlformats.org/presentationml/2006/main">
   <p:cSld>
     <p:spTree>
@@ -9406,7 +9905,7 @@
 </p:sld>
 </file>
 
-<file path=ppt/slides/slide12.xml><?xml version="1.0" encoding="utf-8"?>
+<file path=ppt/slides/slide13.xml><?xml version="1.0" encoding="utf-8"?>
 <p:sld xmlns:a="http://schemas.openxmlformats.org/drawingml/2006/main" xmlns:r="http://schemas.openxmlformats.org/officeDocument/2006/relationships" xmlns:p="http://schemas.openxmlformats.org/presentationml/2006/main">
   <p:cSld>
     <p:spTree>
@@ -9545,7 +10044,7 @@
 </p:sld>
 </file>
 
-<file path=ppt/slides/slide13.xml><?xml version="1.0" encoding="utf-8"?>
+<file path=ppt/slides/slide14.xml><?xml version="1.0" encoding="utf-8"?>
 <p:sld xmlns:a="http://schemas.openxmlformats.org/drawingml/2006/main" xmlns:r="http://schemas.openxmlformats.org/officeDocument/2006/relationships" xmlns:p="http://schemas.openxmlformats.org/presentationml/2006/main">
   <p:cSld>
     <p:spTree>
@@ -9992,7 +10491,7 @@
 </p:sld>
 </file>
 
-<file path=ppt/slides/slide14.xml><?xml version="1.0" encoding="utf-8"?>
+<file path=ppt/slides/slide15.xml><?xml version="1.0" encoding="utf-8"?>
 <p:sld xmlns:a="http://schemas.openxmlformats.org/drawingml/2006/main" xmlns:r="http://schemas.openxmlformats.org/officeDocument/2006/relationships" xmlns:p="http://schemas.openxmlformats.org/presentationml/2006/main">
   <p:cSld>
     <p:spTree>
@@ -10096,7 +10595,7 @@
 </p:sld>
 </file>
 
-<file path=ppt/slides/slide15.xml><?xml version="1.0" encoding="utf-8"?>
+<file path=ppt/slides/slide16.xml><?xml version="1.0" encoding="utf-8"?>
 <p:sld xmlns:a="http://schemas.openxmlformats.org/drawingml/2006/main" xmlns:r="http://schemas.openxmlformats.org/officeDocument/2006/relationships" xmlns:p="http://schemas.openxmlformats.org/presentationml/2006/main">
   <p:cSld>
     <p:spTree>
@@ -10408,7 +10907,7 @@
 </p:sld>
 </file>
 
-<file path=ppt/slides/slide16.xml><?xml version="1.0" encoding="utf-8"?>
+<file path=ppt/slides/slide17.xml><?xml version="1.0" encoding="utf-8"?>
 <p:sld xmlns:a="http://schemas.openxmlformats.org/drawingml/2006/main" xmlns:r="http://schemas.openxmlformats.org/officeDocument/2006/relationships" xmlns:p="http://schemas.openxmlformats.org/presentationml/2006/main">
   <p:cSld>
     <p:spTree>
@@ -10930,7 +11429,7 @@
 </p:sld>
 </file>
 
-<file path=ppt/slides/slide17.xml><?xml version="1.0" encoding="utf-8"?>
+<file path=ppt/slides/slide18.xml><?xml version="1.0" encoding="utf-8"?>
 <p:sld xmlns:a="http://schemas.openxmlformats.org/drawingml/2006/main" xmlns:r="http://schemas.openxmlformats.org/officeDocument/2006/relationships" xmlns:p="http://schemas.openxmlformats.org/presentationml/2006/main">
   <p:cSld>
     <p:spTree>
@@ -11244,7 +11743,7 @@
 </p:sld>
 </file>
 
-<file path=ppt/slides/slide18.xml><?xml version="1.0" encoding="utf-8"?>
+<file path=ppt/slides/slide19.xml><?xml version="1.0" encoding="utf-8"?>
 <p:sld xmlns:a="http://schemas.openxmlformats.org/drawingml/2006/main" xmlns:r="http://schemas.openxmlformats.org/officeDocument/2006/relationships" xmlns:p="http://schemas.openxmlformats.org/presentationml/2006/main">
   <p:cSld>
     <p:spTree>
@@ -11304,219 +11803,6 @@
           <a:p>
             <a:pPr algn="ctr"/>
             <a:endParaRPr lang="de-DE"/>
-          </a:p>
-        </p:txBody>
-      </p:sp>
-      <p:sp>
-        <p:nvSpPr>
-          <p:cNvPr id="20" name="TextBox 19">
-            <a:extLst>
-              <a:ext uri="{FF2B5EF4-FFF2-40B4-BE49-F238E27FC236}">
-                <a16:creationId xmlns:a16="http://schemas.microsoft.com/office/drawing/2014/main" id="{526443CF-95C1-C731-FAFE-D8041279C723}"/>
-              </a:ext>
-            </a:extLst>
-          </p:cNvPr>
-          <p:cNvSpPr txBox="1"/>
-          <p:nvPr/>
-        </p:nvSpPr>
-        <p:spPr>
-          <a:xfrm>
-            <a:off x="2061450" y="5146236"/>
-            <a:ext cx="830677" cy="461665"/>
-          </a:xfrm>
-          <a:prstGeom prst="rect">
-            <a:avLst/>
-          </a:prstGeom>
-          <a:noFill/>
-        </p:spPr>
-        <p:txBody>
-          <a:bodyPr wrap="none" rtlCol="0">
-            <a:spAutoFit/>
-          </a:bodyPr>
-          <a:lstStyle/>
-          <a:p>
-            <a:r>
-              <a:rPr lang="de-DE" sz="2400" dirty="0"/>
-              <a:t>Time</a:t>
-            </a:r>
-          </a:p>
-        </p:txBody>
-      </p:sp>
-      <p:cxnSp>
-        <p:nvCxnSpPr>
-          <p:cNvPr id="21" name="Straight Arrow Connector 20">
-            <a:extLst>
-              <a:ext uri="{FF2B5EF4-FFF2-40B4-BE49-F238E27FC236}">
-                <a16:creationId xmlns:a16="http://schemas.microsoft.com/office/drawing/2014/main" id="{591D1781-47F4-B402-FF44-430F64F2921C}"/>
-              </a:ext>
-            </a:extLst>
-          </p:cNvPr>
-          <p:cNvCxnSpPr>
-            <a:cxnSpLocks/>
-          </p:cNvCxnSpPr>
-          <p:nvPr/>
-        </p:nvCxnSpPr>
-        <p:spPr>
-          <a:xfrm flipV="1">
-            <a:off x="821860" y="1999482"/>
-            <a:ext cx="0" cy="2877318"/>
-          </a:xfrm>
-          <a:prstGeom prst="straightConnector1">
-            <a:avLst/>
-          </a:prstGeom>
-          <a:ln w="57150">
-            <a:tailEnd type="triangle"/>
-          </a:ln>
-        </p:spPr>
-        <p:style>
-          <a:lnRef idx="2">
-            <a:schemeClr val="accent1"/>
-          </a:lnRef>
-          <a:fillRef idx="0">
-            <a:schemeClr val="accent1"/>
-          </a:fillRef>
-          <a:effectRef idx="1">
-            <a:schemeClr val="accent1"/>
-          </a:effectRef>
-          <a:fontRef idx="minor">
-            <a:schemeClr val="tx1"/>
-          </a:fontRef>
-        </p:style>
-      </p:cxnSp>
-      <mc:AlternateContent xmlns:mc="http://schemas.openxmlformats.org/markup-compatibility/2006" xmlns:a14="http://schemas.microsoft.com/office/drawing/2010/main">
-        <mc:Choice Requires="a14">
-          <p:sp>
-            <p:nvSpPr>
-              <p:cNvPr id="23" name="TextBox 22">
-                <a:extLst>
-                  <a:ext uri="{FF2B5EF4-FFF2-40B4-BE49-F238E27FC236}">
-                    <a16:creationId xmlns:a16="http://schemas.microsoft.com/office/drawing/2014/main" id="{0253A647-BA26-440D-5BF4-D815CEED785B}"/>
-                  </a:ext>
-                </a:extLst>
-              </p:cNvPr>
-              <p:cNvSpPr txBox="1"/>
-              <p:nvPr/>
-            </p:nvSpPr>
-            <p:spPr>
-              <a:xfrm>
-                <a:off x="271786" y="3207308"/>
-                <a:ext cx="608885" cy="461665"/>
-              </a:xfrm>
-              <a:prstGeom prst="rect">
-                <a:avLst/>
-              </a:prstGeom>
-              <a:noFill/>
-            </p:spPr>
-            <p:txBody>
-              <a:bodyPr wrap="none" rtlCol="0">
-                <a:spAutoFit/>
-              </a:bodyPr>
-              <a:lstStyle/>
-              <a:p>
-                <a:pPr/>
-                <a14:m>
-                  <m:oMathPara xmlns:m="http://schemas.openxmlformats.org/officeDocument/2006/math">
-                    <m:oMathParaPr>
-                      <m:jc m:val="centerGroup"/>
-                    </m:oMathParaPr>
-                    <m:oMath xmlns:m="http://schemas.openxmlformats.org/officeDocument/2006/math">
-                      <m:r>
-                        <m:rPr>
-                          <m:sty m:val="p"/>
-                        </m:rPr>
-                        <a:rPr lang="de-DE" sz="2400" dirty="0" smtClean="0">
-                          <a:latin typeface="Cambria Math" panose="02040503050406030204" pitchFamily="18" charset="0"/>
-                        </a:rPr>
-                        <m:t>Δ</m:t>
-                      </m:r>
-                      <m:r>
-                        <a:rPr lang="de-DE" sz="2400" i="1" dirty="0">
-                          <a:latin typeface="Cambria Math" panose="02040503050406030204" pitchFamily="18" charset="0"/>
-                        </a:rPr>
-                        <m:t>𝑓</m:t>
-                      </m:r>
-                    </m:oMath>
-                  </m:oMathPara>
-                </a14:m>
-                <a:endParaRPr lang="de-DE" sz="2400" dirty="0"/>
-              </a:p>
-            </p:txBody>
-          </p:sp>
-        </mc:Choice>
-        <mc:Fallback xmlns="">
-          <p:sp>
-            <p:nvSpPr>
-              <p:cNvPr id="23" name="TextBox 22">
-                <a:extLst>
-                  <a:ext uri="{FF2B5EF4-FFF2-40B4-BE49-F238E27FC236}">
-                    <a16:creationId xmlns:a16="http://schemas.microsoft.com/office/drawing/2014/main" id="{0253A647-BA26-440D-5BF4-D815CEED785B}"/>
-                  </a:ext>
-                </a:extLst>
-              </p:cNvPr>
-              <p:cNvSpPr txBox="1">
-                <a:spLocks noRot="1" noChangeAspect="1" noMove="1" noResize="1" noEditPoints="1" noAdjustHandles="1" noChangeArrowheads="1" noChangeShapeType="1" noTextEdit="1"/>
-              </p:cNvSpPr>
-              <p:nvPr/>
-            </p:nvSpPr>
-            <p:spPr>
-              <a:xfrm>
-                <a:off x="271786" y="3207308"/>
-                <a:ext cx="608885" cy="461665"/>
-              </a:xfrm>
-              <a:prstGeom prst="rect">
-                <a:avLst/>
-              </a:prstGeom>
-              <a:blipFill>
-                <a:blip r:embed="rId6"/>
-                <a:stretch>
-                  <a:fillRect r="-2020" b="-15789"/>
-                </a:stretch>
-              </a:blipFill>
-            </p:spPr>
-            <p:txBody>
-              <a:bodyPr/>
-              <a:lstStyle/>
-              <a:p>
-                <a:r>
-                  <a:rPr lang="de-DE">
-                    <a:noFill/>
-                  </a:rPr>
-                  <a:t> </a:t>
-                </a:r>
-              </a:p>
-            </p:txBody>
-          </p:sp>
-        </mc:Fallback>
-      </mc:AlternateContent>
-      <p:sp>
-        <p:nvSpPr>
-          <p:cNvPr id="24" name="TextBox 23">
-            <a:extLst>
-              <a:ext uri="{FF2B5EF4-FFF2-40B4-BE49-F238E27FC236}">
-                <a16:creationId xmlns:a16="http://schemas.microsoft.com/office/drawing/2014/main" id="{4AFC3488-BB18-D932-BEF2-09CA48A6DBD0}"/>
-              </a:ext>
-            </a:extLst>
-          </p:cNvPr>
-          <p:cNvSpPr txBox="1"/>
-          <p:nvPr/>
-        </p:nvSpPr>
-        <p:spPr>
-          <a:xfrm>
-            <a:off x="4844143" y="740229"/>
-            <a:ext cx="184731" cy="369332"/>
-          </a:xfrm>
-          <a:prstGeom prst="rect">
-            <a:avLst/>
-          </a:prstGeom>
-          <a:noFill/>
-        </p:spPr>
-        <p:txBody>
-          <a:bodyPr wrap="none" rtlCol="0">
-            <a:spAutoFit/>
-          </a:bodyPr>
-          <a:lstStyle/>
-          <a:p>
-            <a:endParaRPr lang="de-DE" dirty="0"/>
           </a:p>
         </p:txBody>
       </p:sp>
@@ -11762,53 +12048,12 @@
           </a:p>
         </p:txBody>
       </p:sp>
-      <p:cxnSp>
-        <p:nvCxnSpPr>
-          <p:cNvPr id="32" name="Straight Arrow Connector 31">
-            <a:extLst>
-              <a:ext uri="{FF2B5EF4-FFF2-40B4-BE49-F238E27FC236}">
-                <a16:creationId xmlns:a16="http://schemas.microsoft.com/office/drawing/2014/main" id="{0C465B3F-711C-F0AB-690A-D8D51D938FBA}"/>
-              </a:ext>
-            </a:extLst>
-          </p:cNvPr>
-          <p:cNvCxnSpPr>
-            <a:cxnSpLocks/>
-          </p:cNvCxnSpPr>
-          <p:nvPr/>
-        </p:nvCxnSpPr>
-        <p:spPr>
-          <a:xfrm rot="5400000" flipV="1">
-            <a:off x="2470833" y="3641370"/>
-            <a:ext cx="0" cy="2877318"/>
-          </a:xfrm>
-          <a:prstGeom prst="straightConnector1">
-            <a:avLst/>
-          </a:prstGeom>
-          <a:ln w="57150">
-            <a:tailEnd type="triangle"/>
-          </a:ln>
-        </p:spPr>
-        <p:style>
-          <a:lnRef idx="2">
-            <a:schemeClr val="accent1"/>
-          </a:lnRef>
-          <a:fillRef idx="0">
-            <a:schemeClr val="accent1"/>
-          </a:fillRef>
-          <a:effectRef idx="1">
-            <a:schemeClr val="accent1"/>
-          </a:effectRef>
-          <a:fontRef idx="minor">
-            <a:schemeClr val="tx1"/>
-          </a:fontRef>
-        </p:style>
-      </p:cxnSp>
       <p:pic>
         <p:nvPicPr>
-          <p:cNvPr id="4" name="Picture 3" descr="A black and white pixelated background&#10;&#10;AI-generated content may be incorrect.">
-            <a:extLst>
-              <a:ext uri="{FF2B5EF4-FFF2-40B4-BE49-F238E27FC236}">
-                <a16:creationId xmlns:a16="http://schemas.microsoft.com/office/drawing/2014/main" id="{9F47E577-542F-E1B6-47A0-C130932DC7F9}"/>
+          <p:cNvPr id="8" name="Picture 7" descr="A grey and black squares&#10;&#10;AI-generated content may be incorrect.">
+            <a:extLst>
+              <a:ext uri="{FF2B5EF4-FFF2-40B4-BE49-F238E27FC236}">
+                <a16:creationId xmlns:a16="http://schemas.microsoft.com/office/drawing/2014/main" id="{D2DB9A23-5B83-4227-0484-3AA86D8F85EE}"/>
               </a:ext>
             </a:extLst>
           </p:cNvPr>
@@ -11818,43 +12063,7 @@
           <p:nvPr/>
         </p:nvPicPr>
         <p:blipFill>
-          <a:blip r:embed="rId7">
-            <a:extLst>
-              <a:ext uri="{28A0092B-C50C-407E-A947-70E740481C1C}">
-                <a14:useLocalDpi xmlns:a14="http://schemas.microsoft.com/office/drawing/2010/main" val="0"/>
-              </a:ext>
-            </a:extLst>
-          </a:blip>
-          <a:stretch>
-            <a:fillRect/>
-          </a:stretch>
-        </p:blipFill>
-        <p:spPr>
-          <a:xfrm>
-            <a:off x="972809" y="2071428"/>
-            <a:ext cx="2877318" cy="2877318"/>
-          </a:xfrm>
-          <a:prstGeom prst="rect">
-            <a:avLst/>
-          </a:prstGeom>
-        </p:spPr>
-      </p:pic>
-      <p:pic>
-        <p:nvPicPr>
-          <p:cNvPr id="8" name="Picture 7" descr="A grey and black squares&#10;&#10;AI-generated content may be incorrect.">
-            <a:extLst>
-              <a:ext uri="{FF2B5EF4-FFF2-40B4-BE49-F238E27FC236}">
-                <a16:creationId xmlns:a16="http://schemas.microsoft.com/office/drawing/2014/main" id="{D2DB9A23-5B83-4227-0484-3AA86D8F85EE}"/>
-              </a:ext>
-            </a:extLst>
-          </p:cNvPr>
-          <p:cNvPicPr>
-            <a:picLocks noChangeAspect="1"/>
-          </p:cNvPicPr>
-          <p:nvPr/>
-        </p:nvPicPr>
-        <p:blipFill>
-          <a:blip r:embed="rId8">
+          <a:blip r:embed="rId2">
             <a:extLst>
               <a:ext uri="{28A0092B-C50C-407E-A947-70E740481C1C}">
                 <a14:useLocalDpi xmlns:a14="http://schemas.microsoft.com/office/drawing/2010/main" val="0"/>
@@ -11890,7 +12099,7 @@
           <p:nvPr/>
         </p:nvPicPr>
         <p:blipFill>
-          <a:blip r:embed="rId9">
+          <a:blip r:embed="rId3">
             <a:extLst>
               <a:ext uri="{28A0092B-C50C-407E-A947-70E740481C1C}">
                 <a14:useLocalDpi xmlns:a14="http://schemas.microsoft.com/office/drawing/2010/main" val="0"/>
@@ -11913,10 +12122,10 @@
       </p:pic>
       <p:pic>
         <p:nvPicPr>
-          <p:cNvPr id="34" name="Picture 33" descr="A screenshot of a video game&#10;&#10;AI-generated content may be incorrect.">
-            <a:extLst>
-              <a:ext uri="{FF2B5EF4-FFF2-40B4-BE49-F238E27FC236}">
-                <a16:creationId xmlns:a16="http://schemas.microsoft.com/office/drawing/2014/main" id="{6DC6D991-A9F6-64B5-770A-CA9871CFB63B}"/>
+          <p:cNvPr id="42" name="Picture 41" descr="A screenshot of a cell phone&#10;&#10;AI-generated content may be incorrect.">
+            <a:extLst>
+              <a:ext uri="{FF2B5EF4-FFF2-40B4-BE49-F238E27FC236}">
+                <a16:creationId xmlns:a16="http://schemas.microsoft.com/office/drawing/2014/main" id="{A45DA63F-98B8-EA51-1A1C-846926C6AA85}"/>
               </a:ext>
             </a:extLst>
           </p:cNvPr>
@@ -11926,7 +12135,7 @@
           <p:nvPr/>
         </p:nvPicPr>
         <p:blipFill>
-          <a:blip r:embed="rId10">
+          <a:blip r:embed="rId4">
             <a:extLst>
               <a:ext uri="{28A0092B-C50C-407E-A947-70E740481C1C}">
                 <a14:useLocalDpi xmlns:a14="http://schemas.microsoft.com/office/drawing/2010/main" val="0"/>
@@ -11939,8 +12148,44 @@
         </p:blipFill>
         <p:spPr>
           <a:xfrm>
-            <a:off x="7890397" y="1999482"/>
-            <a:ext cx="3092967" cy="3434473"/>
+            <a:off x="7749574" y="2006353"/>
+            <a:ext cx="3087632" cy="3602238"/>
+          </a:xfrm>
+          <a:prstGeom prst="rect">
+            <a:avLst/>
+          </a:prstGeom>
+        </p:spPr>
+      </p:pic>
+      <p:pic>
+        <p:nvPicPr>
+          <p:cNvPr id="44" name="Picture 43" descr="A black and white pixelated image&#10;&#10;AI-generated content may be incorrect.">
+            <a:extLst>
+              <a:ext uri="{FF2B5EF4-FFF2-40B4-BE49-F238E27FC236}">
+                <a16:creationId xmlns:a16="http://schemas.microsoft.com/office/drawing/2014/main" id="{712C713E-47EE-627E-5851-C8F9868A458B}"/>
+              </a:ext>
+            </a:extLst>
+          </p:cNvPr>
+          <p:cNvPicPr>
+            <a:picLocks noChangeAspect="1"/>
+          </p:cNvPicPr>
+          <p:nvPr/>
+        </p:nvPicPr>
+        <p:blipFill>
+          <a:blip r:embed="rId5">
+            <a:extLst>
+              <a:ext uri="{28A0092B-C50C-407E-A947-70E740481C1C}">
+                <a14:useLocalDpi xmlns:a14="http://schemas.microsoft.com/office/drawing/2010/main" val="0"/>
+              </a:ext>
+            </a:extLst>
+          </a:blip>
+          <a:stretch>
+            <a:fillRect/>
+          </a:stretch>
+        </p:blipFill>
+        <p:spPr>
+          <a:xfrm>
+            <a:off x="276105" y="2012369"/>
+            <a:ext cx="3503117" cy="3503117"/>
           </a:xfrm>
           <a:prstGeom prst="rect">
             <a:avLst/>
@@ -11960,7 +12205,7 @@
 </p:sld>
 </file>
 
-<file path=ppt/slides/slide19.xml><?xml version="1.0" encoding="utf-8"?>
+<file path=ppt/slides/slide2.xml><?xml version="1.0" encoding="utf-8"?>
 <p:sld xmlns:a="http://schemas.openxmlformats.org/drawingml/2006/main" xmlns:r="http://schemas.openxmlformats.org/officeDocument/2006/relationships" xmlns:p="http://schemas.openxmlformats.org/presentationml/2006/main">
   <p:cSld>
     <p:spTree>
@@ -11979,10 +12224,10 @@
       </p:grpSpPr>
       <p:pic>
         <p:nvPicPr>
-          <p:cNvPr id="9" name="Picture 8" descr="A screenshot of a video game&#10;&#10;AI-generated content may be incorrect.">
-            <a:extLst>
-              <a:ext uri="{FF2B5EF4-FFF2-40B4-BE49-F238E27FC236}">
-                <a16:creationId xmlns:a16="http://schemas.microsoft.com/office/drawing/2014/main" id="{2EBCC2D2-F613-D665-403F-2B40B439025A}"/>
+          <p:cNvPr id="24" name="Picture 23" descr="A black background with a black square&#10;&#10;AI-generated content may be incorrect.">
+            <a:extLst>
+              <a:ext uri="{FF2B5EF4-FFF2-40B4-BE49-F238E27FC236}">
+                <a16:creationId xmlns:a16="http://schemas.microsoft.com/office/drawing/2014/main" id="{DF98AE41-A14D-5897-DDD2-193AD48FF39C}"/>
               </a:ext>
             </a:extLst>
           </p:cNvPr>
@@ -12005,8 +12250,613 @@
         </p:blipFill>
         <p:spPr>
           <a:xfrm>
-            <a:off x="5448639" y="1961107"/>
-            <a:ext cx="3076088" cy="3415731"/>
+            <a:off x="4039686" y="4738785"/>
+            <a:ext cx="4972386" cy="1656422"/>
+          </a:xfrm>
+          <a:prstGeom prst="rect">
+            <a:avLst/>
+          </a:prstGeom>
+        </p:spPr>
+      </p:pic>
+      <p:pic>
+        <p:nvPicPr>
+          <p:cNvPr id="5" name="Picture 4" descr="A blue line on a black background&#10;&#10;AI-generated content may be incorrect.">
+            <a:extLst>
+              <a:ext uri="{FF2B5EF4-FFF2-40B4-BE49-F238E27FC236}">
+                <a16:creationId xmlns:a16="http://schemas.microsoft.com/office/drawing/2014/main" id="{71469AEB-366D-4C33-1D3F-6193B1F0F974}"/>
+              </a:ext>
+            </a:extLst>
+          </p:cNvPr>
+          <p:cNvPicPr>
+            <a:picLocks noChangeAspect="1"/>
+          </p:cNvPicPr>
+          <p:nvPr/>
+        </p:nvPicPr>
+        <p:blipFill>
+          <a:blip r:embed="rId3">
+            <a:extLst>
+              <a:ext uri="{28A0092B-C50C-407E-A947-70E740481C1C}">
+                <a14:useLocalDpi xmlns:a14="http://schemas.microsoft.com/office/drawing/2010/main" val="0"/>
+              </a:ext>
+            </a:extLst>
+          </a:blip>
+          <a:stretch>
+            <a:fillRect/>
+          </a:stretch>
+        </p:blipFill>
+        <p:spPr>
+          <a:xfrm>
+            <a:off x="6935507" y="551263"/>
+            <a:ext cx="4858522" cy="1618491"/>
+          </a:xfrm>
+          <a:prstGeom prst="rect">
+            <a:avLst/>
+          </a:prstGeom>
+        </p:spPr>
+      </p:pic>
+      <p:pic>
+        <p:nvPicPr>
+          <p:cNvPr id="7" name="Picture 6" descr="A blue line on a black background&#10;&#10;AI-generated content may be incorrect.">
+            <a:extLst>
+              <a:ext uri="{FF2B5EF4-FFF2-40B4-BE49-F238E27FC236}">
+                <a16:creationId xmlns:a16="http://schemas.microsoft.com/office/drawing/2014/main" id="{764FB2D9-F81D-A172-254F-DFBB42F8FA85}"/>
+              </a:ext>
+            </a:extLst>
+          </p:cNvPr>
+          <p:cNvPicPr>
+            <a:picLocks noChangeAspect="1"/>
+          </p:cNvPicPr>
+          <p:nvPr/>
+        </p:nvPicPr>
+        <p:blipFill>
+          <a:blip r:embed="rId4">
+            <a:extLst>
+              <a:ext uri="{28A0092B-C50C-407E-A947-70E740481C1C}">
+                <a14:useLocalDpi xmlns:a14="http://schemas.microsoft.com/office/drawing/2010/main" val="0"/>
+              </a:ext>
+            </a:extLst>
+          </a:blip>
+          <a:stretch>
+            <a:fillRect/>
+          </a:stretch>
+        </p:blipFill>
+        <p:spPr>
+          <a:xfrm>
+            <a:off x="1237478" y="551263"/>
+            <a:ext cx="4858522" cy="1618491"/>
+          </a:xfrm>
+          <a:prstGeom prst="rect">
+            <a:avLst/>
+          </a:prstGeom>
+        </p:spPr>
+      </p:pic>
+      <p:pic>
+        <p:nvPicPr>
+          <p:cNvPr id="9" name="Picture 8" descr="A black background with a black square&#10;&#10;AI-generated content may be incorrect.">
+            <a:extLst>
+              <a:ext uri="{FF2B5EF4-FFF2-40B4-BE49-F238E27FC236}">
+                <a16:creationId xmlns:a16="http://schemas.microsoft.com/office/drawing/2014/main" id="{35866380-AF32-7A31-256D-3ABB5223CBF6}"/>
+              </a:ext>
+            </a:extLst>
+          </p:cNvPr>
+          <p:cNvPicPr>
+            <a:picLocks noChangeAspect="1"/>
+          </p:cNvPicPr>
+          <p:nvPr/>
+        </p:nvPicPr>
+        <p:blipFill>
+          <a:blip r:embed="rId5">
+            <a:extLst>
+              <a:ext uri="{28A0092B-C50C-407E-A947-70E740481C1C}">
+                <a14:useLocalDpi xmlns:a14="http://schemas.microsoft.com/office/drawing/2010/main" val="0"/>
+              </a:ext>
+            </a:extLst>
+          </a:blip>
+          <a:stretch>
+            <a:fillRect/>
+          </a:stretch>
+        </p:blipFill>
+        <p:spPr>
+          <a:xfrm>
+            <a:off x="1237478" y="2976600"/>
+            <a:ext cx="4858522" cy="1618491"/>
+          </a:xfrm>
+          <a:prstGeom prst="rect">
+            <a:avLst/>
+          </a:prstGeom>
+        </p:spPr>
+      </p:pic>
+      <p:pic>
+        <p:nvPicPr>
+          <p:cNvPr id="11" name="Picture 10" descr="A black background with a black square&#10;&#10;AI-generated content may be incorrect.">
+            <a:extLst>
+              <a:ext uri="{FF2B5EF4-FFF2-40B4-BE49-F238E27FC236}">
+                <a16:creationId xmlns:a16="http://schemas.microsoft.com/office/drawing/2014/main" id="{07785DB6-5B6E-432E-2389-A17613087EFF}"/>
+              </a:ext>
+            </a:extLst>
+          </p:cNvPr>
+          <p:cNvPicPr>
+            <a:picLocks noChangeAspect="1"/>
+          </p:cNvPicPr>
+          <p:nvPr/>
+        </p:nvPicPr>
+        <p:blipFill>
+          <a:blip r:embed="rId6">
+            <a:extLst>
+              <a:ext uri="{28A0092B-C50C-407E-A947-70E740481C1C}">
+                <a14:useLocalDpi xmlns:a14="http://schemas.microsoft.com/office/drawing/2010/main" val="0"/>
+              </a:ext>
+            </a:extLst>
+          </a:blip>
+          <a:stretch>
+            <a:fillRect/>
+          </a:stretch>
+        </p:blipFill>
+        <p:spPr>
+          <a:xfrm>
+            <a:off x="6935507" y="2976600"/>
+            <a:ext cx="4858522" cy="1618491"/>
+          </a:xfrm>
+          <a:prstGeom prst="rect">
+            <a:avLst/>
+          </a:prstGeom>
+        </p:spPr>
+      </p:pic>
+      <p:sp>
+        <p:nvSpPr>
+          <p:cNvPr id="14" name="Arrow: Down 13">
+            <a:extLst>
+              <a:ext uri="{FF2B5EF4-FFF2-40B4-BE49-F238E27FC236}">
+                <a16:creationId xmlns:a16="http://schemas.microsoft.com/office/drawing/2014/main" id="{58DF4E64-60CD-1188-F7F1-F26177CC64FD}"/>
+              </a:ext>
+            </a:extLst>
+          </p:cNvPr>
+          <p:cNvSpPr/>
+          <p:nvPr/>
+        </p:nvSpPr>
+        <p:spPr>
+          <a:xfrm>
+            <a:off x="3424423" y="2271420"/>
+            <a:ext cx="484632" cy="647057"/>
+          </a:xfrm>
+          <a:prstGeom prst="downArrow">
+            <a:avLst/>
+          </a:prstGeom>
+          <a:solidFill>
+            <a:schemeClr val="accent5">
+              <a:lumMod val="60000"/>
+              <a:lumOff val="40000"/>
+            </a:schemeClr>
+          </a:solidFill>
+          <a:ln w="28575">
+            <a:noFill/>
+          </a:ln>
+        </p:spPr>
+        <p:style>
+          <a:lnRef idx="2">
+            <a:schemeClr val="accent1">
+              <a:shade val="15000"/>
+            </a:schemeClr>
+          </a:lnRef>
+          <a:fillRef idx="1">
+            <a:schemeClr val="accent1"/>
+          </a:fillRef>
+          <a:effectRef idx="0">
+            <a:schemeClr val="accent1"/>
+          </a:effectRef>
+          <a:fontRef idx="minor">
+            <a:schemeClr val="lt1"/>
+          </a:fontRef>
+        </p:style>
+        <p:txBody>
+          <a:bodyPr rtlCol="0" anchor="ctr"/>
+          <a:lstStyle/>
+          <a:p>
+            <a:pPr algn="ctr"/>
+            <a:endParaRPr lang="de-DE"/>
+          </a:p>
+        </p:txBody>
+      </p:sp>
+      <p:sp>
+        <p:nvSpPr>
+          <p:cNvPr id="15" name="Arrow: Down 14">
+            <a:extLst>
+              <a:ext uri="{FF2B5EF4-FFF2-40B4-BE49-F238E27FC236}">
+                <a16:creationId xmlns:a16="http://schemas.microsoft.com/office/drawing/2014/main" id="{054FAF89-6E3B-2058-B4E4-CEBF9C8BEBED}"/>
+              </a:ext>
+            </a:extLst>
+          </p:cNvPr>
+          <p:cNvSpPr/>
+          <p:nvPr/>
+        </p:nvSpPr>
+        <p:spPr>
+          <a:xfrm>
+            <a:off x="9122452" y="2271420"/>
+            <a:ext cx="484632" cy="647057"/>
+          </a:xfrm>
+          <a:prstGeom prst="downArrow">
+            <a:avLst/>
+          </a:prstGeom>
+          <a:solidFill>
+            <a:schemeClr val="accent5">
+              <a:lumMod val="60000"/>
+              <a:lumOff val="40000"/>
+            </a:schemeClr>
+          </a:solidFill>
+          <a:ln w="28575">
+            <a:noFill/>
+          </a:ln>
+        </p:spPr>
+        <p:style>
+          <a:lnRef idx="2">
+            <a:schemeClr val="accent1">
+              <a:shade val="15000"/>
+            </a:schemeClr>
+          </a:lnRef>
+          <a:fillRef idx="1">
+            <a:schemeClr val="accent1"/>
+          </a:fillRef>
+          <a:effectRef idx="0">
+            <a:schemeClr val="accent1"/>
+          </a:effectRef>
+          <a:fontRef idx="minor">
+            <a:schemeClr val="lt1"/>
+          </a:fontRef>
+        </p:style>
+        <p:txBody>
+          <a:bodyPr rtlCol="0" anchor="ctr"/>
+          <a:lstStyle/>
+          <a:p>
+            <a:pPr algn="ctr"/>
+            <a:endParaRPr lang="de-DE"/>
+          </a:p>
+        </p:txBody>
+      </p:sp>
+      <mc:AlternateContent xmlns:mc="http://schemas.openxmlformats.org/markup-compatibility/2006">
+        <mc:Choice xmlns:a14="http://schemas.microsoft.com/office/drawing/2010/main" Requires="a14">
+          <p:sp>
+            <p:nvSpPr>
+              <p:cNvPr id="16" name="TextBox 15">
+                <a:extLst>
+                  <a:ext uri="{FF2B5EF4-FFF2-40B4-BE49-F238E27FC236}">
+                    <a16:creationId xmlns:a16="http://schemas.microsoft.com/office/drawing/2014/main" id="{5D74A2B0-4613-45BE-EC54-D5D8E8185135}"/>
+                  </a:ext>
+                </a:extLst>
+              </p:cNvPr>
+              <p:cNvSpPr txBox="1"/>
+              <p:nvPr/>
+            </p:nvSpPr>
+            <p:spPr>
+              <a:xfrm>
+                <a:off x="2802976" y="2280789"/>
+                <a:ext cx="863763" cy="584775"/>
+              </a:xfrm>
+              <a:prstGeom prst="rect">
+                <a:avLst/>
+              </a:prstGeom>
+              <a:noFill/>
+            </p:spPr>
+            <p:txBody>
+              <a:bodyPr wrap="none" rtlCol="0">
+                <a:spAutoFit/>
+              </a:bodyPr>
+              <a:lstStyle/>
+              <a:p>
+                <a14:m>
+                  <m:oMathPara xmlns:m="http://schemas.openxmlformats.org/officeDocument/2006/math">
+                    <m:oMathParaPr>
+                      <m:jc m:val="centerGroup"/>
+                    </m:oMathParaPr>
+                    <m:oMath xmlns:m="http://schemas.openxmlformats.org/officeDocument/2006/math">
+                      <m:sSup>
+                        <m:sSupPr>
+                          <m:ctrlPr>
+                            <a:rPr lang="de-DE" sz="3200" i="1" smtClean="0">
+                              <a:latin typeface="Cambria Math" panose="02040503050406030204" pitchFamily="18" charset="0"/>
+                            </a:rPr>
+                          </m:ctrlPr>
+                        </m:sSupPr>
+                        <m:e>
+                          <m:r>
+                            <m:rPr>
+                              <m:nor/>
+                            </m:rPr>
+                            <a:rPr lang="de-DE" sz="3200"/>
+                            <m:t>𝓕</m:t>
+                          </m:r>
+                        </m:e>
+                        <m:sup>
+                          <m:r>
+                            <a:rPr lang="de-DE" sz="3200" b="0" i="1" smtClean="0">
+                              <a:latin typeface="Cambria Math" panose="02040503050406030204" pitchFamily="18" charset="0"/>
+                            </a:rPr>
+                            <m:t>-1</m:t>
+                          </m:r>
+                        </m:sup>
+                      </m:sSup>
+                    </m:oMath>
+                  </m:oMathPara>
+                </a14:m>
+                <a:endParaRPr lang="de-DE" sz="3200" dirty="0"/>
+              </a:p>
+            </p:txBody>
+          </p:sp>
+        </mc:Choice>
+        <mc:Fallback>
+          <p:sp>
+            <p:nvSpPr>
+              <p:cNvPr id="16" name="TextBox 15">
+                <a:extLst>
+                  <a:ext uri="{FF2B5EF4-FFF2-40B4-BE49-F238E27FC236}">
+                    <a16:creationId xmlns:a16="http://schemas.microsoft.com/office/drawing/2014/main" id="{5D74A2B0-4613-45BE-EC54-D5D8E8185135}"/>
+                  </a:ext>
+                </a:extLst>
+              </p:cNvPr>
+              <p:cNvSpPr txBox="1">
+                <a:spLocks noRot="1" noChangeAspect="1" noMove="1" noResize="1" noEditPoints="1" noAdjustHandles="1" noChangeArrowheads="1" noChangeShapeType="1" noTextEdit="1"/>
+              </p:cNvSpPr>
+              <p:nvPr/>
+            </p:nvSpPr>
+            <p:spPr>
+              <a:xfrm>
+                <a:off x="2802976" y="2280789"/>
+                <a:ext cx="863763" cy="584775"/>
+              </a:xfrm>
+              <a:prstGeom prst="rect">
+                <a:avLst/>
+              </a:prstGeom>
+              <a:blipFill>
+                <a:blip r:embed="rId7"/>
+                <a:stretch>
+                  <a:fillRect/>
+                </a:stretch>
+              </a:blipFill>
+            </p:spPr>
+            <p:txBody>
+              <a:bodyPr/>
+              <a:lstStyle/>
+              <a:p>
+                <a:r>
+                  <a:rPr lang="de-DE">
+                    <a:noFill/>
+                  </a:rPr>
+                  <a:t> </a:t>
+                </a:r>
+              </a:p>
+            </p:txBody>
+          </p:sp>
+        </mc:Fallback>
+      </mc:AlternateContent>
+      <mc:AlternateContent xmlns:mc="http://schemas.openxmlformats.org/markup-compatibility/2006">
+        <mc:Choice xmlns:a14="http://schemas.microsoft.com/office/drawing/2010/main" Requires="a14">
+          <p:sp>
+            <p:nvSpPr>
+              <p:cNvPr id="17" name="TextBox 16">
+                <a:extLst>
+                  <a:ext uri="{FF2B5EF4-FFF2-40B4-BE49-F238E27FC236}">
+                    <a16:creationId xmlns:a16="http://schemas.microsoft.com/office/drawing/2014/main" id="{387533DA-0227-B5C0-B4B0-13137F4CD3F9}"/>
+                  </a:ext>
+                </a:extLst>
+              </p:cNvPr>
+              <p:cNvSpPr txBox="1"/>
+              <p:nvPr/>
+            </p:nvSpPr>
+            <p:spPr>
+              <a:xfrm>
+                <a:off x="8491798" y="2280789"/>
+                <a:ext cx="863763" cy="584775"/>
+              </a:xfrm>
+              <a:prstGeom prst="rect">
+                <a:avLst/>
+              </a:prstGeom>
+              <a:noFill/>
+            </p:spPr>
+            <p:txBody>
+              <a:bodyPr wrap="none" rtlCol="0">
+                <a:spAutoFit/>
+              </a:bodyPr>
+              <a:lstStyle/>
+              <a:p>
+                <a14:m>
+                  <m:oMathPara xmlns:m="http://schemas.openxmlformats.org/officeDocument/2006/math">
+                    <m:oMathParaPr>
+                      <m:jc m:val="centerGroup"/>
+                    </m:oMathParaPr>
+                    <m:oMath xmlns:m="http://schemas.openxmlformats.org/officeDocument/2006/math">
+                      <m:sSup>
+                        <m:sSupPr>
+                          <m:ctrlPr>
+                            <a:rPr lang="de-DE" sz="3200" i="1" smtClean="0">
+                              <a:latin typeface="Cambria Math" panose="02040503050406030204" pitchFamily="18" charset="0"/>
+                            </a:rPr>
+                          </m:ctrlPr>
+                        </m:sSupPr>
+                        <m:e>
+                          <m:r>
+                            <m:rPr>
+                              <m:nor/>
+                            </m:rPr>
+                            <a:rPr lang="de-DE" sz="3200"/>
+                            <m:t>𝓕</m:t>
+                          </m:r>
+                        </m:e>
+                        <m:sup>
+                          <m:r>
+                            <a:rPr lang="de-DE" sz="3200" b="0" i="1" smtClean="0">
+                              <a:latin typeface="Cambria Math" panose="02040503050406030204" pitchFamily="18" charset="0"/>
+                            </a:rPr>
+                            <m:t>-1</m:t>
+                          </m:r>
+                        </m:sup>
+                      </m:sSup>
+                    </m:oMath>
+                  </m:oMathPara>
+                </a14:m>
+                <a:endParaRPr lang="de-DE" sz="3200" dirty="0"/>
+              </a:p>
+            </p:txBody>
+          </p:sp>
+        </mc:Choice>
+        <mc:Fallback>
+          <p:sp>
+            <p:nvSpPr>
+              <p:cNvPr id="17" name="TextBox 16">
+                <a:extLst>
+                  <a:ext uri="{FF2B5EF4-FFF2-40B4-BE49-F238E27FC236}">
+                    <a16:creationId xmlns:a16="http://schemas.microsoft.com/office/drawing/2014/main" id="{387533DA-0227-B5C0-B4B0-13137F4CD3F9}"/>
+                  </a:ext>
+                </a:extLst>
+              </p:cNvPr>
+              <p:cNvSpPr txBox="1">
+                <a:spLocks noRot="1" noChangeAspect="1" noMove="1" noResize="1" noEditPoints="1" noAdjustHandles="1" noChangeArrowheads="1" noChangeShapeType="1" noTextEdit="1"/>
+              </p:cNvSpPr>
+              <p:nvPr/>
+            </p:nvSpPr>
+            <p:spPr>
+              <a:xfrm>
+                <a:off x="8491798" y="2280789"/>
+                <a:ext cx="863763" cy="584775"/>
+              </a:xfrm>
+              <a:prstGeom prst="rect">
+                <a:avLst/>
+              </a:prstGeom>
+              <a:blipFill>
+                <a:blip r:embed="rId8"/>
+                <a:stretch>
+                  <a:fillRect/>
+                </a:stretch>
+              </a:blipFill>
+            </p:spPr>
+            <p:txBody>
+              <a:bodyPr/>
+              <a:lstStyle/>
+              <a:p>
+                <a:r>
+                  <a:rPr lang="de-DE">
+                    <a:noFill/>
+                  </a:rPr>
+                  <a:t> </a:t>
+                </a:r>
+              </a:p>
+            </p:txBody>
+          </p:sp>
+        </mc:Fallback>
+      </mc:AlternateContent>
+      <p:sp>
+        <p:nvSpPr>
+          <p:cNvPr id="18" name="Right Brace 17">
+            <a:extLst>
+              <a:ext uri="{FF2B5EF4-FFF2-40B4-BE49-F238E27FC236}">
+                <a16:creationId xmlns:a16="http://schemas.microsoft.com/office/drawing/2014/main" id="{954462B1-6726-DF3B-57C1-D259AFA6FBB8}"/>
+              </a:ext>
+            </a:extLst>
+          </p:cNvPr>
+          <p:cNvSpPr/>
+          <p:nvPr/>
+        </p:nvSpPr>
+        <p:spPr>
+          <a:xfrm rot="5400000">
+            <a:off x="5986375" y="-683185"/>
+            <a:ext cx="1058758" cy="10556551"/>
+          </a:xfrm>
+          <a:prstGeom prst="rightBrace">
+            <a:avLst>
+              <a:gd name="adj1" fmla="val 48431"/>
+              <a:gd name="adj2" fmla="val 50000"/>
+            </a:avLst>
+          </a:prstGeom>
+          <a:ln w="57150">
+            <a:solidFill>
+              <a:schemeClr val="accent5">
+                <a:lumMod val="60000"/>
+                <a:lumOff val="40000"/>
+              </a:schemeClr>
+            </a:solidFill>
+          </a:ln>
+        </p:spPr>
+        <p:style>
+          <a:lnRef idx="2">
+            <a:schemeClr val="accent1"/>
+          </a:lnRef>
+          <a:fillRef idx="0">
+            <a:schemeClr val="accent1"/>
+          </a:fillRef>
+          <a:effectRef idx="1">
+            <a:schemeClr val="accent1"/>
+          </a:effectRef>
+          <a:fontRef idx="minor">
+            <a:schemeClr val="tx1"/>
+          </a:fontRef>
+        </p:style>
+        <p:txBody>
+          <a:bodyPr rtlCol="0" anchor="ctr"/>
+          <a:lstStyle/>
+          <a:p>
+            <a:pPr algn="ctr"/>
+            <a:endParaRPr lang="de-DE"/>
+          </a:p>
+        </p:txBody>
+      </p:sp>
+    </p:spTree>
+    <p:extLst>
+      <p:ext uri="{BB962C8B-B14F-4D97-AF65-F5344CB8AC3E}">
+        <p14:creationId xmlns:p14="http://schemas.microsoft.com/office/powerpoint/2010/main" val="2049215089"/>
+      </p:ext>
+    </p:extLst>
+  </p:cSld>
+  <p:clrMapOvr>
+    <a:masterClrMapping/>
+  </p:clrMapOvr>
+</p:sld>
+</file>
+
+<file path=ppt/slides/slide20.xml><?xml version="1.0" encoding="utf-8"?>
+<p:sld xmlns:a="http://schemas.openxmlformats.org/drawingml/2006/main" xmlns:r="http://schemas.openxmlformats.org/officeDocument/2006/relationships" xmlns:p="http://schemas.openxmlformats.org/presentationml/2006/main">
+  <p:cSld>
+    <p:spTree>
+      <p:nvGrpSpPr>
+        <p:cNvPr id="1" name=""/>
+        <p:cNvGrpSpPr/>
+        <p:nvPr/>
+      </p:nvGrpSpPr>
+      <p:grpSpPr>
+        <a:xfrm>
+          <a:off x="0" y="0"/>
+          <a:ext cx="0" cy="0"/>
+          <a:chOff x="0" y="0"/>
+          <a:chExt cx="0" cy="0"/>
+        </a:xfrm>
+      </p:grpSpPr>
+      <p:pic>
+        <p:nvPicPr>
+          <p:cNvPr id="45" name="Picture 44" descr="A screenshot of a computer&#10;&#10;AI-generated content may be incorrect.">
+            <a:extLst>
+              <a:ext uri="{FF2B5EF4-FFF2-40B4-BE49-F238E27FC236}">
+                <a16:creationId xmlns:a16="http://schemas.microsoft.com/office/drawing/2014/main" id="{F31CC08F-9A70-0EE5-EC5E-4498304F241E}"/>
+              </a:ext>
+            </a:extLst>
+          </p:cNvPr>
+          <p:cNvPicPr>
+            <a:picLocks noChangeAspect="1"/>
+          </p:cNvPicPr>
+          <p:nvPr/>
+        </p:nvPicPr>
+        <p:blipFill>
+          <a:blip r:embed="rId3">
+            <a:extLst>
+              <a:ext uri="{28A0092B-C50C-407E-A947-70E740481C1C}">
+                <a14:useLocalDpi xmlns:a14="http://schemas.microsoft.com/office/drawing/2010/main" val="0"/>
+              </a:ext>
+            </a:extLst>
+          </a:blip>
+          <a:stretch>
+            <a:fillRect/>
+          </a:stretch>
+        </p:blipFill>
+        <p:spPr>
+          <a:xfrm>
+            <a:off x="5247184" y="1999482"/>
+            <a:ext cx="3377355" cy="3377355"/>
           </a:xfrm>
           <a:prstGeom prst="rect">
             <a:avLst/>
@@ -12061,10 +12911,10 @@
       </p:sp>
       <p:sp>
         <p:nvSpPr>
-          <p:cNvPr id="11" name="TextBox 10">
-            <a:extLst>
-              <a:ext uri="{FF2B5EF4-FFF2-40B4-BE49-F238E27FC236}">
-                <a16:creationId xmlns:a16="http://schemas.microsoft.com/office/drawing/2014/main" id="{7176EDA6-BB3C-7306-4DB4-082812C2B491}"/>
+          <p:cNvPr id="15" name="TextBox 14">
+            <a:extLst>
+              <a:ext uri="{FF2B5EF4-FFF2-40B4-BE49-F238E27FC236}">
+                <a16:creationId xmlns:a16="http://schemas.microsoft.com/office/drawing/2014/main" id="{898BD7CD-F3D1-046B-9F2A-9F150D497AA7}"/>
               </a:ext>
             </a:extLst>
           </p:cNvPr>
@@ -12073,189 +12923,8 @@
         </p:nvSpPr>
         <p:spPr>
           <a:xfrm>
-            <a:off x="2061450" y="5146236"/>
-            <a:ext cx="830677" cy="461665"/>
-          </a:xfrm>
-          <a:prstGeom prst="rect">
-            <a:avLst/>
-          </a:prstGeom>
-          <a:noFill/>
-        </p:spPr>
-        <p:txBody>
-          <a:bodyPr wrap="none" rtlCol="0">
-            <a:spAutoFit/>
-          </a:bodyPr>
-          <a:lstStyle/>
-          <a:p>
-            <a:r>
-              <a:rPr lang="de-DE" sz="2400" dirty="0"/>
-              <a:t>Time</a:t>
-            </a:r>
-          </a:p>
-        </p:txBody>
-      </p:sp>
-      <p:cxnSp>
-        <p:nvCxnSpPr>
-          <p:cNvPr id="12" name="Straight Arrow Connector 11">
-            <a:extLst>
-              <a:ext uri="{FF2B5EF4-FFF2-40B4-BE49-F238E27FC236}">
-                <a16:creationId xmlns:a16="http://schemas.microsoft.com/office/drawing/2014/main" id="{75C425EE-96F7-D7CF-FF1A-468C65EC0474}"/>
-              </a:ext>
-            </a:extLst>
-          </p:cNvPr>
-          <p:cNvCxnSpPr>
-            <a:cxnSpLocks/>
-          </p:cNvCxnSpPr>
-          <p:nvPr/>
-        </p:nvCxnSpPr>
-        <p:spPr>
-          <a:xfrm flipV="1">
-            <a:off x="821860" y="1999482"/>
-            <a:ext cx="0" cy="2877318"/>
-          </a:xfrm>
-          <a:prstGeom prst="straightConnector1">
-            <a:avLst/>
-          </a:prstGeom>
-          <a:ln w="57150">
-            <a:tailEnd type="triangle"/>
-          </a:ln>
-        </p:spPr>
-        <p:style>
-          <a:lnRef idx="2">
-            <a:schemeClr val="accent1"/>
-          </a:lnRef>
-          <a:fillRef idx="0">
-            <a:schemeClr val="accent1"/>
-          </a:fillRef>
-          <a:effectRef idx="1">
-            <a:schemeClr val="accent1"/>
-          </a:effectRef>
-          <a:fontRef idx="minor">
-            <a:schemeClr val="tx1"/>
-          </a:fontRef>
-        </p:style>
-      </p:cxnSp>
-      <mc:AlternateContent xmlns:mc="http://schemas.openxmlformats.org/markup-compatibility/2006">
-        <mc:Choice xmlns:a14="http://schemas.microsoft.com/office/drawing/2010/main" Requires="a14">
-          <p:sp>
-            <p:nvSpPr>
-              <p:cNvPr id="13" name="TextBox 12">
-                <a:extLst>
-                  <a:ext uri="{FF2B5EF4-FFF2-40B4-BE49-F238E27FC236}">
-                    <a16:creationId xmlns:a16="http://schemas.microsoft.com/office/drawing/2014/main" id="{6B52F6CE-956E-B9B7-285A-6C0742BE3FAC}"/>
-                  </a:ext>
-                </a:extLst>
-              </p:cNvPr>
-              <p:cNvSpPr txBox="1"/>
-              <p:nvPr/>
-            </p:nvSpPr>
-            <p:spPr>
-              <a:xfrm>
-                <a:off x="271786" y="3207308"/>
-                <a:ext cx="608885" cy="461665"/>
-              </a:xfrm>
-              <a:prstGeom prst="rect">
-                <a:avLst/>
-              </a:prstGeom>
-              <a:noFill/>
-            </p:spPr>
-            <p:txBody>
-              <a:bodyPr wrap="none" rtlCol="0">
-                <a:spAutoFit/>
-              </a:bodyPr>
-              <a:lstStyle/>
-              <a:p>
-                <a:pPr/>
-                <a14:m>
-                  <m:oMathPara xmlns:m="http://schemas.openxmlformats.org/officeDocument/2006/math">
-                    <m:oMathParaPr>
-                      <m:jc m:val="centerGroup"/>
-                    </m:oMathParaPr>
-                    <m:oMath xmlns:m="http://schemas.openxmlformats.org/officeDocument/2006/math">
-                      <m:r>
-                        <m:rPr>
-                          <m:sty m:val="p"/>
-                        </m:rPr>
-                        <a:rPr lang="de-DE" sz="2400" dirty="0" smtClean="0">
-                          <a:latin typeface="Cambria Math" panose="02040503050406030204" pitchFamily="18" charset="0"/>
-                        </a:rPr>
-                        <m:t>Δ</m:t>
-                      </m:r>
-                      <m:r>
-                        <a:rPr lang="de-DE" sz="2400" i="1" dirty="0">
-                          <a:latin typeface="Cambria Math" panose="02040503050406030204" pitchFamily="18" charset="0"/>
-                        </a:rPr>
-                        <m:t>𝑓</m:t>
-                      </m:r>
-                    </m:oMath>
-                  </m:oMathPara>
-                </a14:m>
-                <a:endParaRPr lang="de-DE" sz="2400" dirty="0"/>
-              </a:p>
-            </p:txBody>
-          </p:sp>
-        </mc:Choice>
-        <mc:Fallback>
-          <p:sp>
-            <p:nvSpPr>
-              <p:cNvPr id="13" name="TextBox 12">
-                <a:extLst>
-                  <a:ext uri="{FF2B5EF4-FFF2-40B4-BE49-F238E27FC236}">
-                    <a16:creationId xmlns:a16="http://schemas.microsoft.com/office/drawing/2014/main" id="{6B52F6CE-956E-B9B7-285A-6C0742BE3FAC}"/>
-                  </a:ext>
-                </a:extLst>
-              </p:cNvPr>
-              <p:cNvSpPr txBox="1">
-                <a:spLocks noRot="1" noChangeAspect="1" noMove="1" noResize="1" noEditPoints="1" noAdjustHandles="1" noChangeArrowheads="1" noChangeShapeType="1" noTextEdit="1"/>
-              </p:cNvSpPr>
-              <p:nvPr/>
-            </p:nvSpPr>
-            <p:spPr>
-              <a:xfrm>
-                <a:off x="271786" y="3207308"/>
-                <a:ext cx="608885" cy="461665"/>
-              </a:xfrm>
-              <a:prstGeom prst="rect">
-                <a:avLst/>
-              </a:prstGeom>
-              <a:blipFill>
-                <a:blip r:embed="rId3"/>
-                <a:stretch>
-                  <a:fillRect r="-2020" b="-15789"/>
-                </a:stretch>
-              </a:blipFill>
-            </p:spPr>
-            <p:txBody>
-              <a:bodyPr/>
-              <a:lstStyle/>
-              <a:p>
-                <a:r>
-                  <a:rPr lang="de-DE">
-                    <a:noFill/>
-                  </a:rPr>
-                  <a:t> </a:t>
-                </a:r>
-              </a:p>
-            </p:txBody>
-          </p:sp>
-        </mc:Fallback>
-      </mc:AlternateContent>
-      <p:sp>
-        <p:nvSpPr>
-          <p:cNvPr id="15" name="TextBox 14">
-            <a:extLst>
-              <a:ext uri="{FF2B5EF4-FFF2-40B4-BE49-F238E27FC236}">
-                <a16:creationId xmlns:a16="http://schemas.microsoft.com/office/drawing/2014/main" id="{898BD7CD-F3D1-046B-9F2A-9F150D497AA7}"/>
-              </a:ext>
-            </a:extLst>
-          </p:cNvPr>
-          <p:cNvSpPr txBox="1"/>
-          <p:nvPr/>
-        </p:nvSpPr>
-        <p:spPr>
-          <a:xfrm>
-            <a:off x="1584533" y="1480931"/>
-            <a:ext cx="1605119" cy="461665"/>
+            <a:off x="2150590" y="1537817"/>
+            <a:ext cx="1086516" cy="461665"/>
           </a:xfrm>
           <a:prstGeom prst="rect">
             <a:avLst/>
@@ -12278,29 +12947,12 @@
                 <a:latin typeface="Cambria" panose="02040503050406030204" pitchFamily="18" charset="0"/>
                 <a:ea typeface="Cambria" panose="02040503050406030204" pitchFamily="18" charset="0"/>
               </a:rPr>
-              <a:t>Re</a:t>
-            </a:r>
-            <a:r>
-              <a:rPr lang="de-DE" sz="2400" dirty="0">
-                <a:latin typeface="+mj-lt"/>
-                <a:ea typeface="Cambria" panose="02040503050406030204" pitchFamily="18" charset="0"/>
-              </a:rPr>
-              <a:t>(</a:t>
-            </a:r>
-            <a:r>
-              <a:rPr lang="de-DE" sz="2400" dirty="0">
-                <a:latin typeface="Cambria" panose="02040503050406030204" pitchFamily="18" charset="0"/>
-                <a:ea typeface="Cambria" panose="02040503050406030204" pitchFamily="18" charset="0"/>
-              </a:rPr>
               <a:t>kspace</a:t>
             </a:r>
-            <a:r>
-              <a:rPr lang="de-DE" sz="2400" dirty="0">
-                <a:latin typeface="+mj-lt"/>
-                <a:ea typeface="Cambria" panose="02040503050406030204" pitchFamily="18" charset="0"/>
-              </a:rPr>
-              <a:t>)</a:t>
-            </a:r>
+            <a:endParaRPr lang="de-DE" sz="2400" dirty="0">
+              <a:latin typeface="+mj-lt"/>
+              <a:ea typeface="Cambria" panose="02040503050406030204" pitchFamily="18" charset="0"/>
+            </a:endParaRPr>
           </a:p>
         </p:txBody>
       </p:sp>
@@ -12354,53 +13006,12 @@
           </a:p>
         </p:txBody>
       </p:sp>
-      <p:cxnSp>
-        <p:nvCxnSpPr>
-          <p:cNvPr id="19" name="Straight Arrow Connector 18">
-            <a:extLst>
-              <a:ext uri="{FF2B5EF4-FFF2-40B4-BE49-F238E27FC236}">
-                <a16:creationId xmlns:a16="http://schemas.microsoft.com/office/drawing/2014/main" id="{4680B6C4-8920-D2DA-8318-A3EB20F1CFB6}"/>
-              </a:ext>
-            </a:extLst>
-          </p:cNvPr>
-          <p:cNvCxnSpPr>
-            <a:cxnSpLocks/>
-          </p:cNvCxnSpPr>
-          <p:nvPr/>
-        </p:nvCxnSpPr>
-        <p:spPr>
-          <a:xfrm rot="5400000" flipV="1">
-            <a:off x="2470833" y="3641370"/>
-            <a:ext cx="0" cy="2877318"/>
-          </a:xfrm>
-          <a:prstGeom prst="straightConnector1">
-            <a:avLst/>
-          </a:prstGeom>
-          <a:ln w="57150">
-            <a:tailEnd type="triangle"/>
-          </a:ln>
-        </p:spPr>
-        <p:style>
-          <a:lnRef idx="2">
-            <a:schemeClr val="accent1"/>
-          </a:lnRef>
-          <a:fillRef idx="0">
-            <a:schemeClr val="accent1"/>
-          </a:fillRef>
-          <a:effectRef idx="1">
-            <a:schemeClr val="accent1"/>
-          </a:effectRef>
-          <a:fontRef idx="minor">
-            <a:schemeClr val="tx1"/>
-          </a:fontRef>
-        </p:style>
-      </p:cxnSp>
       <p:pic>
         <p:nvPicPr>
-          <p:cNvPr id="25" name="Picture 24" descr="A pixelated image of a black and white square&#10;&#10;AI-generated content may be incorrect.">
-            <a:extLst>
-              <a:ext uri="{FF2B5EF4-FFF2-40B4-BE49-F238E27FC236}">
-                <a16:creationId xmlns:a16="http://schemas.microsoft.com/office/drawing/2014/main" id="{FD90212C-984A-7B7E-A6B1-63CDC0840558}"/>
+          <p:cNvPr id="5" name="Picture 4" descr="A pixelated image of a black and white square&#10;&#10;AI-generated content may be incorrect.">
+            <a:extLst>
+              <a:ext uri="{FF2B5EF4-FFF2-40B4-BE49-F238E27FC236}">
+                <a16:creationId xmlns:a16="http://schemas.microsoft.com/office/drawing/2014/main" id="{2EB070E9-3B75-C8E5-036B-7400DACD2016}"/>
               </a:ext>
             </a:extLst>
           </p:cNvPr>
@@ -12417,15 +13028,14 @@
               </a:ext>
             </a:extLst>
           </a:blip>
-          <a:srcRect l="8882" t="-10182" r="-8882" b="10182"/>
           <a:stretch>
             <a:fillRect/>
           </a:stretch>
         </p:blipFill>
         <p:spPr>
           <a:xfrm>
-            <a:off x="896576" y="1726299"/>
-            <a:ext cx="3236983" cy="3236983"/>
+            <a:off x="786032" y="2073396"/>
+            <a:ext cx="3336000" cy="3336000"/>
           </a:xfrm>
           <a:prstGeom prst="rect">
             <a:avLst/>
@@ -12445,7 +13055,7 @@
 </p:sld>
 </file>
 
-<file path=ppt/slides/slide2.xml><?xml version="1.0" encoding="utf-8"?>
+<file path=ppt/slides/slide3.xml><?xml version="1.0" encoding="utf-8"?>
 <p:sld xmlns:a="http://schemas.openxmlformats.org/drawingml/2006/main" xmlns:r="http://schemas.openxmlformats.org/officeDocument/2006/relationships" xmlns:p="http://schemas.openxmlformats.org/presentationml/2006/main">
   <p:cSld>
     <p:spTree>
@@ -17026,7 +17636,7 @@
 </p:sld>
 </file>
 
-<file path=ppt/slides/slide3.xml><?xml version="1.0" encoding="utf-8"?>
+<file path=ppt/slides/slide4.xml><?xml version="1.0" encoding="utf-8"?>
 <p:sld xmlns:a="http://schemas.openxmlformats.org/drawingml/2006/main" xmlns:r="http://schemas.openxmlformats.org/officeDocument/2006/relationships" xmlns:p="http://schemas.openxmlformats.org/presentationml/2006/main">
   <p:cSld>
     <p:spTree>
@@ -17643,7 +18253,7 @@
 </p:sld>
 </file>
 
-<file path=ppt/slides/slide4.xml><?xml version="1.0" encoding="utf-8"?>
+<file path=ppt/slides/slide5.xml><?xml version="1.0" encoding="utf-8"?>
 <p:sld xmlns:a="http://schemas.openxmlformats.org/drawingml/2006/main" xmlns:r="http://schemas.openxmlformats.org/officeDocument/2006/relationships" xmlns:p="http://schemas.openxmlformats.org/presentationml/2006/main">
   <p:cSld>
     <p:spTree>
@@ -17781,7 +18391,7 @@
 </p:sld>
 </file>
 
-<file path=ppt/slides/slide5.xml><?xml version="1.0" encoding="utf-8"?>
+<file path=ppt/slides/slide6.xml><?xml version="1.0" encoding="utf-8"?>
 <p:sld xmlns:a="http://schemas.openxmlformats.org/drawingml/2006/main" xmlns:r="http://schemas.openxmlformats.org/officeDocument/2006/relationships" xmlns:p="http://schemas.openxmlformats.org/presentationml/2006/main">
   <p:cSld>
     <p:spTree>
@@ -18121,7 +18731,7 @@
 </p:sld>
 </file>
 
-<file path=ppt/slides/slide6.xml><?xml version="1.0" encoding="utf-8"?>
+<file path=ppt/slides/slide7.xml><?xml version="1.0" encoding="utf-8"?>
 <p:sld xmlns:a="http://schemas.openxmlformats.org/drawingml/2006/main" xmlns:r="http://schemas.openxmlformats.org/officeDocument/2006/relationships" xmlns:p="http://schemas.openxmlformats.org/presentationml/2006/main">
   <p:cSld>
     <p:spTree>
@@ -18231,7 +18841,7 @@
 </p:sld>
 </file>
 
-<file path=ppt/slides/slide7.xml><?xml version="1.0" encoding="utf-8"?>
+<file path=ppt/slides/slide8.xml><?xml version="1.0" encoding="utf-8"?>
 <p:sld xmlns:a="http://schemas.openxmlformats.org/drawingml/2006/main" xmlns:r="http://schemas.openxmlformats.org/officeDocument/2006/relationships" xmlns:p="http://schemas.openxmlformats.org/presentationml/2006/main">
   <p:cSld>
     <p:spTree>
@@ -18334,7 +18944,7 @@
 </p:sld>
 </file>
 
-<file path=ppt/slides/slide8.xml><?xml version="1.0" encoding="utf-8"?>
+<file path=ppt/slides/slide9.xml><?xml version="1.0" encoding="utf-8"?>
 <p:sld xmlns:a="http://schemas.openxmlformats.org/drawingml/2006/main" xmlns:r="http://schemas.openxmlformats.org/officeDocument/2006/relationships" xmlns:p="http://schemas.openxmlformats.org/presentationml/2006/main">
   <p:cSld>
     <p:spTree>
@@ -18627,420 +19237,6 @@
     <p:extLst>
       <p:ext uri="{BB962C8B-B14F-4D97-AF65-F5344CB8AC3E}">
         <p14:creationId xmlns:p14="http://schemas.microsoft.com/office/powerpoint/2010/main" val="1739966096"/>
-      </p:ext>
-    </p:extLst>
-  </p:cSld>
-  <p:clrMapOvr>
-    <a:masterClrMapping/>
-  </p:clrMapOvr>
-</p:sld>
-</file>
-
-<file path=ppt/slides/slide9.xml><?xml version="1.0" encoding="utf-8"?>
-<p:sld xmlns:a="http://schemas.openxmlformats.org/drawingml/2006/main" xmlns:r="http://schemas.openxmlformats.org/officeDocument/2006/relationships" xmlns:p="http://schemas.openxmlformats.org/presentationml/2006/main">
-  <p:cSld>
-    <p:spTree>
-      <p:nvGrpSpPr>
-        <p:cNvPr id="1" name=""/>
-        <p:cNvGrpSpPr/>
-        <p:nvPr/>
-      </p:nvGrpSpPr>
-      <p:grpSpPr>
-        <a:xfrm>
-          <a:off x="0" y="0"/>
-          <a:ext cx="0" cy="0"/>
-          <a:chOff x="0" y="0"/>
-          <a:chExt cx="0" cy="0"/>
-        </a:xfrm>
-      </p:grpSpPr>
-      <p:pic>
-        <p:nvPicPr>
-          <p:cNvPr id="10" name="Picture 9" descr="A pixelated image of a black and white square&#10;&#10;AI-generated content may be incorrect.">
-            <a:extLst>
-              <a:ext uri="{FF2B5EF4-FFF2-40B4-BE49-F238E27FC236}">
-                <a16:creationId xmlns:a16="http://schemas.microsoft.com/office/drawing/2014/main" id="{B00E4B1B-AE6F-5FDD-28BE-D8CB9C4A2F2D}"/>
-              </a:ext>
-            </a:extLst>
-          </p:cNvPr>
-          <p:cNvPicPr>
-            <a:picLocks noChangeAspect="1"/>
-          </p:cNvPicPr>
-          <p:nvPr/>
-        </p:nvPicPr>
-        <p:blipFill>
-          <a:blip r:embed="rId2">
-            <a:extLst>
-              <a:ext uri="{28A0092B-C50C-407E-A947-70E740481C1C}">
-                <a14:useLocalDpi xmlns:a14="http://schemas.microsoft.com/office/drawing/2010/main" val="0"/>
-              </a:ext>
-            </a:extLst>
-          </a:blip>
-          <a:stretch>
-            <a:fillRect/>
-          </a:stretch>
-        </p:blipFill>
-        <p:spPr>
-          <a:xfrm>
-            <a:off x="708053" y="218154"/>
-            <a:ext cx="3236983" cy="3236983"/>
-          </a:xfrm>
-          <a:prstGeom prst="rect">
-            <a:avLst/>
-          </a:prstGeom>
-        </p:spPr>
-      </p:pic>
-      <p:pic>
-        <p:nvPicPr>
-          <p:cNvPr id="13" name="Picture 12" descr="A black and white pixelated square&#10;&#10;AI-generated content may be incorrect.">
-            <a:extLst>
-              <a:ext uri="{FF2B5EF4-FFF2-40B4-BE49-F238E27FC236}">
-                <a16:creationId xmlns:a16="http://schemas.microsoft.com/office/drawing/2014/main" id="{0D9ADA81-E905-3774-D2CB-634192A29A61}"/>
-              </a:ext>
-            </a:extLst>
-          </p:cNvPr>
-          <p:cNvPicPr>
-            <a:picLocks noChangeAspect="1"/>
-          </p:cNvPicPr>
-          <p:nvPr/>
-        </p:nvPicPr>
-        <p:blipFill>
-          <a:blip r:embed="rId3">
-            <a:extLst>
-              <a:ext uri="{28A0092B-C50C-407E-A947-70E740481C1C}">
-                <a14:useLocalDpi xmlns:a14="http://schemas.microsoft.com/office/drawing/2010/main" val="0"/>
-              </a:ext>
-            </a:extLst>
-          </a:blip>
-          <a:stretch>
-            <a:fillRect/>
-          </a:stretch>
-        </p:blipFill>
-        <p:spPr>
-          <a:xfrm>
-            <a:off x="4164522" y="218154"/>
-            <a:ext cx="3236983" cy="3236983"/>
-          </a:xfrm>
-          <a:prstGeom prst="rect">
-            <a:avLst/>
-          </a:prstGeom>
-        </p:spPr>
-      </p:pic>
-      <p:pic>
-        <p:nvPicPr>
-          <p:cNvPr id="16" name="Picture 15" descr="A pixelated image of a black and white square&#10;&#10;AI-generated content may be incorrect.">
-            <a:extLst>
-              <a:ext uri="{FF2B5EF4-FFF2-40B4-BE49-F238E27FC236}">
-                <a16:creationId xmlns:a16="http://schemas.microsoft.com/office/drawing/2014/main" id="{3B6F989A-506C-5077-5884-4F94D607A125}"/>
-              </a:ext>
-            </a:extLst>
-          </p:cNvPr>
-          <p:cNvPicPr>
-            <a:picLocks noChangeAspect="1"/>
-          </p:cNvPicPr>
-          <p:nvPr/>
-        </p:nvPicPr>
-        <p:blipFill>
-          <a:blip r:embed="rId4">
-            <a:extLst>
-              <a:ext uri="{28A0092B-C50C-407E-A947-70E740481C1C}">
-                <a14:useLocalDpi xmlns:a14="http://schemas.microsoft.com/office/drawing/2010/main" val="0"/>
-              </a:ext>
-            </a:extLst>
-          </a:blip>
-          <a:stretch>
-            <a:fillRect/>
-          </a:stretch>
-        </p:blipFill>
-        <p:spPr>
-          <a:xfrm>
-            <a:off x="7620991" y="218154"/>
-            <a:ext cx="3236983" cy="3236983"/>
-          </a:xfrm>
-          <a:prstGeom prst="rect">
-            <a:avLst/>
-          </a:prstGeom>
-        </p:spPr>
-      </p:pic>
-      <p:pic>
-        <p:nvPicPr>
-          <p:cNvPr id="19" name="Picture 18" descr="A pixelated image of a black and white square&#10;&#10;AI-generated content may be incorrect.">
-            <a:extLst>
-              <a:ext uri="{FF2B5EF4-FFF2-40B4-BE49-F238E27FC236}">
-                <a16:creationId xmlns:a16="http://schemas.microsoft.com/office/drawing/2014/main" id="{1EBEE43C-540D-D316-5FA5-A944A41C619B}"/>
-              </a:ext>
-            </a:extLst>
-          </p:cNvPr>
-          <p:cNvPicPr>
-            <a:picLocks noChangeAspect="1"/>
-          </p:cNvPicPr>
-          <p:nvPr/>
-        </p:nvPicPr>
-        <p:blipFill>
-          <a:blip r:embed="rId5">
-            <a:extLst>
-              <a:ext uri="{28A0092B-C50C-407E-A947-70E740481C1C}">
-                <a14:useLocalDpi xmlns:a14="http://schemas.microsoft.com/office/drawing/2010/main" val="0"/>
-              </a:ext>
-            </a:extLst>
-          </a:blip>
-          <a:stretch>
-            <a:fillRect/>
-          </a:stretch>
-        </p:blipFill>
-        <p:spPr>
-          <a:xfrm>
-            <a:off x="708053" y="3557884"/>
-            <a:ext cx="3236983" cy="3236983"/>
-          </a:xfrm>
-          <a:prstGeom prst="rect">
-            <a:avLst/>
-          </a:prstGeom>
-        </p:spPr>
-      </p:pic>
-      <p:pic>
-        <p:nvPicPr>
-          <p:cNvPr id="21" name="Picture 20" descr="A black and white pixelated square&#10;&#10;AI-generated content may be incorrect.">
-            <a:extLst>
-              <a:ext uri="{FF2B5EF4-FFF2-40B4-BE49-F238E27FC236}">
-                <a16:creationId xmlns:a16="http://schemas.microsoft.com/office/drawing/2014/main" id="{D4D3CA93-3979-3975-8734-1FC1A4FF1BEA}"/>
-              </a:ext>
-            </a:extLst>
-          </p:cNvPr>
-          <p:cNvPicPr>
-            <a:picLocks noChangeAspect="1"/>
-          </p:cNvPicPr>
-          <p:nvPr/>
-        </p:nvPicPr>
-        <p:blipFill>
-          <a:blip r:embed="rId6">
-            <a:extLst>
-              <a:ext uri="{28A0092B-C50C-407E-A947-70E740481C1C}">
-                <a14:useLocalDpi xmlns:a14="http://schemas.microsoft.com/office/drawing/2010/main" val="0"/>
-              </a:ext>
-            </a:extLst>
-          </a:blip>
-          <a:stretch>
-            <a:fillRect/>
-          </a:stretch>
-        </p:blipFill>
-        <p:spPr>
-          <a:xfrm>
-            <a:off x="4164522" y="3557884"/>
-            <a:ext cx="3236983" cy="3236983"/>
-          </a:xfrm>
-          <a:prstGeom prst="rect">
-            <a:avLst/>
-          </a:prstGeom>
-        </p:spPr>
-      </p:pic>
-      <p:pic>
-        <p:nvPicPr>
-          <p:cNvPr id="27" name="Picture 26" descr="A pixelated image of a black and white square&#10;&#10;AI-generated content may be incorrect.">
-            <a:extLst>
-              <a:ext uri="{FF2B5EF4-FFF2-40B4-BE49-F238E27FC236}">
-                <a16:creationId xmlns:a16="http://schemas.microsoft.com/office/drawing/2014/main" id="{3B148123-512C-4CE9-AB62-6D6BE6ECD6F0}"/>
-              </a:ext>
-            </a:extLst>
-          </p:cNvPr>
-          <p:cNvPicPr>
-            <a:picLocks noChangeAspect="1"/>
-          </p:cNvPicPr>
-          <p:nvPr/>
-        </p:nvPicPr>
-        <p:blipFill>
-          <a:blip r:embed="rId7">
-            <a:extLst>
-              <a:ext uri="{28A0092B-C50C-407E-A947-70E740481C1C}">
-                <a14:useLocalDpi xmlns:a14="http://schemas.microsoft.com/office/drawing/2010/main" val="0"/>
-              </a:ext>
-            </a:extLst>
-          </a:blip>
-          <a:stretch>
-            <a:fillRect/>
-          </a:stretch>
-        </p:blipFill>
-        <p:spPr>
-          <a:xfrm>
-            <a:off x="7620991" y="3557884"/>
-            <a:ext cx="3236983" cy="3236983"/>
-          </a:xfrm>
-          <a:prstGeom prst="rect">
-            <a:avLst/>
-          </a:prstGeom>
-        </p:spPr>
-      </p:pic>
-      <p:cxnSp>
-        <p:nvCxnSpPr>
-          <p:cNvPr id="22" name="Straight Connector 21">
-            <a:extLst>
-              <a:ext uri="{FF2B5EF4-FFF2-40B4-BE49-F238E27FC236}">
-                <a16:creationId xmlns:a16="http://schemas.microsoft.com/office/drawing/2014/main" id="{A6298A49-1BB8-B363-5568-E3DD75F7D688}"/>
-              </a:ext>
-            </a:extLst>
-          </p:cNvPr>
-          <p:cNvCxnSpPr/>
-          <p:nvPr/>
-        </p:nvCxnSpPr>
-        <p:spPr>
-          <a:xfrm>
-            <a:off x="7867853" y="3484520"/>
-            <a:ext cx="3198657" cy="2971800"/>
-          </a:xfrm>
-          <a:prstGeom prst="line">
-            <a:avLst/>
-          </a:prstGeom>
-          <a:ln w="76200">
-            <a:solidFill>
-              <a:srgbClr val="FF0000"/>
-            </a:solidFill>
-          </a:ln>
-        </p:spPr>
-        <p:style>
-          <a:lnRef idx="2">
-            <a:schemeClr val="accent1"/>
-          </a:lnRef>
-          <a:fillRef idx="0">
-            <a:schemeClr val="accent1"/>
-          </a:fillRef>
-          <a:effectRef idx="1">
-            <a:schemeClr val="accent1"/>
-          </a:effectRef>
-          <a:fontRef idx="minor">
-            <a:schemeClr val="tx1"/>
-          </a:fontRef>
-        </p:style>
-      </p:cxnSp>
-      <p:cxnSp>
-        <p:nvCxnSpPr>
-          <p:cNvPr id="23" name="Straight Connector 22">
-            <a:extLst>
-              <a:ext uri="{FF2B5EF4-FFF2-40B4-BE49-F238E27FC236}">
-                <a16:creationId xmlns:a16="http://schemas.microsoft.com/office/drawing/2014/main" id="{6423B773-293E-5CF2-720C-FBB70CF0E5F1}"/>
-              </a:ext>
-            </a:extLst>
-          </p:cNvPr>
-          <p:cNvCxnSpPr>
-            <a:cxnSpLocks/>
-          </p:cNvCxnSpPr>
-          <p:nvPr/>
-        </p:nvCxnSpPr>
-        <p:spPr>
-          <a:xfrm rot="16200000">
-            <a:off x="7867853" y="3484520"/>
-            <a:ext cx="3198657" cy="2971800"/>
-          </a:xfrm>
-          <a:prstGeom prst="line">
-            <a:avLst/>
-          </a:prstGeom>
-          <a:ln w="76200">
-            <a:solidFill>
-              <a:srgbClr val="FF0000"/>
-            </a:solidFill>
-          </a:ln>
-        </p:spPr>
-        <p:style>
-          <a:lnRef idx="2">
-            <a:schemeClr val="accent1"/>
-          </a:lnRef>
-          <a:fillRef idx="0">
-            <a:schemeClr val="accent1"/>
-          </a:fillRef>
-          <a:effectRef idx="1">
-            <a:schemeClr val="accent1"/>
-          </a:effectRef>
-          <a:fontRef idx="minor">
-            <a:schemeClr val="tx1"/>
-          </a:fontRef>
-        </p:style>
-      </p:cxnSp>
-      <p:cxnSp>
-        <p:nvCxnSpPr>
-          <p:cNvPr id="25" name="Straight Connector 24">
-            <a:extLst>
-              <a:ext uri="{FF2B5EF4-FFF2-40B4-BE49-F238E27FC236}">
-                <a16:creationId xmlns:a16="http://schemas.microsoft.com/office/drawing/2014/main" id="{51EA2EBE-D20B-513E-1CAA-42EBA9E82B01}"/>
-              </a:ext>
-            </a:extLst>
-          </p:cNvPr>
-          <p:cNvCxnSpPr/>
-          <p:nvPr/>
-        </p:nvCxnSpPr>
-        <p:spPr>
-          <a:xfrm>
-            <a:off x="4485605" y="3542429"/>
-            <a:ext cx="3198657" cy="2971800"/>
-          </a:xfrm>
-          <a:prstGeom prst="line">
-            <a:avLst/>
-          </a:prstGeom>
-          <a:ln w="76200">
-            <a:solidFill>
-              <a:srgbClr val="FF0000"/>
-            </a:solidFill>
-          </a:ln>
-        </p:spPr>
-        <p:style>
-          <a:lnRef idx="2">
-            <a:schemeClr val="accent1"/>
-          </a:lnRef>
-          <a:fillRef idx="0">
-            <a:schemeClr val="accent1"/>
-          </a:fillRef>
-          <a:effectRef idx="1">
-            <a:schemeClr val="accent1"/>
-          </a:effectRef>
-          <a:fontRef idx="minor">
-            <a:schemeClr val="tx1"/>
-          </a:fontRef>
-        </p:style>
-      </p:cxnSp>
-      <p:cxnSp>
-        <p:nvCxnSpPr>
-          <p:cNvPr id="26" name="Straight Connector 25">
-            <a:extLst>
-              <a:ext uri="{FF2B5EF4-FFF2-40B4-BE49-F238E27FC236}">
-                <a16:creationId xmlns:a16="http://schemas.microsoft.com/office/drawing/2014/main" id="{199B7127-BAFE-9900-00F5-A3FFC7259493}"/>
-              </a:ext>
-            </a:extLst>
-          </p:cNvPr>
-          <p:cNvCxnSpPr>
-            <a:cxnSpLocks/>
-          </p:cNvCxnSpPr>
-          <p:nvPr/>
-        </p:nvCxnSpPr>
-        <p:spPr>
-          <a:xfrm rot="16200000">
-            <a:off x="4485605" y="3542429"/>
-            <a:ext cx="3198657" cy="2971800"/>
-          </a:xfrm>
-          <a:prstGeom prst="line">
-            <a:avLst/>
-          </a:prstGeom>
-          <a:ln w="76200">
-            <a:solidFill>
-              <a:srgbClr val="FF0000"/>
-            </a:solidFill>
-          </a:ln>
-        </p:spPr>
-        <p:style>
-          <a:lnRef idx="2">
-            <a:schemeClr val="accent1"/>
-          </a:lnRef>
-          <a:fillRef idx="0">
-            <a:schemeClr val="accent1"/>
-          </a:fillRef>
-          <a:effectRef idx="1">
-            <a:schemeClr val="accent1"/>
-          </a:effectRef>
-          <a:fontRef idx="minor">
-            <a:schemeClr val="tx1"/>
-          </a:fontRef>
-        </p:style>
-      </p:cxnSp>
-    </p:spTree>
-    <p:extLst>
-      <p:ext uri="{BB962C8B-B14F-4D97-AF65-F5344CB8AC3E}">
-        <p14:creationId xmlns:p14="http://schemas.microsoft.com/office/powerpoint/2010/main" val="3134903272"/>
       </p:ext>
     </p:extLst>
   </p:cSld>

--- a/figures/figures.pptx
+++ b/figures/figures.pptx
@@ -5,29 +5,32 @@
     <p:sldMasterId id="2147483648" r:id="rId1"/>
   </p:sldMasterIdLst>
   <p:notesMasterIdLst>
-    <p:notesMasterId r:id="rId22"/>
+    <p:notesMasterId r:id="rId25"/>
   </p:notesMasterIdLst>
   <p:sldIdLst>
     <p:sldId id="256" r:id="rId2"/>
-    <p:sldId id="277" r:id="rId3"/>
-    <p:sldId id="257" r:id="rId4"/>
-    <p:sldId id="258" r:id="rId5"/>
-    <p:sldId id="272" r:id="rId6"/>
-    <p:sldId id="273" r:id="rId7"/>
-    <p:sldId id="275" r:id="rId8"/>
-    <p:sldId id="274" r:id="rId9"/>
-    <p:sldId id="268" r:id="rId10"/>
-    <p:sldId id="269" r:id="rId11"/>
-    <p:sldId id="260" r:id="rId12"/>
-    <p:sldId id="263" r:id="rId13"/>
-    <p:sldId id="261" r:id="rId14"/>
-    <p:sldId id="270" r:id="rId15"/>
-    <p:sldId id="262" r:id="rId16"/>
-    <p:sldId id="265" r:id="rId17"/>
-    <p:sldId id="266" r:id="rId18"/>
-    <p:sldId id="267" r:id="rId19"/>
-    <p:sldId id="271" r:id="rId20"/>
-    <p:sldId id="276" r:id="rId21"/>
+    <p:sldId id="280" r:id="rId3"/>
+    <p:sldId id="279" r:id="rId4"/>
+    <p:sldId id="277" r:id="rId5"/>
+    <p:sldId id="257" r:id="rId6"/>
+    <p:sldId id="258" r:id="rId7"/>
+    <p:sldId id="272" r:id="rId8"/>
+    <p:sldId id="273" r:id="rId9"/>
+    <p:sldId id="275" r:id="rId10"/>
+    <p:sldId id="274" r:id="rId11"/>
+    <p:sldId id="268" r:id="rId12"/>
+    <p:sldId id="269" r:id="rId13"/>
+    <p:sldId id="260" r:id="rId14"/>
+    <p:sldId id="263" r:id="rId15"/>
+    <p:sldId id="261" r:id="rId16"/>
+    <p:sldId id="270" r:id="rId17"/>
+    <p:sldId id="262" r:id="rId18"/>
+    <p:sldId id="265" r:id="rId19"/>
+    <p:sldId id="266" r:id="rId20"/>
+    <p:sldId id="267" r:id="rId21"/>
+    <p:sldId id="271" r:id="rId22"/>
+    <p:sldId id="276" r:id="rId23"/>
+    <p:sldId id="278" r:id="rId24"/>
   </p:sldIdLst>
   <p:sldSz cx="12192000" cy="6858000"/>
   <p:notesSz cx="6858000" cy="9144000"/>
@@ -2913,7 +2916,7 @@
           <a:p>
             <a:fld id="{8CF8B62D-F47B-43DC-854F-884833B98021}" type="datetimeFigureOut">
               <a:rPr lang="de-DE" smtClean="0"/>
-              <a:t>28.08.2025</a:t>
+              <a:t>11.09.2025</a:t>
             </a:fld>
             <a:endParaRPr lang="de-DE"/>
           </a:p>
@@ -3246,7 +3249,7 @@
           <a:p>
             <a:fld id="{AB2C2533-D42D-4AF8-9C02-1BDA65857909}" type="slidenum">
               <a:rPr lang="de-DE" smtClean="0"/>
-              <a:t>11</a:t>
+              <a:t>13</a:t>
             </a:fld>
             <a:endParaRPr lang="de-DE"/>
           </a:p>
@@ -3330,7 +3333,7 @@
           <a:p>
             <a:fld id="{AB2C2533-D42D-4AF8-9C02-1BDA65857909}" type="slidenum">
               <a:rPr lang="de-DE" smtClean="0"/>
-              <a:t>16</a:t>
+              <a:t>18</a:t>
             </a:fld>
             <a:endParaRPr lang="de-DE"/>
           </a:p>
@@ -3414,7 +3417,7 @@
           <a:p>
             <a:fld id="{AB2C2533-D42D-4AF8-9C02-1BDA65857909}" type="slidenum">
               <a:rPr lang="de-DE" smtClean="0"/>
-              <a:t>20</a:t>
+              <a:t>22</a:t>
             </a:fld>
             <a:endParaRPr lang="de-DE"/>
           </a:p>
@@ -3582,7 +3585,7 @@
           <a:p>
             <a:fld id="{3146589B-F63A-42CD-B487-02649808258F}" type="datetimeFigureOut">
               <a:rPr lang="de-DE" smtClean="0"/>
-              <a:t>28.08.2025</a:t>
+              <a:t>11.09.2025</a:t>
             </a:fld>
             <a:endParaRPr lang="de-DE"/>
           </a:p>
@@ -3782,7 +3785,7 @@
           <a:p>
             <a:fld id="{3146589B-F63A-42CD-B487-02649808258F}" type="datetimeFigureOut">
               <a:rPr lang="de-DE" smtClean="0"/>
-              <a:t>28.08.2025</a:t>
+              <a:t>11.09.2025</a:t>
             </a:fld>
             <a:endParaRPr lang="de-DE"/>
           </a:p>
@@ -3992,7 +3995,7 @@
           <a:p>
             <a:fld id="{3146589B-F63A-42CD-B487-02649808258F}" type="datetimeFigureOut">
               <a:rPr lang="de-DE" smtClean="0"/>
-              <a:t>28.08.2025</a:t>
+              <a:t>11.09.2025</a:t>
             </a:fld>
             <a:endParaRPr lang="de-DE"/>
           </a:p>
@@ -4192,7 +4195,7 @@
           <a:p>
             <a:fld id="{3146589B-F63A-42CD-B487-02649808258F}" type="datetimeFigureOut">
               <a:rPr lang="de-DE" smtClean="0"/>
-              <a:t>28.08.2025</a:t>
+              <a:t>11.09.2025</a:t>
             </a:fld>
             <a:endParaRPr lang="de-DE"/>
           </a:p>
@@ -4468,7 +4471,7 @@
           <a:p>
             <a:fld id="{3146589B-F63A-42CD-B487-02649808258F}" type="datetimeFigureOut">
               <a:rPr lang="de-DE" smtClean="0"/>
-              <a:t>28.08.2025</a:t>
+              <a:t>11.09.2025</a:t>
             </a:fld>
             <a:endParaRPr lang="de-DE"/>
           </a:p>
@@ -4736,7 +4739,7 @@
           <a:p>
             <a:fld id="{3146589B-F63A-42CD-B487-02649808258F}" type="datetimeFigureOut">
               <a:rPr lang="de-DE" smtClean="0"/>
-              <a:t>28.08.2025</a:t>
+              <a:t>11.09.2025</a:t>
             </a:fld>
             <a:endParaRPr lang="de-DE"/>
           </a:p>
@@ -5151,7 +5154,7 @@
           <a:p>
             <a:fld id="{3146589B-F63A-42CD-B487-02649808258F}" type="datetimeFigureOut">
               <a:rPr lang="de-DE" smtClean="0"/>
-              <a:t>28.08.2025</a:t>
+              <a:t>11.09.2025</a:t>
             </a:fld>
             <a:endParaRPr lang="de-DE"/>
           </a:p>
@@ -5293,7 +5296,7 @@
           <a:p>
             <a:fld id="{3146589B-F63A-42CD-B487-02649808258F}" type="datetimeFigureOut">
               <a:rPr lang="de-DE" smtClean="0"/>
-              <a:t>28.08.2025</a:t>
+              <a:t>11.09.2025</a:t>
             </a:fld>
             <a:endParaRPr lang="de-DE"/>
           </a:p>
@@ -5406,7 +5409,7 @@
           <a:p>
             <a:fld id="{3146589B-F63A-42CD-B487-02649808258F}" type="datetimeFigureOut">
               <a:rPr lang="de-DE" smtClean="0"/>
-              <a:t>28.08.2025</a:t>
+              <a:t>11.09.2025</a:t>
             </a:fld>
             <a:endParaRPr lang="de-DE"/>
           </a:p>
@@ -5719,7 +5722,7 @@
           <a:p>
             <a:fld id="{3146589B-F63A-42CD-B487-02649808258F}" type="datetimeFigureOut">
               <a:rPr lang="de-DE" smtClean="0"/>
-              <a:t>28.08.2025</a:t>
+              <a:t>11.09.2025</a:t>
             </a:fld>
             <a:endParaRPr lang="de-DE"/>
           </a:p>
@@ -6008,7 +6011,7 @@
           <a:p>
             <a:fld id="{3146589B-F63A-42CD-B487-02649808258F}" type="datetimeFigureOut">
               <a:rPr lang="de-DE" smtClean="0"/>
-              <a:t>28.08.2025</a:t>
+              <a:t>11.09.2025</a:t>
             </a:fld>
             <a:endParaRPr lang="de-DE"/>
           </a:p>
@@ -6251,7 +6254,7 @@
           <a:p>
             <a:fld id="{3146589B-F63A-42CD-B487-02649808258F}" type="datetimeFigureOut">
               <a:rPr lang="de-DE" smtClean="0"/>
-              <a:t>28.08.2025</a:t>
+              <a:t>11.09.2025</a:t>
             </a:fld>
             <a:endParaRPr lang="de-DE"/>
           </a:p>
@@ -8570,6 +8573,411 @@
       </p:grpSpPr>
       <p:pic>
         <p:nvPicPr>
+          <p:cNvPr id="5" name="Picture 4" descr="A graph with colorful lines&#10;&#10;AI-generated content may be incorrect.">
+            <a:extLst>
+              <a:ext uri="{FF2B5EF4-FFF2-40B4-BE49-F238E27FC236}">
+                <a16:creationId xmlns:a16="http://schemas.microsoft.com/office/drawing/2014/main" id="{2099137D-7D0A-AE03-CE53-23B89005B017}"/>
+              </a:ext>
+            </a:extLst>
+          </p:cNvPr>
+          <p:cNvPicPr>
+            <a:picLocks noChangeAspect="1"/>
+          </p:cNvPicPr>
+          <p:nvPr/>
+        </p:nvPicPr>
+        <p:blipFill>
+          <a:blip r:embed="rId2">
+            <a:extLst>
+              <a:ext uri="{28A0092B-C50C-407E-A947-70E740481C1C}">
+                <a14:useLocalDpi xmlns:a14="http://schemas.microsoft.com/office/drawing/2010/main" val="0"/>
+              </a:ext>
+            </a:extLst>
+          </a:blip>
+          <a:stretch>
+            <a:fillRect/>
+          </a:stretch>
+        </p:blipFill>
+        <p:spPr>
+          <a:xfrm>
+            <a:off x="3217158" y="1990341"/>
+            <a:ext cx="5757684" cy="2877318"/>
+          </a:xfrm>
+          <a:prstGeom prst="rect">
+            <a:avLst/>
+          </a:prstGeom>
+        </p:spPr>
+      </p:pic>
+      <p:pic>
+        <p:nvPicPr>
+          <p:cNvPr id="7" name="Picture 6" descr="A screen shot of a computer&#10;&#10;AI-generated content may be incorrect.">
+            <a:extLst>
+              <a:ext uri="{FF2B5EF4-FFF2-40B4-BE49-F238E27FC236}">
+                <a16:creationId xmlns:a16="http://schemas.microsoft.com/office/drawing/2014/main" id="{FC0CFF11-BD53-696F-4BB9-762CB1FEB5F1}"/>
+              </a:ext>
+            </a:extLst>
+          </p:cNvPr>
+          <p:cNvPicPr>
+            <a:picLocks noChangeAspect="1"/>
+          </p:cNvPicPr>
+          <p:nvPr/>
+        </p:nvPicPr>
+        <p:blipFill>
+          <a:blip r:embed="rId3">
+            <a:extLst>
+              <a:ext uri="{28A0092B-C50C-407E-A947-70E740481C1C}">
+                <a14:useLocalDpi xmlns:a14="http://schemas.microsoft.com/office/drawing/2010/main" val="0"/>
+              </a:ext>
+            </a:extLst>
+          </a:blip>
+          <a:srcRect t="77449"/>
+          <a:stretch>
+            <a:fillRect/>
+          </a:stretch>
+        </p:blipFill>
+        <p:spPr>
+          <a:xfrm>
+            <a:off x="3217158" y="4737099"/>
+            <a:ext cx="5757684" cy="648859"/>
+          </a:xfrm>
+          <a:prstGeom prst="rect">
+            <a:avLst/>
+          </a:prstGeom>
+        </p:spPr>
+      </p:pic>
+    </p:spTree>
+    <p:extLst>
+      <p:ext uri="{BB962C8B-B14F-4D97-AF65-F5344CB8AC3E}">
+        <p14:creationId xmlns:p14="http://schemas.microsoft.com/office/powerpoint/2010/main" val="1119923278"/>
+      </p:ext>
+    </p:extLst>
+  </p:cSld>
+  <p:clrMapOvr>
+    <a:masterClrMapping/>
+  </p:clrMapOvr>
+</p:sld>
+</file>
+
+<file path=ppt/slides/slide11.xml><?xml version="1.0" encoding="utf-8"?>
+<p:sld xmlns:a="http://schemas.openxmlformats.org/drawingml/2006/main" xmlns:r="http://schemas.openxmlformats.org/officeDocument/2006/relationships" xmlns:p="http://schemas.openxmlformats.org/presentationml/2006/main">
+  <p:cSld>
+    <p:spTree>
+      <p:nvGrpSpPr>
+        <p:cNvPr id="1" name=""/>
+        <p:cNvGrpSpPr/>
+        <p:nvPr/>
+      </p:nvGrpSpPr>
+      <p:grpSpPr>
+        <a:xfrm>
+          <a:off x="0" y="0"/>
+          <a:ext cx="0" cy="0"/>
+          <a:chOff x="0" y="0"/>
+          <a:chExt cx="0" cy="0"/>
+        </a:xfrm>
+      </p:grpSpPr>
+      <p:pic>
+        <p:nvPicPr>
+          <p:cNvPr id="4" name="Picture 3" descr="A pixelated image of a black and white square&#10;&#10;AI-generated content may be incorrect.">
+            <a:extLst>
+              <a:ext uri="{FF2B5EF4-FFF2-40B4-BE49-F238E27FC236}">
+                <a16:creationId xmlns:a16="http://schemas.microsoft.com/office/drawing/2014/main" id="{3D7E1B0D-E008-D96D-4169-52D66104F76F}"/>
+              </a:ext>
+            </a:extLst>
+          </p:cNvPr>
+          <p:cNvPicPr>
+            <a:picLocks noChangeAspect="1"/>
+          </p:cNvPicPr>
+          <p:nvPr/>
+        </p:nvPicPr>
+        <p:blipFill>
+          <a:blip r:embed="rId2">
+            <a:extLst>
+              <a:ext uri="{28A0092B-C50C-407E-A947-70E740481C1C}">
+                <a14:useLocalDpi xmlns:a14="http://schemas.microsoft.com/office/drawing/2010/main" val="0"/>
+              </a:ext>
+            </a:extLst>
+          </a:blip>
+          <a:stretch>
+            <a:fillRect/>
+          </a:stretch>
+        </p:blipFill>
+        <p:spPr>
+          <a:xfrm>
+            <a:off x="7906507" y="1821391"/>
+            <a:ext cx="3236983" cy="3236983"/>
+          </a:xfrm>
+          <a:prstGeom prst="rect">
+            <a:avLst/>
+          </a:prstGeom>
+        </p:spPr>
+      </p:pic>
+      <p:sp>
+        <p:nvSpPr>
+          <p:cNvPr id="5" name="Isosceles Triangle 4">
+            <a:extLst>
+              <a:ext uri="{FF2B5EF4-FFF2-40B4-BE49-F238E27FC236}">
+                <a16:creationId xmlns:a16="http://schemas.microsoft.com/office/drawing/2014/main" id="{C7058C1F-72F6-9AF5-E470-3C255886F924}"/>
+              </a:ext>
+            </a:extLst>
+          </p:cNvPr>
+          <p:cNvSpPr/>
+          <p:nvPr/>
+        </p:nvSpPr>
+        <p:spPr>
+          <a:xfrm>
+            <a:off x="4626429" y="5047491"/>
+            <a:ext cx="2730427" cy="469815"/>
+          </a:xfrm>
+          <a:prstGeom prst="triangle">
+            <a:avLst>
+              <a:gd name="adj" fmla="val 100000"/>
+            </a:avLst>
+          </a:prstGeom>
+          <a:solidFill>
+            <a:srgbClr val="0070C0"/>
+          </a:solidFill>
+          <a:ln>
+            <a:noFill/>
+          </a:ln>
+        </p:spPr>
+        <p:style>
+          <a:lnRef idx="2">
+            <a:schemeClr val="accent1">
+              <a:shade val="15000"/>
+            </a:schemeClr>
+          </a:lnRef>
+          <a:fillRef idx="1">
+            <a:schemeClr val="accent1"/>
+          </a:fillRef>
+          <a:effectRef idx="0">
+            <a:schemeClr val="accent1"/>
+          </a:effectRef>
+          <a:fontRef idx="minor">
+            <a:schemeClr val="lt1"/>
+          </a:fontRef>
+        </p:style>
+        <p:txBody>
+          <a:bodyPr rtlCol="0" anchor="ctr"/>
+          <a:lstStyle/>
+          <a:p>
+            <a:pPr algn="ctr"/>
+            <a:endParaRPr lang="de-DE">
+              <a:solidFill>
+                <a:schemeClr val="accent1"/>
+              </a:solidFill>
+            </a:endParaRPr>
+          </a:p>
+        </p:txBody>
+      </p:sp>
+      <p:sp>
+        <p:nvSpPr>
+          <p:cNvPr id="7" name="TextBox 6">
+            <a:extLst>
+              <a:ext uri="{FF2B5EF4-FFF2-40B4-BE49-F238E27FC236}">
+                <a16:creationId xmlns:a16="http://schemas.microsoft.com/office/drawing/2014/main" id="{EEEDF624-6410-45CB-FB31-35DAAB234DBE}"/>
+              </a:ext>
+            </a:extLst>
+          </p:cNvPr>
+          <p:cNvSpPr txBox="1"/>
+          <p:nvPr/>
+        </p:nvSpPr>
+        <p:spPr>
+          <a:xfrm>
+            <a:off x="4789714" y="5517306"/>
+            <a:ext cx="2612571" cy="400110"/>
+          </a:xfrm>
+          <a:prstGeom prst="rect">
+            <a:avLst/>
+          </a:prstGeom>
+          <a:noFill/>
+          <a:ln>
+            <a:noFill/>
+          </a:ln>
+        </p:spPr>
+        <p:txBody>
+          <a:bodyPr wrap="square" rtlCol="0">
+            <a:spAutoFit/>
+          </a:bodyPr>
+          <a:lstStyle/>
+          <a:p>
+            <a:r>
+              <a:rPr lang="de-DE" sz="2000" dirty="0">
+                <a:solidFill>
+                  <a:schemeClr val="tx1"/>
+                </a:solidFill>
+              </a:rPr>
+              <a:t>Frequency encoding </a:t>
+            </a:r>
+          </a:p>
+        </p:txBody>
+      </p:sp>
+      <p:sp>
+        <p:nvSpPr>
+          <p:cNvPr id="12" name="Isosceles Triangle 11">
+            <a:extLst>
+              <a:ext uri="{FF2B5EF4-FFF2-40B4-BE49-F238E27FC236}">
+                <a16:creationId xmlns:a16="http://schemas.microsoft.com/office/drawing/2014/main" id="{F0651CD9-8AB1-49DF-D1CD-4D86A2557DEC}"/>
+              </a:ext>
+            </a:extLst>
+          </p:cNvPr>
+          <p:cNvSpPr/>
+          <p:nvPr/>
+        </p:nvSpPr>
+        <p:spPr>
+          <a:xfrm rot="16200000">
+            <a:off x="2301164" y="2999888"/>
+            <a:ext cx="2826807" cy="469815"/>
+          </a:xfrm>
+          <a:prstGeom prst="triangle">
+            <a:avLst>
+              <a:gd name="adj" fmla="val 100000"/>
+            </a:avLst>
+          </a:prstGeom>
+          <a:solidFill>
+            <a:srgbClr val="0070C0"/>
+          </a:solidFill>
+          <a:ln>
+            <a:noFill/>
+          </a:ln>
+        </p:spPr>
+        <p:style>
+          <a:lnRef idx="2">
+            <a:schemeClr val="accent1">
+              <a:shade val="15000"/>
+            </a:schemeClr>
+          </a:lnRef>
+          <a:fillRef idx="1">
+            <a:schemeClr val="accent1"/>
+          </a:fillRef>
+          <a:effectRef idx="0">
+            <a:schemeClr val="accent1"/>
+          </a:effectRef>
+          <a:fontRef idx="minor">
+            <a:schemeClr val="lt1"/>
+          </a:fontRef>
+        </p:style>
+        <p:txBody>
+          <a:bodyPr rtlCol="0" anchor="ctr"/>
+          <a:lstStyle/>
+          <a:p>
+            <a:pPr algn="ctr"/>
+            <a:endParaRPr lang="de-DE">
+              <a:solidFill>
+                <a:schemeClr val="accent1"/>
+              </a:solidFill>
+            </a:endParaRPr>
+          </a:p>
+        </p:txBody>
+      </p:sp>
+      <p:sp>
+        <p:nvSpPr>
+          <p:cNvPr id="13" name="TextBox 12">
+            <a:extLst>
+              <a:ext uri="{FF2B5EF4-FFF2-40B4-BE49-F238E27FC236}">
+                <a16:creationId xmlns:a16="http://schemas.microsoft.com/office/drawing/2014/main" id="{4F4B2AC8-2F46-741E-3905-985D2E6567EC}"/>
+              </a:ext>
+            </a:extLst>
+          </p:cNvPr>
+          <p:cNvSpPr txBox="1"/>
+          <p:nvPr/>
+        </p:nvSpPr>
+        <p:spPr>
+          <a:xfrm rot="16200000">
+            <a:off x="2227387" y="3061571"/>
+            <a:ext cx="1944763" cy="400110"/>
+          </a:xfrm>
+          <a:prstGeom prst="rect">
+            <a:avLst/>
+          </a:prstGeom>
+          <a:noFill/>
+          <a:ln>
+            <a:noFill/>
+          </a:ln>
+        </p:spPr>
+        <p:txBody>
+          <a:bodyPr wrap="none" rtlCol="0">
+            <a:spAutoFit/>
+          </a:bodyPr>
+          <a:lstStyle/>
+          <a:p>
+            <a:r>
+              <a:rPr lang="de-DE" sz="2000" dirty="0">
+                <a:solidFill>
+                  <a:schemeClr val="tx1"/>
+                </a:solidFill>
+              </a:rPr>
+              <a:t>Phase encoding</a:t>
+            </a:r>
+          </a:p>
+        </p:txBody>
+      </p:sp>
+      <p:pic>
+        <p:nvPicPr>
+          <p:cNvPr id="6" name="Picture 5" descr="A black and white square with white squares&#10;&#10;AI-generated content may be incorrect.">
+            <a:extLst>
+              <a:ext uri="{FF2B5EF4-FFF2-40B4-BE49-F238E27FC236}">
+                <a16:creationId xmlns:a16="http://schemas.microsoft.com/office/drawing/2014/main" id="{85C5245A-3614-EF5E-C4FC-E5C76321BAAA}"/>
+              </a:ext>
+            </a:extLst>
+          </p:cNvPr>
+          <p:cNvPicPr>
+            <a:picLocks noChangeAspect="1"/>
+          </p:cNvPicPr>
+          <p:nvPr/>
+        </p:nvPicPr>
+        <p:blipFill>
+          <a:blip r:embed="rId3">
+            <a:extLst>
+              <a:ext uri="{28A0092B-C50C-407E-A947-70E740481C1C}">
+                <a14:useLocalDpi xmlns:a14="http://schemas.microsoft.com/office/drawing/2010/main" val="0"/>
+              </a:ext>
+            </a:extLst>
+          </a:blip>
+          <a:stretch>
+            <a:fillRect/>
+          </a:stretch>
+        </p:blipFill>
+        <p:spPr>
+          <a:xfrm>
+            <a:off x="4029309" y="1821393"/>
+            <a:ext cx="3327547" cy="3327547"/>
+          </a:xfrm>
+          <a:prstGeom prst="rect">
+            <a:avLst/>
+          </a:prstGeom>
+        </p:spPr>
+      </p:pic>
+    </p:spTree>
+    <p:extLst>
+      <p:ext uri="{BB962C8B-B14F-4D97-AF65-F5344CB8AC3E}">
+        <p14:creationId xmlns:p14="http://schemas.microsoft.com/office/powerpoint/2010/main" val="1739966096"/>
+      </p:ext>
+    </p:extLst>
+  </p:cSld>
+  <p:clrMapOvr>
+    <a:masterClrMapping/>
+  </p:clrMapOvr>
+</p:sld>
+</file>
+
+<file path=ppt/slides/slide12.xml><?xml version="1.0" encoding="utf-8"?>
+<p:sld xmlns:a="http://schemas.openxmlformats.org/drawingml/2006/main" xmlns:r="http://schemas.openxmlformats.org/officeDocument/2006/relationships" xmlns:p="http://schemas.openxmlformats.org/presentationml/2006/main">
+  <p:cSld>
+    <p:spTree>
+      <p:nvGrpSpPr>
+        <p:cNvPr id="1" name=""/>
+        <p:cNvGrpSpPr/>
+        <p:nvPr/>
+      </p:nvGrpSpPr>
+      <p:grpSpPr>
+        <a:xfrm>
+          <a:off x="0" y="0"/>
+          <a:ext cx="0" cy="0"/>
+          <a:chOff x="0" y="0"/>
+          <a:chExt cx="0" cy="0"/>
+        </a:xfrm>
+      </p:grpSpPr>
+      <p:pic>
+        <p:nvPicPr>
           <p:cNvPr id="10" name="Picture 9" descr="A pixelated image of a black and white square&#10;&#10;AI-generated content may be incorrect.">
             <a:extLst>
               <a:ext uri="{FF2B5EF4-FFF2-40B4-BE49-F238E27FC236}">
@@ -8965,7 +9373,7 @@
 </p:sld>
 </file>
 
-<file path=ppt/slides/slide11.xml><?xml version="1.0" encoding="utf-8"?>
+<file path=ppt/slides/slide13.xml><?xml version="1.0" encoding="utf-8"?>
 <p:sld xmlns:a="http://schemas.openxmlformats.org/drawingml/2006/main" xmlns:r="http://schemas.openxmlformats.org/officeDocument/2006/relationships" xmlns:p="http://schemas.openxmlformats.org/presentationml/2006/main">
   <p:cSld>
     <p:spTree>
@@ -9326,7 +9734,7 @@
 </p:sld>
 </file>
 
-<file path=ppt/slides/slide12.xml><?xml version="1.0" encoding="utf-8"?>
+<file path=ppt/slides/slide14.xml><?xml version="1.0" encoding="utf-8"?>
 <p:sld xmlns:a="http://schemas.openxmlformats.org/drawingml/2006/main" xmlns:r="http://schemas.openxmlformats.org/officeDocument/2006/relationships" xmlns:p="http://schemas.openxmlformats.org/presentationml/2006/main">
   <p:cSld>
     <p:spTree>
@@ -9905,7 +10313,7 @@
 </p:sld>
 </file>
 
-<file path=ppt/slides/slide13.xml><?xml version="1.0" encoding="utf-8"?>
+<file path=ppt/slides/slide15.xml><?xml version="1.0" encoding="utf-8"?>
 <p:sld xmlns:a="http://schemas.openxmlformats.org/drawingml/2006/main" xmlns:r="http://schemas.openxmlformats.org/officeDocument/2006/relationships" xmlns:p="http://schemas.openxmlformats.org/presentationml/2006/main">
   <p:cSld>
     <p:spTree>
@@ -10044,7 +10452,7 @@
 </p:sld>
 </file>
 
-<file path=ppt/slides/slide14.xml><?xml version="1.0" encoding="utf-8"?>
+<file path=ppt/slides/slide16.xml><?xml version="1.0" encoding="utf-8"?>
 <p:sld xmlns:a="http://schemas.openxmlformats.org/drawingml/2006/main" xmlns:r="http://schemas.openxmlformats.org/officeDocument/2006/relationships" xmlns:p="http://schemas.openxmlformats.org/presentationml/2006/main">
   <p:cSld>
     <p:spTree>
@@ -10491,7 +10899,7 @@
 </p:sld>
 </file>
 
-<file path=ppt/slides/slide15.xml><?xml version="1.0" encoding="utf-8"?>
+<file path=ppt/slides/slide17.xml><?xml version="1.0" encoding="utf-8"?>
 <p:sld xmlns:a="http://schemas.openxmlformats.org/drawingml/2006/main" xmlns:r="http://schemas.openxmlformats.org/officeDocument/2006/relationships" xmlns:p="http://schemas.openxmlformats.org/presentationml/2006/main">
   <p:cSld>
     <p:spTree>
@@ -10595,7 +11003,7 @@
 </p:sld>
 </file>
 
-<file path=ppt/slides/slide16.xml><?xml version="1.0" encoding="utf-8"?>
+<file path=ppt/slides/slide18.xml><?xml version="1.0" encoding="utf-8"?>
 <p:sld xmlns:a="http://schemas.openxmlformats.org/drawingml/2006/main" xmlns:r="http://schemas.openxmlformats.org/officeDocument/2006/relationships" xmlns:p="http://schemas.openxmlformats.org/presentationml/2006/main">
   <p:cSld>
     <p:spTree>
@@ -10907,7 +11315,7 @@
 </p:sld>
 </file>
 
-<file path=ppt/slides/slide17.xml><?xml version="1.0" encoding="utf-8"?>
+<file path=ppt/slides/slide19.xml><?xml version="1.0" encoding="utf-8"?>
 <p:sld xmlns:a="http://schemas.openxmlformats.org/drawingml/2006/main" xmlns:r="http://schemas.openxmlformats.org/officeDocument/2006/relationships" xmlns:p="http://schemas.openxmlformats.org/presentationml/2006/main">
   <p:cSld>
     <p:spTree>
@@ -11429,7 +11837,1134 @@
 </p:sld>
 </file>
 
-<file path=ppt/slides/slide18.xml><?xml version="1.0" encoding="utf-8"?>
+<file path=ppt/slides/slide2.xml><?xml version="1.0" encoding="utf-8"?>
+<p:sld xmlns:a="http://schemas.openxmlformats.org/drawingml/2006/main" xmlns:r="http://schemas.openxmlformats.org/officeDocument/2006/relationships" xmlns:p="http://schemas.openxmlformats.org/presentationml/2006/main">
+  <p:cSld>
+    <p:spTree>
+      <p:nvGrpSpPr>
+        <p:cNvPr id="1" name=""/>
+        <p:cNvGrpSpPr/>
+        <p:nvPr/>
+      </p:nvGrpSpPr>
+      <p:grpSpPr>
+        <a:xfrm>
+          <a:off x="0" y="0"/>
+          <a:ext cx="0" cy="0"/>
+          <a:chOff x="0" y="0"/>
+          <a:chExt cx="0" cy="0"/>
+        </a:xfrm>
+      </p:grpSpPr>
+      <p:sp>
+        <p:nvSpPr>
+          <p:cNvPr id="4" name="Parallelogram 3">
+            <a:extLst>
+              <a:ext uri="{FF2B5EF4-FFF2-40B4-BE49-F238E27FC236}">
+                <a16:creationId xmlns:a16="http://schemas.microsoft.com/office/drawing/2014/main" id="{39C76FFE-92D0-7A78-91AA-05D103F732CA}"/>
+              </a:ext>
+            </a:extLst>
+          </p:cNvPr>
+          <p:cNvSpPr/>
+          <p:nvPr/>
+        </p:nvSpPr>
+        <p:spPr>
+          <a:xfrm>
+            <a:off x="3535427" y="4340353"/>
+            <a:ext cx="2927034" cy="838198"/>
+          </a:xfrm>
+          <a:prstGeom prst="parallelogram">
+            <a:avLst>
+              <a:gd name="adj" fmla="val 80000"/>
+            </a:avLst>
+          </a:prstGeom>
+          <a:solidFill>
+            <a:schemeClr val="bg2"/>
+          </a:solidFill>
+          <a:ln>
+            <a:noFill/>
+          </a:ln>
+        </p:spPr>
+        <p:style>
+          <a:lnRef idx="2">
+            <a:schemeClr val="accent1">
+              <a:shade val="15000"/>
+            </a:schemeClr>
+          </a:lnRef>
+          <a:fillRef idx="1">
+            <a:schemeClr val="accent1"/>
+          </a:fillRef>
+          <a:effectRef idx="0">
+            <a:schemeClr val="accent1"/>
+          </a:effectRef>
+          <a:fontRef idx="minor">
+            <a:schemeClr val="lt1"/>
+          </a:fontRef>
+        </p:style>
+        <p:txBody>
+          <a:bodyPr rtlCol="0" anchor="ctr"/>
+          <a:lstStyle/>
+          <a:p>
+            <a:pPr algn="ctr"/>
+            <a:endParaRPr lang="de-DE"/>
+          </a:p>
+        </p:txBody>
+      </p:sp>
+      <p:cxnSp>
+        <p:nvCxnSpPr>
+          <p:cNvPr id="5" name="Straight Arrow Connector 4">
+            <a:extLst>
+              <a:ext uri="{FF2B5EF4-FFF2-40B4-BE49-F238E27FC236}">
+                <a16:creationId xmlns:a16="http://schemas.microsoft.com/office/drawing/2014/main" id="{BB95E1C3-9EE5-1036-2D8B-4539291714DC}"/>
+              </a:ext>
+            </a:extLst>
+          </p:cNvPr>
+          <p:cNvCxnSpPr>
+            <a:cxnSpLocks/>
+          </p:cNvCxnSpPr>
+          <p:nvPr/>
+        </p:nvCxnSpPr>
+        <p:spPr>
+          <a:xfrm flipV="1">
+            <a:off x="4191001" y="2587752"/>
+            <a:ext cx="1514855" cy="1766533"/>
+          </a:xfrm>
+          <a:prstGeom prst="straightConnector1">
+            <a:avLst/>
+          </a:prstGeom>
+          <a:ln w="57150">
+            <a:solidFill>
+              <a:srgbClr val="FF0000"/>
+            </a:solidFill>
+            <a:tailEnd type="triangle"/>
+          </a:ln>
+        </p:spPr>
+        <p:style>
+          <a:lnRef idx="2">
+            <a:schemeClr val="accent1"/>
+          </a:lnRef>
+          <a:fillRef idx="0">
+            <a:schemeClr val="accent1"/>
+          </a:fillRef>
+          <a:effectRef idx="1">
+            <a:schemeClr val="accent1"/>
+          </a:effectRef>
+          <a:fontRef idx="minor">
+            <a:schemeClr val="tx1"/>
+          </a:fontRef>
+        </p:style>
+      </p:cxnSp>
+      <p:cxnSp>
+        <p:nvCxnSpPr>
+          <p:cNvPr id="6" name="Straight Arrow Connector 5">
+            <a:extLst>
+              <a:ext uri="{FF2B5EF4-FFF2-40B4-BE49-F238E27FC236}">
+                <a16:creationId xmlns:a16="http://schemas.microsoft.com/office/drawing/2014/main" id="{FAD3A6F5-B66A-7081-F2AB-A724E03D7711}"/>
+              </a:ext>
+            </a:extLst>
+          </p:cNvPr>
+          <p:cNvCxnSpPr>
+            <a:cxnSpLocks/>
+          </p:cNvCxnSpPr>
+          <p:nvPr/>
+        </p:nvCxnSpPr>
+        <p:spPr>
+          <a:xfrm flipV="1">
+            <a:off x="4191001" y="2231136"/>
+            <a:ext cx="7088" cy="2123149"/>
+          </a:xfrm>
+          <a:prstGeom prst="straightConnector1">
+            <a:avLst/>
+          </a:prstGeom>
+          <a:ln>
+            <a:solidFill>
+              <a:schemeClr val="tx1"/>
+            </a:solidFill>
+            <a:tailEnd type="triangle"/>
+          </a:ln>
+        </p:spPr>
+        <p:style>
+          <a:lnRef idx="2">
+            <a:schemeClr val="accent1"/>
+          </a:lnRef>
+          <a:fillRef idx="0">
+            <a:schemeClr val="accent1"/>
+          </a:fillRef>
+          <a:effectRef idx="1">
+            <a:schemeClr val="accent1"/>
+          </a:effectRef>
+          <a:fontRef idx="minor">
+            <a:schemeClr val="tx1"/>
+          </a:fontRef>
+        </p:style>
+      </p:cxnSp>
+      <p:cxnSp>
+        <p:nvCxnSpPr>
+          <p:cNvPr id="7" name="Straight Arrow Connector 6">
+            <a:extLst>
+              <a:ext uri="{FF2B5EF4-FFF2-40B4-BE49-F238E27FC236}">
+                <a16:creationId xmlns:a16="http://schemas.microsoft.com/office/drawing/2014/main" id="{F92EA0FA-0837-4F2F-2DA3-8655215382C7}"/>
+              </a:ext>
+            </a:extLst>
+          </p:cNvPr>
+          <p:cNvCxnSpPr>
+            <a:cxnSpLocks/>
+          </p:cNvCxnSpPr>
+          <p:nvPr/>
+        </p:nvCxnSpPr>
+        <p:spPr>
+          <a:xfrm>
+            <a:off x="4191001" y="4354285"/>
+            <a:ext cx="2547256" cy="0"/>
+          </a:xfrm>
+          <a:prstGeom prst="straightConnector1">
+            <a:avLst/>
+          </a:prstGeom>
+          <a:ln>
+            <a:solidFill>
+              <a:schemeClr val="tx1"/>
+            </a:solidFill>
+            <a:tailEnd type="triangle"/>
+          </a:ln>
+        </p:spPr>
+        <p:style>
+          <a:lnRef idx="2">
+            <a:schemeClr val="accent1"/>
+          </a:lnRef>
+          <a:fillRef idx="0">
+            <a:schemeClr val="accent1"/>
+          </a:fillRef>
+          <a:effectRef idx="1">
+            <a:schemeClr val="accent1"/>
+          </a:effectRef>
+          <a:fontRef idx="minor">
+            <a:schemeClr val="tx1"/>
+          </a:fontRef>
+        </p:style>
+      </p:cxnSp>
+      <mc:AlternateContent xmlns:mc="http://schemas.openxmlformats.org/markup-compatibility/2006">
+        <mc:Choice xmlns:a14="http://schemas.microsoft.com/office/drawing/2010/main" Requires="a14">
+          <p:sp>
+            <p:nvSpPr>
+              <p:cNvPr id="8" name="TextBox 7">
+                <a:extLst>
+                  <a:ext uri="{FF2B5EF4-FFF2-40B4-BE49-F238E27FC236}">
+                    <a16:creationId xmlns:a16="http://schemas.microsoft.com/office/drawing/2014/main" id="{E7DFFF80-BA5F-1D85-338A-2A83C8EB0451}"/>
+                  </a:ext>
+                </a:extLst>
+              </p:cNvPr>
+              <p:cNvSpPr txBox="1"/>
+              <p:nvPr/>
+            </p:nvSpPr>
+            <p:spPr>
+              <a:xfrm>
+                <a:off x="5327944" y="2249197"/>
+                <a:ext cx="1380634" cy="368499"/>
+              </a:xfrm>
+              <a:prstGeom prst="rect">
+                <a:avLst/>
+              </a:prstGeom>
+              <a:noFill/>
+            </p:spPr>
+            <p:txBody>
+              <a:bodyPr wrap="none" rtlCol="0">
+                <a:spAutoFit/>
+              </a:bodyPr>
+              <a:lstStyle/>
+              <a:p>
+                <a:r>
+                  <a:rPr lang="de-DE" sz="1600" dirty="0"/>
+                  <a:t>Magnitude </a:t>
+                </a:r>
+                <a14:m>
+                  <m:oMath xmlns:m="http://schemas.openxmlformats.org/officeDocument/2006/math">
+                    <m:r>
+                      <a:rPr lang="de-DE" sz="1600" b="0" i="1" smtClean="0">
+                        <a:latin typeface="Cambria Math" panose="02040503050406030204" pitchFamily="18" charset="0"/>
+                      </a:rPr>
+                      <m:t>|</m:t>
+                    </m:r>
+                    <m:acc>
+                      <m:accPr>
+                        <m:chr m:val="⃗"/>
+                        <m:ctrlPr>
+                          <a:rPr lang="de-DE" sz="1600" i="1">
+                            <a:latin typeface="Cambria Math" panose="02040503050406030204" pitchFamily="18" charset="0"/>
+                          </a:rPr>
+                        </m:ctrlPr>
+                      </m:accPr>
+                      <m:e>
+                        <m:r>
+                          <a:rPr lang="de-DE" sz="1600" i="1">
+                            <a:latin typeface="Cambria Math" panose="02040503050406030204" pitchFamily="18" charset="0"/>
+                          </a:rPr>
+                          <m:t>𝐼</m:t>
+                        </m:r>
+                      </m:e>
+                    </m:acc>
+                    <m:r>
+                      <a:rPr lang="de-DE" sz="1600" b="0" i="1" smtClean="0">
+                        <a:latin typeface="Cambria Math" panose="02040503050406030204" pitchFamily="18" charset="0"/>
+                      </a:rPr>
+                      <m:t>|</m:t>
+                    </m:r>
+                  </m:oMath>
+                </a14:m>
+                <a:endParaRPr lang="de-DE" sz="1600" dirty="0"/>
+              </a:p>
+            </p:txBody>
+          </p:sp>
+        </mc:Choice>
+        <mc:Fallback>
+          <p:sp>
+            <p:nvSpPr>
+              <p:cNvPr id="8" name="TextBox 7">
+                <a:extLst>
+                  <a:ext uri="{FF2B5EF4-FFF2-40B4-BE49-F238E27FC236}">
+                    <a16:creationId xmlns:a16="http://schemas.microsoft.com/office/drawing/2014/main" id="{E7DFFF80-BA5F-1D85-338A-2A83C8EB0451}"/>
+                  </a:ext>
+                </a:extLst>
+              </p:cNvPr>
+              <p:cNvSpPr txBox="1">
+                <a:spLocks noRot="1" noChangeAspect="1" noMove="1" noResize="1" noEditPoints="1" noAdjustHandles="1" noChangeArrowheads="1" noChangeShapeType="1" noTextEdit="1"/>
+              </p:cNvSpPr>
+              <p:nvPr/>
+            </p:nvSpPr>
+            <p:spPr>
+              <a:xfrm>
+                <a:off x="5327944" y="2249197"/>
+                <a:ext cx="1380634" cy="368499"/>
+              </a:xfrm>
+              <a:prstGeom prst="rect">
+                <a:avLst/>
+              </a:prstGeom>
+              <a:blipFill>
+                <a:blip r:embed="rId2"/>
+                <a:stretch>
+                  <a:fillRect l="-2212" t="-15000" r="-14159" b="-21667"/>
+                </a:stretch>
+              </a:blipFill>
+            </p:spPr>
+            <p:txBody>
+              <a:bodyPr/>
+              <a:lstStyle/>
+              <a:p>
+                <a:r>
+                  <a:rPr lang="de-DE">
+                    <a:noFill/>
+                  </a:rPr>
+                  <a:t> </a:t>
+                </a:r>
+              </a:p>
+            </p:txBody>
+          </p:sp>
+        </mc:Fallback>
+      </mc:AlternateContent>
+      <p:cxnSp>
+        <p:nvCxnSpPr>
+          <p:cNvPr id="9" name="Straight Arrow Connector 8">
+            <a:extLst>
+              <a:ext uri="{FF2B5EF4-FFF2-40B4-BE49-F238E27FC236}">
+                <a16:creationId xmlns:a16="http://schemas.microsoft.com/office/drawing/2014/main" id="{A7A76593-E902-A3CE-0B98-A8C0BF337DB9}"/>
+              </a:ext>
+            </a:extLst>
+          </p:cNvPr>
+          <p:cNvCxnSpPr>
+            <a:cxnSpLocks/>
+          </p:cNvCxnSpPr>
+          <p:nvPr/>
+        </p:nvCxnSpPr>
+        <p:spPr>
+          <a:xfrm flipV="1">
+            <a:off x="5705856" y="2587752"/>
+            <a:ext cx="0" cy="2177974"/>
+          </a:xfrm>
+          <a:prstGeom prst="straightConnector1">
+            <a:avLst/>
+          </a:prstGeom>
+          <a:ln>
+            <a:solidFill>
+              <a:srgbClr val="0070C0"/>
+            </a:solidFill>
+            <a:prstDash val="dash"/>
+            <a:tailEnd type="none"/>
+          </a:ln>
+        </p:spPr>
+        <p:style>
+          <a:lnRef idx="2">
+            <a:schemeClr val="accent1"/>
+          </a:lnRef>
+          <a:fillRef idx="0">
+            <a:schemeClr val="accent1"/>
+          </a:fillRef>
+          <a:effectRef idx="1">
+            <a:schemeClr val="accent1"/>
+          </a:effectRef>
+          <a:fontRef idx="minor">
+            <a:schemeClr val="tx1"/>
+          </a:fontRef>
+        </p:style>
+      </p:cxnSp>
+      <mc:AlternateContent xmlns:mc="http://schemas.openxmlformats.org/markup-compatibility/2006">
+        <mc:Choice xmlns:a14="http://schemas.microsoft.com/office/drawing/2010/main" Requires="a14">
+          <p:sp>
+            <p:nvSpPr>
+              <p:cNvPr id="10" name="TextBox 9">
+                <a:extLst>
+                  <a:ext uri="{FF2B5EF4-FFF2-40B4-BE49-F238E27FC236}">
+                    <a16:creationId xmlns:a16="http://schemas.microsoft.com/office/drawing/2014/main" id="{2BAECC3F-8D8E-6D59-B362-C47E6AAB76AE}"/>
+                  </a:ext>
+                </a:extLst>
+              </p:cNvPr>
+              <p:cNvSpPr txBox="1"/>
+              <p:nvPr/>
+            </p:nvSpPr>
+            <p:spPr>
+              <a:xfrm>
+                <a:off x="5280134" y="3429000"/>
+                <a:ext cx="1179534" cy="338554"/>
+              </a:xfrm>
+              <a:prstGeom prst="rect">
+                <a:avLst/>
+              </a:prstGeom>
+              <a:noFill/>
+            </p:spPr>
+            <p:txBody>
+              <a:bodyPr wrap="square" rtlCol="0">
+                <a:spAutoFit/>
+              </a:bodyPr>
+              <a:lstStyle/>
+              <a:p>
+                <a14:m>
+                  <m:oMathPara xmlns:m="http://schemas.openxmlformats.org/officeDocument/2006/math">
+                    <m:oMathParaPr>
+                      <m:jc m:val="centerGroup"/>
+                    </m:oMathParaPr>
+                    <m:oMath xmlns:m="http://schemas.openxmlformats.org/officeDocument/2006/math">
+                      <m:sSub>
+                        <m:sSubPr>
+                          <m:ctrlPr>
+                            <a:rPr lang="de-DE" sz="1600" i="1" smtClean="0">
+                              <a:latin typeface="Cambria Math" panose="02040503050406030204" pitchFamily="18" charset="0"/>
+                            </a:rPr>
+                          </m:ctrlPr>
+                        </m:sSubPr>
+                        <m:e>
+                          <m:r>
+                            <m:rPr>
+                              <m:sty m:val="p"/>
+                            </m:rPr>
+                            <a:rPr lang="de-DE" sz="1600" b="0" i="1" smtClean="0">
+                              <a:latin typeface="Cambria Math" panose="02040503050406030204" pitchFamily="18" charset="0"/>
+                            </a:rPr>
+                            <m:t>I</m:t>
+                          </m:r>
+                        </m:e>
+                        <m:sub>
+                          <m:r>
+                            <m:rPr>
+                              <m:sty m:val="p"/>
+                            </m:rPr>
+                            <a:rPr lang="de-DE" sz="1600" b="0" i="1" smtClean="0">
+                              <a:latin typeface="Cambria Math" panose="02040503050406030204" pitchFamily="18" charset="0"/>
+                            </a:rPr>
+                            <m:t>z</m:t>
+                          </m:r>
+                        </m:sub>
+                      </m:sSub>
+                    </m:oMath>
+                  </m:oMathPara>
+                </a14:m>
+                <a:endParaRPr lang="de-DE" sz="1600" dirty="0"/>
+              </a:p>
+            </p:txBody>
+          </p:sp>
+        </mc:Choice>
+        <mc:Fallback>
+          <p:sp>
+            <p:nvSpPr>
+              <p:cNvPr id="10" name="TextBox 9">
+                <a:extLst>
+                  <a:ext uri="{FF2B5EF4-FFF2-40B4-BE49-F238E27FC236}">
+                    <a16:creationId xmlns:a16="http://schemas.microsoft.com/office/drawing/2014/main" id="{2BAECC3F-8D8E-6D59-B362-C47E6AAB76AE}"/>
+                  </a:ext>
+                </a:extLst>
+              </p:cNvPr>
+              <p:cNvSpPr txBox="1">
+                <a:spLocks noRot="1" noChangeAspect="1" noMove="1" noResize="1" noEditPoints="1" noAdjustHandles="1" noChangeArrowheads="1" noChangeShapeType="1" noTextEdit="1"/>
+              </p:cNvSpPr>
+              <p:nvPr/>
+            </p:nvSpPr>
+            <p:spPr>
+              <a:xfrm>
+                <a:off x="5280134" y="3429000"/>
+                <a:ext cx="1179534" cy="338554"/>
+              </a:xfrm>
+              <a:prstGeom prst="rect">
+                <a:avLst/>
+              </a:prstGeom>
+              <a:blipFill>
+                <a:blip r:embed="rId3"/>
+                <a:stretch>
+                  <a:fillRect/>
+                </a:stretch>
+              </a:blipFill>
+            </p:spPr>
+            <p:txBody>
+              <a:bodyPr/>
+              <a:lstStyle/>
+              <a:p>
+                <a:r>
+                  <a:rPr lang="de-DE">
+                    <a:noFill/>
+                  </a:rPr>
+                  <a:t> </a:t>
+                </a:r>
+              </a:p>
+            </p:txBody>
+          </p:sp>
+        </mc:Fallback>
+      </mc:AlternateContent>
+      <p:sp>
+        <p:nvSpPr>
+          <p:cNvPr id="11" name="TextBox 10">
+            <a:extLst>
+              <a:ext uri="{FF2B5EF4-FFF2-40B4-BE49-F238E27FC236}">
+                <a16:creationId xmlns:a16="http://schemas.microsoft.com/office/drawing/2014/main" id="{D7217EF3-C88E-30B8-BC36-B906D79FF55C}"/>
+              </a:ext>
+            </a:extLst>
+          </p:cNvPr>
+          <p:cNvSpPr txBox="1"/>
+          <p:nvPr/>
+        </p:nvSpPr>
+        <p:spPr>
+          <a:xfrm>
+            <a:off x="6609527" y="4294409"/>
+            <a:ext cx="261257" cy="338554"/>
+          </a:xfrm>
+          <a:prstGeom prst="rect">
+            <a:avLst/>
+          </a:prstGeom>
+          <a:noFill/>
+        </p:spPr>
+        <p:txBody>
+          <a:bodyPr wrap="square" rtlCol="0">
+            <a:spAutoFit/>
+          </a:bodyPr>
+          <a:lstStyle/>
+          <a:p>
+            <a:r>
+              <a:rPr lang="de-DE" sz="1600" dirty="0"/>
+              <a:t>y</a:t>
+            </a:r>
+          </a:p>
+        </p:txBody>
+      </p:sp>
+      <p:sp>
+        <p:nvSpPr>
+          <p:cNvPr id="12" name="TextBox 11">
+            <a:extLst>
+              <a:ext uri="{FF2B5EF4-FFF2-40B4-BE49-F238E27FC236}">
+                <a16:creationId xmlns:a16="http://schemas.microsoft.com/office/drawing/2014/main" id="{800E7AC8-5BD4-E9A7-2092-2B9DC2390412}"/>
+              </a:ext>
+            </a:extLst>
+          </p:cNvPr>
+          <p:cNvSpPr txBox="1"/>
+          <p:nvPr/>
+        </p:nvSpPr>
+        <p:spPr>
+          <a:xfrm>
+            <a:off x="3870778" y="2061859"/>
+            <a:ext cx="261257" cy="338554"/>
+          </a:xfrm>
+          <a:prstGeom prst="rect">
+            <a:avLst/>
+          </a:prstGeom>
+          <a:noFill/>
+        </p:spPr>
+        <p:txBody>
+          <a:bodyPr wrap="square" rtlCol="0">
+            <a:spAutoFit/>
+          </a:bodyPr>
+          <a:lstStyle/>
+          <a:p>
+            <a:r>
+              <a:rPr lang="de-DE" sz="1600" dirty="0"/>
+              <a:t>z</a:t>
+            </a:r>
+          </a:p>
+        </p:txBody>
+      </p:sp>
+      <mc:AlternateContent xmlns:mc="http://schemas.openxmlformats.org/markup-compatibility/2006">
+        <mc:Choice xmlns:a14="http://schemas.microsoft.com/office/drawing/2010/main" Requires="a14">
+          <p:sp>
+            <p:nvSpPr>
+              <p:cNvPr id="13" name="TextBox 12">
+                <a:extLst>
+                  <a:ext uri="{FF2B5EF4-FFF2-40B4-BE49-F238E27FC236}">
+                    <a16:creationId xmlns:a16="http://schemas.microsoft.com/office/drawing/2014/main" id="{9AF231E4-AC99-29D0-C272-A01699C4908A}"/>
+                  </a:ext>
+                </a:extLst>
+              </p:cNvPr>
+              <p:cNvSpPr txBox="1"/>
+              <p:nvPr/>
+            </p:nvSpPr>
+            <p:spPr>
+              <a:xfrm>
+                <a:off x="4765827" y="2879110"/>
+                <a:ext cx="326628" cy="402931"/>
+              </a:xfrm>
+              <a:prstGeom prst="rect">
+                <a:avLst/>
+              </a:prstGeom>
+              <a:noFill/>
+            </p:spPr>
+            <p:txBody>
+              <a:bodyPr wrap="none" rtlCol="0">
+                <a:spAutoFit/>
+              </a:bodyPr>
+              <a:lstStyle/>
+              <a:p>
+                <a14:m>
+                  <m:oMathPara xmlns:m="http://schemas.openxmlformats.org/officeDocument/2006/math">
+                    <m:oMathParaPr>
+                      <m:jc m:val="centerGroup"/>
+                    </m:oMathParaPr>
+                    <m:oMath xmlns:m="http://schemas.openxmlformats.org/officeDocument/2006/math">
+                      <m:acc>
+                        <m:accPr>
+                          <m:chr m:val="⃗"/>
+                          <m:ctrlPr>
+                            <a:rPr lang="de-DE" smtClean="0">
+                              <a:latin typeface="Cambria Math" panose="02040503050406030204" pitchFamily="18" charset="0"/>
+                            </a:rPr>
+                          </m:ctrlPr>
+                        </m:accPr>
+                        <m:e>
+                          <m:r>
+                            <a:rPr lang="de-DE" i="1">
+                              <a:latin typeface="Cambria Math" panose="02040503050406030204" pitchFamily="18" charset="0"/>
+                            </a:rPr>
+                            <m:t>𝐼</m:t>
+                          </m:r>
+                        </m:e>
+                      </m:acc>
+                    </m:oMath>
+                  </m:oMathPara>
+                </a14:m>
+                <a:endParaRPr lang="de-DE" dirty="0"/>
+              </a:p>
+            </p:txBody>
+          </p:sp>
+        </mc:Choice>
+        <mc:Fallback>
+          <p:sp>
+            <p:nvSpPr>
+              <p:cNvPr id="13" name="TextBox 12">
+                <a:extLst>
+                  <a:ext uri="{FF2B5EF4-FFF2-40B4-BE49-F238E27FC236}">
+                    <a16:creationId xmlns:a16="http://schemas.microsoft.com/office/drawing/2014/main" id="{9AF231E4-AC99-29D0-C272-A01699C4908A}"/>
+                  </a:ext>
+                </a:extLst>
+              </p:cNvPr>
+              <p:cNvSpPr txBox="1">
+                <a:spLocks noRot="1" noChangeAspect="1" noMove="1" noResize="1" noEditPoints="1" noAdjustHandles="1" noChangeArrowheads="1" noChangeShapeType="1" noTextEdit="1"/>
+              </p:cNvSpPr>
+              <p:nvPr/>
+            </p:nvSpPr>
+            <p:spPr>
+              <a:xfrm>
+                <a:off x="4765827" y="2879110"/>
+                <a:ext cx="326628" cy="402931"/>
+              </a:xfrm>
+              <a:prstGeom prst="rect">
+                <a:avLst/>
+              </a:prstGeom>
+              <a:blipFill>
+                <a:blip r:embed="rId4"/>
+                <a:stretch>
+                  <a:fillRect t="-24242" r="-26415"/>
+                </a:stretch>
+              </a:blipFill>
+            </p:spPr>
+            <p:txBody>
+              <a:bodyPr/>
+              <a:lstStyle/>
+              <a:p>
+                <a:r>
+                  <a:rPr lang="de-DE">
+                    <a:noFill/>
+                  </a:rPr>
+                  <a:t> </a:t>
+                </a:r>
+              </a:p>
+            </p:txBody>
+          </p:sp>
+        </mc:Fallback>
+      </mc:AlternateContent>
+      <mc:AlternateContent xmlns:mc="http://schemas.openxmlformats.org/markup-compatibility/2006">
+        <mc:Choice xmlns:a14="http://schemas.microsoft.com/office/drawing/2010/main" Requires="a14">
+          <p:sp>
+            <p:nvSpPr>
+              <p:cNvPr id="14" name="TextBox 13">
+                <a:extLst>
+                  <a:ext uri="{FF2B5EF4-FFF2-40B4-BE49-F238E27FC236}">
+                    <a16:creationId xmlns:a16="http://schemas.microsoft.com/office/drawing/2014/main" id="{AFB646A9-C8BF-4686-23D9-E9FC8C86EEB8}"/>
+                  </a:ext>
+                </a:extLst>
+              </p:cNvPr>
+              <p:cNvSpPr txBox="1"/>
+              <p:nvPr/>
+            </p:nvSpPr>
+            <p:spPr>
+              <a:xfrm>
+                <a:off x="5497657" y="4433398"/>
+                <a:ext cx="1059457" cy="338554"/>
+              </a:xfrm>
+              <a:prstGeom prst="rect">
+                <a:avLst/>
+              </a:prstGeom>
+              <a:noFill/>
+            </p:spPr>
+            <p:txBody>
+              <a:bodyPr wrap="square" rtlCol="0">
+                <a:spAutoFit/>
+              </a:bodyPr>
+              <a:lstStyle/>
+              <a:p>
+                <a14:m>
+                  <m:oMathPara xmlns:m="http://schemas.openxmlformats.org/officeDocument/2006/math">
+                    <m:oMathParaPr>
+                      <m:jc m:val="centerGroup"/>
+                    </m:oMathParaPr>
+                    <m:oMath xmlns:m="http://schemas.openxmlformats.org/officeDocument/2006/math">
+                      <m:sSub>
+                        <m:sSubPr>
+                          <m:ctrlPr>
+                            <a:rPr lang="de-DE" sz="1600" i="1" smtClean="0">
+                              <a:latin typeface="Cambria Math" panose="02040503050406030204" pitchFamily="18" charset="0"/>
+                            </a:rPr>
+                          </m:ctrlPr>
+                        </m:sSubPr>
+                        <m:e>
+                          <m:r>
+                            <m:rPr>
+                              <m:sty m:val="p"/>
+                            </m:rPr>
+                            <a:rPr lang="de-DE" sz="1600" b="0" i="1" smtClean="0">
+                              <a:latin typeface="Cambria Math" panose="02040503050406030204" pitchFamily="18" charset="0"/>
+                            </a:rPr>
+                            <m:t>I</m:t>
+                          </m:r>
+                        </m:e>
+                        <m:sub>
+                          <m:r>
+                            <m:rPr>
+                              <m:sty m:val="p"/>
+                            </m:rPr>
+                            <a:rPr lang="de-DE" sz="1600" b="0" i="1" smtClean="0">
+                              <a:latin typeface="Cambria Math" panose="02040503050406030204" pitchFamily="18" charset="0"/>
+                            </a:rPr>
+                            <m:t>x</m:t>
+                          </m:r>
+                        </m:sub>
+                      </m:sSub>
+                    </m:oMath>
+                  </m:oMathPara>
+                </a14:m>
+                <a:endParaRPr lang="de-DE" sz="1600" dirty="0"/>
+              </a:p>
+            </p:txBody>
+          </p:sp>
+        </mc:Choice>
+        <mc:Fallback>
+          <p:sp>
+            <p:nvSpPr>
+              <p:cNvPr id="14" name="TextBox 13">
+                <a:extLst>
+                  <a:ext uri="{FF2B5EF4-FFF2-40B4-BE49-F238E27FC236}">
+                    <a16:creationId xmlns:a16="http://schemas.microsoft.com/office/drawing/2014/main" id="{AFB646A9-C8BF-4686-23D9-E9FC8C86EEB8}"/>
+                  </a:ext>
+                </a:extLst>
+              </p:cNvPr>
+              <p:cNvSpPr txBox="1">
+                <a:spLocks noRot="1" noChangeAspect="1" noMove="1" noResize="1" noEditPoints="1" noAdjustHandles="1" noChangeArrowheads="1" noChangeShapeType="1" noTextEdit="1"/>
+              </p:cNvSpPr>
+              <p:nvPr/>
+            </p:nvSpPr>
+            <p:spPr>
+              <a:xfrm>
+                <a:off x="5497657" y="4433398"/>
+                <a:ext cx="1059457" cy="338554"/>
+              </a:xfrm>
+              <a:prstGeom prst="rect">
+                <a:avLst/>
+              </a:prstGeom>
+              <a:blipFill>
+                <a:blip r:embed="rId5"/>
+                <a:stretch>
+                  <a:fillRect/>
+                </a:stretch>
+              </a:blipFill>
+            </p:spPr>
+            <p:txBody>
+              <a:bodyPr/>
+              <a:lstStyle/>
+              <a:p>
+                <a:r>
+                  <a:rPr lang="de-DE">
+                    <a:noFill/>
+                  </a:rPr>
+                  <a:t> </a:t>
+                </a:r>
+              </a:p>
+            </p:txBody>
+          </p:sp>
+        </mc:Fallback>
+      </mc:AlternateContent>
+      <p:cxnSp>
+        <p:nvCxnSpPr>
+          <p:cNvPr id="15" name="Straight Arrow Connector 14">
+            <a:extLst>
+              <a:ext uri="{FF2B5EF4-FFF2-40B4-BE49-F238E27FC236}">
+                <a16:creationId xmlns:a16="http://schemas.microsoft.com/office/drawing/2014/main" id="{F9DF3B43-8E7D-2141-31FC-D7BF71A7AC56}"/>
+              </a:ext>
+            </a:extLst>
+          </p:cNvPr>
+          <p:cNvCxnSpPr>
+            <a:cxnSpLocks/>
+          </p:cNvCxnSpPr>
+          <p:nvPr/>
+        </p:nvCxnSpPr>
+        <p:spPr>
+          <a:xfrm flipH="1">
+            <a:off x="3440774" y="4354285"/>
+            <a:ext cx="750084" cy="940834"/>
+          </a:xfrm>
+          <a:prstGeom prst="straightConnector1">
+            <a:avLst/>
+          </a:prstGeom>
+          <a:ln>
+            <a:solidFill>
+              <a:schemeClr val="tx1"/>
+            </a:solidFill>
+            <a:tailEnd type="triangle"/>
+          </a:ln>
+        </p:spPr>
+        <p:style>
+          <a:lnRef idx="2">
+            <a:schemeClr val="accent1"/>
+          </a:lnRef>
+          <a:fillRef idx="0">
+            <a:schemeClr val="accent1"/>
+          </a:fillRef>
+          <a:effectRef idx="1">
+            <a:schemeClr val="accent1"/>
+          </a:effectRef>
+          <a:fontRef idx="minor">
+            <a:schemeClr val="tx1"/>
+          </a:fontRef>
+        </p:style>
+      </p:cxnSp>
+      <p:sp>
+        <p:nvSpPr>
+          <p:cNvPr id="16" name="TextBox 15">
+            <a:extLst>
+              <a:ext uri="{FF2B5EF4-FFF2-40B4-BE49-F238E27FC236}">
+                <a16:creationId xmlns:a16="http://schemas.microsoft.com/office/drawing/2014/main" id="{C0781545-C1DC-7DAE-6D57-FBC19074242F}"/>
+              </a:ext>
+            </a:extLst>
+          </p:cNvPr>
+          <p:cNvSpPr txBox="1"/>
+          <p:nvPr/>
+        </p:nvSpPr>
+        <p:spPr>
+          <a:xfrm>
+            <a:off x="3136284" y="5178551"/>
+            <a:ext cx="261257" cy="338554"/>
+          </a:xfrm>
+          <a:prstGeom prst="rect">
+            <a:avLst/>
+          </a:prstGeom>
+          <a:noFill/>
+        </p:spPr>
+        <p:txBody>
+          <a:bodyPr wrap="square" rtlCol="0">
+            <a:spAutoFit/>
+          </a:bodyPr>
+          <a:lstStyle/>
+          <a:p>
+            <a:r>
+              <a:rPr lang="de-DE" sz="1600" dirty="0"/>
+              <a:t>x</a:t>
+            </a:r>
+          </a:p>
+        </p:txBody>
+      </p:sp>
+      <p:cxnSp>
+        <p:nvCxnSpPr>
+          <p:cNvPr id="17" name="Straight Connector 16">
+            <a:extLst>
+              <a:ext uri="{FF2B5EF4-FFF2-40B4-BE49-F238E27FC236}">
+                <a16:creationId xmlns:a16="http://schemas.microsoft.com/office/drawing/2014/main" id="{5FA5A84A-7606-B1A1-5EA9-78ECE8E5A08A}"/>
+              </a:ext>
+            </a:extLst>
+          </p:cNvPr>
+          <p:cNvCxnSpPr>
+            <a:cxnSpLocks/>
+          </p:cNvCxnSpPr>
+          <p:nvPr/>
+        </p:nvCxnSpPr>
+        <p:spPr>
+          <a:xfrm flipV="1">
+            <a:off x="3870778" y="4773385"/>
+            <a:ext cx="1834935" cy="0"/>
+          </a:xfrm>
+          <a:prstGeom prst="line">
+            <a:avLst/>
+          </a:prstGeom>
+          <a:ln>
+            <a:solidFill>
+              <a:srgbClr val="FFC000"/>
+            </a:solidFill>
+            <a:prstDash val="dash"/>
+          </a:ln>
+        </p:spPr>
+        <p:style>
+          <a:lnRef idx="2">
+            <a:schemeClr val="accent1"/>
+          </a:lnRef>
+          <a:fillRef idx="0">
+            <a:schemeClr val="accent1"/>
+          </a:fillRef>
+          <a:effectRef idx="1">
+            <a:schemeClr val="accent1"/>
+          </a:effectRef>
+          <a:fontRef idx="minor">
+            <a:schemeClr val="tx1"/>
+          </a:fontRef>
+        </p:style>
+      </p:cxnSp>
+      <p:cxnSp>
+        <p:nvCxnSpPr>
+          <p:cNvPr id="18" name="Straight Connector 17">
+            <a:extLst>
+              <a:ext uri="{FF2B5EF4-FFF2-40B4-BE49-F238E27FC236}">
+                <a16:creationId xmlns:a16="http://schemas.microsoft.com/office/drawing/2014/main" id="{2A821878-DCB8-D14F-F761-1FD10B8937D8}"/>
+              </a:ext>
+            </a:extLst>
+          </p:cNvPr>
+          <p:cNvCxnSpPr>
+            <a:cxnSpLocks/>
+          </p:cNvCxnSpPr>
+          <p:nvPr/>
+        </p:nvCxnSpPr>
+        <p:spPr>
+          <a:xfrm flipV="1">
+            <a:off x="5708507" y="4341651"/>
+            <a:ext cx="332709" cy="412134"/>
+          </a:xfrm>
+          <a:prstGeom prst="line">
+            <a:avLst/>
+          </a:prstGeom>
+          <a:ln>
+            <a:solidFill>
+              <a:srgbClr val="7030A0"/>
+            </a:solidFill>
+            <a:prstDash val="dash"/>
+          </a:ln>
+        </p:spPr>
+        <p:style>
+          <a:lnRef idx="2">
+            <a:schemeClr val="accent1"/>
+          </a:lnRef>
+          <a:fillRef idx="0">
+            <a:schemeClr val="accent1"/>
+          </a:fillRef>
+          <a:effectRef idx="1">
+            <a:schemeClr val="accent1"/>
+          </a:effectRef>
+          <a:fontRef idx="minor">
+            <a:schemeClr val="tx1"/>
+          </a:fontRef>
+        </p:style>
+      </p:cxnSp>
+      <p:cxnSp>
+        <p:nvCxnSpPr>
+          <p:cNvPr id="19" name="Straight Arrow Connector 18">
+            <a:extLst>
+              <a:ext uri="{FF2B5EF4-FFF2-40B4-BE49-F238E27FC236}">
+                <a16:creationId xmlns:a16="http://schemas.microsoft.com/office/drawing/2014/main" id="{59A4A076-5F64-8F19-D712-8DAB5E325041}"/>
+              </a:ext>
+            </a:extLst>
+          </p:cNvPr>
+          <p:cNvCxnSpPr/>
+          <p:nvPr/>
+        </p:nvCxnSpPr>
+        <p:spPr>
+          <a:xfrm>
+            <a:off x="4198089" y="4354285"/>
+            <a:ext cx="1507624" cy="399500"/>
+          </a:xfrm>
+          <a:prstGeom prst="straightConnector1">
+            <a:avLst/>
+          </a:prstGeom>
+          <a:ln w="38100">
+            <a:solidFill>
+              <a:schemeClr val="bg2">
+                <a:lumMod val="90000"/>
+              </a:schemeClr>
+            </a:solidFill>
+            <a:tailEnd type="triangle"/>
+          </a:ln>
+        </p:spPr>
+        <p:style>
+          <a:lnRef idx="2">
+            <a:schemeClr val="accent1"/>
+          </a:lnRef>
+          <a:fillRef idx="0">
+            <a:schemeClr val="accent1"/>
+          </a:fillRef>
+          <a:effectRef idx="1">
+            <a:schemeClr val="accent1"/>
+          </a:effectRef>
+          <a:fontRef idx="minor">
+            <a:schemeClr val="tx1"/>
+          </a:fontRef>
+        </p:style>
+      </p:cxnSp>
+      <mc:AlternateContent xmlns:mc="http://schemas.openxmlformats.org/markup-compatibility/2006">
+        <mc:Choice xmlns:a14="http://schemas.microsoft.com/office/drawing/2010/main" Requires="a14">
+          <p:sp>
+            <p:nvSpPr>
+              <p:cNvPr id="20" name="TextBox 19">
+                <a:extLst>
+                  <a:ext uri="{FF2B5EF4-FFF2-40B4-BE49-F238E27FC236}">
+                    <a16:creationId xmlns:a16="http://schemas.microsoft.com/office/drawing/2014/main" id="{C045A5E1-BCBB-B960-3342-F5AACA64CDA1}"/>
+                  </a:ext>
+                </a:extLst>
+              </p:cNvPr>
+              <p:cNvSpPr txBox="1"/>
+              <p:nvPr/>
+            </p:nvSpPr>
+            <p:spPr>
+              <a:xfrm>
+                <a:off x="4178152" y="4731364"/>
+                <a:ext cx="1059457" cy="361189"/>
+              </a:xfrm>
+              <a:prstGeom prst="rect">
+                <a:avLst/>
+              </a:prstGeom>
+              <a:noFill/>
+            </p:spPr>
+            <p:txBody>
+              <a:bodyPr wrap="square" rtlCol="0">
+                <a:spAutoFit/>
+              </a:bodyPr>
+              <a:lstStyle/>
+              <a:p>
+                <a14:m>
+                  <m:oMathPara xmlns:m="http://schemas.openxmlformats.org/officeDocument/2006/math">
+                    <m:oMathParaPr>
+                      <m:jc m:val="centerGroup"/>
+                    </m:oMathParaPr>
+                    <m:oMath xmlns:m="http://schemas.openxmlformats.org/officeDocument/2006/math">
+                      <m:sSub>
+                        <m:sSubPr>
+                          <m:ctrlPr>
+                            <a:rPr lang="de-DE" sz="1600" i="1" smtClean="0">
+                              <a:latin typeface="Cambria Math" panose="02040503050406030204" pitchFamily="18" charset="0"/>
+                            </a:rPr>
+                          </m:ctrlPr>
+                        </m:sSubPr>
+                        <m:e>
+                          <m:r>
+                            <m:rPr>
+                              <m:sty m:val="p"/>
+                            </m:rPr>
+                            <a:rPr lang="de-DE" sz="1600" b="0" i="1" smtClean="0">
+                              <a:latin typeface="Cambria Math" panose="02040503050406030204" pitchFamily="18" charset="0"/>
+                            </a:rPr>
+                            <m:t>I</m:t>
+                          </m:r>
+                        </m:e>
+                        <m:sub>
+                          <m:r>
+                            <m:rPr>
+                              <m:sty m:val="p"/>
+                            </m:rPr>
+                            <a:rPr lang="de-DE" sz="1600" b="0" i="1" smtClean="0">
+                              <a:latin typeface="Cambria Math" panose="02040503050406030204" pitchFamily="18" charset="0"/>
+                            </a:rPr>
+                            <m:t>y</m:t>
+                          </m:r>
+                        </m:sub>
+                      </m:sSub>
+                    </m:oMath>
+                  </m:oMathPara>
+                </a14:m>
+                <a:endParaRPr lang="de-DE" sz="1600" dirty="0"/>
+              </a:p>
+            </p:txBody>
+          </p:sp>
+        </mc:Choice>
+        <mc:Fallback>
+          <p:sp>
+            <p:nvSpPr>
+              <p:cNvPr id="20" name="TextBox 19">
+                <a:extLst>
+                  <a:ext uri="{FF2B5EF4-FFF2-40B4-BE49-F238E27FC236}">
+                    <a16:creationId xmlns:a16="http://schemas.microsoft.com/office/drawing/2014/main" id="{C045A5E1-BCBB-B960-3342-F5AACA64CDA1}"/>
+                  </a:ext>
+                </a:extLst>
+              </p:cNvPr>
+              <p:cNvSpPr txBox="1">
+                <a:spLocks noRot="1" noChangeAspect="1" noMove="1" noResize="1" noEditPoints="1" noAdjustHandles="1" noChangeArrowheads="1" noChangeShapeType="1" noTextEdit="1"/>
+              </p:cNvSpPr>
+              <p:nvPr/>
+            </p:nvSpPr>
+            <p:spPr>
+              <a:xfrm>
+                <a:off x="4178152" y="4731364"/>
+                <a:ext cx="1059457" cy="361189"/>
+              </a:xfrm>
+              <a:prstGeom prst="rect">
+                <a:avLst/>
+              </a:prstGeom>
+              <a:blipFill>
+                <a:blip r:embed="rId6"/>
+                <a:stretch>
+                  <a:fillRect b="-3390"/>
+                </a:stretch>
+              </a:blipFill>
+            </p:spPr>
+            <p:txBody>
+              <a:bodyPr/>
+              <a:lstStyle/>
+              <a:p>
+                <a:r>
+                  <a:rPr lang="de-DE">
+                    <a:noFill/>
+                  </a:rPr>
+                  <a:t> </a:t>
+                </a:r>
+              </a:p>
+            </p:txBody>
+          </p:sp>
+        </mc:Fallback>
+      </mc:AlternateContent>
+    </p:spTree>
+    <p:extLst>
+      <p:ext uri="{BB962C8B-B14F-4D97-AF65-F5344CB8AC3E}">
+        <p14:creationId xmlns:p14="http://schemas.microsoft.com/office/powerpoint/2010/main" val="3540731951"/>
+      </p:ext>
+    </p:extLst>
+  </p:cSld>
+  <p:clrMapOvr>
+    <a:masterClrMapping/>
+  </p:clrMapOvr>
+</p:sld>
+</file>
+
+<file path=ppt/slides/slide20.xml><?xml version="1.0" encoding="utf-8"?>
 <p:sld xmlns:a="http://schemas.openxmlformats.org/drawingml/2006/main" xmlns:r="http://schemas.openxmlformats.org/officeDocument/2006/relationships" xmlns:p="http://schemas.openxmlformats.org/presentationml/2006/main">
   <p:cSld>
     <p:spTree>
@@ -11743,7 +13278,7 @@
 </p:sld>
 </file>
 
-<file path=ppt/slides/slide19.xml><?xml version="1.0" encoding="utf-8"?>
+<file path=ppt/slides/slide21.xml><?xml version="1.0" encoding="utf-8"?>
 <p:sld xmlns:a="http://schemas.openxmlformats.org/drawingml/2006/main" xmlns:r="http://schemas.openxmlformats.org/officeDocument/2006/relationships" xmlns:p="http://schemas.openxmlformats.org/presentationml/2006/main">
   <p:cSld>
     <p:spTree>
@@ -12205,7 +13740,1619 @@
 </p:sld>
 </file>
 
-<file path=ppt/slides/slide2.xml><?xml version="1.0" encoding="utf-8"?>
+<file path=ppt/slides/slide22.xml><?xml version="1.0" encoding="utf-8"?>
+<p:sld xmlns:a="http://schemas.openxmlformats.org/drawingml/2006/main" xmlns:r="http://schemas.openxmlformats.org/officeDocument/2006/relationships" xmlns:p="http://schemas.openxmlformats.org/presentationml/2006/main">
+  <p:cSld>
+    <p:spTree>
+      <p:nvGrpSpPr>
+        <p:cNvPr id="1" name=""/>
+        <p:cNvGrpSpPr/>
+        <p:nvPr/>
+      </p:nvGrpSpPr>
+      <p:grpSpPr>
+        <a:xfrm>
+          <a:off x="0" y="0"/>
+          <a:ext cx="0" cy="0"/>
+          <a:chOff x="0" y="0"/>
+          <a:chExt cx="0" cy="0"/>
+        </a:xfrm>
+      </p:grpSpPr>
+      <p:pic>
+        <p:nvPicPr>
+          <p:cNvPr id="45" name="Picture 44" descr="A screenshot of a computer&#10;&#10;AI-generated content may be incorrect.">
+            <a:extLst>
+              <a:ext uri="{FF2B5EF4-FFF2-40B4-BE49-F238E27FC236}">
+                <a16:creationId xmlns:a16="http://schemas.microsoft.com/office/drawing/2014/main" id="{F31CC08F-9A70-0EE5-EC5E-4498304F241E}"/>
+              </a:ext>
+            </a:extLst>
+          </p:cNvPr>
+          <p:cNvPicPr>
+            <a:picLocks noChangeAspect="1"/>
+          </p:cNvPicPr>
+          <p:nvPr/>
+        </p:nvPicPr>
+        <p:blipFill>
+          <a:blip r:embed="rId3">
+            <a:extLst>
+              <a:ext uri="{28A0092B-C50C-407E-A947-70E740481C1C}">
+                <a14:useLocalDpi xmlns:a14="http://schemas.microsoft.com/office/drawing/2010/main" val="0"/>
+              </a:ext>
+            </a:extLst>
+          </a:blip>
+          <a:stretch>
+            <a:fillRect/>
+          </a:stretch>
+        </p:blipFill>
+        <p:spPr>
+          <a:xfrm>
+            <a:off x="5247184" y="1999482"/>
+            <a:ext cx="3377355" cy="3377355"/>
+          </a:xfrm>
+          <a:prstGeom prst="rect">
+            <a:avLst/>
+          </a:prstGeom>
+        </p:spPr>
+      </p:pic>
+      <p:sp>
+        <p:nvSpPr>
+          <p:cNvPr id="10" name="Arrow: Right 9">
+            <a:extLst>
+              <a:ext uri="{FF2B5EF4-FFF2-40B4-BE49-F238E27FC236}">
+                <a16:creationId xmlns:a16="http://schemas.microsoft.com/office/drawing/2014/main" id="{7CB38E5E-1D27-E2CC-8893-A4BEB0ACF974}"/>
+              </a:ext>
+            </a:extLst>
+          </p:cNvPr>
+          <p:cNvSpPr/>
+          <p:nvPr/>
+        </p:nvSpPr>
+        <p:spPr>
+          <a:xfrm>
+            <a:off x="4245226" y="3256764"/>
+            <a:ext cx="978408" cy="484632"/>
+          </a:xfrm>
+          <a:prstGeom prst="rightArrow">
+            <a:avLst/>
+          </a:prstGeom>
+        </p:spPr>
+        <p:style>
+          <a:lnRef idx="2">
+            <a:schemeClr val="accent1">
+              <a:shade val="15000"/>
+            </a:schemeClr>
+          </a:lnRef>
+          <a:fillRef idx="1">
+            <a:schemeClr val="accent1"/>
+          </a:fillRef>
+          <a:effectRef idx="0">
+            <a:schemeClr val="accent1"/>
+          </a:effectRef>
+          <a:fontRef idx="minor">
+            <a:schemeClr val="lt1"/>
+          </a:fontRef>
+        </p:style>
+        <p:txBody>
+          <a:bodyPr rtlCol="0" anchor="ctr"/>
+          <a:lstStyle/>
+          <a:p>
+            <a:pPr algn="ctr"/>
+            <a:endParaRPr lang="de-DE"/>
+          </a:p>
+        </p:txBody>
+      </p:sp>
+      <p:sp>
+        <p:nvSpPr>
+          <p:cNvPr id="15" name="TextBox 14">
+            <a:extLst>
+              <a:ext uri="{FF2B5EF4-FFF2-40B4-BE49-F238E27FC236}">
+                <a16:creationId xmlns:a16="http://schemas.microsoft.com/office/drawing/2014/main" id="{898BD7CD-F3D1-046B-9F2A-9F150D497AA7}"/>
+              </a:ext>
+            </a:extLst>
+          </p:cNvPr>
+          <p:cNvSpPr txBox="1"/>
+          <p:nvPr/>
+        </p:nvSpPr>
+        <p:spPr>
+          <a:xfrm>
+            <a:off x="2150590" y="1537817"/>
+            <a:ext cx="1086516" cy="461665"/>
+          </a:xfrm>
+          <a:prstGeom prst="rect">
+            <a:avLst/>
+          </a:prstGeom>
+          <a:solidFill>
+            <a:schemeClr val="bg2"/>
+          </a:solidFill>
+          <a:effectLst>
+            <a:softEdge rad="50800"/>
+          </a:effectLst>
+        </p:spPr>
+        <p:txBody>
+          <a:bodyPr wrap="none" rtlCol="0">
+            <a:spAutoFit/>
+          </a:bodyPr>
+          <a:lstStyle/>
+          <a:p>
+            <a:r>
+              <a:rPr lang="de-DE" sz="2400" dirty="0">
+                <a:latin typeface="Cambria" panose="02040503050406030204" pitchFamily="18" charset="0"/>
+                <a:ea typeface="Cambria" panose="02040503050406030204" pitchFamily="18" charset="0"/>
+              </a:rPr>
+              <a:t>kspace</a:t>
+            </a:r>
+            <a:endParaRPr lang="de-DE" sz="2400" dirty="0">
+              <a:latin typeface="+mj-lt"/>
+              <a:ea typeface="Cambria" panose="02040503050406030204" pitchFamily="18" charset="0"/>
+            </a:endParaRPr>
+          </a:p>
+        </p:txBody>
+      </p:sp>
+      <p:sp>
+        <p:nvSpPr>
+          <p:cNvPr id="18" name="TextBox 17">
+            <a:extLst>
+              <a:ext uri="{FF2B5EF4-FFF2-40B4-BE49-F238E27FC236}">
+                <a16:creationId xmlns:a16="http://schemas.microsoft.com/office/drawing/2014/main" id="{AD54A680-64A3-634B-1907-89F6EE183B50}"/>
+              </a:ext>
+            </a:extLst>
+          </p:cNvPr>
+          <p:cNvSpPr txBox="1"/>
+          <p:nvPr/>
+        </p:nvSpPr>
+        <p:spPr>
+          <a:xfrm>
+            <a:off x="4258128" y="2919714"/>
+            <a:ext cx="716863" cy="461665"/>
+          </a:xfrm>
+          <a:prstGeom prst="rect">
+            <a:avLst/>
+          </a:prstGeom>
+          <a:solidFill>
+            <a:schemeClr val="bg2"/>
+          </a:solidFill>
+          <a:effectLst>
+            <a:softEdge rad="50800"/>
+          </a:effectLst>
+        </p:spPr>
+        <p:txBody>
+          <a:bodyPr wrap="none" rtlCol="0">
+            <a:spAutoFit/>
+          </a:bodyPr>
+          <a:lstStyle/>
+          <a:p>
+            <a:r>
+              <a:rPr lang="de-DE" sz="2400" dirty="0">
+                <a:latin typeface="Cambria" panose="02040503050406030204" pitchFamily="18" charset="0"/>
+                <a:ea typeface="Cambria" panose="02040503050406030204" pitchFamily="18" charset="0"/>
+              </a:rPr>
+              <a:t>fft</a:t>
+            </a:r>
+            <a:r>
+              <a:rPr lang="de-DE" sz="2400" dirty="0">
+                <a:latin typeface="+mj-lt"/>
+                <a:ea typeface="Cambria" panose="02040503050406030204" pitchFamily="18" charset="0"/>
+              </a:rPr>
+              <a:t>( )</a:t>
+            </a:r>
+          </a:p>
+        </p:txBody>
+      </p:sp>
+      <p:pic>
+        <p:nvPicPr>
+          <p:cNvPr id="5" name="Picture 4" descr="A pixelated image of a black and white square&#10;&#10;AI-generated content may be incorrect.">
+            <a:extLst>
+              <a:ext uri="{FF2B5EF4-FFF2-40B4-BE49-F238E27FC236}">
+                <a16:creationId xmlns:a16="http://schemas.microsoft.com/office/drawing/2014/main" id="{2EB070E9-3B75-C8E5-036B-7400DACD2016}"/>
+              </a:ext>
+            </a:extLst>
+          </p:cNvPr>
+          <p:cNvPicPr>
+            <a:picLocks noChangeAspect="1"/>
+          </p:cNvPicPr>
+          <p:nvPr/>
+        </p:nvPicPr>
+        <p:blipFill>
+          <a:blip r:embed="rId4">
+            <a:extLst>
+              <a:ext uri="{28A0092B-C50C-407E-A947-70E740481C1C}">
+                <a14:useLocalDpi xmlns:a14="http://schemas.microsoft.com/office/drawing/2010/main" val="0"/>
+              </a:ext>
+            </a:extLst>
+          </a:blip>
+          <a:stretch>
+            <a:fillRect/>
+          </a:stretch>
+        </p:blipFill>
+        <p:spPr>
+          <a:xfrm>
+            <a:off x="786032" y="2073396"/>
+            <a:ext cx="3336000" cy="3336000"/>
+          </a:xfrm>
+          <a:prstGeom prst="rect">
+            <a:avLst/>
+          </a:prstGeom>
+        </p:spPr>
+      </p:pic>
+    </p:spTree>
+    <p:extLst>
+      <p:ext uri="{BB962C8B-B14F-4D97-AF65-F5344CB8AC3E}">
+        <p14:creationId xmlns:p14="http://schemas.microsoft.com/office/powerpoint/2010/main" val="4241833589"/>
+      </p:ext>
+    </p:extLst>
+  </p:cSld>
+  <p:clrMapOvr>
+    <a:masterClrMapping/>
+  </p:clrMapOvr>
+</p:sld>
+</file>
+
+<file path=ppt/slides/slide23.xml><?xml version="1.0" encoding="utf-8"?>
+<p:sld xmlns:a="http://schemas.openxmlformats.org/drawingml/2006/main" xmlns:r="http://schemas.openxmlformats.org/officeDocument/2006/relationships" xmlns:p="http://schemas.openxmlformats.org/presentationml/2006/main">
+  <p:cSld>
+    <p:spTree>
+      <p:nvGrpSpPr>
+        <p:cNvPr id="1" name=""/>
+        <p:cNvGrpSpPr/>
+        <p:nvPr/>
+      </p:nvGrpSpPr>
+      <p:grpSpPr>
+        <a:xfrm>
+          <a:off x="0" y="0"/>
+          <a:ext cx="0" cy="0"/>
+          <a:chOff x="0" y="0"/>
+          <a:chExt cx="0" cy="0"/>
+        </a:xfrm>
+      </p:grpSpPr>
+      <p:pic>
+        <p:nvPicPr>
+          <p:cNvPr id="5" name="Picture 4">
+            <a:extLst>
+              <a:ext uri="{FF2B5EF4-FFF2-40B4-BE49-F238E27FC236}">
+                <a16:creationId xmlns:a16="http://schemas.microsoft.com/office/drawing/2014/main" id="{ECC95A8F-B406-6409-CA96-D1ECA141B62C}"/>
+              </a:ext>
+            </a:extLst>
+          </p:cNvPr>
+          <p:cNvPicPr>
+            <a:picLocks noChangeAspect="1"/>
+          </p:cNvPicPr>
+          <p:nvPr/>
+        </p:nvPicPr>
+        <p:blipFill>
+          <a:blip r:embed="rId2">
+            <a:extLst>
+              <a:ext uri="{28A0092B-C50C-407E-A947-70E740481C1C}">
+                <a14:useLocalDpi xmlns:a14="http://schemas.microsoft.com/office/drawing/2010/main" val="0"/>
+              </a:ext>
+            </a:extLst>
+          </a:blip>
+          <a:stretch>
+            <a:fillRect/>
+          </a:stretch>
+        </p:blipFill>
+        <p:spPr>
+          <a:xfrm>
+            <a:off x="384916" y="2006887"/>
+            <a:ext cx="2517653" cy="2517653"/>
+          </a:xfrm>
+          <a:prstGeom prst="rect">
+            <a:avLst/>
+          </a:prstGeom>
+        </p:spPr>
+      </p:pic>
+      <p:sp>
+        <p:nvSpPr>
+          <p:cNvPr id="6" name="Arrow: Right 5">
+            <a:extLst>
+              <a:ext uri="{FF2B5EF4-FFF2-40B4-BE49-F238E27FC236}">
+                <a16:creationId xmlns:a16="http://schemas.microsoft.com/office/drawing/2014/main" id="{9DA1BB52-9EAA-201C-8EE5-FADB9D25C5A2}"/>
+              </a:ext>
+            </a:extLst>
+          </p:cNvPr>
+          <p:cNvSpPr/>
+          <p:nvPr/>
+        </p:nvSpPr>
+        <p:spPr>
+          <a:xfrm>
+            <a:off x="3374368" y="3154027"/>
+            <a:ext cx="978408" cy="484632"/>
+          </a:xfrm>
+          <a:prstGeom prst="rightArrow">
+            <a:avLst/>
+          </a:prstGeom>
+        </p:spPr>
+        <p:style>
+          <a:lnRef idx="2">
+            <a:schemeClr val="accent1">
+              <a:shade val="15000"/>
+            </a:schemeClr>
+          </a:lnRef>
+          <a:fillRef idx="1">
+            <a:schemeClr val="accent1"/>
+          </a:fillRef>
+          <a:effectRef idx="0">
+            <a:schemeClr val="accent1"/>
+          </a:effectRef>
+          <a:fontRef idx="minor">
+            <a:schemeClr val="lt1"/>
+          </a:fontRef>
+        </p:style>
+        <p:txBody>
+          <a:bodyPr rtlCol="0" anchor="ctr"/>
+          <a:lstStyle/>
+          <a:p>
+            <a:pPr algn="ctr"/>
+            <a:endParaRPr lang="de-DE"/>
+          </a:p>
+        </p:txBody>
+      </p:sp>
+      <p:sp>
+        <p:nvSpPr>
+          <p:cNvPr id="7" name="TextBox 6">
+            <a:extLst>
+              <a:ext uri="{FF2B5EF4-FFF2-40B4-BE49-F238E27FC236}">
+                <a16:creationId xmlns:a16="http://schemas.microsoft.com/office/drawing/2014/main" id="{B43E0F7A-43F3-14F6-ECCF-2454BD3D8395}"/>
+              </a:ext>
+            </a:extLst>
+          </p:cNvPr>
+          <p:cNvSpPr txBox="1"/>
+          <p:nvPr/>
+        </p:nvSpPr>
+        <p:spPr>
+          <a:xfrm>
+            <a:off x="3015916" y="2692360"/>
+            <a:ext cx="1654832" cy="461665"/>
+          </a:xfrm>
+          <a:prstGeom prst="rect">
+            <a:avLst/>
+          </a:prstGeom>
+          <a:solidFill>
+            <a:schemeClr val="bg2"/>
+          </a:solidFill>
+          <a:effectLst>
+            <a:softEdge rad="50800"/>
+          </a:effectLst>
+        </p:spPr>
+        <p:txBody>
+          <a:bodyPr wrap="square" rtlCol="0">
+            <a:spAutoFit/>
+          </a:bodyPr>
+          <a:lstStyle/>
+          <a:p>
+            <a:r>
+              <a:rPr lang="de-DE" sz="2400" dirty="0">
+                <a:latin typeface="Cambria" panose="02040503050406030204" pitchFamily="18" charset="0"/>
+                <a:ea typeface="Cambria" panose="02040503050406030204" pitchFamily="18" charset="0"/>
+              </a:rPr>
+              <a:t>fft(), abs()</a:t>
+            </a:r>
+          </a:p>
+        </p:txBody>
+      </p:sp>
+      <p:sp>
+        <p:nvSpPr>
+          <p:cNvPr id="8" name="TextBox 7">
+            <a:extLst>
+              <a:ext uri="{FF2B5EF4-FFF2-40B4-BE49-F238E27FC236}">
+                <a16:creationId xmlns:a16="http://schemas.microsoft.com/office/drawing/2014/main" id="{4F35AF1C-FEE8-24A5-63E1-0A178C1E91DD}"/>
+              </a:ext>
+            </a:extLst>
+          </p:cNvPr>
+          <p:cNvSpPr txBox="1"/>
+          <p:nvPr/>
+        </p:nvSpPr>
+        <p:spPr>
+          <a:xfrm>
+            <a:off x="757441" y="1545222"/>
+            <a:ext cx="1772601" cy="461665"/>
+          </a:xfrm>
+          <a:prstGeom prst="rect">
+            <a:avLst/>
+          </a:prstGeom>
+          <a:solidFill>
+            <a:schemeClr val="bg2"/>
+          </a:solidFill>
+          <a:effectLst>
+            <a:softEdge rad="50800"/>
+          </a:effectLst>
+        </p:spPr>
+        <p:txBody>
+          <a:bodyPr wrap="none" rtlCol="0">
+            <a:spAutoFit/>
+          </a:bodyPr>
+          <a:lstStyle/>
+          <a:p>
+            <a:r>
+              <a:rPr lang="de-DE" sz="2400" dirty="0">
+                <a:latin typeface="Cambria" panose="02040503050406030204" pitchFamily="18" charset="0"/>
+                <a:ea typeface="Cambria" panose="02040503050406030204" pitchFamily="18" charset="0"/>
+              </a:rPr>
+              <a:t>abs</a:t>
+            </a:r>
+            <a:r>
+              <a:rPr lang="de-DE" sz="2400" dirty="0">
+                <a:latin typeface="+mj-lt"/>
+                <a:ea typeface="Cambria" panose="02040503050406030204" pitchFamily="18" charset="0"/>
+              </a:rPr>
+              <a:t>(</a:t>
+            </a:r>
+            <a:r>
+              <a:rPr lang="de-DE" sz="2400" dirty="0">
+                <a:latin typeface="Cambria" panose="02040503050406030204" pitchFamily="18" charset="0"/>
+                <a:ea typeface="Cambria" panose="02040503050406030204" pitchFamily="18" charset="0"/>
+              </a:rPr>
+              <a:t>kspace</a:t>
+            </a:r>
+            <a:r>
+              <a:rPr lang="de-DE" sz="2400" dirty="0">
+                <a:latin typeface="+mj-lt"/>
+                <a:ea typeface="Cambria" panose="02040503050406030204" pitchFamily="18" charset="0"/>
+              </a:rPr>
+              <a:t>)</a:t>
+            </a:r>
+          </a:p>
+        </p:txBody>
+      </p:sp>
+      <p:pic>
+        <p:nvPicPr>
+          <p:cNvPr id="9" name="Picture 8" descr="A screenshot of a cell phone&#10;&#10;AI-generated content may be incorrect.">
+            <a:extLst>
+              <a:ext uri="{FF2B5EF4-FFF2-40B4-BE49-F238E27FC236}">
+                <a16:creationId xmlns:a16="http://schemas.microsoft.com/office/drawing/2014/main" id="{9C6F7946-ABAC-C5B9-ECD3-3D88E665DE98}"/>
+              </a:ext>
+            </a:extLst>
+          </p:cNvPr>
+          <p:cNvPicPr>
+            <a:picLocks noChangeAspect="1"/>
+          </p:cNvPicPr>
+          <p:nvPr/>
+        </p:nvPicPr>
+        <p:blipFill>
+          <a:blip r:embed="rId3">
+            <a:extLst>
+              <a:ext uri="{28A0092B-C50C-407E-A947-70E740481C1C}">
+                <a14:useLocalDpi xmlns:a14="http://schemas.microsoft.com/office/drawing/2010/main" val="0"/>
+              </a:ext>
+            </a:extLst>
+          </a:blip>
+          <a:srcRect b="15782"/>
+          <a:stretch>
+            <a:fillRect/>
+          </a:stretch>
+        </p:blipFill>
+        <p:spPr>
+          <a:xfrm>
+            <a:off x="4411568" y="1924466"/>
+            <a:ext cx="2756470" cy="2708351"/>
+          </a:xfrm>
+          <a:prstGeom prst="rect">
+            <a:avLst/>
+          </a:prstGeom>
+        </p:spPr>
+      </p:pic>
+      <p:pic>
+        <p:nvPicPr>
+          <p:cNvPr id="10" name="Picture 9" descr="A black and white pixelated image&#10;&#10;AI-generated content may be incorrect.">
+            <a:extLst>
+              <a:ext uri="{FF2B5EF4-FFF2-40B4-BE49-F238E27FC236}">
+                <a16:creationId xmlns:a16="http://schemas.microsoft.com/office/drawing/2014/main" id="{B7FC1FC5-E95C-E979-5485-1933A8C938C2}"/>
+              </a:ext>
+            </a:extLst>
+          </p:cNvPr>
+          <p:cNvPicPr>
+            <a:picLocks noChangeAspect="1"/>
+          </p:cNvPicPr>
+          <p:nvPr/>
+        </p:nvPicPr>
+        <p:blipFill>
+          <a:blip r:embed="rId4">
+            <a:extLst>
+              <a:ext uri="{28A0092B-C50C-407E-A947-70E740481C1C}">
+                <a14:useLocalDpi xmlns:a14="http://schemas.microsoft.com/office/drawing/2010/main" val="0"/>
+              </a:ext>
+            </a:extLst>
+          </a:blip>
+          <a:srcRect l="19153" b="15125"/>
+          <a:stretch>
+            <a:fillRect/>
+          </a:stretch>
+        </p:blipFill>
+        <p:spPr>
+          <a:xfrm>
+            <a:off x="9049564" y="1967589"/>
+            <a:ext cx="2538727" cy="2665228"/>
+          </a:xfrm>
+          <a:prstGeom prst="rect">
+            <a:avLst/>
+          </a:prstGeom>
+        </p:spPr>
+      </p:pic>
+      <p:sp>
+        <p:nvSpPr>
+          <p:cNvPr id="11" name="Arrow: Right 10">
+            <a:extLst>
+              <a:ext uri="{FF2B5EF4-FFF2-40B4-BE49-F238E27FC236}">
+                <a16:creationId xmlns:a16="http://schemas.microsoft.com/office/drawing/2014/main" id="{11F879F3-F5A4-4E02-A962-35FDB104684D}"/>
+              </a:ext>
+            </a:extLst>
+          </p:cNvPr>
+          <p:cNvSpPr/>
+          <p:nvPr/>
+        </p:nvSpPr>
+        <p:spPr>
+          <a:xfrm>
+            <a:off x="7541006" y="3154027"/>
+            <a:ext cx="978408" cy="484632"/>
+          </a:xfrm>
+          <a:prstGeom prst="rightArrow">
+            <a:avLst/>
+          </a:prstGeom>
+        </p:spPr>
+        <p:style>
+          <a:lnRef idx="2">
+            <a:schemeClr val="accent1">
+              <a:shade val="15000"/>
+            </a:schemeClr>
+          </a:lnRef>
+          <a:fillRef idx="1">
+            <a:schemeClr val="accent1"/>
+          </a:fillRef>
+          <a:effectRef idx="0">
+            <a:schemeClr val="accent1"/>
+          </a:effectRef>
+          <a:fontRef idx="minor">
+            <a:schemeClr val="lt1"/>
+          </a:fontRef>
+        </p:style>
+        <p:txBody>
+          <a:bodyPr rtlCol="0" anchor="ctr"/>
+          <a:lstStyle/>
+          <a:p>
+            <a:pPr algn="ctr"/>
+            <a:endParaRPr lang="de-DE"/>
+          </a:p>
+        </p:txBody>
+      </p:sp>
+      <p:sp>
+        <p:nvSpPr>
+          <p:cNvPr id="13" name="TextBox 12">
+            <a:extLst>
+              <a:ext uri="{FF2B5EF4-FFF2-40B4-BE49-F238E27FC236}">
+                <a16:creationId xmlns:a16="http://schemas.microsoft.com/office/drawing/2014/main" id="{2F8DF13C-8C87-5B8D-C9D5-EE5348380FAC}"/>
+              </a:ext>
+            </a:extLst>
+          </p:cNvPr>
+          <p:cNvSpPr txBox="1"/>
+          <p:nvPr/>
+        </p:nvSpPr>
+        <p:spPr>
+          <a:xfrm>
+            <a:off x="7243683" y="2692360"/>
+            <a:ext cx="1540806" cy="461665"/>
+          </a:xfrm>
+          <a:prstGeom prst="rect">
+            <a:avLst/>
+          </a:prstGeom>
+          <a:solidFill>
+            <a:schemeClr val="bg2"/>
+          </a:solidFill>
+          <a:effectLst>
+            <a:softEdge rad="50800"/>
+          </a:effectLst>
+        </p:spPr>
+        <p:txBody>
+          <a:bodyPr wrap="none" rtlCol="0">
+            <a:spAutoFit/>
+          </a:bodyPr>
+          <a:lstStyle/>
+          <a:p>
+            <a:r>
+              <a:rPr lang="de-DE" sz="2400" dirty="0">
+                <a:latin typeface="Cambria" panose="02040503050406030204" pitchFamily="18" charset="0"/>
+                <a:ea typeface="Cambria" panose="02040503050406030204" pitchFamily="18" charset="0"/>
+              </a:rPr>
+              <a:t>fft</a:t>
+            </a:r>
+            <a:r>
+              <a:rPr lang="de-DE" sz="2400" dirty="0">
+                <a:latin typeface="+mj-lt"/>
+                <a:ea typeface="Cambria" panose="02040503050406030204" pitchFamily="18" charset="0"/>
+              </a:rPr>
+              <a:t>( )</a:t>
+            </a:r>
+            <a:r>
+              <a:rPr lang="de-DE" sz="2400" dirty="0">
+                <a:latin typeface="Cambria" panose="02040503050406030204" pitchFamily="18" charset="0"/>
+                <a:ea typeface="Cambria" panose="02040503050406030204" pitchFamily="18" charset="0"/>
+              </a:rPr>
+              <a:t>, abs</a:t>
+            </a:r>
+            <a:r>
+              <a:rPr lang="de-DE" sz="2400" dirty="0">
+                <a:ea typeface="Cambria" panose="02040503050406030204" pitchFamily="18" charset="0"/>
+              </a:rPr>
+              <a:t>( )</a:t>
+            </a:r>
+            <a:endParaRPr lang="de-DE" sz="2400" dirty="0">
+              <a:latin typeface="+mj-lt"/>
+              <a:ea typeface="Cambria" panose="02040503050406030204" pitchFamily="18" charset="0"/>
+            </a:endParaRPr>
+          </a:p>
+        </p:txBody>
+      </p:sp>
+      <p:sp>
+        <p:nvSpPr>
+          <p:cNvPr id="14" name="TextBox 13">
+            <a:extLst>
+              <a:ext uri="{FF2B5EF4-FFF2-40B4-BE49-F238E27FC236}">
+                <a16:creationId xmlns:a16="http://schemas.microsoft.com/office/drawing/2014/main" id="{4CBFD0C6-10F0-DC47-F1A0-3936EF6AD695}"/>
+              </a:ext>
+            </a:extLst>
+          </p:cNvPr>
+          <p:cNvSpPr txBox="1"/>
+          <p:nvPr/>
+        </p:nvSpPr>
+        <p:spPr>
+          <a:xfrm>
+            <a:off x="9432626" y="1545222"/>
+            <a:ext cx="1929695" cy="461665"/>
+          </a:xfrm>
+          <a:prstGeom prst="rect">
+            <a:avLst/>
+          </a:prstGeom>
+          <a:solidFill>
+            <a:schemeClr val="bg2"/>
+          </a:solidFill>
+          <a:effectLst>
+            <a:softEdge rad="50800"/>
+          </a:effectLst>
+        </p:spPr>
+        <p:txBody>
+          <a:bodyPr wrap="none" rtlCol="0">
+            <a:spAutoFit/>
+          </a:bodyPr>
+          <a:lstStyle/>
+          <a:p>
+            <a:r>
+              <a:rPr lang="de-DE" sz="2400" dirty="0">
+                <a:latin typeface="Cambria" panose="02040503050406030204" pitchFamily="18" charset="0"/>
+                <a:ea typeface="Cambria" panose="02040503050406030204" pitchFamily="18" charset="0"/>
+              </a:rPr>
+              <a:t>abs</a:t>
+            </a:r>
+            <a:r>
+              <a:rPr lang="de-DE" sz="2400" dirty="0">
+                <a:latin typeface="+mj-lt"/>
+                <a:ea typeface="Cambria" panose="02040503050406030204" pitchFamily="18" charset="0"/>
+              </a:rPr>
+              <a:t>(</a:t>
+            </a:r>
+            <a:r>
+              <a:rPr lang="de-DE" sz="2400" dirty="0">
+                <a:latin typeface="Cambria" panose="02040503050406030204" pitchFamily="18" charset="0"/>
+                <a:ea typeface="Cambria" panose="02040503050406030204" pitchFamily="18" charset="0"/>
+              </a:rPr>
+              <a:t>kspace</a:t>
+            </a:r>
+            <a:r>
+              <a:rPr lang="de-DE" sz="2400" dirty="0">
+                <a:latin typeface="+mj-lt"/>
+                <a:ea typeface="Cambria" panose="02040503050406030204" pitchFamily="18" charset="0"/>
+              </a:rPr>
+              <a:t>) ?</a:t>
+            </a:r>
+          </a:p>
+        </p:txBody>
+      </p:sp>
+      <p:sp>
+        <p:nvSpPr>
+          <p:cNvPr id="15" name="TextBox 14">
+            <a:extLst>
+              <a:ext uri="{FF2B5EF4-FFF2-40B4-BE49-F238E27FC236}">
+                <a16:creationId xmlns:a16="http://schemas.microsoft.com/office/drawing/2014/main" id="{149C3903-609B-8906-5ACD-82D7F1A07BCD}"/>
+              </a:ext>
+            </a:extLst>
+          </p:cNvPr>
+          <p:cNvSpPr txBox="1"/>
+          <p:nvPr/>
+        </p:nvSpPr>
+        <p:spPr>
+          <a:xfrm>
+            <a:off x="4915055" y="1545222"/>
+            <a:ext cx="1673856" cy="461665"/>
+          </a:xfrm>
+          <a:prstGeom prst="rect">
+            <a:avLst/>
+          </a:prstGeom>
+          <a:solidFill>
+            <a:schemeClr val="bg2"/>
+          </a:solidFill>
+          <a:effectLst>
+            <a:softEdge rad="50800"/>
+          </a:effectLst>
+        </p:spPr>
+        <p:txBody>
+          <a:bodyPr wrap="none" rtlCol="0">
+            <a:spAutoFit/>
+          </a:bodyPr>
+          <a:lstStyle/>
+          <a:p>
+            <a:r>
+              <a:rPr lang="de-DE" sz="2400" dirty="0">
+                <a:latin typeface="Cambria" panose="02040503050406030204" pitchFamily="18" charset="0"/>
+                <a:ea typeface="Cambria" panose="02040503050406030204" pitchFamily="18" charset="0"/>
+              </a:rPr>
+              <a:t>abs</a:t>
+            </a:r>
+            <a:r>
+              <a:rPr lang="de-DE" sz="2400" dirty="0">
+                <a:latin typeface="+mj-lt"/>
+                <a:ea typeface="Cambria" panose="02040503050406030204" pitchFamily="18" charset="0"/>
+              </a:rPr>
+              <a:t>(</a:t>
+            </a:r>
+            <a:r>
+              <a:rPr lang="de-DE" sz="2400" dirty="0">
+                <a:latin typeface="Cambria" panose="02040503050406030204" pitchFamily="18" charset="0"/>
+                <a:ea typeface="Cambria" panose="02040503050406030204" pitchFamily="18" charset="0"/>
+              </a:rPr>
+              <a:t>image</a:t>
+            </a:r>
+            <a:r>
+              <a:rPr lang="de-DE" sz="2400" dirty="0">
+                <a:latin typeface="+mj-lt"/>
+                <a:ea typeface="Cambria" panose="02040503050406030204" pitchFamily="18" charset="0"/>
+              </a:rPr>
+              <a:t>) </a:t>
+            </a:r>
+          </a:p>
+        </p:txBody>
+      </p:sp>
+    </p:spTree>
+    <p:extLst>
+      <p:ext uri="{BB962C8B-B14F-4D97-AF65-F5344CB8AC3E}">
+        <p14:creationId xmlns:p14="http://schemas.microsoft.com/office/powerpoint/2010/main" val="4110650371"/>
+      </p:ext>
+    </p:extLst>
+  </p:cSld>
+  <p:clrMapOvr>
+    <a:masterClrMapping/>
+  </p:clrMapOvr>
+</p:sld>
+</file>
+
+<file path=ppt/slides/slide3.xml><?xml version="1.0" encoding="utf-8"?>
+<p:sld xmlns:a="http://schemas.openxmlformats.org/drawingml/2006/main" xmlns:r="http://schemas.openxmlformats.org/officeDocument/2006/relationships" xmlns:p="http://schemas.openxmlformats.org/presentationml/2006/main">
+  <p:cSld>
+    <p:spTree>
+      <p:nvGrpSpPr>
+        <p:cNvPr id="1" name=""/>
+        <p:cNvGrpSpPr/>
+        <p:nvPr/>
+      </p:nvGrpSpPr>
+      <p:grpSpPr>
+        <a:xfrm>
+          <a:off x="0" y="0"/>
+          <a:ext cx="0" cy="0"/>
+          <a:chOff x="0" y="0"/>
+          <a:chExt cx="0" cy="0"/>
+        </a:xfrm>
+      </p:grpSpPr>
+      <p:sp>
+        <p:nvSpPr>
+          <p:cNvPr id="8" name="TextBox 7">
+            <a:extLst>
+              <a:ext uri="{FF2B5EF4-FFF2-40B4-BE49-F238E27FC236}">
+                <a16:creationId xmlns:a16="http://schemas.microsoft.com/office/drawing/2014/main" id="{03BD8C54-0BD6-7A0A-8DB6-D6D15CBB2968}"/>
+              </a:ext>
+            </a:extLst>
+          </p:cNvPr>
+          <p:cNvSpPr txBox="1"/>
+          <p:nvPr/>
+        </p:nvSpPr>
+        <p:spPr>
+          <a:xfrm>
+            <a:off x="2248562" y="1176131"/>
+            <a:ext cx="1605119" cy="461665"/>
+          </a:xfrm>
+          <a:prstGeom prst="rect">
+            <a:avLst/>
+          </a:prstGeom>
+          <a:solidFill>
+            <a:schemeClr val="bg2"/>
+          </a:solidFill>
+          <a:effectLst>
+            <a:softEdge rad="50800"/>
+          </a:effectLst>
+        </p:spPr>
+        <p:txBody>
+          <a:bodyPr wrap="none" rtlCol="0">
+            <a:spAutoFit/>
+          </a:bodyPr>
+          <a:lstStyle/>
+          <a:p>
+            <a:r>
+              <a:rPr lang="de-DE" sz="2400" dirty="0">
+                <a:latin typeface="Cambria" panose="02040503050406030204" pitchFamily="18" charset="0"/>
+                <a:ea typeface="Cambria" panose="02040503050406030204" pitchFamily="18" charset="0"/>
+              </a:rPr>
+              <a:t>Re</a:t>
+            </a:r>
+            <a:r>
+              <a:rPr lang="de-DE" sz="2400" dirty="0">
+                <a:latin typeface="+mj-lt"/>
+                <a:ea typeface="Cambria" panose="02040503050406030204" pitchFamily="18" charset="0"/>
+              </a:rPr>
+              <a:t>(</a:t>
+            </a:r>
+            <a:r>
+              <a:rPr lang="de-DE" sz="2400" dirty="0">
+                <a:latin typeface="Cambria" panose="02040503050406030204" pitchFamily="18" charset="0"/>
+                <a:ea typeface="Cambria" panose="02040503050406030204" pitchFamily="18" charset="0"/>
+              </a:rPr>
+              <a:t>kspace</a:t>
+            </a:r>
+            <a:r>
+              <a:rPr lang="de-DE" sz="2400" dirty="0">
+                <a:latin typeface="+mj-lt"/>
+                <a:ea typeface="Cambria" panose="02040503050406030204" pitchFamily="18" charset="0"/>
+              </a:rPr>
+              <a:t>)</a:t>
+            </a:r>
+          </a:p>
+        </p:txBody>
+      </p:sp>
+      <p:pic>
+        <p:nvPicPr>
+          <p:cNvPr id="14" name="Picture 13" descr="A screenshot of a computer&#10;&#10;AI-generated content may be incorrect.">
+            <a:extLst>
+              <a:ext uri="{FF2B5EF4-FFF2-40B4-BE49-F238E27FC236}">
+                <a16:creationId xmlns:a16="http://schemas.microsoft.com/office/drawing/2014/main" id="{73536725-6CD8-1CD9-8DFC-5156B3604FEF}"/>
+              </a:ext>
+            </a:extLst>
+          </p:cNvPr>
+          <p:cNvPicPr>
+            <a:picLocks noChangeAspect="1"/>
+          </p:cNvPicPr>
+          <p:nvPr/>
+        </p:nvPicPr>
+        <p:blipFill>
+          <a:blip r:embed="rId2">
+            <a:extLst>
+              <a:ext uri="{28A0092B-C50C-407E-A947-70E740481C1C}">
+                <a14:useLocalDpi xmlns:a14="http://schemas.microsoft.com/office/drawing/2010/main" val="0"/>
+              </a:ext>
+            </a:extLst>
+          </a:blip>
+          <a:srcRect b="9192"/>
+          <a:stretch>
+            <a:fillRect/>
+          </a:stretch>
+        </p:blipFill>
+        <p:spPr>
+          <a:xfrm>
+            <a:off x="6096000" y="1306285"/>
+            <a:ext cx="4699149" cy="4267201"/>
+          </a:xfrm>
+          <a:prstGeom prst="rect">
+            <a:avLst/>
+          </a:prstGeom>
+        </p:spPr>
+      </p:pic>
+      <p:pic>
+        <p:nvPicPr>
+          <p:cNvPr id="16" name="Picture 15" descr="A screenshot of a computer screen&#10;&#10;AI-generated content may be incorrect.">
+            <a:extLst>
+              <a:ext uri="{FF2B5EF4-FFF2-40B4-BE49-F238E27FC236}">
+                <a16:creationId xmlns:a16="http://schemas.microsoft.com/office/drawing/2014/main" id="{7BF70DD4-922C-5FE2-92E0-1D2BF36DCB9A}"/>
+              </a:ext>
+            </a:extLst>
+          </p:cNvPr>
+          <p:cNvPicPr>
+            <a:picLocks noChangeAspect="1"/>
+          </p:cNvPicPr>
+          <p:nvPr/>
+        </p:nvPicPr>
+        <p:blipFill>
+          <a:blip r:embed="rId3">
+            <a:extLst>
+              <a:ext uri="{28A0092B-C50C-407E-A947-70E740481C1C}">
+                <a14:useLocalDpi xmlns:a14="http://schemas.microsoft.com/office/drawing/2010/main" val="0"/>
+              </a:ext>
+            </a:extLst>
+          </a:blip>
+          <a:srcRect b="9192"/>
+          <a:stretch>
+            <a:fillRect/>
+          </a:stretch>
+        </p:blipFill>
+        <p:spPr>
+          <a:xfrm>
+            <a:off x="1059393" y="1306285"/>
+            <a:ext cx="4699149" cy="4267201"/>
+          </a:xfrm>
+          <a:prstGeom prst="rect">
+            <a:avLst/>
+          </a:prstGeom>
+        </p:spPr>
+      </p:pic>
+      <p:sp>
+        <p:nvSpPr>
+          <p:cNvPr id="17" name="TextBox 16">
+            <a:extLst>
+              <a:ext uri="{FF2B5EF4-FFF2-40B4-BE49-F238E27FC236}">
+                <a16:creationId xmlns:a16="http://schemas.microsoft.com/office/drawing/2014/main" id="{7F404BF1-AF6A-D2C0-9662-DDC2863E26CF}"/>
+              </a:ext>
+            </a:extLst>
+          </p:cNvPr>
+          <p:cNvSpPr txBox="1"/>
+          <p:nvPr/>
+        </p:nvSpPr>
+        <p:spPr>
+          <a:xfrm>
+            <a:off x="7430162" y="1176131"/>
+            <a:ext cx="1625125" cy="461665"/>
+          </a:xfrm>
+          <a:prstGeom prst="rect">
+            <a:avLst/>
+          </a:prstGeom>
+          <a:solidFill>
+            <a:schemeClr val="bg2"/>
+          </a:solidFill>
+          <a:effectLst>
+            <a:softEdge rad="50800"/>
+          </a:effectLst>
+        </p:spPr>
+        <p:txBody>
+          <a:bodyPr wrap="none" rtlCol="0">
+            <a:spAutoFit/>
+          </a:bodyPr>
+          <a:lstStyle/>
+          <a:p>
+            <a:r>
+              <a:rPr lang="de-DE" sz="2400" dirty="0">
+                <a:latin typeface="Cambria" panose="02040503050406030204" pitchFamily="18" charset="0"/>
+                <a:ea typeface="Cambria" panose="02040503050406030204" pitchFamily="18" charset="0"/>
+              </a:rPr>
+              <a:t>Im</a:t>
+            </a:r>
+            <a:r>
+              <a:rPr lang="de-DE" sz="2400" dirty="0">
+                <a:latin typeface="+mj-lt"/>
+                <a:ea typeface="Cambria" panose="02040503050406030204" pitchFamily="18" charset="0"/>
+              </a:rPr>
+              <a:t>(</a:t>
+            </a:r>
+            <a:r>
+              <a:rPr lang="de-DE" sz="2400" dirty="0">
+                <a:latin typeface="Cambria" panose="02040503050406030204" pitchFamily="18" charset="0"/>
+                <a:ea typeface="Cambria" panose="02040503050406030204" pitchFamily="18" charset="0"/>
+              </a:rPr>
+              <a:t>kspace</a:t>
+            </a:r>
+            <a:r>
+              <a:rPr lang="de-DE" sz="2400" dirty="0">
+                <a:latin typeface="+mj-lt"/>
+                <a:ea typeface="Cambria" panose="02040503050406030204" pitchFamily="18" charset="0"/>
+              </a:rPr>
+              <a:t>)</a:t>
+            </a:r>
+          </a:p>
+        </p:txBody>
+      </p:sp>
+      <p:cxnSp>
+        <p:nvCxnSpPr>
+          <p:cNvPr id="19" name="Straight Arrow Connector 18">
+            <a:extLst>
+              <a:ext uri="{FF2B5EF4-FFF2-40B4-BE49-F238E27FC236}">
+                <a16:creationId xmlns:a16="http://schemas.microsoft.com/office/drawing/2014/main" id="{0227BC47-4A04-5D67-EAB3-50908F5F72E7}"/>
+              </a:ext>
+            </a:extLst>
+          </p:cNvPr>
+          <p:cNvCxnSpPr>
+            <a:cxnSpLocks/>
+          </p:cNvCxnSpPr>
+          <p:nvPr/>
+        </p:nvCxnSpPr>
+        <p:spPr>
+          <a:xfrm flipV="1">
+            <a:off x="8001000" y="2536371"/>
+            <a:ext cx="968829" cy="1001486"/>
+          </a:xfrm>
+          <a:prstGeom prst="straightConnector1">
+            <a:avLst/>
+          </a:prstGeom>
+          <a:ln w="57150">
+            <a:solidFill>
+              <a:schemeClr val="tx1"/>
+            </a:solidFill>
+            <a:headEnd type="triangle"/>
+            <a:tailEnd type="triangle"/>
+          </a:ln>
+        </p:spPr>
+        <p:style>
+          <a:lnRef idx="2">
+            <a:schemeClr val="accent1"/>
+          </a:lnRef>
+          <a:fillRef idx="0">
+            <a:schemeClr val="accent1"/>
+          </a:fillRef>
+          <a:effectRef idx="1">
+            <a:schemeClr val="accent1"/>
+          </a:effectRef>
+          <a:fontRef idx="minor">
+            <a:schemeClr val="tx1"/>
+          </a:fontRef>
+        </p:style>
+      </p:cxnSp>
+      <p:cxnSp>
+        <p:nvCxnSpPr>
+          <p:cNvPr id="24" name="Straight Arrow Connector 23">
+            <a:extLst>
+              <a:ext uri="{FF2B5EF4-FFF2-40B4-BE49-F238E27FC236}">
+                <a16:creationId xmlns:a16="http://schemas.microsoft.com/office/drawing/2014/main" id="{57081310-7592-4C18-CCE7-2EFA3FFDCD3E}"/>
+              </a:ext>
+            </a:extLst>
+          </p:cNvPr>
+          <p:cNvCxnSpPr>
+            <a:cxnSpLocks/>
+          </p:cNvCxnSpPr>
+          <p:nvPr/>
+        </p:nvCxnSpPr>
+        <p:spPr>
+          <a:xfrm flipV="1">
+            <a:off x="2924552" y="2536371"/>
+            <a:ext cx="968829" cy="1001486"/>
+          </a:xfrm>
+          <a:prstGeom prst="straightConnector1">
+            <a:avLst/>
+          </a:prstGeom>
+          <a:ln w="57150">
+            <a:solidFill>
+              <a:schemeClr val="tx1"/>
+            </a:solidFill>
+            <a:headEnd type="triangle"/>
+            <a:tailEnd type="triangle"/>
+          </a:ln>
+        </p:spPr>
+        <p:style>
+          <a:lnRef idx="2">
+            <a:schemeClr val="accent1"/>
+          </a:lnRef>
+          <a:fillRef idx="0">
+            <a:schemeClr val="accent1"/>
+          </a:fillRef>
+          <a:effectRef idx="1">
+            <a:schemeClr val="accent1"/>
+          </a:effectRef>
+          <a:fontRef idx="minor">
+            <a:schemeClr val="tx1"/>
+          </a:fontRef>
+        </p:style>
+      </p:cxnSp>
+      <mc:AlternateContent xmlns:mc="http://schemas.openxmlformats.org/markup-compatibility/2006" xmlns:a14="http://schemas.microsoft.com/office/drawing/2010/main">
+        <mc:Choice Requires="a14">
+          <p:sp>
+            <p:nvSpPr>
+              <p:cNvPr id="25" name="TextBox 24">
+                <a:extLst>
+                  <a:ext uri="{FF2B5EF4-FFF2-40B4-BE49-F238E27FC236}">
+                    <a16:creationId xmlns:a16="http://schemas.microsoft.com/office/drawing/2014/main" id="{4D4C4653-4491-27FC-3EC1-7AABF156ACB1}"/>
+                  </a:ext>
+                </a:extLst>
+              </p:cNvPr>
+              <p:cNvSpPr txBox="1"/>
+              <p:nvPr/>
+            </p:nvSpPr>
+            <p:spPr>
+              <a:xfrm>
+                <a:off x="1796424" y="3429000"/>
+                <a:ext cx="2767361" cy="391261"/>
+              </a:xfrm>
+              <a:prstGeom prst="rect">
+                <a:avLst/>
+              </a:prstGeom>
+              <a:noFill/>
+            </p:spPr>
+            <p:txBody>
+              <a:bodyPr wrap="none" rtlCol="0">
+                <a:spAutoFit/>
+              </a:bodyPr>
+              <a:lstStyle/>
+              <a:p>
+                <a:pPr/>
+                <a14:m>
+                  <m:oMathPara xmlns:m="http://schemas.openxmlformats.org/officeDocument/2006/math">
+                    <m:oMathParaPr>
+                      <m:jc m:val="centerGroup"/>
+                    </m:oMathParaPr>
+                    <m:oMath xmlns:m="http://schemas.openxmlformats.org/officeDocument/2006/math">
+                      <m:r>
+                        <a:rPr lang="de-DE" b="0" i="1" smtClean="0">
+                          <a:latin typeface="Cambria Math" panose="02040503050406030204" pitchFamily="18" charset="0"/>
+                        </a:rPr>
+                        <m:t>𝑆</m:t>
+                      </m:r>
+                      <m:r>
+                        <a:rPr lang="de-DE" b="0" i="1" smtClean="0">
+                          <a:latin typeface="Cambria Math" panose="02040503050406030204" pitchFamily="18" charset="0"/>
+                        </a:rPr>
+                        <m:t>(</m:t>
+                      </m:r>
+                      <m:sSub>
+                        <m:sSubPr>
+                          <m:ctrlPr>
+                            <a:rPr lang="de-DE" i="1" smtClean="0">
+                              <a:latin typeface="Cambria Math" panose="02040503050406030204" pitchFamily="18" charset="0"/>
+                            </a:rPr>
+                          </m:ctrlPr>
+                        </m:sSubPr>
+                        <m:e>
+                          <m:r>
+                            <a:rPr lang="de-DE" b="0" i="1" smtClean="0">
+                              <a:latin typeface="Cambria Math" panose="02040503050406030204" pitchFamily="18" charset="0"/>
+                            </a:rPr>
+                            <m:t>𝑘</m:t>
+                          </m:r>
+                        </m:e>
+                        <m:sub>
+                          <m:r>
+                            <a:rPr lang="de-DE" b="0" i="1" smtClean="0">
+                              <a:latin typeface="Cambria Math" panose="02040503050406030204" pitchFamily="18" charset="0"/>
+                            </a:rPr>
+                            <m:t>𝑥</m:t>
+                          </m:r>
+                        </m:sub>
+                      </m:sSub>
+                      <m:r>
+                        <a:rPr lang="de-DE" b="0" i="1" smtClean="0">
+                          <a:latin typeface="Cambria Math" panose="02040503050406030204" pitchFamily="18" charset="0"/>
+                        </a:rPr>
+                        <m:t>,</m:t>
+                      </m:r>
+                      <m:sSub>
+                        <m:sSubPr>
+                          <m:ctrlPr>
+                            <a:rPr lang="de-DE" i="1" smtClean="0">
+                              <a:latin typeface="Cambria Math" panose="02040503050406030204" pitchFamily="18" charset="0"/>
+                            </a:rPr>
+                          </m:ctrlPr>
+                        </m:sSubPr>
+                        <m:e>
+                          <m:r>
+                            <a:rPr lang="de-DE" b="0" i="1" smtClean="0">
+                              <a:latin typeface="Cambria Math" panose="02040503050406030204" pitchFamily="18" charset="0"/>
+                            </a:rPr>
+                            <m:t>𝑘</m:t>
+                          </m:r>
+                        </m:e>
+                        <m:sub>
+                          <m:r>
+                            <a:rPr lang="de-DE" b="0" i="1" smtClean="0">
+                              <a:latin typeface="Cambria Math" panose="02040503050406030204" pitchFamily="18" charset="0"/>
+                            </a:rPr>
+                            <m:t>𝑦</m:t>
+                          </m:r>
+                        </m:sub>
+                      </m:sSub>
+                      <m:r>
+                        <a:rPr lang="de-DE" b="0" i="1" smtClean="0">
+                          <a:latin typeface="Cambria Math" panose="02040503050406030204" pitchFamily="18" charset="0"/>
+                        </a:rPr>
+                        <m:t>) = </m:t>
+                      </m:r>
+                      <m:r>
+                        <a:rPr lang="de-DE" b="0" i="1" smtClean="0">
+                          <a:latin typeface="Cambria Math" panose="02040503050406030204" pitchFamily="18" charset="0"/>
+                        </a:rPr>
+                        <m:t>𝑆</m:t>
+                      </m:r>
+                      <m:r>
+                        <a:rPr lang="de-DE" b="0" i="1" smtClean="0">
+                          <a:latin typeface="Cambria Math" panose="02040503050406030204" pitchFamily="18" charset="0"/>
+                        </a:rPr>
+                        <m:t>(</m:t>
+                      </m:r>
+                      <m:sSub>
+                        <m:sSubPr>
+                          <m:ctrlPr>
+                            <a:rPr lang="de-DE" i="1" smtClean="0">
+                              <a:latin typeface="Cambria Math" panose="02040503050406030204" pitchFamily="18" charset="0"/>
+                            </a:rPr>
+                          </m:ctrlPr>
+                        </m:sSubPr>
+                        <m:e>
+                          <m:r>
+                            <a:rPr lang="de-DE" i="1">
+                              <a:latin typeface="Cambria Math" panose="02040503050406030204" pitchFamily="18" charset="0"/>
+                              <a:ea typeface="Cambria Math" panose="02040503050406030204" pitchFamily="18" charset="0"/>
+                            </a:rPr>
+                            <m:t>−</m:t>
+                          </m:r>
+                          <m:r>
+                            <a:rPr lang="de-DE" b="0" i="1" smtClean="0">
+                              <a:latin typeface="Cambria Math" panose="02040503050406030204" pitchFamily="18" charset="0"/>
+                            </a:rPr>
+                            <m:t>𝑘</m:t>
+                          </m:r>
+                        </m:e>
+                        <m:sub>
+                          <m:r>
+                            <a:rPr lang="de-DE" b="0" i="1" smtClean="0">
+                              <a:latin typeface="Cambria Math" panose="02040503050406030204" pitchFamily="18" charset="0"/>
+                            </a:rPr>
+                            <m:t>𝑥</m:t>
+                          </m:r>
+                        </m:sub>
+                      </m:sSub>
+                      <m:r>
+                        <a:rPr lang="de-DE" b="0" i="1" smtClean="0">
+                          <a:latin typeface="Cambria Math" panose="02040503050406030204" pitchFamily="18" charset="0"/>
+                        </a:rPr>
+                        <m:t>,</m:t>
+                      </m:r>
+                      <m:sSub>
+                        <m:sSubPr>
+                          <m:ctrlPr>
+                            <a:rPr lang="de-DE" i="1" smtClean="0">
+                              <a:latin typeface="Cambria Math" panose="02040503050406030204" pitchFamily="18" charset="0"/>
+                            </a:rPr>
+                          </m:ctrlPr>
+                        </m:sSubPr>
+                        <m:e>
+                          <m:r>
+                            <a:rPr lang="de-DE" i="1">
+                              <a:latin typeface="Cambria Math" panose="02040503050406030204" pitchFamily="18" charset="0"/>
+                              <a:ea typeface="Cambria Math" panose="02040503050406030204" pitchFamily="18" charset="0"/>
+                            </a:rPr>
+                            <m:t>−</m:t>
+                          </m:r>
+                          <m:r>
+                            <a:rPr lang="de-DE" b="0" i="1" smtClean="0">
+                              <a:latin typeface="Cambria Math" panose="02040503050406030204" pitchFamily="18" charset="0"/>
+                            </a:rPr>
+                            <m:t>𝑘</m:t>
+                          </m:r>
+                        </m:e>
+                        <m:sub>
+                          <m:r>
+                            <a:rPr lang="de-DE" b="0" i="1" smtClean="0">
+                              <a:latin typeface="Cambria Math" panose="02040503050406030204" pitchFamily="18" charset="0"/>
+                            </a:rPr>
+                            <m:t>𝑦</m:t>
+                          </m:r>
+                        </m:sub>
+                      </m:sSub>
+                      <m:r>
+                        <a:rPr lang="de-DE" b="0" i="1" smtClean="0">
+                          <a:latin typeface="Cambria Math" panose="02040503050406030204" pitchFamily="18" charset="0"/>
+                        </a:rPr>
+                        <m:t>)</m:t>
+                      </m:r>
+                    </m:oMath>
+                  </m:oMathPara>
+                </a14:m>
+                <a:endParaRPr lang="de-DE" i="1" dirty="0"/>
+              </a:p>
+            </p:txBody>
+          </p:sp>
+        </mc:Choice>
+        <mc:Fallback xmlns="">
+          <p:sp>
+            <p:nvSpPr>
+              <p:cNvPr id="25" name="TextBox 24">
+                <a:extLst>
+                  <a:ext uri="{FF2B5EF4-FFF2-40B4-BE49-F238E27FC236}">
+                    <a16:creationId xmlns:a16="http://schemas.microsoft.com/office/drawing/2014/main" id="{4D4C4653-4491-27FC-3EC1-7AABF156ACB1}"/>
+                  </a:ext>
+                </a:extLst>
+              </p:cNvPr>
+              <p:cNvSpPr txBox="1">
+                <a:spLocks noRot="1" noChangeAspect="1" noMove="1" noResize="1" noEditPoints="1" noAdjustHandles="1" noChangeArrowheads="1" noChangeShapeType="1" noTextEdit="1"/>
+              </p:cNvSpPr>
+              <p:nvPr/>
+            </p:nvSpPr>
+            <p:spPr>
+              <a:xfrm>
+                <a:off x="1796424" y="3429000"/>
+                <a:ext cx="2767361" cy="391261"/>
+              </a:xfrm>
+              <a:prstGeom prst="rect">
+                <a:avLst/>
+              </a:prstGeom>
+              <a:blipFill>
+                <a:blip r:embed="rId4"/>
+                <a:stretch>
+                  <a:fillRect b="-7813"/>
+                </a:stretch>
+              </a:blipFill>
+            </p:spPr>
+            <p:txBody>
+              <a:bodyPr/>
+              <a:lstStyle/>
+              <a:p>
+                <a:r>
+                  <a:rPr lang="de-DE">
+                    <a:noFill/>
+                  </a:rPr>
+                  <a:t> </a:t>
+                </a:r>
+              </a:p>
+            </p:txBody>
+          </p:sp>
+        </mc:Fallback>
+      </mc:AlternateContent>
+      <mc:AlternateContent xmlns:mc="http://schemas.openxmlformats.org/markup-compatibility/2006" xmlns:a14="http://schemas.microsoft.com/office/drawing/2010/main">
+        <mc:Choice Requires="a14">
+          <p:sp>
+            <p:nvSpPr>
+              <p:cNvPr id="27" name="TextBox 26">
+                <a:extLst>
+                  <a:ext uri="{FF2B5EF4-FFF2-40B4-BE49-F238E27FC236}">
+                    <a16:creationId xmlns:a16="http://schemas.microsoft.com/office/drawing/2014/main" id="{7E02B7BC-FEB0-9134-61EA-59FB24662C5C}"/>
+                  </a:ext>
+                </a:extLst>
+              </p:cNvPr>
+              <p:cNvSpPr txBox="1"/>
+              <p:nvPr/>
+            </p:nvSpPr>
+            <p:spPr>
+              <a:xfrm>
+                <a:off x="6879437" y="3429000"/>
+                <a:ext cx="2889189" cy="391261"/>
+              </a:xfrm>
+              <a:prstGeom prst="rect">
+                <a:avLst/>
+              </a:prstGeom>
+              <a:noFill/>
+            </p:spPr>
+            <p:txBody>
+              <a:bodyPr wrap="none" rtlCol="0">
+                <a:spAutoFit/>
+              </a:bodyPr>
+              <a:lstStyle/>
+              <a:p>
+                <a:pPr/>
+                <a14:m>
+                  <m:oMathPara xmlns:m="http://schemas.openxmlformats.org/officeDocument/2006/math">
+                    <m:oMathParaPr>
+                      <m:jc m:val="centerGroup"/>
+                    </m:oMathParaPr>
+                    <m:oMath xmlns:m="http://schemas.openxmlformats.org/officeDocument/2006/math">
+                      <m:r>
+                        <a:rPr lang="de-DE" b="0" i="1" smtClean="0">
+                          <a:latin typeface="Cambria Math" panose="02040503050406030204" pitchFamily="18" charset="0"/>
+                        </a:rPr>
+                        <m:t>𝑆</m:t>
+                      </m:r>
+                      <m:r>
+                        <a:rPr lang="de-DE" b="0" i="1" smtClean="0">
+                          <a:latin typeface="Cambria Math" panose="02040503050406030204" pitchFamily="18" charset="0"/>
+                        </a:rPr>
+                        <m:t>(</m:t>
+                      </m:r>
+                      <m:sSub>
+                        <m:sSubPr>
+                          <m:ctrlPr>
+                            <a:rPr lang="de-DE" i="1" smtClean="0">
+                              <a:latin typeface="Cambria Math" panose="02040503050406030204" pitchFamily="18" charset="0"/>
+                            </a:rPr>
+                          </m:ctrlPr>
+                        </m:sSubPr>
+                        <m:e>
+                          <m:r>
+                            <a:rPr lang="de-DE" b="0" i="1" smtClean="0">
+                              <a:latin typeface="Cambria Math" panose="02040503050406030204" pitchFamily="18" charset="0"/>
+                            </a:rPr>
+                            <m:t>𝑘</m:t>
+                          </m:r>
+                        </m:e>
+                        <m:sub>
+                          <m:r>
+                            <a:rPr lang="de-DE" b="0" i="1" smtClean="0">
+                              <a:latin typeface="Cambria Math" panose="02040503050406030204" pitchFamily="18" charset="0"/>
+                            </a:rPr>
+                            <m:t>𝑥</m:t>
+                          </m:r>
+                        </m:sub>
+                      </m:sSub>
+                      <m:r>
+                        <a:rPr lang="de-DE" b="0" i="1" smtClean="0">
+                          <a:latin typeface="Cambria Math" panose="02040503050406030204" pitchFamily="18" charset="0"/>
+                        </a:rPr>
+                        <m:t>,</m:t>
+                      </m:r>
+                      <m:sSub>
+                        <m:sSubPr>
+                          <m:ctrlPr>
+                            <a:rPr lang="de-DE" i="1" smtClean="0">
+                              <a:latin typeface="Cambria Math" panose="02040503050406030204" pitchFamily="18" charset="0"/>
+                            </a:rPr>
+                          </m:ctrlPr>
+                        </m:sSubPr>
+                        <m:e>
+                          <m:r>
+                            <a:rPr lang="de-DE" b="0" i="1" smtClean="0">
+                              <a:latin typeface="Cambria Math" panose="02040503050406030204" pitchFamily="18" charset="0"/>
+                            </a:rPr>
+                            <m:t>𝑘</m:t>
+                          </m:r>
+                        </m:e>
+                        <m:sub>
+                          <m:r>
+                            <a:rPr lang="de-DE" b="0" i="1" smtClean="0">
+                              <a:latin typeface="Cambria Math" panose="02040503050406030204" pitchFamily="18" charset="0"/>
+                            </a:rPr>
+                            <m:t>𝑦</m:t>
+                          </m:r>
+                        </m:sub>
+                      </m:sSub>
+                      <m:r>
+                        <a:rPr lang="de-DE" b="0" i="1" smtClean="0">
+                          <a:latin typeface="Cambria Math" panose="02040503050406030204" pitchFamily="18" charset="0"/>
+                        </a:rPr>
+                        <m:t>) =</m:t>
+                      </m:r>
+                      <m:r>
+                        <a:rPr lang="de-DE" b="0" i="1" smtClean="0">
+                          <a:latin typeface="Cambria Math" panose="02040503050406030204" pitchFamily="18" charset="0"/>
+                          <a:ea typeface="Cambria Math" panose="02040503050406030204" pitchFamily="18" charset="0"/>
+                        </a:rPr>
+                        <m:t>−</m:t>
+                      </m:r>
+                      <m:r>
+                        <a:rPr lang="de-DE" b="0" i="1" smtClean="0">
+                          <a:latin typeface="Cambria Math" panose="02040503050406030204" pitchFamily="18" charset="0"/>
+                        </a:rPr>
+                        <m:t>𝑆</m:t>
+                      </m:r>
+                      <m:r>
+                        <a:rPr lang="de-DE" b="0" i="1" smtClean="0">
+                          <a:latin typeface="Cambria Math" panose="02040503050406030204" pitchFamily="18" charset="0"/>
+                        </a:rPr>
+                        <m:t>(</m:t>
+                      </m:r>
+                      <m:sSub>
+                        <m:sSubPr>
+                          <m:ctrlPr>
+                            <a:rPr lang="de-DE" i="1" smtClean="0">
+                              <a:latin typeface="Cambria Math" panose="02040503050406030204" pitchFamily="18" charset="0"/>
+                            </a:rPr>
+                          </m:ctrlPr>
+                        </m:sSubPr>
+                        <m:e>
+                          <m:r>
+                            <a:rPr lang="de-DE" i="1">
+                              <a:latin typeface="Cambria Math" panose="02040503050406030204" pitchFamily="18" charset="0"/>
+                              <a:ea typeface="Cambria Math" panose="02040503050406030204" pitchFamily="18" charset="0"/>
+                            </a:rPr>
+                            <m:t>−</m:t>
+                          </m:r>
+                          <m:r>
+                            <a:rPr lang="de-DE" b="0" i="1" smtClean="0">
+                              <a:latin typeface="Cambria Math" panose="02040503050406030204" pitchFamily="18" charset="0"/>
+                            </a:rPr>
+                            <m:t>𝑘</m:t>
+                          </m:r>
+                        </m:e>
+                        <m:sub>
+                          <m:r>
+                            <a:rPr lang="de-DE" b="0" i="1" smtClean="0">
+                              <a:latin typeface="Cambria Math" panose="02040503050406030204" pitchFamily="18" charset="0"/>
+                            </a:rPr>
+                            <m:t>𝑥</m:t>
+                          </m:r>
+                        </m:sub>
+                      </m:sSub>
+                      <m:r>
+                        <a:rPr lang="de-DE" b="0" i="1" smtClean="0">
+                          <a:latin typeface="Cambria Math" panose="02040503050406030204" pitchFamily="18" charset="0"/>
+                        </a:rPr>
+                        <m:t>,</m:t>
+                      </m:r>
+                      <m:sSub>
+                        <m:sSubPr>
+                          <m:ctrlPr>
+                            <a:rPr lang="de-DE" i="1" smtClean="0">
+                              <a:latin typeface="Cambria Math" panose="02040503050406030204" pitchFamily="18" charset="0"/>
+                            </a:rPr>
+                          </m:ctrlPr>
+                        </m:sSubPr>
+                        <m:e>
+                          <m:r>
+                            <a:rPr lang="de-DE" i="1">
+                              <a:latin typeface="Cambria Math" panose="02040503050406030204" pitchFamily="18" charset="0"/>
+                              <a:ea typeface="Cambria Math" panose="02040503050406030204" pitchFamily="18" charset="0"/>
+                            </a:rPr>
+                            <m:t>−</m:t>
+                          </m:r>
+                          <m:r>
+                            <a:rPr lang="de-DE" b="0" i="1" smtClean="0">
+                              <a:latin typeface="Cambria Math" panose="02040503050406030204" pitchFamily="18" charset="0"/>
+                            </a:rPr>
+                            <m:t>𝑘</m:t>
+                          </m:r>
+                        </m:e>
+                        <m:sub>
+                          <m:r>
+                            <a:rPr lang="de-DE" b="0" i="1" smtClean="0">
+                              <a:latin typeface="Cambria Math" panose="02040503050406030204" pitchFamily="18" charset="0"/>
+                            </a:rPr>
+                            <m:t>𝑦</m:t>
+                          </m:r>
+                        </m:sub>
+                      </m:sSub>
+                      <m:r>
+                        <a:rPr lang="de-DE" b="0" i="1" smtClean="0">
+                          <a:latin typeface="Cambria Math" panose="02040503050406030204" pitchFamily="18" charset="0"/>
+                        </a:rPr>
+                        <m:t>)</m:t>
+                      </m:r>
+                    </m:oMath>
+                  </m:oMathPara>
+                </a14:m>
+                <a:endParaRPr lang="de-DE" i="1" dirty="0"/>
+              </a:p>
+            </p:txBody>
+          </p:sp>
+        </mc:Choice>
+        <mc:Fallback xmlns="">
+          <p:sp>
+            <p:nvSpPr>
+              <p:cNvPr id="27" name="TextBox 26">
+                <a:extLst>
+                  <a:ext uri="{FF2B5EF4-FFF2-40B4-BE49-F238E27FC236}">
+                    <a16:creationId xmlns:a16="http://schemas.microsoft.com/office/drawing/2014/main" id="{7E02B7BC-FEB0-9134-61EA-59FB24662C5C}"/>
+                  </a:ext>
+                </a:extLst>
+              </p:cNvPr>
+              <p:cNvSpPr txBox="1">
+                <a:spLocks noRot="1" noChangeAspect="1" noMove="1" noResize="1" noEditPoints="1" noAdjustHandles="1" noChangeArrowheads="1" noChangeShapeType="1" noTextEdit="1"/>
+              </p:cNvSpPr>
+              <p:nvPr/>
+            </p:nvSpPr>
+            <p:spPr>
+              <a:xfrm>
+                <a:off x="6879437" y="3429000"/>
+                <a:ext cx="2889189" cy="391261"/>
+              </a:xfrm>
+              <a:prstGeom prst="rect">
+                <a:avLst/>
+              </a:prstGeom>
+              <a:blipFill>
+                <a:blip r:embed="rId5"/>
+                <a:stretch>
+                  <a:fillRect b="-7813"/>
+                </a:stretch>
+              </a:blipFill>
+            </p:spPr>
+            <p:txBody>
+              <a:bodyPr/>
+              <a:lstStyle/>
+              <a:p>
+                <a:r>
+                  <a:rPr lang="de-DE">
+                    <a:noFill/>
+                  </a:rPr>
+                  <a:t> </a:t>
+                </a:r>
+              </a:p>
+            </p:txBody>
+          </p:sp>
+        </mc:Fallback>
+      </mc:AlternateContent>
+    </p:spTree>
+    <p:extLst>
+      <p:ext uri="{BB962C8B-B14F-4D97-AF65-F5344CB8AC3E}">
+        <p14:creationId xmlns:p14="http://schemas.microsoft.com/office/powerpoint/2010/main" val="3457026786"/>
+      </p:ext>
+    </p:extLst>
+  </p:cSld>
+  <p:clrMapOvr>
+    <a:masterClrMapping/>
+  </p:clrMapOvr>
+</p:sld>
+</file>
+
+<file path=ppt/slides/slide4.xml><?xml version="1.0" encoding="utf-8"?>
 <p:sld xmlns:a="http://schemas.openxmlformats.org/drawingml/2006/main" xmlns:r="http://schemas.openxmlformats.org/officeDocument/2006/relationships" xmlns:p="http://schemas.openxmlformats.org/presentationml/2006/main">
   <p:cSld>
     <p:spTree>
@@ -12512,8 +15659,8 @@
           </a:p>
         </p:txBody>
       </p:sp>
-      <mc:AlternateContent xmlns:mc="http://schemas.openxmlformats.org/markup-compatibility/2006">
-        <mc:Choice xmlns:a14="http://schemas.microsoft.com/office/drawing/2010/main" Requires="a14">
+      <mc:AlternateContent xmlns:mc="http://schemas.openxmlformats.org/markup-compatibility/2006" xmlns:a14="http://schemas.microsoft.com/office/drawing/2010/main">
+        <mc:Choice Requires="a14">
           <p:sp>
             <p:nvSpPr>
               <p:cNvPr id="16" name="TextBox 15">
@@ -12542,6 +15689,7 @@
               </a:bodyPr>
               <a:lstStyle/>
               <a:p>
+                <a:pPr/>
                 <a14:m>
                   <m:oMathPara xmlns:m="http://schemas.openxmlformats.org/officeDocument/2006/math">
                     <m:oMathParaPr>
@@ -12570,7 +15718,7 @@
                             <a:rPr lang="de-DE" sz="3200" b="0" i="1" smtClean="0">
                               <a:latin typeface="Cambria Math" panose="02040503050406030204" pitchFamily="18" charset="0"/>
                             </a:rPr>
-                            <m:t>-1</m:t>
+                            <m:t>−1</m:t>
                           </m:r>
                         </m:sup>
                       </m:sSup>
@@ -12582,7 +15730,7 @@
             </p:txBody>
           </p:sp>
         </mc:Choice>
-        <mc:Fallback>
+        <mc:Fallback xmlns="">
           <p:sp>
             <p:nvSpPr>
               <p:cNvPr id="16" name="TextBox 15">
@@ -12627,8 +15775,8 @@
           </p:sp>
         </mc:Fallback>
       </mc:AlternateContent>
-      <mc:AlternateContent xmlns:mc="http://schemas.openxmlformats.org/markup-compatibility/2006">
-        <mc:Choice xmlns:a14="http://schemas.microsoft.com/office/drawing/2010/main" Requires="a14">
+      <mc:AlternateContent xmlns:mc="http://schemas.openxmlformats.org/markup-compatibility/2006" xmlns:a14="http://schemas.microsoft.com/office/drawing/2010/main">
+        <mc:Choice Requires="a14">
           <p:sp>
             <p:nvSpPr>
               <p:cNvPr id="17" name="TextBox 16">
@@ -12657,6 +15805,7 @@
               </a:bodyPr>
               <a:lstStyle/>
               <a:p>
+                <a:pPr/>
                 <a14:m>
                   <m:oMathPara xmlns:m="http://schemas.openxmlformats.org/officeDocument/2006/math">
                     <m:oMathParaPr>
@@ -12685,7 +15834,7 @@
                             <a:rPr lang="de-DE" sz="3200" b="0" i="1" smtClean="0">
                               <a:latin typeface="Cambria Math" panose="02040503050406030204" pitchFamily="18" charset="0"/>
                             </a:rPr>
-                            <m:t>-1</m:t>
+                            <m:t>−1</m:t>
                           </m:r>
                         </m:sup>
                       </m:sSup>
@@ -12697,7 +15846,7 @@
             </p:txBody>
           </p:sp>
         </mc:Choice>
-        <mc:Fallback>
+        <mc:Fallback xmlns="">
           <p:sp>
             <p:nvSpPr>
               <p:cNvPr id="17" name="TextBox 16">
@@ -12810,252 +15959,7 @@
 </p:sld>
 </file>
 
-<file path=ppt/slides/slide20.xml><?xml version="1.0" encoding="utf-8"?>
-<p:sld xmlns:a="http://schemas.openxmlformats.org/drawingml/2006/main" xmlns:r="http://schemas.openxmlformats.org/officeDocument/2006/relationships" xmlns:p="http://schemas.openxmlformats.org/presentationml/2006/main">
-  <p:cSld>
-    <p:spTree>
-      <p:nvGrpSpPr>
-        <p:cNvPr id="1" name=""/>
-        <p:cNvGrpSpPr/>
-        <p:nvPr/>
-      </p:nvGrpSpPr>
-      <p:grpSpPr>
-        <a:xfrm>
-          <a:off x="0" y="0"/>
-          <a:ext cx="0" cy="0"/>
-          <a:chOff x="0" y="0"/>
-          <a:chExt cx="0" cy="0"/>
-        </a:xfrm>
-      </p:grpSpPr>
-      <p:pic>
-        <p:nvPicPr>
-          <p:cNvPr id="45" name="Picture 44" descr="A screenshot of a computer&#10;&#10;AI-generated content may be incorrect.">
-            <a:extLst>
-              <a:ext uri="{FF2B5EF4-FFF2-40B4-BE49-F238E27FC236}">
-                <a16:creationId xmlns:a16="http://schemas.microsoft.com/office/drawing/2014/main" id="{F31CC08F-9A70-0EE5-EC5E-4498304F241E}"/>
-              </a:ext>
-            </a:extLst>
-          </p:cNvPr>
-          <p:cNvPicPr>
-            <a:picLocks noChangeAspect="1"/>
-          </p:cNvPicPr>
-          <p:nvPr/>
-        </p:nvPicPr>
-        <p:blipFill>
-          <a:blip r:embed="rId3">
-            <a:extLst>
-              <a:ext uri="{28A0092B-C50C-407E-A947-70E740481C1C}">
-                <a14:useLocalDpi xmlns:a14="http://schemas.microsoft.com/office/drawing/2010/main" val="0"/>
-              </a:ext>
-            </a:extLst>
-          </a:blip>
-          <a:stretch>
-            <a:fillRect/>
-          </a:stretch>
-        </p:blipFill>
-        <p:spPr>
-          <a:xfrm>
-            <a:off x="5247184" y="1999482"/>
-            <a:ext cx="3377355" cy="3377355"/>
-          </a:xfrm>
-          <a:prstGeom prst="rect">
-            <a:avLst/>
-          </a:prstGeom>
-        </p:spPr>
-      </p:pic>
-      <p:sp>
-        <p:nvSpPr>
-          <p:cNvPr id="10" name="Arrow: Right 9">
-            <a:extLst>
-              <a:ext uri="{FF2B5EF4-FFF2-40B4-BE49-F238E27FC236}">
-                <a16:creationId xmlns:a16="http://schemas.microsoft.com/office/drawing/2014/main" id="{7CB38E5E-1D27-E2CC-8893-A4BEB0ACF974}"/>
-              </a:ext>
-            </a:extLst>
-          </p:cNvPr>
-          <p:cNvSpPr/>
-          <p:nvPr/>
-        </p:nvSpPr>
-        <p:spPr>
-          <a:xfrm>
-            <a:off x="4245226" y="3256764"/>
-            <a:ext cx="978408" cy="484632"/>
-          </a:xfrm>
-          <a:prstGeom prst="rightArrow">
-            <a:avLst/>
-          </a:prstGeom>
-        </p:spPr>
-        <p:style>
-          <a:lnRef idx="2">
-            <a:schemeClr val="accent1">
-              <a:shade val="15000"/>
-            </a:schemeClr>
-          </a:lnRef>
-          <a:fillRef idx="1">
-            <a:schemeClr val="accent1"/>
-          </a:fillRef>
-          <a:effectRef idx="0">
-            <a:schemeClr val="accent1"/>
-          </a:effectRef>
-          <a:fontRef idx="minor">
-            <a:schemeClr val="lt1"/>
-          </a:fontRef>
-        </p:style>
-        <p:txBody>
-          <a:bodyPr rtlCol="0" anchor="ctr"/>
-          <a:lstStyle/>
-          <a:p>
-            <a:pPr algn="ctr"/>
-            <a:endParaRPr lang="de-DE"/>
-          </a:p>
-        </p:txBody>
-      </p:sp>
-      <p:sp>
-        <p:nvSpPr>
-          <p:cNvPr id="15" name="TextBox 14">
-            <a:extLst>
-              <a:ext uri="{FF2B5EF4-FFF2-40B4-BE49-F238E27FC236}">
-                <a16:creationId xmlns:a16="http://schemas.microsoft.com/office/drawing/2014/main" id="{898BD7CD-F3D1-046B-9F2A-9F150D497AA7}"/>
-              </a:ext>
-            </a:extLst>
-          </p:cNvPr>
-          <p:cNvSpPr txBox="1"/>
-          <p:nvPr/>
-        </p:nvSpPr>
-        <p:spPr>
-          <a:xfrm>
-            <a:off x="2150590" y="1537817"/>
-            <a:ext cx="1086516" cy="461665"/>
-          </a:xfrm>
-          <a:prstGeom prst="rect">
-            <a:avLst/>
-          </a:prstGeom>
-          <a:solidFill>
-            <a:schemeClr val="bg2"/>
-          </a:solidFill>
-          <a:effectLst>
-            <a:softEdge rad="50800"/>
-          </a:effectLst>
-        </p:spPr>
-        <p:txBody>
-          <a:bodyPr wrap="none" rtlCol="0">
-            <a:spAutoFit/>
-          </a:bodyPr>
-          <a:lstStyle/>
-          <a:p>
-            <a:r>
-              <a:rPr lang="de-DE" sz="2400" dirty="0">
-                <a:latin typeface="Cambria" panose="02040503050406030204" pitchFamily="18" charset="0"/>
-                <a:ea typeface="Cambria" panose="02040503050406030204" pitchFamily="18" charset="0"/>
-              </a:rPr>
-              <a:t>kspace</a:t>
-            </a:r>
-            <a:endParaRPr lang="de-DE" sz="2400" dirty="0">
-              <a:latin typeface="+mj-lt"/>
-              <a:ea typeface="Cambria" panose="02040503050406030204" pitchFamily="18" charset="0"/>
-            </a:endParaRPr>
-          </a:p>
-        </p:txBody>
-      </p:sp>
-      <p:sp>
-        <p:nvSpPr>
-          <p:cNvPr id="18" name="TextBox 17">
-            <a:extLst>
-              <a:ext uri="{FF2B5EF4-FFF2-40B4-BE49-F238E27FC236}">
-                <a16:creationId xmlns:a16="http://schemas.microsoft.com/office/drawing/2014/main" id="{AD54A680-64A3-634B-1907-89F6EE183B50}"/>
-              </a:ext>
-            </a:extLst>
-          </p:cNvPr>
-          <p:cNvSpPr txBox="1"/>
-          <p:nvPr/>
-        </p:nvSpPr>
-        <p:spPr>
-          <a:xfrm>
-            <a:off x="4258128" y="2919714"/>
-            <a:ext cx="716863" cy="461665"/>
-          </a:xfrm>
-          <a:prstGeom prst="rect">
-            <a:avLst/>
-          </a:prstGeom>
-          <a:solidFill>
-            <a:schemeClr val="bg2"/>
-          </a:solidFill>
-          <a:effectLst>
-            <a:softEdge rad="50800"/>
-          </a:effectLst>
-        </p:spPr>
-        <p:txBody>
-          <a:bodyPr wrap="none" rtlCol="0">
-            <a:spAutoFit/>
-          </a:bodyPr>
-          <a:lstStyle/>
-          <a:p>
-            <a:r>
-              <a:rPr lang="de-DE" sz="2400" dirty="0">
-                <a:latin typeface="Cambria" panose="02040503050406030204" pitchFamily="18" charset="0"/>
-                <a:ea typeface="Cambria" panose="02040503050406030204" pitchFamily="18" charset="0"/>
-              </a:rPr>
-              <a:t>fft</a:t>
-            </a:r>
-            <a:r>
-              <a:rPr lang="de-DE" sz="2400" dirty="0">
-                <a:latin typeface="+mj-lt"/>
-                <a:ea typeface="Cambria" panose="02040503050406030204" pitchFamily="18" charset="0"/>
-              </a:rPr>
-              <a:t>( )</a:t>
-            </a:r>
-          </a:p>
-        </p:txBody>
-      </p:sp>
-      <p:pic>
-        <p:nvPicPr>
-          <p:cNvPr id="5" name="Picture 4" descr="A pixelated image of a black and white square&#10;&#10;AI-generated content may be incorrect.">
-            <a:extLst>
-              <a:ext uri="{FF2B5EF4-FFF2-40B4-BE49-F238E27FC236}">
-                <a16:creationId xmlns:a16="http://schemas.microsoft.com/office/drawing/2014/main" id="{2EB070E9-3B75-C8E5-036B-7400DACD2016}"/>
-              </a:ext>
-            </a:extLst>
-          </p:cNvPr>
-          <p:cNvPicPr>
-            <a:picLocks noChangeAspect="1"/>
-          </p:cNvPicPr>
-          <p:nvPr/>
-        </p:nvPicPr>
-        <p:blipFill>
-          <a:blip r:embed="rId4">
-            <a:extLst>
-              <a:ext uri="{28A0092B-C50C-407E-A947-70E740481C1C}">
-                <a14:useLocalDpi xmlns:a14="http://schemas.microsoft.com/office/drawing/2010/main" val="0"/>
-              </a:ext>
-            </a:extLst>
-          </a:blip>
-          <a:stretch>
-            <a:fillRect/>
-          </a:stretch>
-        </p:blipFill>
-        <p:spPr>
-          <a:xfrm>
-            <a:off x="786032" y="2073396"/>
-            <a:ext cx="3336000" cy="3336000"/>
-          </a:xfrm>
-          <a:prstGeom prst="rect">
-            <a:avLst/>
-          </a:prstGeom>
-        </p:spPr>
-      </p:pic>
-    </p:spTree>
-    <p:extLst>
-      <p:ext uri="{BB962C8B-B14F-4D97-AF65-F5344CB8AC3E}">
-        <p14:creationId xmlns:p14="http://schemas.microsoft.com/office/powerpoint/2010/main" val="4241833589"/>
-      </p:ext>
-    </p:extLst>
-  </p:cSld>
-  <p:clrMapOvr>
-    <a:masterClrMapping/>
-  </p:clrMapOvr>
-</p:sld>
-</file>
-
-<file path=ppt/slides/slide3.xml><?xml version="1.0" encoding="utf-8"?>
+<file path=ppt/slides/slide5.xml><?xml version="1.0" encoding="utf-8"?>
 <p:sld xmlns:a="http://schemas.openxmlformats.org/drawingml/2006/main" xmlns:r="http://schemas.openxmlformats.org/officeDocument/2006/relationships" xmlns:p="http://schemas.openxmlformats.org/presentationml/2006/main">
   <p:cSld>
     <p:spTree>
@@ -17636,7 +20540,7 @@
 </p:sld>
 </file>
 
-<file path=ppt/slides/slide4.xml><?xml version="1.0" encoding="utf-8"?>
+<file path=ppt/slides/slide6.xml><?xml version="1.0" encoding="utf-8"?>
 <p:sld xmlns:a="http://schemas.openxmlformats.org/drawingml/2006/main" xmlns:r="http://schemas.openxmlformats.org/officeDocument/2006/relationships" xmlns:p="http://schemas.openxmlformats.org/presentationml/2006/main">
   <p:cSld>
     <p:spTree>
@@ -18253,7 +21157,7 @@
 </p:sld>
 </file>
 
-<file path=ppt/slides/slide5.xml><?xml version="1.0" encoding="utf-8"?>
+<file path=ppt/slides/slide7.xml><?xml version="1.0" encoding="utf-8"?>
 <p:sld xmlns:a="http://schemas.openxmlformats.org/drawingml/2006/main" xmlns:r="http://schemas.openxmlformats.org/officeDocument/2006/relationships" xmlns:p="http://schemas.openxmlformats.org/presentationml/2006/main">
   <p:cSld>
     <p:spTree>
@@ -18391,7 +21295,7 @@
 </p:sld>
 </file>
 
-<file path=ppt/slides/slide6.xml><?xml version="1.0" encoding="utf-8"?>
+<file path=ppt/slides/slide8.xml><?xml version="1.0" encoding="utf-8"?>
 <p:sld xmlns:a="http://schemas.openxmlformats.org/drawingml/2006/main" xmlns:r="http://schemas.openxmlformats.org/officeDocument/2006/relationships" xmlns:p="http://schemas.openxmlformats.org/presentationml/2006/main">
   <p:cSld>
     <p:spTree>
@@ -18731,7 +21635,7 @@
 </p:sld>
 </file>
 
-<file path=ppt/slides/slide7.xml><?xml version="1.0" encoding="utf-8"?>
+<file path=ppt/slides/slide9.xml><?xml version="1.0" encoding="utf-8"?>
 <p:sld xmlns:a="http://schemas.openxmlformats.org/drawingml/2006/main" xmlns:r="http://schemas.openxmlformats.org/officeDocument/2006/relationships" xmlns:p="http://schemas.openxmlformats.org/presentationml/2006/main">
   <p:cSld>
     <p:spTree>
@@ -18832,411 +21736,6 @@
     <p:extLst>
       <p:ext uri="{BB962C8B-B14F-4D97-AF65-F5344CB8AC3E}">
         <p14:creationId xmlns:p14="http://schemas.microsoft.com/office/powerpoint/2010/main" val="612585257"/>
-      </p:ext>
-    </p:extLst>
-  </p:cSld>
-  <p:clrMapOvr>
-    <a:masterClrMapping/>
-  </p:clrMapOvr>
-</p:sld>
-</file>
-
-<file path=ppt/slides/slide8.xml><?xml version="1.0" encoding="utf-8"?>
-<p:sld xmlns:a="http://schemas.openxmlformats.org/drawingml/2006/main" xmlns:r="http://schemas.openxmlformats.org/officeDocument/2006/relationships" xmlns:p="http://schemas.openxmlformats.org/presentationml/2006/main">
-  <p:cSld>
-    <p:spTree>
-      <p:nvGrpSpPr>
-        <p:cNvPr id="1" name=""/>
-        <p:cNvGrpSpPr/>
-        <p:nvPr/>
-      </p:nvGrpSpPr>
-      <p:grpSpPr>
-        <a:xfrm>
-          <a:off x="0" y="0"/>
-          <a:ext cx="0" cy="0"/>
-          <a:chOff x="0" y="0"/>
-          <a:chExt cx="0" cy="0"/>
-        </a:xfrm>
-      </p:grpSpPr>
-      <p:pic>
-        <p:nvPicPr>
-          <p:cNvPr id="5" name="Picture 4" descr="A graph with colorful lines&#10;&#10;AI-generated content may be incorrect.">
-            <a:extLst>
-              <a:ext uri="{FF2B5EF4-FFF2-40B4-BE49-F238E27FC236}">
-                <a16:creationId xmlns:a16="http://schemas.microsoft.com/office/drawing/2014/main" id="{2099137D-7D0A-AE03-CE53-23B89005B017}"/>
-              </a:ext>
-            </a:extLst>
-          </p:cNvPr>
-          <p:cNvPicPr>
-            <a:picLocks noChangeAspect="1"/>
-          </p:cNvPicPr>
-          <p:nvPr/>
-        </p:nvPicPr>
-        <p:blipFill>
-          <a:blip r:embed="rId2">
-            <a:extLst>
-              <a:ext uri="{28A0092B-C50C-407E-A947-70E740481C1C}">
-                <a14:useLocalDpi xmlns:a14="http://schemas.microsoft.com/office/drawing/2010/main" val="0"/>
-              </a:ext>
-            </a:extLst>
-          </a:blip>
-          <a:stretch>
-            <a:fillRect/>
-          </a:stretch>
-        </p:blipFill>
-        <p:spPr>
-          <a:xfrm>
-            <a:off x="3217158" y="1990341"/>
-            <a:ext cx="5757684" cy="2877318"/>
-          </a:xfrm>
-          <a:prstGeom prst="rect">
-            <a:avLst/>
-          </a:prstGeom>
-        </p:spPr>
-      </p:pic>
-      <p:pic>
-        <p:nvPicPr>
-          <p:cNvPr id="7" name="Picture 6" descr="A screen shot of a computer&#10;&#10;AI-generated content may be incorrect.">
-            <a:extLst>
-              <a:ext uri="{FF2B5EF4-FFF2-40B4-BE49-F238E27FC236}">
-                <a16:creationId xmlns:a16="http://schemas.microsoft.com/office/drawing/2014/main" id="{FC0CFF11-BD53-696F-4BB9-762CB1FEB5F1}"/>
-              </a:ext>
-            </a:extLst>
-          </p:cNvPr>
-          <p:cNvPicPr>
-            <a:picLocks noChangeAspect="1"/>
-          </p:cNvPicPr>
-          <p:nvPr/>
-        </p:nvPicPr>
-        <p:blipFill>
-          <a:blip r:embed="rId3">
-            <a:extLst>
-              <a:ext uri="{28A0092B-C50C-407E-A947-70E740481C1C}">
-                <a14:useLocalDpi xmlns:a14="http://schemas.microsoft.com/office/drawing/2010/main" val="0"/>
-              </a:ext>
-            </a:extLst>
-          </a:blip>
-          <a:srcRect t="77449"/>
-          <a:stretch>
-            <a:fillRect/>
-          </a:stretch>
-        </p:blipFill>
-        <p:spPr>
-          <a:xfrm>
-            <a:off x="3217158" y="4737099"/>
-            <a:ext cx="5757684" cy="648859"/>
-          </a:xfrm>
-          <a:prstGeom prst="rect">
-            <a:avLst/>
-          </a:prstGeom>
-        </p:spPr>
-      </p:pic>
-    </p:spTree>
-    <p:extLst>
-      <p:ext uri="{BB962C8B-B14F-4D97-AF65-F5344CB8AC3E}">
-        <p14:creationId xmlns:p14="http://schemas.microsoft.com/office/powerpoint/2010/main" val="1119923278"/>
-      </p:ext>
-    </p:extLst>
-  </p:cSld>
-  <p:clrMapOvr>
-    <a:masterClrMapping/>
-  </p:clrMapOvr>
-</p:sld>
-</file>
-
-<file path=ppt/slides/slide9.xml><?xml version="1.0" encoding="utf-8"?>
-<p:sld xmlns:a="http://schemas.openxmlformats.org/drawingml/2006/main" xmlns:r="http://schemas.openxmlformats.org/officeDocument/2006/relationships" xmlns:p="http://schemas.openxmlformats.org/presentationml/2006/main">
-  <p:cSld>
-    <p:spTree>
-      <p:nvGrpSpPr>
-        <p:cNvPr id="1" name=""/>
-        <p:cNvGrpSpPr/>
-        <p:nvPr/>
-      </p:nvGrpSpPr>
-      <p:grpSpPr>
-        <a:xfrm>
-          <a:off x="0" y="0"/>
-          <a:ext cx="0" cy="0"/>
-          <a:chOff x="0" y="0"/>
-          <a:chExt cx="0" cy="0"/>
-        </a:xfrm>
-      </p:grpSpPr>
-      <p:pic>
-        <p:nvPicPr>
-          <p:cNvPr id="4" name="Picture 3" descr="A pixelated image of a black and white square&#10;&#10;AI-generated content may be incorrect.">
-            <a:extLst>
-              <a:ext uri="{FF2B5EF4-FFF2-40B4-BE49-F238E27FC236}">
-                <a16:creationId xmlns:a16="http://schemas.microsoft.com/office/drawing/2014/main" id="{3D7E1B0D-E008-D96D-4169-52D66104F76F}"/>
-              </a:ext>
-            </a:extLst>
-          </p:cNvPr>
-          <p:cNvPicPr>
-            <a:picLocks noChangeAspect="1"/>
-          </p:cNvPicPr>
-          <p:nvPr/>
-        </p:nvPicPr>
-        <p:blipFill>
-          <a:blip r:embed="rId2">
-            <a:extLst>
-              <a:ext uri="{28A0092B-C50C-407E-A947-70E740481C1C}">
-                <a14:useLocalDpi xmlns:a14="http://schemas.microsoft.com/office/drawing/2010/main" val="0"/>
-              </a:ext>
-            </a:extLst>
-          </a:blip>
-          <a:stretch>
-            <a:fillRect/>
-          </a:stretch>
-        </p:blipFill>
-        <p:spPr>
-          <a:xfrm>
-            <a:off x="7906507" y="1821391"/>
-            <a:ext cx="3236983" cy="3236983"/>
-          </a:xfrm>
-          <a:prstGeom prst="rect">
-            <a:avLst/>
-          </a:prstGeom>
-        </p:spPr>
-      </p:pic>
-      <p:sp>
-        <p:nvSpPr>
-          <p:cNvPr id="5" name="Isosceles Triangle 4">
-            <a:extLst>
-              <a:ext uri="{FF2B5EF4-FFF2-40B4-BE49-F238E27FC236}">
-                <a16:creationId xmlns:a16="http://schemas.microsoft.com/office/drawing/2014/main" id="{C7058C1F-72F6-9AF5-E470-3C255886F924}"/>
-              </a:ext>
-            </a:extLst>
-          </p:cNvPr>
-          <p:cNvSpPr/>
-          <p:nvPr/>
-        </p:nvSpPr>
-        <p:spPr>
-          <a:xfrm>
-            <a:off x="4626429" y="5047491"/>
-            <a:ext cx="2730427" cy="469815"/>
-          </a:xfrm>
-          <a:prstGeom prst="triangle">
-            <a:avLst>
-              <a:gd name="adj" fmla="val 100000"/>
-            </a:avLst>
-          </a:prstGeom>
-          <a:solidFill>
-            <a:srgbClr val="0070C0"/>
-          </a:solidFill>
-          <a:ln>
-            <a:noFill/>
-          </a:ln>
-        </p:spPr>
-        <p:style>
-          <a:lnRef idx="2">
-            <a:schemeClr val="accent1">
-              <a:shade val="15000"/>
-            </a:schemeClr>
-          </a:lnRef>
-          <a:fillRef idx="1">
-            <a:schemeClr val="accent1"/>
-          </a:fillRef>
-          <a:effectRef idx="0">
-            <a:schemeClr val="accent1"/>
-          </a:effectRef>
-          <a:fontRef idx="minor">
-            <a:schemeClr val="lt1"/>
-          </a:fontRef>
-        </p:style>
-        <p:txBody>
-          <a:bodyPr rtlCol="0" anchor="ctr"/>
-          <a:lstStyle/>
-          <a:p>
-            <a:pPr algn="ctr"/>
-            <a:endParaRPr lang="de-DE">
-              <a:solidFill>
-                <a:schemeClr val="accent1"/>
-              </a:solidFill>
-            </a:endParaRPr>
-          </a:p>
-        </p:txBody>
-      </p:sp>
-      <p:sp>
-        <p:nvSpPr>
-          <p:cNvPr id="7" name="TextBox 6">
-            <a:extLst>
-              <a:ext uri="{FF2B5EF4-FFF2-40B4-BE49-F238E27FC236}">
-                <a16:creationId xmlns:a16="http://schemas.microsoft.com/office/drawing/2014/main" id="{EEEDF624-6410-45CB-FB31-35DAAB234DBE}"/>
-              </a:ext>
-            </a:extLst>
-          </p:cNvPr>
-          <p:cNvSpPr txBox="1"/>
-          <p:nvPr/>
-        </p:nvSpPr>
-        <p:spPr>
-          <a:xfrm>
-            <a:off x="4789714" y="5517306"/>
-            <a:ext cx="2612571" cy="400110"/>
-          </a:xfrm>
-          <a:prstGeom prst="rect">
-            <a:avLst/>
-          </a:prstGeom>
-          <a:noFill/>
-          <a:ln>
-            <a:noFill/>
-          </a:ln>
-        </p:spPr>
-        <p:txBody>
-          <a:bodyPr wrap="square" rtlCol="0">
-            <a:spAutoFit/>
-          </a:bodyPr>
-          <a:lstStyle/>
-          <a:p>
-            <a:r>
-              <a:rPr lang="de-DE" sz="2000" dirty="0">
-                <a:solidFill>
-                  <a:schemeClr val="tx1"/>
-                </a:solidFill>
-              </a:rPr>
-              <a:t>Frequency encoding </a:t>
-            </a:r>
-          </a:p>
-        </p:txBody>
-      </p:sp>
-      <p:sp>
-        <p:nvSpPr>
-          <p:cNvPr id="12" name="Isosceles Triangle 11">
-            <a:extLst>
-              <a:ext uri="{FF2B5EF4-FFF2-40B4-BE49-F238E27FC236}">
-                <a16:creationId xmlns:a16="http://schemas.microsoft.com/office/drawing/2014/main" id="{F0651CD9-8AB1-49DF-D1CD-4D86A2557DEC}"/>
-              </a:ext>
-            </a:extLst>
-          </p:cNvPr>
-          <p:cNvSpPr/>
-          <p:nvPr/>
-        </p:nvSpPr>
-        <p:spPr>
-          <a:xfrm rot="16200000">
-            <a:off x="2301164" y="2999888"/>
-            <a:ext cx="2826807" cy="469815"/>
-          </a:xfrm>
-          <a:prstGeom prst="triangle">
-            <a:avLst>
-              <a:gd name="adj" fmla="val 100000"/>
-            </a:avLst>
-          </a:prstGeom>
-          <a:solidFill>
-            <a:srgbClr val="0070C0"/>
-          </a:solidFill>
-          <a:ln>
-            <a:noFill/>
-          </a:ln>
-        </p:spPr>
-        <p:style>
-          <a:lnRef idx="2">
-            <a:schemeClr val="accent1">
-              <a:shade val="15000"/>
-            </a:schemeClr>
-          </a:lnRef>
-          <a:fillRef idx="1">
-            <a:schemeClr val="accent1"/>
-          </a:fillRef>
-          <a:effectRef idx="0">
-            <a:schemeClr val="accent1"/>
-          </a:effectRef>
-          <a:fontRef idx="minor">
-            <a:schemeClr val="lt1"/>
-          </a:fontRef>
-        </p:style>
-        <p:txBody>
-          <a:bodyPr rtlCol="0" anchor="ctr"/>
-          <a:lstStyle/>
-          <a:p>
-            <a:pPr algn="ctr"/>
-            <a:endParaRPr lang="de-DE">
-              <a:solidFill>
-                <a:schemeClr val="accent1"/>
-              </a:solidFill>
-            </a:endParaRPr>
-          </a:p>
-        </p:txBody>
-      </p:sp>
-      <p:sp>
-        <p:nvSpPr>
-          <p:cNvPr id="13" name="TextBox 12">
-            <a:extLst>
-              <a:ext uri="{FF2B5EF4-FFF2-40B4-BE49-F238E27FC236}">
-                <a16:creationId xmlns:a16="http://schemas.microsoft.com/office/drawing/2014/main" id="{4F4B2AC8-2F46-741E-3905-985D2E6567EC}"/>
-              </a:ext>
-            </a:extLst>
-          </p:cNvPr>
-          <p:cNvSpPr txBox="1"/>
-          <p:nvPr/>
-        </p:nvSpPr>
-        <p:spPr>
-          <a:xfrm rot="16200000">
-            <a:off x="2227387" y="3061571"/>
-            <a:ext cx="1944763" cy="400110"/>
-          </a:xfrm>
-          <a:prstGeom prst="rect">
-            <a:avLst/>
-          </a:prstGeom>
-          <a:noFill/>
-          <a:ln>
-            <a:noFill/>
-          </a:ln>
-        </p:spPr>
-        <p:txBody>
-          <a:bodyPr wrap="none" rtlCol="0">
-            <a:spAutoFit/>
-          </a:bodyPr>
-          <a:lstStyle/>
-          <a:p>
-            <a:r>
-              <a:rPr lang="de-DE" sz="2000" dirty="0">
-                <a:solidFill>
-                  <a:schemeClr val="tx1"/>
-                </a:solidFill>
-              </a:rPr>
-              <a:t>Phase encoding</a:t>
-            </a:r>
-          </a:p>
-        </p:txBody>
-      </p:sp>
-      <p:pic>
-        <p:nvPicPr>
-          <p:cNvPr id="6" name="Picture 5" descr="A black and white square with white squares&#10;&#10;AI-generated content may be incorrect.">
-            <a:extLst>
-              <a:ext uri="{FF2B5EF4-FFF2-40B4-BE49-F238E27FC236}">
-                <a16:creationId xmlns:a16="http://schemas.microsoft.com/office/drawing/2014/main" id="{85C5245A-3614-EF5E-C4FC-E5C76321BAAA}"/>
-              </a:ext>
-            </a:extLst>
-          </p:cNvPr>
-          <p:cNvPicPr>
-            <a:picLocks noChangeAspect="1"/>
-          </p:cNvPicPr>
-          <p:nvPr/>
-        </p:nvPicPr>
-        <p:blipFill>
-          <a:blip r:embed="rId3">
-            <a:extLst>
-              <a:ext uri="{28A0092B-C50C-407E-A947-70E740481C1C}">
-                <a14:useLocalDpi xmlns:a14="http://schemas.microsoft.com/office/drawing/2010/main" val="0"/>
-              </a:ext>
-            </a:extLst>
-          </a:blip>
-          <a:stretch>
-            <a:fillRect/>
-          </a:stretch>
-        </p:blipFill>
-        <p:spPr>
-          <a:xfrm>
-            <a:off x="4029309" y="1821393"/>
-            <a:ext cx="3327547" cy="3327547"/>
-          </a:xfrm>
-          <a:prstGeom prst="rect">
-            <a:avLst/>
-          </a:prstGeom>
-        </p:spPr>
-      </p:pic>
-    </p:spTree>
-    <p:extLst>
-      <p:ext uri="{BB962C8B-B14F-4D97-AF65-F5344CB8AC3E}">
-        <p14:creationId xmlns:p14="http://schemas.microsoft.com/office/powerpoint/2010/main" val="1739966096"/>
       </p:ext>
     </p:extLst>
   </p:cSld>

--- a/figures/figures.pptx
+++ b/figures/figures.pptx
@@ -5,32 +5,37 @@
     <p:sldMasterId id="2147483648" r:id="rId1"/>
   </p:sldMasterIdLst>
   <p:notesMasterIdLst>
-    <p:notesMasterId r:id="rId25"/>
+    <p:notesMasterId r:id="rId30"/>
   </p:notesMasterIdLst>
   <p:sldIdLst>
     <p:sldId id="256" r:id="rId2"/>
-    <p:sldId id="280" r:id="rId3"/>
-    <p:sldId id="279" r:id="rId4"/>
-    <p:sldId id="277" r:id="rId5"/>
-    <p:sldId id="257" r:id="rId6"/>
-    <p:sldId id="258" r:id="rId7"/>
-    <p:sldId id="272" r:id="rId8"/>
-    <p:sldId id="273" r:id="rId9"/>
-    <p:sldId id="275" r:id="rId10"/>
-    <p:sldId id="274" r:id="rId11"/>
-    <p:sldId id="268" r:id="rId12"/>
-    <p:sldId id="269" r:id="rId13"/>
-    <p:sldId id="260" r:id="rId14"/>
-    <p:sldId id="263" r:id="rId15"/>
-    <p:sldId id="261" r:id="rId16"/>
-    <p:sldId id="270" r:id="rId17"/>
-    <p:sldId id="262" r:id="rId18"/>
-    <p:sldId id="265" r:id="rId19"/>
-    <p:sldId id="266" r:id="rId20"/>
-    <p:sldId id="267" r:id="rId21"/>
-    <p:sldId id="271" r:id="rId22"/>
-    <p:sldId id="276" r:id="rId23"/>
-    <p:sldId id="278" r:id="rId24"/>
+    <p:sldId id="285" r:id="rId3"/>
+    <p:sldId id="282" r:id="rId4"/>
+    <p:sldId id="281" r:id="rId5"/>
+    <p:sldId id="280" r:id="rId6"/>
+    <p:sldId id="283" r:id="rId7"/>
+    <p:sldId id="279" r:id="rId8"/>
+    <p:sldId id="277" r:id="rId9"/>
+    <p:sldId id="257" r:id="rId10"/>
+    <p:sldId id="258" r:id="rId11"/>
+    <p:sldId id="272" r:id="rId12"/>
+    <p:sldId id="273" r:id="rId13"/>
+    <p:sldId id="275" r:id="rId14"/>
+    <p:sldId id="274" r:id="rId15"/>
+    <p:sldId id="268" r:id="rId16"/>
+    <p:sldId id="269" r:id="rId17"/>
+    <p:sldId id="260" r:id="rId18"/>
+    <p:sldId id="263" r:id="rId19"/>
+    <p:sldId id="261" r:id="rId20"/>
+    <p:sldId id="270" r:id="rId21"/>
+    <p:sldId id="262" r:id="rId22"/>
+    <p:sldId id="265" r:id="rId23"/>
+    <p:sldId id="266" r:id="rId24"/>
+    <p:sldId id="267" r:id="rId25"/>
+    <p:sldId id="271" r:id="rId26"/>
+    <p:sldId id="276" r:id="rId27"/>
+    <p:sldId id="278" r:id="rId28"/>
+    <p:sldId id="284" r:id="rId29"/>
   </p:sldIdLst>
   <p:sldSz cx="12192000" cy="6858000"/>
   <p:notesSz cx="6858000" cy="9144000"/>
@@ -2916,7 +2921,7 @@
           <a:p>
             <a:fld id="{8CF8B62D-F47B-43DC-854F-884833B98021}" type="datetimeFigureOut">
               <a:rPr lang="de-DE" smtClean="0"/>
-              <a:t>11.09.2025</a:t>
+              <a:t>28.10.2025</a:t>
             </a:fld>
             <a:endParaRPr lang="de-DE"/>
           </a:p>
@@ -3249,7 +3254,7 @@
           <a:p>
             <a:fld id="{AB2C2533-D42D-4AF8-9C02-1BDA65857909}" type="slidenum">
               <a:rPr lang="de-DE" smtClean="0"/>
-              <a:t>13</a:t>
+              <a:t>3</a:t>
             </a:fld>
             <a:endParaRPr lang="de-DE"/>
           </a:p>
@@ -3258,7 +3263,7 @@
     </p:spTree>
     <p:extLst>
       <p:ext uri="{BB962C8B-B14F-4D97-AF65-F5344CB8AC3E}">
-        <p14:creationId xmlns:p14="http://schemas.microsoft.com/office/powerpoint/2010/main" val="598521160"/>
+        <p14:creationId xmlns:p14="http://schemas.microsoft.com/office/powerpoint/2010/main" val="1885705055"/>
       </p:ext>
     </p:extLst>
   </p:cSld>
@@ -3333,7 +3338,7 @@
           <a:p>
             <a:fld id="{AB2C2533-D42D-4AF8-9C02-1BDA65857909}" type="slidenum">
               <a:rPr lang="de-DE" smtClean="0"/>
-              <a:t>18</a:t>
+              <a:t>17</a:t>
             </a:fld>
             <a:endParaRPr lang="de-DE"/>
           </a:p>
@@ -3342,7 +3347,7 @@
     </p:spTree>
     <p:extLst>
       <p:ext uri="{BB962C8B-B14F-4D97-AF65-F5344CB8AC3E}">
-        <p14:creationId xmlns:p14="http://schemas.microsoft.com/office/powerpoint/2010/main" val="2965620531"/>
+        <p14:creationId xmlns:p14="http://schemas.microsoft.com/office/powerpoint/2010/main" val="598521160"/>
       </p:ext>
     </p:extLst>
   </p:cSld>
@@ -3426,6 +3431,90 @@
     </p:spTree>
     <p:extLst>
       <p:ext uri="{BB962C8B-B14F-4D97-AF65-F5344CB8AC3E}">
+        <p14:creationId xmlns:p14="http://schemas.microsoft.com/office/powerpoint/2010/main" val="2965620531"/>
+      </p:ext>
+    </p:extLst>
+  </p:cSld>
+  <p:clrMapOvr>
+    <a:masterClrMapping/>
+  </p:clrMapOvr>
+</p:notes>
+</file>
+
+<file path=ppt/notesSlides/notesSlide4.xml><?xml version="1.0" encoding="utf-8"?>
+<p:notes xmlns:a="http://schemas.openxmlformats.org/drawingml/2006/main" xmlns:r="http://schemas.openxmlformats.org/officeDocument/2006/relationships" xmlns:p="http://schemas.openxmlformats.org/presentationml/2006/main">
+  <p:cSld>
+    <p:spTree>
+      <p:nvGrpSpPr>
+        <p:cNvPr id="1" name=""/>
+        <p:cNvGrpSpPr/>
+        <p:nvPr/>
+      </p:nvGrpSpPr>
+      <p:grpSpPr>
+        <a:xfrm>
+          <a:off x="0" y="0"/>
+          <a:ext cx="0" cy="0"/>
+          <a:chOff x="0" y="0"/>
+          <a:chExt cx="0" cy="0"/>
+        </a:xfrm>
+      </p:grpSpPr>
+      <p:sp>
+        <p:nvSpPr>
+          <p:cNvPr id="2" name="Slide Image Placeholder 1"/>
+          <p:cNvSpPr>
+            <a:spLocks noGrp="1" noRot="1" noChangeAspect="1"/>
+          </p:cNvSpPr>
+          <p:nvPr>
+            <p:ph type="sldImg"/>
+          </p:nvPr>
+        </p:nvSpPr>
+        <p:spPr/>
+      </p:sp>
+      <p:sp>
+        <p:nvSpPr>
+          <p:cNvPr id="3" name="Notes Placeholder 2"/>
+          <p:cNvSpPr>
+            <a:spLocks noGrp="1"/>
+          </p:cNvSpPr>
+          <p:nvPr>
+            <p:ph type="body" idx="1"/>
+          </p:nvPr>
+        </p:nvSpPr>
+        <p:spPr/>
+        <p:txBody>
+          <a:bodyPr/>
+          <a:lstStyle/>
+          <a:p>
+            <a:endParaRPr lang="de-DE" dirty="0"/>
+          </a:p>
+        </p:txBody>
+      </p:sp>
+      <p:sp>
+        <p:nvSpPr>
+          <p:cNvPr id="4" name="Slide Number Placeholder 3"/>
+          <p:cNvSpPr>
+            <a:spLocks noGrp="1"/>
+          </p:cNvSpPr>
+          <p:nvPr>
+            <p:ph type="sldNum" sz="quarter" idx="5"/>
+          </p:nvPr>
+        </p:nvSpPr>
+        <p:spPr/>
+        <p:txBody>
+          <a:bodyPr/>
+          <a:lstStyle/>
+          <a:p>
+            <a:fld id="{AB2C2533-D42D-4AF8-9C02-1BDA65857909}" type="slidenum">
+              <a:rPr lang="de-DE" smtClean="0"/>
+              <a:t>26</a:t>
+            </a:fld>
+            <a:endParaRPr lang="de-DE"/>
+          </a:p>
+        </p:txBody>
+      </p:sp>
+    </p:spTree>
+    <p:extLst>
+      <p:ext uri="{BB962C8B-B14F-4D97-AF65-F5344CB8AC3E}">
         <p14:creationId xmlns:p14="http://schemas.microsoft.com/office/powerpoint/2010/main" val="3640143401"/>
       </p:ext>
     </p:extLst>
@@ -3585,7 +3674,7 @@
           <a:p>
             <a:fld id="{3146589B-F63A-42CD-B487-02649808258F}" type="datetimeFigureOut">
               <a:rPr lang="de-DE" smtClean="0"/>
-              <a:t>11.09.2025</a:t>
+              <a:t>28.10.2025</a:t>
             </a:fld>
             <a:endParaRPr lang="de-DE"/>
           </a:p>
@@ -3785,7 +3874,7 @@
           <a:p>
             <a:fld id="{3146589B-F63A-42CD-B487-02649808258F}" type="datetimeFigureOut">
               <a:rPr lang="de-DE" smtClean="0"/>
-              <a:t>11.09.2025</a:t>
+              <a:t>28.10.2025</a:t>
             </a:fld>
             <a:endParaRPr lang="de-DE"/>
           </a:p>
@@ -3995,7 +4084,7 @@
           <a:p>
             <a:fld id="{3146589B-F63A-42CD-B487-02649808258F}" type="datetimeFigureOut">
               <a:rPr lang="de-DE" smtClean="0"/>
-              <a:t>11.09.2025</a:t>
+              <a:t>28.10.2025</a:t>
             </a:fld>
             <a:endParaRPr lang="de-DE"/>
           </a:p>
@@ -4195,7 +4284,7 @@
           <a:p>
             <a:fld id="{3146589B-F63A-42CD-B487-02649808258F}" type="datetimeFigureOut">
               <a:rPr lang="de-DE" smtClean="0"/>
-              <a:t>11.09.2025</a:t>
+              <a:t>28.10.2025</a:t>
             </a:fld>
             <a:endParaRPr lang="de-DE"/>
           </a:p>
@@ -4471,7 +4560,7 @@
           <a:p>
             <a:fld id="{3146589B-F63A-42CD-B487-02649808258F}" type="datetimeFigureOut">
               <a:rPr lang="de-DE" smtClean="0"/>
-              <a:t>11.09.2025</a:t>
+              <a:t>28.10.2025</a:t>
             </a:fld>
             <a:endParaRPr lang="de-DE"/>
           </a:p>
@@ -4739,7 +4828,7 @@
           <a:p>
             <a:fld id="{3146589B-F63A-42CD-B487-02649808258F}" type="datetimeFigureOut">
               <a:rPr lang="de-DE" smtClean="0"/>
-              <a:t>11.09.2025</a:t>
+              <a:t>28.10.2025</a:t>
             </a:fld>
             <a:endParaRPr lang="de-DE"/>
           </a:p>
@@ -5154,7 +5243,7 @@
           <a:p>
             <a:fld id="{3146589B-F63A-42CD-B487-02649808258F}" type="datetimeFigureOut">
               <a:rPr lang="de-DE" smtClean="0"/>
-              <a:t>11.09.2025</a:t>
+              <a:t>28.10.2025</a:t>
             </a:fld>
             <a:endParaRPr lang="de-DE"/>
           </a:p>
@@ -5296,7 +5385,7 @@
           <a:p>
             <a:fld id="{3146589B-F63A-42CD-B487-02649808258F}" type="datetimeFigureOut">
               <a:rPr lang="de-DE" smtClean="0"/>
-              <a:t>11.09.2025</a:t>
+              <a:t>28.10.2025</a:t>
             </a:fld>
             <a:endParaRPr lang="de-DE"/>
           </a:p>
@@ -5409,7 +5498,7 @@
           <a:p>
             <a:fld id="{3146589B-F63A-42CD-B487-02649808258F}" type="datetimeFigureOut">
               <a:rPr lang="de-DE" smtClean="0"/>
-              <a:t>11.09.2025</a:t>
+              <a:t>28.10.2025</a:t>
             </a:fld>
             <a:endParaRPr lang="de-DE"/>
           </a:p>
@@ -5722,7 +5811,7 @@
           <a:p>
             <a:fld id="{3146589B-F63A-42CD-B487-02649808258F}" type="datetimeFigureOut">
               <a:rPr lang="de-DE" smtClean="0"/>
-              <a:t>11.09.2025</a:t>
+              <a:t>28.10.2025</a:t>
             </a:fld>
             <a:endParaRPr lang="de-DE"/>
           </a:p>
@@ -6011,7 +6100,7 @@
           <a:p>
             <a:fld id="{3146589B-F63A-42CD-B487-02649808258F}" type="datetimeFigureOut">
               <a:rPr lang="de-DE" smtClean="0"/>
-              <a:t>11.09.2025</a:t>
+              <a:t>28.10.2025</a:t>
             </a:fld>
             <a:endParaRPr lang="de-DE"/>
           </a:p>
@@ -6254,7 +6343,7 @@
           <a:p>
             <a:fld id="{3146589B-F63A-42CD-B487-02649808258F}" type="datetimeFigureOut">
               <a:rPr lang="de-DE" smtClean="0"/>
-              <a:t>11.09.2025</a:t>
+              <a:t>28.10.2025</a:t>
             </a:fld>
             <a:endParaRPr lang="de-DE"/>
           </a:p>
@@ -8573,6 +8662,1211 @@
       </p:grpSpPr>
       <p:pic>
         <p:nvPicPr>
+          <p:cNvPr id="5" name="Picture 4" descr="A black background with a white light&#10;&#10;AI-generated content may be incorrect.">
+            <a:extLst>
+              <a:ext uri="{FF2B5EF4-FFF2-40B4-BE49-F238E27FC236}">
+                <a16:creationId xmlns:a16="http://schemas.microsoft.com/office/drawing/2014/main" id="{93A6E355-02C1-1BAE-2D5C-86076BDA8267}"/>
+              </a:ext>
+            </a:extLst>
+          </p:cNvPr>
+          <p:cNvPicPr>
+            <a:picLocks noChangeAspect="1"/>
+          </p:cNvPicPr>
+          <p:nvPr/>
+        </p:nvPicPr>
+        <p:blipFill>
+          <a:blip r:embed="rId2">
+            <a:extLst>
+              <a:ext uri="{28A0092B-C50C-407E-A947-70E740481C1C}">
+                <a14:useLocalDpi xmlns:a14="http://schemas.microsoft.com/office/drawing/2010/main" val="0"/>
+              </a:ext>
+            </a:extLst>
+          </a:blip>
+          <a:stretch>
+            <a:fillRect/>
+          </a:stretch>
+        </p:blipFill>
+        <p:spPr>
+          <a:xfrm>
+            <a:off x="1205959" y="1970314"/>
+            <a:ext cx="1440000" cy="1440000"/>
+          </a:xfrm>
+          <a:prstGeom prst="rect">
+            <a:avLst/>
+          </a:prstGeom>
+        </p:spPr>
+      </p:pic>
+      <p:pic>
+        <p:nvPicPr>
+          <p:cNvPr id="7" name="Picture 6" descr="A black background with a white light&#10;&#10;AI-generated content may be incorrect.">
+            <a:extLst>
+              <a:ext uri="{FF2B5EF4-FFF2-40B4-BE49-F238E27FC236}">
+                <a16:creationId xmlns:a16="http://schemas.microsoft.com/office/drawing/2014/main" id="{6CFE4C82-F2C0-2E08-4DF3-73210F4E6027}"/>
+              </a:ext>
+            </a:extLst>
+          </p:cNvPr>
+          <p:cNvPicPr>
+            <a:picLocks noChangeAspect="1"/>
+          </p:cNvPicPr>
+          <p:nvPr/>
+        </p:nvPicPr>
+        <p:blipFill>
+          <a:blip r:embed="rId2">
+            <a:extLst>
+              <a:ext uri="{28A0092B-C50C-407E-A947-70E740481C1C}">
+                <a14:useLocalDpi xmlns:a14="http://schemas.microsoft.com/office/drawing/2010/main" val="0"/>
+              </a:ext>
+            </a:extLst>
+          </a:blip>
+          <a:stretch>
+            <a:fillRect/>
+          </a:stretch>
+        </p:blipFill>
+        <p:spPr>
+          <a:xfrm>
+            <a:off x="1877787" y="2820906"/>
+            <a:ext cx="1440000" cy="1440000"/>
+          </a:xfrm>
+          <a:prstGeom prst="rect">
+            <a:avLst/>
+          </a:prstGeom>
+        </p:spPr>
+      </p:pic>
+      <p:sp>
+        <p:nvSpPr>
+          <p:cNvPr id="8" name="Arrow: Right 7">
+            <a:extLst>
+              <a:ext uri="{FF2B5EF4-FFF2-40B4-BE49-F238E27FC236}">
+                <a16:creationId xmlns:a16="http://schemas.microsoft.com/office/drawing/2014/main" id="{43A9AAE6-2705-6A92-10AE-995BBD2DBD35}"/>
+              </a:ext>
+            </a:extLst>
+          </p:cNvPr>
+          <p:cNvSpPr/>
+          <p:nvPr/>
+        </p:nvSpPr>
+        <p:spPr>
+          <a:xfrm>
+            <a:off x="3744641" y="2925682"/>
+            <a:ext cx="978408" cy="484632"/>
+          </a:xfrm>
+          <a:prstGeom prst="rightArrow">
+            <a:avLst/>
+          </a:prstGeom>
+        </p:spPr>
+        <p:style>
+          <a:lnRef idx="2">
+            <a:schemeClr val="accent1">
+              <a:shade val="15000"/>
+            </a:schemeClr>
+          </a:lnRef>
+          <a:fillRef idx="1">
+            <a:schemeClr val="accent1"/>
+          </a:fillRef>
+          <a:effectRef idx="0">
+            <a:schemeClr val="accent1"/>
+          </a:effectRef>
+          <a:fontRef idx="minor">
+            <a:schemeClr val="lt1"/>
+          </a:fontRef>
+        </p:style>
+        <p:txBody>
+          <a:bodyPr rtlCol="0" anchor="ctr"/>
+          <a:lstStyle/>
+          <a:p>
+            <a:pPr algn="ctr"/>
+            <a:endParaRPr lang="de-DE"/>
+          </a:p>
+        </p:txBody>
+      </p:sp>
+      <p:sp>
+        <p:nvSpPr>
+          <p:cNvPr id="9" name="TextBox 8">
+            <a:extLst>
+              <a:ext uri="{FF2B5EF4-FFF2-40B4-BE49-F238E27FC236}">
+                <a16:creationId xmlns:a16="http://schemas.microsoft.com/office/drawing/2014/main" id="{79DFAC1E-A103-83B1-E158-EEA44EE51D49}"/>
+              </a:ext>
+            </a:extLst>
+          </p:cNvPr>
+          <p:cNvSpPr txBox="1"/>
+          <p:nvPr/>
+        </p:nvSpPr>
+        <p:spPr>
+          <a:xfrm>
+            <a:off x="1793859" y="1609991"/>
+            <a:ext cx="1259512" cy="400110"/>
+          </a:xfrm>
+          <a:prstGeom prst="rect">
+            <a:avLst/>
+          </a:prstGeom>
+          <a:noFill/>
+        </p:spPr>
+        <p:txBody>
+          <a:bodyPr wrap="none" rtlCol="0">
+            <a:spAutoFit/>
+          </a:bodyPr>
+          <a:lstStyle/>
+          <a:p>
+            <a:r>
+              <a:rPr lang="de-DE" sz="2000" b="1" dirty="0"/>
+              <a:t>Raw data</a:t>
+            </a:r>
+          </a:p>
+        </p:txBody>
+      </p:sp>
+      <p:pic>
+        <p:nvPicPr>
+          <p:cNvPr id="11" name="Picture 10" descr="A close-up of a foot&#10;&#10;AI-generated content may be incorrect.">
+            <a:extLst>
+              <a:ext uri="{FF2B5EF4-FFF2-40B4-BE49-F238E27FC236}">
+                <a16:creationId xmlns:a16="http://schemas.microsoft.com/office/drawing/2014/main" id="{CBE5D9DE-A071-0393-49A2-D9E5E9DF794C}"/>
+              </a:ext>
+            </a:extLst>
+          </p:cNvPr>
+          <p:cNvPicPr>
+            <a:picLocks noChangeAspect="1"/>
+          </p:cNvPicPr>
+          <p:nvPr/>
+        </p:nvPicPr>
+        <p:blipFill>
+          <a:blip r:embed="rId3">
+            <a:extLst>
+              <a:ext uri="{28A0092B-C50C-407E-A947-70E740481C1C}">
+                <a14:useLocalDpi xmlns:a14="http://schemas.microsoft.com/office/drawing/2010/main" val="0"/>
+              </a:ext>
+            </a:extLst>
+          </a:blip>
+          <a:stretch>
+            <a:fillRect/>
+          </a:stretch>
+        </p:blipFill>
+        <p:spPr>
+          <a:xfrm>
+            <a:off x="5038778" y="1970314"/>
+            <a:ext cx="1440000" cy="1440000"/>
+          </a:xfrm>
+          <a:prstGeom prst="rect">
+            <a:avLst/>
+          </a:prstGeom>
+        </p:spPr>
+      </p:pic>
+      <p:pic>
+        <p:nvPicPr>
+          <p:cNvPr id="13" name="Picture 12" descr="A close-up of a foot x-ray&#10;&#10;AI-generated content may be incorrect.">
+            <a:extLst>
+              <a:ext uri="{FF2B5EF4-FFF2-40B4-BE49-F238E27FC236}">
+                <a16:creationId xmlns:a16="http://schemas.microsoft.com/office/drawing/2014/main" id="{FD8020C9-99D2-77D7-6C9C-BA872977E3F5}"/>
+              </a:ext>
+            </a:extLst>
+          </p:cNvPr>
+          <p:cNvPicPr>
+            <a:picLocks noChangeAspect="1"/>
+          </p:cNvPicPr>
+          <p:nvPr/>
+        </p:nvPicPr>
+        <p:blipFill>
+          <a:blip r:embed="rId4">
+            <a:extLst>
+              <a:ext uri="{28A0092B-C50C-407E-A947-70E740481C1C}">
+                <a14:useLocalDpi xmlns:a14="http://schemas.microsoft.com/office/drawing/2010/main" val="0"/>
+              </a:ext>
+            </a:extLst>
+          </a:blip>
+          <a:stretch>
+            <a:fillRect/>
+          </a:stretch>
+        </p:blipFill>
+        <p:spPr>
+          <a:xfrm>
+            <a:off x="5747658" y="2820906"/>
+            <a:ext cx="1440000" cy="1440000"/>
+          </a:xfrm>
+          <a:prstGeom prst="rect">
+            <a:avLst/>
+          </a:prstGeom>
+        </p:spPr>
+      </p:pic>
+      <p:sp>
+        <p:nvSpPr>
+          <p:cNvPr id="14" name="Arrow: Right 13">
+            <a:extLst>
+              <a:ext uri="{FF2B5EF4-FFF2-40B4-BE49-F238E27FC236}">
+                <a16:creationId xmlns:a16="http://schemas.microsoft.com/office/drawing/2014/main" id="{75357071-0953-3E01-5B9A-296165B062F4}"/>
+              </a:ext>
+            </a:extLst>
+          </p:cNvPr>
+          <p:cNvSpPr/>
+          <p:nvPr/>
+        </p:nvSpPr>
+        <p:spPr>
+          <a:xfrm>
+            <a:off x="7734953" y="2871827"/>
+            <a:ext cx="978408" cy="484632"/>
+          </a:xfrm>
+          <a:prstGeom prst="rightArrow">
+            <a:avLst/>
+          </a:prstGeom>
+        </p:spPr>
+        <p:style>
+          <a:lnRef idx="2">
+            <a:schemeClr val="accent1">
+              <a:shade val="15000"/>
+            </a:schemeClr>
+          </a:lnRef>
+          <a:fillRef idx="1">
+            <a:schemeClr val="accent1"/>
+          </a:fillRef>
+          <a:effectRef idx="0">
+            <a:schemeClr val="accent1"/>
+          </a:effectRef>
+          <a:fontRef idx="minor">
+            <a:schemeClr val="lt1"/>
+          </a:fontRef>
+        </p:style>
+        <p:txBody>
+          <a:bodyPr rtlCol="0" anchor="ctr"/>
+          <a:lstStyle/>
+          <a:p>
+            <a:pPr algn="ctr"/>
+            <a:endParaRPr lang="de-DE"/>
+          </a:p>
+        </p:txBody>
+      </p:sp>
+      <p:pic>
+        <p:nvPicPr>
+          <p:cNvPr id="16" name="Picture 15" descr="A close-up of a foot x-ray&#10;&#10;AI-generated content may be incorrect.">
+            <a:extLst>
+              <a:ext uri="{FF2B5EF4-FFF2-40B4-BE49-F238E27FC236}">
+                <a16:creationId xmlns:a16="http://schemas.microsoft.com/office/drawing/2014/main" id="{AAD01A28-4EA5-A011-7152-558BA8CCD729}"/>
+              </a:ext>
+            </a:extLst>
+          </p:cNvPr>
+          <p:cNvPicPr>
+            <a:picLocks noChangeAspect="1"/>
+          </p:cNvPicPr>
+          <p:nvPr/>
+        </p:nvPicPr>
+        <p:blipFill>
+          <a:blip r:embed="rId5">
+            <a:extLst>
+              <a:ext uri="{28A0092B-C50C-407E-A947-70E740481C1C}">
+                <a14:useLocalDpi xmlns:a14="http://schemas.microsoft.com/office/drawing/2010/main" val="0"/>
+              </a:ext>
+            </a:extLst>
+          </a:blip>
+          <a:stretch>
+            <a:fillRect/>
+          </a:stretch>
+        </p:blipFill>
+        <p:spPr>
+          <a:xfrm>
+            <a:off x="8957572" y="2034143"/>
+            <a:ext cx="2160000" cy="2160000"/>
+          </a:xfrm>
+          <a:prstGeom prst="rect">
+            <a:avLst/>
+          </a:prstGeom>
+        </p:spPr>
+      </p:pic>
+      <p:sp>
+        <p:nvSpPr>
+          <p:cNvPr id="17" name="TextBox 16">
+            <a:extLst>
+              <a:ext uri="{FF2B5EF4-FFF2-40B4-BE49-F238E27FC236}">
+                <a16:creationId xmlns:a16="http://schemas.microsoft.com/office/drawing/2014/main" id="{ED53BAF1-A167-D8A2-0CDB-AD72E265538F}"/>
+              </a:ext>
+            </a:extLst>
+          </p:cNvPr>
+          <p:cNvSpPr txBox="1"/>
+          <p:nvPr/>
+        </p:nvSpPr>
+        <p:spPr>
+          <a:xfrm>
+            <a:off x="3887663" y="2676056"/>
+            <a:ext cx="494366" cy="369332"/>
+          </a:xfrm>
+          <a:prstGeom prst="rect">
+            <a:avLst/>
+          </a:prstGeom>
+          <a:noFill/>
+        </p:spPr>
+        <p:txBody>
+          <a:bodyPr wrap="none" rtlCol="0">
+            <a:spAutoFit/>
+          </a:bodyPr>
+          <a:lstStyle/>
+          <a:p>
+            <a:r>
+              <a:rPr lang="de-DE" b="1" dirty="0"/>
+              <a:t>IFT</a:t>
+            </a:r>
+          </a:p>
+        </p:txBody>
+      </p:sp>
+      <p:sp>
+        <p:nvSpPr>
+          <p:cNvPr id="18" name="TextBox 17">
+            <a:extLst>
+              <a:ext uri="{FF2B5EF4-FFF2-40B4-BE49-F238E27FC236}">
+                <a16:creationId xmlns:a16="http://schemas.microsoft.com/office/drawing/2014/main" id="{91A697C3-F840-6886-0B47-1A18BC01244C}"/>
+              </a:ext>
+            </a:extLst>
+          </p:cNvPr>
+          <p:cNvSpPr txBox="1"/>
+          <p:nvPr/>
+        </p:nvSpPr>
+        <p:spPr>
+          <a:xfrm>
+            <a:off x="7802989" y="2676056"/>
+            <a:ext cx="635110" cy="369332"/>
+          </a:xfrm>
+          <a:prstGeom prst="rect">
+            <a:avLst/>
+          </a:prstGeom>
+          <a:noFill/>
+        </p:spPr>
+        <p:txBody>
+          <a:bodyPr wrap="none" rtlCol="0">
+            <a:spAutoFit/>
+          </a:bodyPr>
+          <a:lstStyle/>
+          <a:p>
+            <a:r>
+              <a:rPr lang="de-DE" b="1" dirty="0"/>
+              <a:t>mag</a:t>
+            </a:r>
+          </a:p>
+        </p:txBody>
+      </p:sp>
+      <p:sp>
+        <p:nvSpPr>
+          <p:cNvPr id="25" name="TextBox 24">
+            <a:extLst>
+              <a:ext uri="{FF2B5EF4-FFF2-40B4-BE49-F238E27FC236}">
+                <a16:creationId xmlns:a16="http://schemas.microsoft.com/office/drawing/2014/main" id="{85686E64-DA0C-F704-C66C-9F0BB63BCB4A}"/>
+              </a:ext>
+            </a:extLst>
+          </p:cNvPr>
+          <p:cNvSpPr txBox="1"/>
+          <p:nvPr/>
+        </p:nvSpPr>
+        <p:spPr>
+          <a:xfrm>
+            <a:off x="5193842" y="1609991"/>
+            <a:ext cx="1993816" cy="400110"/>
+          </a:xfrm>
+          <a:prstGeom prst="rect">
+            <a:avLst/>
+          </a:prstGeom>
+          <a:noFill/>
+        </p:spPr>
+        <p:txBody>
+          <a:bodyPr wrap="none" rtlCol="0">
+            <a:spAutoFit/>
+          </a:bodyPr>
+          <a:lstStyle/>
+          <a:p>
+            <a:r>
+              <a:rPr lang="de-DE" sz="2000" b="1" dirty="0"/>
+              <a:t>Complex image</a:t>
+            </a:r>
+          </a:p>
+        </p:txBody>
+      </p:sp>
+      <p:sp>
+        <p:nvSpPr>
+          <p:cNvPr id="26" name="TextBox 25">
+            <a:extLst>
+              <a:ext uri="{FF2B5EF4-FFF2-40B4-BE49-F238E27FC236}">
+                <a16:creationId xmlns:a16="http://schemas.microsoft.com/office/drawing/2014/main" id="{C80C5226-4745-1626-7796-31C474BF0A41}"/>
+              </a:ext>
+            </a:extLst>
+          </p:cNvPr>
+          <p:cNvSpPr txBox="1"/>
+          <p:nvPr/>
+        </p:nvSpPr>
+        <p:spPr>
+          <a:xfrm>
+            <a:off x="1101085" y="3345354"/>
+            <a:ext cx="445956" cy="369332"/>
+          </a:xfrm>
+          <a:prstGeom prst="rect">
+            <a:avLst/>
+          </a:prstGeom>
+          <a:noFill/>
+        </p:spPr>
+        <p:txBody>
+          <a:bodyPr wrap="none" rtlCol="0">
+            <a:spAutoFit/>
+          </a:bodyPr>
+          <a:lstStyle/>
+          <a:p>
+            <a:r>
+              <a:rPr lang="de-DE" dirty="0"/>
+              <a:t>Re</a:t>
+            </a:r>
+          </a:p>
+        </p:txBody>
+      </p:sp>
+      <p:sp>
+        <p:nvSpPr>
+          <p:cNvPr id="27" name="TextBox 26">
+            <a:extLst>
+              <a:ext uri="{FF2B5EF4-FFF2-40B4-BE49-F238E27FC236}">
+                <a16:creationId xmlns:a16="http://schemas.microsoft.com/office/drawing/2014/main" id="{21A8AE9D-8266-1742-B988-BB0D8DF2FC4D}"/>
+              </a:ext>
+            </a:extLst>
+          </p:cNvPr>
+          <p:cNvSpPr txBox="1"/>
+          <p:nvPr/>
+        </p:nvSpPr>
+        <p:spPr>
+          <a:xfrm>
+            <a:off x="1779814" y="4206476"/>
+            <a:ext cx="441146" cy="369332"/>
+          </a:xfrm>
+          <a:prstGeom prst="rect">
+            <a:avLst/>
+          </a:prstGeom>
+          <a:noFill/>
+        </p:spPr>
+        <p:txBody>
+          <a:bodyPr wrap="none" rtlCol="0">
+            <a:spAutoFit/>
+          </a:bodyPr>
+          <a:lstStyle/>
+          <a:p>
+            <a:r>
+              <a:rPr lang="de-DE" dirty="0"/>
+              <a:t>Im</a:t>
+            </a:r>
+          </a:p>
+        </p:txBody>
+      </p:sp>
+      <p:sp>
+        <p:nvSpPr>
+          <p:cNvPr id="28" name="TextBox 27">
+            <a:extLst>
+              <a:ext uri="{FF2B5EF4-FFF2-40B4-BE49-F238E27FC236}">
+                <a16:creationId xmlns:a16="http://schemas.microsoft.com/office/drawing/2014/main" id="{FE318620-F4CB-FB97-3497-95182073BE2F}"/>
+              </a:ext>
+            </a:extLst>
+          </p:cNvPr>
+          <p:cNvSpPr txBox="1"/>
+          <p:nvPr/>
+        </p:nvSpPr>
+        <p:spPr>
+          <a:xfrm>
+            <a:off x="4942725" y="3345354"/>
+            <a:ext cx="445956" cy="369332"/>
+          </a:xfrm>
+          <a:prstGeom prst="rect">
+            <a:avLst/>
+          </a:prstGeom>
+          <a:noFill/>
+        </p:spPr>
+        <p:txBody>
+          <a:bodyPr wrap="none" rtlCol="0">
+            <a:spAutoFit/>
+          </a:bodyPr>
+          <a:lstStyle/>
+          <a:p>
+            <a:r>
+              <a:rPr lang="de-DE" dirty="0"/>
+              <a:t>Re</a:t>
+            </a:r>
+          </a:p>
+        </p:txBody>
+      </p:sp>
+      <p:sp>
+        <p:nvSpPr>
+          <p:cNvPr id="29" name="TextBox 28">
+            <a:extLst>
+              <a:ext uri="{FF2B5EF4-FFF2-40B4-BE49-F238E27FC236}">
+                <a16:creationId xmlns:a16="http://schemas.microsoft.com/office/drawing/2014/main" id="{9531A174-E7DD-FBCA-7C80-519265D368DC}"/>
+              </a:ext>
+            </a:extLst>
+          </p:cNvPr>
+          <p:cNvSpPr txBox="1"/>
+          <p:nvPr/>
+        </p:nvSpPr>
+        <p:spPr>
+          <a:xfrm>
+            <a:off x="5660570" y="4206476"/>
+            <a:ext cx="441146" cy="369332"/>
+          </a:xfrm>
+          <a:prstGeom prst="rect">
+            <a:avLst/>
+          </a:prstGeom>
+          <a:noFill/>
+        </p:spPr>
+        <p:txBody>
+          <a:bodyPr wrap="none" rtlCol="0">
+            <a:spAutoFit/>
+          </a:bodyPr>
+          <a:lstStyle/>
+          <a:p>
+            <a:r>
+              <a:rPr lang="de-DE" dirty="0"/>
+              <a:t>Im</a:t>
+            </a:r>
+          </a:p>
+        </p:txBody>
+      </p:sp>
+      <p:sp>
+        <p:nvSpPr>
+          <p:cNvPr id="30" name="TextBox 29">
+            <a:extLst>
+              <a:ext uri="{FF2B5EF4-FFF2-40B4-BE49-F238E27FC236}">
+                <a16:creationId xmlns:a16="http://schemas.microsoft.com/office/drawing/2014/main" id="{861768CE-637F-159E-CC0F-F2D9DED5E520}"/>
+              </a:ext>
+            </a:extLst>
+          </p:cNvPr>
+          <p:cNvSpPr txBox="1"/>
+          <p:nvPr/>
+        </p:nvSpPr>
+        <p:spPr>
+          <a:xfrm>
+            <a:off x="9048166" y="1640769"/>
+            <a:ext cx="1978811" cy="369332"/>
+          </a:xfrm>
+          <a:prstGeom prst="rect">
+            <a:avLst/>
+          </a:prstGeom>
+          <a:noFill/>
+        </p:spPr>
+        <p:txBody>
+          <a:bodyPr wrap="none" rtlCol="0">
+            <a:spAutoFit/>
+          </a:bodyPr>
+          <a:lstStyle/>
+          <a:p>
+            <a:r>
+              <a:rPr lang="de-DE" b="1" dirty="0"/>
+              <a:t>Magnitude image</a:t>
+            </a:r>
+          </a:p>
+        </p:txBody>
+      </p:sp>
+    </p:spTree>
+    <p:extLst>
+      <p:ext uri="{BB962C8B-B14F-4D97-AF65-F5344CB8AC3E}">
+        <p14:creationId xmlns:p14="http://schemas.microsoft.com/office/powerpoint/2010/main" val="2165784931"/>
+      </p:ext>
+    </p:extLst>
+  </p:cSld>
+  <p:clrMapOvr>
+    <a:masterClrMapping/>
+  </p:clrMapOvr>
+</p:sld>
+</file>
+
+<file path=ppt/slides/slide11.xml><?xml version="1.0" encoding="utf-8"?>
+<p:sld xmlns:a="http://schemas.openxmlformats.org/drawingml/2006/main" xmlns:r="http://schemas.openxmlformats.org/officeDocument/2006/relationships" xmlns:p="http://schemas.openxmlformats.org/presentationml/2006/main">
+  <p:cSld>
+    <p:spTree>
+      <p:nvGrpSpPr>
+        <p:cNvPr id="1" name=""/>
+        <p:cNvGrpSpPr/>
+        <p:nvPr/>
+      </p:nvGrpSpPr>
+      <p:grpSpPr>
+        <a:xfrm>
+          <a:off x="0" y="0"/>
+          <a:ext cx="0" cy="0"/>
+          <a:chOff x="0" y="0"/>
+          <a:chExt cx="0" cy="0"/>
+        </a:xfrm>
+      </p:grpSpPr>
+      <p:pic>
+        <p:nvPicPr>
+          <p:cNvPr id="26" name="Picture 25" descr="A black and white square with white squares&#10;&#10;AI-generated content may be incorrect.">
+            <a:extLst>
+              <a:ext uri="{FF2B5EF4-FFF2-40B4-BE49-F238E27FC236}">
+                <a16:creationId xmlns:a16="http://schemas.microsoft.com/office/drawing/2014/main" id="{842A157A-BA58-4DD5-A82B-001B08F7F2A0}"/>
+              </a:ext>
+            </a:extLst>
+          </p:cNvPr>
+          <p:cNvPicPr>
+            <a:picLocks noChangeAspect="1"/>
+          </p:cNvPicPr>
+          <p:nvPr/>
+        </p:nvPicPr>
+        <p:blipFill>
+          <a:blip r:embed="rId2">
+            <a:extLst>
+              <a:ext uri="{28A0092B-C50C-407E-A947-70E740481C1C}">
+                <a14:useLocalDpi xmlns:a14="http://schemas.microsoft.com/office/drawing/2010/main" val="0"/>
+              </a:ext>
+            </a:extLst>
+          </a:blip>
+          <a:stretch>
+            <a:fillRect/>
+          </a:stretch>
+        </p:blipFill>
+        <p:spPr>
+          <a:xfrm>
+            <a:off x="877997" y="880731"/>
+            <a:ext cx="4073831" cy="4073831"/>
+          </a:xfrm>
+          <a:prstGeom prst="rect">
+            <a:avLst/>
+          </a:prstGeom>
+        </p:spPr>
+      </p:pic>
+      <p:pic>
+        <p:nvPicPr>
+          <p:cNvPr id="23" name="Picture 22" descr="A group of colorful lines&#10;&#10;AI-generated content may be incorrect.">
+            <a:extLst>
+              <a:ext uri="{FF2B5EF4-FFF2-40B4-BE49-F238E27FC236}">
+                <a16:creationId xmlns:a16="http://schemas.microsoft.com/office/drawing/2014/main" id="{C293442C-66B0-3A06-6D50-E1E06AD33F90}"/>
+              </a:ext>
+            </a:extLst>
+          </p:cNvPr>
+          <p:cNvPicPr>
+            <a:picLocks noChangeAspect="1"/>
+          </p:cNvPicPr>
+          <p:nvPr/>
+        </p:nvPicPr>
+        <p:blipFill>
+          <a:blip r:embed="rId3">
+            <a:extLst>
+              <a:ext uri="{28A0092B-C50C-407E-A947-70E740481C1C}">
+                <a14:useLocalDpi xmlns:a14="http://schemas.microsoft.com/office/drawing/2010/main" val="0"/>
+              </a:ext>
+            </a:extLst>
+          </a:blip>
+          <a:stretch>
+            <a:fillRect/>
+          </a:stretch>
+        </p:blipFill>
+        <p:spPr>
+          <a:xfrm>
+            <a:off x="1981757" y="1488560"/>
+            <a:ext cx="2462652" cy="2340000"/>
+          </a:xfrm>
+          <a:prstGeom prst="rect">
+            <a:avLst/>
+          </a:prstGeom>
+        </p:spPr>
+      </p:pic>
+      <p:pic>
+        <p:nvPicPr>
+          <p:cNvPr id="25" name="Picture 24" descr="A grid of white lines on a black background&#10;&#10;AI-generated content may be incorrect.">
+            <a:extLst>
+              <a:ext uri="{FF2B5EF4-FFF2-40B4-BE49-F238E27FC236}">
+                <a16:creationId xmlns:a16="http://schemas.microsoft.com/office/drawing/2014/main" id="{EFDDF97E-F3F0-784F-7C4E-683677434AA0}"/>
+              </a:ext>
+            </a:extLst>
+          </p:cNvPr>
+          <p:cNvPicPr>
+            <a:picLocks noChangeAspect="1"/>
+          </p:cNvPicPr>
+          <p:nvPr/>
+        </p:nvPicPr>
+        <p:blipFill>
+          <a:blip r:embed="rId4">
+            <a:extLst>
+              <a:ext uri="{28A0092B-C50C-407E-A947-70E740481C1C}">
+                <a14:useLocalDpi xmlns:a14="http://schemas.microsoft.com/office/drawing/2010/main" val="0"/>
+              </a:ext>
+            </a:extLst>
+          </a:blip>
+          <a:stretch>
+            <a:fillRect/>
+          </a:stretch>
+        </p:blipFill>
+        <p:spPr>
+          <a:xfrm>
+            <a:off x="5545226" y="880731"/>
+            <a:ext cx="6128502" cy="3499883"/>
+          </a:xfrm>
+          <a:prstGeom prst="rect">
+            <a:avLst/>
+          </a:prstGeom>
+        </p:spPr>
+      </p:pic>
+    </p:spTree>
+    <p:extLst>
+      <p:ext uri="{BB962C8B-B14F-4D97-AF65-F5344CB8AC3E}">
+        <p14:creationId xmlns:p14="http://schemas.microsoft.com/office/powerpoint/2010/main" val="59079012"/>
+      </p:ext>
+    </p:extLst>
+  </p:cSld>
+  <p:clrMapOvr>
+    <a:masterClrMapping/>
+  </p:clrMapOvr>
+</p:sld>
+</file>
+
+<file path=ppt/slides/slide12.xml><?xml version="1.0" encoding="utf-8"?>
+<p:sld xmlns:a="http://schemas.openxmlformats.org/drawingml/2006/main" xmlns:r="http://schemas.openxmlformats.org/officeDocument/2006/relationships" xmlns:p="http://schemas.openxmlformats.org/presentationml/2006/main">
+  <p:cSld>
+    <p:spTree>
+      <p:nvGrpSpPr>
+        <p:cNvPr id="1" name=""/>
+        <p:cNvGrpSpPr/>
+        <p:nvPr/>
+      </p:nvGrpSpPr>
+      <p:grpSpPr>
+        <a:xfrm>
+          <a:off x="0" y="0"/>
+          <a:ext cx="0" cy="0"/>
+          <a:chOff x="0" y="0"/>
+          <a:chExt cx="0" cy="0"/>
+        </a:xfrm>
+      </p:grpSpPr>
+      <p:pic>
+        <p:nvPicPr>
+          <p:cNvPr id="19" name="Picture 18" descr="A black and white square with white squares&#10;&#10;AI-generated content may be incorrect.">
+            <a:extLst>
+              <a:ext uri="{FF2B5EF4-FFF2-40B4-BE49-F238E27FC236}">
+                <a16:creationId xmlns:a16="http://schemas.microsoft.com/office/drawing/2014/main" id="{698D11A0-BEF4-F1B0-BD49-9F2A63EEA419}"/>
+              </a:ext>
+            </a:extLst>
+          </p:cNvPr>
+          <p:cNvPicPr>
+            <a:picLocks noChangeAspect="1"/>
+          </p:cNvPicPr>
+          <p:nvPr/>
+        </p:nvPicPr>
+        <p:blipFill>
+          <a:blip r:embed="rId2">
+            <a:extLst>
+              <a:ext uri="{28A0092B-C50C-407E-A947-70E740481C1C}">
+                <a14:useLocalDpi xmlns:a14="http://schemas.microsoft.com/office/drawing/2010/main" val="0"/>
+              </a:ext>
+            </a:extLst>
+          </a:blip>
+          <a:stretch>
+            <a:fillRect/>
+          </a:stretch>
+        </p:blipFill>
+        <p:spPr>
+          <a:xfrm>
+            <a:off x="877997" y="880731"/>
+            <a:ext cx="4073831" cy="4073831"/>
+          </a:xfrm>
+          <a:prstGeom prst="rect">
+            <a:avLst/>
+          </a:prstGeom>
+        </p:spPr>
+      </p:pic>
+      <p:pic>
+        <p:nvPicPr>
+          <p:cNvPr id="10" name="Picture 9" descr="A set of colorful lines&#10;&#10;AI-generated content may be incorrect.">
+            <a:extLst>
+              <a:ext uri="{FF2B5EF4-FFF2-40B4-BE49-F238E27FC236}">
+                <a16:creationId xmlns:a16="http://schemas.microsoft.com/office/drawing/2014/main" id="{0BD161C5-F288-862C-2D87-4C0D157F7523}"/>
+              </a:ext>
+            </a:extLst>
+          </p:cNvPr>
+          <p:cNvPicPr>
+            <a:picLocks/>
+          </p:cNvPicPr>
+          <p:nvPr/>
+        </p:nvPicPr>
+        <p:blipFill>
+          <a:blip r:embed="rId3">
+            <a:extLst>
+              <a:ext uri="{28A0092B-C50C-407E-A947-70E740481C1C}">
+                <a14:useLocalDpi xmlns:a14="http://schemas.microsoft.com/office/drawing/2010/main" val="0"/>
+              </a:ext>
+            </a:extLst>
+          </a:blip>
+          <a:stretch>
+            <a:fillRect/>
+          </a:stretch>
+        </p:blipFill>
+        <p:spPr>
+          <a:xfrm>
+            <a:off x="1981757" y="1488560"/>
+            <a:ext cx="2462400" cy="2340000"/>
+          </a:xfrm>
+          <a:prstGeom prst="rect">
+            <a:avLst/>
+          </a:prstGeom>
+        </p:spPr>
+      </p:pic>
+      <p:pic>
+        <p:nvPicPr>
+          <p:cNvPr id="14" name="Picture 13" descr="A grid of white lines&#10;&#10;AI-generated content may be incorrect.">
+            <a:extLst>
+              <a:ext uri="{FF2B5EF4-FFF2-40B4-BE49-F238E27FC236}">
+                <a16:creationId xmlns:a16="http://schemas.microsoft.com/office/drawing/2014/main" id="{53A35D99-B09E-9829-CD36-BE58E59BDA5F}"/>
+              </a:ext>
+            </a:extLst>
+          </p:cNvPr>
+          <p:cNvPicPr>
+            <a:picLocks noChangeAspect="1"/>
+          </p:cNvPicPr>
+          <p:nvPr/>
+        </p:nvPicPr>
+        <p:blipFill>
+          <a:blip r:embed="rId4">
+            <a:extLst>
+              <a:ext uri="{28A0092B-C50C-407E-A947-70E740481C1C}">
+                <a14:useLocalDpi xmlns:a14="http://schemas.microsoft.com/office/drawing/2010/main" val="0"/>
+              </a:ext>
+            </a:extLst>
+          </a:blip>
+          <a:stretch>
+            <a:fillRect/>
+          </a:stretch>
+        </p:blipFill>
+        <p:spPr>
+          <a:xfrm>
+            <a:off x="5546422" y="880731"/>
+            <a:ext cx="6127306" cy="3499200"/>
+          </a:xfrm>
+          <a:prstGeom prst="rect">
+            <a:avLst/>
+          </a:prstGeom>
+        </p:spPr>
+      </p:pic>
+      <p:pic>
+        <p:nvPicPr>
+          <p:cNvPr id="8" name="Picture 7" descr="A white and grey rectangle&#10;&#10;AI-generated content may be incorrect.">
+            <a:extLst>
+              <a:ext uri="{FF2B5EF4-FFF2-40B4-BE49-F238E27FC236}">
+                <a16:creationId xmlns:a16="http://schemas.microsoft.com/office/drawing/2014/main" id="{1C0E7EA2-4B39-A566-469C-13203606BFE7}"/>
+              </a:ext>
+            </a:extLst>
+          </p:cNvPr>
+          <p:cNvPicPr>
+            <a:picLocks noChangeAspect="1"/>
+          </p:cNvPicPr>
+          <p:nvPr/>
+        </p:nvPicPr>
+        <p:blipFill>
+          <a:blip r:embed="rId5">
+            <a:extLst>
+              <a:ext uri="{28A0092B-C50C-407E-A947-70E740481C1C}">
+                <a14:useLocalDpi xmlns:a14="http://schemas.microsoft.com/office/drawing/2010/main" val="0"/>
+              </a:ext>
+            </a:extLst>
+          </a:blip>
+          <a:stretch>
+            <a:fillRect/>
+          </a:stretch>
+        </p:blipFill>
+        <p:spPr>
+          <a:xfrm>
+            <a:off x="1474083" y="5075315"/>
+            <a:ext cx="3477747" cy="579625"/>
+          </a:xfrm>
+          <a:prstGeom prst="rect">
+            <a:avLst/>
+          </a:prstGeom>
+        </p:spPr>
+      </p:pic>
+      <p:sp>
+        <p:nvSpPr>
+          <p:cNvPr id="15" name="TextBox 14">
+            <a:extLst>
+              <a:ext uri="{FF2B5EF4-FFF2-40B4-BE49-F238E27FC236}">
+                <a16:creationId xmlns:a16="http://schemas.microsoft.com/office/drawing/2014/main" id="{DE3D11BA-2D5E-AC05-2974-E2FEA2B5A44E}"/>
+              </a:ext>
+            </a:extLst>
+          </p:cNvPr>
+          <p:cNvSpPr txBox="1"/>
+          <p:nvPr/>
+        </p:nvSpPr>
+        <p:spPr>
+          <a:xfrm>
+            <a:off x="64655" y="5088266"/>
+            <a:ext cx="1409427" cy="584775"/>
+          </a:xfrm>
+          <a:prstGeom prst="rect">
+            <a:avLst/>
+          </a:prstGeom>
+          <a:noFill/>
+        </p:spPr>
+        <p:txBody>
+          <a:bodyPr wrap="square" rtlCol="0">
+            <a:spAutoFit/>
+          </a:bodyPr>
+          <a:lstStyle/>
+          <a:p>
+            <a:r>
+              <a:rPr lang="de-DE" sz="1600" b="1" dirty="0"/>
+              <a:t>Signal per column</a:t>
+            </a:r>
+          </a:p>
+        </p:txBody>
+      </p:sp>
+      <p:sp>
+        <p:nvSpPr>
+          <p:cNvPr id="16" name="TextBox 15">
+            <a:extLst>
+              <a:ext uri="{FF2B5EF4-FFF2-40B4-BE49-F238E27FC236}">
+                <a16:creationId xmlns:a16="http://schemas.microsoft.com/office/drawing/2014/main" id="{376B8E71-9092-522F-C031-DF731F6D890B}"/>
+              </a:ext>
+            </a:extLst>
+          </p:cNvPr>
+          <p:cNvSpPr txBox="1"/>
+          <p:nvPr/>
+        </p:nvSpPr>
+        <p:spPr>
+          <a:xfrm>
+            <a:off x="64655" y="6078494"/>
+            <a:ext cx="1163908" cy="338554"/>
+          </a:xfrm>
+          <a:prstGeom prst="rect">
+            <a:avLst/>
+          </a:prstGeom>
+          <a:noFill/>
+        </p:spPr>
+        <p:txBody>
+          <a:bodyPr wrap="none" rtlCol="0">
+            <a:spAutoFit/>
+          </a:bodyPr>
+          <a:lstStyle/>
+          <a:p>
+            <a:r>
+              <a:rPr lang="de-DE" sz="1600" b="1" dirty="0"/>
+              <a:t>Frequency</a:t>
+            </a:r>
+          </a:p>
+        </p:txBody>
+      </p:sp>
+      <p:sp>
+        <p:nvSpPr>
+          <p:cNvPr id="17" name="Isosceles Triangle 16">
+            <a:extLst>
+              <a:ext uri="{FF2B5EF4-FFF2-40B4-BE49-F238E27FC236}">
+                <a16:creationId xmlns:a16="http://schemas.microsoft.com/office/drawing/2014/main" id="{D782DB54-93F4-8FE9-BFDF-A7387B98CE0A}"/>
+              </a:ext>
+            </a:extLst>
+          </p:cNvPr>
+          <p:cNvSpPr/>
+          <p:nvPr/>
+        </p:nvSpPr>
+        <p:spPr>
+          <a:xfrm>
+            <a:off x="1474082" y="5837423"/>
+            <a:ext cx="3477747" cy="579625"/>
+          </a:xfrm>
+          <a:prstGeom prst="triangle">
+            <a:avLst>
+              <a:gd name="adj" fmla="val 100000"/>
+            </a:avLst>
+          </a:prstGeom>
+          <a:solidFill>
+            <a:schemeClr val="accent1">
+              <a:lumMod val="75000"/>
+            </a:schemeClr>
+          </a:solidFill>
+          <a:ln>
+            <a:noFill/>
+          </a:ln>
+        </p:spPr>
+        <p:style>
+          <a:lnRef idx="2">
+            <a:schemeClr val="accent1">
+              <a:shade val="15000"/>
+            </a:schemeClr>
+          </a:lnRef>
+          <a:fillRef idx="1">
+            <a:schemeClr val="accent1"/>
+          </a:fillRef>
+          <a:effectRef idx="0">
+            <a:schemeClr val="accent1"/>
+          </a:effectRef>
+          <a:fontRef idx="minor">
+            <a:schemeClr val="lt1"/>
+          </a:fontRef>
+        </p:style>
+        <p:txBody>
+          <a:bodyPr rtlCol="0" anchor="ctr"/>
+          <a:lstStyle/>
+          <a:p>
+            <a:pPr algn="ctr"/>
+            <a:endParaRPr lang="de-DE">
+              <a:solidFill>
+                <a:schemeClr val="accent1"/>
+              </a:solidFill>
+            </a:endParaRPr>
+          </a:p>
+        </p:txBody>
+      </p:sp>
+      <p:pic>
+        <p:nvPicPr>
+          <p:cNvPr id="21" name="Picture 20" descr="A green and blue waves&#10;&#10;AI-generated content may be incorrect.">
+            <a:extLst>
+              <a:ext uri="{FF2B5EF4-FFF2-40B4-BE49-F238E27FC236}">
+                <a16:creationId xmlns:a16="http://schemas.microsoft.com/office/drawing/2014/main" id="{FDBB9D4A-5FA9-1BCA-76E1-F18E7C599391}"/>
+              </a:ext>
+            </a:extLst>
+          </p:cNvPr>
+          <p:cNvPicPr>
+            <a:picLocks noChangeAspect="1"/>
+          </p:cNvPicPr>
+          <p:nvPr/>
+        </p:nvPicPr>
+        <p:blipFill>
+          <a:blip r:embed="rId6">
+            <a:extLst>
+              <a:ext uri="{28A0092B-C50C-407E-A947-70E740481C1C}">
+                <a14:useLocalDpi xmlns:a14="http://schemas.microsoft.com/office/drawing/2010/main" val="0"/>
+              </a:ext>
+            </a:extLst>
+          </a:blip>
+          <a:stretch>
+            <a:fillRect/>
+          </a:stretch>
+        </p:blipFill>
+        <p:spPr>
+          <a:xfrm>
+            <a:off x="1981757" y="5071254"/>
+            <a:ext cx="2464356" cy="615600"/>
+          </a:xfrm>
+          <a:prstGeom prst="rect">
+            <a:avLst/>
+          </a:prstGeom>
+        </p:spPr>
+      </p:pic>
+    </p:spTree>
+    <p:extLst>
+      <p:ext uri="{BB962C8B-B14F-4D97-AF65-F5344CB8AC3E}">
+        <p14:creationId xmlns:p14="http://schemas.microsoft.com/office/powerpoint/2010/main" val="202062624"/>
+      </p:ext>
+    </p:extLst>
+  </p:cSld>
+  <p:clrMapOvr>
+    <a:masterClrMapping/>
+  </p:clrMapOvr>
+</p:sld>
+</file>
+
+<file path=ppt/slides/slide13.xml><?xml version="1.0" encoding="utf-8"?>
+<p:sld xmlns:a="http://schemas.openxmlformats.org/drawingml/2006/main" xmlns:r="http://schemas.openxmlformats.org/officeDocument/2006/relationships" xmlns:p="http://schemas.openxmlformats.org/presentationml/2006/main">
+  <p:cSld>
+    <p:spTree>
+      <p:nvGrpSpPr>
+        <p:cNvPr id="1" name=""/>
+        <p:cNvGrpSpPr/>
+        <p:nvPr/>
+      </p:nvGrpSpPr>
+      <p:grpSpPr>
+        <a:xfrm>
+          <a:off x="0" y="0"/>
+          <a:ext cx="0" cy="0"/>
+          <a:chOff x="0" y="0"/>
+          <a:chExt cx="0" cy="0"/>
+        </a:xfrm>
+      </p:grpSpPr>
+      <p:pic>
+        <p:nvPicPr>
+          <p:cNvPr id="5" name="Picture 4">
+            <a:extLst>
+              <a:ext uri="{FF2B5EF4-FFF2-40B4-BE49-F238E27FC236}">
+                <a16:creationId xmlns:a16="http://schemas.microsoft.com/office/drawing/2014/main" id="{A3E4A659-5D1B-706A-DC62-8F2D2C29851A}"/>
+              </a:ext>
+            </a:extLst>
+          </p:cNvPr>
+          <p:cNvPicPr>
+            <a:picLocks noChangeAspect="1"/>
+          </p:cNvPicPr>
+          <p:nvPr/>
+        </p:nvPicPr>
+        <p:blipFill>
+          <a:blip r:embed="rId2">
+            <a:extLst>
+              <a:ext uri="{28A0092B-C50C-407E-A947-70E740481C1C}">
+                <a14:useLocalDpi xmlns:a14="http://schemas.microsoft.com/office/drawing/2010/main" val="0"/>
+              </a:ext>
+            </a:extLst>
+          </a:blip>
+          <a:stretch>
+            <a:fillRect/>
+          </a:stretch>
+        </p:blipFill>
+        <p:spPr>
+          <a:xfrm>
+            <a:off x="1921921" y="2406317"/>
+            <a:ext cx="7218626" cy="721252"/>
+          </a:xfrm>
+          <a:prstGeom prst="rect">
+            <a:avLst/>
+          </a:prstGeom>
+        </p:spPr>
+      </p:pic>
+      <p:sp>
+        <p:nvSpPr>
+          <p:cNvPr id="6" name="TextBox 5">
+            <a:extLst>
+              <a:ext uri="{FF2B5EF4-FFF2-40B4-BE49-F238E27FC236}">
+                <a16:creationId xmlns:a16="http://schemas.microsoft.com/office/drawing/2014/main" id="{28227EFF-7FFF-E8AE-D227-4A52BCB87FAE}"/>
+              </a:ext>
+            </a:extLst>
+          </p:cNvPr>
+          <p:cNvSpPr txBox="1"/>
+          <p:nvPr/>
+        </p:nvSpPr>
+        <p:spPr>
+          <a:xfrm>
+            <a:off x="2502568" y="3429000"/>
+            <a:ext cx="5422231" cy="1569660"/>
+          </a:xfrm>
+          <a:prstGeom prst="rect">
+            <a:avLst/>
+          </a:prstGeom>
+          <a:noFill/>
+        </p:spPr>
+        <p:txBody>
+          <a:bodyPr wrap="square" rtlCol="0">
+            <a:spAutoFit/>
+          </a:bodyPr>
+          <a:lstStyle/>
+          <a:p>
+            <a:r>
+              <a:rPr lang="de-DE" sz="3200" dirty="0"/>
+              <a:t>Bin: 1 2 3 4 5 6 7 8 9 10</a:t>
+            </a:r>
+          </a:p>
+          <a:p>
+            <a:r>
+              <a:rPr lang="de-DE" sz="3200" dirty="0"/>
+              <a:t>Freq: 0 1 2 3 4 5 -4 -3 -2 -1</a:t>
+            </a:r>
+          </a:p>
+          <a:p>
+            <a:endParaRPr lang="de-DE" sz="3200" dirty="0"/>
+          </a:p>
+        </p:txBody>
+      </p:sp>
+    </p:spTree>
+    <p:extLst>
+      <p:ext uri="{BB962C8B-B14F-4D97-AF65-F5344CB8AC3E}">
+        <p14:creationId xmlns:p14="http://schemas.microsoft.com/office/powerpoint/2010/main" val="612585257"/>
+      </p:ext>
+    </p:extLst>
+  </p:cSld>
+  <p:clrMapOvr>
+    <a:masterClrMapping/>
+  </p:clrMapOvr>
+</p:sld>
+</file>
+
+<file path=ppt/slides/slide14.xml><?xml version="1.0" encoding="utf-8"?>
+<p:sld xmlns:a="http://schemas.openxmlformats.org/drawingml/2006/main" xmlns:r="http://schemas.openxmlformats.org/officeDocument/2006/relationships" xmlns:p="http://schemas.openxmlformats.org/presentationml/2006/main">
+  <p:cSld>
+    <p:spTree>
+      <p:nvGrpSpPr>
+        <p:cNvPr id="1" name=""/>
+        <p:cNvGrpSpPr/>
+        <p:nvPr/>
+      </p:nvGrpSpPr>
+      <p:grpSpPr>
+        <a:xfrm>
+          <a:off x="0" y="0"/>
+          <a:ext cx="0" cy="0"/>
+          <a:chOff x="0" y="0"/>
+          <a:chExt cx="0" cy="0"/>
+        </a:xfrm>
+      </p:grpSpPr>
+      <p:pic>
+        <p:nvPicPr>
           <p:cNvPr id="5" name="Picture 4" descr="A graph with colorful lines&#10;&#10;AI-generated content may be incorrect.">
             <a:extLst>
               <a:ext uri="{FF2B5EF4-FFF2-40B4-BE49-F238E27FC236}">
@@ -8657,7 +9951,7 @@
 </p:sld>
 </file>
 
-<file path=ppt/slides/slide11.xml><?xml version="1.0" encoding="utf-8"?>
+<file path=ppt/slides/slide15.xml><?xml version="1.0" encoding="utf-8"?>
 <p:sld xmlns:a="http://schemas.openxmlformats.org/drawingml/2006/main" xmlns:r="http://schemas.openxmlformats.org/officeDocument/2006/relationships" xmlns:p="http://schemas.openxmlformats.org/presentationml/2006/main">
   <p:cSld>
     <p:spTree>
@@ -8959,7 +10253,7 @@
 </p:sld>
 </file>
 
-<file path=ppt/slides/slide12.xml><?xml version="1.0" encoding="utf-8"?>
+<file path=ppt/slides/slide16.xml><?xml version="1.0" encoding="utf-8"?>
 <p:sld xmlns:a="http://schemas.openxmlformats.org/drawingml/2006/main" xmlns:r="http://schemas.openxmlformats.org/officeDocument/2006/relationships" xmlns:p="http://schemas.openxmlformats.org/presentationml/2006/main">
   <p:cSld>
     <p:spTree>
@@ -9373,7 +10667,7 @@
 </p:sld>
 </file>
 
-<file path=ppt/slides/slide13.xml><?xml version="1.0" encoding="utf-8"?>
+<file path=ppt/slides/slide17.xml><?xml version="1.0" encoding="utf-8"?>
 <p:sld xmlns:a="http://schemas.openxmlformats.org/drawingml/2006/main" xmlns:r="http://schemas.openxmlformats.org/officeDocument/2006/relationships" xmlns:p="http://schemas.openxmlformats.org/presentationml/2006/main">
   <p:cSld>
     <p:spTree>
@@ -9734,7 +11028,7 @@
 </p:sld>
 </file>
 
-<file path=ppt/slides/slide14.xml><?xml version="1.0" encoding="utf-8"?>
+<file path=ppt/slides/slide18.xml><?xml version="1.0" encoding="utf-8"?>
 <p:sld xmlns:a="http://schemas.openxmlformats.org/drawingml/2006/main" xmlns:r="http://schemas.openxmlformats.org/officeDocument/2006/relationships" xmlns:p="http://schemas.openxmlformats.org/presentationml/2006/main">
   <p:cSld>
     <p:spTree>
@@ -10313,7 +11607,7 @@
 </p:sld>
 </file>
 
-<file path=ppt/slides/slide15.xml><?xml version="1.0" encoding="utf-8"?>
+<file path=ppt/slides/slide19.xml><?xml version="1.0" encoding="utf-8"?>
 <p:sld xmlns:a="http://schemas.openxmlformats.org/drawingml/2006/main" xmlns:r="http://schemas.openxmlformats.org/officeDocument/2006/relationships" xmlns:p="http://schemas.openxmlformats.org/presentationml/2006/main">
   <p:cSld>
     <p:spTree>
@@ -10452,7 +11746,131 @@
 </p:sld>
 </file>
 
-<file path=ppt/slides/slide16.xml><?xml version="1.0" encoding="utf-8"?>
+<file path=ppt/slides/slide2.xml><?xml version="1.0" encoding="utf-8"?>
+<p:sld xmlns:a="http://schemas.openxmlformats.org/drawingml/2006/main" xmlns:r="http://schemas.openxmlformats.org/officeDocument/2006/relationships" xmlns:p="http://schemas.openxmlformats.org/presentationml/2006/main">
+  <p:cSld>
+    <p:spTree>
+      <p:nvGrpSpPr>
+        <p:cNvPr id="1" name=""/>
+        <p:cNvGrpSpPr/>
+        <p:nvPr/>
+      </p:nvGrpSpPr>
+      <p:grpSpPr>
+        <a:xfrm>
+          <a:off x="0" y="0"/>
+          <a:ext cx="0" cy="0"/>
+          <a:chOff x="0" y="0"/>
+          <a:chExt cx="0" cy="0"/>
+        </a:xfrm>
+      </p:grpSpPr>
+      <p:pic>
+        <p:nvPicPr>
+          <p:cNvPr id="1026" name="Picture 2">
+            <a:extLst>
+              <a:ext uri="{FF2B5EF4-FFF2-40B4-BE49-F238E27FC236}">
+                <a16:creationId xmlns:a16="http://schemas.microsoft.com/office/drawing/2014/main" id="{9B6A74C9-9FA1-205C-CD25-EFE8C336FCE0}"/>
+              </a:ext>
+            </a:extLst>
+          </p:cNvPr>
+          <p:cNvPicPr>
+            <a:picLocks noChangeAspect="1" noChangeArrowheads="1"/>
+          </p:cNvPicPr>
+          <p:nvPr/>
+        </p:nvPicPr>
+        <p:blipFill>
+          <a:blip r:embed="rId2">
+            <a:extLst>
+              <a:ext uri="{28A0092B-C50C-407E-A947-70E740481C1C}">
+                <a14:useLocalDpi xmlns:a14="http://schemas.microsoft.com/office/drawing/2010/main" val="0"/>
+              </a:ext>
+            </a:extLst>
+          </a:blip>
+          <a:srcRect/>
+          <a:stretch>
+            <a:fillRect/>
+          </a:stretch>
+        </p:blipFill>
+        <p:spPr bwMode="auto">
+          <a:xfrm>
+            <a:off x="5374595" y="0"/>
+            <a:ext cx="5926137" cy="6858000"/>
+          </a:xfrm>
+          <a:prstGeom prst="rect">
+            <a:avLst/>
+          </a:prstGeom>
+          <a:noFill/>
+          <a:extLst>
+            <a:ext uri="{909E8E84-426E-40DD-AFC4-6F175D3DCCD1}">
+              <a14:hiddenFill xmlns:a14="http://schemas.microsoft.com/office/drawing/2010/main">
+                <a:solidFill>
+                  <a:srgbClr val="FFFFFF"/>
+                </a:solidFill>
+              </a14:hiddenFill>
+            </a:ext>
+          </a:extLst>
+        </p:spPr>
+      </p:pic>
+      <p:pic>
+        <p:nvPicPr>
+          <p:cNvPr id="1028" name="Picture 4">
+            <a:extLst>
+              <a:ext uri="{FF2B5EF4-FFF2-40B4-BE49-F238E27FC236}">
+                <a16:creationId xmlns:a16="http://schemas.microsoft.com/office/drawing/2014/main" id="{12CB2991-49F2-0DE1-41F3-3C16F28DB8B3}"/>
+              </a:ext>
+            </a:extLst>
+          </p:cNvPr>
+          <p:cNvPicPr>
+            <a:picLocks noChangeAspect="1" noChangeArrowheads="1"/>
+          </p:cNvPicPr>
+          <p:nvPr/>
+        </p:nvPicPr>
+        <p:blipFill>
+          <a:blip r:embed="rId3">
+            <a:extLst>
+              <a:ext uri="{28A0092B-C50C-407E-A947-70E740481C1C}">
+                <a14:useLocalDpi xmlns:a14="http://schemas.microsoft.com/office/drawing/2010/main" val="0"/>
+              </a:ext>
+            </a:extLst>
+          </a:blip>
+          <a:srcRect/>
+          <a:stretch>
+            <a:fillRect/>
+          </a:stretch>
+        </p:blipFill>
+        <p:spPr bwMode="auto">
+          <a:xfrm>
+            <a:off x="-419780" y="0"/>
+            <a:ext cx="5794375" cy="6858000"/>
+          </a:xfrm>
+          <a:prstGeom prst="rect">
+            <a:avLst/>
+          </a:prstGeom>
+          <a:noFill/>
+          <a:extLst>
+            <a:ext uri="{909E8E84-426E-40DD-AFC4-6F175D3DCCD1}">
+              <a14:hiddenFill xmlns:a14="http://schemas.microsoft.com/office/drawing/2010/main">
+                <a:solidFill>
+                  <a:srgbClr val="FFFFFF"/>
+                </a:solidFill>
+              </a14:hiddenFill>
+            </a:ext>
+          </a:extLst>
+        </p:spPr>
+      </p:pic>
+    </p:spTree>
+    <p:extLst>
+      <p:ext uri="{BB962C8B-B14F-4D97-AF65-F5344CB8AC3E}">
+        <p14:creationId xmlns:p14="http://schemas.microsoft.com/office/powerpoint/2010/main" val="2966647089"/>
+      </p:ext>
+    </p:extLst>
+  </p:cSld>
+  <p:clrMapOvr>
+    <a:masterClrMapping/>
+  </p:clrMapOvr>
+</p:sld>
+</file>
+
+<file path=ppt/slides/slide20.xml><?xml version="1.0" encoding="utf-8"?>
 <p:sld xmlns:a="http://schemas.openxmlformats.org/drawingml/2006/main" xmlns:r="http://schemas.openxmlformats.org/officeDocument/2006/relationships" xmlns:p="http://schemas.openxmlformats.org/presentationml/2006/main">
   <p:cSld>
     <p:spTree>
@@ -10899,7 +12317,7 @@
 </p:sld>
 </file>
 
-<file path=ppt/slides/slide17.xml><?xml version="1.0" encoding="utf-8"?>
+<file path=ppt/slides/slide21.xml><?xml version="1.0" encoding="utf-8"?>
 <p:sld xmlns:a="http://schemas.openxmlformats.org/drawingml/2006/main" xmlns:r="http://schemas.openxmlformats.org/officeDocument/2006/relationships" xmlns:p="http://schemas.openxmlformats.org/presentationml/2006/main">
   <p:cSld>
     <p:spTree>
@@ -11003,7 +12421,7 @@
 </p:sld>
 </file>
 
-<file path=ppt/slides/slide18.xml><?xml version="1.0" encoding="utf-8"?>
+<file path=ppt/slides/slide22.xml><?xml version="1.0" encoding="utf-8"?>
 <p:sld xmlns:a="http://schemas.openxmlformats.org/drawingml/2006/main" xmlns:r="http://schemas.openxmlformats.org/officeDocument/2006/relationships" xmlns:p="http://schemas.openxmlformats.org/presentationml/2006/main">
   <p:cSld>
     <p:spTree>
@@ -11315,7 +12733,7 @@
 </p:sld>
 </file>
 
-<file path=ppt/slides/slide19.xml><?xml version="1.0" encoding="utf-8"?>
+<file path=ppt/slides/slide23.xml><?xml version="1.0" encoding="utf-8"?>
 <p:sld xmlns:a="http://schemas.openxmlformats.org/drawingml/2006/main" xmlns:r="http://schemas.openxmlformats.org/officeDocument/2006/relationships" xmlns:p="http://schemas.openxmlformats.org/presentationml/2006/main">
   <p:cSld>
     <p:spTree>
@@ -11837,7 +13255,3442 @@
 </p:sld>
 </file>
 
-<file path=ppt/slides/slide2.xml><?xml version="1.0" encoding="utf-8"?>
+<file path=ppt/slides/slide24.xml><?xml version="1.0" encoding="utf-8"?>
+<p:sld xmlns:a="http://schemas.openxmlformats.org/drawingml/2006/main" xmlns:r="http://schemas.openxmlformats.org/officeDocument/2006/relationships" xmlns:p="http://schemas.openxmlformats.org/presentationml/2006/main">
+  <p:cSld>
+    <p:spTree>
+      <p:nvGrpSpPr>
+        <p:cNvPr id="1" name=""/>
+        <p:cNvGrpSpPr/>
+        <p:nvPr/>
+      </p:nvGrpSpPr>
+      <p:grpSpPr>
+        <a:xfrm>
+          <a:off x="0" y="0"/>
+          <a:ext cx="0" cy="0"/>
+          <a:chOff x="0" y="0"/>
+          <a:chExt cx="0" cy="0"/>
+        </a:xfrm>
+      </p:grpSpPr>
+      <p:pic>
+        <p:nvPicPr>
+          <p:cNvPr id="5" name="Picture 4" descr="A graph with lines and curves&#10;&#10;AI-generated content may be incorrect.">
+            <a:extLst>
+              <a:ext uri="{FF2B5EF4-FFF2-40B4-BE49-F238E27FC236}">
+                <a16:creationId xmlns:a16="http://schemas.microsoft.com/office/drawing/2014/main" id="{E044BD06-A0AC-955F-A360-04416C22187C}"/>
+              </a:ext>
+            </a:extLst>
+          </p:cNvPr>
+          <p:cNvPicPr>
+            <a:picLocks noChangeAspect="1"/>
+          </p:cNvPicPr>
+          <p:nvPr/>
+        </p:nvPicPr>
+        <p:blipFill>
+          <a:blip r:embed="rId2">
+            <a:extLst>
+              <a:ext uri="{28A0092B-C50C-407E-A947-70E740481C1C}">
+                <a14:useLocalDpi xmlns:a14="http://schemas.microsoft.com/office/drawing/2010/main" val="0"/>
+              </a:ext>
+            </a:extLst>
+          </a:blip>
+          <a:stretch>
+            <a:fillRect/>
+          </a:stretch>
+        </p:blipFill>
+        <p:spPr>
+          <a:xfrm>
+            <a:off x="3713202" y="107680"/>
+            <a:ext cx="6477013" cy="2157988"/>
+          </a:xfrm>
+          <a:prstGeom prst="rect">
+            <a:avLst/>
+          </a:prstGeom>
+        </p:spPr>
+      </p:pic>
+      <p:pic>
+        <p:nvPicPr>
+          <p:cNvPr id="13" name="Picture 12" descr="A graph with lines and a line&#10;&#10;AI-generated content may be incorrect.">
+            <a:extLst>
+              <a:ext uri="{FF2B5EF4-FFF2-40B4-BE49-F238E27FC236}">
+                <a16:creationId xmlns:a16="http://schemas.microsoft.com/office/drawing/2014/main" id="{9BD3326C-AB88-4450-7C8B-E33C708D6273}"/>
+              </a:ext>
+            </a:extLst>
+          </p:cNvPr>
+          <p:cNvPicPr>
+            <a:picLocks noChangeAspect="1"/>
+          </p:cNvPicPr>
+          <p:nvPr/>
+        </p:nvPicPr>
+        <p:blipFill>
+          <a:blip r:embed="rId3">
+            <a:extLst>
+              <a:ext uri="{28A0092B-C50C-407E-A947-70E740481C1C}">
+                <a14:useLocalDpi xmlns:a14="http://schemas.microsoft.com/office/drawing/2010/main" val="0"/>
+              </a:ext>
+            </a:extLst>
+          </a:blip>
+          <a:stretch>
+            <a:fillRect/>
+          </a:stretch>
+        </p:blipFill>
+        <p:spPr>
+          <a:xfrm>
+            <a:off x="3819532" y="2360642"/>
+            <a:ext cx="5313835" cy="2157988"/>
+          </a:xfrm>
+          <a:prstGeom prst="rect">
+            <a:avLst/>
+          </a:prstGeom>
+        </p:spPr>
+      </p:pic>
+      <p:cxnSp>
+        <p:nvCxnSpPr>
+          <p:cNvPr id="15" name="Straight Connector 14">
+            <a:extLst>
+              <a:ext uri="{FF2B5EF4-FFF2-40B4-BE49-F238E27FC236}">
+                <a16:creationId xmlns:a16="http://schemas.microsoft.com/office/drawing/2014/main" id="{3C858815-C5A3-9F7E-97EB-D63AC10CA888}"/>
+              </a:ext>
+            </a:extLst>
+          </p:cNvPr>
+          <p:cNvCxnSpPr>
+            <a:cxnSpLocks/>
+          </p:cNvCxnSpPr>
+          <p:nvPr/>
+        </p:nvCxnSpPr>
+        <p:spPr>
+          <a:xfrm>
+            <a:off x="4380611" y="3498110"/>
+            <a:ext cx="4465677" cy="0"/>
+          </a:xfrm>
+          <a:prstGeom prst="line">
+            <a:avLst/>
+          </a:prstGeom>
+          <a:ln>
+            <a:solidFill>
+              <a:srgbClr val="92D050"/>
+            </a:solidFill>
+            <a:prstDash val="dash"/>
+          </a:ln>
+        </p:spPr>
+        <p:style>
+          <a:lnRef idx="2">
+            <a:schemeClr val="accent1"/>
+          </a:lnRef>
+          <a:fillRef idx="0">
+            <a:schemeClr val="accent1"/>
+          </a:fillRef>
+          <a:effectRef idx="1">
+            <a:schemeClr val="accent1"/>
+          </a:effectRef>
+          <a:fontRef idx="minor">
+            <a:schemeClr val="tx1"/>
+          </a:fontRef>
+        </p:style>
+      </p:cxnSp>
+      <p:cxnSp>
+        <p:nvCxnSpPr>
+          <p:cNvPr id="17" name="Straight Connector 16">
+            <a:extLst>
+              <a:ext uri="{FF2B5EF4-FFF2-40B4-BE49-F238E27FC236}">
+                <a16:creationId xmlns:a16="http://schemas.microsoft.com/office/drawing/2014/main" id="{21BBC9F3-DD87-76E7-5FC7-B4B2B59966AF}"/>
+              </a:ext>
+            </a:extLst>
+          </p:cNvPr>
+          <p:cNvCxnSpPr>
+            <a:cxnSpLocks/>
+          </p:cNvCxnSpPr>
+          <p:nvPr/>
+        </p:nvCxnSpPr>
+        <p:spPr>
+          <a:xfrm>
+            <a:off x="6025111" y="269571"/>
+            <a:ext cx="0" cy="3217906"/>
+          </a:xfrm>
+          <a:prstGeom prst="line">
+            <a:avLst/>
+          </a:prstGeom>
+          <a:ln>
+            <a:solidFill>
+              <a:srgbClr val="92D050"/>
+            </a:solidFill>
+            <a:prstDash val="dash"/>
+          </a:ln>
+        </p:spPr>
+        <p:style>
+          <a:lnRef idx="2">
+            <a:schemeClr val="accent1"/>
+          </a:lnRef>
+          <a:fillRef idx="0">
+            <a:schemeClr val="accent1"/>
+          </a:fillRef>
+          <a:effectRef idx="1">
+            <a:schemeClr val="accent1"/>
+          </a:effectRef>
+          <a:fontRef idx="minor">
+            <a:schemeClr val="tx1"/>
+          </a:fontRef>
+        </p:style>
+      </p:cxnSp>
+      <p:cxnSp>
+        <p:nvCxnSpPr>
+          <p:cNvPr id="20" name="Straight Connector 19">
+            <a:extLst>
+              <a:ext uri="{FF2B5EF4-FFF2-40B4-BE49-F238E27FC236}">
+                <a16:creationId xmlns:a16="http://schemas.microsoft.com/office/drawing/2014/main" id="{4C340B99-2233-A3A8-43DF-12E27074E951}"/>
+              </a:ext>
+            </a:extLst>
+          </p:cNvPr>
+          <p:cNvCxnSpPr>
+            <a:cxnSpLocks/>
+          </p:cNvCxnSpPr>
+          <p:nvPr/>
+        </p:nvCxnSpPr>
+        <p:spPr>
+          <a:xfrm>
+            <a:off x="7963780" y="280204"/>
+            <a:ext cx="0" cy="3207273"/>
+          </a:xfrm>
+          <a:prstGeom prst="line">
+            <a:avLst/>
+          </a:prstGeom>
+          <a:ln>
+            <a:solidFill>
+              <a:srgbClr val="92D050"/>
+            </a:solidFill>
+            <a:prstDash val="dash"/>
+          </a:ln>
+        </p:spPr>
+        <p:style>
+          <a:lnRef idx="2">
+            <a:schemeClr val="accent1"/>
+          </a:lnRef>
+          <a:fillRef idx="0">
+            <a:schemeClr val="accent1"/>
+          </a:fillRef>
+          <a:effectRef idx="1">
+            <a:schemeClr val="accent1"/>
+          </a:effectRef>
+          <a:fontRef idx="minor">
+            <a:schemeClr val="tx1"/>
+          </a:fontRef>
+        </p:style>
+      </p:cxnSp>
+      <p:cxnSp>
+        <p:nvCxnSpPr>
+          <p:cNvPr id="23" name="Straight Connector 22">
+            <a:extLst>
+              <a:ext uri="{FF2B5EF4-FFF2-40B4-BE49-F238E27FC236}">
+                <a16:creationId xmlns:a16="http://schemas.microsoft.com/office/drawing/2014/main" id="{CB72C1C3-7A63-35B7-B7B4-EBD23572ECF6}"/>
+              </a:ext>
+            </a:extLst>
+          </p:cNvPr>
+          <p:cNvCxnSpPr>
+            <a:cxnSpLocks/>
+          </p:cNvCxnSpPr>
+          <p:nvPr/>
+        </p:nvCxnSpPr>
+        <p:spPr>
+          <a:xfrm>
+            <a:off x="6627623" y="290837"/>
+            <a:ext cx="0" cy="3207273"/>
+          </a:xfrm>
+          <a:prstGeom prst="line">
+            <a:avLst/>
+          </a:prstGeom>
+          <a:ln>
+            <a:solidFill>
+              <a:srgbClr val="92D050"/>
+            </a:solidFill>
+            <a:prstDash val="dash"/>
+          </a:ln>
+        </p:spPr>
+        <p:style>
+          <a:lnRef idx="2">
+            <a:schemeClr val="accent1"/>
+          </a:lnRef>
+          <a:fillRef idx="0">
+            <a:schemeClr val="accent1"/>
+          </a:fillRef>
+          <a:effectRef idx="1">
+            <a:schemeClr val="accent1"/>
+          </a:effectRef>
+          <a:fontRef idx="minor">
+            <a:schemeClr val="tx1"/>
+          </a:fontRef>
+        </p:style>
+      </p:cxnSp>
+      <p:pic>
+        <p:nvPicPr>
+          <p:cNvPr id="12" name="Picture 11" descr="A graph of a function&#10;&#10;AI-generated content may be incorrect.">
+            <a:extLst>
+              <a:ext uri="{FF2B5EF4-FFF2-40B4-BE49-F238E27FC236}">
+                <a16:creationId xmlns:a16="http://schemas.microsoft.com/office/drawing/2014/main" id="{EB11595E-82EA-FA9F-19E9-F508FB47CE04}"/>
+              </a:ext>
+            </a:extLst>
+          </p:cNvPr>
+          <p:cNvPicPr>
+            <a:picLocks noChangeAspect="1"/>
+          </p:cNvPicPr>
+          <p:nvPr/>
+        </p:nvPicPr>
+        <p:blipFill>
+          <a:blip r:embed="rId4">
+            <a:extLst>
+              <a:ext uri="{28A0092B-C50C-407E-A947-70E740481C1C}">
+                <a14:useLocalDpi xmlns:a14="http://schemas.microsoft.com/office/drawing/2010/main" val="0"/>
+              </a:ext>
+            </a:extLst>
+          </a:blip>
+          <a:stretch>
+            <a:fillRect/>
+          </a:stretch>
+        </p:blipFill>
+        <p:spPr>
+          <a:xfrm>
+            <a:off x="-655682" y="814534"/>
+            <a:ext cx="9144000" cy="6858000"/>
+          </a:xfrm>
+          <a:prstGeom prst="rect">
+            <a:avLst/>
+          </a:prstGeom>
+        </p:spPr>
+      </p:pic>
+    </p:spTree>
+    <p:extLst>
+      <p:ext uri="{BB962C8B-B14F-4D97-AF65-F5344CB8AC3E}">
+        <p14:creationId xmlns:p14="http://schemas.microsoft.com/office/powerpoint/2010/main" val="1075247424"/>
+      </p:ext>
+    </p:extLst>
+  </p:cSld>
+  <p:clrMapOvr>
+    <a:masterClrMapping/>
+  </p:clrMapOvr>
+</p:sld>
+</file>
+
+<file path=ppt/slides/slide25.xml><?xml version="1.0" encoding="utf-8"?>
+<p:sld xmlns:a="http://schemas.openxmlformats.org/drawingml/2006/main" xmlns:r="http://schemas.openxmlformats.org/officeDocument/2006/relationships" xmlns:p="http://schemas.openxmlformats.org/presentationml/2006/main">
+  <p:cSld>
+    <p:spTree>
+      <p:nvGrpSpPr>
+        <p:cNvPr id="1" name=""/>
+        <p:cNvGrpSpPr/>
+        <p:nvPr/>
+      </p:nvGrpSpPr>
+      <p:grpSpPr>
+        <a:xfrm>
+          <a:off x="0" y="0"/>
+          <a:ext cx="0" cy="0"/>
+          <a:chOff x="0" y="0"/>
+          <a:chExt cx="0" cy="0"/>
+        </a:xfrm>
+      </p:grpSpPr>
+      <p:sp>
+        <p:nvSpPr>
+          <p:cNvPr id="16" name="Arrow: Right 15">
+            <a:extLst>
+              <a:ext uri="{FF2B5EF4-FFF2-40B4-BE49-F238E27FC236}">
+                <a16:creationId xmlns:a16="http://schemas.microsoft.com/office/drawing/2014/main" id="{C579D9EF-653C-83E1-7DAB-D2495EBEFA3A}"/>
+              </a:ext>
+            </a:extLst>
+          </p:cNvPr>
+          <p:cNvSpPr/>
+          <p:nvPr/>
+        </p:nvSpPr>
+        <p:spPr>
+          <a:xfrm>
+            <a:off x="6607425" y="3256764"/>
+            <a:ext cx="978408" cy="484632"/>
+          </a:xfrm>
+          <a:prstGeom prst="rightArrow">
+            <a:avLst/>
+          </a:prstGeom>
+        </p:spPr>
+        <p:style>
+          <a:lnRef idx="2">
+            <a:schemeClr val="accent1">
+              <a:shade val="15000"/>
+            </a:schemeClr>
+          </a:lnRef>
+          <a:fillRef idx="1">
+            <a:schemeClr val="accent1"/>
+          </a:fillRef>
+          <a:effectRef idx="0">
+            <a:schemeClr val="accent1"/>
+          </a:effectRef>
+          <a:fontRef idx="minor">
+            <a:schemeClr val="lt1"/>
+          </a:fontRef>
+        </p:style>
+        <p:txBody>
+          <a:bodyPr rtlCol="0" anchor="ctr"/>
+          <a:lstStyle/>
+          <a:p>
+            <a:pPr algn="ctr"/>
+            <a:endParaRPr lang="de-DE"/>
+          </a:p>
+        </p:txBody>
+      </p:sp>
+      <p:sp>
+        <p:nvSpPr>
+          <p:cNvPr id="26" name="TextBox 25">
+            <a:extLst>
+              <a:ext uri="{FF2B5EF4-FFF2-40B4-BE49-F238E27FC236}">
+                <a16:creationId xmlns:a16="http://schemas.microsoft.com/office/drawing/2014/main" id="{CACCDAFC-23F7-CC62-C19A-A0E2B475E3D6}"/>
+              </a:ext>
+            </a:extLst>
+          </p:cNvPr>
+          <p:cNvSpPr txBox="1"/>
+          <p:nvPr/>
+        </p:nvSpPr>
+        <p:spPr>
+          <a:xfrm>
+            <a:off x="1584533" y="1480931"/>
+            <a:ext cx="1772601" cy="461665"/>
+          </a:xfrm>
+          <a:prstGeom prst="rect">
+            <a:avLst/>
+          </a:prstGeom>
+          <a:solidFill>
+            <a:schemeClr val="bg2"/>
+          </a:solidFill>
+          <a:effectLst>
+            <a:softEdge rad="50800"/>
+          </a:effectLst>
+        </p:spPr>
+        <p:txBody>
+          <a:bodyPr wrap="none" rtlCol="0">
+            <a:spAutoFit/>
+          </a:bodyPr>
+          <a:lstStyle/>
+          <a:p>
+            <a:r>
+              <a:rPr lang="de-DE" sz="2400" dirty="0">
+                <a:latin typeface="Cambria" panose="02040503050406030204" pitchFamily="18" charset="0"/>
+                <a:ea typeface="Cambria" panose="02040503050406030204" pitchFamily="18" charset="0"/>
+              </a:rPr>
+              <a:t>abs</a:t>
+            </a:r>
+            <a:r>
+              <a:rPr lang="de-DE" sz="2400" dirty="0">
+                <a:latin typeface="+mj-lt"/>
+                <a:ea typeface="Cambria" panose="02040503050406030204" pitchFamily="18" charset="0"/>
+              </a:rPr>
+              <a:t>(</a:t>
+            </a:r>
+            <a:r>
+              <a:rPr lang="de-DE" sz="2400" dirty="0">
+                <a:latin typeface="Cambria" panose="02040503050406030204" pitchFamily="18" charset="0"/>
+                <a:ea typeface="Cambria" panose="02040503050406030204" pitchFamily="18" charset="0"/>
+              </a:rPr>
+              <a:t>kspace</a:t>
+            </a:r>
+            <a:r>
+              <a:rPr lang="de-DE" sz="2400" dirty="0">
+                <a:latin typeface="+mj-lt"/>
+                <a:ea typeface="Cambria" panose="02040503050406030204" pitchFamily="18" charset="0"/>
+              </a:rPr>
+              <a:t>)</a:t>
+            </a:r>
+          </a:p>
+        </p:txBody>
+      </p:sp>
+      <p:sp>
+        <p:nvSpPr>
+          <p:cNvPr id="27" name="TextBox 26">
+            <a:extLst>
+              <a:ext uri="{FF2B5EF4-FFF2-40B4-BE49-F238E27FC236}">
+                <a16:creationId xmlns:a16="http://schemas.microsoft.com/office/drawing/2014/main" id="{583735AA-BE72-ECDB-96E0-89E0872FB2AE}"/>
+              </a:ext>
+            </a:extLst>
+          </p:cNvPr>
+          <p:cNvSpPr txBox="1"/>
+          <p:nvPr/>
+        </p:nvSpPr>
+        <p:spPr>
+          <a:xfrm>
+            <a:off x="4326812" y="815406"/>
+            <a:ext cx="1605119" cy="461665"/>
+          </a:xfrm>
+          <a:prstGeom prst="rect">
+            <a:avLst/>
+          </a:prstGeom>
+          <a:solidFill>
+            <a:schemeClr val="bg2"/>
+          </a:solidFill>
+          <a:effectLst>
+            <a:softEdge rad="50800"/>
+          </a:effectLst>
+        </p:spPr>
+        <p:txBody>
+          <a:bodyPr wrap="none" rtlCol="0">
+            <a:spAutoFit/>
+          </a:bodyPr>
+          <a:lstStyle/>
+          <a:p>
+            <a:r>
+              <a:rPr lang="de-DE" sz="2400" dirty="0">
+                <a:latin typeface="Cambria" panose="02040503050406030204" pitchFamily="18" charset="0"/>
+                <a:ea typeface="Cambria" panose="02040503050406030204" pitchFamily="18" charset="0"/>
+              </a:rPr>
+              <a:t>Re</a:t>
+            </a:r>
+            <a:r>
+              <a:rPr lang="de-DE" sz="2400" dirty="0">
+                <a:latin typeface="+mj-lt"/>
+                <a:ea typeface="Cambria" panose="02040503050406030204" pitchFamily="18" charset="0"/>
+              </a:rPr>
+              <a:t>(</a:t>
+            </a:r>
+            <a:r>
+              <a:rPr lang="de-DE" sz="2400" dirty="0">
+                <a:latin typeface="Cambria" panose="02040503050406030204" pitchFamily="18" charset="0"/>
+                <a:ea typeface="Cambria" panose="02040503050406030204" pitchFamily="18" charset="0"/>
+              </a:rPr>
+              <a:t>kspace</a:t>
+            </a:r>
+            <a:r>
+              <a:rPr lang="de-DE" sz="2400" dirty="0">
+                <a:latin typeface="+mj-lt"/>
+                <a:ea typeface="Cambria" panose="02040503050406030204" pitchFamily="18" charset="0"/>
+              </a:rPr>
+              <a:t>)</a:t>
+            </a:r>
+          </a:p>
+        </p:txBody>
+      </p:sp>
+      <p:sp>
+        <p:nvSpPr>
+          <p:cNvPr id="28" name="TextBox 27">
+            <a:extLst>
+              <a:ext uri="{FF2B5EF4-FFF2-40B4-BE49-F238E27FC236}">
+                <a16:creationId xmlns:a16="http://schemas.microsoft.com/office/drawing/2014/main" id="{3BC38583-9D20-FFB1-D7E1-6A5466DBFCAD}"/>
+              </a:ext>
+            </a:extLst>
+          </p:cNvPr>
+          <p:cNvSpPr txBox="1"/>
+          <p:nvPr/>
+        </p:nvSpPr>
+        <p:spPr>
+          <a:xfrm>
+            <a:off x="4343669" y="3576640"/>
+            <a:ext cx="1625125" cy="461665"/>
+          </a:xfrm>
+          <a:prstGeom prst="rect">
+            <a:avLst/>
+          </a:prstGeom>
+          <a:solidFill>
+            <a:schemeClr val="bg2"/>
+          </a:solidFill>
+          <a:effectLst>
+            <a:softEdge rad="50800"/>
+          </a:effectLst>
+        </p:spPr>
+        <p:txBody>
+          <a:bodyPr wrap="none" rtlCol="0">
+            <a:spAutoFit/>
+          </a:bodyPr>
+          <a:lstStyle/>
+          <a:p>
+            <a:r>
+              <a:rPr lang="de-DE" sz="2400" dirty="0">
+                <a:latin typeface="Cambria" panose="02040503050406030204" pitchFamily="18" charset="0"/>
+                <a:ea typeface="Cambria" panose="02040503050406030204" pitchFamily="18" charset="0"/>
+              </a:rPr>
+              <a:t>Im</a:t>
+            </a:r>
+            <a:r>
+              <a:rPr lang="de-DE" sz="2400" dirty="0">
+                <a:latin typeface="+mj-lt"/>
+                <a:ea typeface="Cambria" panose="02040503050406030204" pitchFamily="18" charset="0"/>
+              </a:rPr>
+              <a:t>(</a:t>
+            </a:r>
+            <a:r>
+              <a:rPr lang="de-DE" sz="2400" dirty="0">
+                <a:latin typeface="Cambria" panose="02040503050406030204" pitchFamily="18" charset="0"/>
+                <a:ea typeface="Cambria" panose="02040503050406030204" pitchFamily="18" charset="0"/>
+              </a:rPr>
+              <a:t>kspace</a:t>
+            </a:r>
+            <a:r>
+              <a:rPr lang="de-DE" sz="2400" dirty="0">
+                <a:latin typeface="+mj-lt"/>
+                <a:ea typeface="Cambria" panose="02040503050406030204" pitchFamily="18" charset="0"/>
+              </a:rPr>
+              <a:t>)</a:t>
+            </a:r>
+          </a:p>
+        </p:txBody>
+      </p:sp>
+      <p:sp>
+        <p:nvSpPr>
+          <p:cNvPr id="30" name="TextBox 29">
+            <a:extLst>
+              <a:ext uri="{FF2B5EF4-FFF2-40B4-BE49-F238E27FC236}">
+                <a16:creationId xmlns:a16="http://schemas.microsoft.com/office/drawing/2014/main" id="{E2B7AF52-AF55-D5A3-D3E7-64C384011A7D}"/>
+              </a:ext>
+            </a:extLst>
+          </p:cNvPr>
+          <p:cNvSpPr txBox="1"/>
+          <p:nvPr/>
+        </p:nvSpPr>
+        <p:spPr>
+          <a:xfrm>
+            <a:off x="6620327" y="2919714"/>
+            <a:ext cx="716863" cy="461665"/>
+          </a:xfrm>
+          <a:prstGeom prst="rect">
+            <a:avLst/>
+          </a:prstGeom>
+          <a:solidFill>
+            <a:schemeClr val="bg2"/>
+          </a:solidFill>
+          <a:effectLst>
+            <a:softEdge rad="50800"/>
+          </a:effectLst>
+        </p:spPr>
+        <p:txBody>
+          <a:bodyPr wrap="none" rtlCol="0">
+            <a:spAutoFit/>
+          </a:bodyPr>
+          <a:lstStyle/>
+          <a:p>
+            <a:r>
+              <a:rPr lang="de-DE" sz="2400" dirty="0">
+                <a:latin typeface="Cambria" panose="02040503050406030204" pitchFamily="18" charset="0"/>
+                <a:ea typeface="Cambria" panose="02040503050406030204" pitchFamily="18" charset="0"/>
+              </a:rPr>
+              <a:t>fft</a:t>
+            </a:r>
+            <a:r>
+              <a:rPr lang="de-DE" sz="2400" dirty="0">
+                <a:latin typeface="+mj-lt"/>
+                <a:ea typeface="Cambria" panose="02040503050406030204" pitchFamily="18" charset="0"/>
+              </a:rPr>
+              <a:t>( )</a:t>
+            </a:r>
+          </a:p>
+        </p:txBody>
+      </p:sp>
+      <p:pic>
+        <p:nvPicPr>
+          <p:cNvPr id="8" name="Picture 7" descr="A grey and black squares&#10;&#10;AI-generated content may be incorrect.">
+            <a:extLst>
+              <a:ext uri="{FF2B5EF4-FFF2-40B4-BE49-F238E27FC236}">
+                <a16:creationId xmlns:a16="http://schemas.microsoft.com/office/drawing/2014/main" id="{D2DB9A23-5B83-4227-0484-3AA86D8F85EE}"/>
+              </a:ext>
+            </a:extLst>
+          </p:cNvPr>
+          <p:cNvPicPr>
+            <a:picLocks noChangeAspect="1"/>
+          </p:cNvPicPr>
+          <p:nvPr/>
+        </p:nvPicPr>
+        <p:blipFill>
+          <a:blip r:embed="rId2">
+            <a:extLst>
+              <a:ext uri="{28A0092B-C50C-407E-A947-70E740481C1C}">
+                <a14:useLocalDpi xmlns:a14="http://schemas.microsoft.com/office/drawing/2010/main" val="0"/>
+              </a:ext>
+            </a:extLst>
+          </a:blip>
+          <a:stretch>
+            <a:fillRect/>
+          </a:stretch>
+        </p:blipFill>
+        <p:spPr>
+          <a:xfrm>
+            <a:off x="4141824" y="4062720"/>
+            <a:ext cx="2034617" cy="2034617"/>
+          </a:xfrm>
+          <a:prstGeom prst="rect">
+            <a:avLst/>
+          </a:prstGeom>
+        </p:spPr>
+      </p:pic>
+      <p:pic>
+        <p:nvPicPr>
+          <p:cNvPr id="17" name="Picture 16" descr="A black and white pixelated background&#10;&#10;AI-generated content may be incorrect.">
+            <a:extLst>
+              <a:ext uri="{FF2B5EF4-FFF2-40B4-BE49-F238E27FC236}">
+                <a16:creationId xmlns:a16="http://schemas.microsoft.com/office/drawing/2014/main" id="{D56F12CD-8A7A-CB52-1791-3AD99E5B4F0A}"/>
+              </a:ext>
+            </a:extLst>
+          </p:cNvPr>
+          <p:cNvPicPr>
+            <a:picLocks noChangeAspect="1"/>
+          </p:cNvPicPr>
+          <p:nvPr/>
+        </p:nvPicPr>
+        <p:blipFill>
+          <a:blip r:embed="rId3">
+            <a:extLst>
+              <a:ext uri="{28A0092B-C50C-407E-A947-70E740481C1C}">
+                <a14:useLocalDpi xmlns:a14="http://schemas.microsoft.com/office/drawing/2010/main" val="0"/>
+              </a:ext>
+            </a:extLst>
+          </a:blip>
+          <a:stretch>
+            <a:fillRect/>
+          </a:stretch>
+        </p:blipFill>
+        <p:spPr>
+          <a:xfrm>
+            <a:off x="4112063" y="1277071"/>
+            <a:ext cx="2034616" cy="2034616"/>
+          </a:xfrm>
+          <a:prstGeom prst="rect">
+            <a:avLst/>
+          </a:prstGeom>
+        </p:spPr>
+      </p:pic>
+      <p:pic>
+        <p:nvPicPr>
+          <p:cNvPr id="42" name="Picture 41" descr="A screenshot of a cell phone&#10;&#10;AI-generated content may be incorrect.">
+            <a:extLst>
+              <a:ext uri="{FF2B5EF4-FFF2-40B4-BE49-F238E27FC236}">
+                <a16:creationId xmlns:a16="http://schemas.microsoft.com/office/drawing/2014/main" id="{A45DA63F-98B8-EA51-1A1C-846926C6AA85}"/>
+              </a:ext>
+            </a:extLst>
+          </p:cNvPr>
+          <p:cNvPicPr>
+            <a:picLocks noChangeAspect="1"/>
+          </p:cNvPicPr>
+          <p:nvPr/>
+        </p:nvPicPr>
+        <p:blipFill>
+          <a:blip r:embed="rId4">
+            <a:extLst>
+              <a:ext uri="{28A0092B-C50C-407E-A947-70E740481C1C}">
+                <a14:useLocalDpi xmlns:a14="http://schemas.microsoft.com/office/drawing/2010/main" val="0"/>
+              </a:ext>
+            </a:extLst>
+          </a:blip>
+          <a:stretch>
+            <a:fillRect/>
+          </a:stretch>
+        </p:blipFill>
+        <p:spPr>
+          <a:xfrm>
+            <a:off x="7749574" y="2006353"/>
+            <a:ext cx="3087632" cy="3602238"/>
+          </a:xfrm>
+          <a:prstGeom prst="rect">
+            <a:avLst/>
+          </a:prstGeom>
+        </p:spPr>
+      </p:pic>
+      <p:pic>
+        <p:nvPicPr>
+          <p:cNvPr id="44" name="Picture 43" descr="A black and white pixelated image&#10;&#10;AI-generated content may be incorrect.">
+            <a:extLst>
+              <a:ext uri="{FF2B5EF4-FFF2-40B4-BE49-F238E27FC236}">
+                <a16:creationId xmlns:a16="http://schemas.microsoft.com/office/drawing/2014/main" id="{712C713E-47EE-627E-5851-C8F9868A458B}"/>
+              </a:ext>
+            </a:extLst>
+          </p:cNvPr>
+          <p:cNvPicPr>
+            <a:picLocks noChangeAspect="1"/>
+          </p:cNvPicPr>
+          <p:nvPr/>
+        </p:nvPicPr>
+        <p:blipFill>
+          <a:blip r:embed="rId5">
+            <a:extLst>
+              <a:ext uri="{28A0092B-C50C-407E-A947-70E740481C1C}">
+                <a14:useLocalDpi xmlns:a14="http://schemas.microsoft.com/office/drawing/2010/main" val="0"/>
+              </a:ext>
+            </a:extLst>
+          </a:blip>
+          <a:stretch>
+            <a:fillRect/>
+          </a:stretch>
+        </p:blipFill>
+        <p:spPr>
+          <a:xfrm>
+            <a:off x="276105" y="2012369"/>
+            <a:ext cx="3503117" cy="3503117"/>
+          </a:xfrm>
+          <a:prstGeom prst="rect">
+            <a:avLst/>
+          </a:prstGeom>
+        </p:spPr>
+      </p:pic>
+    </p:spTree>
+    <p:extLst>
+      <p:ext uri="{BB962C8B-B14F-4D97-AF65-F5344CB8AC3E}">
+        <p14:creationId xmlns:p14="http://schemas.microsoft.com/office/powerpoint/2010/main" val="259855978"/>
+      </p:ext>
+    </p:extLst>
+  </p:cSld>
+  <p:clrMapOvr>
+    <a:masterClrMapping/>
+  </p:clrMapOvr>
+</p:sld>
+</file>
+
+<file path=ppt/slides/slide26.xml><?xml version="1.0" encoding="utf-8"?>
+<p:sld xmlns:a="http://schemas.openxmlformats.org/drawingml/2006/main" xmlns:r="http://schemas.openxmlformats.org/officeDocument/2006/relationships" xmlns:p="http://schemas.openxmlformats.org/presentationml/2006/main">
+  <p:cSld>
+    <p:spTree>
+      <p:nvGrpSpPr>
+        <p:cNvPr id="1" name=""/>
+        <p:cNvGrpSpPr/>
+        <p:nvPr/>
+      </p:nvGrpSpPr>
+      <p:grpSpPr>
+        <a:xfrm>
+          <a:off x="0" y="0"/>
+          <a:ext cx="0" cy="0"/>
+          <a:chOff x="0" y="0"/>
+          <a:chExt cx="0" cy="0"/>
+        </a:xfrm>
+      </p:grpSpPr>
+      <p:pic>
+        <p:nvPicPr>
+          <p:cNvPr id="45" name="Picture 44" descr="A screenshot of a computer&#10;&#10;AI-generated content may be incorrect.">
+            <a:extLst>
+              <a:ext uri="{FF2B5EF4-FFF2-40B4-BE49-F238E27FC236}">
+                <a16:creationId xmlns:a16="http://schemas.microsoft.com/office/drawing/2014/main" id="{F31CC08F-9A70-0EE5-EC5E-4498304F241E}"/>
+              </a:ext>
+            </a:extLst>
+          </p:cNvPr>
+          <p:cNvPicPr>
+            <a:picLocks noChangeAspect="1"/>
+          </p:cNvPicPr>
+          <p:nvPr/>
+        </p:nvPicPr>
+        <p:blipFill>
+          <a:blip r:embed="rId3">
+            <a:extLst>
+              <a:ext uri="{28A0092B-C50C-407E-A947-70E740481C1C}">
+                <a14:useLocalDpi xmlns:a14="http://schemas.microsoft.com/office/drawing/2010/main" val="0"/>
+              </a:ext>
+            </a:extLst>
+          </a:blip>
+          <a:stretch>
+            <a:fillRect/>
+          </a:stretch>
+        </p:blipFill>
+        <p:spPr>
+          <a:xfrm>
+            <a:off x="5247184" y="1999482"/>
+            <a:ext cx="3377355" cy="3377355"/>
+          </a:xfrm>
+          <a:prstGeom prst="rect">
+            <a:avLst/>
+          </a:prstGeom>
+        </p:spPr>
+      </p:pic>
+      <p:sp>
+        <p:nvSpPr>
+          <p:cNvPr id="10" name="Arrow: Right 9">
+            <a:extLst>
+              <a:ext uri="{FF2B5EF4-FFF2-40B4-BE49-F238E27FC236}">
+                <a16:creationId xmlns:a16="http://schemas.microsoft.com/office/drawing/2014/main" id="{7CB38E5E-1D27-E2CC-8893-A4BEB0ACF974}"/>
+              </a:ext>
+            </a:extLst>
+          </p:cNvPr>
+          <p:cNvSpPr/>
+          <p:nvPr/>
+        </p:nvSpPr>
+        <p:spPr>
+          <a:xfrm>
+            <a:off x="4245226" y="3256764"/>
+            <a:ext cx="978408" cy="484632"/>
+          </a:xfrm>
+          <a:prstGeom prst="rightArrow">
+            <a:avLst/>
+          </a:prstGeom>
+        </p:spPr>
+        <p:style>
+          <a:lnRef idx="2">
+            <a:schemeClr val="accent1">
+              <a:shade val="15000"/>
+            </a:schemeClr>
+          </a:lnRef>
+          <a:fillRef idx="1">
+            <a:schemeClr val="accent1"/>
+          </a:fillRef>
+          <a:effectRef idx="0">
+            <a:schemeClr val="accent1"/>
+          </a:effectRef>
+          <a:fontRef idx="minor">
+            <a:schemeClr val="lt1"/>
+          </a:fontRef>
+        </p:style>
+        <p:txBody>
+          <a:bodyPr rtlCol="0" anchor="ctr"/>
+          <a:lstStyle/>
+          <a:p>
+            <a:pPr algn="ctr"/>
+            <a:endParaRPr lang="de-DE"/>
+          </a:p>
+        </p:txBody>
+      </p:sp>
+      <p:sp>
+        <p:nvSpPr>
+          <p:cNvPr id="15" name="TextBox 14">
+            <a:extLst>
+              <a:ext uri="{FF2B5EF4-FFF2-40B4-BE49-F238E27FC236}">
+                <a16:creationId xmlns:a16="http://schemas.microsoft.com/office/drawing/2014/main" id="{898BD7CD-F3D1-046B-9F2A-9F150D497AA7}"/>
+              </a:ext>
+            </a:extLst>
+          </p:cNvPr>
+          <p:cNvSpPr txBox="1"/>
+          <p:nvPr/>
+        </p:nvSpPr>
+        <p:spPr>
+          <a:xfrm>
+            <a:off x="2150590" y="1537817"/>
+            <a:ext cx="1086516" cy="461665"/>
+          </a:xfrm>
+          <a:prstGeom prst="rect">
+            <a:avLst/>
+          </a:prstGeom>
+          <a:solidFill>
+            <a:schemeClr val="bg2"/>
+          </a:solidFill>
+          <a:effectLst>
+            <a:softEdge rad="50800"/>
+          </a:effectLst>
+        </p:spPr>
+        <p:txBody>
+          <a:bodyPr wrap="none" rtlCol="0">
+            <a:spAutoFit/>
+          </a:bodyPr>
+          <a:lstStyle/>
+          <a:p>
+            <a:r>
+              <a:rPr lang="de-DE" sz="2400" dirty="0">
+                <a:latin typeface="Cambria" panose="02040503050406030204" pitchFamily="18" charset="0"/>
+                <a:ea typeface="Cambria" panose="02040503050406030204" pitchFamily="18" charset="0"/>
+              </a:rPr>
+              <a:t>kspace</a:t>
+            </a:r>
+            <a:endParaRPr lang="de-DE" sz="2400" dirty="0">
+              <a:latin typeface="+mj-lt"/>
+              <a:ea typeface="Cambria" panose="02040503050406030204" pitchFamily="18" charset="0"/>
+            </a:endParaRPr>
+          </a:p>
+        </p:txBody>
+      </p:sp>
+      <p:sp>
+        <p:nvSpPr>
+          <p:cNvPr id="18" name="TextBox 17">
+            <a:extLst>
+              <a:ext uri="{FF2B5EF4-FFF2-40B4-BE49-F238E27FC236}">
+                <a16:creationId xmlns:a16="http://schemas.microsoft.com/office/drawing/2014/main" id="{AD54A680-64A3-634B-1907-89F6EE183B50}"/>
+              </a:ext>
+            </a:extLst>
+          </p:cNvPr>
+          <p:cNvSpPr txBox="1"/>
+          <p:nvPr/>
+        </p:nvSpPr>
+        <p:spPr>
+          <a:xfrm>
+            <a:off x="4258128" y="2919714"/>
+            <a:ext cx="716863" cy="461665"/>
+          </a:xfrm>
+          <a:prstGeom prst="rect">
+            <a:avLst/>
+          </a:prstGeom>
+          <a:solidFill>
+            <a:schemeClr val="bg2"/>
+          </a:solidFill>
+          <a:effectLst>
+            <a:softEdge rad="50800"/>
+          </a:effectLst>
+        </p:spPr>
+        <p:txBody>
+          <a:bodyPr wrap="none" rtlCol="0">
+            <a:spAutoFit/>
+          </a:bodyPr>
+          <a:lstStyle/>
+          <a:p>
+            <a:r>
+              <a:rPr lang="de-DE" sz="2400" dirty="0">
+                <a:latin typeface="Cambria" panose="02040503050406030204" pitchFamily="18" charset="0"/>
+                <a:ea typeface="Cambria" panose="02040503050406030204" pitchFamily="18" charset="0"/>
+              </a:rPr>
+              <a:t>fft</a:t>
+            </a:r>
+            <a:r>
+              <a:rPr lang="de-DE" sz="2400" dirty="0">
+                <a:latin typeface="+mj-lt"/>
+                <a:ea typeface="Cambria" panose="02040503050406030204" pitchFamily="18" charset="0"/>
+              </a:rPr>
+              <a:t>( )</a:t>
+            </a:r>
+          </a:p>
+        </p:txBody>
+      </p:sp>
+      <p:pic>
+        <p:nvPicPr>
+          <p:cNvPr id="5" name="Picture 4" descr="A pixelated image of a black and white square&#10;&#10;AI-generated content may be incorrect.">
+            <a:extLst>
+              <a:ext uri="{FF2B5EF4-FFF2-40B4-BE49-F238E27FC236}">
+                <a16:creationId xmlns:a16="http://schemas.microsoft.com/office/drawing/2014/main" id="{2EB070E9-3B75-C8E5-036B-7400DACD2016}"/>
+              </a:ext>
+            </a:extLst>
+          </p:cNvPr>
+          <p:cNvPicPr>
+            <a:picLocks noChangeAspect="1"/>
+          </p:cNvPicPr>
+          <p:nvPr/>
+        </p:nvPicPr>
+        <p:blipFill>
+          <a:blip r:embed="rId4">
+            <a:extLst>
+              <a:ext uri="{28A0092B-C50C-407E-A947-70E740481C1C}">
+                <a14:useLocalDpi xmlns:a14="http://schemas.microsoft.com/office/drawing/2010/main" val="0"/>
+              </a:ext>
+            </a:extLst>
+          </a:blip>
+          <a:stretch>
+            <a:fillRect/>
+          </a:stretch>
+        </p:blipFill>
+        <p:spPr>
+          <a:xfrm>
+            <a:off x="786032" y="2073396"/>
+            <a:ext cx="3336000" cy="3336000"/>
+          </a:xfrm>
+          <a:prstGeom prst="rect">
+            <a:avLst/>
+          </a:prstGeom>
+        </p:spPr>
+      </p:pic>
+    </p:spTree>
+    <p:extLst>
+      <p:ext uri="{BB962C8B-B14F-4D97-AF65-F5344CB8AC3E}">
+        <p14:creationId xmlns:p14="http://schemas.microsoft.com/office/powerpoint/2010/main" val="4241833589"/>
+      </p:ext>
+    </p:extLst>
+  </p:cSld>
+  <p:clrMapOvr>
+    <a:masterClrMapping/>
+  </p:clrMapOvr>
+</p:sld>
+</file>
+
+<file path=ppt/slides/slide27.xml><?xml version="1.0" encoding="utf-8"?>
+<p:sld xmlns:a="http://schemas.openxmlformats.org/drawingml/2006/main" xmlns:r="http://schemas.openxmlformats.org/officeDocument/2006/relationships" xmlns:p="http://schemas.openxmlformats.org/presentationml/2006/main">
+  <p:cSld>
+    <p:spTree>
+      <p:nvGrpSpPr>
+        <p:cNvPr id="1" name=""/>
+        <p:cNvGrpSpPr/>
+        <p:nvPr/>
+      </p:nvGrpSpPr>
+      <p:grpSpPr>
+        <a:xfrm>
+          <a:off x="0" y="0"/>
+          <a:ext cx="0" cy="0"/>
+          <a:chOff x="0" y="0"/>
+          <a:chExt cx="0" cy="0"/>
+        </a:xfrm>
+      </p:grpSpPr>
+      <p:pic>
+        <p:nvPicPr>
+          <p:cNvPr id="5" name="Picture 4">
+            <a:extLst>
+              <a:ext uri="{FF2B5EF4-FFF2-40B4-BE49-F238E27FC236}">
+                <a16:creationId xmlns:a16="http://schemas.microsoft.com/office/drawing/2014/main" id="{ECC95A8F-B406-6409-CA96-D1ECA141B62C}"/>
+              </a:ext>
+            </a:extLst>
+          </p:cNvPr>
+          <p:cNvPicPr>
+            <a:picLocks noChangeAspect="1"/>
+          </p:cNvPicPr>
+          <p:nvPr/>
+        </p:nvPicPr>
+        <p:blipFill>
+          <a:blip r:embed="rId2">
+            <a:extLst>
+              <a:ext uri="{28A0092B-C50C-407E-A947-70E740481C1C}">
+                <a14:useLocalDpi xmlns:a14="http://schemas.microsoft.com/office/drawing/2010/main" val="0"/>
+              </a:ext>
+            </a:extLst>
+          </a:blip>
+          <a:stretch>
+            <a:fillRect/>
+          </a:stretch>
+        </p:blipFill>
+        <p:spPr>
+          <a:xfrm>
+            <a:off x="384916" y="2006887"/>
+            <a:ext cx="2517653" cy="2517653"/>
+          </a:xfrm>
+          <a:prstGeom prst="rect">
+            <a:avLst/>
+          </a:prstGeom>
+        </p:spPr>
+      </p:pic>
+      <p:sp>
+        <p:nvSpPr>
+          <p:cNvPr id="6" name="Arrow: Right 5">
+            <a:extLst>
+              <a:ext uri="{FF2B5EF4-FFF2-40B4-BE49-F238E27FC236}">
+                <a16:creationId xmlns:a16="http://schemas.microsoft.com/office/drawing/2014/main" id="{9DA1BB52-9EAA-201C-8EE5-FADB9D25C5A2}"/>
+              </a:ext>
+            </a:extLst>
+          </p:cNvPr>
+          <p:cNvSpPr/>
+          <p:nvPr/>
+        </p:nvSpPr>
+        <p:spPr>
+          <a:xfrm>
+            <a:off x="3374368" y="3154027"/>
+            <a:ext cx="978408" cy="484632"/>
+          </a:xfrm>
+          <a:prstGeom prst="rightArrow">
+            <a:avLst/>
+          </a:prstGeom>
+        </p:spPr>
+        <p:style>
+          <a:lnRef idx="2">
+            <a:schemeClr val="accent1">
+              <a:shade val="15000"/>
+            </a:schemeClr>
+          </a:lnRef>
+          <a:fillRef idx="1">
+            <a:schemeClr val="accent1"/>
+          </a:fillRef>
+          <a:effectRef idx="0">
+            <a:schemeClr val="accent1"/>
+          </a:effectRef>
+          <a:fontRef idx="minor">
+            <a:schemeClr val="lt1"/>
+          </a:fontRef>
+        </p:style>
+        <p:txBody>
+          <a:bodyPr rtlCol="0" anchor="ctr"/>
+          <a:lstStyle/>
+          <a:p>
+            <a:pPr algn="ctr"/>
+            <a:endParaRPr lang="de-DE"/>
+          </a:p>
+        </p:txBody>
+      </p:sp>
+      <p:sp>
+        <p:nvSpPr>
+          <p:cNvPr id="7" name="TextBox 6">
+            <a:extLst>
+              <a:ext uri="{FF2B5EF4-FFF2-40B4-BE49-F238E27FC236}">
+                <a16:creationId xmlns:a16="http://schemas.microsoft.com/office/drawing/2014/main" id="{B43E0F7A-43F3-14F6-ECCF-2454BD3D8395}"/>
+              </a:ext>
+            </a:extLst>
+          </p:cNvPr>
+          <p:cNvSpPr txBox="1"/>
+          <p:nvPr/>
+        </p:nvSpPr>
+        <p:spPr>
+          <a:xfrm>
+            <a:off x="3015916" y="2692360"/>
+            <a:ext cx="1654832" cy="461665"/>
+          </a:xfrm>
+          <a:prstGeom prst="rect">
+            <a:avLst/>
+          </a:prstGeom>
+          <a:solidFill>
+            <a:schemeClr val="bg2"/>
+          </a:solidFill>
+          <a:effectLst>
+            <a:softEdge rad="50800"/>
+          </a:effectLst>
+        </p:spPr>
+        <p:txBody>
+          <a:bodyPr wrap="square" rtlCol="0">
+            <a:spAutoFit/>
+          </a:bodyPr>
+          <a:lstStyle/>
+          <a:p>
+            <a:r>
+              <a:rPr lang="de-DE" sz="2400" dirty="0">
+                <a:latin typeface="Cambria" panose="02040503050406030204" pitchFamily="18" charset="0"/>
+                <a:ea typeface="Cambria" panose="02040503050406030204" pitchFamily="18" charset="0"/>
+              </a:rPr>
+              <a:t>fft(), abs()</a:t>
+            </a:r>
+          </a:p>
+        </p:txBody>
+      </p:sp>
+      <p:sp>
+        <p:nvSpPr>
+          <p:cNvPr id="8" name="TextBox 7">
+            <a:extLst>
+              <a:ext uri="{FF2B5EF4-FFF2-40B4-BE49-F238E27FC236}">
+                <a16:creationId xmlns:a16="http://schemas.microsoft.com/office/drawing/2014/main" id="{4F35AF1C-FEE8-24A5-63E1-0A178C1E91DD}"/>
+              </a:ext>
+            </a:extLst>
+          </p:cNvPr>
+          <p:cNvSpPr txBox="1"/>
+          <p:nvPr/>
+        </p:nvSpPr>
+        <p:spPr>
+          <a:xfrm>
+            <a:off x="757441" y="1545222"/>
+            <a:ext cx="1772601" cy="461665"/>
+          </a:xfrm>
+          <a:prstGeom prst="rect">
+            <a:avLst/>
+          </a:prstGeom>
+          <a:solidFill>
+            <a:schemeClr val="bg2"/>
+          </a:solidFill>
+          <a:effectLst>
+            <a:softEdge rad="50800"/>
+          </a:effectLst>
+        </p:spPr>
+        <p:txBody>
+          <a:bodyPr wrap="none" rtlCol="0">
+            <a:spAutoFit/>
+          </a:bodyPr>
+          <a:lstStyle/>
+          <a:p>
+            <a:r>
+              <a:rPr lang="de-DE" sz="2400" dirty="0">
+                <a:latin typeface="Cambria" panose="02040503050406030204" pitchFamily="18" charset="0"/>
+                <a:ea typeface="Cambria" panose="02040503050406030204" pitchFamily="18" charset="0"/>
+              </a:rPr>
+              <a:t>abs</a:t>
+            </a:r>
+            <a:r>
+              <a:rPr lang="de-DE" sz="2400" dirty="0">
+                <a:latin typeface="+mj-lt"/>
+                <a:ea typeface="Cambria" panose="02040503050406030204" pitchFamily="18" charset="0"/>
+              </a:rPr>
+              <a:t>(</a:t>
+            </a:r>
+            <a:r>
+              <a:rPr lang="de-DE" sz="2400" dirty="0">
+                <a:latin typeface="Cambria" panose="02040503050406030204" pitchFamily="18" charset="0"/>
+                <a:ea typeface="Cambria" panose="02040503050406030204" pitchFamily="18" charset="0"/>
+              </a:rPr>
+              <a:t>kspace</a:t>
+            </a:r>
+            <a:r>
+              <a:rPr lang="de-DE" sz="2400" dirty="0">
+                <a:latin typeface="+mj-lt"/>
+                <a:ea typeface="Cambria" panose="02040503050406030204" pitchFamily="18" charset="0"/>
+              </a:rPr>
+              <a:t>)</a:t>
+            </a:r>
+          </a:p>
+        </p:txBody>
+      </p:sp>
+      <p:pic>
+        <p:nvPicPr>
+          <p:cNvPr id="9" name="Picture 8" descr="A screenshot of a cell phone&#10;&#10;AI-generated content may be incorrect.">
+            <a:extLst>
+              <a:ext uri="{FF2B5EF4-FFF2-40B4-BE49-F238E27FC236}">
+                <a16:creationId xmlns:a16="http://schemas.microsoft.com/office/drawing/2014/main" id="{9C6F7946-ABAC-C5B9-ECD3-3D88E665DE98}"/>
+              </a:ext>
+            </a:extLst>
+          </p:cNvPr>
+          <p:cNvPicPr>
+            <a:picLocks noChangeAspect="1"/>
+          </p:cNvPicPr>
+          <p:nvPr/>
+        </p:nvPicPr>
+        <p:blipFill>
+          <a:blip r:embed="rId3">
+            <a:extLst>
+              <a:ext uri="{28A0092B-C50C-407E-A947-70E740481C1C}">
+                <a14:useLocalDpi xmlns:a14="http://schemas.microsoft.com/office/drawing/2010/main" val="0"/>
+              </a:ext>
+            </a:extLst>
+          </a:blip>
+          <a:srcRect b="15782"/>
+          <a:stretch>
+            <a:fillRect/>
+          </a:stretch>
+        </p:blipFill>
+        <p:spPr>
+          <a:xfrm>
+            <a:off x="4411568" y="1924466"/>
+            <a:ext cx="2756470" cy="2708351"/>
+          </a:xfrm>
+          <a:prstGeom prst="rect">
+            <a:avLst/>
+          </a:prstGeom>
+        </p:spPr>
+      </p:pic>
+      <p:pic>
+        <p:nvPicPr>
+          <p:cNvPr id="10" name="Picture 9" descr="A black and white pixelated image&#10;&#10;AI-generated content may be incorrect.">
+            <a:extLst>
+              <a:ext uri="{FF2B5EF4-FFF2-40B4-BE49-F238E27FC236}">
+                <a16:creationId xmlns:a16="http://schemas.microsoft.com/office/drawing/2014/main" id="{B7FC1FC5-E95C-E979-5485-1933A8C938C2}"/>
+              </a:ext>
+            </a:extLst>
+          </p:cNvPr>
+          <p:cNvPicPr>
+            <a:picLocks noChangeAspect="1"/>
+          </p:cNvPicPr>
+          <p:nvPr/>
+        </p:nvPicPr>
+        <p:blipFill>
+          <a:blip r:embed="rId4">
+            <a:extLst>
+              <a:ext uri="{28A0092B-C50C-407E-A947-70E740481C1C}">
+                <a14:useLocalDpi xmlns:a14="http://schemas.microsoft.com/office/drawing/2010/main" val="0"/>
+              </a:ext>
+            </a:extLst>
+          </a:blip>
+          <a:srcRect l="19153" b="15125"/>
+          <a:stretch>
+            <a:fillRect/>
+          </a:stretch>
+        </p:blipFill>
+        <p:spPr>
+          <a:xfrm>
+            <a:off x="9049564" y="1967589"/>
+            <a:ext cx="2538727" cy="2665228"/>
+          </a:xfrm>
+          <a:prstGeom prst="rect">
+            <a:avLst/>
+          </a:prstGeom>
+        </p:spPr>
+      </p:pic>
+      <p:sp>
+        <p:nvSpPr>
+          <p:cNvPr id="11" name="Arrow: Right 10">
+            <a:extLst>
+              <a:ext uri="{FF2B5EF4-FFF2-40B4-BE49-F238E27FC236}">
+                <a16:creationId xmlns:a16="http://schemas.microsoft.com/office/drawing/2014/main" id="{11F879F3-F5A4-4E02-A962-35FDB104684D}"/>
+              </a:ext>
+            </a:extLst>
+          </p:cNvPr>
+          <p:cNvSpPr/>
+          <p:nvPr/>
+        </p:nvSpPr>
+        <p:spPr>
+          <a:xfrm>
+            <a:off x="7541006" y="3154027"/>
+            <a:ext cx="978408" cy="484632"/>
+          </a:xfrm>
+          <a:prstGeom prst="rightArrow">
+            <a:avLst/>
+          </a:prstGeom>
+        </p:spPr>
+        <p:style>
+          <a:lnRef idx="2">
+            <a:schemeClr val="accent1">
+              <a:shade val="15000"/>
+            </a:schemeClr>
+          </a:lnRef>
+          <a:fillRef idx="1">
+            <a:schemeClr val="accent1"/>
+          </a:fillRef>
+          <a:effectRef idx="0">
+            <a:schemeClr val="accent1"/>
+          </a:effectRef>
+          <a:fontRef idx="minor">
+            <a:schemeClr val="lt1"/>
+          </a:fontRef>
+        </p:style>
+        <p:txBody>
+          <a:bodyPr rtlCol="0" anchor="ctr"/>
+          <a:lstStyle/>
+          <a:p>
+            <a:pPr algn="ctr"/>
+            <a:endParaRPr lang="de-DE"/>
+          </a:p>
+        </p:txBody>
+      </p:sp>
+      <p:sp>
+        <p:nvSpPr>
+          <p:cNvPr id="13" name="TextBox 12">
+            <a:extLst>
+              <a:ext uri="{FF2B5EF4-FFF2-40B4-BE49-F238E27FC236}">
+                <a16:creationId xmlns:a16="http://schemas.microsoft.com/office/drawing/2014/main" id="{2F8DF13C-8C87-5B8D-C9D5-EE5348380FAC}"/>
+              </a:ext>
+            </a:extLst>
+          </p:cNvPr>
+          <p:cNvSpPr txBox="1"/>
+          <p:nvPr/>
+        </p:nvSpPr>
+        <p:spPr>
+          <a:xfrm>
+            <a:off x="7243683" y="2692360"/>
+            <a:ext cx="1540806" cy="461665"/>
+          </a:xfrm>
+          <a:prstGeom prst="rect">
+            <a:avLst/>
+          </a:prstGeom>
+          <a:solidFill>
+            <a:schemeClr val="bg2"/>
+          </a:solidFill>
+          <a:effectLst>
+            <a:softEdge rad="50800"/>
+          </a:effectLst>
+        </p:spPr>
+        <p:txBody>
+          <a:bodyPr wrap="none" rtlCol="0">
+            <a:spAutoFit/>
+          </a:bodyPr>
+          <a:lstStyle/>
+          <a:p>
+            <a:r>
+              <a:rPr lang="de-DE" sz="2400" dirty="0">
+                <a:latin typeface="Cambria" panose="02040503050406030204" pitchFamily="18" charset="0"/>
+                <a:ea typeface="Cambria" panose="02040503050406030204" pitchFamily="18" charset="0"/>
+              </a:rPr>
+              <a:t>fft</a:t>
+            </a:r>
+            <a:r>
+              <a:rPr lang="de-DE" sz="2400" dirty="0">
+                <a:latin typeface="+mj-lt"/>
+                <a:ea typeface="Cambria" panose="02040503050406030204" pitchFamily="18" charset="0"/>
+              </a:rPr>
+              <a:t>( )</a:t>
+            </a:r>
+            <a:r>
+              <a:rPr lang="de-DE" sz="2400" dirty="0">
+                <a:latin typeface="Cambria" panose="02040503050406030204" pitchFamily="18" charset="0"/>
+                <a:ea typeface="Cambria" panose="02040503050406030204" pitchFamily="18" charset="0"/>
+              </a:rPr>
+              <a:t>, abs</a:t>
+            </a:r>
+            <a:r>
+              <a:rPr lang="de-DE" sz="2400" dirty="0">
+                <a:ea typeface="Cambria" panose="02040503050406030204" pitchFamily="18" charset="0"/>
+              </a:rPr>
+              <a:t>( )</a:t>
+            </a:r>
+            <a:endParaRPr lang="de-DE" sz="2400" dirty="0">
+              <a:latin typeface="+mj-lt"/>
+              <a:ea typeface="Cambria" panose="02040503050406030204" pitchFamily="18" charset="0"/>
+            </a:endParaRPr>
+          </a:p>
+        </p:txBody>
+      </p:sp>
+      <p:sp>
+        <p:nvSpPr>
+          <p:cNvPr id="14" name="TextBox 13">
+            <a:extLst>
+              <a:ext uri="{FF2B5EF4-FFF2-40B4-BE49-F238E27FC236}">
+                <a16:creationId xmlns:a16="http://schemas.microsoft.com/office/drawing/2014/main" id="{4CBFD0C6-10F0-DC47-F1A0-3936EF6AD695}"/>
+              </a:ext>
+            </a:extLst>
+          </p:cNvPr>
+          <p:cNvSpPr txBox="1"/>
+          <p:nvPr/>
+        </p:nvSpPr>
+        <p:spPr>
+          <a:xfrm>
+            <a:off x="9432626" y="1545222"/>
+            <a:ext cx="1929695" cy="461665"/>
+          </a:xfrm>
+          <a:prstGeom prst="rect">
+            <a:avLst/>
+          </a:prstGeom>
+          <a:solidFill>
+            <a:schemeClr val="bg2"/>
+          </a:solidFill>
+          <a:effectLst>
+            <a:softEdge rad="50800"/>
+          </a:effectLst>
+        </p:spPr>
+        <p:txBody>
+          <a:bodyPr wrap="none" rtlCol="0">
+            <a:spAutoFit/>
+          </a:bodyPr>
+          <a:lstStyle/>
+          <a:p>
+            <a:r>
+              <a:rPr lang="de-DE" sz="2400" dirty="0">
+                <a:latin typeface="Cambria" panose="02040503050406030204" pitchFamily="18" charset="0"/>
+                <a:ea typeface="Cambria" panose="02040503050406030204" pitchFamily="18" charset="0"/>
+              </a:rPr>
+              <a:t>abs</a:t>
+            </a:r>
+            <a:r>
+              <a:rPr lang="de-DE" sz="2400" dirty="0">
+                <a:latin typeface="+mj-lt"/>
+                <a:ea typeface="Cambria" panose="02040503050406030204" pitchFamily="18" charset="0"/>
+              </a:rPr>
+              <a:t>(</a:t>
+            </a:r>
+            <a:r>
+              <a:rPr lang="de-DE" sz="2400" dirty="0">
+                <a:latin typeface="Cambria" panose="02040503050406030204" pitchFamily="18" charset="0"/>
+                <a:ea typeface="Cambria" panose="02040503050406030204" pitchFamily="18" charset="0"/>
+              </a:rPr>
+              <a:t>kspace</a:t>
+            </a:r>
+            <a:r>
+              <a:rPr lang="de-DE" sz="2400" dirty="0">
+                <a:latin typeface="+mj-lt"/>
+                <a:ea typeface="Cambria" panose="02040503050406030204" pitchFamily="18" charset="0"/>
+              </a:rPr>
+              <a:t>) ?</a:t>
+            </a:r>
+          </a:p>
+        </p:txBody>
+      </p:sp>
+      <p:sp>
+        <p:nvSpPr>
+          <p:cNvPr id="15" name="TextBox 14">
+            <a:extLst>
+              <a:ext uri="{FF2B5EF4-FFF2-40B4-BE49-F238E27FC236}">
+                <a16:creationId xmlns:a16="http://schemas.microsoft.com/office/drawing/2014/main" id="{149C3903-609B-8906-5ACD-82D7F1A07BCD}"/>
+              </a:ext>
+            </a:extLst>
+          </p:cNvPr>
+          <p:cNvSpPr txBox="1"/>
+          <p:nvPr/>
+        </p:nvSpPr>
+        <p:spPr>
+          <a:xfrm>
+            <a:off x="4915055" y="1545222"/>
+            <a:ext cx="1673856" cy="461665"/>
+          </a:xfrm>
+          <a:prstGeom prst="rect">
+            <a:avLst/>
+          </a:prstGeom>
+          <a:solidFill>
+            <a:schemeClr val="bg2"/>
+          </a:solidFill>
+          <a:effectLst>
+            <a:softEdge rad="50800"/>
+          </a:effectLst>
+        </p:spPr>
+        <p:txBody>
+          <a:bodyPr wrap="none" rtlCol="0">
+            <a:spAutoFit/>
+          </a:bodyPr>
+          <a:lstStyle/>
+          <a:p>
+            <a:r>
+              <a:rPr lang="de-DE" sz="2400" dirty="0">
+                <a:latin typeface="Cambria" panose="02040503050406030204" pitchFamily="18" charset="0"/>
+                <a:ea typeface="Cambria" panose="02040503050406030204" pitchFamily="18" charset="0"/>
+              </a:rPr>
+              <a:t>abs</a:t>
+            </a:r>
+            <a:r>
+              <a:rPr lang="de-DE" sz="2400" dirty="0">
+                <a:latin typeface="+mj-lt"/>
+                <a:ea typeface="Cambria" panose="02040503050406030204" pitchFamily="18" charset="0"/>
+              </a:rPr>
+              <a:t>(</a:t>
+            </a:r>
+            <a:r>
+              <a:rPr lang="de-DE" sz="2400" dirty="0">
+                <a:latin typeface="Cambria" panose="02040503050406030204" pitchFamily="18" charset="0"/>
+                <a:ea typeface="Cambria" panose="02040503050406030204" pitchFamily="18" charset="0"/>
+              </a:rPr>
+              <a:t>image</a:t>
+            </a:r>
+            <a:r>
+              <a:rPr lang="de-DE" sz="2400" dirty="0">
+                <a:latin typeface="+mj-lt"/>
+                <a:ea typeface="Cambria" panose="02040503050406030204" pitchFamily="18" charset="0"/>
+              </a:rPr>
+              <a:t>) </a:t>
+            </a:r>
+          </a:p>
+        </p:txBody>
+      </p:sp>
+    </p:spTree>
+    <p:extLst>
+      <p:ext uri="{BB962C8B-B14F-4D97-AF65-F5344CB8AC3E}">
+        <p14:creationId xmlns:p14="http://schemas.microsoft.com/office/powerpoint/2010/main" val="4110650371"/>
+      </p:ext>
+    </p:extLst>
+  </p:cSld>
+  <p:clrMapOvr>
+    <a:masterClrMapping/>
+  </p:clrMapOvr>
+</p:sld>
+</file>
+
+<file path=ppt/slides/slide28.xml><?xml version="1.0" encoding="utf-8"?>
+<p:sld xmlns:a="http://schemas.openxmlformats.org/drawingml/2006/main" xmlns:r="http://schemas.openxmlformats.org/officeDocument/2006/relationships" xmlns:p="http://schemas.openxmlformats.org/presentationml/2006/main">
+  <p:cSld>
+    <p:spTree>
+      <p:nvGrpSpPr>
+        <p:cNvPr id="1" name=""/>
+        <p:cNvGrpSpPr/>
+        <p:nvPr/>
+      </p:nvGrpSpPr>
+      <p:grpSpPr>
+        <a:xfrm>
+          <a:off x="0" y="0"/>
+          <a:ext cx="0" cy="0"/>
+          <a:chOff x="0" y="0"/>
+          <a:chExt cx="0" cy="0"/>
+        </a:xfrm>
+      </p:grpSpPr>
+      <p:pic>
+        <p:nvPicPr>
+          <p:cNvPr id="9" name="Picture 8" descr="A light in the dark&#10;&#10;AI-generated content may be incorrect.">
+            <a:extLst>
+              <a:ext uri="{FF2B5EF4-FFF2-40B4-BE49-F238E27FC236}">
+                <a16:creationId xmlns:a16="http://schemas.microsoft.com/office/drawing/2014/main" id="{822FAF55-334E-2299-B217-4DDA53A761A2}"/>
+              </a:ext>
+            </a:extLst>
+          </p:cNvPr>
+          <p:cNvPicPr>
+            <a:picLocks noChangeAspect="1"/>
+          </p:cNvPicPr>
+          <p:nvPr/>
+        </p:nvPicPr>
+        <p:blipFill>
+          <a:blip r:embed="rId2">
+            <a:extLst>
+              <a:ext uri="{28A0092B-C50C-407E-A947-70E740481C1C}">
+                <a14:useLocalDpi xmlns:a14="http://schemas.microsoft.com/office/drawing/2010/main" val="0"/>
+              </a:ext>
+            </a:extLst>
+          </a:blip>
+          <a:stretch>
+            <a:fillRect/>
+          </a:stretch>
+        </p:blipFill>
+        <p:spPr>
+          <a:xfrm>
+            <a:off x="1630457" y="378598"/>
+            <a:ext cx="4465543" cy="4465543"/>
+          </a:xfrm>
+          <a:prstGeom prst="rect">
+            <a:avLst/>
+          </a:prstGeom>
+        </p:spPr>
+      </p:pic>
+      <p:pic>
+        <p:nvPicPr>
+          <p:cNvPr id="11" name="Picture 10" descr="A x-ray of a human foot&#10;&#10;AI-generated content may be incorrect.">
+            <a:extLst>
+              <a:ext uri="{FF2B5EF4-FFF2-40B4-BE49-F238E27FC236}">
+                <a16:creationId xmlns:a16="http://schemas.microsoft.com/office/drawing/2014/main" id="{3E7257F5-6B56-7030-5762-F8DC8985809C}"/>
+              </a:ext>
+            </a:extLst>
+          </p:cNvPr>
+          <p:cNvPicPr>
+            <a:picLocks noChangeAspect="1"/>
+          </p:cNvPicPr>
+          <p:nvPr/>
+        </p:nvPicPr>
+        <p:blipFill>
+          <a:blip r:embed="rId3">
+            <a:extLst>
+              <a:ext uri="{28A0092B-C50C-407E-A947-70E740481C1C}">
+                <a14:useLocalDpi xmlns:a14="http://schemas.microsoft.com/office/drawing/2010/main" val="0"/>
+              </a:ext>
+            </a:extLst>
+          </a:blip>
+          <a:stretch>
+            <a:fillRect/>
+          </a:stretch>
+        </p:blipFill>
+        <p:spPr>
+          <a:xfrm>
+            <a:off x="6986228" y="378598"/>
+            <a:ext cx="4465543" cy="4465543"/>
+          </a:xfrm>
+          <a:prstGeom prst="rect">
+            <a:avLst/>
+          </a:prstGeom>
+        </p:spPr>
+      </p:pic>
+    </p:spTree>
+    <p:extLst>
+      <p:ext uri="{BB962C8B-B14F-4D97-AF65-F5344CB8AC3E}">
+        <p14:creationId xmlns:p14="http://schemas.microsoft.com/office/powerpoint/2010/main" val="2565699562"/>
+      </p:ext>
+    </p:extLst>
+  </p:cSld>
+  <p:clrMapOvr>
+    <a:masterClrMapping/>
+  </p:clrMapOvr>
+</p:sld>
+</file>
+
+<file path=ppt/slides/slide3.xml><?xml version="1.0" encoding="utf-8"?>
+<p:sld xmlns:a="http://schemas.openxmlformats.org/drawingml/2006/main" xmlns:r="http://schemas.openxmlformats.org/officeDocument/2006/relationships" xmlns:p="http://schemas.openxmlformats.org/presentationml/2006/main">
+  <p:cSld>
+    <p:spTree>
+      <p:nvGrpSpPr>
+        <p:cNvPr id="1" name=""/>
+        <p:cNvGrpSpPr/>
+        <p:nvPr/>
+      </p:nvGrpSpPr>
+      <p:grpSpPr>
+        <a:xfrm>
+          <a:off x="0" y="0"/>
+          <a:ext cx="0" cy="0"/>
+          <a:chOff x="0" y="0"/>
+          <a:chExt cx="0" cy="0"/>
+        </a:xfrm>
+      </p:grpSpPr>
+      <p:cxnSp>
+        <p:nvCxnSpPr>
+          <p:cNvPr id="12" name="Straight Arrow Connector 11">
+            <a:extLst>
+              <a:ext uri="{FF2B5EF4-FFF2-40B4-BE49-F238E27FC236}">
+                <a16:creationId xmlns:a16="http://schemas.microsoft.com/office/drawing/2014/main" id="{3CEC1F93-DBA7-792F-48D2-4AD0AE7486DB}"/>
+              </a:ext>
+            </a:extLst>
+          </p:cNvPr>
+          <p:cNvCxnSpPr>
+            <a:cxnSpLocks/>
+          </p:cNvCxnSpPr>
+          <p:nvPr/>
+        </p:nvCxnSpPr>
+        <p:spPr>
+          <a:xfrm flipV="1">
+            <a:off x="8055153" y="1634797"/>
+            <a:ext cx="0" cy="1132120"/>
+          </a:xfrm>
+          <a:prstGeom prst="straightConnector1">
+            <a:avLst/>
+          </a:prstGeom>
+          <a:ln w="57150">
+            <a:solidFill>
+              <a:srgbClr val="C00000"/>
+            </a:solidFill>
+            <a:tailEnd type="triangle"/>
+          </a:ln>
+        </p:spPr>
+        <p:style>
+          <a:lnRef idx="2">
+            <a:schemeClr val="accent1"/>
+          </a:lnRef>
+          <a:fillRef idx="0">
+            <a:schemeClr val="accent1"/>
+          </a:fillRef>
+          <a:effectRef idx="1">
+            <a:schemeClr val="accent1"/>
+          </a:effectRef>
+          <a:fontRef idx="minor">
+            <a:schemeClr val="tx1"/>
+          </a:fontRef>
+        </p:style>
+      </p:cxnSp>
+      <p:sp>
+        <p:nvSpPr>
+          <p:cNvPr id="16" name="TextBox 15">
+            <a:extLst>
+              <a:ext uri="{FF2B5EF4-FFF2-40B4-BE49-F238E27FC236}">
+                <a16:creationId xmlns:a16="http://schemas.microsoft.com/office/drawing/2014/main" id="{AB1E5687-1E65-80BE-1DF9-3709F56F8EEE}"/>
+              </a:ext>
+            </a:extLst>
+          </p:cNvPr>
+          <p:cNvSpPr txBox="1"/>
+          <p:nvPr/>
+        </p:nvSpPr>
+        <p:spPr>
+          <a:xfrm>
+            <a:off x="543998" y="1422197"/>
+            <a:ext cx="2782557" cy="369332"/>
+          </a:xfrm>
+          <a:prstGeom prst="rect">
+            <a:avLst/>
+          </a:prstGeom>
+          <a:noFill/>
+        </p:spPr>
+        <p:txBody>
+          <a:bodyPr wrap="none" rtlCol="0">
+            <a:spAutoFit/>
+          </a:bodyPr>
+          <a:lstStyle/>
+          <a:p>
+            <a:r>
+              <a:rPr lang="de-DE" dirty="0"/>
+              <a:t>Electrons moving in a loop</a:t>
+            </a:r>
+          </a:p>
+        </p:txBody>
+      </p:sp>
+      <p:sp>
+        <p:nvSpPr>
+          <p:cNvPr id="17" name="TextBox 16">
+            <a:extLst>
+              <a:ext uri="{FF2B5EF4-FFF2-40B4-BE49-F238E27FC236}">
+                <a16:creationId xmlns:a16="http://schemas.microsoft.com/office/drawing/2014/main" id="{2162187D-F49B-2323-13D0-8AD99691268C}"/>
+              </a:ext>
+            </a:extLst>
+          </p:cNvPr>
+          <p:cNvSpPr txBox="1"/>
+          <p:nvPr/>
+        </p:nvSpPr>
+        <p:spPr>
+          <a:xfrm>
+            <a:off x="9351466" y="2779582"/>
+            <a:ext cx="2699019" cy="646331"/>
+          </a:xfrm>
+          <a:prstGeom prst="rect">
+            <a:avLst/>
+          </a:prstGeom>
+          <a:noFill/>
+        </p:spPr>
+        <p:txBody>
+          <a:bodyPr wrap="square" rtlCol="0">
+            <a:spAutoFit/>
+          </a:bodyPr>
+          <a:lstStyle/>
+          <a:p>
+            <a:r>
+              <a:rPr lang="de-DE" dirty="0"/>
+              <a:t>Rotating negatively charged sphere</a:t>
+            </a:r>
+          </a:p>
+        </p:txBody>
+      </p:sp>
+      <p:sp>
+        <p:nvSpPr>
+          <p:cNvPr id="18" name="TextBox 17">
+            <a:extLst>
+              <a:ext uri="{FF2B5EF4-FFF2-40B4-BE49-F238E27FC236}">
+                <a16:creationId xmlns:a16="http://schemas.microsoft.com/office/drawing/2014/main" id="{519402C6-A7D9-EC8C-9CBD-D3EF1E9EA2C4}"/>
+              </a:ext>
+            </a:extLst>
+          </p:cNvPr>
+          <p:cNvSpPr txBox="1"/>
+          <p:nvPr/>
+        </p:nvSpPr>
+        <p:spPr>
+          <a:xfrm>
+            <a:off x="3390256" y="3979503"/>
+            <a:ext cx="1994457" cy="369332"/>
+          </a:xfrm>
+          <a:prstGeom prst="rect">
+            <a:avLst/>
+          </a:prstGeom>
+          <a:noFill/>
+        </p:spPr>
+        <p:txBody>
+          <a:bodyPr wrap="none" rtlCol="0">
+            <a:spAutoFit/>
+          </a:bodyPr>
+          <a:lstStyle/>
+          <a:p>
+            <a:r>
+              <a:rPr lang="de-DE" dirty="0"/>
+              <a:t>Magnetic moment</a:t>
+            </a:r>
+          </a:p>
+        </p:txBody>
+      </p:sp>
+      <p:pic>
+        <p:nvPicPr>
+          <p:cNvPr id="13" name="Picture 12">
+            <a:extLst>
+              <a:ext uri="{FF2B5EF4-FFF2-40B4-BE49-F238E27FC236}">
+                <a16:creationId xmlns:a16="http://schemas.microsoft.com/office/drawing/2014/main" id="{3A61982C-560A-15D1-10A0-DA8AA19F1076}"/>
+              </a:ext>
+            </a:extLst>
+          </p:cNvPr>
+          <p:cNvPicPr>
+            <a:picLocks noChangeAspect="1"/>
+          </p:cNvPicPr>
+          <p:nvPr/>
+        </p:nvPicPr>
+        <p:blipFill>
+          <a:blip r:embed="rId3"/>
+          <a:srcRect r="72462"/>
+          <a:stretch>
+            <a:fillRect/>
+          </a:stretch>
+        </p:blipFill>
+        <p:spPr>
+          <a:xfrm>
+            <a:off x="618215" y="1894520"/>
+            <a:ext cx="1695621" cy="3999323"/>
+          </a:xfrm>
+          <a:prstGeom prst="rect">
+            <a:avLst/>
+          </a:prstGeom>
+        </p:spPr>
+      </p:pic>
+      <p:sp>
+        <p:nvSpPr>
+          <p:cNvPr id="4" name="Oval 3">
+            <a:extLst>
+              <a:ext uri="{FF2B5EF4-FFF2-40B4-BE49-F238E27FC236}">
+                <a16:creationId xmlns:a16="http://schemas.microsoft.com/office/drawing/2014/main" id="{72D24AA7-2E5B-5D5C-570E-D1918008BC9C}"/>
+              </a:ext>
+            </a:extLst>
+          </p:cNvPr>
+          <p:cNvSpPr/>
+          <p:nvPr/>
+        </p:nvSpPr>
+        <p:spPr>
+          <a:xfrm>
+            <a:off x="1250225" y="1912799"/>
+            <a:ext cx="2035627" cy="3981044"/>
+          </a:xfrm>
+          <a:prstGeom prst="ellipse">
+            <a:avLst/>
+          </a:prstGeom>
+          <a:solidFill>
+            <a:schemeClr val="bg1"/>
+          </a:solidFill>
+        </p:spPr>
+        <p:style>
+          <a:lnRef idx="2">
+            <a:schemeClr val="accent1">
+              <a:shade val="15000"/>
+            </a:schemeClr>
+          </a:lnRef>
+          <a:fillRef idx="1">
+            <a:schemeClr val="accent1"/>
+          </a:fillRef>
+          <a:effectRef idx="0">
+            <a:schemeClr val="accent1"/>
+          </a:effectRef>
+          <a:fontRef idx="minor">
+            <a:schemeClr val="lt1"/>
+          </a:fontRef>
+        </p:style>
+        <p:txBody>
+          <a:bodyPr rtlCol="0" anchor="ctr"/>
+          <a:lstStyle/>
+          <a:p>
+            <a:pPr algn="ctr"/>
+            <a:endParaRPr lang="de-DE"/>
+          </a:p>
+        </p:txBody>
+      </p:sp>
+      <p:pic>
+        <p:nvPicPr>
+          <p:cNvPr id="30" name="Picture 29">
+            <a:extLst>
+              <a:ext uri="{FF2B5EF4-FFF2-40B4-BE49-F238E27FC236}">
+                <a16:creationId xmlns:a16="http://schemas.microsoft.com/office/drawing/2014/main" id="{FEC1A0D5-DF3A-441F-75A0-01F0FD9E1A9E}"/>
+              </a:ext>
+            </a:extLst>
+          </p:cNvPr>
+          <p:cNvPicPr>
+            <a:picLocks noChangeAspect="1"/>
+          </p:cNvPicPr>
+          <p:nvPr/>
+        </p:nvPicPr>
+        <p:blipFill>
+          <a:blip r:embed="rId4"/>
+          <a:srcRect l="35927"/>
+          <a:stretch>
+            <a:fillRect/>
+          </a:stretch>
+        </p:blipFill>
+        <p:spPr>
+          <a:xfrm>
+            <a:off x="1966915" y="1905406"/>
+            <a:ext cx="1316390" cy="3999323"/>
+          </a:xfrm>
+          <a:prstGeom prst="rect">
+            <a:avLst/>
+          </a:prstGeom>
+        </p:spPr>
+      </p:pic>
+      <p:pic>
+        <p:nvPicPr>
+          <p:cNvPr id="41" name="Picture 40">
+            <a:extLst>
+              <a:ext uri="{FF2B5EF4-FFF2-40B4-BE49-F238E27FC236}">
+                <a16:creationId xmlns:a16="http://schemas.microsoft.com/office/drawing/2014/main" id="{FC42B280-6CFE-CB14-BF71-F7413B2C20ED}"/>
+              </a:ext>
+            </a:extLst>
+          </p:cNvPr>
+          <p:cNvPicPr>
+            <a:picLocks noChangeAspect="1"/>
+          </p:cNvPicPr>
+          <p:nvPr/>
+        </p:nvPicPr>
+        <p:blipFill>
+          <a:blip r:embed="rId5"/>
+          <a:srcRect l="66146"/>
+          <a:stretch>
+            <a:fillRect/>
+          </a:stretch>
+        </p:blipFill>
+        <p:spPr>
+          <a:xfrm>
+            <a:off x="1951152" y="1905406"/>
+            <a:ext cx="693478" cy="3999323"/>
+          </a:xfrm>
+          <a:prstGeom prst="rect">
+            <a:avLst/>
+          </a:prstGeom>
+        </p:spPr>
+      </p:pic>
+      <p:cxnSp>
+        <p:nvCxnSpPr>
+          <p:cNvPr id="8" name="Straight Arrow Connector 7">
+            <a:extLst>
+              <a:ext uri="{FF2B5EF4-FFF2-40B4-BE49-F238E27FC236}">
+                <a16:creationId xmlns:a16="http://schemas.microsoft.com/office/drawing/2014/main" id="{7783164A-C177-D004-791A-47AD0E3F5352}"/>
+              </a:ext>
+            </a:extLst>
+          </p:cNvPr>
+          <p:cNvCxnSpPr>
+            <a:cxnSpLocks/>
+          </p:cNvCxnSpPr>
+          <p:nvPr/>
+        </p:nvCxnSpPr>
+        <p:spPr>
+          <a:xfrm>
+            <a:off x="2054652" y="3876111"/>
+            <a:ext cx="1800000" cy="0"/>
+          </a:xfrm>
+          <a:prstGeom prst="straightConnector1">
+            <a:avLst/>
+          </a:prstGeom>
+          <a:ln w="57150">
+            <a:solidFill>
+              <a:srgbClr val="C00000"/>
+            </a:solidFill>
+            <a:tailEnd type="triangle"/>
+          </a:ln>
+        </p:spPr>
+        <p:style>
+          <a:lnRef idx="2">
+            <a:schemeClr val="accent1"/>
+          </a:lnRef>
+          <a:fillRef idx="0">
+            <a:schemeClr val="accent1"/>
+          </a:fillRef>
+          <a:effectRef idx="1">
+            <a:schemeClr val="accent1"/>
+          </a:effectRef>
+          <a:fontRef idx="minor">
+            <a:schemeClr val="tx1"/>
+          </a:fontRef>
+        </p:style>
+      </p:cxnSp>
+      <p:sp>
+        <p:nvSpPr>
+          <p:cNvPr id="56" name="Arrow: Curved Right 55">
+            <a:extLst>
+              <a:ext uri="{FF2B5EF4-FFF2-40B4-BE49-F238E27FC236}">
+                <a16:creationId xmlns:a16="http://schemas.microsoft.com/office/drawing/2014/main" id="{40C1D434-6D6B-6882-0E10-AB2D2F549398}"/>
+              </a:ext>
+            </a:extLst>
+          </p:cNvPr>
+          <p:cNvSpPr/>
+          <p:nvPr/>
+        </p:nvSpPr>
+        <p:spPr>
+          <a:xfrm rot="16200000" flipV="1">
+            <a:off x="1031658" y="3789732"/>
+            <a:ext cx="1807239" cy="2368329"/>
+          </a:xfrm>
+          <a:prstGeom prst="curvedRightArrow">
+            <a:avLst>
+              <a:gd name="adj1" fmla="val 14107"/>
+              <a:gd name="adj2" fmla="val 24671"/>
+              <a:gd name="adj3" fmla="val 21920"/>
+            </a:avLst>
+          </a:prstGeom>
+        </p:spPr>
+        <p:style>
+          <a:lnRef idx="2">
+            <a:schemeClr val="accent1">
+              <a:shade val="15000"/>
+            </a:schemeClr>
+          </a:lnRef>
+          <a:fillRef idx="1">
+            <a:schemeClr val="accent1"/>
+          </a:fillRef>
+          <a:effectRef idx="0">
+            <a:schemeClr val="accent1"/>
+          </a:effectRef>
+          <a:fontRef idx="minor">
+            <a:schemeClr val="lt1"/>
+          </a:fontRef>
+        </p:style>
+        <p:txBody>
+          <a:bodyPr rtlCol="0" anchor="ctr"/>
+          <a:lstStyle/>
+          <a:p>
+            <a:pPr algn="ctr"/>
+            <a:endParaRPr lang="de-DE">
+              <a:solidFill>
+                <a:schemeClr val="tx1"/>
+              </a:solidFill>
+            </a:endParaRPr>
+          </a:p>
+        </p:txBody>
+      </p:sp>
+      <p:sp>
+        <p:nvSpPr>
+          <p:cNvPr id="57" name="Arrow: Curved Right 56">
+            <a:extLst>
+              <a:ext uri="{FF2B5EF4-FFF2-40B4-BE49-F238E27FC236}">
+                <a16:creationId xmlns:a16="http://schemas.microsoft.com/office/drawing/2014/main" id="{CE6BD84D-5B5F-380A-C782-A1741732A56A}"/>
+              </a:ext>
+            </a:extLst>
+          </p:cNvPr>
+          <p:cNvSpPr/>
+          <p:nvPr/>
+        </p:nvSpPr>
+        <p:spPr>
+          <a:xfrm rot="16200000" flipH="1">
+            <a:off x="1151032" y="1621368"/>
+            <a:ext cx="1807239" cy="2368329"/>
+          </a:xfrm>
+          <a:prstGeom prst="curvedRightArrow">
+            <a:avLst>
+              <a:gd name="adj1" fmla="val 14107"/>
+              <a:gd name="adj2" fmla="val 24671"/>
+              <a:gd name="adj3" fmla="val 21920"/>
+            </a:avLst>
+          </a:prstGeom>
+        </p:spPr>
+        <p:style>
+          <a:lnRef idx="2">
+            <a:schemeClr val="accent1">
+              <a:shade val="15000"/>
+            </a:schemeClr>
+          </a:lnRef>
+          <a:fillRef idx="1">
+            <a:schemeClr val="accent1"/>
+          </a:fillRef>
+          <a:effectRef idx="0">
+            <a:schemeClr val="accent1"/>
+          </a:effectRef>
+          <a:fontRef idx="minor">
+            <a:schemeClr val="lt1"/>
+          </a:fontRef>
+        </p:style>
+        <p:txBody>
+          <a:bodyPr rtlCol="0" anchor="ctr"/>
+          <a:lstStyle/>
+          <a:p>
+            <a:pPr algn="ctr"/>
+            <a:endParaRPr lang="de-DE">
+              <a:solidFill>
+                <a:schemeClr val="tx1"/>
+              </a:solidFill>
+            </a:endParaRPr>
+          </a:p>
+        </p:txBody>
+      </p:sp>
+      <p:sp>
+        <p:nvSpPr>
+          <p:cNvPr id="59" name="Oval 58">
+            <a:extLst>
+              <a:ext uri="{FF2B5EF4-FFF2-40B4-BE49-F238E27FC236}">
+                <a16:creationId xmlns:a16="http://schemas.microsoft.com/office/drawing/2014/main" id="{A852F8A1-C1AF-F554-0E9F-FD799092ADC3}"/>
+              </a:ext>
+            </a:extLst>
+          </p:cNvPr>
+          <p:cNvSpPr/>
+          <p:nvPr/>
+        </p:nvSpPr>
+        <p:spPr>
+          <a:xfrm>
+            <a:off x="6645700" y="2724169"/>
+            <a:ext cx="2880000" cy="2880000"/>
+          </a:xfrm>
+          <a:prstGeom prst="ellipse">
+            <a:avLst/>
+          </a:prstGeom>
+          <a:solidFill>
+            <a:schemeClr val="tx1">
+              <a:lumMod val="65000"/>
+              <a:lumOff val="35000"/>
+            </a:schemeClr>
+          </a:solidFill>
+        </p:spPr>
+        <p:style>
+          <a:lnRef idx="2">
+            <a:schemeClr val="accent1">
+              <a:shade val="15000"/>
+            </a:schemeClr>
+          </a:lnRef>
+          <a:fillRef idx="1">
+            <a:schemeClr val="accent1"/>
+          </a:fillRef>
+          <a:effectRef idx="0">
+            <a:schemeClr val="accent1"/>
+          </a:effectRef>
+          <a:fontRef idx="minor">
+            <a:schemeClr val="lt1"/>
+          </a:fontRef>
+        </p:style>
+        <p:txBody>
+          <a:bodyPr rtlCol="0" anchor="ctr"/>
+          <a:lstStyle/>
+          <a:p>
+            <a:pPr algn="ctr"/>
+            <a:endParaRPr lang="de-DE"/>
+          </a:p>
+        </p:txBody>
+      </p:sp>
+      <p:sp>
+        <p:nvSpPr>
+          <p:cNvPr id="10" name="Arrow: Curved Right 9">
+            <a:extLst>
+              <a:ext uri="{FF2B5EF4-FFF2-40B4-BE49-F238E27FC236}">
+                <a16:creationId xmlns:a16="http://schemas.microsoft.com/office/drawing/2014/main" id="{31C03AA4-1B62-D18B-B316-305A74B1D72C}"/>
+              </a:ext>
+            </a:extLst>
+          </p:cNvPr>
+          <p:cNvSpPr/>
+          <p:nvPr/>
+        </p:nvSpPr>
+        <p:spPr>
+          <a:xfrm rot="5400000" flipH="1">
+            <a:off x="7643936" y="2497431"/>
+            <a:ext cx="695889" cy="3583035"/>
+          </a:xfrm>
+          <a:prstGeom prst="curvedRightArrow">
+            <a:avLst>
+              <a:gd name="adj1" fmla="val 37097"/>
+              <a:gd name="adj2" fmla="val 78384"/>
+              <a:gd name="adj3" fmla="val 29464"/>
+            </a:avLst>
+          </a:prstGeom>
+        </p:spPr>
+        <p:style>
+          <a:lnRef idx="2">
+            <a:schemeClr val="accent1">
+              <a:shade val="15000"/>
+            </a:schemeClr>
+          </a:lnRef>
+          <a:fillRef idx="1">
+            <a:schemeClr val="accent1"/>
+          </a:fillRef>
+          <a:effectRef idx="0">
+            <a:schemeClr val="accent1"/>
+          </a:effectRef>
+          <a:fontRef idx="minor">
+            <a:schemeClr val="lt1"/>
+          </a:fontRef>
+        </p:style>
+        <p:txBody>
+          <a:bodyPr rtlCol="0" anchor="ctr"/>
+          <a:lstStyle/>
+          <a:p>
+            <a:pPr algn="ctr"/>
+            <a:endParaRPr lang="de-DE">
+              <a:solidFill>
+                <a:schemeClr val="tx1"/>
+              </a:solidFill>
+            </a:endParaRPr>
+          </a:p>
+        </p:txBody>
+      </p:sp>
+      <p:sp>
+        <p:nvSpPr>
+          <p:cNvPr id="60" name="TextBox 59">
+            <a:extLst>
+              <a:ext uri="{FF2B5EF4-FFF2-40B4-BE49-F238E27FC236}">
+                <a16:creationId xmlns:a16="http://schemas.microsoft.com/office/drawing/2014/main" id="{7E1E9217-4E03-DB0B-4E97-08CF94ED9D01}"/>
+              </a:ext>
+            </a:extLst>
+          </p:cNvPr>
+          <p:cNvSpPr txBox="1"/>
+          <p:nvPr/>
+        </p:nvSpPr>
+        <p:spPr>
+          <a:xfrm>
+            <a:off x="8142891" y="1441615"/>
+            <a:ext cx="1994457" cy="369332"/>
+          </a:xfrm>
+          <a:prstGeom prst="rect">
+            <a:avLst/>
+          </a:prstGeom>
+          <a:noFill/>
+        </p:spPr>
+        <p:txBody>
+          <a:bodyPr wrap="none" rtlCol="0">
+            <a:spAutoFit/>
+          </a:bodyPr>
+          <a:lstStyle/>
+          <a:p>
+            <a:r>
+              <a:rPr lang="de-DE" dirty="0"/>
+              <a:t>Magnetic moment</a:t>
+            </a:r>
+          </a:p>
+        </p:txBody>
+      </p:sp>
+    </p:spTree>
+    <p:extLst>
+      <p:ext uri="{BB962C8B-B14F-4D97-AF65-F5344CB8AC3E}">
+        <p14:creationId xmlns:p14="http://schemas.microsoft.com/office/powerpoint/2010/main" val="4250627379"/>
+      </p:ext>
+    </p:extLst>
+  </p:cSld>
+  <p:clrMapOvr>
+    <a:masterClrMapping/>
+  </p:clrMapOvr>
+</p:sld>
+</file>
+
+<file path=ppt/slides/slide4.xml><?xml version="1.0" encoding="utf-8"?>
+<p:sld xmlns:a="http://schemas.openxmlformats.org/drawingml/2006/main" xmlns:r="http://schemas.openxmlformats.org/officeDocument/2006/relationships" xmlns:p="http://schemas.openxmlformats.org/presentationml/2006/main">
+  <p:cSld>
+    <p:spTree>
+      <p:nvGrpSpPr>
+        <p:cNvPr id="1" name=""/>
+        <p:cNvGrpSpPr/>
+        <p:nvPr/>
+      </p:nvGrpSpPr>
+      <p:grpSpPr>
+        <a:xfrm>
+          <a:off x="0" y="0"/>
+          <a:ext cx="0" cy="0"/>
+          <a:chOff x="0" y="0"/>
+          <a:chExt cx="0" cy="0"/>
+        </a:xfrm>
+      </p:grpSpPr>
+      <p:sp>
+        <p:nvSpPr>
+          <p:cNvPr id="8" name="Oval 7">
+            <a:extLst>
+              <a:ext uri="{FF2B5EF4-FFF2-40B4-BE49-F238E27FC236}">
+                <a16:creationId xmlns:a16="http://schemas.microsoft.com/office/drawing/2014/main" id="{40099E8C-F997-621A-E6E1-7834BB0B09A6}"/>
+              </a:ext>
+            </a:extLst>
+          </p:cNvPr>
+          <p:cNvSpPr/>
+          <p:nvPr/>
+        </p:nvSpPr>
+        <p:spPr>
+          <a:xfrm>
+            <a:off x="8164287" y="2793535"/>
+            <a:ext cx="914400" cy="914400"/>
+          </a:xfrm>
+          <a:prstGeom prst="ellipse">
+            <a:avLst/>
+          </a:prstGeom>
+          <a:solidFill>
+            <a:srgbClr val="FF0000"/>
+          </a:solidFill>
+          <a:ln>
+            <a:solidFill>
+              <a:schemeClr val="tx1"/>
+            </a:solidFill>
+          </a:ln>
+        </p:spPr>
+        <p:style>
+          <a:lnRef idx="1">
+            <a:schemeClr val="accent5"/>
+          </a:lnRef>
+          <a:fillRef idx="3">
+            <a:schemeClr val="accent5"/>
+          </a:fillRef>
+          <a:effectRef idx="2">
+            <a:schemeClr val="accent5"/>
+          </a:effectRef>
+          <a:fontRef idx="minor">
+            <a:schemeClr val="lt1"/>
+          </a:fontRef>
+        </p:style>
+        <p:txBody>
+          <a:bodyPr rtlCol="0" anchor="ctr"/>
+          <a:lstStyle/>
+          <a:p>
+            <a:pPr algn="ctr"/>
+            <a:endParaRPr lang="de-DE"/>
+          </a:p>
+        </p:txBody>
+      </p:sp>
+      <p:sp>
+        <p:nvSpPr>
+          <p:cNvPr id="4" name="Oval 3">
+            <a:extLst>
+              <a:ext uri="{FF2B5EF4-FFF2-40B4-BE49-F238E27FC236}">
+                <a16:creationId xmlns:a16="http://schemas.microsoft.com/office/drawing/2014/main" id="{6DF8BED5-1C8E-3656-FF03-E0693B5E8385}"/>
+              </a:ext>
+            </a:extLst>
+          </p:cNvPr>
+          <p:cNvSpPr/>
+          <p:nvPr/>
+        </p:nvSpPr>
+        <p:spPr>
+          <a:xfrm>
+            <a:off x="2629154" y="2446562"/>
+            <a:ext cx="914400" cy="914400"/>
+          </a:xfrm>
+          <a:prstGeom prst="ellipse">
+            <a:avLst/>
+          </a:prstGeom>
+          <a:solidFill>
+            <a:srgbClr val="FF0000"/>
+          </a:solidFill>
+          <a:ln>
+            <a:solidFill>
+              <a:schemeClr val="tx1"/>
+            </a:solidFill>
+          </a:ln>
+        </p:spPr>
+        <p:style>
+          <a:lnRef idx="1">
+            <a:schemeClr val="accent5"/>
+          </a:lnRef>
+          <a:fillRef idx="3">
+            <a:schemeClr val="accent5"/>
+          </a:fillRef>
+          <a:effectRef idx="2">
+            <a:schemeClr val="accent5"/>
+          </a:effectRef>
+          <a:fontRef idx="minor">
+            <a:schemeClr val="lt1"/>
+          </a:fontRef>
+        </p:style>
+        <p:txBody>
+          <a:bodyPr rtlCol="0" anchor="ctr"/>
+          <a:lstStyle/>
+          <a:p>
+            <a:pPr algn="ctr"/>
+            <a:endParaRPr lang="de-DE"/>
+          </a:p>
+        </p:txBody>
+      </p:sp>
+      <p:sp>
+        <p:nvSpPr>
+          <p:cNvPr id="5" name="Oval 4">
+            <a:extLst>
+              <a:ext uri="{FF2B5EF4-FFF2-40B4-BE49-F238E27FC236}">
+                <a16:creationId xmlns:a16="http://schemas.microsoft.com/office/drawing/2014/main" id="{5FE59B1A-5E7B-AEA4-ABE3-99317D020AD9}"/>
+              </a:ext>
+            </a:extLst>
+          </p:cNvPr>
+          <p:cNvSpPr/>
+          <p:nvPr/>
+        </p:nvSpPr>
+        <p:spPr>
+          <a:xfrm>
+            <a:off x="7347859" y="2974509"/>
+            <a:ext cx="914400" cy="914400"/>
+          </a:xfrm>
+          <a:prstGeom prst="ellipse">
+            <a:avLst/>
+          </a:prstGeom>
+          <a:solidFill>
+            <a:schemeClr val="bg2">
+              <a:lumMod val="50000"/>
+            </a:schemeClr>
+          </a:solidFill>
+          <a:ln>
+            <a:solidFill>
+              <a:schemeClr val="tx1"/>
+            </a:solidFill>
+          </a:ln>
+        </p:spPr>
+        <p:style>
+          <a:lnRef idx="1">
+            <a:schemeClr val="accent5"/>
+          </a:lnRef>
+          <a:fillRef idx="3">
+            <a:schemeClr val="accent5"/>
+          </a:fillRef>
+          <a:effectRef idx="2">
+            <a:schemeClr val="accent5"/>
+          </a:effectRef>
+          <a:fontRef idx="minor">
+            <a:schemeClr val="lt1"/>
+          </a:fontRef>
+        </p:style>
+        <p:txBody>
+          <a:bodyPr rtlCol="0" anchor="ctr"/>
+          <a:lstStyle/>
+          <a:p>
+            <a:pPr algn="ctr"/>
+            <a:endParaRPr lang="de-DE" dirty="0"/>
+          </a:p>
+        </p:txBody>
+      </p:sp>
+      <p:sp>
+        <p:nvSpPr>
+          <p:cNvPr id="7" name="Oval 6">
+            <a:extLst>
+              <a:ext uri="{FF2B5EF4-FFF2-40B4-BE49-F238E27FC236}">
+                <a16:creationId xmlns:a16="http://schemas.microsoft.com/office/drawing/2014/main" id="{D6BA3362-2413-6A2E-644D-1324A1A3A01C}"/>
+              </a:ext>
+            </a:extLst>
+          </p:cNvPr>
+          <p:cNvSpPr/>
+          <p:nvPr/>
+        </p:nvSpPr>
+        <p:spPr>
+          <a:xfrm>
+            <a:off x="7217229" y="2096851"/>
+            <a:ext cx="914400" cy="914400"/>
+          </a:xfrm>
+          <a:prstGeom prst="ellipse">
+            <a:avLst/>
+          </a:prstGeom>
+          <a:solidFill>
+            <a:srgbClr val="FF0000"/>
+          </a:solidFill>
+          <a:ln>
+            <a:solidFill>
+              <a:schemeClr val="tx1"/>
+            </a:solidFill>
+          </a:ln>
+        </p:spPr>
+        <p:style>
+          <a:lnRef idx="1">
+            <a:schemeClr val="accent5"/>
+          </a:lnRef>
+          <a:fillRef idx="3">
+            <a:schemeClr val="accent5"/>
+          </a:fillRef>
+          <a:effectRef idx="2">
+            <a:schemeClr val="accent5"/>
+          </a:effectRef>
+          <a:fontRef idx="minor">
+            <a:schemeClr val="lt1"/>
+          </a:fontRef>
+        </p:style>
+        <p:txBody>
+          <a:bodyPr rtlCol="0" anchor="ctr"/>
+          <a:lstStyle/>
+          <a:p>
+            <a:pPr algn="ctr"/>
+            <a:endParaRPr lang="de-DE"/>
+          </a:p>
+        </p:txBody>
+      </p:sp>
+      <p:sp>
+        <p:nvSpPr>
+          <p:cNvPr id="6" name="Oval 5">
+            <a:extLst>
+              <a:ext uri="{FF2B5EF4-FFF2-40B4-BE49-F238E27FC236}">
+                <a16:creationId xmlns:a16="http://schemas.microsoft.com/office/drawing/2014/main" id="{3E82B6F6-DF96-17D6-D19B-E6CA937A2A59}"/>
+              </a:ext>
+            </a:extLst>
+          </p:cNvPr>
+          <p:cNvSpPr/>
+          <p:nvPr/>
+        </p:nvSpPr>
+        <p:spPr>
+          <a:xfrm>
+            <a:off x="8033656" y="1975746"/>
+            <a:ext cx="914400" cy="914400"/>
+          </a:xfrm>
+          <a:prstGeom prst="ellipse">
+            <a:avLst/>
+          </a:prstGeom>
+          <a:solidFill>
+            <a:schemeClr val="bg2">
+              <a:lumMod val="50000"/>
+            </a:schemeClr>
+          </a:solidFill>
+          <a:ln>
+            <a:solidFill>
+              <a:schemeClr val="tx1"/>
+            </a:solidFill>
+          </a:ln>
+        </p:spPr>
+        <p:style>
+          <a:lnRef idx="1">
+            <a:schemeClr val="accent5"/>
+          </a:lnRef>
+          <a:fillRef idx="3">
+            <a:schemeClr val="accent5"/>
+          </a:fillRef>
+          <a:effectRef idx="2">
+            <a:schemeClr val="accent5"/>
+          </a:effectRef>
+          <a:fontRef idx="minor">
+            <a:schemeClr val="lt1"/>
+          </a:fontRef>
+        </p:style>
+        <p:txBody>
+          <a:bodyPr rtlCol="0" anchor="ctr"/>
+          <a:lstStyle/>
+          <a:p>
+            <a:pPr algn="ctr"/>
+            <a:endParaRPr lang="de-DE"/>
+          </a:p>
+        </p:txBody>
+      </p:sp>
+      <p:cxnSp>
+        <p:nvCxnSpPr>
+          <p:cNvPr id="10" name="Straight Arrow Connector 9">
+            <a:extLst>
+              <a:ext uri="{FF2B5EF4-FFF2-40B4-BE49-F238E27FC236}">
+                <a16:creationId xmlns:a16="http://schemas.microsoft.com/office/drawing/2014/main" id="{21186703-137E-C7DE-D4B6-F3696AA6CC26}"/>
+              </a:ext>
+            </a:extLst>
+          </p:cNvPr>
+          <p:cNvCxnSpPr>
+            <a:cxnSpLocks/>
+          </p:cNvCxnSpPr>
+          <p:nvPr/>
+        </p:nvCxnSpPr>
+        <p:spPr>
+          <a:xfrm flipV="1">
+            <a:off x="3086354" y="2639784"/>
+            <a:ext cx="0" cy="527957"/>
+          </a:xfrm>
+          <a:prstGeom prst="straightConnector1">
+            <a:avLst/>
+          </a:prstGeom>
+          <a:ln w="57150">
+            <a:solidFill>
+              <a:schemeClr val="bg1"/>
+            </a:solidFill>
+            <a:tailEnd type="triangle"/>
+          </a:ln>
+        </p:spPr>
+        <p:style>
+          <a:lnRef idx="2">
+            <a:schemeClr val="accent1"/>
+          </a:lnRef>
+          <a:fillRef idx="0">
+            <a:schemeClr val="accent1"/>
+          </a:fillRef>
+          <a:effectRef idx="1">
+            <a:schemeClr val="accent1"/>
+          </a:effectRef>
+          <a:fontRef idx="minor">
+            <a:schemeClr val="tx1"/>
+          </a:fontRef>
+        </p:style>
+      </p:cxnSp>
+      <p:cxnSp>
+        <p:nvCxnSpPr>
+          <p:cNvPr id="13" name="Straight Arrow Connector 12">
+            <a:extLst>
+              <a:ext uri="{FF2B5EF4-FFF2-40B4-BE49-F238E27FC236}">
+                <a16:creationId xmlns:a16="http://schemas.microsoft.com/office/drawing/2014/main" id="{A72CE9D6-E772-FFA7-07F9-1C067379A916}"/>
+              </a:ext>
+            </a:extLst>
+          </p:cNvPr>
+          <p:cNvCxnSpPr>
+            <a:cxnSpLocks/>
+          </p:cNvCxnSpPr>
+          <p:nvPr/>
+        </p:nvCxnSpPr>
+        <p:spPr>
+          <a:xfrm flipV="1">
+            <a:off x="8490856" y="2168968"/>
+            <a:ext cx="0" cy="527957"/>
+          </a:xfrm>
+          <a:prstGeom prst="straightConnector1">
+            <a:avLst/>
+          </a:prstGeom>
+          <a:ln w="57150">
+            <a:solidFill>
+              <a:schemeClr val="bg1"/>
+            </a:solidFill>
+            <a:tailEnd type="triangle"/>
+          </a:ln>
+        </p:spPr>
+        <p:style>
+          <a:lnRef idx="2">
+            <a:schemeClr val="accent1"/>
+          </a:lnRef>
+          <a:fillRef idx="0">
+            <a:schemeClr val="accent1"/>
+          </a:fillRef>
+          <a:effectRef idx="1">
+            <a:schemeClr val="accent1"/>
+          </a:effectRef>
+          <a:fontRef idx="minor">
+            <a:schemeClr val="tx1"/>
+          </a:fontRef>
+        </p:style>
+      </p:cxnSp>
+      <p:cxnSp>
+        <p:nvCxnSpPr>
+          <p:cNvPr id="14" name="Straight Arrow Connector 13">
+            <a:extLst>
+              <a:ext uri="{FF2B5EF4-FFF2-40B4-BE49-F238E27FC236}">
+                <a16:creationId xmlns:a16="http://schemas.microsoft.com/office/drawing/2014/main" id="{E11A74C0-9F3E-7E7B-7F00-5E0B5A2D756A}"/>
+              </a:ext>
+            </a:extLst>
+          </p:cNvPr>
+          <p:cNvCxnSpPr>
+            <a:cxnSpLocks/>
+          </p:cNvCxnSpPr>
+          <p:nvPr/>
+        </p:nvCxnSpPr>
+        <p:spPr>
+          <a:xfrm>
+            <a:off x="7805059" y="3167731"/>
+            <a:ext cx="0" cy="527957"/>
+          </a:xfrm>
+          <a:prstGeom prst="straightConnector1">
+            <a:avLst/>
+          </a:prstGeom>
+          <a:ln w="57150">
+            <a:solidFill>
+              <a:schemeClr val="bg1"/>
+            </a:solidFill>
+            <a:tailEnd type="triangle"/>
+          </a:ln>
+        </p:spPr>
+        <p:style>
+          <a:lnRef idx="2">
+            <a:schemeClr val="accent1"/>
+          </a:lnRef>
+          <a:fillRef idx="0">
+            <a:schemeClr val="accent1"/>
+          </a:fillRef>
+          <a:effectRef idx="1">
+            <a:schemeClr val="accent1"/>
+          </a:effectRef>
+          <a:fontRef idx="minor">
+            <a:schemeClr val="tx1"/>
+          </a:fontRef>
+        </p:style>
+      </p:cxnSp>
+      <p:cxnSp>
+        <p:nvCxnSpPr>
+          <p:cNvPr id="15" name="Straight Arrow Connector 14">
+            <a:extLst>
+              <a:ext uri="{FF2B5EF4-FFF2-40B4-BE49-F238E27FC236}">
+                <a16:creationId xmlns:a16="http://schemas.microsoft.com/office/drawing/2014/main" id="{712DF2BB-5E5B-355F-3332-E930C18F0772}"/>
+              </a:ext>
+            </a:extLst>
+          </p:cNvPr>
+          <p:cNvCxnSpPr>
+            <a:cxnSpLocks/>
+          </p:cNvCxnSpPr>
+          <p:nvPr/>
+        </p:nvCxnSpPr>
+        <p:spPr>
+          <a:xfrm flipH="1" flipV="1">
+            <a:off x="7674429" y="2290073"/>
+            <a:ext cx="0" cy="527957"/>
+          </a:xfrm>
+          <a:prstGeom prst="straightConnector1">
+            <a:avLst/>
+          </a:prstGeom>
+          <a:ln w="57150">
+            <a:solidFill>
+              <a:schemeClr val="bg1"/>
+            </a:solidFill>
+            <a:tailEnd type="triangle"/>
+          </a:ln>
+        </p:spPr>
+        <p:style>
+          <a:lnRef idx="2">
+            <a:schemeClr val="accent1"/>
+          </a:lnRef>
+          <a:fillRef idx="0">
+            <a:schemeClr val="accent1"/>
+          </a:fillRef>
+          <a:effectRef idx="1">
+            <a:schemeClr val="accent1"/>
+          </a:effectRef>
+          <a:fontRef idx="minor">
+            <a:schemeClr val="tx1"/>
+          </a:fontRef>
+        </p:style>
+      </p:cxnSp>
+      <p:cxnSp>
+        <p:nvCxnSpPr>
+          <p:cNvPr id="16" name="Straight Arrow Connector 15">
+            <a:extLst>
+              <a:ext uri="{FF2B5EF4-FFF2-40B4-BE49-F238E27FC236}">
+                <a16:creationId xmlns:a16="http://schemas.microsoft.com/office/drawing/2014/main" id="{88197F26-652B-8D77-C5E5-079B42059BAC}"/>
+              </a:ext>
+            </a:extLst>
+          </p:cNvPr>
+          <p:cNvCxnSpPr>
+            <a:cxnSpLocks/>
+          </p:cNvCxnSpPr>
+          <p:nvPr/>
+        </p:nvCxnSpPr>
+        <p:spPr>
+          <a:xfrm>
+            <a:off x="8621487" y="2986757"/>
+            <a:ext cx="0" cy="527957"/>
+          </a:xfrm>
+          <a:prstGeom prst="straightConnector1">
+            <a:avLst/>
+          </a:prstGeom>
+          <a:ln w="57150">
+            <a:solidFill>
+              <a:schemeClr val="bg1"/>
+            </a:solidFill>
+            <a:tailEnd type="triangle"/>
+          </a:ln>
+        </p:spPr>
+        <p:style>
+          <a:lnRef idx="2">
+            <a:schemeClr val="accent1"/>
+          </a:lnRef>
+          <a:fillRef idx="0">
+            <a:schemeClr val="accent1"/>
+          </a:fillRef>
+          <a:effectRef idx="1">
+            <a:schemeClr val="accent1"/>
+          </a:effectRef>
+          <a:fontRef idx="minor">
+            <a:schemeClr val="tx1"/>
+          </a:fontRef>
+        </p:style>
+      </p:cxnSp>
+      <p:sp>
+        <p:nvSpPr>
+          <p:cNvPr id="17" name="Oval 16">
+            <a:extLst>
+              <a:ext uri="{FF2B5EF4-FFF2-40B4-BE49-F238E27FC236}">
+                <a16:creationId xmlns:a16="http://schemas.microsoft.com/office/drawing/2014/main" id="{792BDF78-2FB4-EB0F-7D04-0216AE6F301E}"/>
+              </a:ext>
+            </a:extLst>
+          </p:cNvPr>
+          <p:cNvSpPr/>
+          <p:nvPr/>
+        </p:nvSpPr>
+        <p:spPr>
+          <a:xfrm>
+            <a:off x="4648328" y="2464243"/>
+            <a:ext cx="914400" cy="914400"/>
+          </a:xfrm>
+          <a:prstGeom prst="ellipse">
+            <a:avLst/>
+          </a:prstGeom>
+          <a:solidFill>
+            <a:schemeClr val="bg2">
+              <a:lumMod val="50000"/>
+            </a:schemeClr>
+          </a:solidFill>
+          <a:ln>
+            <a:solidFill>
+              <a:schemeClr val="tx1"/>
+            </a:solidFill>
+          </a:ln>
+        </p:spPr>
+        <p:style>
+          <a:lnRef idx="1">
+            <a:schemeClr val="accent5"/>
+          </a:lnRef>
+          <a:fillRef idx="3">
+            <a:schemeClr val="accent5"/>
+          </a:fillRef>
+          <a:effectRef idx="2">
+            <a:schemeClr val="accent5"/>
+          </a:effectRef>
+          <a:fontRef idx="minor">
+            <a:schemeClr val="lt1"/>
+          </a:fontRef>
+        </p:style>
+        <p:txBody>
+          <a:bodyPr rtlCol="0" anchor="ctr"/>
+          <a:lstStyle/>
+          <a:p>
+            <a:pPr algn="ctr"/>
+            <a:endParaRPr lang="de-DE"/>
+          </a:p>
+        </p:txBody>
+      </p:sp>
+      <p:sp>
+        <p:nvSpPr>
+          <p:cNvPr id="18" name="Oval 17">
+            <a:extLst>
+              <a:ext uri="{FF2B5EF4-FFF2-40B4-BE49-F238E27FC236}">
+                <a16:creationId xmlns:a16="http://schemas.microsoft.com/office/drawing/2014/main" id="{5977D364-6030-C373-FF38-90BC93F4FCEA}"/>
+              </a:ext>
+            </a:extLst>
+          </p:cNvPr>
+          <p:cNvSpPr/>
+          <p:nvPr/>
+        </p:nvSpPr>
+        <p:spPr>
+          <a:xfrm>
+            <a:off x="5263371" y="2736391"/>
+            <a:ext cx="914400" cy="914400"/>
+          </a:xfrm>
+          <a:prstGeom prst="ellipse">
+            <a:avLst/>
+          </a:prstGeom>
+          <a:solidFill>
+            <a:srgbClr val="FF0000"/>
+          </a:solidFill>
+          <a:ln>
+            <a:solidFill>
+              <a:schemeClr val="tx1"/>
+            </a:solidFill>
+          </a:ln>
+        </p:spPr>
+        <p:style>
+          <a:lnRef idx="1">
+            <a:schemeClr val="accent5"/>
+          </a:lnRef>
+          <a:fillRef idx="3">
+            <a:schemeClr val="accent5"/>
+          </a:fillRef>
+          <a:effectRef idx="2">
+            <a:schemeClr val="accent5"/>
+          </a:effectRef>
+          <a:fontRef idx="minor">
+            <a:schemeClr val="lt1"/>
+          </a:fontRef>
+        </p:style>
+        <p:txBody>
+          <a:bodyPr rtlCol="0" anchor="ctr"/>
+          <a:lstStyle/>
+          <a:p>
+            <a:pPr algn="ctr"/>
+            <a:endParaRPr lang="de-DE"/>
+          </a:p>
+        </p:txBody>
+      </p:sp>
+      <p:cxnSp>
+        <p:nvCxnSpPr>
+          <p:cNvPr id="19" name="Straight Arrow Connector 18">
+            <a:extLst>
+              <a:ext uri="{FF2B5EF4-FFF2-40B4-BE49-F238E27FC236}">
+                <a16:creationId xmlns:a16="http://schemas.microsoft.com/office/drawing/2014/main" id="{63831BC8-4AC9-DBAA-3D9D-F8B1A8C8C53B}"/>
+              </a:ext>
+            </a:extLst>
+          </p:cNvPr>
+          <p:cNvCxnSpPr>
+            <a:cxnSpLocks/>
+          </p:cNvCxnSpPr>
+          <p:nvPr/>
+        </p:nvCxnSpPr>
+        <p:spPr>
+          <a:xfrm flipV="1">
+            <a:off x="5105528" y="2668353"/>
+            <a:ext cx="0" cy="527957"/>
+          </a:xfrm>
+          <a:prstGeom prst="straightConnector1">
+            <a:avLst/>
+          </a:prstGeom>
+          <a:ln w="57150">
+            <a:solidFill>
+              <a:schemeClr val="bg1"/>
+            </a:solidFill>
+            <a:tailEnd type="triangle"/>
+          </a:ln>
+        </p:spPr>
+        <p:style>
+          <a:lnRef idx="2">
+            <a:schemeClr val="accent1"/>
+          </a:lnRef>
+          <a:fillRef idx="0">
+            <a:schemeClr val="accent1"/>
+          </a:fillRef>
+          <a:effectRef idx="1">
+            <a:schemeClr val="accent1"/>
+          </a:effectRef>
+          <a:fontRef idx="minor">
+            <a:schemeClr val="tx1"/>
+          </a:fontRef>
+        </p:style>
+      </p:cxnSp>
+      <p:cxnSp>
+        <p:nvCxnSpPr>
+          <p:cNvPr id="20" name="Straight Arrow Connector 19">
+            <a:extLst>
+              <a:ext uri="{FF2B5EF4-FFF2-40B4-BE49-F238E27FC236}">
+                <a16:creationId xmlns:a16="http://schemas.microsoft.com/office/drawing/2014/main" id="{B5525D90-9253-21D9-65FA-FB5675F6A96B}"/>
+              </a:ext>
+            </a:extLst>
+          </p:cNvPr>
+          <p:cNvCxnSpPr>
+            <a:cxnSpLocks/>
+          </p:cNvCxnSpPr>
+          <p:nvPr/>
+        </p:nvCxnSpPr>
+        <p:spPr>
+          <a:xfrm flipV="1">
+            <a:off x="5720571" y="2988118"/>
+            <a:ext cx="0" cy="527957"/>
+          </a:xfrm>
+          <a:prstGeom prst="straightConnector1">
+            <a:avLst/>
+          </a:prstGeom>
+          <a:ln w="57150">
+            <a:solidFill>
+              <a:schemeClr val="bg1"/>
+            </a:solidFill>
+            <a:tailEnd type="triangle"/>
+          </a:ln>
+        </p:spPr>
+        <p:style>
+          <a:lnRef idx="2">
+            <a:schemeClr val="accent1"/>
+          </a:lnRef>
+          <a:fillRef idx="0">
+            <a:schemeClr val="accent1"/>
+          </a:fillRef>
+          <a:effectRef idx="1">
+            <a:schemeClr val="accent1"/>
+          </a:effectRef>
+          <a:fontRef idx="minor">
+            <a:schemeClr val="tx1"/>
+          </a:fontRef>
+        </p:style>
+      </p:cxnSp>
+      <p:sp>
+        <p:nvSpPr>
+          <p:cNvPr id="21" name="TextBox 20">
+            <a:extLst>
+              <a:ext uri="{FF2B5EF4-FFF2-40B4-BE49-F238E27FC236}">
+                <a16:creationId xmlns:a16="http://schemas.microsoft.com/office/drawing/2014/main" id="{6C3129CA-3124-97F3-775E-DA41C71CCC06}"/>
+              </a:ext>
+            </a:extLst>
+          </p:cNvPr>
+          <p:cNvSpPr txBox="1"/>
+          <p:nvPr/>
+        </p:nvSpPr>
+        <p:spPr>
+          <a:xfrm>
+            <a:off x="2492913" y="1504889"/>
+            <a:ext cx="1306255" cy="400110"/>
+          </a:xfrm>
+          <a:prstGeom prst="rect">
+            <a:avLst/>
+          </a:prstGeom>
+          <a:noFill/>
+        </p:spPr>
+        <p:txBody>
+          <a:bodyPr wrap="none" rtlCol="0">
+            <a:spAutoFit/>
+          </a:bodyPr>
+          <a:lstStyle/>
+          <a:p>
+            <a:r>
+              <a:rPr lang="de-DE" sz="2000" b="1" dirty="0"/>
+              <a:t>Hydrogen</a:t>
+            </a:r>
+          </a:p>
+        </p:txBody>
+      </p:sp>
+      <p:sp>
+        <p:nvSpPr>
+          <p:cNvPr id="22" name="TextBox 21">
+            <a:extLst>
+              <a:ext uri="{FF2B5EF4-FFF2-40B4-BE49-F238E27FC236}">
+                <a16:creationId xmlns:a16="http://schemas.microsoft.com/office/drawing/2014/main" id="{EA7D1E5A-C293-5FB2-9474-B2FA994DA210}"/>
+              </a:ext>
+            </a:extLst>
+          </p:cNvPr>
+          <p:cNvSpPr txBox="1"/>
+          <p:nvPr/>
+        </p:nvSpPr>
+        <p:spPr>
+          <a:xfrm>
+            <a:off x="4648328" y="1504889"/>
+            <a:ext cx="1430520" cy="400110"/>
+          </a:xfrm>
+          <a:prstGeom prst="rect">
+            <a:avLst/>
+          </a:prstGeom>
+          <a:noFill/>
+        </p:spPr>
+        <p:txBody>
+          <a:bodyPr wrap="none" rtlCol="0">
+            <a:spAutoFit/>
+          </a:bodyPr>
+          <a:lstStyle/>
+          <a:p>
+            <a:r>
+              <a:rPr lang="de-DE" sz="2000" b="1" dirty="0"/>
+              <a:t>Deuterium</a:t>
+            </a:r>
+          </a:p>
+        </p:txBody>
+      </p:sp>
+      <p:sp>
+        <p:nvSpPr>
+          <p:cNvPr id="24" name="TextBox 23">
+            <a:extLst>
+              <a:ext uri="{FF2B5EF4-FFF2-40B4-BE49-F238E27FC236}">
+                <a16:creationId xmlns:a16="http://schemas.microsoft.com/office/drawing/2014/main" id="{548AD025-6BFB-E8A6-FBC3-8EC20EACCCBC}"/>
+              </a:ext>
+            </a:extLst>
+          </p:cNvPr>
+          <p:cNvSpPr txBox="1"/>
+          <p:nvPr/>
+        </p:nvSpPr>
+        <p:spPr>
+          <a:xfrm>
+            <a:off x="7548384" y="1504889"/>
+            <a:ext cx="1035861" cy="400110"/>
+          </a:xfrm>
+          <a:prstGeom prst="rect">
+            <a:avLst/>
+          </a:prstGeom>
+          <a:noFill/>
+        </p:spPr>
+        <p:txBody>
+          <a:bodyPr wrap="none" rtlCol="0">
+            <a:spAutoFit/>
+          </a:bodyPr>
+          <a:lstStyle/>
+          <a:p>
+            <a:r>
+              <a:rPr lang="de-DE" sz="2000" b="1" dirty="0"/>
+              <a:t>Helium</a:t>
+            </a:r>
+          </a:p>
+        </p:txBody>
+      </p:sp>
+      <p:sp>
+        <p:nvSpPr>
+          <p:cNvPr id="25" name="TextBox 24">
+            <a:extLst>
+              <a:ext uri="{FF2B5EF4-FFF2-40B4-BE49-F238E27FC236}">
+                <a16:creationId xmlns:a16="http://schemas.microsoft.com/office/drawing/2014/main" id="{1E2F382A-F5B1-D135-754E-D283FE131008}"/>
+              </a:ext>
+            </a:extLst>
+          </p:cNvPr>
+          <p:cNvSpPr txBox="1"/>
+          <p:nvPr/>
+        </p:nvSpPr>
+        <p:spPr>
+          <a:xfrm>
+            <a:off x="478971" y="4133127"/>
+            <a:ext cx="1766830" cy="400110"/>
+          </a:xfrm>
+          <a:prstGeom prst="rect">
+            <a:avLst/>
+          </a:prstGeom>
+          <a:noFill/>
+        </p:spPr>
+        <p:txBody>
+          <a:bodyPr wrap="none" rtlCol="0">
+            <a:spAutoFit/>
+          </a:bodyPr>
+          <a:lstStyle/>
+          <a:p>
+            <a:r>
+              <a:rPr lang="de-DE" sz="2000" b="1" dirty="0"/>
+              <a:t>Nuclear Spin:</a:t>
+            </a:r>
+          </a:p>
+        </p:txBody>
+      </p:sp>
+      <mc:AlternateContent xmlns:mc="http://schemas.openxmlformats.org/markup-compatibility/2006" xmlns:a14="http://schemas.microsoft.com/office/drawing/2010/main">
+        <mc:Choice Requires="a14">
+          <p:sp>
+            <p:nvSpPr>
+              <p:cNvPr id="26" name="TextBox 25">
+                <a:extLst>
+                  <a:ext uri="{FF2B5EF4-FFF2-40B4-BE49-F238E27FC236}">
+                    <a16:creationId xmlns:a16="http://schemas.microsoft.com/office/drawing/2014/main" id="{B0F2C21B-8651-8749-0F6C-8D91782BB526}"/>
+                  </a:ext>
+                </a:extLst>
+              </p:cNvPr>
+              <p:cNvSpPr txBox="1"/>
+              <p:nvPr/>
+            </p:nvSpPr>
+            <p:spPr>
+              <a:xfrm>
+                <a:off x="2950029" y="4027714"/>
+                <a:ext cx="359393" cy="610936"/>
+              </a:xfrm>
+              <a:prstGeom prst="rect">
+                <a:avLst/>
+              </a:prstGeom>
+              <a:noFill/>
+            </p:spPr>
+            <p:txBody>
+              <a:bodyPr wrap="none" rtlCol="0">
+                <a:spAutoFit/>
+              </a:bodyPr>
+              <a:lstStyle/>
+              <a:p>
+                <a:pPr/>
+                <a14:m>
+                  <m:oMathPara xmlns:m="http://schemas.openxmlformats.org/officeDocument/2006/math">
+                    <m:oMathParaPr>
+                      <m:jc m:val="centerGroup"/>
+                    </m:oMathParaPr>
+                    <m:oMath xmlns:m="http://schemas.openxmlformats.org/officeDocument/2006/math">
+                      <m:f>
+                        <m:fPr>
+                          <m:ctrlPr>
+                            <a:rPr lang="de-DE" i="1" smtClean="0">
+                              <a:latin typeface="Cambria Math" panose="02040503050406030204" pitchFamily="18" charset="0"/>
+                            </a:rPr>
+                          </m:ctrlPr>
+                        </m:fPr>
+                        <m:num>
+                          <m:r>
+                            <a:rPr lang="de-DE" b="0" i="1" smtClean="0">
+                              <a:latin typeface="Cambria Math" panose="02040503050406030204" pitchFamily="18" charset="0"/>
+                            </a:rPr>
+                            <m:t>1</m:t>
+                          </m:r>
+                        </m:num>
+                        <m:den>
+                          <m:r>
+                            <a:rPr lang="de-DE" b="0" i="1" smtClean="0">
+                              <a:latin typeface="Cambria Math" panose="02040503050406030204" pitchFamily="18" charset="0"/>
+                            </a:rPr>
+                            <m:t>2</m:t>
+                          </m:r>
+                        </m:den>
+                      </m:f>
+                    </m:oMath>
+                  </m:oMathPara>
+                </a14:m>
+                <a:endParaRPr lang="de-DE" dirty="0"/>
+              </a:p>
+            </p:txBody>
+          </p:sp>
+        </mc:Choice>
+        <mc:Fallback xmlns="">
+          <p:sp>
+            <p:nvSpPr>
+              <p:cNvPr id="26" name="TextBox 25">
+                <a:extLst>
+                  <a:ext uri="{FF2B5EF4-FFF2-40B4-BE49-F238E27FC236}">
+                    <a16:creationId xmlns:a16="http://schemas.microsoft.com/office/drawing/2014/main" id="{B0F2C21B-8651-8749-0F6C-8D91782BB526}"/>
+                  </a:ext>
+                </a:extLst>
+              </p:cNvPr>
+              <p:cNvSpPr txBox="1">
+                <a:spLocks noRot="1" noChangeAspect="1" noMove="1" noResize="1" noEditPoints="1" noAdjustHandles="1" noChangeArrowheads="1" noChangeShapeType="1" noTextEdit="1"/>
+              </p:cNvSpPr>
+              <p:nvPr/>
+            </p:nvSpPr>
+            <p:spPr>
+              <a:xfrm>
+                <a:off x="2950029" y="4027714"/>
+                <a:ext cx="359393" cy="610936"/>
+              </a:xfrm>
+              <a:prstGeom prst="rect">
+                <a:avLst/>
+              </a:prstGeom>
+              <a:blipFill>
+                <a:blip r:embed="rId2"/>
+                <a:stretch>
+                  <a:fillRect/>
+                </a:stretch>
+              </a:blipFill>
+            </p:spPr>
+            <p:txBody>
+              <a:bodyPr/>
+              <a:lstStyle/>
+              <a:p>
+                <a:r>
+                  <a:rPr lang="de-DE">
+                    <a:noFill/>
+                  </a:rPr>
+                  <a:t> </a:t>
+                </a:r>
+              </a:p>
+            </p:txBody>
+          </p:sp>
+        </mc:Fallback>
+      </mc:AlternateContent>
+      <mc:AlternateContent xmlns:mc="http://schemas.openxmlformats.org/markup-compatibility/2006" xmlns:a14="http://schemas.microsoft.com/office/drawing/2010/main">
+        <mc:Choice Requires="a14">
+          <p:sp>
+            <p:nvSpPr>
+              <p:cNvPr id="27" name="TextBox 26">
+                <a:extLst>
+                  <a:ext uri="{FF2B5EF4-FFF2-40B4-BE49-F238E27FC236}">
+                    <a16:creationId xmlns:a16="http://schemas.microsoft.com/office/drawing/2014/main" id="{FA5267BF-2BE2-19DB-259B-CCE9EBDD44D0}"/>
+                  </a:ext>
+                </a:extLst>
+              </p:cNvPr>
+              <p:cNvSpPr txBox="1"/>
+              <p:nvPr/>
+            </p:nvSpPr>
+            <p:spPr>
+              <a:xfrm>
+                <a:off x="5105528" y="4148516"/>
+                <a:ext cx="359393" cy="369332"/>
+              </a:xfrm>
+              <a:prstGeom prst="rect">
+                <a:avLst/>
+              </a:prstGeom>
+              <a:noFill/>
+            </p:spPr>
+            <p:txBody>
+              <a:bodyPr wrap="none" rtlCol="0">
+                <a:spAutoFit/>
+              </a:bodyPr>
+              <a:lstStyle/>
+              <a:p>
+                <a:pPr/>
+                <a14:m>
+                  <m:oMathPara xmlns:m="http://schemas.openxmlformats.org/officeDocument/2006/math">
+                    <m:oMathParaPr>
+                      <m:jc m:val="centerGroup"/>
+                    </m:oMathParaPr>
+                    <m:oMath xmlns:m="http://schemas.openxmlformats.org/officeDocument/2006/math">
+                      <m:r>
+                        <a:rPr lang="de-DE" b="0" i="1" smtClean="0">
+                          <a:latin typeface="Cambria Math" panose="02040503050406030204" pitchFamily="18" charset="0"/>
+                        </a:rPr>
+                        <m:t>1</m:t>
+                      </m:r>
+                    </m:oMath>
+                  </m:oMathPara>
+                </a14:m>
+                <a:endParaRPr lang="de-DE" dirty="0"/>
+              </a:p>
+            </p:txBody>
+          </p:sp>
+        </mc:Choice>
+        <mc:Fallback xmlns="">
+          <p:sp>
+            <p:nvSpPr>
+              <p:cNvPr id="27" name="TextBox 26">
+                <a:extLst>
+                  <a:ext uri="{FF2B5EF4-FFF2-40B4-BE49-F238E27FC236}">
+                    <a16:creationId xmlns:a16="http://schemas.microsoft.com/office/drawing/2014/main" id="{FA5267BF-2BE2-19DB-259B-CCE9EBDD44D0}"/>
+                  </a:ext>
+                </a:extLst>
+              </p:cNvPr>
+              <p:cNvSpPr txBox="1">
+                <a:spLocks noRot="1" noChangeAspect="1" noMove="1" noResize="1" noEditPoints="1" noAdjustHandles="1" noChangeArrowheads="1" noChangeShapeType="1" noTextEdit="1"/>
+              </p:cNvSpPr>
+              <p:nvPr/>
+            </p:nvSpPr>
+            <p:spPr>
+              <a:xfrm>
+                <a:off x="5105528" y="4148516"/>
+                <a:ext cx="359393" cy="369332"/>
+              </a:xfrm>
+              <a:prstGeom prst="rect">
+                <a:avLst/>
+              </a:prstGeom>
+              <a:blipFill>
+                <a:blip r:embed="rId3"/>
+                <a:stretch>
+                  <a:fillRect/>
+                </a:stretch>
+              </a:blipFill>
+            </p:spPr>
+            <p:txBody>
+              <a:bodyPr/>
+              <a:lstStyle/>
+              <a:p>
+                <a:r>
+                  <a:rPr lang="de-DE">
+                    <a:noFill/>
+                  </a:rPr>
+                  <a:t> </a:t>
+                </a:r>
+              </a:p>
+            </p:txBody>
+          </p:sp>
+        </mc:Fallback>
+      </mc:AlternateContent>
+      <p:sp>
+        <p:nvSpPr>
+          <p:cNvPr id="28" name="TextBox 27">
+            <a:extLst>
+              <a:ext uri="{FF2B5EF4-FFF2-40B4-BE49-F238E27FC236}">
+                <a16:creationId xmlns:a16="http://schemas.microsoft.com/office/drawing/2014/main" id="{DDF898DC-F18A-0D2B-6A44-A8829C577832}"/>
+              </a:ext>
+            </a:extLst>
+          </p:cNvPr>
+          <p:cNvSpPr txBox="1"/>
+          <p:nvPr/>
+        </p:nvSpPr>
+        <p:spPr>
+          <a:xfrm>
+            <a:off x="7994907" y="4148516"/>
+            <a:ext cx="308098" cy="369332"/>
+          </a:xfrm>
+          <a:prstGeom prst="rect">
+            <a:avLst/>
+          </a:prstGeom>
+          <a:noFill/>
+        </p:spPr>
+        <p:txBody>
+          <a:bodyPr wrap="none" rtlCol="0">
+            <a:spAutoFit/>
+          </a:bodyPr>
+          <a:lstStyle/>
+          <a:p>
+            <a:r>
+              <a:rPr lang="de-DE" dirty="0"/>
+              <a:t>0</a:t>
+            </a:r>
+          </a:p>
+        </p:txBody>
+      </p:sp>
+      <p:sp>
+        <p:nvSpPr>
+          <p:cNvPr id="29" name="TextBox 28">
+            <a:extLst>
+              <a:ext uri="{FF2B5EF4-FFF2-40B4-BE49-F238E27FC236}">
+                <a16:creationId xmlns:a16="http://schemas.microsoft.com/office/drawing/2014/main" id="{2899EF52-C3E1-A25B-EBE6-B040FB32306A}"/>
+              </a:ext>
+            </a:extLst>
+          </p:cNvPr>
+          <p:cNvSpPr txBox="1"/>
+          <p:nvPr/>
+        </p:nvSpPr>
+        <p:spPr>
+          <a:xfrm>
+            <a:off x="3187184" y="3276583"/>
+            <a:ext cx="843372" cy="369332"/>
+          </a:xfrm>
+          <a:prstGeom prst="rect">
+            <a:avLst/>
+          </a:prstGeom>
+          <a:noFill/>
+        </p:spPr>
+        <p:txBody>
+          <a:bodyPr wrap="none" rtlCol="0">
+            <a:spAutoFit/>
+          </a:bodyPr>
+          <a:lstStyle/>
+          <a:p>
+            <a:r>
+              <a:rPr lang="de-DE" dirty="0"/>
+              <a:t>Proton</a:t>
+            </a:r>
+          </a:p>
+        </p:txBody>
+      </p:sp>
+      <p:sp>
+        <p:nvSpPr>
+          <p:cNvPr id="30" name="TextBox 29">
+            <a:extLst>
+              <a:ext uri="{FF2B5EF4-FFF2-40B4-BE49-F238E27FC236}">
+                <a16:creationId xmlns:a16="http://schemas.microsoft.com/office/drawing/2014/main" id="{A1BEE607-A15C-CB0B-16DE-1756C98ED330}"/>
+              </a:ext>
+            </a:extLst>
+          </p:cNvPr>
+          <p:cNvSpPr txBox="1"/>
+          <p:nvPr/>
+        </p:nvSpPr>
+        <p:spPr>
+          <a:xfrm>
+            <a:off x="5141320" y="2195594"/>
+            <a:ext cx="1000659" cy="369332"/>
+          </a:xfrm>
+          <a:prstGeom prst="rect">
+            <a:avLst/>
+          </a:prstGeom>
+          <a:noFill/>
+        </p:spPr>
+        <p:txBody>
+          <a:bodyPr wrap="none" rtlCol="0">
+            <a:spAutoFit/>
+          </a:bodyPr>
+          <a:lstStyle/>
+          <a:p>
+            <a:r>
+              <a:rPr lang="de-DE" dirty="0"/>
+              <a:t>Neutron</a:t>
+            </a:r>
+          </a:p>
+        </p:txBody>
+      </p:sp>
+    </p:spTree>
+    <p:extLst>
+      <p:ext uri="{BB962C8B-B14F-4D97-AF65-F5344CB8AC3E}">
+        <p14:creationId xmlns:p14="http://schemas.microsoft.com/office/powerpoint/2010/main" val="1562958251"/>
+      </p:ext>
+    </p:extLst>
+  </p:cSld>
+  <p:clrMapOvr>
+    <a:masterClrMapping/>
+  </p:clrMapOvr>
+</p:sld>
+</file>
+
+<file path=ppt/slides/slide5.xml><?xml version="1.0" encoding="utf-8"?>
 <p:sld xmlns:a="http://schemas.openxmlformats.org/drawingml/2006/main" xmlns:r="http://schemas.openxmlformats.org/officeDocument/2006/relationships" xmlns:p="http://schemas.openxmlformats.org/presentationml/2006/main">
   <p:cSld>
     <p:spTree>
@@ -12040,8 +16893,8 @@
           </a:fontRef>
         </p:style>
       </p:cxnSp>
-      <mc:AlternateContent xmlns:mc="http://schemas.openxmlformats.org/markup-compatibility/2006">
-        <mc:Choice xmlns:a14="http://schemas.microsoft.com/office/drawing/2010/main" Requires="a14">
+      <mc:AlternateContent xmlns:mc="http://schemas.openxmlformats.org/markup-compatibility/2006" xmlns:a14="http://schemas.microsoft.com/office/drawing/2010/main">
+        <mc:Choice Requires="a14">
           <p:sp>
             <p:nvSpPr>
               <p:cNvPr id="8" name="TextBox 7">
@@ -12113,7 +16966,7 @@
             </p:txBody>
           </p:sp>
         </mc:Choice>
-        <mc:Fallback>
+        <mc:Fallback xmlns="">
           <p:sp>
             <p:nvSpPr>
               <p:cNvPr id="8" name="TextBox 7">
@@ -12203,8 +17056,8 @@
           </a:fontRef>
         </p:style>
       </p:cxnSp>
-      <mc:AlternateContent xmlns:mc="http://schemas.openxmlformats.org/markup-compatibility/2006">
-        <mc:Choice xmlns:a14="http://schemas.microsoft.com/office/drawing/2010/main" Requires="a14">
+      <mc:AlternateContent xmlns:mc="http://schemas.openxmlformats.org/markup-compatibility/2006" xmlns:a14="http://schemas.microsoft.com/office/drawing/2010/main">
+        <mc:Choice Requires="a14">
           <p:sp>
             <p:nvSpPr>
               <p:cNvPr id="10" name="TextBox 9">
@@ -12233,6 +17086,7 @@
               </a:bodyPr>
               <a:lstStyle/>
               <a:p>
+                <a:pPr/>
                 <a14:m>
                   <m:oMathPara xmlns:m="http://schemas.openxmlformats.org/officeDocument/2006/math">
                     <m:oMathParaPr>
@@ -12278,7 +17132,7 @@
             </p:txBody>
           </p:sp>
         </mc:Choice>
-        <mc:Fallback>
+        <mc:Fallback xmlns="">
           <p:sp>
             <p:nvSpPr>
               <p:cNvPr id="10" name="TextBox 9">
@@ -12393,8 +17247,8 @@
           </a:p>
         </p:txBody>
       </p:sp>
-      <mc:AlternateContent xmlns:mc="http://schemas.openxmlformats.org/markup-compatibility/2006">
-        <mc:Choice xmlns:a14="http://schemas.microsoft.com/office/drawing/2010/main" Requires="a14">
+      <mc:AlternateContent xmlns:mc="http://schemas.openxmlformats.org/markup-compatibility/2006" xmlns:a14="http://schemas.microsoft.com/office/drawing/2010/main">
+        <mc:Choice Requires="a14">
           <p:sp>
             <p:nvSpPr>
               <p:cNvPr id="13" name="TextBox 12">
@@ -12423,6 +17277,7 @@
               </a:bodyPr>
               <a:lstStyle/>
               <a:p>
+                <a:pPr/>
                 <a14:m>
                   <m:oMathPara xmlns:m="http://schemas.openxmlformats.org/officeDocument/2006/math">
                     <m:oMathParaPr>
@@ -12433,7 +17288,7 @@
                         <m:accPr>
                           <m:chr m:val="⃗"/>
                           <m:ctrlPr>
-                            <a:rPr lang="de-DE" smtClean="0">
+                            <a:rPr lang="de-DE" i="1" smtClean="0">
                               <a:latin typeface="Cambria Math" panose="02040503050406030204" pitchFamily="18" charset="0"/>
                             </a:rPr>
                           </m:ctrlPr>
@@ -12455,7 +17310,7 @@
             </p:txBody>
           </p:sp>
         </mc:Choice>
-        <mc:Fallback>
+        <mc:Fallback xmlns="">
           <p:sp>
             <p:nvSpPr>
               <p:cNvPr id="13" name="TextBox 12">
@@ -12500,8 +17355,8 @@
           </p:sp>
         </mc:Fallback>
       </mc:AlternateContent>
-      <mc:AlternateContent xmlns:mc="http://schemas.openxmlformats.org/markup-compatibility/2006">
-        <mc:Choice xmlns:a14="http://schemas.microsoft.com/office/drawing/2010/main" Requires="a14">
+      <mc:AlternateContent xmlns:mc="http://schemas.openxmlformats.org/markup-compatibility/2006" xmlns:a14="http://schemas.microsoft.com/office/drawing/2010/main">
+        <mc:Choice Requires="a14">
           <p:sp>
             <p:nvSpPr>
               <p:cNvPr id="14" name="TextBox 13">
@@ -12530,6 +17385,7 @@
               </a:bodyPr>
               <a:lstStyle/>
               <a:p>
+                <a:pPr/>
                 <a14:m>
                   <m:oMathPara xmlns:m="http://schemas.openxmlformats.org/officeDocument/2006/math">
                     <m:oMathParaPr>
@@ -12575,7 +17431,7 @@
             </p:txBody>
           </p:sp>
         </mc:Choice>
-        <mc:Fallback>
+        <mc:Fallback xmlns="">
           <p:sp>
             <p:nvSpPr>
               <p:cNvPr id="14" name="TextBox 13">
@@ -12831,8 +17687,8 @@
           </a:fontRef>
         </p:style>
       </p:cxnSp>
-      <mc:AlternateContent xmlns:mc="http://schemas.openxmlformats.org/markup-compatibility/2006">
-        <mc:Choice xmlns:a14="http://schemas.microsoft.com/office/drawing/2010/main" Requires="a14">
+      <mc:AlternateContent xmlns:mc="http://schemas.openxmlformats.org/markup-compatibility/2006" xmlns:a14="http://schemas.microsoft.com/office/drawing/2010/main">
+        <mc:Choice Requires="a14">
           <p:sp>
             <p:nvSpPr>
               <p:cNvPr id="20" name="TextBox 19">
@@ -12861,6 +17717,7 @@
               </a:bodyPr>
               <a:lstStyle/>
               <a:p>
+                <a:pPr/>
                 <a14:m>
                   <m:oMathPara xmlns:m="http://schemas.openxmlformats.org/officeDocument/2006/math">
                     <m:oMathParaPr>
@@ -12906,7 +17763,7 @@
             </p:txBody>
           </p:sp>
         </mc:Choice>
-        <mc:Fallback>
+        <mc:Fallback xmlns="">
           <p:sp>
             <p:nvSpPr>
               <p:cNvPr id="20" name="TextBox 19">
@@ -12964,7 +17821,7 @@
 </p:sld>
 </file>
 
-<file path=ppt/slides/slide20.xml><?xml version="1.0" encoding="utf-8"?>
+<file path=ppt/slides/slide6.xml><?xml version="1.0" encoding="utf-8"?>
 <p:sld xmlns:a="http://schemas.openxmlformats.org/drawingml/2006/main" xmlns:r="http://schemas.openxmlformats.org/officeDocument/2006/relationships" xmlns:p="http://schemas.openxmlformats.org/presentationml/2006/main">
   <p:cSld>
     <p:spTree>
@@ -12981,84 +17838,12 @@
           <a:chExt cx="0" cy="0"/>
         </a:xfrm>
       </p:grpSpPr>
-      <p:pic>
-        <p:nvPicPr>
-          <p:cNvPr id="5" name="Picture 4" descr="A graph with lines and curves&#10;&#10;AI-generated content may be incorrect.">
-            <a:extLst>
-              <a:ext uri="{FF2B5EF4-FFF2-40B4-BE49-F238E27FC236}">
-                <a16:creationId xmlns:a16="http://schemas.microsoft.com/office/drawing/2014/main" id="{E044BD06-A0AC-955F-A360-04416C22187C}"/>
-              </a:ext>
-            </a:extLst>
-          </p:cNvPr>
-          <p:cNvPicPr>
-            <a:picLocks noChangeAspect="1"/>
-          </p:cNvPicPr>
-          <p:nvPr/>
-        </p:nvPicPr>
-        <p:blipFill>
-          <a:blip r:embed="rId2">
-            <a:extLst>
-              <a:ext uri="{28A0092B-C50C-407E-A947-70E740481C1C}">
-                <a14:useLocalDpi xmlns:a14="http://schemas.microsoft.com/office/drawing/2010/main" val="0"/>
-              </a:ext>
-            </a:extLst>
-          </a:blip>
-          <a:stretch>
-            <a:fillRect/>
-          </a:stretch>
-        </p:blipFill>
-        <p:spPr>
-          <a:xfrm>
-            <a:off x="3713202" y="107680"/>
-            <a:ext cx="6477013" cy="2157988"/>
-          </a:xfrm>
-          <a:prstGeom prst="rect">
-            <a:avLst/>
-          </a:prstGeom>
-        </p:spPr>
-      </p:pic>
-      <p:pic>
-        <p:nvPicPr>
-          <p:cNvPr id="13" name="Picture 12" descr="A graph with lines and a line&#10;&#10;AI-generated content may be incorrect.">
-            <a:extLst>
-              <a:ext uri="{FF2B5EF4-FFF2-40B4-BE49-F238E27FC236}">
-                <a16:creationId xmlns:a16="http://schemas.microsoft.com/office/drawing/2014/main" id="{9BD3326C-AB88-4450-7C8B-E33C708D6273}"/>
-              </a:ext>
-            </a:extLst>
-          </p:cNvPr>
-          <p:cNvPicPr>
-            <a:picLocks noChangeAspect="1"/>
-          </p:cNvPicPr>
-          <p:nvPr/>
-        </p:nvPicPr>
-        <p:blipFill>
-          <a:blip r:embed="rId3">
-            <a:extLst>
-              <a:ext uri="{28A0092B-C50C-407E-A947-70E740481C1C}">
-                <a14:useLocalDpi xmlns:a14="http://schemas.microsoft.com/office/drawing/2010/main" val="0"/>
-              </a:ext>
-            </a:extLst>
-          </a:blip>
-          <a:stretch>
-            <a:fillRect/>
-          </a:stretch>
-        </p:blipFill>
-        <p:spPr>
-          <a:xfrm>
-            <a:off x="3819532" y="2360642"/>
-            <a:ext cx="5313835" cy="2157988"/>
-          </a:xfrm>
-          <a:prstGeom prst="rect">
-            <a:avLst/>
-          </a:prstGeom>
-        </p:spPr>
-      </p:pic>
       <p:cxnSp>
         <p:nvCxnSpPr>
-          <p:cNvPr id="15" name="Straight Connector 14">
-            <a:extLst>
-              <a:ext uri="{FF2B5EF4-FFF2-40B4-BE49-F238E27FC236}">
-                <a16:creationId xmlns:a16="http://schemas.microsoft.com/office/drawing/2014/main" id="{3C858815-C5A3-9F7E-97EB-D63AC10CA888}"/>
+          <p:cNvPr id="5" name="Straight Arrow Connector 4">
+            <a:extLst>
+              <a:ext uri="{FF2B5EF4-FFF2-40B4-BE49-F238E27FC236}">
+                <a16:creationId xmlns:a16="http://schemas.microsoft.com/office/drawing/2014/main" id="{D9E161EB-0272-A9C0-1EC6-AD6CC80DE77B}"/>
               </a:ext>
             </a:extLst>
           </p:cNvPr>
@@ -13068,18 +17853,18 @@
           <p:nvPr/>
         </p:nvCxnSpPr>
         <p:spPr>
-          <a:xfrm>
-            <a:off x="4380611" y="3498110"/>
-            <a:ext cx="4465677" cy="0"/>
+          <a:xfrm flipV="1">
+            <a:off x="3488235" y="1634109"/>
+            <a:ext cx="793496" cy="1766534"/>
           </a:xfrm>
-          <a:prstGeom prst="line">
+          <a:prstGeom prst="straightConnector1">
             <a:avLst/>
           </a:prstGeom>
-          <a:ln>
+          <a:ln w="57150">
             <a:solidFill>
-              <a:srgbClr val="92D050"/>
+              <a:srgbClr val="FF0000"/>
             </a:solidFill>
-            <a:prstDash val="dash"/>
+            <a:tailEnd type="triangle"/>
           </a:ln>
         </p:spPr>
         <p:style>
@@ -13099,10 +17884,10 @@
       </p:cxnSp>
       <p:cxnSp>
         <p:nvCxnSpPr>
-          <p:cNvPr id="17" name="Straight Connector 16">
-            <a:extLst>
-              <a:ext uri="{FF2B5EF4-FFF2-40B4-BE49-F238E27FC236}">
-                <a16:creationId xmlns:a16="http://schemas.microsoft.com/office/drawing/2014/main" id="{21BBC9F3-DD87-76E7-5FC7-B4B2B59966AF}"/>
+          <p:cNvPr id="6" name="Straight Arrow Connector 5">
+            <a:extLst>
+              <a:ext uri="{FF2B5EF4-FFF2-40B4-BE49-F238E27FC236}">
+                <a16:creationId xmlns:a16="http://schemas.microsoft.com/office/drawing/2014/main" id="{4C02AAF2-4FCB-D057-27A4-2D3464C13CFA}"/>
               </a:ext>
             </a:extLst>
           </p:cNvPr>
@@ -13112,18 +17897,18 @@
           <p:nvPr/>
         </p:nvCxnSpPr>
         <p:spPr>
-          <a:xfrm>
-            <a:off x="6025111" y="269571"/>
-            <a:ext cx="0" cy="3217906"/>
+          <a:xfrm flipV="1">
+            <a:off x="3488235" y="1277494"/>
+            <a:ext cx="7088" cy="2123149"/>
           </a:xfrm>
-          <a:prstGeom prst="line">
+          <a:prstGeom prst="straightConnector1">
             <a:avLst/>
           </a:prstGeom>
           <a:ln>
             <a:solidFill>
-              <a:srgbClr val="92D050"/>
+              <a:schemeClr val="tx1"/>
             </a:solidFill>
-            <a:prstDash val="dash"/>
+            <a:tailEnd type="triangle"/>
           </a:ln>
         </p:spPr>
         <p:style>
@@ -13143,10 +17928,10 @@
       </p:cxnSp>
       <p:cxnSp>
         <p:nvCxnSpPr>
-          <p:cNvPr id="20" name="Straight Connector 19">
-            <a:extLst>
-              <a:ext uri="{FF2B5EF4-FFF2-40B4-BE49-F238E27FC236}">
-                <a16:creationId xmlns:a16="http://schemas.microsoft.com/office/drawing/2014/main" id="{4C340B99-2233-A3A8-43DF-12E27074E951}"/>
+          <p:cNvPr id="7" name="Straight Arrow Connector 6">
+            <a:extLst>
+              <a:ext uri="{FF2B5EF4-FFF2-40B4-BE49-F238E27FC236}">
+                <a16:creationId xmlns:a16="http://schemas.microsoft.com/office/drawing/2014/main" id="{B366B6B8-45ED-62AD-7305-85971DC38A8D}"/>
               </a:ext>
             </a:extLst>
           </p:cNvPr>
@@ -13157,17 +17942,499 @@
         </p:nvCxnSpPr>
         <p:spPr>
           <a:xfrm>
-            <a:off x="7963780" y="280204"/>
-            <a:ext cx="0" cy="3207273"/>
+            <a:off x="3488235" y="3400643"/>
+            <a:ext cx="1980000" cy="0"/>
           </a:xfrm>
-          <a:prstGeom prst="line">
+          <a:prstGeom prst="straightConnector1">
             <a:avLst/>
           </a:prstGeom>
           <a:ln>
             <a:solidFill>
-              <a:srgbClr val="92D050"/>
+              <a:schemeClr val="tx1"/>
+            </a:solidFill>
+            <a:tailEnd type="triangle"/>
+          </a:ln>
+        </p:spPr>
+        <p:style>
+          <a:lnRef idx="2">
+            <a:schemeClr val="accent1"/>
+          </a:lnRef>
+          <a:fillRef idx="0">
+            <a:schemeClr val="accent1"/>
+          </a:fillRef>
+          <a:effectRef idx="1">
+            <a:schemeClr val="accent1"/>
+          </a:effectRef>
+          <a:fontRef idx="minor">
+            <a:schemeClr val="tx1"/>
+          </a:fontRef>
+        </p:style>
+      </p:cxnSp>
+      <mc:AlternateContent xmlns:mc="http://schemas.openxmlformats.org/markup-compatibility/2006" xmlns:a14="http://schemas.microsoft.com/office/drawing/2010/main">
+        <mc:Choice Requires="a14">
+          <p:sp>
+            <p:nvSpPr>
+              <p:cNvPr id="8" name="TextBox 7">
+                <a:extLst>
+                  <a:ext uri="{FF2B5EF4-FFF2-40B4-BE49-F238E27FC236}">
+                    <a16:creationId xmlns:a16="http://schemas.microsoft.com/office/drawing/2014/main" id="{68EF6FC1-2E1D-7C77-50FF-134ED2BB4AC3}"/>
+                  </a:ext>
+                </a:extLst>
+              </p:cNvPr>
+              <p:cNvSpPr txBox="1"/>
+              <p:nvPr/>
+            </p:nvSpPr>
+            <p:spPr>
+              <a:xfrm>
+                <a:off x="4161627" y="1108217"/>
+                <a:ext cx="1203535" cy="608756"/>
+              </a:xfrm>
+              <a:prstGeom prst="rect">
+                <a:avLst/>
+              </a:prstGeom>
+              <a:noFill/>
+            </p:spPr>
+            <p:txBody>
+              <a:bodyPr wrap="none" rtlCol="0">
+                <a:spAutoFit/>
+              </a:bodyPr>
+              <a:lstStyle/>
+              <a:p>
+                <a:pPr/>
+                <a14:m>
+                  <m:oMathPara xmlns:m="http://schemas.openxmlformats.org/officeDocument/2006/math">
+                    <m:oMathParaPr>
+                      <m:jc m:val="centerGroup"/>
+                    </m:oMathParaPr>
+                    <m:oMath xmlns:m="http://schemas.openxmlformats.org/officeDocument/2006/math">
+                      <m:r>
+                        <a:rPr lang="de-DE" sz="1600" b="0" i="1" smtClean="0">
+                          <a:latin typeface="Cambria Math" panose="02040503050406030204" pitchFamily="18" charset="0"/>
+                        </a:rPr>
+                        <m:t>|</m:t>
+                      </m:r>
+                      <m:acc>
+                        <m:accPr>
+                          <m:chr m:val="⃗"/>
+                          <m:ctrlPr>
+                            <a:rPr lang="de-DE" sz="1600" i="1">
+                              <a:latin typeface="Cambria Math" panose="02040503050406030204" pitchFamily="18" charset="0"/>
+                            </a:rPr>
+                          </m:ctrlPr>
+                        </m:accPr>
+                        <m:e>
+                          <m:r>
+                            <a:rPr lang="de-DE" sz="1600" i="1">
+                              <a:latin typeface="Cambria Math" panose="02040503050406030204" pitchFamily="18" charset="0"/>
+                            </a:rPr>
+                            <m:t>𝐼</m:t>
+                          </m:r>
+                        </m:e>
+                      </m:acc>
+                      <m:r>
+                        <a:rPr lang="de-DE" sz="1600" b="0" i="1" smtClean="0">
+                          <a:latin typeface="Cambria Math" panose="02040503050406030204" pitchFamily="18" charset="0"/>
+                        </a:rPr>
+                        <m:t>| = </m:t>
+                      </m:r>
+                      <m:f>
+                        <m:fPr>
+                          <m:ctrlPr>
+                            <a:rPr lang="de-DE" sz="1600" b="0" i="1" smtClean="0">
+                              <a:latin typeface="Cambria Math" panose="02040503050406030204" pitchFamily="18" charset="0"/>
+                            </a:rPr>
+                          </m:ctrlPr>
+                        </m:fPr>
+                        <m:num>
+                          <m:rad>
+                            <m:radPr>
+                              <m:degHide m:val="on"/>
+                              <m:ctrlPr>
+                                <a:rPr lang="de-DE" sz="1600" b="0" i="1" smtClean="0">
+                                  <a:latin typeface="Cambria Math" panose="02040503050406030204" pitchFamily="18" charset="0"/>
+                                </a:rPr>
+                              </m:ctrlPr>
+                            </m:radPr>
+                            <m:deg/>
+                            <m:e>
+                              <m:r>
+                                <a:rPr lang="de-DE" sz="1600" b="0" i="1" smtClean="0">
+                                  <a:latin typeface="Cambria Math" panose="02040503050406030204" pitchFamily="18" charset="0"/>
+                                </a:rPr>
+                                <m:t>3</m:t>
+                              </m:r>
+                            </m:e>
+                          </m:rad>
+                        </m:num>
+                        <m:den>
+                          <m:r>
+                            <a:rPr lang="de-DE" sz="1600" b="0" i="1" smtClean="0">
+                              <a:latin typeface="Cambria Math" panose="02040503050406030204" pitchFamily="18" charset="0"/>
+                            </a:rPr>
+                            <m:t>2</m:t>
+                          </m:r>
+                        </m:den>
+                      </m:f>
+                      <m:r>
+                        <a:rPr lang="de-DE" sz="1600" dirty="0">
+                          <a:latin typeface="Cambria Math" panose="02040503050406030204" pitchFamily="18" charset="0"/>
+                        </a:rPr>
+                        <m:t>ℏ</m:t>
+                      </m:r>
+                    </m:oMath>
+                  </m:oMathPara>
+                </a14:m>
+                <a:endParaRPr lang="de-DE" sz="1600" dirty="0"/>
+              </a:p>
+            </p:txBody>
+          </p:sp>
+        </mc:Choice>
+        <mc:Fallback xmlns="">
+          <p:sp>
+            <p:nvSpPr>
+              <p:cNvPr id="8" name="TextBox 7">
+                <a:extLst>
+                  <a:ext uri="{FF2B5EF4-FFF2-40B4-BE49-F238E27FC236}">
+                    <a16:creationId xmlns:a16="http://schemas.microsoft.com/office/drawing/2014/main" id="{68EF6FC1-2E1D-7C77-50FF-134ED2BB4AC3}"/>
+                  </a:ext>
+                </a:extLst>
+              </p:cNvPr>
+              <p:cNvSpPr txBox="1">
+                <a:spLocks noRot="1" noChangeAspect="1" noMove="1" noResize="1" noEditPoints="1" noAdjustHandles="1" noChangeArrowheads="1" noChangeShapeType="1" noTextEdit="1"/>
+              </p:cNvSpPr>
+              <p:nvPr/>
+            </p:nvSpPr>
+            <p:spPr>
+              <a:xfrm>
+                <a:off x="4161627" y="1108217"/>
+                <a:ext cx="1203535" cy="608756"/>
+              </a:xfrm>
+              <a:prstGeom prst="rect">
+                <a:avLst/>
+              </a:prstGeom>
+              <a:blipFill>
+                <a:blip r:embed="rId2"/>
+                <a:stretch>
+                  <a:fillRect/>
+                </a:stretch>
+              </a:blipFill>
+            </p:spPr>
+            <p:txBody>
+              <a:bodyPr/>
+              <a:lstStyle/>
+              <a:p>
+                <a:r>
+                  <a:rPr lang="de-DE">
+                    <a:noFill/>
+                  </a:rPr>
+                  <a:t> </a:t>
+                </a:r>
+              </a:p>
+            </p:txBody>
+          </p:sp>
+        </mc:Fallback>
+      </mc:AlternateContent>
+      <p:cxnSp>
+        <p:nvCxnSpPr>
+          <p:cNvPr id="9" name="Straight Arrow Connector 8">
+            <a:extLst>
+              <a:ext uri="{FF2B5EF4-FFF2-40B4-BE49-F238E27FC236}">
+                <a16:creationId xmlns:a16="http://schemas.microsoft.com/office/drawing/2014/main" id="{C06CD127-8424-BB49-B914-CC6FD9E086BC}"/>
+              </a:ext>
+            </a:extLst>
+          </p:cNvPr>
+          <p:cNvCxnSpPr>
+            <a:cxnSpLocks/>
+          </p:cNvCxnSpPr>
+          <p:nvPr/>
+        </p:nvCxnSpPr>
+        <p:spPr>
+          <a:xfrm flipV="1">
+            <a:off x="4305409" y="1634110"/>
+            <a:ext cx="0" cy="1766533"/>
+          </a:xfrm>
+          <a:prstGeom prst="straightConnector1">
+            <a:avLst/>
+          </a:prstGeom>
+          <a:ln>
+            <a:solidFill>
+              <a:srgbClr val="0070C0"/>
             </a:solidFill>
             <a:prstDash val="dash"/>
+            <a:headEnd type="none" w="med" len="med"/>
+            <a:tailEnd type="none" w="med" len="med"/>
+          </a:ln>
+        </p:spPr>
+        <p:style>
+          <a:lnRef idx="2">
+            <a:schemeClr val="accent1"/>
+          </a:lnRef>
+          <a:fillRef idx="0">
+            <a:schemeClr val="accent1"/>
+          </a:fillRef>
+          <a:effectRef idx="1">
+            <a:schemeClr val="accent1"/>
+          </a:effectRef>
+          <a:fontRef idx="minor">
+            <a:schemeClr val="tx1"/>
+          </a:fontRef>
+        </p:style>
+      </p:cxnSp>
+      <mc:AlternateContent xmlns:mc="http://schemas.openxmlformats.org/markup-compatibility/2006" xmlns:a14="http://schemas.microsoft.com/office/drawing/2010/main">
+        <mc:Choice Requires="a14">
+          <p:sp>
+            <p:nvSpPr>
+              <p:cNvPr id="10" name="TextBox 9">
+                <a:extLst>
+                  <a:ext uri="{FF2B5EF4-FFF2-40B4-BE49-F238E27FC236}">
+                    <a16:creationId xmlns:a16="http://schemas.microsoft.com/office/drawing/2014/main" id="{BE043BFA-B7C4-08D8-1908-30349E9CB1D1}"/>
+                  </a:ext>
+                </a:extLst>
+              </p:cNvPr>
+              <p:cNvSpPr txBox="1"/>
+              <p:nvPr/>
+            </p:nvSpPr>
+            <p:spPr>
+              <a:xfrm>
+                <a:off x="4250201" y="2314035"/>
+                <a:ext cx="1179534" cy="553357"/>
+              </a:xfrm>
+              <a:prstGeom prst="rect">
+                <a:avLst/>
+              </a:prstGeom>
+              <a:noFill/>
+            </p:spPr>
+            <p:txBody>
+              <a:bodyPr wrap="square" rtlCol="0">
+                <a:spAutoFit/>
+              </a:bodyPr>
+              <a:lstStyle/>
+              <a:p>
+                <a:pPr/>
+                <a14:m>
+                  <m:oMathPara xmlns:m="http://schemas.openxmlformats.org/officeDocument/2006/math">
+                    <m:oMathParaPr>
+                      <m:jc m:val="centerGroup"/>
+                    </m:oMathParaPr>
+                    <m:oMath xmlns:m="http://schemas.openxmlformats.org/officeDocument/2006/math">
+                      <m:sSub>
+                        <m:sSubPr>
+                          <m:ctrlPr>
+                            <a:rPr lang="de-DE" sz="1600" i="1" smtClean="0">
+                              <a:latin typeface="Cambria Math" panose="02040503050406030204" pitchFamily="18" charset="0"/>
+                            </a:rPr>
+                          </m:ctrlPr>
+                        </m:sSubPr>
+                        <m:e>
+                          <m:r>
+                            <m:rPr>
+                              <m:sty m:val="p"/>
+                            </m:rPr>
+                            <a:rPr lang="de-DE" sz="1600" b="0" i="1" smtClean="0">
+                              <a:latin typeface="Cambria Math" panose="02040503050406030204" pitchFamily="18" charset="0"/>
+                            </a:rPr>
+                            <m:t>I</m:t>
+                          </m:r>
+                        </m:e>
+                        <m:sub>
+                          <m:r>
+                            <m:rPr>
+                              <m:sty m:val="p"/>
+                            </m:rPr>
+                            <a:rPr lang="de-DE" sz="1600" b="0" i="1" smtClean="0">
+                              <a:latin typeface="Cambria Math" panose="02040503050406030204" pitchFamily="18" charset="0"/>
+                            </a:rPr>
+                            <m:t>z</m:t>
+                          </m:r>
+                        </m:sub>
+                      </m:sSub>
+                      <m:r>
+                        <a:rPr lang="de-DE" sz="1600" b="0" i="1" smtClean="0">
+                          <a:latin typeface="Cambria Math" panose="02040503050406030204" pitchFamily="18" charset="0"/>
+                        </a:rPr>
+                        <m:t> = </m:t>
+                      </m:r>
+                      <m:f>
+                        <m:fPr>
+                          <m:ctrlPr>
+                            <a:rPr lang="de-DE" sz="1600" b="0" i="1" smtClean="0">
+                              <a:latin typeface="Cambria Math" panose="02040503050406030204" pitchFamily="18" charset="0"/>
+                            </a:rPr>
+                          </m:ctrlPr>
+                        </m:fPr>
+                        <m:num>
+                          <m:r>
+                            <a:rPr lang="de-DE" sz="1600" b="0" i="1" smtClean="0">
+                              <a:latin typeface="Cambria Math" panose="02040503050406030204" pitchFamily="18" charset="0"/>
+                            </a:rPr>
+                            <m:t>1</m:t>
+                          </m:r>
+                        </m:num>
+                        <m:den>
+                          <m:r>
+                            <a:rPr lang="de-DE" sz="1600" b="0" i="1" smtClean="0">
+                              <a:latin typeface="Cambria Math" panose="02040503050406030204" pitchFamily="18" charset="0"/>
+                            </a:rPr>
+                            <m:t>2</m:t>
+                          </m:r>
+                        </m:den>
+                      </m:f>
+                      <m:r>
+                        <a:rPr lang="de-DE" sz="1600" dirty="0" smtClean="0">
+                          <a:latin typeface="Cambria Math" panose="02040503050406030204" pitchFamily="18" charset="0"/>
+                        </a:rPr>
+                        <m:t>ℏ</m:t>
+                      </m:r>
+                    </m:oMath>
+                  </m:oMathPara>
+                </a14:m>
+                <a:endParaRPr lang="de-DE" sz="1600" dirty="0"/>
+              </a:p>
+            </p:txBody>
+          </p:sp>
+        </mc:Choice>
+        <mc:Fallback xmlns="">
+          <p:sp>
+            <p:nvSpPr>
+              <p:cNvPr id="10" name="TextBox 9">
+                <a:extLst>
+                  <a:ext uri="{FF2B5EF4-FFF2-40B4-BE49-F238E27FC236}">
+                    <a16:creationId xmlns:a16="http://schemas.microsoft.com/office/drawing/2014/main" id="{BE043BFA-B7C4-08D8-1908-30349E9CB1D1}"/>
+                  </a:ext>
+                </a:extLst>
+              </p:cNvPr>
+              <p:cNvSpPr txBox="1">
+                <a:spLocks noRot="1" noChangeAspect="1" noMove="1" noResize="1" noEditPoints="1" noAdjustHandles="1" noChangeArrowheads="1" noChangeShapeType="1" noTextEdit="1"/>
+              </p:cNvSpPr>
+              <p:nvPr/>
+            </p:nvSpPr>
+            <p:spPr>
+              <a:xfrm>
+                <a:off x="4250201" y="2314035"/>
+                <a:ext cx="1179534" cy="553357"/>
+              </a:xfrm>
+              <a:prstGeom prst="rect">
+                <a:avLst/>
+              </a:prstGeom>
+              <a:blipFill>
+                <a:blip r:embed="rId3"/>
+                <a:stretch>
+                  <a:fillRect/>
+                </a:stretch>
+              </a:blipFill>
+            </p:spPr>
+            <p:txBody>
+              <a:bodyPr/>
+              <a:lstStyle/>
+              <a:p>
+                <a:r>
+                  <a:rPr lang="de-DE">
+                    <a:noFill/>
+                  </a:rPr>
+                  <a:t> </a:t>
+                </a:r>
+              </a:p>
+            </p:txBody>
+          </p:sp>
+        </mc:Fallback>
+      </mc:AlternateContent>
+      <p:sp>
+        <p:nvSpPr>
+          <p:cNvPr id="11" name="TextBox 10">
+            <a:extLst>
+              <a:ext uri="{FF2B5EF4-FFF2-40B4-BE49-F238E27FC236}">
+                <a16:creationId xmlns:a16="http://schemas.microsoft.com/office/drawing/2014/main" id="{EDD9EF0F-E50F-8508-C7C1-4899222F6C77}"/>
+              </a:ext>
+            </a:extLst>
+          </p:cNvPr>
+          <p:cNvSpPr txBox="1"/>
+          <p:nvPr/>
+        </p:nvSpPr>
+        <p:spPr>
+          <a:xfrm>
+            <a:off x="4709340" y="3400643"/>
+            <a:ext cx="261257" cy="338554"/>
+          </a:xfrm>
+          <a:prstGeom prst="rect">
+            <a:avLst/>
+          </a:prstGeom>
+          <a:noFill/>
+        </p:spPr>
+        <p:txBody>
+          <a:bodyPr wrap="square" rtlCol="0">
+            <a:spAutoFit/>
+          </a:bodyPr>
+          <a:lstStyle/>
+          <a:p>
+            <a:r>
+              <a:rPr lang="de-DE" sz="1600" dirty="0"/>
+              <a:t>x</a:t>
+            </a:r>
+          </a:p>
+        </p:txBody>
+      </p:sp>
+      <p:sp>
+        <p:nvSpPr>
+          <p:cNvPr id="12" name="TextBox 11">
+            <a:extLst>
+              <a:ext uri="{FF2B5EF4-FFF2-40B4-BE49-F238E27FC236}">
+                <a16:creationId xmlns:a16="http://schemas.microsoft.com/office/drawing/2014/main" id="{C0952584-CD24-6087-EA45-CBD21DFE159B}"/>
+              </a:ext>
+            </a:extLst>
+          </p:cNvPr>
+          <p:cNvSpPr txBox="1"/>
+          <p:nvPr/>
+        </p:nvSpPr>
+        <p:spPr>
+          <a:xfrm>
+            <a:off x="3168012" y="1108217"/>
+            <a:ext cx="261257" cy="338554"/>
+          </a:xfrm>
+          <a:prstGeom prst="rect">
+            <a:avLst/>
+          </a:prstGeom>
+          <a:noFill/>
+        </p:spPr>
+        <p:txBody>
+          <a:bodyPr wrap="square" rtlCol="0">
+            <a:spAutoFit/>
+          </a:bodyPr>
+          <a:lstStyle/>
+          <a:p>
+            <a:r>
+              <a:rPr lang="de-DE" sz="1600" dirty="0"/>
+              <a:t>z</a:t>
+            </a:r>
+          </a:p>
+        </p:txBody>
+      </p:sp>
+      <p:cxnSp>
+        <p:nvCxnSpPr>
+          <p:cNvPr id="31" name="Straight Arrow Connector 30">
+            <a:extLst>
+              <a:ext uri="{FF2B5EF4-FFF2-40B4-BE49-F238E27FC236}">
+                <a16:creationId xmlns:a16="http://schemas.microsoft.com/office/drawing/2014/main" id="{1E96135C-E402-F2E7-295C-D52DCCF3F2DF}"/>
+              </a:ext>
+            </a:extLst>
+          </p:cNvPr>
+          <p:cNvCxnSpPr>
+            <a:cxnSpLocks/>
+          </p:cNvCxnSpPr>
+          <p:nvPr/>
+        </p:nvCxnSpPr>
+        <p:spPr>
+          <a:xfrm flipV="1">
+            <a:off x="3488235" y="4318065"/>
+            <a:ext cx="7088" cy="2123149"/>
+          </a:xfrm>
+          <a:prstGeom prst="straightConnector1">
+            <a:avLst/>
+          </a:prstGeom>
+          <a:ln>
+            <a:solidFill>
+              <a:schemeClr val="tx1"/>
+            </a:solidFill>
+            <a:tailEnd type="triangle"/>
           </a:ln>
         </p:spPr>
         <p:style>
@@ -13187,10 +18454,10 @@
       </p:cxnSp>
       <p:cxnSp>
         <p:nvCxnSpPr>
-          <p:cNvPr id="23" name="Straight Connector 22">
-            <a:extLst>
-              <a:ext uri="{FF2B5EF4-FFF2-40B4-BE49-F238E27FC236}">
-                <a16:creationId xmlns:a16="http://schemas.microsoft.com/office/drawing/2014/main" id="{CB72C1C3-7A63-35B7-B7B4-EBD23572ECF6}"/>
+          <p:cNvPr id="32" name="Straight Arrow Connector 31">
+            <a:extLst>
+              <a:ext uri="{FF2B5EF4-FFF2-40B4-BE49-F238E27FC236}">
+                <a16:creationId xmlns:a16="http://schemas.microsoft.com/office/drawing/2014/main" id="{A5F1FF36-E53A-F8CF-FC1E-209E0676A921}"/>
               </a:ext>
             </a:extLst>
           </p:cNvPr>
@@ -13201,17 +18468,17 @@
         </p:nvCxnSpPr>
         <p:spPr>
           <a:xfrm>
-            <a:off x="6627623" y="290837"/>
-            <a:ext cx="0" cy="3207273"/>
+            <a:off x="3488235" y="6441214"/>
+            <a:ext cx="1980000" cy="0"/>
           </a:xfrm>
-          <a:prstGeom prst="line">
+          <a:prstGeom prst="straightConnector1">
             <a:avLst/>
           </a:prstGeom>
           <a:ln>
             <a:solidFill>
-              <a:srgbClr val="92D050"/>
+              <a:schemeClr val="tx1"/>
             </a:solidFill>
-            <a:prstDash val="dash"/>
+            <a:tailEnd type="triangle"/>
           </a:ln>
         </p:spPr>
         <p:style>
@@ -13229,46 +18496,1345 @@
           </a:fontRef>
         </p:style>
       </p:cxnSp>
-      <p:pic>
-        <p:nvPicPr>
-          <p:cNvPr id="12" name="Picture 11" descr="A graph of a function&#10;&#10;AI-generated content may be incorrect.">
-            <a:extLst>
-              <a:ext uri="{FF2B5EF4-FFF2-40B4-BE49-F238E27FC236}">
-                <a16:creationId xmlns:a16="http://schemas.microsoft.com/office/drawing/2014/main" id="{EB11595E-82EA-FA9F-19E9-F508FB47CE04}"/>
-              </a:ext>
-            </a:extLst>
-          </p:cNvPr>
-          <p:cNvPicPr>
-            <a:picLocks noChangeAspect="1"/>
-          </p:cNvPicPr>
+      <p:sp>
+        <p:nvSpPr>
+          <p:cNvPr id="36" name="TextBox 35">
+            <a:extLst>
+              <a:ext uri="{FF2B5EF4-FFF2-40B4-BE49-F238E27FC236}">
+                <a16:creationId xmlns:a16="http://schemas.microsoft.com/office/drawing/2014/main" id="{431C47AD-2951-5F69-F854-B12303D33CF8}"/>
+              </a:ext>
+            </a:extLst>
+          </p:cNvPr>
+          <p:cNvSpPr txBox="1"/>
           <p:nvPr/>
-        </p:nvPicPr>
-        <p:blipFill>
-          <a:blip r:embed="rId4">
-            <a:extLst>
-              <a:ext uri="{28A0092B-C50C-407E-A947-70E740481C1C}">
-                <a14:useLocalDpi xmlns:a14="http://schemas.microsoft.com/office/drawing/2010/main" val="0"/>
-              </a:ext>
-            </a:extLst>
-          </a:blip>
-          <a:stretch>
-            <a:fillRect/>
-          </a:stretch>
-        </p:blipFill>
+        </p:nvSpPr>
         <p:spPr>
           <a:xfrm>
-            <a:off x="-655682" y="814534"/>
-            <a:ext cx="9144000" cy="6858000"/>
+            <a:off x="4709340" y="6441214"/>
+            <a:ext cx="261257" cy="338554"/>
           </a:xfrm>
           <a:prstGeom prst="rect">
             <a:avLst/>
           </a:prstGeom>
+          <a:noFill/>
         </p:spPr>
-      </p:pic>
+        <p:txBody>
+          <a:bodyPr wrap="square" rtlCol="0">
+            <a:spAutoFit/>
+          </a:bodyPr>
+          <a:lstStyle/>
+          <a:p>
+            <a:r>
+              <a:rPr lang="de-DE" sz="1600" dirty="0"/>
+              <a:t>x</a:t>
+            </a:r>
+          </a:p>
+        </p:txBody>
+      </p:sp>
+      <p:sp>
+        <p:nvSpPr>
+          <p:cNvPr id="37" name="TextBox 36">
+            <a:extLst>
+              <a:ext uri="{FF2B5EF4-FFF2-40B4-BE49-F238E27FC236}">
+                <a16:creationId xmlns:a16="http://schemas.microsoft.com/office/drawing/2014/main" id="{3A81A0C8-B276-DFF5-26D1-D87175CF4A2A}"/>
+              </a:ext>
+            </a:extLst>
+          </p:cNvPr>
+          <p:cNvSpPr txBox="1"/>
+          <p:nvPr/>
+        </p:nvSpPr>
+        <p:spPr>
+          <a:xfrm>
+            <a:off x="3168012" y="4148788"/>
+            <a:ext cx="261257" cy="338554"/>
+          </a:xfrm>
+          <a:prstGeom prst="rect">
+            <a:avLst/>
+          </a:prstGeom>
+          <a:noFill/>
+        </p:spPr>
+        <p:txBody>
+          <a:bodyPr wrap="square" rtlCol="0">
+            <a:spAutoFit/>
+          </a:bodyPr>
+          <a:lstStyle/>
+          <a:p>
+            <a:r>
+              <a:rPr lang="de-DE" sz="1600" dirty="0"/>
+              <a:t>z</a:t>
+            </a:r>
+          </a:p>
+        </p:txBody>
+      </p:sp>
+      <p:sp>
+        <p:nvSpPr>
+          <p:cNvPr id="42" name="TextBox 41">
+            <a:extLst>
+              <a:ext uri="{FF2B5EF4-FFF2-40B4-BE49-F238E27FC236}">
+                <a16:creationId xmlns:a16="http://schemas.microsoft.com/office/drawing/2014/main" id="{5BB3EA7B-4711-FD84-80E5-FB8DCAAAF865}"/>
+              </a:ext>
+            </a:extLst>
+          </p:cNvPr>
+          <p:cNvSpPr txBox="1"/>
+          <p:nvPr/>
+        </p:nvSpPr>
+        <p:spPr>
+          <a:xfrm>
+            <a:off x="406637" y="1354337"/>
+            <a:ext cx="2029017" cy="369332"/>
+          </a:xfrm>
+          <a:prstGeom prst="rect">
+            <a:avLst/>
+          </a:prstGeom>
+          <a:noFill/>
+        </p:spPr>
+        <p:txBody>
+          <a:bodyPr wrap="none" rtlCol="0">
+            <a:spAutoFit/>
+          </a:bodyPr>
+          <a:lstStyle/>
+          <a:p>
+            <a:r>
+              <a:rPr lang="de-DE" dirty="0"/>
+              <a:t>spin-up eigenstate</a:t>
+            </a:r>
+          </a:p>
+        </p:txBody>
+      </p:sp>
+      <p:sp>
+        <p:nvSpPr>
+          <p:cNvPr id="45" name="TextBox 44">
+            <a:extLst>
+              <a:ext uri="{FF2B5EF4-FFF2-40B4-BE49-F238E27FC236}">
+                <a16:creationId xmlns:a16="http://schemas.microsoft.com/office/drawing/2014/main" id="{CD06C2A8-F844-68CD-631B-FD70430DF727}"/>
+              </a:ext>
+            </a:extLst>
+          </p:cNvPr>
+          <p:cNvSpPr txBox="1"/>
+          <p:nvPr/>
+        </p:nvSpPr>
+        <p:spPr>
+          <a:xfrm>
+            <a:off x="285065" y="4366511"/>
+            <a:ext cx="2272160" cy="923330"/>
+          </a:xfrm>
+          <a:prstGeom prst="rect">
+            <a:avLst/>
+          </a:prstGeom>
+          <a:noFill/>
+        </p:spPr>
+        <p:txBody>
+          <a:bodyPr wrap="none" rtlCol="0">
+            <a:spAutoFit/>
+          </a:bodyPr>
+          <a:lstStyle/>
+          <a:p>
+            <a:pPr algn="ctr"/>
+            <a:r>
+              <a:rPr lang="de-DE" dirty="0"/>
+              <a:t>Superposition</a:t>
+            </a:r>
+          </a:p>
+          <a:p>
+            <a:pPr algn="ctr"/>
+            <a:r>
+              <a:rPr lang="de-DE" dirty="0"/>
+              <a:t>“70% up, 30% down“</a:t>
+            </a:r>
+          </a:p>
+          <a:p>
+            <a:pPr algn="ctr"/>
+            <a:endParaRPr lang="de-DE" dirty="0"/>
+          </a:p>
+        </p:txBody>
+      </p:sp>
+      <mc:AlternateContent xmlns:mc="http://schemas.openxmlformats.org/markup-compatibility/2006" xmlns:a14="http://schemas.microsoft.com/office/drawing/2010/main">
+        <mc:Choice Requires="a14">
+          <p:sp>
+            <p:nvSpPr>
+              <p:cNvPr id="50" name="TextBox 49">
+                <a:extLst>
+                  <a:ext uri="{FF2B5EF4-FFF2-40B4-BE49-F238E27FC236}">
+                    <a16:creationId xmlns:a16="http://schemas.microsoft.com/office/drawing/2014/main" id="{68B75674-E47E-9407-80FD-F4DDE5FF512E}"/>
+                  </a:ext>
+                </a:extLst>
+              </p:cNvPr>
+              <p:cNvSpPr txBox="1"/>
+              <p:nvPr/>
+            </p:nvSpPr>
+            <p:spPr>
+              <a:xfrm>
+                <a:off x="6875068" y="4789407"/>
+                <a:ext cx="2268501" cy="1428596"/>
+              </a:xfrm>
+              <a:prstGeom prst="rect">
+                <a:avLst/>
+              </a:prstGeom>
+              <a:noFill/>
+            </p:spPr>
+            <p:txBody>
+              <a:bodyPr wrap="square" rtlCol="0">
+                <a:spAutoFit/>
+              </a:bodyPr>
+              <a:lstStyle/>
+              <a:p>
+                <a:r>
+                  <a:rPr lang="de-DE" dirty="0"/>
+                  <a:t>Either </a:t>
+                </a:r>
+                <a14:m>
+                  <m:oMath xmlns:m="http://schemas.openxmlformats.org/officeDocument/2006/math">
+                    <m:sSub>
+                      <m:sSubPr>
+                        <m:ctrlPr>
+                          <a:rPr lang="de-DE" i="1">
+                            <a:latin typeface="Cambria Math" panose="02040503050406030204" pitchFamily="18" charset="0"/>
+                          </a:rPr>
+                        </m:ctrlPr>
+                      </m:sSubPr>
+                      <m:e>
+                        <m:r>
+                          <m:rPr>
+                            <m:sty m:val="p"/>
+                          </m:rPr>
+                          <a:rPr lang="de-DE" i="1">
+                            <a:latin typeface="Cambria Math" panose="02040503050406030204" pitchFamily="18" charset="0"/>
+                          </a:rPr>
+                          <m:t>I</m:t>
+                        </m:r>
+                      </m:e>
+                      <m:sub>
+                        <m:r>
+                          <m:rPr>
+                            <m:sty m:val="p"/>
+                          </m:rPr>
+                          <a:rPr lang="de-DE" i="1">
+                            <a:latin typeface="Cambria Math" panose="02040503050406030204" pitchFamily="18" charset="0"/>
+                          </a:rPr>
+                          <m:t>z</m:t>
+                        </m:r>
+                      </m:sub>
+                    </m:sSub>
+                    <m:r>
+                      <a:rPr lang="de-DE" i="1">
+                        <a:latin typeface="Cambria Math" panose="02040503050406030204" pitchFamily="18" charset="0"/>
+                      </a:rPr>
+                      <m:t> = </m:t>
+                    </m:r>
+                    <m:f>
+                      <m:fPr>
+                        <m:ctrlPr>
+                          <a:rPr lang="de-DE" i="1">
+                            <a:latin typeface="Cambria Math" panose="02040503050406030204" pitchFamily="18" charset="0"/>
+                          </a:rPr>
+                        </m:ctrlPr>
+                      </m:fPr>
+                      <m:num>
+                        <m:r>
+                          <a:rPr lang="de-DE" i="1">
+                            <a:latin typeface="Cambria Math" panose="02040503050406030204" pitchFamily="18" charset="0"/>
+                          </a:rPr>
+                          <m:t>1</m:t>
+                        </m:r>
+                      </m:num>
+                      <m:den>
+                        <m:r>
+                          <a:rPr lang="de-DE" i="1">
+                            <a:latin typeface="Cambria Math" panose="02040503050406030204" pitchFamily="18" charset="0"/>
+                          </a:rPr>
+                          <m:t>2</m:t>
+                        </m:r>
+                      </m:den>
+                    </m:f>
+                    <m:r>
+                      <a:rPr lang="de-DE" dirty="0">
+                        <a:latin typeface="Cambria Math" panose="02040503050406030204" pitchFamily="18" charset="0"/>
+                      </a:rPr>
+                      <m:t>ℏ</m:t>
+                    </m:r>
+                  </m:oMath>
+                </a14:m>
+                <a:r>
+                  <a:rPr lang="de-DE" dirty="0"/>
+                  <a:t> or </a:t>
+                </a:r>
+                <a14:m>
+                  <m:oMath xmlns:m="http://schemas.openxmlformats.org/officeDocument/2006/math">
+                    <m:sSub>
+                      <m:sSubPr>
+                        <m:ctrlPr>
+                          <a:rPr lang="de-DE" i="1">
+                            <a:latin typeface="Cambria Math" panose="02040503050406030204" pitchFamily="18" charset="0"/>
+                          </a:rPr>
+                        </m:ctrlPr>
+                      </m:sSubPr>
+                      <m:e>
+                        <m:r>
+                          <m:rPr>
+                            <m:sty m:val="p"/>
+                          </m:rPr>
+                          <a:rPr lang="de-DE" i="1">
+                            <a:latin typeface="Cambria Math" panose="02040503050406030204" pitchFamily="18" charset="0"/>
+                          </a:rPr>
+                          <m:t>I</m:t>
+                        </m:r>
+                      </m:e>
+                      <m:sub>
+                        <m:r>
+                          <m:rPr>
+                            <m:sty m:val="p"/>
+                          </m:rPr>
+                          <a:rPr lang="de-DE" i="1">
+                            <a:latin typeface="Cambria Math" panose="02040503050406030204" pitchFamily="18" charset="0"/>
+                          </a:rPr>
+                          <m:t>z</m:t>
+                        </m:r>
+                      </m:sub>
+                    </m:sSub>
+                    <m:r>
+                      <a:rPr lang="de-DE" i="1">
+                        <a:latin typeface="Cambria Math" panose="02040503050406030204" pitchFamily="18" charset="0"/>
+                      </a:rPr>
+                      <m:t> = </m:t>
+                    </m:r>
+                    <m:r>
+                      <a:rPr lang="de-DE" b="0" i="1" smtClean="0">
+                        <a:latin typeface="Cambria Math" panose="02040503050406030204" pitchFamily="18" charset="0"/>
+                      </a:rPr>
+                      <m:t>−</m:t>
+                    </m:r>
+                    <m:f>
+                      <m:fPr>
+                        <m:ctrlPr>
+                          <a:rPr lang="de-DE" i="1">
+                            <a:latin typeface="Cambria Math" panose="02040503050406030204" pitchFamily="18" charset="0"/>
+                          </a:rPr>
+                        </m:ctrlPr>
+                      </m:fPr>
+                      <m:num>
+                        <m:r>
+                          <a:rPr lang="de-DE" i="1">
+                            <a:latin typeface="Cambria Math" panose="02040503050406030204" pitchFamily="18" charset="0"/>
+                          </a:rPr>
+                          <m:t>1</m:t>
+                        </m:r>
+                      </m:num>
+                      <m:den>
+                        <m:r>
+                          <a:rPr lang="de-DE" i="1">
+                            <a:latin typeface="Cambria Math" panose="02040503050406030204" pitchFamily="18" charset="0"/>
+                          </a:rPr>
+                          <m:t>2</m:t>
+                        </m:r>
+                      </m:den>
+                    </m:f>
+                    <m:r>
+                      <a:rPr lang="de-DE" dirty="0">
+                        <a:latin typeface="Cambria Math" panose="02040503050406030204" pitchFamily="18" charset="0"/>
+                      </a:rPr>
+                      <m:t>ℏ</m:t>
+                    </m:r>
+                  </m:oMath>
+                </a14:m>
+                <a:r>
+                  <a:rPr lang="de-DE" dirty="0"/>
+                  <a:t> with a probability of 70% to 30%</a:t>
+                </a:r>
+              </a:p>
+            </p:txBody>
+          </p:sp>
+        </mc:Choice>
+        <mc:Fallback xmlns="">
+          <p:sp>
+            <p:nvSpPr>
+              <p:cNvPr id="50" name="TextBox 49">
+                <a:extLst>
+                  <a:ext uri="{FF2B5EF4-FFF2-40B4-BE49-F238E27FC236}">
+                    <a16:creationId xmlns:a16="http://schemas.microsoft.com/office/drawing/2014/main" id="{68B75674-E47E-9407-80FD-F4DDE5FF512E}"/>
+                  </a:ext>
+                </a:extLst>
+              </p:cNvPr>
+              <p:cNvSpPr txBox="1">
+                <a:spLocks noRot="1" noChangeAspect="1" noMove="1" noResize="1" noEditPoints="1" noAdjustHandles="1" noChangeArrowheads="1" noChangeShapeType="1" noTextEdit="1"/>
+              </p:cNvSpPr>
+              <p:nvPr/>
+            </p:nvSpPr>
+            <p:spPr>
+              <a:xfrm>
+                <a:off x="6875068" y="4789407"/>
+                <a:ext cx="2268501" cy="1428596"/>
+              </a:xfrm>
+              <a:prstGeom prst="rect">
+                <a:avLst/>
+              </a:prstGeom>
+              <a:blipFill>
+                <a:blip r:embed="rId4"/>
+                <a:stretch>
+                  <a:fillRect l="-2419" r="-1075" b="-6410"/>
+                </a:stretch>
+              </a:blipFill>
+            </p:spPr>
+            <p:txBody>
+              <a:bodyPr/>
+              <a:lstStyle/>
+              <a:p>
+                <a:r>
+                  <a:rPr lang="de-DE">
+                    <a:noFill/>
+                  </a:rPr>
+                  <a:t> </a:t>
+                </a:r>
+              </a:p>
+            </p:txBody>
+          </p:sp>
+        </mc:Fallback>
+      </mc:AlternateContent>
+      <p:sp>
+        <p:nvSpPr>
+          <p:cNvPr id="51" name="TextBox 50">
+            <a:extLst>
+              <a:ext uri="{FF2B5EF4-FFF2-40B4-BE49-F238E27FC236}">
+                <a16:creationId xmlns:a16="http://schemas.microsoft.com/office/drawing/2014/main" id="{48AD76CE-E4DB-C793-E1F2-4C7EFBFC93FF}"/>
+              </a:ext>
+            </a:extLst>
+          </p:cNvPr>
+          <p:cNvSpPr txBox="1"/>
+          <p:nvPr/>
+        </p:nvSpPr>
+        <p:spPr>
+          <a:xfrm>
+            <a:off x="3524329" y="424829"/>
+            <a:ext cx="2054280" cy="646331"/>
+          </a:xfrm>
+          <a:prstGeom prst="rect">
+            <a:avLst/>
+          </a:prstGeom>
+          <a:noFill/>
+        </p:spPr>
+        <p:txBody>
+          <a:bodyPr wrap="none" rtlCol="0">
+            <a:spAutoFit/>
+          </a:bodyPr>
+          <a:lstStyle/>
+          <a:p>
+            <a:r>
+              <a:rPr lang="de-DE" b="1" dirty="0"/>
+              <a:t>Classical view/</a:t>
+            </a:r>
+          </a:p>
+          <a:p>
+            <a:r>
+              <a:rPr lang="de-DE" b="1" dirty="0"/>
+              <a:t>Expectation value</a:t>
+            </a:r>
+          </a:p>
+        </p:txBody>
+      </p:sp>
+      <p:sp>
+        <p:nvSpPr>
+          <p:cNvPr id="52" name="TextBox 51">
+            <a:extLst>
+              <a:ext uri="{FF2B5EF4-FFF2-40B4-BE49-F238E27FC236}">
+                <a16:creationId xmlns:a16="http://schemas.microsoft.com/office/drawing/2014/main" id="{8A863D66-C8E0-2233-5226-334458F44122}"/>
+              </a:ext>
+            </a:extLst>
+          </p:cNvPr>
+          <p:cNvSpPr txBox="1"/>
+          <p:nvPr/>
+        </p:nvSpPr>
+        <p:spPr>
+          <a:xfrm>
+            <a:off x="6694952" y="700294"/>
+            <a:ext cx="2628733" cy="369332"/>
+          </a:xfrm>
+          <a:prstGeom prst="rect">
+            <a:avLst/>
+          </a:prstGeom>
+          <a:noFill/>
+        </p:spPr>
+        <p:txBody>
+          <a:bodyPr wrap="none" rtlCol="0">
+            <a:spAutoFit/>
+          </a:bodyPr>
+          <a:lstStyle/>
+          <a:p>
+            <a:r>
+              <a:rPr lang="de-DE" b="1" dirty="0"/>
+              <a:t>Measurement outcome</a:t>
+            </a:r>
+          </a:p>
+        </p:txBody>
+      </p:sp>
+      <p:sp>
+        <p:nvSpPr>
+          <p:cNvPr id="54" name="TextBox 53">
+            <a:extLst>
+              <a:ext uri="{FF2B5EF4-FFF2-40B4-BE49-F238E27FC236}">
+                <a16:creationId xmlns:a16="http://schemas.microsoft.com/office/drawing/2014/main" id="{88972DA4-A914-2DA9-F8E2-F28E319F910F}"/>
+              </a:ext>
+            </a:extLst>
+          </p:cNvPr>
+          <p:cNvSpPr txBox="1"/>
+          <p:nvPr/>
+        </p:nvSpPr>
+        <p:spPr>
+          <a:xfrm>
+            <a:off x="698864" y="700294"/>
+            <a:ext cx="1444563" cy="369332"/>
+          </a:xfrm>
+          <a:prstGeom prst="rect">
+            <a:avLst/>
+          </a:prstGeom>
+          <a:noFill/>
+        </p:spPr>
+        <p:txBody>
+          <a:bodyPr wrap="none" rtlCol="0">
+            <a:spAutoFit/>
+          </a:bodyPr>
+          <a:lstStyle/>
+          <a:p>
+            <a:r>
+              <a:rPr lang="de-DE" b="1" dirty="0"/>
+              <a:t>Actual state</a:t>
+            </a:r>
+          </a:p>
+        </p:txBody>
+      </p:sp>
+      <p:grpSp>
+        <p:nvGrpSpPr>
+          <p:cNvPr id="79" name="Group 78">
+            <a:extLst>
+              <a:ext uri="{FF2B5EF4-FFF2-40B4-BE49-F238E27FC236}">
+                <a16:creationId xmlns:a16="http://schemas.microsoft.com/office/drawing/2014/main" id="{EDAE47C3-4AE8-4161-EC62-90C7FA668B43}"/>
+              </a:ext>
+            </a:extLst>
+          </p:cNvPr>
+          <p:cNvGrpSpPr/>
+          <p:nvPr/>
+        </p:nvGrpSpPr>
+        <p:grpSpPr>
+          <a:xfrm>
+            <a:off x="963945" y="1804188"/>
+            <a:ext cx="914400" cy="914400"/>
+            <a:chOff x="731374" y="1804188"/>
+            <a:chExt cx="914400" cy="914400"/>
+          </a:xfrm>
+        </p:grpSpPr>
+        <p:sp>
+          <p:nvSpPr>
+            <p:cNvPr id="69" name="Oval 68">
+              <a:extLst>
+                <a:ext uri="{FF2B5EF4-FFF2-40B4-BE49-F238E27FC236}">
+                  <a16:creationId xmlns:a16="http://schemas.microsoft.com/office/drawing/2014/main" id="{AC0AB034-7371-3B54-ADDD-FDF436FF7B0D}"/>
+                </a:ext>
+              </a:extLst>
+            </p:cNvPr>
+            <p:cNvSpPr/>
+            <p:nvPr/>
+          </p:nvSpPr>
+          <p:spPr>
+            <a:xfrm>
+              <a:off x="731374" y="1804188"/>
+              <a:ext cx="914400" cy="914400"/>
+            </a:xfrm>
+            <a:prstGeom prst="ellipse">
+              <a:avLst/>
+            </a:prstGeom>
+            <a:solidFill>
+              <a:srgbClr val="FF0000"/>
+            </a:solidFill>
+          </p:spPr>
+          <p:style>
+            <a:lnRef idx="2">
+              <a:schemeClr val="accent1">
+                <a:shade val="15000"/>
+              </a:schemeClr>
+            </a:lnRef>
+            <a:fillRef idx="1">
+              <a:schemeClr val="accent1"/>
+            </a:fillRef>
+            <a:effectRef idx="0">
+              <a:schemeClr val="accent1"/>
+            </a:effectRef>
+            <a:fontRef idx="minor">
+              <a:schemeClr val="lt1"/>
+            </a:fontRef>
+          </p:style>
+          <p:txBody>
+            <a:bodyPr rtlCol="0" anchor="ctr"/>
+            <a:lstStyle/>
+            <a:p>
+              <a:pPr algn="ctr"/>
+              <a:endParaRPr lang="de-DE"/>
+            </a:p>
+          </p:txBody>
+        </p:sp>
+        <p:cxnSp>
+          <p:nvCxnSpPr>
+            <p:cNvPr id="58" name="Straight Arrow Connector 57">
+              <a:extLst>
+                <a:ext uri="{FF2B5EF4-FFF2-40B4-BE49-F238E27FC236}">
+                  <a16:creationId xmlns:a16="http://schemas.microsoft.com/office/drawing/2014/main" id="{EDF2346D-9A5C-417D-6A30-6BF06AC58FCB}"/>
+                </a:ext>
+              </a:extLst>
+            </p:cNvPr>
+            <p:cNvCxnSpPr>
+              <a:cxnSpLocks/>
+            </p:cNvCxnSpPr>
+            <p:nvPr/>
+          </p:nvCxnSpPr>
+          <p:spPr>
+            <a:xfrm flipV="1">
+              <a:off x="1188574" y="2041876"/>
+              <a:ext cx="0" cy="360000"/>
+            </a:xfrm>
+            <a:prstGeom prst="straightConnector1">
+              <a:avLst/>
+            </a:prstGeom>
+            <a:ln w="38100">
+              <a:solidFill>
+                <a:schemeClr val="bg1"/>
+              </a:solidFill>
+              <a:tailEnd type="triangle"/>
+            </a:ln>
+          </p:spPr>
+          <p:style>
+            <a:lnRef idx="2">
+              <a:schemeClr val="accent1"/>
+            </a:lnRef>
+            <a:fillRef idx="0">
+              <a:schemeClr val="accent1"/>
+            </a:fillRef>
+            <a:effectRef idx="1">
+              <a:schemeClr val="accent1"/>
+            </a:effectRef>
+            <a:fontRef idx="minor">
+              <a:schemeClr val="tx1"/>
+            </a:fontRef>
+          </p:style>
+        </p:cxnSp>
+      </p:grpSp>
+      <p:grpSp>
+        <p:nvGrpSpPr>
+          <p:cNvPr id="78" name="Group 77">
+            <a:extLst>
+              <a:ext uri="{FF2B5EF4-FFF2-40B4-BE49-F238E27FC236}">
+                <a16:creationId xmlns:a16="http://schemas.microsoft.com/office/drawing/2014/main" id="{635B2CF4-24AE-FB12-EC45-75356569479C}"/>
+              </a:ext>
+            </a:extLst>
+          </p:cNvPr>
+          <p:cNvGrpSpPr/>
+          <p:nvPr/>
+        </p:nvGrpSpPr>
+        <p:grpSpPr>
+          <a:xfrm>
+            <a:off x="963945" y="5024848"/>
+            <a:ext cx="914400" cy="914400"/>
+            <a:chOff x="798808" y="5024848"/>
+            <a:chExt cx="914400" cy="914400"/>
+          </a:xfrm>
+        </p:grpSpPr>
+        <p:sp>
+          <p:nvSpPr>
+            <p:cNvPr id="70" name="Oval 69">
+              <a:extLst>
+                <a:ext uri="{FF2B5EF4-FFF2-40B4-BE49-F238E27FC236}">
+                  <a16:creationId xmlns:a16="http://schemas.microsoft.com/office/drawing/2014/main" id="{05922D8A-59F2-D271-041C-4A194BDBDCF2}"/>
+                </a:ext>
+              </a:extLst>
+            </p:cNvPr>
+            <p:cNvSpPr/>
+            <p:nvPr/>
+          </p:nvSpPr>
+          <p:spPr>
+            <a:xfrm>
+              <a:off x="798808" y="5024848"/>
+              <a:ext cx="914400" cy="914400"/>
+            </a:xfrm>
+            <a:prstGeom prst="ellipse">
+              <a:avLst/>
+            </a:prstGeom>
+            <a:solidFill>
+              <a:srgbClr val="FF0000"/>
+            </a:solidFill>
+          </p:spPr>
+          <p:style>
+            <a:lnRef idx="2">
+              <a:schemeClr val="accent1">
+                <a:shade val="15000"/>
+              </a:schemeClr>
+            </a:lnRef>
+            <a:fillRef idx="1">
+              <a:schemeClr val="accent1"/>
+            </a:fillRef>
+            <a:effectRef idx="0">
+              <a:schemeClr val="accent1"/>
+            </a:effectRef>
+            <a:fontRef idx="minor">
+              <a:schemeClr val="lt1"/>
+            </a:fontRef>
+          </p:style>
+          <p:txBody>
+            <a:bodyPr rtlCol="0" anchor="ctr"/>
+            <a:lstStyle/>
+            <a:p>
+              <a:pPr algn="ctr"/>
+              <a:endParaRPr lang="de-DE"/>
+            </a:p>
+          </p:txBody>
+        </p:sp>
+        <p:cxnSp>
+          <p:nvCxnSpPr>
+            <p:cNvPr id="56" name="Straight Arrow Connector 55">
+              <a:extLst>
+                <a:ext uri="{FF2B5EF4-FFF2-40B4-BE49-F238E27FC236}">
+                  <a16:creationId xmlns:a16="http://schemas.microsoft.com/office/drawing/2014/main" id="{ED290BC7-A819-040F-62E8-8F717A4E0FDB}"/>
+                </a:ext>
+              </a:extLst>
+            </p:cNvPr>
+            <p:cNvCxnSpPr/>
+            <p:nvPr/>
+          </p:nvCxnSpPr>
+          <p:spPr>
+            <a:xfrm>
+              <a:off x="1468785" y="5302048"/>
+              <a:ext cx="0" cy="360000"/>
+            </a:xfrm>
+            <a:prstGeom prst="straightConnector1">
+              <a:avLst/>
+            </a:prstGeom>
+            <a:ln w="38100">
+              <a:solidFill>
+                <a:schemeClr val="bg1"/>
+              </a:solidFill>
+              <a:tailEnd type="triangle"/>
+            </a:ln>
+          </p:spPr>
+          <p:style>
+            <a:lnRef idx="2">
+              <a:schemeClr val="accent1"/>
+            </a:lnRef>
+            <a:fillRef idx="0">
+              <a:schemeClr val="accent1"/>
+            </a:fillRef>
+            <a:effectRef idx="1">
+              <a:schemeClr val="accent1"/>
+            </a:effectRef>
+            <a:fontRef idx="minor">
+              <a:schemeClr val="tx1"/>
+            </a:fontRef>
+          </p:style>
+        </p:cxnSp>
+        <p:cxnSp>
+          <p:nvCxnSpPr>
+            <p:cNvPr id="57" name="Straight Arrow Connector 56">
+              <a:extLst>
+                <a:ext uri="{FF2B5EF4-FFF2-40B4-BE49-F238E27FC236}">
+                  <a16:creationId xmlns:a16="http://schemas.microsoft.com/office/drawing/2014/main" id="{3E92B215-A5D4-7781-EDC2-DBE3BAFC4310}"/>
+                </a:ext>
+              </a:extLst>
+            </p:cNvPr>
+            <p:cNvCxnSpPr>
+              <a:cxnSpLocks/>
+            </p:cNvCxnSpPr>
+            <p:nvPr/>
+          </p:nvCxnSpPr>
+          <p:spPr>
+            <a:xfrm flipV="1">
+              <a:off x="1020106" y="5293953"/>
+              <a:ext cx="0" cy="360000"/>
+            </a:xfrm>
+            <a:prstGeom prst="straightConnector1">
+              <a:avLst/>
+            </a:prstGeom>
+            <a:ln w="38100">
+              <a:solidFill>
+                <a:schemeClr val="bg1"/>
+              </a:solidFill>
+              <a:tailEnd type="triangle"/>
+            </a:ln>
+          </p:spPr>
+          <p:style>
+            <a:lnRef idx="2">
+              <a:schemeClr val="accent1"/>
+            </a:lnRef>
+            <a:fillRef idx="0">
+              <a:schemeClr val="accent1"/>
+            </a:fillRef>
+            <a:effectRef idx="1">
+              <a:schemeClr val="accent1"/>
+            </a:effectRef>
+            <a:fontRef idx="minor">
+              <a:schemeClr val="tx1"/>
+            </a:fontRef>
+          </p:style>
+        </p:cxnSp>
+        <p:sp>
+          <p:nvSpPr>
+            <p:cNvPr id="61" name="Plus Sign 60">
+              <a:extLst>
+                <a:ext uri="{FF2B5EF4-FFF2-40B4-BE49-F238E27FC236}">
+                  <a16:creationId xmlns:a16="http://schemas.microsoft.com/office/drawing/2014/main" id="{A549443B-F7B5-FC99-780C-727F67D028F8}"/>
+                </a:ext>
+              </a:extLst>
+            </p:cNvPr>
+            <p:cNvSpPr/>
+            <p:nvPr/>
+          </p:nvSpPr>
+          <p:spPr>
+            <a:xfrm>
+              <a:off x="1148008" y="5400970"/>
+              <a:ext cx="216000" cy="216000"/>
+            </a:xfrm>
+            <a:prstGeom prst="mathPlus">
+              <a:avLst/>
+            </a:prstGeom>
+            <a:solidFill>
+              <a:schemeClr val="bg1"/>
+            </a:solidFill>
+            <a:ln>
+              <a:noFill/>
+            </a:ln>
+          </p:spPr>
+          <p:style>
+            <a:lnRef idx="2">
+              <a:schemeClr val="accent1">
+                <a:shade val="15000"/>
+              </a:schemeClr>
+            </a:lnRef>
+            <a:fillRef idx="1">
+              <a:schemeClr val="accent1"/>
+            </a:fillRef>
+            <a:effectRef idx="0">
+              <a:schemeClr val="accent1"/>
+            </a:effectRef>
+            <a:fontRef idx="minor">
+              <a:schemeClr val="lt1"/>
+            </a:fontRef>
+          </p:style>
+          <p:txBody>
+            <a:bodyPr rtlCol="0" anchor="ctr"/>
+            <a:lstStyle/>
+            <a:p>
+              <a:pPr algn="ctr"/>
+              <a:endParaRPr lang="de-DE"/>
+            </a:p>
+          </p:txBody>
+        </p:sp>
+      </p:grpSp>
+      <p:cxnSp>
+        <p:nvCxnSpPr>
+          <p:cNvPr id="68" name="Straight Arrow Connector 67">
+            <a:extLst>
+              <a:ext uri="{FF2B5EF4-FFF2-40B4-BE49-F238E27FC236}">
+                <a16:creationId xmlns:a16="http://schemas.microsoft.com/office/drawing/2014/main" id="{7462F773-BC9E-B0C1-859B-766277B834F8}"/>
+              </a:ext>
+            </a:extLst>
+          </p:cNvPr>
+          <p:cNvCxnSpPr>
+            <a:cxnSpLocks/>
+          </p:cNvCxnSpPr>
+          <p:nvPr/>
+        </p:nvCxnSpPr>
+        <p:spPr>
+          <a:xfrm rot="-1140000">
+            <a:off x="3442465" y="6095537"/>
+            <a:ext cx="1940400" cy="0"/>
+          </a:xfrm>
+          <a:prstGeom prst="straightConnector1">
+            <a:avLst/>
+          </a:prstGeom>
+          <a:ln w="57150">
+            <a:solidFill>
+              <a:srgbClr val="FF0000"/>
+            </a:solidFill>
+            <a:tailEnd type="triangle"/>
+          </a:ln>
+        </p:spPr>
+        <p:style>
+          <a:lnRef idx="2">
+            <a:schemeClr val="accent1"/>
+          </a:lnRef>
+          <a:fillRef idx="0">
+            <a:schemeClr val="accent1"/>
+          </a:fillRef>
+          <a:effectRef idx="1">
+            <a:schemeClr val="accent1"/>
+          </a:effectRef>
+          <a:fontRef idx="minor">
+            <a:schemeClr val="tx1"/>
+          </a:fontRef>
+        </p:style>
+      </p:cxnSp>
+      <p:cxnSp>
+        <p:nvCxnSpPr>
+          <p:cNvPr id="72" name="Straight Arrow Connector 71">
+            <a:extLst>
+              <a:ext uri="{FF2B5EF4-FFF2-40B4-BE49-F238E27FC236}">
+                <a16:creationId xmlns:a16="http://schemas.microsoft.com/office/drawing/2014/main" id="{5E45FB11-F745-B5C9-EB43-9EF795ABC29A}"/>
+              </a:ext>
+            </a:extLst>
+          </p:cNvPr>
+          <p:cNvCxnSpPr>
+            <a:cxnSpLocks/>
+          </p:cNvCxnSpPr>
+          <p:nvPr/>
+        </p:nvCxnSpPr>
+        <p:spPr>
+          <a:xfrm flipV="1">
+            <a:off x="5275557" y="5749859"/>
+            <a:ext cx="0" cy="705600"/>
+          </a:xfrm>
+          <a:prstGeom prst="straightConnector1">
+            <a:avLst/>
+          </a:prstGeom>
+          <a:ln>
+            <a:solidFill>
+              <a:srgbClr val="0070C0"/>
+            </a:solidFill>
+            <a:prstDash val="dash"/>
+            <a:headEnd type="none" w="med" len="med"/>
+            <a:tailEnd type="none" w="med" len="med"/>
+          </a:ln>
+        </p:spPr>
+        <p:style>
+          <a:lnRef idx="2">
+            <a:schemeClr val="accent1"/>
+          </a:lnRef>
+          <a:fillRef idx="0">
+            <a:schemeClr val="accent1"/>
+          </a:fillRef>
+          <a:effectRef idx="1">
+            <a:schemeClr val="accent1"/>
+          </a:effectRef>
+          <a:fontRef idx="minor">
+            <a:schemeClr val="tx1"/>
+          </a:fontRef>
+        </p:style>
+      </p:cxnSp>
+      <mc:AlternateContent xmlns:mc="http://schemas.openxmlformats.org/markup-compatibility/2006" xmlns:a14="http://schemas.microsoft.com/office/drawing/2010/main">
+        <mc:Choice Requires="a14">
+          <p:sp>
+            <p:nvSpPr>
+              <p:cNvPr id="75" name="TextBox 74">
+                <a:extLst>
+                  <a:ext uri="{FF2B5EF4-FFF2-40B4-BE49-F238E27FC236}">
+                    <a16:creationId xmlns:a16="http://schemas.microsoft.com/office/drawing/2014/main" id="{9E5AD857-0654-5A78-51D5-D97AEBBBE317}"/>
+                  </a:ext>
+                </a:extLst>
+              </p:cNvPr>
+              <p:cNvSpPr txBox="1"/>
+              <p:nvPr/>
+            </p:nvSpPr>
+            <p:spPr>
+              <a:xfrm>
+                <a:off x="3970144" y="4876118"/>
+                <a:ext cx="2562578" cy="891783"/>
+              </a:xfrm>
+              <a:prstGeom prst="rect">
+                <a:avLst/>
+              </a:prstGeom>
+              <a:noFill/>
+            </p:spPr>
+            <p:txBody>
+              <a:bodyPr wrap="square" rtlCol="0">
+                <a:spAutoFit/>
+              </a:bodyPr>
+              <a:lstStyle/>
+              <a:p>
+                <a:pPr/>
+                <a14:m>
+                  <m:oMathPara xmlns:m="http://schemas.openxmlformats.org/officeDocument/2006/math">
+                    <m:oMathParaPr>
+                      <m:jc m:val="centerGroup"/>
+                    </m:oMathParaPr>
+                    <m:oMath xmlns:m="http://schemas.openxmlformats.org/officeDocument/2006/math">
+                      <m:sSub>
+                        <m:sSubPr>
+                          <m:ctrlPr>
+                            <a:rPr lang="de-DE" sz="1600" i="1" smtClean="0">
+                              <a:latin typeface="Cambria Math" panose="02040503050406030204" pitchFamily="18" charset="0"/>
+                            </a:rPr>
+                          </m:ctrlPr>
+                        </m:sSubPr>
+                        <m:e>
+                          <m:r>
+                            <m:rPr>
+                              <m:sty m:val="p"/>
+                            </m:rPr>
+                            <a:rPr lang="de-DE" sz="1600" b="0" i="1" smtClean="0">
+                              <a:latin typeface="Cambria Math" panose="02040503050406030204" pitchFamily="18" charset="0"/>
+                            </a:rPr>
+                            <m:t>I</m:t>
+                          </m:r>
+                        </m:e>
+                        <m:sub>
+                          <m:r>
+                            <m:rPr>
+                              <m:sty m:val="p"/>
+                            </m:rPr>
+                            <a:rPr lang="de-DE" sz="1600" b="0" i="1" smtClean="0">
+                              <a:latin typeface="Cambria Math" panose="02040503050406030204" pitchFamily="18" charset="0"/>
+                            </a:rPr>
+                            <m:t>z</m:t>
+                          </m:r>
+                        </m:sub>
+                      </m:sSub>
+                      <m:r>
+                        <a:rPr lang="de-DE" sz="1600" b="0" i="1" smtClean="0">
+                          <a:latin typeface="Cambria Math" panose="02040503050406030204" pitchFamily="18" charset="0"/>
+                        </a:rPr>
+                        <m:t>=0.7</m:t>
+                      </m:r>
+                      <m:r>
+                        <a:rPr lang="de-DE" sz="1600" b="0" i="1" smtClean="0">
+                          <a:latin typeface="Cambria Math" panose="02040503050406030204" pitchFamily="18" charset="0"/>
+                          <a:ea typeface="Cambria Math" panose="02040503050406030204" pitchFamily="18" charset="0"/>
+                        </a:rPr>
+                        <m:t>∙</m:t>
+                      </m:r>
+                      <m:f>
+                        <m:fPr>
+                          <m:ctrlPr>
+                            <a:rPr lang="de-DE" sz="1600" b="0" i="1" smtClean="0">
+                              <a:latin typeface="Cambria Math" panose="02040503050406030204" pitchFamily="18" charset="0"/>
+                            </a:rPr>
+                          </m:ctrlPr>
+                        </m:fPr>
+                        <m:num>
+                          <m:r>
+                            <a:rPr lang="de-DE" sz="1600" b="0" i="1" smtClean="0">
+                              <a:latin typeface="Cambria Math" panose="02040503050406030204" pitchFamily="18" charset="0"/>
+                            </a:rPr>
+                            <m:t>1</m:t>
+                          </m:r>
+                        </m:num>
+                        <m:den>
+                          <m:r>
+                            <a:rPr lang="de-DE" sz="1600" b="0" i="1" smtClean="0">
+                              <a:latin typeface="Cambria Math" panose="02040503050406030204" pitchFamily="18" charset="0"/>
+                            </a:rPr>
+                            <m:t>2</m:t>
+                          </m:r>
+                        </m:den>
+                      </m:f>
+                      <m:r>
+                        <a:rPr lang="de-DE" sz="1600" dirty="0" smtClean="0">
+                          <a:latin typeface="Cambria Math" panose="02040503050406030204" pitchFamily="18" charset="0"/>
+                        </a:rPr>
+                        <m:t>ℏ</m:t>
+                      </m:r>
+                      <m:r>
+                        <a:rPr lang="de-DE" sz="1600" b="0" i="0" dirty="0" smtClean="0">
+                          <a:latin typeface="Cambria Math" panose="02040503050406030204" pitchFamily="18" charset="0"/>
+                        </a:rPr>
+                        <m:t>+0.</m:t>
+                      </m:r>
+                      <m:r>
+                        <a:rPr lang="de-DE" sz="1600" b="0" i="1" dirty="0" smtClean="0">
+                          <a:latin typeface="Cambria Math" panose="02040503050406030204" pitchFamily="18" charset="0"/>
+                        </a:rPr>
+                        <m:t>3</m:t>
+                      </m:r>
+                      <m:r>
+                        <a:rPr lang="de-DE" sz="1600" b="0" i="1" dirty="0" smtClean="0">
+                          <a:latin typeface="Cambria Math" panose="02040503050406030204" pitchFamily="18" charset="0"/>
+                          <a:ea typeface="Cambria Math" panose="02040503050406030204" pitchFamily="18" charset="0"/>
+                        </a:rPr>
+                        <m:t>∙</m:t>
+                      </m:r>
+                      <m:d>
+                        <m:dPr>
+                          <m:ctrlPr>
+                            <a:rPr lang="de-DE" sz="1600" b="0" i="1" dirty="0" smtClean="0">
+                              <a:latin typeface="Cambria Math" panose="02040503050406030204" pitchFamily="18" charset="0"/>
+                              <a:ea typeface="Cambria Math" panose="02040503050406030204" pitchFamily="18" charset="0"/>
+                            </a:rPr>
+                          </m:ctrlPr>
+                        </m:dPr>
+                        <m:e>
+                          <m:r>
+                            <a:rPr lang="de-DE" sz="1600" b="0" i="1" dirty="0" smtClean="0">
+                              <a:latin typeface="Cambria Math" panose="02040503050406030204" pitchFamily="18" charset="0"/>
+                              <a:ea typeface="Cambria Math" panose="02040503050406030204" pitchFamily="18" charset="0"/>
+                            </a:rPr>
+                            <m:t>−</m:t>
+                          </m:r>
+                          <m:f>
+                            <m:fPr>
+                              <m:ctrlPr>
+                                <a:rPr lang="de-DE" sz="1600" i="1">
+                                  <a:latin typeface="Cambria Math" panose="02040503050406030204" pitchFamily="18" charset="0"/>
+                                </a:rPr>
+                              </m:ctrlPr>
+                            </m:fPr>
+                            <m:num>
+                              <m:r>
+                                <a:rPr lang="de-DE" sz="1600" i="1">
+                                  <a:latin typeface="Cambria Math" panose="02040503050406030204" pitchFamily="18" charset="0"/>
+                                </a:rPr>
+                                <m:t>1</m:t>
+                              </m:r>
+                            </m:num>
+                            <m:den>
+                              <m:r>
+                                <a:rPr lang="de-DE" sz="1600" i="1">
+                                  <a:latin typeface="Cambria Math" panose="02040503050406030204" pitchFamily="18" charset="0"/>
+                                </a:rPr>
+                                <m:t>2</m:t>
+                              </m:r>
+                            </m:den>
+                          </m:f>
+                          <m:r>
+                            <a:rPr lang="de-DE" sz="1600" dirty="0">
+                              <a:latin typeface="Cambria Math" panose="02040503050406030204" pitchFamily="18" charset="0"/>
+                            </a:rPr>
+                            <m:t>ℏ</m:t>
+                          </m:r>
+                        </m:e>
+                      </m:d>
+                    </m:oMath>
+                  </m:oMathPara>
+                </a14:m>
+                <a:endParaRPr lang="de-DE" sz="1600" b="0" i="0" dirty="0">
+                  <a:latin typeface="Cambria Math" panose="02040503050406030204" pitchFamily="18" charset="0"/>
+                </a:endParaRPr>
+              </a:p>
+              <a:p>
+                <a:pPr/>
+                <a14:m>
+                  <m:oMathPara xmlns:m="http://schemas.openxmlformats.org/officeDocument/2006/math">
+                    <m:oMathParaPr>
+                      <m:jc m:val="left"/>
+                    </m:oMathParaPr>
+                    <m:oMath xmlns:m="http://schemas.openxmlformats.org/officeDocument/2006/math">
+                      <m:r>
+                        <a:rPr lang="de-DE" sz="1600" b="0" i="0" dirty="0" smtClean="0">
+                          <a:latin typeface="Cambria Math" panose="02040503050406030204" pitchFamily="18" charset="0"/>
+                        </a:rPr>
+                        <m:t>      = 0.2</m:t>
+                      </m:r>
+                      <m:r>
+                        <a:rPr lang="de-DE" sz="1600" dirty="0">
+                          <a:latin typeface="Cambria Math" panose="02040503050406030204" pitchFamily="18" charset="0"/>
+                        </a:rPr>
+                        <m:t>ℏ</m:t>
+                      </m:r>
+                    </m:oMath>
+                  </m:oMathPara>
+                </a14:m>
+                <a:endParaRPr lang="de-DE" sz="1600" dirty="0"/>
+              </a:p>
+            </p:txBody>
+          </p:sp>
+        </mc:Choice>
+        <mc:Fallback xmlns="">
+          <p:sp>
+            <p:nvSpPr>
+              <p:cNvPr id="75" name="TextBox 74">
+                <a:extLst>
+                  <a:ext uri="{FF2B5EF4-FFF2-40B4-BE49-F238E27FC236}">
+                    <a16:creationId xmlns:a16="http://schemas.microsoft.com/office/drawing/2014/main" id="{9E5AD857-0654-5A78-51D5-D97AEBBBE317}"/>
+                  </a:ext>
+                </a:extLst>
+              </p:cNvPr>
+              <p:cNvSpPr txBox="1">
+                <a:spLocks noRot="1" noChangeAspect="1" noMove="1" noResize="1" noEditPoints="1" noAdjustHandles="1" noChangeArrowheads="1" noChangeShapeType="1" noTextEdit="1"/>
+              </p:cNvSpPr>
+              <p:nvPr/>
+            </p:nvSpPr>
+            <p:spPr>
+              <a:xfrm>
+                <a:off x="3970144" y="4876118"/>
+                <a:ext cx="2562578" cy="891783"/>
+              </a:xfrm>
+              <a:prstGeom prst="rect">
+                <a:avLst/>
+              </a:prstGeom>
+              <a:blipFill>
+                <a:blip r:embed="rId5"/>
+                <a:stretch>
+                  <a:fillRect/>
+                </a:stretch>
+              </a:blipFill>
+            </p:spPr>
+            <p:txBody>
+              <a:bodyPr/>
+              <a:lstStyle/>
+              <a:p>
+                <a:r>
+                  <a:rPr lang="de-DE">
+                    <a:noFill/>
+                  </a:rPr>
+                  <a:t> </a:t>
+                </a:r>
+              </a:p>
+            </p:txBody>
+          </p:sp>
+        </mc:Fallback>
+      </mc:AlternateContent>
+      <mc:AlternateContent xmlns:mc="http://schemas.openxmlformats.org/markup-compatibility/2006" xmlns:a14="http://schemas.microsoft.com/office/drawing/2010/main">
+        <mc:Choice Requires="a14">
+          <p:sp>
+            <p:nvSpPr>
+              <p:cNvPr id="77" name="TextBox 76">
+                <a:extLst>
+                  <a:ext uri="{FF2B5EF4-FFF2-40B4-BE49-F238E27FC236}">
+                    <a16:creationId xmlns:a16="http://schemas.microsoft.com/office/drawing/2014/main" id="{1D2D8DB4-1ACD-18FB-7912-975EC116F133}"/>
+                  </a:ext>
+                </a:extLst>
+              </p:cNvPr>
+              <p:cNvSpPr txBox="1"/>
+              <p:nvPr/>
+            </p:nvSpPr>
+            <p:spPr>
+              <a:xfrm>
+                <a:off x="7419551" y="2234837"/>
+                <a:ext cx="1179534" cy="553357"/>
+              </a:xfrm>
+              <a:prstGeom prst="rect">
+                <a:avLst/>
+              </a:prstGeom>
+              <a:noFill/>
+            </p:spPr>
+            <p:txBody>
+              <a:bodyPr wrap="square" rtlCol="0">
+                <a:spAutoFit/>
+              </a:bodyPr>
+              <a:lstStyle/>
+              <a:p>
+                <a:pPr/>
+                <a14:m>
+                  <m:oMathPara xmlns:m="http://schemas.openxmlformats.org/officeDocument/2006/math">
+                    <m:oMathParaPr>
+                      <m:jc m:val="centerGroup"/>
+                    </m:oMathParaPr>
+                    <m:oMath xmlns:m="http://schemas.openxmlformats.org/officeDocument/2006/math">
+                      <m:sSub>
+                        <m:sSubPr>
+                          <m:ctrlPr>
+                            <a:rPr lang="de-DE" sz="1600" i="1" smtClean="0">
+                              <a:latin typeface="Cambria Math" panose="02040503050406030204" pitchFamily="18" charset="0"/>
+                            </a:rPr>
+                          </m:ctrlPr>
+                        </m:sSubPr>
+                        <m:e>
+                          <m:r>
+                            <m:rPr>
+                              <m:sty m:val="p"/>
+                            </m:rPr>
+                            <a:rPr lang="de-DE" sz="1600" b="0" i="1" smtClean="0">
+                              <a:latin typeface="Cambria Math" panose="02040503050406030204" pitchFamily="18" charset="0"/>
+                            </a:rPr>
+                            <m:t>I</m:t>
+                          </m:r>
+                        </m:e>
+                        <m:sub>
+                          <m:r>
+                            <m:rPr>
+                              <m:sty m:val="p"/>
+                            </m:rPr>
+                            <a:rPr lang="de-DE" sz="1600" b="0" i="1" smtClean="0">
+                              <a:latin typeface="Cambria Math" panose="02040503050406030204" pitchFamily="18" charset="0"/>
+                            </a:rPr>
+                            <m:t>z</m:t>
+                          </m:r>
+                        </m:sub>
+                      </m:sSub>
+                      <m:r>
+                        <a:rPr lang="de-DE" sz="1600" b="0" i="1" smtClean="0">
+                          <a:latin typeface="Cambria Math" panose="02040503050406030204" pitchFamily="18" charset="0"/>
+                        </a:rPr>
+                        <m:t> = </m:t>
+                      </m:r>
+                      <m:f>
+                        <m:fPr>
+                          <m:ctrlPr>
+                            <a:rPr lang="de-DE" sz="1600" b="0" i="1" smtClean="0">
+                              <a:latin typeface="Cambria Math" panose="02040503050406030204" pitchFamily="18" charset="0"/>
+                            </a:rPr>
+                          </m:ctrlPr>
+                        </m:fPr>
+                        <m:num>
+                          <m:r>
+                            <a:rPr lang="de-DE" sz="1600" b="0" i="1" smtClean="0">
+                              <a:latin typeface="Cambria Math" panose="02040503050406030204" pitchFamily="18" charset="0"/>
+                            </a:rPr>
+                            <m:t>1</m:t>
+                          </m:r>
+                        </m:num>
+                        <m:den>
+                          <m:r>
+                            <a:rPr lang="de-DE" sz="1600" b="0" i="1" smtClean="0">
+                              <a:latin typeface="Cambria Math" panose="02040503050406030204" pitchFamily="18" charset="0"/>
+                            </a:rPr>
+                            <m:t>2</m:t>
+                          </m:r>
+                        </m:den>
+                      </m:f>
+                      <m:r>
+                        <a:rPr lang="de-DE" sz="1600" dirty="0" smtClean="0">
+                          <a:latin typeface="Cambria Math" panose="02040503050406030204" pitchFamily="18" charset="0"/>
+                        </a:rPr>
+                        <m:t>ℏ</m:t>
+                      </m:r>
+                    </m:oMath>
+                  </m:oMathPara>
+                </a14:m>
+                <a:endParaRPr lang="de-DE" sz="1600" dirty="0"/>
+              </a:p>
+            </p:txBody>
+          </p:sp>
+        </mc:Choice>
+        <mc:Fallback xmlns="">
+          <p:sp>
+            <p:nvSpPr>
+              <p:cNvPr id="77" name="TextBox 76">
+                <a:extLst>
+                  <a:ext uri="{FF2B5EF4-FFF2-40B4-BE49-F238E27FC236}">
+                    <a16:creationId xmlns:a16="http://schemas.microsoft.com/office/drawing/2014/main" id="{1D2D8DB4-1ACD-18FB-7912-975EC116F133}"/>
+                  </a:ext>
+                </a:extLst>
+              </p:cNvPr>
+              <p:cNvSpPr txBox="1">
+                <a:spLocks noRot="1" noChangeAspect="1" noMove="1" noResize="1" noEditPoints="1" noAdjustHandles="1" noChangeArrowheads="1" noChangeShapeType="1" noTextEdit="1"/>
+              </p:cNvSpPr>
+              <p:nvPr/>
+            </p:nvSpPr>
+            <p:spPr>
+              <a:xfrm>
+                <a:off x="7419551" y="2234837"/>
+                <a:ext cx="1179534" cy="553357"/>
+              </a:xfrm>
+              <a:prstGeom prst="rect">
+                <a:avLst/>
+              </a:prstGeom>
+              <a:blipFill>
+                <a:blip r:embed="rId6"/>
+                <a:stretch>
+                  <a:fillRect/>
+                </a:stretch>
+              </a:blipFill>
+            </p:spPr>
+            <p:txBody>
+              <a:bodyPr/>
+              <a:lstStyle/>
+              <a:p>
+                <a:r>
+                  <a:rPr lang="de-DE">
+                    <a:noFill/>
+                  </a:rPr>
+                  <a:t> </a:t>
+                </a:r>
+              </a:p>
+            </p:txBody>
+          </p:sp>
+        </mc:Fallback>
+      </mc:AlternateContent>
     </p:spTree>
     <p:extLst>
       <p:ext uri="{BB962C8B-B14F-4D97-AF65-F5344CB8AC3E}">
-        <p14:creationId xmlns:p14="http://schemas.microsoft.com/office/powerpoint/2010/main" val="1075247424"/>
+        <p14:creationId xmlns:p14="http://schemas.microsoft.com/office/powerpoint/2010/main" val="3266056892"/>
       </p:ext>
     </p:extLst>
   </p:cSld>
@@ -13278,1248 +19844,7 @@
 </p:sld>
 </file>
 
-<file path=ppt/slides/slide21.xml><?xml version="1.0" encoding="utf-8"?>
-<p:sld xmlns:a="http://schemas.openxmlformats.org/drawingml/2006/main" xmlns:r="http://schemas.openxmlformats.org/officeDocument/2006/relationships" xmlns:p="http://schemas.openxmlformats.org/presentationml/2006/main">
-  <p:cSld>
-    <p:spTree>
-      <p:nvGrpSpPr>
-        <p:cNvPr id="1" name=""/>
-        <p:cNvGrpSpPr/>
-        <p:nvPr/>
-      </p:nvGrpSpPr>
-      <p:grpSpPr>
-        <a:xfrm>
-          <a:off x="0" y="0"/>
-          <a:ext cx="0" cy="0"/>
-          <a:chOff x="0" y="0"/>
-          <a:chExt cx="0" cy="0"/>
-        </a:xfrm>
-      </p:grpSpPr>
-      <p:sp>
-        <p:nvSpPr>
-          <p:cNvPr id="16" name="Arrow: Right 15">
-            <a:extLst>
-              <a:ext uri="{FF2B5EF4-FFF2-40B4-BE49-F238E27FC236}">
-                <a16:creationId xmlns:a16="http://schemas.microsoft.com/office/drawing/2014/main" id="{C579D9EF-653C-83E1-7DAB-D2495EBEFA3A}"/>
-              </a:ext>
-            </a:extLst>
-          </p:cNvPr>
-          <p:cNvSpPr/>
-          <p:nvPr/>
-        </p:nvSpPr>
-        <p:spPr>
-          <a:xfrm>
-            <a:off x="6607425" y="3256764"/>
-            <a:ext cx="978408" cy="484632"/>
-          </a:xfrm>
-          <a:prstGeom prst="rightArrow">
-            <a:avLst/>
-          </a:prstGeom>
-        </p:spPr>
-        <p:style>
-          <a:lnRef idx="2">
-            <a:schemeClr val="accent1">
-              <a:shade val="15000"/>
-            </a:schemeClr>
-          </a:lnRef>
-          <a:fillRef idx="1">
-            <a:schemeClr val="accent1"/>
-          </a:fillRef>
-          <a:effectRef idx="0">
-            <a:schemeClr val="accent1"/>
-          </a:effectRef>
-          <a:fontRef idx="minor">
-            <a:schemeClr val="lt1"/>
-          </a:fontRef>
-        </p:style>
-        <p:txBody>
-          <a:bodyPr rtlCol="0" anchor="ctr"/>
-          <a:lstStyle/>
-          <a:p>
-            <a:pPr algn="ctr"/>
-            <a:endParaRPr lang="de-DE"/>
-          </a:p>
-        </p:txBody>
-      </p:sp>
-      <p:sp>
-        <p:nvSpPr>
-          <p:cNvPr id="26" name="TextBox 25">
-            <a:extLst>
-              <a:ext uri="{FF2B5EF4-FFF2-40B4-BE49-F238E27FC236}">
-                <a16:creationId xmlns:a16="http://schemas.microsoft.com/office/drawing/2014/main" id="{CACCDAFC-23F7-CC62-C19A-A0E2B475E3D6}"/>
-              </a:ext>
-            </a:extLst>
-          </p:cNvPr>
-          <p:cNvSpPr txBox="1"/>
-          <p:nvPr/>
-        </p:nvSpPr>
-        <p:spPr>
-          <a:xfrm>
-            <a:off x="1584533" y="1480931"/>
-            <a:ext cx="1772601" cy="461665"/>
-          </a:xfrm>
-          <a:prstGeom prst="rect">
-            <a:avLst/>
-          </a:prstGeom>
-          <a:solidFill>
-            <a:schemeClr val="bg2"/>
-          </a:solidFill>
-          <a:effectLst>
-            <a:softEdge rad="50800"/>
-          </a:effectLst>
-        </p:spPr>
-        <p:txBody>
-          <a:bodyPr wrap="none" rtlCol="0">
-            <a:spAutoFit/>
-          </a:bodyPr>
-          <a:lstStyle/>
-          <a:p>
-            <a:r>
-              <a:rPr lang="de-DE" sz="2400" dirty="0">
-                <a:latin typeface="Cambria" panose="02040503050406030204" pitchFamily="18" charset="0"/>
-                <a:ea typeface="Cambria" panose="02040503050406030204" pitchFamily="18" charset="0"/>
-              </a:rPr>
-              <a:t>abs</a:t>
-            </a:r>
-            <a:r>
-              <a:rPr lang="de-DE" sz="2400" dirty="0">
-                <a:latin typeface="+mj-lt"/>
-                <a:ea typeface="Cambria" panose="02040503050406030204" pitchFamily="18" charset="0"/>
-              </a:rPr>
-              <a:t>(</a:t>
-            </a:r>
-            <a:r>
-              <a:rPr lang="de-DE" sz="2400" dirty="0">
-                <a:latin typeface="Cambria" panose="02040503050406030204" pitchFamily="18" charset="0"/>
-                <a:ea typeface="Cambria" panose="02040503050406030204" pitchFamily="18" charset="0"/>
-              </a:rPr>
-              <a:t>kspace</a:t>
-            </a:r>
-            <a:r>
-              <a:rPr lang="de-DE" sz="2400" dirty="0">
-                <a:latin typeface="+mj-lt"/>
-                <a:ea typeface="Cambria" panose="02040503050406030204" pitchFamily="18" charset="0"/>
-              </a:rPr>
-              <a:t>)</a:t>
-            </a:r>
-          </a:p>
-        </p:txBody>
-      </p:sp>
-      <p:sp>
-        <p:nvSpPr>
-          <p:cNvPr id="27" name="TextBox 26">
-            <a:extLst>
-              <a:ext uri="{FF2B5EF4-FFF2-40B4-BE49-F238E27FC236}">
-                <a16:creationId xmlns:a16="http://schemas.microsoft.com/office/drawing/2014/main" id="{583735AA-BE72-ECDB-96E0-89E0872FB2AE}"/>
-              </a:ext>
-            </a:extLst>
-          </p:cNvPr>
-          <p:cNvSpPr txBox="1"/>
-          <p:nvPr/>
-        </p:nvSpPr>
-        <p:spPr>
-          <a:xfrm>
-            <a:off x="4326812" y="815406"/>
-            <a:ext cx="1605119" cy="461665"/>
-          </a:xfrm>
-          <a:prstGeom prst="rect">
-            <a:avLst/>
-          </a:prstGeom>
-          <a:solidFill>
-            <a:schemeClr val="bg2"/>
-          </a:solidFill>
-          <a:effectLst>
-            <a:softEdge rad="50800"/>
-          </a:effectLst>
-        </p:spPr>
-        <p:txBody>
-          <a:bodyPr wrap="none" rtlCol="0">
-            <a:spAutoFit/>
-          </a:bodyPr>
-          <a:lstStyle/>
-          <a:p>
-            <a:r>
-              <a:rPr lang="de-DE" sz="2400" dirty="0">
-                <a:latin typeface="Cambria" panose="02040503050406030204" pitchFamily="18" charset="0"/>
-                <a:ea typeface="Cambria" panose="02040503050406030204" pitchFamily="18" charset="0"/>
-              </a:rPr>
-              <a:t>Re</a:t>
-            </a:r>
-            <a:r>
-              <a:rPr lang="de-DE" sz="2400" dirty="0">
-                <a:latin typeface="+mj-lt"/>
-                <a:ea typeface="Cambria" panose="02040503050406030204" pitchFamily="18" charset="0"/>
-              </a:rPr>
-              <a:t>(</a:t>
-            </a:r>
-            <a:r>
-              <a:rPr lang="de-DE" sz="2400" dirty="0">
-                <a:latin typeface="Cambria" panose="02040503050406030204" pitchFamily="18" charset="0"/>
-                <a:ea typeface="Cambria" panose="02040503050406030204" pitchFamily="18" charset="0"/>
-              </a:rPr>
-              <a:t>kspace</a:t>
-            </a:r>
-            <a:r>
-              <a:rPr lang="de-DE" sz="2400" dirty="0">
-                <a:latin typeface="+mj-lt"/>
-                <a:ea typeface="Cambria" panose="02040503050406030204" pitchFamily="18" charset="0"/>
-              </a:rPr>
-              <a:t>)</a:t>
-            </a:r>
-          </a:p>
-        </p:txBody>
-      </p:sp>
-      <p:sp>
-        <p:nvSpPr>
-          <p:cNvPr id="28" name="TextBox 27">
-            <a:extLst>
-              <a:ext uri="{FF2B5EF4-FFF2-40B4-BE49-F238E27FC236}">
-                <a16:creationId xmlns:a16="http://schemas.microsoft.com/office/drawing/2014/main" id="{3BC38583-9D20-FFB1-D7E1-6A5466DBFCAD}"/>
-              </a:ext>
-            </a:extLst>
-          </p:cNvPr>
-          <p:cNvSpPr txBox="1"/>
-          <p:nvPr/>
-        </p:nvSpPr>
-        <p:spPr>
-          <a:xfrm>
-            <a:off x="4343669" y="3576640"/>
-            <a:ext cx="1625125" cy="461665"/>
-          </a:xfrm>
-          <a:prstGeom prst="rect">
-            <a:avLst/>
-          </a:prstGeom>
-          <a:solidFill>
-            <a:schemeClr val="bg2"/>
-          </a:solidFill>
-          <a:effectLst>
-            <a:softEdge rad="50800"/>
-          </a:effectLst>
-        </p:spPr>
-        <p:txBody>
-          <a:bodyPr wrap="none" rtlCol="0">
-            <a:spAutoFit/>
-          </a:bodyPr>
-          <a:lstStyle/>
-          <a:p>
-            <a:r>
-              <a:rPr lang="de-DE" sz="2400" dirty="0">
-                <a:latin typeface="Cambria" panose="02040503050406030204" pitchFamily="18" charset="0"/>
-                <a:ea typeface="Cambria" panose="02040503050406030204" pitchFamily="18" charset="0"/>
-              </a:rPr>
-              <a:t>Im</a:t>
-            </a:r>
-            <a:r>
-              <a:rPr lang="de-DE" sz="2400" dirty="0">
-                <a:latin typeface="+mj-lt"/>
-                <a:ea typeface="Cambria" panose="02040503050406030204" pitchFamily="18" charset="0"/>
-              </a:rPr>
-              <a:t>(</a:t>
-            </a:r>
-            <a:r>
-              <a:rPr lang="de-DE" sz="2400" dirty="0">
-                <a:latin typeface="Cambria" panose="02040503050406030204" pitchFamily="18" charset="0"/>
-                <a:ea typeface="Cambria" panose="02040503050406030204" pitchFamily="18" charset="0"/>
-              </a:rPr>
-              <a:t>kspace</a:t>
-            </a:r>
-            <a:r>
-              <a:rPr lang="de-DE" sz="2400" dirty="0">
-                <a:latin typeface="+mj-lt"/>
-                <a:ea typeface="Cambria" panose="02040503050406030204" pitchFamily="18" charset="0"/>
-              </a:rPr>
-              <a:t>)</a:t>
-            </a:r>
-          </a:p>
-        </p:txBody>
-      </p:sp>
-      <p:sp>
-        <p:nvSpPr>
-          <p:cNvPr id="30" name="TextBox 29">
-            <a:extLst>
-              <a:ext uri="{FF2B5EF4-FFF2-40B4-BE49-F238E27FC236}">
-                <a16:creationId xmlns:a16="http://schemas.microsoft.com/office/drawing/2014/main" id="{E2B7AF52-AF55-D5A3-D3E7-64C384011A7D}"/>
-              </a:ext>
-            </a:extLst>
-          </p:cNvPr>
-          <p:cNvSpPr txBox="1"/>
-          <p:nvPr/>
-        </p:nvSpPr>
-        <p:spPr>
-          <a:xfrm>
-            <a:off x="6620327" y="2919714"/>
-            <a:ext cx="716863" cy="461665"/>
-          </a:xfrm>
-          <a:prstGeom prst="rect">
-            <a:avLst/>
-          </a:prstGeom>
-          <a:solidFill>
-            <a:schemeClr val="bg2"/>
-          </a:solidFill>
-          <a:effectLst>
-            <a:softEdge rad="50800"/>
-          </a:effectLst>
-        </p:spPr>
-        <p:txBody>
-          <a:bodyPr wrap="none" rtlCol="0">
-            <a:spAutoFit/>
-          </a:bodyPr>
-          <a:lstStyle/>
-          <a:p>
-            <a:r>
-              <a:rPr lang="de-DE" sz="2400" dirty="0">
-                <a:latin typeface="Cambria" panose="02040503050406030204" pitchFamily="18" charset="0"/>
-                <a:ea typeface="Cambria" panose="02040503050406030204" pitchFamily="18" charset="0"/>
-              </a:rPr>
-              <a:t>fft</a:t>
-            </a:r>
-            <a:r>
-              <a:rPr lang="de-DE" sz="2400" dirty="0">
-                <a:latin typeface="+mj-lt"/>
-                <a:ea typeface="Cambria" panose="02040503050406030204" pitchFamily="18" charset="0"/>
-              </a:rPr>
-              <a:t>( )</a:t>
-            </a:r>
-          </a:p>
-        </p:txBody>
-      </p:sp>
-      <p:pic>
-        <p:nvPicPr>
-          <p:cNvPr id="8" name="Picture 7" descr="A grey and black squares&#10;&#10;AI-generated content may be incorrect.">
-            <a:extLst>
-              <a:ext uri="{FF2B5EF4-FFF2-40B4-BE49-F238E27FC236}">
-                <a16:creationId xmlns:a16="http://schemas.microsoft.com/office/drawing/2014/main" id="{D2DB9A23-5B83-4227-0484-3AA86D8F85EE}"/>
-              </a:ext>
-            </a:extLst>
-          </p:cNvPr>
-          <p:cNvPicPr>
-            <a:picLocks noChangeAspect="1"/>
-          </p:cNvPicPr>
-          <p:nvPr/>
-        </p:nvPicPr>
-        <p:blipFill>
-          <a:blip r:embed="rId2">
-            <a:extLst>
-              <a:ext uri="{28A0092B-C50C-407E-A947-70E740481C1C}">
-                <a14:useLocalDpi xmlns:a14="http://schemas.microsoft.com/office/drawing/2010/main" val="0"/>
-              </a:ext>
-            </a:extLst>
-          </a:blip>
-          <a:stretch>
-            <a:fillRect/>
-          </a:stretch>
-        </p:blipFill>
-        <p:spPr>
-          <a:xfrm>
-            <a:off x="4141824" y="4062720"/>
-            <a:ext cx="2034617" cy="2034617"/>
-          </a:xfrm>
-          <a:prstGeom prst="rect">
-            <a:avLst/>
-          </a:prstGeom>
-        </p:spPr>
-      </p:pic>
-      <p:pic>
-        <p:nvPicPr>
-          <p:cNvPr id="17" name="Picture 16" descr="A black and white pixelated background&#10;&#10;AI-generated content may be incorrect.">
-            <a:extLst>
-              <a:ext uri="{FF2B5EF4-FFF2-40B4-BE49-F238E27FC236}">
-                <a16:creationId xmlns:a16="http://schemas.microsoft.com/office/drawing/2014/main" id="{D56F12CD-8A7A-CB52-1791-3AD99E5B4F0A}"/>
-              </a:ext>
-            </a:extLst>
-          </p:cNvPr>
-          <p:cNvPicPr>
-            <a:picLocks noChangeAspect="1"/>
-          </p:cNvPicPr>
-          <p:nvPr/>
-        </p:nvPicPr>
-        <p:blipFill>
-          <a:blip r:embed="rId3">
-            <a:extLst>
-              <a:ext uri="{28A0092B-C50C-407E-A947-70E740481C1C}">
-                <a14:useLocalDpi xmlns:a14="http://schemas.microsoft.com/office/drawing/2010/main" val="0"/>
-              </a:ext>
-            </a:extLst>
-          </a:blip>
-          <a:stretch>
-            <a:fillRect/>
-          </a:stretch>
-        </p:blipFill>
-        <p:spPr>
-          <a:xfrm>
-            <a:off x="4112063" y="1277071"/>
-            <a:ext cx="2034616" cy="2034616"/>
-          </a:xfrm>
-          <a:prstGeom prst="rect">
-            <a:avLst/>
-          </a:prstGeom>
-        </p:spPr>
-      </p:pic>
-      <p:pic>
-        <p:nvPicPr>
-          <p:cNvPr id="42" name="Picture 41" descr="A screenshot of a cell phone&#10;&#10;AI-generated content may be incorrect.">
-            <a:extLst>
-              <a:ext uri="{FF2B5EF4-FFF2-40B4-BE49-F238E27FC236}">
-                <a16:creationId xmlns:a16="http://schemas.microsoft.com/office/drawing/2014/main" id="{A45DA63F-98B8-EA51-1A1C-846926C6AA85}"/>
-              </a:ext>
-            </a:extLst>
-          </p:cNvPr>
-          <p:cNvPicPr>
-            <a:picLocks noChangeAspect="1"/>
-          </p:cNvPicPr>
-          <p:nvPr/>
-        </p:nvPicPr>
-        <p:blipFill>
-          <a:blip r:embed="rId4">
-            <a:extLst>
-              <a:ext uri="{28A0092B-C50C-407E-A947-70E740481C1C}">
-                <a14:useLocalDpi xmlns:a14="http://schemas.microsoft.com/office/drawing/2010/main" val="0"/>
-              </a:ext>
-            </a:extLst>
-          </a:blip>
-          <a:stretch>
-            <a:fillRect/>
-          </a:stretch>
-        </p:blipFill>
-        <p:spPr>
-          <a:xfrm>
-            <a:off x="7749574" y="2006353"/>
-            <a:ext cx="3087632" cy="3602238"/>
-          </a:xfrm>
-          <a:prstGeom prst="rect">
-            <a:avLst/>
-          </a:prstGeom>
-        </p:spPr>
-      </p:pic>
-      <p:pic>
-        <p:nvPicPr>
-          <p:cNvPr id="44" name="Picture 43" descr="A black and white pixelated image&#10;&#10;AI-generated content may be incorrect.">
-            <a:extLst>
-              <a:ext uri="{FF2B5EF4-FFF2-40B4-BE49-F238E27FC236}">
-                <a16:creationId xmlns:a16="http://schemas.microsoft.com/office/drawing/2014/main" id="{712C713E-47EE-627E-5851-C8F9868A458B}"/>
-              </a:ext>
-            </a:extLst>
-          </p:cNvPr>
-          <p:cNvPicPr>
-            <a:picLocks noChangeAspect="1"/>
-          </p:cNvPicPr>
-          <p:nvPr/>
-        </p:nvPicPr>
-        <p:blipFill>
-          <a:blip r:embed="rId5">
-            <a:extLst>
-              <a:ext uri="{28A0092B-C50C-407E-A947-70E740481C1C}">
-                <a14:useLocalDpi xmlns:a14="http://schemas.microsoft.com/office/drawing/2010/main" val="0"/>
-              </a:ext>
-            </a:extLst>
-          </a:blip>
-          <a:stretch>
-            <a:fillRect/>
-          </a:stretch>
-        </p:blipFill>
-        <p:spPr>
-          <a:xfrm>
-            <a:off x="276105" y="2012369"/>
-            <a:ext cx="3503117" cy="3503117"/>
-          </a:xfrm>
-          <a:prstGeom prst="rect">
-            <a:avLst/>
-          </a:prstGeom>
-        </p:spPr>
-      </p:pic>
-    </p:spTree>
-    <p:extLst>
-      <p:ext uri="{BB962C8B-B14F-4D97-AF65-F5344CB8AC3E}">
-        <p14:creationId xmlns:p14="http://schemas.microsoft.com/office/powerpoint/2010/main" val="259855978"/>
-      </p:ext>
-    </p:extLst>
-  </p:cSld>
-  <p:clrMapOvr>
-    <a:masterClrMapping/>
-  </p:clrMapOvr>
-</p:sld>
-</file>
-
-<file path=ppt/slides/slide22.xml><?xml version="1.0" encoding="utf-8"?>
-<p:sld xmlns:a="http://schemas.openxmlformats.org/drawingml/2006/main" xmlns:r="http://schemas.openxmlformats.org/officeDocument/2006/relationships" xmlns:p="http://schemas.openxmlformats.org/presentationml/2006/main">
-  <p:cSld>
-    <p:spTree>
-      <p:nvGrpSpPr>
-        <p:cNvPr id="1" name=""/>
-        <p:cNvGrpSpPr/>
-        <p:nvPr/>
-      </p:nvGrpSpPr>
-      <p:grpSpPr>
-        <a:xfrm>
-          <a:off x="0" y="0"/>
-          <a:ext cx="0" cy="0"/>
-          <a:chOff x="0" y="0"/>
-          <a:chExt cx="0" cy="0"/>
-        </a:xfrm>
-      </p:grpSpPr>
-      <p:pic>
-        <p:nvPicPr>
-          <p:cNvPr id="45" name="Picture 44" descr="A screenshot of a computer&#10;&#10;AI-generated content may be incorrect.">
-            <a:extLst>
-              <a:ext uri="{FF2B5EF4-FFF2-40B4-BE49-F238E27FC236}">
-                <a16:creationId xmlns:a16="http://schemas.microsoft.com/office/drawing/2014/main" id="{F31CC08F-9A70-0EE5-EC5E-4498304F241E}"/>
-              </a:ext>
-            </a:extLst>
-          </p:cNvPr>
-          <p:cNvPicPr>
-            <a:picLocks noChangeAspect="1"/>
-          </p:cNvPicPr>
-          <p:nvPr/>
-        </p:nvPicPr>
-        <p:blipFill>
-          <a:blip r:embed="rId3">
-            <a:extLst>
-              <a:ext uri="{28A0092B-C50C-407E-A947-70E740481C1C}">
-                <a14:useLocalDpi xmlns:a14="http://schemas.microsoft.com/office/drawing/2010/main" val="0"/>
-              </a:ext>
-            </a:extLst>
-          </a:blip>
-          <a:stretch>
-            <a:fillRect/>
-          </a:stretch>
-        </p:blipFill>
-        <p:spPr>
-          <a:xfrm>
-            <a:off x="5247184" y="1999482"/>
-            <a:ext cx="3377355" cy="3377355"/>
-          </a:xfrm>
-          <a:prstGeom prst="rect">
-            <a:avLst/>
-          </a:prstGeom>
-        </p:spPr>
-      </p:pic>
-      <p:sp>
-        <p:nvSpPr>
-          <p:cNvPr id="10" name="Arrow: Right 9">
-            <a:extLst>
-              <a:ext uri="{FF2B5EF4-FFF2-40B4-BE49-F238E27FC236}">
-                <a16:creationId xmlns:a16="http://schemas.microsoft.com/office/drawing/2014/main" id="{7CB38E5E-1D27-E2CC-8893-A4BEB0ACF974}"/>
-              </a:ext>
-            </a:extLst>
-          </p:cNvPr>
-          <p:cNvSpPr/>
-          <p:nvPr/>
-        </p:nvSpPr>
-        <p:spPr>
-          <a:xfrm>
-            <a:off x="4245226" y="3256764"/>
-            <a:ext cx="978408" cy="484632"/>
-          </a:xfrm>
-          <a:prstGeom prst="rightArrow">
-            <a:avLst/>
-          </a:prstGeom>
-        </p:spPr>
-        <p:style>
-          <a:lnRef idx="2">
-            <a:schemeClr val="accent1">
-              <a:shade val="15000"/>
-            </a:schemeClr>
-          </a:lnRef>
-          <a:fillRef idx="1">
-            <a:schemeClr val="accent1"/>
-          </a:fillRef>
-          <a:effectRef idx="0">
-            <a:schemeClr val="accent1"/>
-          </a:effectRef>
-          <a:fontRef idx="minor">
-            <a:schemeClr val="lt1"/>
-          </a:fontRef>
-        </p:style>
-        <p:txBody>
-          <a:bodyPr rtlCol="0" anchor="ctr"/>
-          <a:lstStyle/>
-          <a:p>
-            <a:pPr algn="ctr"/>
-            <a:endParaRPr lang="de-DE"/>
-          </a:p>
-        </p:txBody>
-      </p:sp>
-      <p:sp>
-        <p:nvSpPr>
-          <p:cNvPr id="15" name="TextBox 14">
-            <a:extLst>
-              <a:ext uri="{FF2B5EF4-FFF2-40B4-BE49-F238E27FC236}">
-                <a16:creationId xmlns:a16="http://schemas.microsoft.com/office/drawing/2014/main" id="{898BD7CD-F3D1-046B-9F2A-9F150D497AA7}"/>
-              </a:ext>
-            </a:extLst>
-          </p:cNvPr>
-          <p:cNvSpPr txBox="1"/>
-          <p:nvPr/>
-        </p:nvSpPr>
-        <p:spPr>
-          <a:xfrm>
-            <a:off x="2150590" y="1537817"/>
-            <a:ext cx="1086516" cy="461665"/>
-          </a:xfrm>
-          <a:prstGeom prst="rect">
-            <a:avLst/>
-          </a:prstGeom>
-          <a:solidFill>
-            <a:schemeClr val="bg2"/>
-          </a:solidFill>
-          <a:effectLst>
-            <a:softEdge rad="50800"/>
-          </a:effectLst>
-        </p:spPr>
-        <p:txBody>
-          <a:bodyPr wrap="none" rtlCol="0">
-            <a:spAutoFit/>
-          </a:bodyPr>
-          <a:lstStyle/>
-          <a:p>
-            <a:r>
-              <a:rPr lang="de-DE" sz="2400" dirty="0">
-                <a:latin typeface="Cambria" panose="02040503050406030204" pitchFamily="18" charset="0"/>
-                <a:ea typeface="Cambria" panose="02040503050406030204" pitchFamily="18" charset="0"/>
-              </a:rPr>
-              <a:t>kspace</a:t>
-            </a:r>
-            <a:endParaRPr lang="de-DE" sz="2400" dirty="0">
-              <a:latin typeface="+mj-lt"/>
-              <a:ea typeface="Cambria" panose="02040503050406030204" pitchFamily="18" charset="0"/>
-            </a:endParaRPr>
-          </a:p>
-        </p:txBody>
-      </p:sp>
-      <p:sp>
-        <p:nvSpPr>
-          <p:cNvPr id="18" name="TextBox 17">
-            <a:extLst>
-              <a:ext uri="{FF2B5EF4-FFF2-40B4-BE49-F238E27FC236}">
-                <a16:creationId xmlns:a16="http://schemas.microsoft.com/office/drawing/2014/main" id="{AD54A680-64A3-634B-1907-89F6EE183B50}"/>
-              </a:ext>
-            </a:extLst>
-          </p:cNvPr>
-          <p:cNvSpPr txBox="1"/>
-          <p:nvPr/>
-        </p:nvSpPr>
-        <p:spPr>
-          <a:xfrm>
-            <a:off x="4258128" y="2919714"/>
-            <a:ext cx="716863" cy="461665"/>
-          </a:xfrm>
-          <a:prstGeom prst="rect">
-            <a:avLst/>
-          </a:prstGeom>
-          <a:solidFill>
-            <a:schemeClr val="bg2"/>
-          </a:solidFill>
-          <a:effectLst>
-            <a:softEdge rad="50800"/>
-          </a:effectLst>
-        </p:spPr>
-        <p:txBody>
-          <a:bodyPr wrap="none" rtlCol="0">
-            <a:spAutoFit/>
-          </a:bodyPr>
-          <a:lstStyle/>
-          <a:p>
-            <a:r>
-              <a:rPr lang="de-DE" sz="2400" dirty="0">
-                <a:latin typeface="Cambria" panose="02040503050406030204" pitchFamily="18" charset="0"/>
-                <a:ea typeface="Cambria" panose="02040503050406030204" pitchFamily="18" charset="0"/>
-              </a:rPr>
-              <a:t>fft</a:t>
-            </a:r>
-            <a:r>
-              <a:rPr lang="de-DE" sz="2400" dirty="0">
-                <a:latin typeface="+mj-lt"/>
-                <a:ea typeface="Cambria" panose="02040503050406030204" pitchFamily="18" charset="0"/>
-              </a:rPr>
-              <a:t>( )</a:t>
-            </a:r>
-          </a:p>
-        </p:txBody>
-      </p:sp>
-      <p:pic>
-        <p:nvPicPr>
-          <p:cNvPr id="5" name="Picture 4" descr="A pixelated image of a black and white square&#10;&#10;AI-generated content may be incorrect.">
-            <a:extLst>
-              <a:ext uri="{FF2B5EF4-FFF2-40B4-BE49-F238E27FC236}">
-                <a16:creationId xmlns:a16="http://schemas.microsoft.com/office/drawing/2014/main" id="{2EB070E9-3B75-C8E5-036B-7400DACD2016}"/>
-              </a:ext>
-            </a:extLst>
-          </p:cNvPr>
-          <p:cNvPicPr>
-            <a:picLocks noChangeAspect="1"/>
-          </p:cNvPicPr>
-          <p:nvPr/>
-        </p:nvPicPr>
-        <p:blipFill>
-          <a:blip r:embed="rId4">
-            <a:extLst>
-              <a:ext uri="{28A0092B-C50C-407E-A947-70E740481C1C}">
-                <a14:useLocalDpi xmlns:a14="http://schemas.microsoft.com/office/drawing/2010/main" val="0"/>
-              </a:ext>
-            </a:extLst>
-          </a:blip>
-          <a:stretch>
-            <a:fillRect/>
-          </a:stretch>
-        </p:blipFill>
-        <p:spPr>
-          <a:xfrm>
-            <a:off x="786032" y="2073396"/>
-            <a:ext cx="3336000" cy="3336000"/>
-          </a:xfrm>
-          <a:prstGeom prst="rect">
-            <a:avLst/>
-          </a:prstGeom>
-        </p:spPr>
-      </p:pic>
-    </p:spTree>
-    <p:extLst>
-      <p:ext uri="{BB962C8B-B14F-4D97-AF65-F5344CB8AC3E}">
-        <p14:creationId xmlns:p14="http://schemas.microsoft.com/office/powerpoint/2010/main" val="4241833589"/>
-      </p:ext>
-    </p:extLst>
-  </p:cSld>
-  <p:clrMapOvr>
-    <a:masterClrMapping/>
-  </p:clrMapOvr>
-</p:sld>
-</file>
-
-<file path=ppt/slides/slide23.xml><?xml version="1.0" encoding="utf-8"?>
-<p:sld xmlns:a="http://schemas.openxmlformats.org/drawingml/2006/main" xmlns:r="http://schemas.openxmlformats.org/officeDocument/2006/relationships" xmlns:p="http://schemas.openxmlformats.org/presentationml/2006/main">
-  <p:cSld>
-    <p:spTree>
-      <p:nvGrpSpPr>
-        <p:cNvPr id="1" name=""/>
-        <p:cNvGrpSpPr/>
-        <p:nvPr/>
-      </p:nvGrpSpPr>
-      <p:grpSpPr>
-        <a:xfrm>
-          <a:off x="0" y="0"/>
-          <a:ext cx="0" cy="0"/>
-          <a:chOff x="0" y="0"/>
-          <a:chExt cx="0" cy="0"/>
-        </a:xfrm>
-      </p:grpSpPr>
-      <p:pic>
-        <p:nvPicPr>
-          <p:cNvPr id="5" name="Picture 4">
-            <a:extLst>
-              <a:ext uri="{FF2B5EF4-FFF2-40B4-BE49-F238E27FC236}">
-                <a16:creationId xmlns:a16="http://schemas.microsoft.com/office/drawing/2014/main" id="{ECC95A8F-B406-6409-CA96-D1ECA141B62C}"/>
-              </a:ext>
-            </a:extLst>
-          </p:cNvPr>
-          <p:cNvPicPr>
-            <a:picLocks noChangeAspect="1"/>
-          </p:cNvPicPr>
-          <p:nvPr/>
-        </p:nvPicPr>
-        <p:blipFill>
-          <a:blip r:embed="rId2">
-            <a:extLst>
-              <a:ext uri="{28A0092B-C50C-407E-A947-70E740481C1C}">
-                <a14:useLocalDpi xmlns:a14="http://schemas.microsoft.com/office/drawing/2010/main" val="0"/>
-              </a:ext>
-            </a:extLst>
-          </a:blip>
-          <a:stretch>
-            <a:fillRect/>
-          </a:stretch>
-        </p:blipFill>
-        <p:spPr>
-          <a:xfrm>
-            <a:off x="384916" y="2006887"/>
-            <a:ext cx="2517653" cy="2517653"/>
-          </a:xfrm>
-          <a:prstGeom prst="rect">
-            <a:avLst/>
-          </a:prstGeom>
-        </p:spPr>
-      </p:pic>
-      <p:sp>
-        <p:nvSpPr>
-          <p:cNvPr id="6" name="Arrow: Right 5">
-            <a:extLst>
-              <a:ext uri="{FF2B5EF4-FFF2-40B4-BE49-F238E27FC236}">
-                <a16:creationId xmlns:a16="http://schemas.microsoft.com/office/drawing/2014/main" id="{9DA1BB52-9EAA-201C-8EE5-FADB9D25C5A2}"/>
-              </a:ext>
-            </a:extLst>
-          </p:cNvPr>
-          <p:cNvSpPr/>
-          <p:nvPr/>
-        </p:nvSpPr>
-        <p:spPr>
-          <a:xfrm>
-            <a:off x="3374368" y="3154027"/>
-            <a:ext cx="978408" cy="484632"/>
-          </a:xfrm>
-          <a:prstGeom prst="rightArrow">
-            <a:avLst/>
-          </a:prstGeom>
-        </p:spPr>
-        <p:style>
-          <a:lnRef idx="2">
-            <a:schemeClr val="accent1">
-              <a:shade val="15000"/>
-            </a:schemeClr>
-          </a:lnRef>
-          <a:fillRef idx="1">
-            <a:schemeClr val="accent1"/>
-          </a:fillRef>
-          <a:effectRef idx="0">
-            <a:schemeClr val="accent1"/>
-          </a:effectRef>
-          <a:fontRef idx="minor">
-            <a:schemeClr val="lt1"/>
-          </a:fontRef>
-        </p:style>
-        <p:txBody>
-          <a:bodyPr rtlCol="0" anchor="ctr"/>
-          <a:lstStyle/>
-          <a:p>
-            <a:pPr algn="ctr"/>
-            <a:endParaRPr lang="de-DE"/>
-          </a:p>
-        </p:txBody>
-      </p:sp>
-      <p:sp>
-        <p:nvSpPr>
-          <p:cNvPr id="7" name="TextBox 6">
-            <a:extLst>
-              <a:ext uri="{FF2B5EF4-FFF2-40B4-BE49-F238E27FC236}">
-                <a16:creationId xmlns:a16="http://schemas.microsoft.com/office/drawing/2014/main" id="{B43E0F7A-43F3-14F6-ECCF-2454BD3D8395}"/>
-              </a:ext>
-            </a:extLst>
-          </p:cNvPr>
-          <p:cNvSpPr txBox="1"/>
-          <p:nvPr/>
-        </p:nvSpPr>
-        <p:spPr>
-          <a:xfrm>
-            <a:off x="3015916" y="2692360"/>
-            <a:ext cx="1654832" cy="461665"/>
-          </a:xfrm>
-          <a:prstGeom prst="rect">
-            <a:avLst/>
-          </a:prstGeom>
-          <a:solidFill>
-            <a:schemeClr val="bg2"/>
-          </a:solidFill>
-          <a:effectLst>
-            <a:softEdge rad="50800"/>
-          </a:effectLst>
-        </p:spPr>
-        <p:txBody>
-          <a:bodyPr wrap="square" rtlCol="0">
-            <a:spAutoFit/>
-          </a:bodyPr>
-          <a:lstStyle/>
-          <a:p>
-            <a:r>
-              <a:rPr lang="de-DE" sz="2400" dirty="0">
-                <a:latin typeface="Cambria" panose="02040503050406030204" pitchFamily="18" charset="0"/>
-                <a:ea typeface="Cambria" panose="02040503050406030204" pitchFamily="18" charset="0"/>
-              </a:rPr>
-              <a:t>fft(), abs()</a:t>
-            </a:r>
-          </a:p>
-        </p:txBody>
-      </p:sp>
-      <p:sp>
-        <p:nvSpPr>
-          <p:cNvPr id="8" name="TextBox 7">
-            <a:extLst>
-              <a:ext uri="{FF2B5EF4-FFF2-40B4-BE49-F238E27FC236}">
-                <a16:creationId xmlns:a16="http://schemas.microsoft.com/office/drawing/2014/main" id="{4F35AF1C-FEE8-24A5-63E1-0A178C1E91DD}"/>
-              </a:ext>
-            </a:extLst>
-          </p:cNvPr>
-          <p:cNvSpPr txBox="1"/>
-          <p:nvPr/>
-        </p:nvSpPr>
-        <p:spPr>
-          <a:xfrm>
-            <a:off x="757441" y="1545222"/>
-            <a:ext cx="1772601" cy="461665"/>
-          </a:xfrm>
-          <a:prstGeom prst="rect">
-            <a:avLst/>
-          </a:prstGeom>
-          <a:solidFill>
-            <a:schemeClr val="bg2"/>
-          </a:solidFill>
-          <a:effectLst>
-            <a:softEdge rad="50800"/>
-          </a:effectLst>
-        </p:spPr>
-        <p:txBody>
-          <a:bodyPr wrap="none" rtlCol="0">
-            <a:spAutoFit/>
-          </a:bodyPr>
-          <a:lstStyle/>
-          <a:p>
-            <a:r>
-              <a:rPr lang="de-DE" sz="2400" dirty="0">
-                <a:latin typeface="Cambria" panose="02040503050406030204" pitchFamily="18" charset="0"/>
-                <a:ea typeface="Cambria" panose="02040503050406030204" pitchFamily="18" charset="0"/>
-              </a:rPr>
-              <a:t>abs</a:t>
-            </a:r>
-            <a:r>
-              <a:rPr lang="de-DE" sz="2400" dirty="0">
-                <a:latin typeface="+mj-lt"/>
-                <a:ea typeface="Cambria" panose="02040503050406030204" pitchFamily="18" charset="0"/>
-              </a:rPr>
-              <a:t>(</a:t>
-            </a:r>
-            <a:r>
-              <a:rPr lang="de-DE" sz="2400" dirty="0">
-                <a:latin typeface="Cambria" panose="02040503050406030204" pitchFamily="18" charset="0"/>
-                <a:ea typeface="Cambria" panose="02040503050406030204" pitchFamily="18" charset="0"/>
-              </a:rPr>
-              <a:t>kspace</a:t>
-            </a:r>
-            <a:r>
-              <a:rPr lang="de-DE" sz="2400" dirty="0">
-                <a:latin typeface="+mj-lt"/>
-                <a:ea typeface="Cambria" panose="02040503050406030204" pitchFamily="18" charset="0"/>
-              </a:rPr>
-              <a:t>)</a:t>
-            </a:r>
-          </a:p>
-        </p:txBody>
-      </p:sp>
-      <p:pic>
-        <p:nvPicPr>
-          <p:cNvPr id="9" name="Picture 8" descr="A screenshot of a cell phone&#10;&#10;AI-generated content may be incorrect.">
-            <a:extLst>
-              <a:ext uri="{FF2B5EF4-FFF2-40B4-BE49-F238E27FC236}">
-                <a16:creationId xmlns:a16="http://schemas.microsoft.com/office/drawing/2014/main" id="{9C6F7946-ABAC-C5B9-ECD3-3D88E665DE98}"/>
-              </a:ext>
-            </a:extLst>
-          </p:cNvPr>
-          <p:cNvPicPr>
-            <a:picLocks noChangeAspect="1"/>
-          </p:cNvPicPr>
-          <p:nvPr/>
-        </p:nvPicPr>
-        <p:blipFill>
-          <a:blip r:embed="rId3">
-            <a:extLst>
-              <a:ext uri="{28A0092B-C50C-407E-A947-70E740481C1C}">
-                <a14:useLocalDpi xmlns:a14="http://schemas.microsoft.com/office/drawing/2010/main" val="0"/>
-              </a:ext>
-            </a:extLst>
-          </a:blip>
-          <a:srcRect b="15782"/>
-          <a:stretch>
-            <a:fillRect/>
-          </a:stretch>
-        </p:blipFill>
-        <p:spPr>
-          <a:xfrm>
-            <a:off x="4411568" y="1924466"/>
-            <a:ext cx="2756470" cy="2708351"/>
-          </a:xfrm>
-          <a:prstGeom prst="rect">
-            <a:avLst/>
-          </a:prstGeom>
-        </p:spPr>
-      </p:pic>
-      <p:pic>
-        <p:nvPicPr>
-          <p:cNvPr id="10" name="Picture 9" descr="A black and white pixelated image&#10;&#10;AI-generated content may be incorrect.">
-            <a:extLst>
-              <a:ext uri="{FF2B5EF4-FFF2-40B4-BE49-F238E27FC236}">
-                <a16:creationId xmlns:a16="http://schemas.microsoft.com/office/drawing/2014/main" id="{B7FC1FC5-E95C-E979-5485-1933A8C938C2}"/>
-              </a:ext>
-            </a:extLst>
-          </p:cNvPr>
-          <p:cNvPicPr>
-            <a:picLocks noChangeAspect="1"/>
-          </p:cNvPicPr>
-          <p:nvPr/>
-        </p:nvPicPr>
-        <p:blipFill>
-          <a:blip r:embed="rId4">
-            <a:extLst>
-              <a:ext uri="{28A0092B-C50C-407E-A947-70E740481C1C}">
-                <a14:useLocalDpi xmlns:a14="http://schemas.microsoft.com/office/drawing/2010/main" val="0"/>
-              </a:ext>
-            </a:extLst>
-          </a:blip>
-          <a:srcRect l="19153" b="15125"/>
-          <a:stretch>
-            <a:fillRect/>
-          </a:stretch>
-        </p:blipFill>
-        <p:spPr>
-          <a:xfrm>
-            <a:off x="9049564" y="1967589"/>
-            <a:ext cx="2538727" cy="2665228"/>
-          </a:xfrm>
-          <a:prstGeom prst="rect">
-            <a:avLst/>
-          </a:prstGeom>
-        </p:spPr>
-      </p:pic>
-      <p:sp>
-        <p:nvSpPr>
-          <p:cNvPr id="11" name="Arrow: Right 10">
-            <a:extLst>
-              <a:ext uri="{FF2B5EF4-FFF2-40B4-BE49-F238E27FC236}">
-                <a16:creationId xmlns:a16="http://schemas.microsoft.com/office/drawing/2014/main" id="{11F879F3-F5A4-4E02-A962-35FDB104684D}"/>
-              </a:ext>
-            </a:extLst>
-          </p:cNvPr>
-          <p:cNvSpPr/>
-          <p:nvPr/>
-        </p:nvSpPr>
-        <p:spPr>
-          <a:xfrm>
-            <a:off x="7541006" y="3154027"/>
-            <a:ext cx="978408" cy="484632"/>
-          </a:xfrm>
-          <a:prstGeom prst="rightArrow">
-            <a:avLst/>
-          </a:prstGeom>
-        </p:spPr>
-        <p:style>
-          <a:lnRef idx="2">
-            <a:schemeClr val="accent1">
-              <a:shade val="15000"/>
-            </a:schemeClr>
-          </a:lnRef>
-          <a:fillRef idx="1">
-            <a:schemeClr val="accent1"/>
-          </a:fillRef>
-          <a:effectRef idx="0">
-            <a:schemeClr val="accent1"/>
-          </a:effectRef>
-          <a:fontRef idx="minor">
-            <a:schemeClr val="lt1"/>
-          </a:fontRef>
-        </p:style>
-        <p:txBody>
-          <a:bodyPr rtlCol="0" anchor="ctr"/>
-          <a:lstStyle/>
-          <a:p>
-            <a:pPr algn="ctr"/>
-            <a:endParaRPr lang="de-DE"/>
-          </a:p>
-        </p:txBody>
-      </p:sp>
-      <p:sp>
-        <p:nvSpPr>
-          <p:cNvPr id="13" name="TextBox 12">
-            <a:extLst>
-              <a:ext uri="{FF2B5EF4-FFF2-40B4-BE49-F238E27FC236}">
-                <a16:creationId xmlns:a16="http://schemas.microsoft.com/office/drawing/2014/main" id="{2F8DF13C-8C87-5B8D-C9D5-EE5348380FAC}"/>
-              </a:ext>
-            </a:extLst>
-          </p:cNvPr>
-          <p:cNvSpPr txBox="1"/>
-          <p:nvPr/>
-        </p:nvSpPr>
-        <p:spPr>
-          <a:xfrm>
-            <a:off x="7243683" y="2692360"/>
-            <a:ext cx="1540806" cy="461665"/>
-          </a:xfrm>
-          <a:prstGeom prst="rect">
-            <a:avLst/>
-          </a:prstGeom>
-          <a:solidFill>
-            <a:schemeClr val="bg2"/>
-          </a:solidFill>
-          <a:effectLst>
-            <a:softEdge rad="50800"/>
-          </a:effectLst>
-        </p:spPr>
-        <p:txBody>
-          <a:bodyPr wrap="none" rtlCol="0">
-            <a:spAutoFit/>
-          </a:bodyPr>
-          <a:lstStyle/>
-          <a:p>
-            <a:r>
-              <a:rPr lang="de-DE" sz="2400" dirty="0">
-                <a:latin typeface="Cambria" panose="02040503050406030204" pitchFamily="18" charset="0"/>
-                <a:ea typeface="Cambria" panose="02040503050406030204" pitchFamily="18" charset="0"/>
-              </a:rPr>
-              <a:t>fft</a:t>
-            </a:r>
-            <a:r>
-              <a:rPr lang="de-DE" sz="2400" dirty="0">
-                <a:latin typeface="+mj-lt"/>
-                <a:ea typeface="Cambria" panose="02040503050406030204" pitchFamily="18" charset="0"/>
-              </a:rPr>
-              <a:t>( )</a:t>
-            </a:r>
-            <a:r>
-              <a:rPr lang="de-DE" sz="2400" dirty="0">
-                <a:latin typeface="Cambria" panose="02040503050406030204" pitchFamily="18" charset="0"/>
-                <a:ea typeface="Cambria" panose="02040503050406030204" pitchFamily="18" charset="0"/>
-              </a:rPr>
-              <a:t>, abs</a:t>
-            </a:r>
-            <a:r>
-              <a:rPr lang="de-DE" sz="2400" dirty="0">
-                <a:ea typeface="Cambria" panose="02040503050406030204" pitchFamily="18" charset="0"/>
-              </a:rPr>
-              <a:t>( )</a:t>
-            </a:r>
-            <a:endParaRPr lang="de-DE" sz="2400" dirty="0">
-              <a:latin typeface="+mj-lt"/>
-              <a:ea typeface="Cambria" panose="02040503050406030204" pitchFamily="18" charset="0"/>
-            </a:endParaRPr>
-          </a:p>
-        </p:txBody>
-      </p:sp>
-      <p:sp>
-        <p:nvSpPr>
-          <p:cNvPr id="14" name="TextBox 13">
-            <a:extLst>
-              <a:ext uri="{FF2B5EF4-FFF2-40B4-BE49-F238E27FC236}">
-                <a16:creationId xmlns:a16="http://schemas.microsoft.com/office/drawing/2014/main" id="{4CBFD0C6-10F0-DC47-F1A0-3936EF6AD695}"/>
-              </a:ext>
-            </a:extLst>
-          </p:cNvPr>
-          <p:cNvSpPr txBox="1"/>
-          <p:nvPr/>
-        </p:nvSpPr>
-        <p:spPr>
-          <a:xfrm>
-            <a:off x="9432626" y="1545222"/>
-            <a:ext cx="1929695" cy="461665"/>
-          </a:xfrm>
-          <a:prstGeom prst="rect">
-            <a:avLst/>
-          </a:prstGeom>
-          <a:solidFill>
-            <a:schemeClr val="bg2"/>
-          </a:solidFill>
-          <a:effectLst>
-            <a:softEdge rad="50800"/>
-          </a:effectLst>
-        </p:spPr>
-        <p:txBody>
-          <a:bodyPr wrap="none" rtlCol="0">
-            <a:spAutoFit/>
-          </a:bodyPr>
-          <a:lstStyle/>
-          <a:p>
-            <a:r>
-              <a:rPr lang="de-DE" sz="2400" dirty="0">
-                <a:latin typeface="Cambria" panose="02040503050406030204" pitchFamily="18" charset="0"/>
-                <a:ea typeface="Cambria" panose="02040503050406030204" pitchFamily="18" charset="0"/>
-              </a:rPr>
-              <a:t>abs</a:t>
-            </a:r>
-            <a:r>
-              <a:rPr lang="de-DE" sz="2400" dirty="0">
-                <a:latin typeface="+mj-lt"/>
-                <a:ea typeface="Cambria" panose="02040503050406030204" pitchFamily="18" charset="0"/>
-              </a:rPr>
-              <a:t>(</a:t>
-            </a:r>
-            <a:r>
-              <a:rPr lang="de-DE" sz="2400" dirty="0">
-                <a:latin typeface="Cambria" panose="02040503050406030204" pitchFamily="18" charset="0"/>
-                <a:ea typeface="Cambria" panose="02040503050406030204" pitchFamily="18" charset="0"/>
-              </a:rPr>
-              <a:t>kspace</a:t>
-            </a:r>
-            <a:r>
-              <a:rPr lang="de-DE" sz="2400" dirty="0">
-                <a:latin typeface="+mj-lt"/>
-                <a:ea typeface="Cambria" panose="02040503050406030204" pitchFamily="18" charset="0"/>
-              </a:rPr>
-              <a:t>) ?</a:t>
-            </a:r>
-          </a:p>
-        </p:txBody>
-      </p:sp>
-      <p:sp>
-        <p:nvSpPr>
-          <p:cNvPr id="15" name="TextBox 14">
-            <a:extLst>
-              <a:ext uri="{FF2B5EF4-FFF2-40B4-BE49-F238E27FC236}">
-                <a16:creationId xmlns:a16="http://schemas.microsoft.com/office/drawing/2014/main" id="{149C3903-609B-8906-5ACD-82D7F1A07BCD}"/>
-              </a:ext>
-            </a:extLst>
-          </p:cNvPr>
-          <p:cNvSpPr txBox="1"/>
-          <p:nvPr/>
-        </p:nvSpPr>
-        <p:spPr>
-          <a:xfrm>
-            <a:off x="4915055" y="1545222"/>
-            <a:ext cx="1673856" cy="461665"/>
-          </a:xfrm>
-          <a:prstGeom prst="rect">
-            <a:avLst/>
-          </a:prstGeom>
-          <a:solidFill>
-            <a:schemeClr val="bg2"/>
-          </a:solidFill>
-          <a:effectLst>
-            <a:softEdge rad="50800"/>
-          </a:effectLst>
-        </p:spPr>
-        <p:txBody>
-          <a:bodyPr wrap="none" rtlCol="0">
-            <a:spAutoFit/>
-          </a:bodyPr>
-          <a:lstStyle/>
-          <a:p>
-            <a:r>
-              <a:rPr lang="de-DE" sz="2400" dirty="0">
-                <a:latin typeface="Cambria" panose="02040503050406030204" pitchFamily="18" charset="0"/>
-                <a:ea typeface="Cambria" panose="02040503050406030204" pitchFamily="18" charset="0"/>
-              </a:rPr>
-              <a:t>abs</a:t>
-            </a:r>
-            <a:r>
-              <a:rPr lang="de-DE" sz="2400" dirty="0">
-                <a:latin typeface="+mj-lt"/>
-                <a:ea typeface="Cambria" panose="02040503050406030204" pitchFamily="18" charset="0"/>
-              </a:rPr>
-              <a:t>(</a:t>
-            </a:r>
-            <a:r>
-              <a:rPr lang="de-DE" sz="2400" dirty="0">
-                <a:latin typeface="Cambria" panose="02040503050406030204" pitchFamily="18" charset="0"/>
-                <a:ea typeface="Cambria" panose="02040503050406030204" pitchFamily="18" charset="0"/>
-              </a:rPr>
-              <a:t>image</a:t>
-            </a:r>
-            <a:r>
-              <a:rPr lang="de-DE" sz="2400" dirty="0">
-                <a:latin typeface="+mj-lt"/>
-                <a:ea typeface="Cambria" panose="02040503050406030204" pitchFamily="18" charset="0"/>
-              </a:rPr>
-              <a:t>) </a:t>
-            </a:r>
-          </a:p>
-        </p:txBody>
-      </p:sp>
-    </p:spTree>
-    <p:extLst>
-      <p:ext uri="{BB962C8B-B14F-4D97-AF65-F5344CB8AC3E}">
-        <p14:creationId xmlns:p14="http://schemas.microsoft.com/office/powerpoint/2010/main" val="4110650371"/>
-      </p:ext>
-    </p:extLst>
-  </p:cSld>
-  <p:clrMapOvr>
-    <a:masterClrMapping/>
-  </p:clrMapOvr>
-</p:sld>
-</file>
-
-<file path=ppt/slides/slide3.xml><?xml version="1.0" encoding="utf-8"?>
+<file path=ppt/slides/slide7.xml><?xml version="1.0" encoding="utf-8"?>
 <p:sld xmlns:a="http://schemas.openxmlformats.org/drawingml/2006/main" xmlns:r="http://schemas.openxmlformats.org/officeDocument/2006/relationships" xmlns:p="http://schemas.openxmlformats.org/presentationml/2006/main">
   <p:cSld>
     <p:spTree>
@@ -15352,7 +20677,7 @@
 </p:sld>
 </file>
 
-<file path=ppt/slides/slide4.xml><?xml version="1.0" encoding="utf-8"?>
+<file path=ppt/slides/slide8.xml><?xml version="1.0" encoding="utf-8"?>
 <p:sld xmlns:a="http://schemas.openxmlformats.org/drawingml/2006/main" xmlns:r="http://schemas.openxmlformats.org/officeDocument/2006/relationships" xmlns:p="http://schemas.openxmlformats.org/presentationml/2006/main">
   <p:cSld>
     <p:spTree>
@@ -15959,7 +21284,7 @@
 </p:sld>
 </file>
 
-<file path=ppt/slides/slide5.xml><?xml version="1.0" encoding="utf-8"?>
+<file path=ppt/slides/slide9.xml><?xml version="1.0" encoding="utf-8"?>
 <p:sld xmlns:a="http://schemas.openxmlformats.org/drawingml/2006/main" xmlns:r="http://schemas.openxmlformats.org/officeDocument/2006/relationships" xmlns:p="http://schemas.openxmlformats.org/presentationml/2006/main">
   <p:cSld>
     <p:spTree>
@@ -20540,1211 +25865,6 @@
 </p:sld>
 </file>
 
-<file path=ppt/slides/slide6.xml><?xml version="1.0" encoding="utf-8"?>
-<p:sld xmlns:a="http://schemas.openxmlformats.org/drawingml/2006/main" xmlns:r="http://schemas.openxmlformats.org/officeDocument/2006/relationships" xmlns:p="http://schemas.openxmlformats.org/presentationml/2006/main">
-  <p:cSld>
-    <p:spTree>
-      <p:nvGrpSpPr>
-        <p:cNvPr id="1" name=""/>
-        <p:cNvGrpSpPr/>
-        <p:nvPr/>
-      </p:nvGrpSpPr>
-      <p:grpSpPr>
-        <a:xfrm>
-          <a:off x="0" y="0"/>
-          <a:ext cx="0" cy="0"/>
-          <a:chOff x="0" y="0"/>
-          <a:chExt cx="0" cy="0"/>
-        </a:xfrm>
-      </p:grpSpPr>
-      <p:pic>
-        <p:nvPicPr>
-          <p:cNvPr id="5" name="Picture 4" descr="A black background with a white light&#10;&#10;AI-generated content may be incorrect.">
-            <a:extLst>
-              <a:ext uri="{FF2B5EF4-FFF2-40B4-BE49-F238E27FC236}">
-                <a16:creationId xmlns:a16="http://schemas.microsoft.com/office/drawing/2014/main" id="{93A6E355-02C1-1BAE-2D5C-86076BDA8267}"/>
-              </a:ext>
-            </a:extLst>
-          </p:cNvPr>
-          <p:cNvPicPr>
-            <a:picLocks noChangeAspect="1"/>
-          </p:cNvPicPr>
-          <p:nvPr/>
-        </p:nvPicPr>
-        <p:blipFill>
-          <a:blip r:embed="rId2">
-            <a:extLst>
-              <a:ext uri="{28A0092B-C50C-407E-A947-70E740481C1C}">
-                <a14:useLocalDpi xmlns:a14="http://schemas.microsoft.com/office/drawing/2010/main" val="0"/>
-              </a:ext>
-            </a:extLst>
-          </a:blip>
-          <a:stretch>
-            <a:fillRect/>
-          </a:stretch>
-        </p:blipFill>
-        <p:spPr>
-          <a:xfrm>
-            <a:off x="1205959" y="1970314"/>
-            <a:ext cx="1440000" cy="1440000"/>
-          </a:xfrm>
-          <a:prstGeom prst="rect">
-            <a:avLst/>
-          </a:prstGeom>
-        </p:spPr>
-      </p:pic>
-      <p:pic>
-        <p:nvPicPr>
-          <p:cNvPr id="7" name="Picture 6" descr="A black background with a white light&#10;&#10;AI-generated content may be incorrect.">
-            <a:extLst>
-              <a:ext uri="{FF2B5EF4-FFF2-40B4-BE49-F238E27FC236}">
-                <a16:creationId xmlns:a16="http://schemas.microsoft.com/office/drawing/2014/main" id="{6CFE4C82-F2C0-2E08-4DF3-73210F4E6027}"/>
-              </a:ext>
-            </a:extLst>
-          </p:cNvPr>
-          <p:cNvPicPr>
-            <a:picLocks noChangeAspect="1"/>
-          </p:cNvPicPr>
-          <p:nvPr/>
-        </p:nvPicPr>
-        <p:blipFill>
-          <a:blip r:embed="rId2">
-            <a:extLst>
-              <a:ext uri="{28A0092B-C50C-407E-A947-70E740481C1C}">
-                <a14:useLocalDpi xmlns:a14="http://schemas.microsoft.com/office/drawing/2010/main" val="0"/>
-              </a:ext>
-            </a:extLst>
-          </a:blip>
-          <a:stretch>
-            <a:fillRect/>
-          </a:stretch>
-        </p:blipFill>
-        <p:spPr>
-          <a:xfrm>
-            <a:off x="1877787" y="2820906"/>
-            <a:ext cx="1440000" cy="1440000"/>
-          </a:xfrm>
-          <a:prstGeom prst="rect">
-            <a:avLst/>
-          </a:prstGeom>
-        </p:spPr>
-      </p:pic>
-      <p:sp>
-        <p:nvSpPr>
-          <p:cNvPr id="8" name="Arrow: Right 7">
-            <a:extLst>
-              <a:ext uri="{FF2B5EF4-FFF2-40B4-BE49-F238E27FC236}">
-                <a16:creationId xmlns:a16="http://schemas.microsoft.com/office/drawing/2014/main" id="{43A9AAE6-2705-6A92-10AE-995BBD2DBD35}"/>
-              </a:ext>
-            </a:extLst>
-          </p:cNvPr>
-          <p:cNvSpPr/>
-          <p:nvPr/>
-        </p:nvSpPr>
-        <p:spPr>
-          <a:xfrm>
-            <a:off x="3744641" y="2925682"/>
-            <a:ext cx="978408" cy="484632"/>
-          </a:xfrm>
-          <a:prstGeom prst="rightArrow">
-            <a:avLst/>
-          </a:prstGeom>
-        </p:spPr>
-        <p:style>
-          <a:lnRef idx="2">
-            <a:schemeClr val="accent1">
-              <a:shade val="15000"/>
-            </a:schemeClr>
-          </a:lnRef>
-          <a:fillRef idx="1">
-            <a:schemeClr val="accent1"/>
-          </a:fillRef>
-          <a:effectRef idx="0">
-            <a:schemeClr val="accent1"/>
-          </a:effectRef>
-          <a:fontRef idx="minor">
-            <a:schemeClr val="lt1"/>
-          </a:fontRef>
-        </p:style>
-        <p:txBody>
-          <a:bodyPr rtlCol="0" anchor="ctr"/>
-          <a:lstStyle/>
-          <a:p>
-            <a:pPr algn="ctr"/>
-            <a:endParaRPr lang="de-DE"/>
-          </a:p>
-        </p:txBody>
-      </p:sp>
-      <p:sp>
-        <p:nvSpPr>
-          <p:cNvPr id="9" name="TextBox 8">
-            <a:extLst>
-              <a:ext uri="{FF2B5EF4-FFF2-40B4-BE49-F238E27FC236}">
-                <a16:creationId xmlns:a16="http://schemas.microsoft.com/office/drawing/2014/main" id="{79DFAC1E-A103-83B1-E158-EEA44EE51D49}"/>
-              </a:ext>
-            </a:extLst>
-          </p:cNvPr>
-          <p:cNvSpPr txBox="1"/>
-          <p:nvPr/>
-        </p:nvSpPr>
-        <p:spPr>
-          <a:xfrm>
-            <a:off x="1793859" y="1609991"/>
-            <a:ext cx="1259512" cy="400110"/>
-          </a:xfrm>
-          <a:prstGeom prst="rect">
-            <a:avLst/>
-          </a:prstGeom>
-          <a:noFill/>
-        </p:spPr>
-        <p:txBody>
-          <a:bodyPr wrap="none" rtlCol="0">
-            <a:spAutoFit/>
-          </a:bodyPr>
-          <a:lstStyle/>
-          <a:p>
-            <a:r>
-              <a:rPr lang="de-DE" sz="2000" b="1" dirty="0"/>
-              <a:t>Raw data</a:t>
-            </a:r>
-          </a:p>
-        </p:txBody>
-      </p:sp>
-      <p:pic>
-        <p:nvPicPr>
-          <p:cNvPr id="11" name="Picture 10" descr="A close-up of a foot&#10;&#10;AI-generated content may be incorrect.">
-            <a:extLst>
-              <a:ext uri="{FF2B5EF4-FFF2-40B4-BE49-F238E27FC236}">
-                <a16:creationId xmlns:a16="http://schemas.microsoft.com/office/drawing/2014/main" id="{CBE5D9DE-A071-0393-49A2-D9E5E9DF794C}"/>
-              </a:ext>
-            </a:extLst>
-          </p:cNvPr>
-          <p:cNvPicPr>
-            <a:picLocks noChangeAspect="1"/>
-          </p:cNvPicPr>
-          <p:nvPr/>
-        </p:nvPicPr>
-        <p:blipFill>
-          <a:blip r:embed="rId3">
-            <a:extLst>
-              <a:ext uri="{28A0092B-C50C-407E-A947-70E740481C1C}">
-                <a14:useLocalDpi xmlns:a14="http://schemas.microsoft.com/office/drawing/2010/main" val="0"/>
-              </a:ext>
-            </a:extLst>
-          </a:blip>
-          <a:stretch>
-            <a:fillRect/>
-          </a:stretch>
-        </p:blipFill>
-        <p:spPr>
-          <a:xfrm>
-            <a:off x="5038778" y="1970314"/>
-            <a:ext cx="1440000" cy="1440000"/>
-          </a:xfrm>
-          <a:prstGeom prst="rect">
-            <a:avLst/>
-          </a:prstGeom>
-        </p:spPr>
-      </p:pic>
-      <p:pic>
-        <p:nvPicPr>
-          <p:cNvPr id="13" name="Picture 12" descr="A close-up of a foot x-ray&#10;&#10;AI-generated content may be incorrect.">
-            <a:extLst>
-              <a:ext uri="{FF2B5EF4-FFF2-40B4-BE49-F238E27FC236}">
-                <a16:creationId xmlns:a16="http://schemas.microsoft.com/office/drawing/2014/main" id="{FD8020C9-99D2-77D7-6C9C-BA872977E3F5}"/>
-              </a:ext>
-            </a:extLst>
-          </p:cNvPr>
-          <p:cNvPicPr>
-            <a:picLocks noChangeAspect="1"/>
-          </p:cNvPicPr>
-          <p:nvPr/>
-        </p:nvPicPr>
-        <p:blipFill>
-          <a:blip r:embed="rId4">
-            <a:extLst>
-              <a:ext uri="{28A0092B-C50C-407E-A947-70E740481C1C}">
-                <a14:useLocalDpi xmlns:a14="http://schemas.microsoft.com/office/drawing/2010/main" val="0"/>
-              </a:ext>
-            </a:extLst>
-          </a:blip>
-          <a:stretch>
-            <a:fillRect/>
-          </a:stretch>
-        </p:blipFill>
-        <p:spPr>
-          <a:xfrm>
-            <a:off x="5747658" y="2820906"/>
-            <a:ext cx="1440000" cy="1440000"/>
-          </a:xfrm>
-          <a:prstGeom prst="rect">
-            <a:avLst/>
-          </a:prstGeom>
-        </p:spPr>
-      </p:pic>
-      <p:sp>
-        <p:nvSpPr>
-          <p:cNvPr id="14" name="Arrow: Right 13">
-            <a:extLst>
-              <a:ext uri="{FF2B5EF4-FFF2-40B4-BE49-F238E27FC236}">
-                <a16:creationId xmlns:a16="http://schemas.microsoft.com/office/drawing/2014/main" id="{75357071-0953-3E01-5B9A-296165B062F4}"/>
-              </a:ext>
-            </a:extLst>
-          </p:cNvPr>
-          <p:cNvSpPr/>
-          <p:nvPr/>
-        </p:nvSpPr>
-        <p:spPr>
-          <a:xfrm>
-            <a:off x="7734953" y="2871827"/>
-            <a:ext cx="978408" cy="484632"/>
-          </a:xfrm>
-          <a:prstGeom prst="rightArrow">
-            <a:avLst/>
-          </a:prstGeom>
-        </p:spPr>
-        <p:style>
-          <a:lnRef idx="2">
-            <a:schemeClr val="accent1">
-              <a:shade val="15000"/>
-            </a:schemeClr>
-          </a:lnRef>
-          <a:fillRef idx="1">
-            <a:schemeClr val="accent1"/>
-          </a:fillRef>
-          <a:effectRef idx="0">
-            <a:schemeClr val="accent1"/>
-          </a:effectRef>
-          <a:fontRef idx="minor">
-            <a:schemeClr val="lt1"/>
-          </a:fontRef>
-        </p:style>
-        <p:txBody>
-          <a:bodyPr rtlCol="0" anchor="ctr"/>
-          <a:lstStyle/>
-          <a:p>
-            <a:pPr algn="ctr"/>
-            <a:endParaRPr lang="de-DE"/>
-          </a:p>
-        </p:txBody>
-      </p:sp>
-      <p:pic>
-        <p:nvPicPr>
-          <p:cNvPr id="16" name="Picture 15" descr="A close-up of a foot x-ray&#10;&#10;AI-generated content may be incorrect.">
-            <a:extLst>
-              <a:ext uri="{FF2B5EF4-FFF2-40B4-BE49-F238E27FC236}">
-                <a16:creationId xmlns:a16="http://schemas.microsoft.com/office/drawing/2014/main" id="{AAD01A28-4EA5-A011-7152-558BA8CCD729}"/>
-              </a:ext>
-            </a:extLst>
-          </p:cNvPr>
-          <p:cNvPicPr>
-            <a:picLocks noChangeAspect="1"/>
-          </p:cNvPicPr>
-          <p:nvPr/>
-        </p:nvPicPr>
-        <p:blipFill>
-          <a:blip r:embed="rId5">
-            <a:extLst>
-              <a:ext uri="{28A0092B-C50C-407E-A947-70E740481C1C}">
-                <a14:useLocalDpi xmlns:a14="http://schemas.microsoft.com/office/drawing/2010/main" val="0"/>
-              </a:ext>
-            </a:extLst>
-          </a:blip>
-          <a:stretch>
-            <a:fillRect/>
-          </a:stretch>
-        </p:blipFill>
-        <p:spPr>
-          <a:xfrm>
-            <a:off x="8957572" y="2034143"/>
-            <a:ext cx="2160000" cy="2160000"/>
-          </a:xfrm>
-          <a:prstGeom prst="rect">
-            <a:avLst/>
-          </a:prstGeom>
-        </p:spPr>
-      </p:pic>
-      <p:sp>
-        <p:nvSpPr>
-          <p:cNvPr id="17" name="TextBox 16">
-            <a:extLst>
-              <a:ext uri="{FF2B5EF4-FFF2-40B4-BE49-F238E27FC236}">
-                <a16:creationId xmlns:a16="http://schemas.microsoft.com/office/drawing/2014/main" id="{ED53BAF1-A167-D8A2-0CDB-AD72E265538F}"/>
-              </a:ext>
-            </a:extLst>
-          </p:cNvPr>
-          <p:cNvSpPr txBox="1"/>
-          <p:nvPr/>
-        </p:nvSpPr>
-        <p:spPr>
-          <a:xfrm>
-            <a:off x="3887663" y="2676056"/>
-            <a:ext cx="494366" cy="369332"/>
-          </a:xfrm>
-          <a:prstGeom prst="rect">
-            <a:avLst/>
-          </a:prstGeom>
-          <a:noFill/>
-        </p:spPr>
-        <p:txBody>
-          <a:bodyPr wrap="none" rtlCol="0">
-            <a:spAutoFit/>
-          </a:bodyPr>
-          <a:lstStyle/>
-          <a:p>
-            <a:r>
-              <a:rPr lang="de-DE" b="1" dirty="0"/>
-              <a:t>IFT</a:t>
-            </a:r>
-          </a:p>
-        </p:txBody>
-      </p:sp>
-      <p:sp>
-        <p:nvSpPr>
-          <p:cNvPr id="18" name="TextBox 17">
-            <a:extLst>
-              <a:ext uri="{FF2B5EF4-FFF2-40B4-BE49-F238E27FC236}">
-                <a16:creationId xmlns:a16="http://schemas.microsoft.com/office/drawing/2014/main" id="{91A697C3-F840-6886-0B47-1A18BC01244C}"/>
-              </a:ext>
-            </a:extLst>
-          </p:cNvPr>
-          <p:cNvSpPr txBox="1"/>
-          <p:nvPr/>
-        </p:nvSpPr>
-        <p:spPr>
-          <a:xfrm>
-            <a:off x="7802989" y="2676056"/>
-            <a:ext cx="635110" cy="369332"/>
-          </a:xfrm>
-          <a:prstGeom prst="rect">
-            <a:avLst/>
-          </a:prstGeom>
-          <a:noFill/>
-        </p:spPr>
-        <p:txBody>
-          <a:bodyPr wrap="none" rtlCol="0">
-            <a:spAutoFit/>
-          </a:bodyPr>
-          <a:lstStyle/>
-          <a:p>
-            <a:r>
-              <a:rPr lang="de-DE" b="1" dirty="0"/>
-              <a:t>mag</a:t>
-            </a:r>
-          </a:p>
-        </p:txBody>
-      </p:sp>
-      <p:sp>
-        <p:nvSpPr>
-          <p:cNvPr id="25" name="TextBox 24">
-            <a:extLst>
-              <a:ext uri="{FF2B5EF4-FFF2-40B4-BE49-F238E27FC236}">
-                <a16:creationId xmlns:a16="http://schemas.microsoft.com/office/drawing/2014/main" id="{85686E64-DA0C-F704-C66C-9F0BB63BCB4A}"/>
-              </a:ext>
-            </a:extLst>
-          </p:cNvPr>
-          <p:cNvSpPr txBox="1"/>
-          <p:nvPr/>
-        </p:nvSpPr>
-        <p:spPr>
-          <a:xfrm>
-            <a:off x="5193842" y="1609991"/>
-            <a:ext cx="1993816" cy="400110"/>
-          </a:xfrm>
-          <a:prstGeom prst="rect">
-            <a:avLst/>
-          </a:prstGeom>
-          <a:noFill/>
-        </p:spPr>
-        <p:txBody>
-          <a:bodyPr wrap="none" rtlCol="0">
-            <a:spAutoFit/>
-          </a:bodyPr>
-          <a:lstStyle/>
-          <a:p>
-            <a:r>
-              <a:rPr lang="de-DE" sz="2000" b="1" dirty="0"/>
-              <a:t>Complex image</a:t>
-            </a:r>
-          </a:p>
-        </p:txBody>
-      </p:sp>
-      <p:sp>
-        <p:nvSpPr>
-          <p:cNvPr id="26" name="TextBox 25">
-            <a:extLst>
-              <a:ext uri="{FF2B5EF4-FFF2-40B4-BE49-F238E27FC236}">
-                <a16:creationId xmlns:a16="http://schemas.microsoft.com/office/drawing/2014/main" id="{C80C5226-4745-1626-7796-31C474BF0A41}"/>
-              </a:ext>
-            </a:extLst>
-          </p:cNvPr>
-          <p:cNvSpPr txBox="1"/>
-          <p:nvPr/>
-        </p:nvSpPr>
-        <p:spPr>
-          <a:xfrm>
-            <a:off x="1101085" y="3345354"/>
-            <a:ext cx="445956" cy="369332"/>
-          </a:xfrm>
-          <a:prstGeom prst="rect">
-            <a:avLst/>
-          </a:prstGeom>
-          <a:noFill/>
-        </p:spPr>
-        <p:txBody>
-          <a:bodyPr wrap="none" rtlCol="0">
-            <a:spAutoFit/>
-          </a:bodyPr>
-          <a:lstStyle/>
-          <a:p>
-            <a:r>
-              <a:rPr lang="de-DE" dirty="0"/>
-              <a:t>Re</a:t>
-            </a:r>
-          </a:p>
-        </p:txBody>
-      </p:sp>
-      <p:sp>
-        <p:nvSpPr>
-          <p:cNvPr id="27" name="TextBox 26">
-            <a:extLst>
-              <a:ext uri="{FF2B5EF4-FFF2-40B4-BE49-F238E27FC236}">
-                <a16:creationId xmlns:a16="http://schemas.microsoft.com/office/drawing/2014/main" id="{21A8AE9D-8266-1742-B988-BB0D8DF2FC4D}"/>
-              </a:ext>
-            </a:extLst>
-          </p:cNvPr>
-          <p:cNvSpPr txBox="1"/>
-          <p:nvPr/>
-        </p:nvSpPr>
-        <p:spPr>
-          <a:xfrm>
-            <a:off x="1779814" y="4206476"/>
-            <a:ext cx="441146" cy="369332"/>
-          </a:xfrm>
-          <a:prstGeom prst="rect">
-            <a:avLst/>
-          </a:prstGeom>
-          <a:noFill/>
-        </p:spPr>
-        <p:txBody>
-          <a:bodyPr wrap="none" rtlCol="0">
-            <a:spAutoFit/>
-          </a:bodyPr>
-          <a:lstStyle/>
-          <a:p>
-            <a:r>
-              <a:rPr lang="de-DE" dirty="0"/>
-              <a:t>Im</a:t>
-            </a:r>
-          </a:p>
-        </p:txBody>
-      </p:sp>
-      <p:sp>
-        <p:nvSpPr>
-          <p:cNvPr id="28" name="TextBox 27">
-            <a:extLst>
-              <a:ext uri="{FF2B5EF4-FFF2-40B4-BE49-F238E27FC236}">
-                <a16:creationId xmlns:a16="http://schemas.microsoft.com/office/drawing/2014/main" id="{FE318620-F4CB-FB97-3497-95182073BE2F}"/>
-              </a:ext>
-            </a:extLst>
-          </p:cNvPr>
-          <p:cNvSpPr txBox="1"/>
-          <p:nvPr/>
-        </p:nvSpPr>
-        <p:spPr>
-          <a:xfrm>
-            <a:off x="4942725" y="3345354"/>
-            <a:ext cx="445956" cy="369332"/>
-          </a:xfrm>
-          <a:prstGeom prst="rect">
-            <a:avLst/>
-          </a:prstGeom>
-          <a:noFill/>
-        </p:spPr>
-        <p:txBody>
-          <a:bodyPr wrap="none" rtlCol="0">
-            <a:spAutoFit/>
-          </a:bodyPr>
-          <a:lstStyle/>
-          <a:p>
-            <a:r>
-              <a:rPr lang="de-DE" dirty="0"/>
-              <a:t>Re</a:t>
-            </a:r>
-          </a:p>
-        </p:txBody>
-      </p:sp>
-      <p:sp>
-        <p:nvSpPr>
-          <p:cNvPr id="29" name="TextBox 28">
-            <a:extLst>
-              <a:ext uri="{FF2B5EF4-FFF2-40B4-BE49-F238E27FC236}">
-                <a16:creationId xmlns:a16="http://schemas.microsoft.com/office/drawing/2014/main" id="{9531A174-E7DD-FBCA-7C80-519265D368DC}"/>
-              </a:ext>
-            </a:extLst>
-          </p:cNvPr>
-          <p:cNvSpPr txBox="1"/>
-          <p:nvPr/>
-        </p:nvSpPr>
-        <p:spPr>
-          <a:xfrm>
-            <a:off x="5660570" y="4206476"/>
-            <a:ext cx="441146" cy="369332"/>
-          </a:xfrm>
-          <a:prstGeom prst="rect">
-            <a:avLst/>
-          </a:prstGeom>
-          <a:noFill/>
-        </p:spPr>
-        <p:txBody>
-          <a:bodyPr wrap="none" rtlCol="0">
-            <a:spAutoFit/>
-          </a:bodyPr>
-          <a:lstStyle/>
-          <a:p>
-            <a:r>
-              <a:rPr lang="de-DE" dirty="0"/>
-              <a:t>Im</a:t>
-            </a:r>
-          </a:p>
-        </p:txBody>
-      </p:sp>
-      <p:sp>
-        <p:nvSpPr>
-          <p:cNvPr id="30" name="TextBox 29">
-            <a:extLst>
-              <a:ext uri="{FF2B5EF4-FFF2-40B4-BE49-F238E27FC236}">
-                <a16:creationId xmlns:a16="http://schemas.microsoft.com/office/drawing/2014/main" id="{861768CE-637F-159E-CC0F-F2D9DED5E520}"/>
-              </a:ext>
-            </a:extLst>
-          </p:cNvPr>
-          <p:cNvSpPr txBox="1"/>
-          <p:nvPr/>
-        </p:nvSpPr>
-        <p:spPr>
-          <a:xfrm>
-            <a:off x="9048166" y="1640769"/>
-            <a:ext cx="1978811" cy="369332"/>
-          </a:xfrm>
-          <a:prstGeom prst="rect">
-            <a:avLst/>
-          </a:prstGeom>
-          <a:noFill/>
-        </p:spPr>
-        <p:txBody>
-          <a:bodyPr wrap="none" rtlCol="0">
-            <a:spAutoFit/>
-          </a:bodyPr>
-          <a:lstStyle/>
-          <a:p>
-            <a:r>
-              <a:rPr lang="de-DE" b="1" dirty="0"/>
-              <a:t>Magnitude image</a:t>
-            </a:r>
-          </a:p>
-        </p:txBody>
-      </p:sp>
-    </p:spTree>
-    <p:extLst>
-      <p:ext uri="{BB962C8B-B14F-4D97-AF65-F5344CB8AC3E}">
-        <p14:creationId xmlns:p14="http://schemas.microsoft.com/office/powerpoint/2010/main" val="2165784931"/>
-      </p:ext>
-    </p:extLst>
-  </p:cSld>
-  <p:clrMapOvr>
-    <a:masterClrMapping/>
-  </p:clrMapOvr>
-</p:sld>
-</file>
-
-<file path=ppt/slides/slide7.xml><?xml version="1.0" encoding="utf-8"?>
-<p:sld xmlns:a="http://schemas.openxmlformats.org/drawingml/2006/main" xmlns:r="http://schemas.openxmlformats.org/officeDocument/2006/relationships" xmlns:p="http://schemas.openxmlformats.org/presentationml/2006/main">
-  <p:cSld>
-    <p:spTree>
-      <p:nvGrpSpPr>
-        <p:cNvPr id="1" name=""/>
-        <p:cNvGrpSpPr/>
-        <p:nvPr/>
-      </p:nvGrpSpPr>
-      <p:grpSpPr>
-        <a:xfrm>
-          <a:off x="0" y="0"/>
-          <a:ext cx="0" cy="0"/>
-          <a:chOff x="0" y="0"/>
-          <a:chExt cx="0" cy="0"/>
-        </a:xfrm>
-      </p:grpSpPr>
-      <p:pic>
-        <p:nvPicPr>
-          <p:cNvPr id="26" name="Picture 25" descr="A black and white square with white squares&#10;&#10;AI-generated content may be incorrect.">
-            <a:extLst>
-              <a:ext uri="{FF2B5EF4-FFF2-40B4-BE49-F238E27FC236}">
-                <a16:creationId xmlns:a16="http://schemas.microsoft.com/office/drawing/2014/main" id="{842A157A-BA58-4DD5-A82B-001B08F7F2A0}"/>
-              </a:ext>
-            </a:extLst>
-          </p:cNvPr>
-          <p:cNvPicPr>
-            <a:picLocks noChangeAspect="1"/>
-          </p:cNvPicPr>
-          <p:nvPr/>
-        </p:nvPicPr>
-        <p:blipFill>
-          <a:blip r:embed="rId2">
-            <a:extLst>
-              <a:ext uri="{28A0092B-C50C-407E-A947-70E740481C1C}">
-                <a14:useLocalDpi xmlns:a14="http://schemas.microsoft.com/office/drawing/2010/main" val="0"/>
-              </a:ext>
-            </a:extLst>
-          </a:blip>
-          <a:stretch>
-            <a:fillRect/>
-          </a:stretch>
-        </p:blipFill>
-        <p:spPr>
-          <a:xfrm>
-            <a:off x="877997" y="880731"/>
-            <a:ext cx="4073831" cy="4073831"/>
-          </a:xfrm>
-          <a:prstGeom prst="rect">
-            <a:avLst/>
-          </a:prstGeom>
-        </p:spPr>
-      </p:pic>
-      <p:pic>
-        <p:nvPicPr>
-          <p:cNvPr id="23" name="Picture 22" descr="A group of colorful lines&#10;&#10;AI-generated content may be incorrect.">
-            <a:extLst>
-              <a:ext uri="{FF2B5EF4-FFF2-40B4-BE49-F238E27FC236}">
-                <a16:creationId xmlns:a16="http://schemas.microsoft.com/office/drawing/2014/main" id="{C293442C-66B0-3A06-6D50-E1E06AD33F90}"/>
-              </a:ext>
-            </a:extLst>
-          </p:cNvPr>
-          <p:cNvPicPr>
-            <a:picLocks noChangeAspect="1"/>
-          </p:cNvPicPr>
-          <p:nvPr/>
-        </p:nvPicPr>
-        <p:blipFill>
-          <a:blip r:embed="rId3">
-            <a:extLst>
-              <a:ext uri="{28A0092B-C50C-407E-A947-70E740481C1C}">
-                <a14:useLocalDpi xmlns:a14="http://schemas.microsoft.com/office/drawing/2010/main" val="0"/>
-              </a:ext>
-            </a:extLst>
-          </a:blip>
-          <a:stretch>
-            <a:fillRect/>
-          </a:stretch>
-        </p:blipFill>
-        <p:spPr>
-          <a:xfrm>
-            <a:off x="1981757" y="1488560"/>
-            <a:ext cx="2462652" cy="2340000"/>
-          </a:xfrm>
-          <a:prstGeom prst="rect">
-            <a:avLst/>
-          </a:prstGeom>
-        </p:spPr>
-      </p:pic>
-      <p:pic>
-        <p:nvPicPr>
-          <p:cNvPr id="25" name="Picture 24" descr="A grid of white lines on a black background&#10;&#10;AI-generated content may be incorrect.">
-            <a:extLst>
-              <a:ext uri="{FF2B5EF4-FFF2-40B4-BE49-F238E27FC236}">
-                <a16:creationId xmlns:a16="http://schemas.microsoft.com/office/drawing/2014/main" id="{EFDDF97E-F3F0-784F-7C4E-683677434AA0}"/>
-              </a:ext>
-            </a:extLst>
-          </p:cNvPr>
-          <p:cNvPicPr>
-            <a:picLocks noChangeAspect="1"/>
-          </p:cNvPicPr>
-          <p:nvPr/>
-        </p:nvPicPr>
-        <p:blipFill>
-          <a:blip r:embed="rId4">
-            <a:extLst>
-              <a:ext uri="{28A0092B-C50C-407E-A947-70E740481C1C}">
-                <a14:useLocalDpi xmlns:a14="http://schemas.microsoft.com/office/drawing/2010/main" val="0"/>
-              </a:ext>
-            </a:extLst>
-          </a:blip>
-          <a:stretch>
-            <a:fillRect/>
-          </a:stretch>
-        </p:blipFill>
-        <p:spPr>
-          <a:xfrm>
-            <a:off x="5545226" y="880731"/>
-            <a:ext cx="6128502" cy="3499883"/>
-          </a:xfrm>
-          <a:prstGeom prst="rect">
-            <a:avLst/>
-          </a:prstGeom>
-        </p:spPr>
-      </p:pic>
-    </p:spTree>
-    <p:extLst>
-      <p:ext uri="{BB962C8B-B14F-4D97-AF65-F5344CB8AC3E}">
-        <p14:creationId xmlns:p14="http://schemas.microsoft.com/office/powerpoint/2010/main" val="59079012"/>
-      </p:ext>
-    </p:extLst>
-  </p:cSld>
-  <p:clrMapOvr>
-    <a:masterClrMapping/>
-  </p:clrMapOvr>
-</p:sld>
-</file>
-
-<file path=ppt/slides/slide8.xml><?xml version="1.0" encoding="utf-8"?>
-<p:sld xmlns:a="http://schemas.openxmlformats.org/drawingml/2006/main" xmlns:r="http://schemas.openxmlformats.org/officeDocument/2006/relationships" xmlns:p="http://schemas.openxmlformats.org/presentationml/2006/main">
-  <p:cSld>
-    <p:spTree>
-      <p:nvGrpSpPr>
-        <p:cNvPr id="1" name=""/>
-        <p:cNvGrpSpPr/>
-        <p:nvPr/>
-      </p:nvGrpSpPr>
-      <p:grpSpPr>
-        <a:xfrm>
-          <a:off x="0" y="0"/>
-          <a:ext cx="0" cy="0"/>
-          <a:chOff x="0" y="0"/>
-          <a:chExt cx="0" cy="0"/>
-        </a:xfrm>
-      </p:grpSpPr>
-      <p:pic>
-        <p:nvPicPr>
-          <p:cNvPr id="19" name="Picture 18" descr="A black and white square with white squares&#10;&#10;AI-generated content may be incorrect.">
-            <a:extLst>
-              <a:ext uri="{FF2B5EF4-FFF2-40B4-BE49-F238E27FC236}">
-                <a16:creationId xmlns:a16="http://schemas.microsoft.com/office/drawing/2014/main" id="{698D11A0-BEF4-F1B0-BD49-9F2A63EEA419}"/>
-              </a:ext>
-            </a:extLst>
-          </p:cNvPr>
-          <p:cNvPicPr>
-            <a:picLocks noChangeAspect="1"/>
-          </p:cNvPicPr>
-          <p:nvPr/>
-        </p:nvPicPr>
-        <p:blipFill>
-          <a:blip r:embed="rId2">
-            <a:extLst>
-              <a:ext uri="{28A0092B-C50C-407E-A947-70E740481C1C}">
-                <a14:useLocalDpi xmlns:a14="http://schemas.microsoft.com/office/drawing/2010/main" val="0"/>
-              </a:ext>
-            </a:extLst>
-          </a:blip>
-          <a:stretch>
-            <a:fillRect/>
-          </a:stretch>
-        </p:blipFill>
-        <p:spPr>
-          <a:xfrm>
-            <a:off x="877997" y="880731"/>
-            <a:ext cx="4073831" cy="4073831"/>
-          </a:xfrm>
-          <a:prstGeom prst="rect">
-            <a:avLst/>
-          </a:prstGeom>
-        </p:spPr>
-      </p:pic>
-      <p:pic>
-        <p:nvPicPr>
-          <p:cNvPr id="10" name="Picture 9" descr="A set of colorful lines&#10;&#10;AI-generated content may be incorrect.">
-            <a:extLst>
-              <a:ext uri="{FF2B5EF4-FFF2-40B4-BE49-F238E27FC236}">
-                <a16:creationId xmlns:a16="http://schemas.microsoft.com/office/drawing/2014/main" id="{0BD161C5-F288-862C-2D87-4C0D157F7523}"/>
-              </a:ext>
-            </a:extLst>
-          </p:cNvPr>
-          <p:cNvPicPr>
-            <a:picLocks/>
-          </p:cNvPicPr>
-          <p:nvPr/>
-        </p:nvPicPr>
-        <p:blipFill>
-          <a:blip r:embed="rId3">
-            <a:extLst>
-              <a:ext uri="{28A0092B-C50C-407E-A947-70E740481C1C}">
-                <a14:useLocalDpi xmlns:a14="http://schemas.microsoft.com/office/drawing/2010/main" val="0"/>
-              </a:ext>
-            </a:extLst>
-          </a:blip>
-          <a:stretch>
-            <a:fillRect/>
-          </a:stretch>
-        </p:blipFill>
-        <p:spPr>
-          <a:xfrm>
-            <a:off x="1981757" y="1488560"/>
-            <a:ext cx="2462400" cy="2340000"/>
-          </a:xfrm>
-          <a:prstGeom prst="rect">
-            <a:avLst/>
-          </a:prstGeom>
-        </p:spPr>
-      </p:pic>
-      <p:pic>
-        <p:nvPicPr>
-          <p:cNvPr id="14" name="Picture 13" descr="A grid of white lines&#10;&#10;AI-generated content may be incorrect.">
-            <a:extLst>
-              <a:ext uri="{FF2B5EF4-FFF2-40B4-BE49-F238E27FC236}">
-                <a16:creationId xmlns:a16="http://schemas.microsoft.com/office/drawing/2014/main" id="{53A35D99-B09E-9829-CD36-BE58E59BDA5F}"/>
-              </a:ext>
-            </a:extLst>
-          </p:cNvPr>
-          <p:cNvPicPr>
-            <a:picLocks noChangeAspect="1"/>
-          </p:cNvPicPr>
-          <p:nvPr/>
-        </p:nvPicPr>
-        <p:blipFill>
-          <a:blip r:embed="rId4">
-            <a:extLst>
-              <a:ext uri="{28A0092B-C50C-407E-A947-70E740481C1C}">
-                <a14:useLocalDpi xmlns:a14="http://schemas.microsoft.com/office/drawing/2010/main" val="0"/>
-              </a:ext>
-            </a:extLst>
-          </a:blip>
-          <a:stretch>
-            <a:fillRect/>
-          </a:stretch>
-        </p:blipFill>
-        <p:spPr>
-          <a:xfrm>
-            <a:off x="5546422" y="880731"/>
-            <a:ext cx="6127306" cy="3499200"/>
-          </a:xfrm>
-          <a:prstGeom prst="rect">
-            <a:avLst/>
-          </a:prstGeom>
-        </p:spPr>
-      </p:pic>
-      <p:pic>
-        <p:nvPicPr>
-          <p:cNvPr id="8" name="Picture 7" descr="A white and grey rectangle&#10;&#10;AI-generated content may be incorrect.">
-            <a:extLst>
-              <a:ext uri="{FF2B5EF4-FFF2-40B4-BE49-F238E27FC236}">
-                <a16:creationId xmlns:a16="http://schemas.microsoft.com/office/drawing/2014/main" id="{1C0E7EA2-4B39-A566-469C-13203606BFE7}"/>
-              </a:ext>
-            </a:extLst>
-          </p:cNvPr>
-          <p:cNvPicPr>
-            <a:picLocks noChangeAspect="1"/>
-          </p:cNvPicPr>
-          <p:nvPr/>
-        </p:nvPicPr>
-        <p:blipFill>
-          <a:blip r:embed="rId5">
-            <a:extLst>
-              <a:ext uri="{28A0092B-C50C-407E-A947-70E740481C1C}">
-                <a14:useLocalDpi xmlns:a14="http://schemas.microsoft.com/office/drawing/2010/main" val="0"/>
-              </a:ext>
-            </a:extLst>
-          </a:blip>
-          <a:stretch>
-            <a:fillRect/>
-          </a:stretch>
-        </p:blipFill>
-        <p:spPr>
-          <a:xfrm>
-            <a:off x="1474083" y="5075315"/>
-            <a:ext cx="3477747" cy="579625"/>
-          </a:xfrm>
-          <a:prstGeom prst="rect">
-            <a:avLst/>
-          </a:prstGeom>
-        </p:spPr>
-      </p:pic>
-      <p:sp>
-        <p:nvSpPr>
-          <p:cNvPr id="15" name="TextBox 14">
-            <a:extLst>
-              <a:ext uri="{FF2B5EF4-FFF2-40B4-BE49-F238E27FC236}">
-                <a16:creationId xmlns:a16="http://schemas.microsoft.com/office/drawing/2014/main" id="{DE3D11BA-2D5E-AC05-2974-E2FEA2B5A44E}"/>
-              </a:ext>
-            </a:extLst>
-          </p:cNvPr>
-          <p:cNvSpPr txBox="1"/>
-          <p:nvPr/>
-        </p:nvSpPr>
-        <p:spPr>
-          <a:xfrm>
-            <a:off x="64655" y="5088266"/>
-            <a:ext cx="1409427" cy="584775"/>
-          </a:xfrm>
-          <a:prstGeom prst="rect">
-            <a:avLst/>
-          </a:prstGeom>
-          <a:noFill/>
-        </p:spPr>
-        <p:txBody>
-          <a:bodyPr wrap="square" rtlCol="0">
-            <a:spAutoFit/>
-          </a:bodyPr>
-          <a:lstStyle/>
-          <a:p>
-            <a:r>
-              <a:rPr lang="de-DE" sz="1600" b="1" dirty="0"/>
-              <a:t>Signal per column</a:t>
-            </a:r>
-          </a:p>
-        </p:txBody>
-      </p:sp>
-      <p:sp>
-        <p:nvSpPr>
-          <p:cNvPr id="16" name="TextBox 15">
-            <a:extLst>
-              <a:ext uri="{FF2B5EF4-FFF2-40B4-BE49-F238E27FC236}">
-                <a16:creationId xmlns:a16="http://schemas.microsoft.com/office/drawing/2014/main" id="{376B8E71-9092-522F-C031-DF731F6D890B}"/>
-              </a:ext>
-            </a:extLst>
-          </p:cNvPr>
-          <p:cNvSpPr txBox="1"/>
-          <p:nvPr/>
-        </p:nvSpPr>
-        <p:spPr>
-          <a:xfrm>
-            <a:off x="64655" y="6078494"/>
-            <a:ext cx="1163908" cy="338554"/>
-          </a:xfrm>
-          <a:prstGeom prst="rect">
-            <a:avLst/>
-          </a:prstGeom>
-          <a:noFill/>
-        </p:spPr>
-        <p:txBody>
-          <a:bodyPr wrap="none" rtlCol="0">
-            <a:spAutoFit/>
-          </a:bodyPr>
-          <a:lstStyle/>
-          <a:p>
-            <a:r>
-              <a:rPr lang="de-DE" sz="1600" b="1" dirty="0"/>
-              <a:t>Frequency</a:t>
-            </a:r>
-          </a:p>
-        </p:txBody>
-      </p:sp>
-      <p:sp>
-        <p:nvSpPr>
-          <p:cNvPr id="17" name="Isosceles Triangle 16">
-            <a:extLst>
-              <a:ext uri="{FF2B5EF4-FFF2-40B4-BE49-F238E27FC236}">
-                <a16:creationId xmlns:a16="http://schemas.microsoft.com/office/drawing/2014/main" id="{D782DB54-93F4-8FE9-BFDF-A7387B98CE0A}"/>
-              </a:ext>
-            </a:extLst>
-          </p:cNvPr>
-          <p:cNvSpPr/>
-          <p:nvPr/>
-        </p:nvSpPr>
-        <p:spPr>
-          <a:xfrm>
-            <a:off x="1474082" y="5837423"/>
-            <a:ext cx="3477747" cy="579625"/>
-          </a:xfrm>
-          <a:prstGeom prst="triangle">
-            <a:avLst>
-              <a:gd name="adj" fmla="val 100000"/>
-            </a:avLst>
-          </a:prstGeom>
-          <a:solidFill>
-            <a:schemeClr val="accent1">
-              <a:lumMod val="75000"/>
-            </a:schemeClr>
-          </a:solidFill>
-          <a:ln>
-            <a:noFill/>
-          </a:ln>
-        </p:spPr>
-        <p:style>
-          <a:lnRef idx="2">
-            <a:schemeClr val="accent1">
-              <a:shade val="15000"/>
-            </a:schemeClr>
-          </a:lnRef>
-          <a:fillRef idx="1">
-            <a:schemeClr val="accent1"/>
-          </a:fillRef>
-          <a:effectRef idx="0">
-            <a:schemeClr val="accent1"/>
-          </a:effectRef>
-          <a:fontRef idx="minor">
-            <a:schemeClr val="lt1"/>
-          </a:fontRef>
-        </p:style>
-        <p:txBody>
-          <a:bodyPr rtlCol="0" anchor="ctr"/>
-          <a:lstStyle/>
-          <a:p>
-            <a:pPr algn="ctr"/>
-            <a:endParaRPr lang="de-DE">
-              <a:solidFill>
-                <a:schemeClr val="accent1"/>
-              </a:solidFill>
-            </a:endParaRPr>
-          </a:p>
-        </p:txBody>
-      </p:sp>
-      <p:pic>
-        <p:nvPicPr>
-          <p:cNvPr id="21" name="Picture 20" descr="A green and blue waves&#10;&#10;AI-generated content may be incorrect.">
-            <a:extLst>
-              <a:ext uri="{FF2B5EF4-FFF2-40B4-BE49-F238E27FC236}">
-                <a16:creationId xmlns:a16="http://schemas.microsoft.com/office/drawing/2014/main" id="{FDBB9D4A-5FA9-1BCA-76E1-F18E7C599391}"/>
-              </a:ext>
-            </a:extLst>
-          </p:cNvPr>
-          <p:cNvPicPr>
-            <a:picLocks noChangeAspect="1"/>
-          </p:cNvPicPr>
-          <p:nvPr/>
-        </p:nvPicPr>
-        <p:blipFill>
-          <a:blip r:embed="rId6">
-            <a:extLst>
-              <a:ext uri="{28A0092B-C50C-407E-A947-70E740481C1C}">
-                <a14:useLocalDpi xmlns:a14="http://schemas.microsoft.com/office/drawing/2010/main" val="0"/>
-              </a:ext>
-            </a:extLst>
-          </a:blip>
-          <a:stretch>
-            <a:fillRect/>
-          </a:stretch>
-        </p:blipFill>
-        <p:spPr>
-          <a:xfrm>
-            <a:off x="1981757" y="5071254"/>
-            <a:ext cx="2464356" cy="615600"/>
-          </a:xfrm>
-          <a:prstGeom prst="rect">
-            <a:avLst/>
-          </a:prstGeom>
-        </p:spPr>
-      </p:pic>
-    </p:spTree>
-    <p:extLst>
-      <p:ext uri="{BB962C8B-B14F-4D97-AF65-F5344CB8AC3E}">
-        <p14:creationId xmlns:p14="http://schemas.microsoft.com/office/powerpoint/2010/main" val="202062624"/>
-      </p:ext>
-    </p:extLst>
-  </p:cSld>
-  <p:clrMapOvr>
-    <a:masterClrMapping/>
-  </p:clrMapOvr>
-</p:sld>
-</file>
-
-<file path=ppt/slides/slide9.xml><?xml version="1.0" encoding="utf-8"?>
-<p:sld xmlns:a="http://schemas.openxmlformats.org/drawingml/2006/main" xmlns:r="http://schemas.openxmlformats.org/officeDocument/2006/relationships" xmlns:p="http://schemas.openxmlformats.org/presentationml/2006/main">
-  <p:cSld>
-    <p:spTree>
-      <p:nvGrpSpPr>
-        <p:cNvPr id="1" name=""/>
-        <p:cNvGrpSpPr/>
-        <p:nvPr/>
-      </p:nvGrpSpPr>
-      <p:grpSpPr>
-        <a:xfrm>
-          <a:off x="0" y="0"/>
-          <a:ext cx="0" cy="0"/>
-          <a:chOff x="0" y="0"/>
-          <a:chExt cx="0" cy="0"/>
-        </a:xfrm>
-      </p:grpSpPr>
-      <p:pic>
-        <p:nvPicPr>
-          <p:cNvPr id="5" name="Picture 4">
-            <a:extLst>
-              <a:ext uri="{FF2B5EF4-FFF2-40B4-BE49-F238E27FC236}">
-                <a16:creationId xmlns:a16="http://schemas.microsoft.com/office/drawing/2014/main" id="{A3E4A659-5D1B-706A-DC62-8F2D2C29851A}"/>
-              </a:ext>
-            </a:extLst>
-          </p:cNvPr>
-          <p:cNvPicPr>
-            <a:picLocks noChangeAspect="1"/>
-          </p:cNvPicPr>
-          <p:nvPr/>
-        </p:nvPicPr>
-        <p:blipFill>
-          <a:blip r:embed="rId2">
-            <a:extLst>
-              <a:ext uri="{28A0092B-C50C-407E-A947-70E740481C1C}">
-                <a14:useLocalDpi xmlns:a14="http://schemas.microsoft.com/office/drawing/2010/main" val="0"/>
-              </a:ext>
-            </a:extLst>
-          </a:blip>
-          <a:stretch>
-            <a:fillRect/>
-          </a:stretch>
-        </p:blipFill>
-        <p:spPr>
-          <a:xfrm>
-            <a:off x="1921921" y="2406317"/>
-            <a:ext cx="7218626" cy="721252"/>
-          </a:xfrm>
-          <a:prstGeom prst="rect">
-            <a:avLst/>
-          </a:prstGeom>
-        </p:spPr>
-      </p:pic>
-      <p:sp>
-        <p:nvSpPr>
-          <p:cNvPr id="6" name="TextBox 5">
-            <a:extLst>
-              <a:ext uri="{FF2B5EF4-FFF2-40B4-BE49-F238E27FC236}">
-                <a16:creationId xmlns:a16="http://schemas.microsoft.com/office/drawing/2014/main" id="{28227EFF-7FFF-E8AE-D227-4A52BCB87FAE}"/>
-              </a:ext>
-            </a:extLst>
-          </p:cNvPr>
-          <p:cNvSpPr txBox="1"/>
-          <p:nvPr/>
-        </p:nvSpPr>
-        <p:spPr>
-          <a:xfrm>
-            <a:off x="2502568" y="3429000"/>
-            <a:ext cx="5422231" cy="1569660"/>
-          </a:xfrm>
-          <a:prstGeom prst="rect">
-            <a:avLst/>
-          </a:prstGeom>
-          <a:noFill/>
-        </p:spPr>
-        <p:txBody>
-          <a:bodyPr wrap="square" rtlCol="0">
-            <a:spAutoFit/>
-          </a:bodyPr>
-          <a:lstStyle/>
-          <a:p>
-            <a:r>
-              <a:rPr lang="de-DE" sz="3200" dirty="0"/>
-              <a:t>Bin: 1 2 3 4 5 6 7 8 9 10</a:t>
-            </a:r>
-          </a:p>
-          <a:p>
-            <a:r>
-              <a:rPr lang="de-DE" sz="3200" dirty="0"/>
-              <a:t>Freq: 0 1 2 3 4 5 -4 -3 -2 -1</a:t>
-            </a:r>
-          </a:p>
-          <a:p>
-            <a:endParaRPr lang="de-DE" sz="3200" dirty="0"/>
-          </a:p>
-        </p:txBody>
-      </p:sp>
-    </p:spTree>
-    <p:extLst>
-      <p:ext uri="{BB962C8B-B14F-4D97-AF65-F5344CB8AC3E}">
-        <p14:creationId xmlns:p14="http://schemas.microsoft.com/office/powerpoint/2010/main" val="612585257"/>
-      </p:ext>
-    </p:extLst>
-  </p:cSld>
-  <p:clrMapOvr>
-    <a:masterClrMapping/>
-  </p:clrMapOvr>
-</p:sld>
-</file>
-
 <file path=ppt/theme/theme1.xml><?xml version="1.0" encoding="utf-8"?>
 <a:theme xmlns:a="http://schemas.openxmlformats.org/drawingml/2006/main" name="Office Theme">
   <a:themeElements>
